--- a/ENTREGABLES/Presentacion_Rosa_Pastel_Metodos_Numericos.pptx
+++ b/ENTREGABLES/Presentacion_Rosa_Pastel_Metodos_Numericos.pptx
@@ -14,6 +14,7 @@
     <p:sldId id="268" r:id="rId19"/>
     <p:sldId id="262" r:id="rId13"/>
     <p:sldId id="263" r:id="rId14"/>
+    <p:sldId id="270" r:id="rId21"/>
     <p:sldId id="269" r:id="rId20"/>
     <p:sldId id="264" r:id="rId15"/>
     <p:sldId id="265" r:id="rId16"/>
@@ -4318,7 +4319,7 @@
                 </a:solidFill>
                 <a:latin typeface="Plus Jakarta Sans"/>
               </a:rPr>
-              <a:t>Permite anticipar requerimientos de streaming y tráfico de red en picos virales.</a:t>
+              <a:t>Pico de 205 Mbps a 160 kbps y 372 TB transferidos al llegar a 100 M de streams.</a:t>
             </a:r>
           </a:p>
         </p:txBody>
@@ -6146,6 +6147,395 @@
                 <a:latin typeface="Plus Jakarta Sans"/>
               </a:rPr>
               <a:t>Derivada del modelo</a:t>
+            </a:r>
+          </a:p>
+        </p:txBody>
+      </p:sp>
+    </p:spTree>
+  </p:cSld>
+  <p:clrMapOvr>
+    <a:masterClrMapping/>
+  </p:clrMapOvr>
+</p:sld>
+</file>
+
+<file path=ppt/slides/slide15.xml><?xml version="1.0" encoding="utf-8"?>
+<p:sld xmlns:a="http://schemas.openxmlformats.org/drawingml/2006/main" xmlns:p="http://schemas.openxmlformats.org/presentationml/2006/main" xmlns:r="http://schemas.openxmlformats.org/officeDocument/2006/relationships">
+  <p:cSld>
+    <p:bg>
+      <p:bgPr>
+        <a:solidFill>
+          <a:srgbClr val="FFFFFF"/>
+        </a:solidFill>
+        <a:effectLst/>
+      </p:bgPr>
+    </p:bg>
+    <p:spTree>
+      <p:nvGrpSpPr>
+        <p:cNvPr id="1" name=""/>
+        <p:cNvGrpSpPr/>
+        <p:nvPr/>
+      </p:nvGrpSpPr>
+      <p:grpSpPr/>
+      <p:sp>
+        <p:nvSpPr>
+          <p:cNvPr id="2" name="Rounded Rectangle 1"/>
+          <p:cNvSpPr/>
+          <p:nvPr/>
+        </p:nvSpPr>
+        <p:spPr>
+          <a:xfrm>
+            <a:off x="609600" y="5895975"/>
+            <a:ext cx="5334000" cy="504825"/>
+          </a:xfrm>
+          <a:prstGeom prst="roundRect">
+            <a:avLst>
+              <a:gd name="adj" fmla="val 22641"/>
+            </a:avLst>
+          </a:prstGeom>
+          <a:solidFill>
+            <a:srgbClr val="F3E8FF"/>
+          </a:solidFill>
+          <a:ln>
+            <a:noFill/>
+          </a:ln>
+          <a:effectLst/>
+        </p:spPr>
+        <p:style>
+          <a:lnRef idx="1">
+            <a:schemeClr val="accent1"/>
+          </a:lnRef>
+          <a:fillRef idx="3">
+            <a:schemeClr val="accent1"/>
+          </a:fillRef>
+          <a:effectRef idx="2">
+            <a:schemeClr val="accent1"/>
+          </a:effectRef>
+          <a:fontRef idx="minor">
+            <a:schemeClr val="lt1"/>
+          </a:fontRef>
+        </p:style>
+        <p:txBody>
+          <a:bodyPr rtlCol="0" anchor="ctr"/>
+          <a:lstStyle/>
+          <a:p>
+            <a:pPr algn="ctr"/>
+          </a:p>
+        </p:txBody>
+      </p:sp>
+      <p:sp>
+        <p:nvSpPr>
+          <p:cNvPr id="3" name="Rounded Rectangle 2"/>
+          <p:cNvSpPr/>
+          <p:nvPr/>
+        </p:nvSpPr>
+        <p:spPr>
+          <a:xfrm>
+            <a:off x="6248400" y="5895975"/>
+            <a:ext cx="5334000" cy="504825"/>
+          </a:xfrm>
+          <a:prstGeom prst="roundRect">
+            <a:avLst>
+              <a:gd name="adj" fmla="val 22641"/>
+            </a:avLst>
+          </a:prstGeom>
+          <a:solidFill>
+            <a:srgbClr val="FEE2E2"/>
+          </a:solidFill>
+          <a:ln>
+            <a:noFill/>
+          </a:ln>
+          <a:effectLst/>
+        </p:spPr>
+        <p:style>
+          <a:lnRef idx="1">
+            <a:schemeClr val="accent1"/>
+          </a:lnRef>
+          <a:fillRef idx="3">
+            <a:schemeClr val="accent1"/>
+          </a:fillRef>
+          <a:effectRef idx="2">
+            <a:schemeClr val="accent1"/>
+          </a:effectRef>
+          <a:fontRef idx="minor">
+            <a:schemeClr val="lt1"/>
+          </a:fontRef>
+        </p:style>
+        <p:txBody>
+          <a:bodyPr rtlCol="0" anchor="ctr"/>
+          <a:lstStyle/>
+          <a:p>
+            <a:pPr algn="ctr"/>
+          </a:p>
+        </p:txBody>
+      </p:sp>
+      <p:pic>
+        <p:nvPicPr>
+          <p:cNvPr id="4" name="Picture 3" descr="image.png"/>
+          <p:cNvPicPr>
+            <a:picLocks noChangeAspect="1"/>
+          </p:cNvPicPr>
+          <p:nvPr/>
+        </p:nvPicPr>
+        <p:blipFill>
+          <a:blip r:embed="rId2"/>
+          <a:stretch>
+            <a:fillRect/>
+          </a:stretch>
+        </p:blipFill>
+        <p:spPr>
+          <a:xfrm>
+            <a:off x="914400" y="2065883"/>
+            <a:ext cx="10363200" cy="2857500"/>
+          </a:xfrm>
+          <a:prstGeom prst="rect">
+            <a:avLst/>
+          </a:prstGeom>
+        </p:spPr>
+      </p:pic>
+      <p:sp>
+        <p:nvSpPr>
+          <p:cNvPr id="5" name="TextBox 4"/>
+          <p:cNvSpPr txBox="1"/>
+          <p:nvPr/>
+        </p:nvSpPr>
+        <p:spPr>
+          <a:xfrm>
+            <a:off x="609600" y="457200"/>
+            <a:ext cx="8548687" cy="171450"/>
+          </a:xfrm>
+          <a:prstGeom prst="rect">
+            <a:avLst/>
+          </a:prstGeom>
+          <a:noFill/>
+        </p:spPr>
+        <p:txBody>
+          <a:bodyPr wrap="none" lIns="0" rIns="0" tIns="0" bIns="0" anchor="t">
+            <a:spAutoFit/>
+          </a:bodyPr>
+          <a:lstStyle/>
+          <a:p>
+            <a:pPr algn="l"/>
+            <a:r>
+              <a:rPr b="1" sz="1050" i="0" u="none">
+                <a:solidFill>
+                  <a:srgbClr val="7C3AED"/>
+                </a:solidFill>
+                <a:latin typeface="Plus Jakarta Sans"/>
+              </a:rPr>
+              <a:t>APLICACIÓN DE INGENIERÍA</a:t>
+            </a:r>
+          </a:p>
+        </p:txBody>
+      </p:sp>
+      <p:sp>
+        <p:nvSpPr>
+          <p:cNvPr id="6" name="TextBox 5"/>
+          <p:cNvSpPr txBox="1"/>
+          <p:nvPr/>
+        </p:nvSpPr>
+        <p:spPr>
+          <a:xfrm>
+            <a:off x="609600" y="666750"/>
+            <a:ext cx="8976121" cy="388590"/>
+          </a:xfrm>
+          <a:prstGeom prst="rect">
+            <a:avLst/>
+          </a:prstGeom>
+          <a:noFill/>
+        </p:spPr>
+        <p:txBody>
+          <a:bodyPr wrap="none" lIns="0" rIns="0" tIns="0" bIns="0" anchor="t">
+            <a:spAutoFit/>
+          </a:bodyPr>
+          <a:lstStyle/>
+          <a:p>
+            <a:pPr algn="l">
+              <a:lnSpc>
+                <a:spcPts val="3060"/>
+              </a:lnSpc>
+            </a:pPr>
+            <a:r>
+              <a:rPr b="1" sz="2550" i="0" u="none">
+                <a:solidFill>
+                  <a:srgbClr val="0F172A"/>
+                </a:solidFill>
+                <a:latin typeface="Space Grotesk"/>
+              </a:rPr>
+              <a:t>Dimensionamiento: Ancho de Banda y Capacidad</a:t>
+            </a:r>
+          </a:p>
+        </p:txBody>
+      </p:sp>
+      <p:sp>
+        <p:nvSpPr>
+          <p:cNvPr id="7" name="TextBox 6"/>
+          <p:cNvSpPr txBox="1"/>
+          <p:nvPr/>
+        </p:nvSpPr>
+        <p:spPr>
+          <a:xfrm>
+            <a:off x="800100" y="6048375"/>
+            <a:ext cx="6191250" cy="200025"/>
+          </a:xfrm>
+          <a:prstGeom prst="rect">
+            <a:avLst/>
+          </a:prstGeom>
+          <a:noFill/>
+        </p:spPr>
+        <p:txBody>
+          <a:bodyPr wrap="none" lIns="0" rIns="0" tIns="0" bIns="0" anchor="t">
+            <a:spAutoFit/>
+          </a:bodyPr>
+          <a:lstStyle/>
+          <a:p>
+            <a:pPr algn="l"/>
+            <a:r>
+              <a:rPr b="1" sz="1200" i="0" u="none">
+                <a:solidFill>
+                  <a:srgbClr val="6B21A8"/>
+                </a:solidFill>
+                <a:latin typeface="Plus Jakarta Sans"/>
+              </a:rPr>
+              <a:t>Pico medido: 205 Mbps (410 en hora pico). Modelo: 169 Mbps.</a:t>
+            </a:r>
+          </a:p>
+        </p:txBody>
+      </p:sp>
+      <p:sp>
+        <p:nvSpPr>
+          <p:cNvPr id="8" name="TextBox 7"/>
+          <p:cNvSpPr txBox="1"/>
+          <p:nvPr/>
+        </p:nvSpPr>
+        <p:spPr>
+          <a:xfrm>
+            <a:off x="6438900" y="6048375"/>
+            <a:ext cx="5753100" cy="200025"/>
+          </a:xfrm>
+          <a:prstGeom prst="rect">
+            <a:avLst/>
+          </a:prstGeom>
+          <a:noFill/>
+        </p:spPr>
+        <p:txBody>
+          <a:bodyPr wrap="none" lIns="0" rIns="0" tIns="0" bIns="0" anchor="t">
+            <a:spAutoFit/>
+          </a:bodyPr>
+          <a:lstStyle/>
+          <a:p>
+            <a:pPr algn="l"/>
+            <a:r>
+              <a:rPr b="1" sz="1200" i="0" u="none">
+                <a:solidFill>
+                  <a:srgbClr val="991B1B"/>
+                </a:solidFill>
+                <a:latin typeface="Plus Jakarta Sans"/>
+              </a:rPr>
+              <a:t>S'(t) = C con Bisección y Newton: del 2/06 al 23/11/2023.</a:t>
+            </a:r>
+          </a:p>
+        </p:txBody>
+      </p:sp>
+      <p:sp>
+        <p:nvSpPr>
+          <p:cNvPr id="9" name="TextBox 8"/>
+          <p:cNvSpPr txBox="1"/>
+          <p:nvPr/>
+        </p:nvSpPr>
+        <p:spPr>
+          <a:xfrm>
+            <a:off x="612648" y="1207008"/>
+            <a:ext cx="2770632" cy="171450"/>
+          </a:xfrm>
+          <a:prstGeom prst="rect">
+            <a:avLst/>
+          </a:prstGeom>
+          <a:noFill/>
+        </p:spPr>
+        <p:txBody>
+          <a:bodyPr wrap="none" lIns="0" rIns="0" tIns="0" bIns="0" anchor="t">
+            <a:spAutoFit/>
+          </a:bodyPr>
+          <a:lstStyle/>
+          <a:p>
+            <a:pPr algn="l"/>
+            <a:r>
+              <a:rPr b="1" sz="1050" i="0" u="none">
+                <a:solidFill>
+                  <a:srgbClr val="8B5CF6"/>
+                </a:solidFill>
+                <a:latin typeface="Plus Jakarta Sans"/>
+              </a:rPr>
+              <a:t>Ancho de banda medido (160 kbps)</a:t>
+            </a:r>
+          </a:p>
+        </p:txBody>
+      </p:sp>
+      <p:sp>
+        <p:nvSpPr>
+          <p:cNvPr id="10" name="TextBox 9"/>
+          <p:cNvSpPr txBox="1"/>
+          <p:nvPr/>
+        </p:nvSpPr>
+        <p:spPr>
+          <a:xfrm>
+            <a:off x="3703320" y="1207008"/>
+            <a:ext cx="1865376" cy="171450"/>
+          </a:xfrm>
+          <a:prstGeom prst="rect">
+            <a:avLst/>
+          </a:prstGeom>
+          <a:noFill/>
+        </p:spPr>
+        <p:txBody>
+          <a:bodyPr wrap="none" lIns="0" rIns="0" tIns="0" bIns="0" anchor="t">
+            <a:spAutoFit/>
+          </a:bodyPr>
+          <a:lstStyle/>
+          <a:p>
+            <a:pPr algn="l"/>
+            <a:r>
+              <a:rPr b="1" sz="1050" i="0" u="none">
+                <a:solidFill>
+                  <a:srgbClr val="6D28D9"/>
+                </a:solidFill>
+                <a:latin typeface="Plus Jakarta Sans"/>
+              </a:rPr>
+              <a:t>Modelo: S'(t) en Mbps</a:t>
+            </a:r>
+          </a:p>
+        </p:txBody>
+      </p:sp>
+      <p:sp>
+        <p:nvSpPr>
+          <p:cNvPr id="42" name="Supuestos"/>
+          <p:cNvSpPr txBox="1"/>
+          <p:nvPr/>
+        </p:nvSpPr>
+        <p:spPr>
+          <a:xfrm>
+            <a:off x="612648" y="5029200"/>
+            <a:ext cx="10972800" cy="548640"/>
+          </a:xfrm>
+          <a:prstGeom prst="rect">
+            <a:avLst/>
+          </a:prstGeom>
+          <a:noFill/>
+        </p:spPr>
+        <p:txBody>
+          <a:bodyPr wrap="square" lIns="0" rIns="0" tIns="0" bIns="0" anchor="t"/>
+          <a:lstStyle/>
+          <a:p>
+            <a:pPr algn="l"/>
+            <a:r>
+              <a:rPr b="0" sz="1200" i="0" u="none">
+                <a:solidFill>
+                  <a:srgbClr val="475569"/>
+                </a:solidFill>
+                <a:latin typeface="Plus Jakarta Sans"/>
+              </a:rPr>
+              <a:t>Supuestos: reproducción de 3:06 a 160 kbps (rango de 96 a 320 kbps), hora pico igual a 2 veces el promedio semanal y sin descontar las reproducciones guardadas en el dispositivo. Son órdenes de magnitud, no datos de Spotify. A 160 kbps, 100 M de reproducciones equivalen a unos 372 TB transferidos.</a:t>
             </a:r>
           </a:p>
         </p:txBody>

--- a/ENTREGABLES/Presentacion_Rosa_Pastel_Metodos_Numericos.pptx
+++ b/ENTREGABLES/Presentacion_Rosa_Pastel_Metodos_Numericos.pptx
@@ -3438,7 +3438,7 @@
                 </a:solidFill>
                 <a:latin typeface="Plus Jakarta Sans"/>
               </a:rPr>
-              <a:t>EQUIPO DE INVESTIGACIÓN</a:t>
+              <a:t>INTEGRANTES</a:t>
             </a:r>
           </a:p>
         </p:txBody>
@@ -3582,16 +3582,16 @@
         </p:nvSpPr>
         <p:spPr>
           <a:xfrm>
-            <a:off x="609600" y="1379190"/>
-            <a:ext cx="3454449" cy="1266825"/>
+            <a:off x="609600" y="5895975"/>
+            <a:ext cx="5334000" cy="504825"/>
           </a:xfrm>
           <a:prstGeom prst="roundRect">
             <a:avLst>
-              <a:gd name="adj" fmla="val 12030"/>
+              <a:gd name="adj" fmla="val 22641"/>
             </a:avLst>
           </a:prstGeom>
           <a:solidFill>
-            <a:srgbClr val="FFF1F2"/>
+            <a:srgbClr val="F3E8FF"/>
           </a:solidFill>
           <a:ln>
             <a:noFill/>
@@ -3628,16 +3628,16 @@
         </p:nvSpPr>
         <p:spPr>
           <a:xfrm>
-            <a:off x="4368849" y="1379190"/>
-            <a:ext cx="3454449" cy="1266825"/>
+            <a:off x="6248400" y="5895975"/>
+            <a:ext cx="5334000" cy="504825"/>
           </a:xfrm>
           <a:prstGeom prst="roundRect">
             <a:avLst>
-              <a:gd name="adj" fmla="val 12030"/>
+              <a:gd name="adj" fmla="val 22641"/>
             </a:avLst>
           </a:prstGeom>
           <a:solidFill>
-            <a:srgbClr val="F0F9FF"/>
+            <a:srgbClr val="FEE2E2"/>
           </a:solidFill>
           <a:ln>
             <a:noFill/>
@@ -3666,238 +3666,40 @@
           </a:p>
         </p:txBody>
       </p:sp>
-      <p:sp>
-        <p:nvSpPr>
-          <p:cNvPr id="4" name="Rounded Rectangle 3"/>
-          <p:cNvSpPr/>
-          <p:nvPr/>
-        </p:nvSpPr>
-        <p:spPr>
-          <a:xfrm>
-            <a:off x="8128099" y="1379190"/>
-            <a:ext cx="3454449" cy="1266825"/>
-          </a:xfrm>
-          <a:prstGeom prst="roundRect">
-            <a:avLst>
-              <a:gd name="adj" fmla="val 12030"/>
-            </a:avLst>
-          </a:prstGeom>
-          <a:solidFill>
-            <a:srgbClr val="F0FDF4"/>
-          </a:solidFill>
-          <a:ln>
-            <a:noFill/>
-          </a:ln>
-          <a:effectLst/>
-        </p:spPr>
-        <p:style>
-          <a:lnRef idx="1">
-            <a:schemeClr val="accent1"/>
-          </a:lnRef>
-          <a:fillRef idx="3">
-            <a:schemeClr val="accent1"/>
-          </a:fillRef>
-          <a:effectRef idx="2">
-            <a:schemeClr val="accent1"/>
-          </a:effectRef>
-          <a:fontRef idx="minor">
-            <a:schemeClr val="lt1"/>
-          </a:fontRef>
-        </p:style>
-        <p:txBody>
-          <a:bodyPr rtlCol="0" anchor="ctr"/>
-          <a:lstStyle/>
-          <a:p>
-            <a:pPr algn="ctr"/>
-          </a:p>
-        </p:txBody>
-      </p:sp>
-      <p:sp>
-        <p:nvSpPr>
-          <p:cNvPr id="5" name="Rectangle 4"/>
-          <p:cNvSpPr/>
-          <p:nvPr/>
-        </p:nvSpPr>
-        <p:spPr>
-          <a:xfrm>
-            <a:off x="609600" y="4137570"/>
-            <a:ext cx="5372100" cy="1076325"/>
-          </a:xfrm>
-          <a:prstGeom prst="rect">
-            <a:avLst/>
-          </a:prstGeom>
-          <a:solidFill>
-            <a:srgbClr val="F8FAFC"/>
-          </a:solidFill>
-          <a:ln>
-            <a:noFill/>
-          </a:ln>
-          <a:effectLst/>
-        </p:spPr>
-        <p:style>
-          <a:lnRef idx="1">
-            <a:schemeClr val="accent1"/>
-          </a:lnRef>
-          <a:fillRef idx="3">
-            <a:schemeClr val="accent1"/>
-          </a:fillRef>
-          <a:effectRef idx="2">
-            <a:schemeClr val="accent1"/>
-          </a:effectRef>
-          <a:fontRef idx="minor">
-            <a:schemeClr val="lt1"/>
-          </a:fontRef>
-        </p:style>
-        <p:txBody>
-          <a:bodyPr rtlCol="0" anchor="ctr"/>
-          <a:lstStyle/>
-          <a:p>
-            <a:pPr algn="ctr"/>
-          </a:p>
-        </p:txBody>
-      </p:sp>
-      <p:sp>
-        <p:nvSpPr>
-          <p:cNvPr id="6" name="Rectangle 5"/>
-          <p:cNvSpPr/>
-          <p:nvPr/>
-        </p:nvSpPr>
-        <p:spPr>
-          <a:xfrm>
-            <a:off x="6210300" y="4137570"/>
-            <a:ext cx="5372100" cy="1076325"/>
-          </a:xfrm>
-          <a:prstGeom prst="rect">
-            <a:avLst/>
-          </a:prstGeom>
-          <a:solidFill>
-            <a:srgbClr val="F8FAFC"/>
-          </a:solidFill>
-          <a:ln>
-            <a:noFill/>
-          </a:ln>
-          <a:effectLst/>
-        </p:spPr>
-        <p:style>
-          <a:lnRef idx="1">
-            <a:schemeClr val="accent1"/>
-          </a:lnRef>
-          <a:fillRef idx="3">
-            <a:schemeClr val="accent1"/>
-          </a:fillRef>
-          <a:effectRef idx="2">
-            <a:schemeClr val="accent1"/>
-          </a:effectRef>
-          <a:fontRef idx="minor">
-            <a:schemeClr val="lt1"/>
-          </a:fontRef>
-        </p:style>
-        <p:txBody>
-          <a:bodyPr rtlCol="0" anchor="ctr"/>
-          <a:lstStyle/>
-          <a:p>
-            <a:pPr algn="ctr"/>
-          </a:p>
-        </p:txBody>
-      </p:sp>
-      <p:sp>
-        <p:nvSpPr>
-          <p:cNvPr id="7" name="Rectangle 6"/>
-          <p:cNvSpPr/>
-          <p:nvPr/>
-        </p:nvSpPr>
-        <p:spPr>
-          <a:xfrm>
-            <a:off x="609600" y="4137570"/>
-            <a:ext cx="38100" cy="1076325"/>
-          </a:xfrm>
-          <a:prstGeom prst="rect">
-            <a:avLst/>
-          </a:prstGeom>
-          <a:solidFill>
-            <a:srgbClr val="E11D48"/>
-          </a:solidFill>
-          <a:ln>
-            <a:noFill/>
-          </a:ln>
-          <a:effectLst/>
-        </p:spPr>
-        <p:style>
-          <a:lnRef idx="1">
-            <a:schemeClr val="accent1"/>
-          </a:lnRef>
-          <a:fillRef idx="3">
-            <a:schemeClr val="accent1"/>
-          </a:fillRef>
-          <a:effectRef idx="2">
-            <a:schemeClr val="accent1"/>
-          </a:effectRef>
-          <a:fontRef idx="minor">
-            <a:schemeClr val="lt1"/>
-          </a:fontRef>
-        </p:style>
-        <p:txBody>
-          <a:bodyPr rtlCol="0" anchor="ctr"/>
-          <a:lstStyle/>
-          <a:p>
-            <a:pPr algn="ctr"/>
-          </a:p>
-        </p:txBody>
-      </p:sp>
-      <p:sp>
-        <p:nvSpPr>
-          <p:cNvPr id="8" name="Rectangle 7"/>
-          <p:cNvSpPr/>
-          <p:nvPr/>
-        </p:nvSpPr>
-        <p:spPr>
-          <a:xfrm>
-            <a:off x="6210300" y="4137570"/>
-            <a:ext cx="38100" cy="1076325"/>
-          </a:xfrm>
-          <a:prstGeom prst="rect">
-            <a:avLst/>
-          </a:prstGeom>
-          <a:solidFill>
-            <a:srgbClr val="0284C7"/>
-          </a:solidFill>
-          <a:ln>
-            <a:noFill/>
-          </a:ln>
-          <a:effectLst/>
-        </p:spPr>
-        <p:style>
-          <a:lnRef idx="1">
-            <a:schemeClr val="accent1"/>
-          </a:lnRef>
-          <a:fillRef idx="3">
-            <a:schemeClr val="accent1"/>
-          </a:fillRef>
-          <a:effectRef idx="2">
-            <a:schemeClr val="accent1"/>
-          </a:effectRef>
-          <a:fontRef idx="minor">
-            <a:schemeClr val="lt1"/>
-          </a:fontRef>
-        </p:style>
-        <p:txBody>
-          <a:bodyPr rtlCol="0" anchor="ctr"/>
-          <a:lstStyle/>
-          <a:p>
-            <a:pPr algn="ctr"/>
-          </a:p>
-        </p:txBody>
-      </p:sp>
-      <p:sp>
-        <p:nvSpPr>
-          <p:cNvPr id="9" name="TextBox 8"/>
+      <p:pic>
+        <p:nvPicPr>
+          <p:cNvPr id="4" name="Picture 3" descr="image.png"/>
+          <p:cNvPicPr>
+            <a:picLocks noChangeAspect="1"/>
+          </p:cNvPicPr>
+          <p:nvPr/>
+        </p:nvPicPr>
+        <p:blipFill>
+          <a:blip r:embed="rId2"/>
+          <a:stretch>
+            <a:fillRect/>
+          </a:stretch>
+        </p:blipFill>
+        <p:spPr>
+          <a:xfrm>
+            <a:off x="914400" y="2065883"/>
+            <a:ext cx="10363200" cy="2857500"/>
+          </a:xfrm>
+          <a:prstGeom prst="rect">
+            <a:avLst/>
+          </a:prstGeom>
+        </p:spPr>
+      </p:pic>
+      <p:sp>
+        <p:nvSpPr>
+          <p:cNvPr id="5" name="TextBox 4"/>
           <p:cNvSpPr txBox="1"/>
           <p:nvPr/>
         </p:nvSpPr>
         <p:spPr>
           <a:xfrm>
             <a:off x="609600" y="457200"/>
-            <a:ext cx="11582400" cy="171450"/>
+            <a:ext cx="8548687" cy="171450"/>
           </a:xfrm>
           <a:prstGeom prst="rect">
             <a:avLst/>
@@ -3914,25 +3716,25 @@
             <a:r>
               <a:rPr b="1" sz="1050" i="0" u="none">
                 <a:solidFill>
-                  <a:srgbClr val="E11D48"/>
+                  <a:srgbClr val="7C3AED"/>
                 </a:solidFill>
                 <a:latin typeface="Plus Jakarta Sans"/>
               </a:rPr>
-              <a:t>SÍNTESIS DEL PROYECTO</a:t>
-            </a:r>
-          </a:p>
-        </p:txBody>
-      </p:sp>
-      <p:sp>
-        <p:nvSpPr>
-          <p:cNvPr id="10" name="TextBox 9"/>
-          <p:cNvSpPr txBox="1"/>
-          <p:nvPr/>
-        </p:nvSpPr>
-        <p:spPr>
-          <a:xfrm>
-            <a:off x="609600" y="685800"/>
-            <a:ext cx="11582400" cy="388590"/>
+              <a:t>APLICACIÓN DE INGENIERÍA</a:t>
+            </a:r>
+          </a:p>
+        </p:txBody>
+      </p:sp>
+      <p:sp>
+        <p:nvSpPr>
+          <p:cNvPr id="6" name="TextBox 5"/>
+          <p:cNvSpPr txBox="1"/>
+          <p:nvPr/>
+        </p:nvSpPr>
+        <p:spPr>
+          <a:xfrm>
+            <a:off x="609600" y="666750"/>
+            <a:ext cx="8976121" cy="388590"/>
           </a:xfrm>
           <a:prstGeom prst="rect">
             <a:avLst/>
@@ -3957,21 +3759,21 @@
                 </a:solidFill>
                 <a:latin typeface="Space Grotesk"/>
               </a:rPr>
-              <a:t>Conclusiones y Aportes a la Ingeniería</a:t>
-            </a:r>
-          </a:p>
-        </p:txBody>
-      </p:sp>
-      <p:sp>
-        <p:nvSpPr>
-          <p:cNvPr id="11" name="TextBox 10"/>
-          <p:cNvSpPr txBox="1"/>
-          <p:nvPr/>
-        </p:nvSpPr>
-        <p:spPr>
-          <a:xfrm>
-            <a:off x="511168" y="1645890"/>
-            <a:ext cx="3651312" cy="457200"/>
+              <a:t>Dimensionamiento: Ancho de Banda y Capacidad</a:t>
+            </a:r>
+          </a:p>
+        </p:txBody>
+      </p:sp>
+      <p:sp>
+        <p:nvSpPr>
+          <p:cNvPr id="7" name="TextBox 6"/>
+          <p:cNvSpPr txBox="1"/>
+          <p:nvPr/>
+        </p:nvSpPr>
+        <p:spPr>
+          <a:xfrm>
+            <a:off x="800100" y="6048375"/>
+            <a:ext cx="6191250" cy="200025"/>
           </a:xfrm>
           <a:prstGeom prst="rect">
             <a:avLst/>
@@ -3984,33 +3786,29 @@
           </a:bodyPr>
           <a:lstStyle/>
           <a:p>
-            <a:pPr algn="ctr">
-              <a:lnSpc>
-                <a:spcPts val="3600"/>
-              </a:lnSpc>
-            </a:pPr>
-            <a:r>
-              <a:rPr b="1" sz="3600" i="0" u="none">
-                <a:solidFill>
-                  <a:srgbClr val="E11D48"/>
+            <a:pPr algn="l"/>
+            <a:r>
+              <a:rPr b="1" sz="1200" i="0" u="none">
+                <a:solidFill>
+                  <a:srgbClr val="6B21A8"/>
                 </a:solidFill>
                 <a:latin typeface="Plus Jakarta Sans"/>
               </a:rPr>
-              <a:t>99.95%</a:t>
-            </a:r>
-          </a:p>
-        </p:txBody>
-      </p:sp>
-      <p:sp>
-        <p:nvSpPr>
-          <p:cNvPr id="12" name="TextBox 11"/>
-          <p:cNvSpPr txBox="1"/>
-          <p:nvPr/>
-        </p:nvSpPr>
-        <p:spPr>
-          <a:xfrm>
-            <a:off x="511168" y="2179290"/>
-            <a:ext cx="3651312" cy="200025"/>
+              <a:t>Pico medido: 205 Mbps (410 en hora pico). Modelo: 169 Mbps.</a:t>
+            </a:r>
+          </a:p>
+        </p:txBody>
+      </p:sp>
+      <p:sp>
+        <p:nvSpPr>
+          <p:cNvPr id="8" name="TextBox 7"/>
+          <p:cNvSpPr txBox="1"/>
+          <p:nvPr/>
+        </p:nvSpPr>
+        <p:spPr>
+          <a:xfrm>
+            <a:off x="6438900" y="6048375"/>
+            <a:ext cx="5753100" cy="200025"/>
           </a:xfrm>
           <a:prstGeom prst="rect">
             <a:avLst/>
@@ -4023,303 +3821,118 @@
           </a:bodyPr>
           <a:lstStyle/>
           <a:p>
-            <a:pPr algn="ctr"/>
+            <a:pPr algn="l"/>
             <a:r>
               <a:rPr b="1" sz="1200" i="0" u="none">
                 <a:solidFill>
+                  <a:srgbClr val="991B1B"/>
+                </a:solidFill>
+                <a:latin typeface="Plus Jakarta Sans"/>
+              </a:rPr>
+              <a:t>S'(t) = C con Bisección y Newton: del 2/06 al 23/11/2023.</a:t>
+            </a:r>
+          </a:p>
+        </p:txBody>
+      </p:sp>
+      <p:sp>
+        <p:nvSpPr>
+          <p:cNvPr id="9" name="TextBox 8"/>
+          <p:cNvSpPr txBox="1"/>
+          <p:nvPr/>
+        </p:nvSpPr>
+        <p:spPr>
+          <a:xfrm>
+            <a:off x="612648" y="1207008"/>
+            <a:ext cx="2770632" cy="171450"/>
+          </a:xfrm>
+          <a:prstGeom prst="rect">
+            <a:avLst/>
+          </a:prstGeom>
+          <a:noFill/>
+        </p:spPr>
+        <p:txBody>
+          <a:bodyPr wrap="none" lIns="0" rIns="0" tIns="0" bIns="0" anchor="t">
+            <a:spAutoFit/>
+          </a:bodyPr>
+          <a:lstStyle/>
+          <a:p>
+            <a:pPr algn="l"/>
+            <a:r>
+              <a:rPr b="1" sz="1050" i="0" u="none">
+                <a:solidFill>
+                  <a:srgbClr val="8B5CF6"/>
+                </a:solidFill>
+                <a:latin typeface="Plus Jakarta Sans"/>
+              </a:rPr>
+              <a:t>Ancho de banda medido (160 kbps)</a:t>
+            </a:r>
+          </a:p>
+        </p:txBody>
+      </p:sp>
+      <p:sp>
+        <p:nvSpPr>
+          <p:cNvPr id="10" name="TextBox 9"/>
+          <p:cNvSpPr txBox="1"/>
+          <p:nvPr/>
+        </p:nvSpPr>
+        <p:spPr>
+          <a:xfrm>
+            <a:off x="3703320" y="1207008"/>
+            <a:ext cx="1865376" cy="171450"/>
+          </a:xfrm>
+          <a:prstGeom prst="rect">
+            <a:avLst/>
+          </a:prstGeom>
+          <a:noFill/>
+        </p:spPr>
+        <p:txBody>
+          <a:bodyPr wrap="none" lIns="0" rIns="0" tIns="0" bIns="0" anchor="t">
+            <a:spAutoFit/>
+          </a:bodyPr>
+          <a:lstStyle/>
+          <a:p>
+            <a:pPr algn="l"/>
+            <a:r>
+              <a:rPr b="1" sz="1050" i="0" u="none">
+                <a:solidFill>
+                  <a:srgbClr val="6D28D9"/>
+                </a:solidFill>
+                <a:latin typeface="Plus Jakarta Sans"/>
+              </a:rPr>
+              <a:t>Modelo: S'(t) en Mbps</a:t>
+            </a:r>
+          </a:p>
+        </p:txBody>
+      </p:sp>
+      <p:sp>
+        <p:nvSpPr>
+          <p:cNvPr id="42" name="Supuestos"/>
+          <p:cNvSpPr txBox="1"/>
+          <p:nvPr/>
+        </p:nvSpPr>
+        <p:spPr>
+          <a:xfrm>
+            <a:off x="612648" y="5029200"/>
+            <a:ext cx="10972800" cy="548640"/>
+          </a:xfrm>
+          <a:prstGeom prst="rect">
+            <a:avLst/>
+          </a:prstGeom>
+          <a:noFill/>
+        </p:spPr>
+        <p:txBody>
+          <a:bodyPr wrap="square" lIns="0" rIns="0" tIns="0" bIns="0" anchor="t"/>
+          <a:lstStyle/>
+          <a:p>
+            <a:pPr algn="l"/>
+            <a:r>
+              <a:rPr b="0" sz="1200" i="0" u="none">
+                <a:solidFill>
                   <a:srgbClr val="475569"/>
                 </a:solidFill>
                 <a:latin typeface="Plus Jakarta Sans"/>
               </a:rPr>
-              <a:t>Varianza explicada por el ajuste</a:t>
-            </a:r>
-          </a:p>
-        </p:txBody>
-      </p:sp>
-      <p:sp>
-        <p:nvSpPr>
-          <p:cNvPr id="13" name="TextBox 12"/>
-          <p:cNvSpPr txBox="1"/>
-          <p:nvPr/>
-        </p:nvSpPr>
-        <p:spPr>
-          <a:xfrm>
-            <a:off x="4270418" y="1645890"/>
-            <a:ext cx="3651312" cy="457200"/>
-          </a:xfrm>
-          <a:prstGeom prst="rect">
-            <a:avLst/>
-          </a:prstGeom>
-          <a:noFill/>
-        </p:spPr>
-        <p:txBody>
-          <a:bodyPr wrap="none" lIns="0" rIns="0" tIns="0" bIns="0" anchor="t">
-            <a:spAutoFit/>
-          </a:bodyPr>
-          <a:lstStyle/>
-          <a:p>
-            <a:pPr algn="ctr">
-              <a:lnSpc>
-                <a:spcPts val="3600"/>
-              </a:lnSpc>
-            </a:pPr>
-            <a:r>
-              <a:rPr b="1" sz="3600" i="0" u="none">
-                <a:solidFill>
-                  <a:srgbClr val="0284C7"/>
-                </a:solidFill>
-                <a:latin typeface="Plus Jakarta Sans"/>
-              </a:rPr>
-              <a:t>3 vs 15</a:t>
-            </a:r>
-          </a:p>
-        </p:txBody>
-      </p:sp>
-      <p:sp>
-        <p:nvSpPr>
-          <p:cNvPr id="14" name="TextBox 13"/>
-          <p:cNvSpPr txBox="1"/>
-          <p:nvPr/>
-        </p:nvSpPr>
-        <p:spPr>
-          <a:xfrm>
-            <a:off x="4270418" y="2179290"/>
-            <a:ext cx="3651312" cy="200025"/>
-          </a:xfrm>
-          <a:prstGeom prst="rect">
-            <a:avLst/>
-          </a:prstGeom>
-          <a:noFill/>
-        </p:spPr>
-        <p:txBody>
-          <a:bodyPr wrap="none" lIns="0" rIns="0" tIns="0" bIns="0" anchor="t">
-            <a:spAutoFit/>
-          </a:bodyPr>
-          <a:lstStyle/>
-          <a:p>
-            <a:pPr algn="ctr"/>
-            <a:r>
-              <a:rPr b="1" sz="1200" i="0" u="none">
-                <a:solidFill>
-                  <a:srgbClr val="475569"/>
-                </a:solidFill>
-                <a:latin typeface="Plus Jakarta Sans"/>
-              </a:rPr>
-              <a:t>Iteraciones: Newton-Raphson vs. Bisección</a:t>
-            </a:r>
-          </a:p>
-        </p:txBody>
-      </p:sp>
-      <p:sp>
-        <p:nvSpPr>
-          <p:cNvPr id="15" name="TextBox 14"/>
-          <p:cNvSpPr txBox="1"/>
-          <p:nvPr/>
-        </p:nvSpPr>
-        <p:spPr>
-          <a:xfrm>
-            <a:off x="8029668" y="1645890"/>
-            <a:ext cx="3651312" cy="457200"/>
-          </a:xfrm>
-          <a:prstGeom prst="rect">
-            <a:avLst/>
-          </a:prstGeom>
-          <a:noFill/>
-        </p:spPr>
-        <p:txBody>
-          <a:bodyPr wrap="none" lIns="0" rIns="0" tIns="0" bIns="0" anchor="t">
-            <a:spAutoFit/>
-          </a:bodyPr>
-          <a:lstStyle/>
-          <a:p>
-            <a:pPr algn="ctr">
-              <a:lnSpc>
-                <a:spcPts val="3600"/>
-              </a:lnSpc>
-            </a:pPr>
-            <a:r>
-              <a:rPr b="1" sz="3600" i="0" u="none">
-                <a:solidFill>
-                  <a:srgbClr val="16A34A"/>
-                </a:solidFill>
-                <a:latin typeface="Plus Jakarta Sans"/>
-              </a:rPr>
-              <a:t>29/09/2023</a:t>
-            </a:r>
-          </a:p>
-        </p:txBody>
-      </p:sp>
-      <p:sp>
-        <p:nvSpPr>
-          <p:cNvPr id="16" name="TextBox 15"/>
-          <p:cNvSpPr txBox="1"/>
-          <p:nvPr/>
-        </p:nvSpPr>
-        <p:spPr>
-          <a:xfrm>
-            <a:off x="8029668" y="2179290"/>
-            <a:ext cx="3651312" cy="200025"/>
-          </a:xfrm>
-          <a:prstGeom prst="rect">
-            <a:avLst/>
-          </a:prstGeom>
-          <a:noFill/>
-        </p:spPr>
-        <p:txBody>
-          <a:bodyPr wrap="none" lIns="0" rIns="0" tIns="0" bIns="0" anchor="t">
-            <a:spAutoFit/>
-          </a:bodyPr>
-          <a:lstStyle/>
-          <a:p>
-            <a:pPr algn="ctr"/>
-            <a:r>
-              <a:rPr b="1" sz="1200" i="0" u="none">
-                <a:solidFill>
-                  <a:srgbClr val="475569"/>
-                </a:solidFill>
-                <a:latin typeface="Plus Jakarta Sans"/>
-              </a:rPr>
-              <a:t>Hito de 100 M (trazadora, ±2 días)</a:t>
-            </a:r>
-          </a:p>
-        </p:txBody>
-      </p:sp>
-      <p:sp>
-        <p:nvSpPr>
-          <p:cNvPr id="17" name="TextBox 16"/>
-          <p:cNvSpPr txBox="1"/>
-          <p:nvPr/>
-        </p:nvSpPr>
-        <p:spPr>
-          <a:xfrm>
-            <a:off x="876300" y="4328070"/>
-            <a:ext cx="6400800" cy="219075"/>
-          </a:xfrm>
-          <a:prstGeom prst="rect">
-            <a:avLst/>
-          </a:prstGeom>
-          <a:noFill/>
-        </p:spPr>
-        <p:txBody>
-          <a:bodyPr wrap="none" lIns="0" rIns="0" tIns="0" bIns="0" anchor="t">
-            <a:spAutoFit/>
-          </a:bodyPr>
-          <a:lstStyle/>
-          <a:p>
-            <a:pPr algn="l"/>
-            <a:r>
-              <a:rPr b="1" sz="1350" i="0" u="none">
-                <a:solidFill>
-                  <a:srgbClr val="0F172A"/>
-                </a:solidFill>
-                <a:latin typeface="Space Grotesk"/>
-              </a:rPr>
-              <a:t>Modelado Continuo Fiable</a:t>
-            </a:r>
-          </a:p>
-        </p:txBody>
-      </p:sp>
-      <p:sp>
-        <p:nvSpPr>
-          <p:cNvPr id="18" name="TextBox 17"/>
-          <p:cNvSpPr txBox="1"/>
-          <p:nvPr/>
-        </p:nvSpPr>
-        <p:spPr>
-          <a:xfrm>
-            <a:off x="876300" y="4585245"/>
-            <a:ext cx="4972050" cy="438150"/>
-          </a:xfrm>
-          <a:prstGeom prst="rect">
-            <a:avLst/>
-          </a:prstGeom>
-          <a:noFill/>
-        </p:spPr>
-        <p:txBody>
-          <a:bodyPr wrap="square" lIns="0" rIns="0" tIns="0" bIns="0" anchor="t">
-            <a:spAutoFit/>
-          </a:bodyPr>
-          <a:lstStyle/>
-          <a:p>
-            <a:pPr algn="l"/>
-            <a:r>
-              <a:rPr b="0" sz="1350" i="0" u="none">
-                <a:solidFill>
-                  <a:srgbClr val="64748B"/>
-                </a:solidFill>
-                <a:latin typeface="Plus Jakarta Sans"/>
-              </a:rPr>
-              <a:t>La regresión capta la tendencia, la trazadora respeta los datos y Δt cuantifica el error.</a:t>
-            </a:r>
-          </a:p>
-        </p:txBody>
-      </p:sp>
-      <p:sp>
-        <p:nvSpPr>
-          <p:cNvPr id="19" name="TextBox 18"/>
-          <p:cNvSpPr txBox="1"/>
-          <p:nvPr/>
-        </p:nvSpPr>
-        <p:spPr>
-          <a:xfrm>
-            <a:off x="6477000" y="4328070"/>
-            <a:ext cx="5715000" cy="219075"/>
-          </a:xfrm>
-          <a:prstGeom prst="rect">
-            <a:avLst/>
-          </a:prstGeom>
-          <a:noFill/>
-        </p:spPr>
-        <p:txBody>
-          <a:bodyPr wrap="none" lIns="0" rIns="0" tIns="0" bIns="0" anchor="t">
-            <a:spAutoFit/>
-          </a:bodyPr>
-          <a:lstStyle/>
-          <a:p>
-            <a:pPr algn="l"/>
-            <a:r>
-              <a:rPr b="1" sz="1350" i="0" u="none">
-                <a:solidFill>
-                  <a:srgbClr val="0F172A"/>
-                </a:solidFill>
-                <a:latin typeface="Space Grotesk"/>
-              </a:rPr>
-              <a:t>Previsión de Servidores Cloud</a:t>
-            </a:r>
-          </a:p>
-        </p:txBody>
-      </p:sp>
-      <p:sp>
-        <p:nvSpPr>
-          <p:cNvPr id="20" name="TextBox 19"/>
-          <p:cNvSpPr txBox="1"/>
-          <p:nvPr/>
-        </p:nvSpPr>
-        <p:spPr>
-          <a:xfrm>
-            <a:off x="6477000" y="4585245"/>
-            <a:ext cx="4972050" cy="438150"/>
-          </a:xfrm>
-          <a:prstGeom prst="rect">
-            <a:avLst/>
-          </a:prstGeom>
-          <a:noFill/>
-        </p:spPr>
-        <p:txBody>
-          <a:bodyPr wrap="square" lIns="0" rIns="0" tIns="0" bIns="0" anchor="t">
-            <a:spAutoFit/>
-          </a:bodyPr>
-          <a:lstStyle/>
-          <a:p>
-            <a:pPr algn="l"/>
-            <a:r>
-              <a:rPr b="0" sz="1350" i="0" u="none">
-                <a:solidFill>
-                  <a:srgbClr val="64748B"/>
-                </a:solidFill>
-                <a:latin typeface="Plus Jakarta Sans"/>
-              </a:rPr>
-              <a:t>Pico de 205 Mbps a 160 kbps y 372 TB transferidos al llegar a 100 M de streams.</a:t>
+              <a:t>Supuestos: reproducción de 3:06 a 160 kbps (rango de 96 a 320 kbps), hora pico igual a 2 veces el promedio semanal y sin descontar las reproducciones guardadas en el dispositivo. Son órdenes de magnitud, no datos de Spotify. A 160 kbps, 100 M de reproducciones equivalen a unos 372 TB transferidos.</a:t>
             </a:r>
           </a:p>
         </p:txBody>
@@ -4338,7 +3951,7 @@
     <p:bg>
       <p:bgPr>
         <a:solidFill>
-          <a:srgbClr val="0F172A"/>
+          <a:srgbClr val="FFFFFF"/>
         </a:solidFill>
         <a:effectLst/>
       </p:bgPr>
@@ -4352,60 +3965,14 @@
       <p:grpSpPr/>
       <p:sp>
         <p:nvSpPr>
-          <p:cNvPr id="2" name="Rounded Rectangle 1"/>
-          <p:cNvSpPr/>
-          <p:nvPr/>
-        </p:nvSpPr>
-        <p:spPr>
-          <a:xfrm>
-            <a:off x="3581400" y="4007048"/>
-            <a:ext cx="5029200" cy="600075"/>
-          </a:xfrm>
-          <a:prstGeom prst="roundRect">
-            <a:avLst>
-              <a:gd name="adj" fmla="val 22222"/>
-            </a:avLst>
-          </a:prstGeom>
-          <a:solidFill>
-            <a:srgbClr val="1E293B"/>
-          </a:solidFill>
-          <a:ln>
-            <a:noFill/>
-          </a:ln>
-          <a:effectLst/>
-        </p:spPr>
-        <p:style>
-          <a:lnRef idx="1">
-            <a:schemeClr val="accent1"/>
-          </a:lnRef>
-          <a:fillRef idx="3">
-            <a:schemeClr val="accent1"/>
-          </a:fillRef>
-          <a:effectRef idx="2">
-            <a:schemeClr val="accent1"/>
-          </a:effectRef>
-          <a:fontRef idx="minor">
-            <a:schemeClr val="lt1"/>
-          </a:fontRef>
-        </p:style>
-        <p:txBody>
-          <a:bodyPr rtlCol="0" anchor="ctr"/>
-          <a:lstStyle/>
-          <a:p>
-            <a:pPr algn="ctr"/>
-          </a:p>
-        </p:txBody>
-      </p:sp>
-      <p:sp>
-        <p:nvSpPr>
-          <p:cNvPr id="3" name="TextBox 2"/>
-          <p:cNvSpPr txBox="1"/>
-          <p:nvPr/>
-        </p:nvSpPr>
-        <p:spPr>
-          <a:xfrm>
-            <a:off x="4119562" y="1812577"/>
-            <a:ext cx="3952875" cy="171450"/>
+          <p:cNvPr id="5" name="TextBox 4"/>
+          <p:cNvSpPr txBox="1"/>
+          <p:nvPr/>
+        </p:nvSpPr>
+        <p:spPr>
+          <a:xfrm>
+            <a:off x="609600" y="457200"/>
+            <a:ext cx="8548687" cy="171450"/>
           </a:xfrm>
           <a:prstGeom prst="rect">
             <a:avLst/>
@@ -4418,29 +3985,29 @@
           </a:bodyPr>
           <a:lstStyle/>
           <a:p>
-            <a:pPr algn="ctr"/>
+            <a:pPr algn="l"/>
             <a:r>
               <a:rPr b="1" sz="1050" i="0" u="none">
                 <a:solidFill>
-                  <a:srgbClr val="FB7185"/>
+                  <a:srgbClr val="7C3AED"/>
                 </a:solidFill>
                 <a:latin typeface="Plus Jakarta Sans"/>
               </a:rPr>
-              <a:t>TALLER DE MÉTODOS NUMÉRICOS 2026</a:t>
-            </a:r>
-          </a:p>
-        </p:txBody>
-      </p:sp>
-      <p:sp>
-        <p:nvSpPr>
-          <p:cNvPr id="4" name="TextBox 3"/>
-          <p:cNvSpPr txBox="1"/>
-          <p:nvPr/>
-        </p:nvSpPr>
-        <p:spPr>
-          <a:xfrm>
-            <a:off x="2814339" y="2136427"/>
-            <a:ext cx="6563320" cy="670470"/>
+              <a:t>GENERALIZACIÓN</a:t>
+            </a:r>
+          </a:p>
+        </p:txBody>
+      </p:sp>
+      <p:sp>
+        <p:nvSpPr>
+          <p:cNvPr id="6" name="TextBox 5"/>
+          <p:cNvSpPr txBox="1"/>
+          <p:nvPr/>
+        </p:nvSpPr>
+        <p:spPr>
+          <a:xfrm>
+            <a:off x="609600" y="666750"/>
+            <a:ext cx="8976121" cy="388590"/>
           </a:xfrm>
           <a:prstGeom prst="rect">
             <a:avLst/>
@@ -4453,198 +4020,134 @@
           </a:bodyPr>
           <a:lstStyle/>
           <a:p>
-            <a:pPr algn="ctr">
+            <a:pPr algn="l">
               <a:lnSpc>
-                <a:spcPts val="5280"/>
+                <a:spcPts val="3060"/>
               </a:lnSpc>
             </a:pPr>
             <a:r>
-              <a:rPr b="1" sz="4800" i="0" u="none">
-                <a:solidFill>
-                  <a:srgbClr val="FFFFFF"/>
+              <a:rPr b="1" sz="2550" i="0" u="none">
+                <a:solidFill>
+                  <a:srgbClr val="0F172A"/>
                 </a:solidFill>
                 <a:latin typeface="Space Grotesk"/>
               </a:rPr>
-              <a:t>¡Muchas Gracias!</a:t>
-            </a:r>
-          </a:p>
-        </p:txBody>
-      </p:sp>
-      <p:sp>
-        <p:nvSpPr>
-          <p:cNvPr id="5" name="TextBox 4"/>
-          <p:cNvSpPr txBox="1"/>
-          <p:nvPr/>
-        </p:nvSpPr>
-        <p:spPr>
-          <a:xfrm>
-            <a:off x="2226468" y="2997398"/>
-            <a:ext cx="7739062" cy="628650"/>
-          </a:xfrm>
-          <a:prstGeom prst="rect">
-            <a:avLst/>
-          </a:prstGeom>
-          <a:noFill/>
-        </p:spPr>
-        <p:txBody>
-          <a:bodyPr wrap="square" lIns="0" rIns="0" tIns="0" bIns="0" anchor="t">
-            <a:spAutoFit/>
-          </a:bodyPr>
-          <a:lstStyle/>
-          <a:p>
-            <a:pPr algn="ctr">
-              <a:lnSpc>
-                <a:spcPts val="2475"/>
-              </a:lnSpc>
+              <a:t>¿Sirve para Cualquier Canción? 3 Casos Reales</a:t>
+            </a:r>
+          </a:p>
+        </p:txBody>
+      </p:sp>
+      <p:pic>
+        <p:nvPicPr>
+          <p:cNvPr id="11" name="Picture 10" descr="grafico_4_comparacion_canciones.png"/>
+          <p:cNvPicPr>
+            <a:picLocks noChangeAspect="1"/>
+          </p:cNvPicPr>
+          <p:nvPr/>
+        </p:nvPicPr>
+        <p:blipFill>
+          <a:blip r:embed="rId3"/>
+          <a:stretch>
+            <a:fillRect/>
+          </a:stretch>
+        </p:blipFill>
+        <p:spPr>
+          <a:xfrm>
+            <a:off x="7360920" y="1417320"/>
+            <a:ext cx="4152900" cy="4983480"/>
+          </a:xfrm>
+          <a:prstGeom prst="rect">
+            <a:avLst/>
+          </a:prstGeom>
+        </p:spPr>
+      </p:pic>
+      <p:sp>
+        <p:nvSpPr>
+          <p:cNvPr id="12" name="TextBox 11"/>
+          <p:cNvSpPr txBox="1"/>
+          <p:nvPr/>
+        </p:nvSpPr>
+        <p:spPr>
+          <a:xfrm>
+            <a:off x="731520" y="1645920"/>
+            <a:ext cx="6309360" cy="4480560"/>
+          </a:xfrm>
+          <a:prstGeom prst="rect">
+            <a:avLst/>
+          </a:prstGeom>
+          <a:noFill/>
+        </p:spPr>
+        <p:txBody>
+          <a:bodyPr wrap="square">
+            <a:spAutoFit/>
+          </a:bodyPr>
+          <a:lstStyle/>
+          <a:p>
+            <a:pPr marL="182880" indent="-164592">
+              <a:spcAft>
+                <a:spcPts val="1800"/>
+              </a:spcAft>
+              <a:buChar char="•"/>
             </a:pPr>
             <a:r>
-              <a:rPr b="0" sz="1650" i="0" u="none">
-                <a:solidFill>
-                  <a:srgbClr val="94A3B8"/>
+              <a:rPr b="0" sz="1800" i="0" u="none">
+                <a:solidFill>
+                  <a:srgbClr val="475569"/>
                 </a:solidFill>
                 <a:latin typeface="Plus Jakarta Sans"/>
               </a:rPr>
-              <a:t>¿Preguntas o comentarios sobre el modelo analítico y la convergencia de algoritmos?</a:t>
-            </a:r>
-          </a:p>
-        </p:txBody>
-      </p:sp>
-      <p:sp>
-        <p:nvSpPr>
-          <p:cNvPr id="6" name="TextBox 5"/>
-          <p:cNvSpPr txBox="1"/>
-          <p:nvPr/>
-        </p:nvSpPr>
-        <p:spPr>
-          <a:xfrm>
-            <a:off x="3893343" y="4873823"/>
-            <a:ext cx="4405312" cy="171450"/>
-          </a:xfrm>
-          <a:prstGeom prst="rect">
-            <a:avLst/>
-          </a:prstGeom>
-          <a:noFill/>
-        </p:spPr>
-        <p:txBody>
-          <a:bodyPr wrap="none" lIns="0" rIns="0" tIns="0" bIns="0" anchor="t">
-            <a:spAutoFit/>
-          </a:bodyPr>
-          <a:lstStyle/>
-          <a:p>
-            <a:pPr algn="ctr"/>
-            <a:r>
-              <a:rPr b="0" sz="1050" i="0" u="none">
-                <a:solidFill>
-                  <a:srgbClr val="64748B"/>
+              <a:t>Cúbica global: S′ es una parábola simétrica; sirve si el pico está a mitad del período (a &lt; 0).</a:t>
+            </a:r>
+          </a:p>
+          <a:p>
+            <a:pPr marL="182880" indent="-164592">
+              <a:spcAft>
+                <a:spcPts val="1800"/>
+              </a:spcAft>
+              <a:buChar char="•"/>
+            </a:pPr>
+            <a:r>
+              <a:rPr b="0" sz="1800" i="0" u="none">
+                <a:solidFill>
+                  <a:srgbClr val="475569"/>
                 </a:solidFill>
                 <a:latin typeface="Plus Jakarta Sans"/>
               </a:rPr>
-              <a:t>Universidad Católica de Córdoba · Facultad de Ingeniería</a:t>
-            </a:r>
-          </a:p>
-        </p:txBody>
-      </p:sp>
-      <p:sp>
-        <p:nvSpPr>
-          <p:cNvPr id="7" name="TextBox 6"/>
-          <p:cNvSpPr txBox="1"/>
-          <p:nvPr/>
-        </p:nvSpPr>
-        <p:spPr>
-          <a:xfrm>
-            <a:off x="3781425" y="4197548"/>
-            <a:ext cx="1238250" cy="219075"/>
-          </a:xfrm>
-          <a:prstGeom prst="rect">
-            <a:avLst/>
-          </a:prstGeom>
-          <a:noFill/>
-        </p:spPr>
-        <p:txBody>
-          <a:bodyPr wrap="none" lIns="0" rIns="0" tIns="0" bIns="0" anchor="t">
-            <a:spAutoFit/>
-          </a:bodyPr>
-          <a:lstStyle/>
-          <a:p>
-            <a:pPr algn="ctr"/>
-            <a:r>
-              <a:rPr b="1" sz="1350" i="0" u="none">
-                <a:solidFill>
-                  <a:srgbClr val="E2E8F0"/>
+              <a:t>Estrenos: pico en la semana 5–6 y cola larga → a &gt; 0, no hay máximo.</a:t>
+            </a:r>
+          </a:p>
+          <a:p>
+            <a:pPr marL="182880" indent="-164592">
+              <a:spcAft>
+                <a:spcPts val="1800"/>
+              </a:spcAft>
+              <a:buChar char="•"/>
+            </a:pPr>
+            <a:r>
+              <a:rPr b="0" sz="1800" i="0" u="none">
+                <a:solidFill>
+                  <a:srgbClr val="475569"/>
                 </a:solidFill>
                 <a:latin typeface="Plus Jakarta Sans"/>
               </a:rPr>
-              <a:t>Pedro Gatti</a:t>
-            </a:r>
-          </a:p>
-        </p:txBody>
-      </p:sp>
-      <p:sp>
-        <p:nvSpPr>
-          <p:cNvPr id="8" name="TextBox 7"/>
-          <p:cNvSpPr txBox="1"/>
-          <p:nvPr/>
-        </p:nvSpPr>
-        <p:spPr>
-          <a:xfrm>
-            <a:off x="5230415" y="4197548"/>
-            <a:ext cx="1512093" cy="219075"/>
-          </a:xfrm>
-          <a:prstGeom prst="rect">
-            <a:avLst/>
-          </a:prstGeom>
-          <a:noFill/>
-        </p:spPr>
-        <p:txBody>
-          <a:bodyPr wrap="none" lIns="0" rIns="0" tIns="0" bIns="0" anchor="t">
-            <a:spAutoFit/>
-          </a:bodyPr>
-          <a:lstStyle/>
-          <a:p>
-            <a:pPr algn="ctr"/>
-            <a:r>
-              <a:rPr b="1" sz="1350" i="0" u="none">
-                <a:solidFill>
-                  <a:srgbClr val="E2E8F0"/>
+              <a:t>Regresión local (±6 semanas alrededor del pico): a &lt; 0 en las 3 canciones; picos 28.6, 3.8 y 6.4.</a:t>
+            </a:r>
+          </a:p>
+          <a:p>
+            <a:pPr marL="182880" indent="-164592">
+              <a:spcAft>
+                <a:spcPts val="1800"/>
+              </a:spcAft>
+              <a:buChar char="•"/>
+            </a:pPr>
+            <a:r>
+              <a:rPr b="0" sz="1800" i="0" u="none">
+                <a:solidFill>
+                  <a:srgbClr val="475569"/>
                 </a:solidFill>
                 <a:latin typeface="Plus Jakarta Sans"/>
               </a:rPr>
-              <a:t>Facundo Grillo</a:t>
-            </a:r>
-          </a:p>
-        </p:txBody>
-      </p:sp>
-      <p:sp>
-        <p:nvSpPr>
-          <p:cNvPr id="9" name="TextBox 8"/>
-          <p:cNvSpPr txBox="1"/>
-          <p:nvPr/>
-        </p:nvSpPr>
-        <p:spPr>
-          <a:xfrm>
-            <a:off x="6949678" y="4197548"/>
-            <a:ext cx="1464468" cy="219075"/>
-          </a:xfrm>
-          <a:prstGeom prst="rect">
-            <a:avLst/>
-          </a:prstGeom>
-          <a:noFill/>
-        </p:spPr>
-        <p:txBody>
-          <a:bodyPr wrap="none" lIns="0" rIns="0" tIns="0" bIns="0" anchor="t">
-            <a:spAutoFit/>
-          </a:bodyPr>
-          <a:lstStyle/>
-          <a:p>
-            <a:pPr algn="ctr"/>
-            <a:r>
-              <a:rPr b="1" sz="1350" i="0" u="none">
-                <a:solidFill>
-                  <a:srgbClr val="E2E8F0"/>
-                </a:solidFill>
-                <a:latin typeface="Plus Jakarta Sans"/>
-              </a:rPr>
-              <a:t>Gonzalo Marin</a:t>
+              <a:t>Mismo método y misma regla: la herramienta valida su modelo.</a:t>
             </a:r>
           </a:p>
         </p:txBody>
@@ -4663,7 +4166,7 @@
     <p:bg>
       <p:bgPr>
         <a:solidFill>
-          <a:srgbClr val="090D16"/>
+          <a:srgbClr val="FFFFFF"/>
         </a:solidFill>
         <a:effectLst/>
       </p:bgPr>
@@ -4677,19 +4180,23 @@
       <p:grpSpPr/>
       <p:sp>
         <p:nvSpPr>
-          <p:cNvPr id="2" name="Rectangle 1"/>
+          <p:cNvPr id="2" name="Rounded Rectangle 1"/>
           <p:cNvSpPr/>
           <p:nvPr/>
         </p:nvSpPr>
         <p:spPr>
           <a:xfrm>
-            <a:off x="571500" y="866775"/>
-            <a:ext cx="11049000" cy="771525"/>
-          </a:xfrm>
-          <a:prstGeom prst="rect">
-            <a:avLst/>
-          </a:prstGeom>
-          <a:noFill/>
+            <a:off x="609600" y="2880270"/>
+            <a:ext cx="2571750" cy="2019300"/>
+          </a:xfrm>
+          <a:prstGeom prst="roundRect">
+            <a:avLst>
+              <a:gd name="adj" fmla="val 7547"/>
+            </a:avLst>
+          </a:prstGeom>
+          <a:solidFill>
+            <a:srgbClr val="F8FAFC"/>
+          </a:solidFill>
           <a:ln>
             <a:noFill/>
           </a:ln>
@@ -4719,20 +4226,22 @@
       </p:sp>
       <p:sp>
         <p:nvSpPr>
-          <p:cNvPr id="3" name="Rectangle 2"/>
+          <p:cNvPr id="3" name="Rounded Rectangle 2"/>
           <p:cNvSpPr/>
           <p:nvPr/>
         </p:nvSpPr>
         <p:spPr>
           <a:xfrm>
-            <a:off x="571500" y="1628775"/>
-            <a:ext cx="11049000" cy="9525"/>
-          </a:xfrm>
-          <a:prstGeom prst="rect">
-            <a:avLst/>
+            <a:off x="3409950" y="2880270"/>
+            <a:ext cx="2571750" cy="2019300"/>
+          </a:xfrm>
+          <a:prstGeom prst="roundRect">
+            <a:avLst>
+              <a:gd name="adj" fmla="val 7547"/>
+            </a:avLst>
           </a:prstGeom>
           <a:solidFill>
-            <a:srgbClr val="757575"/>
+            <a:srgbClr val="F8FAFC"/>
           </a:solidFill>
           <a:ln>
             <a:noFill/>
@@ -4763,20 +4272,22 @@
       </p:sp>
       <p:sp>
         <p:nvSpPr>
-          <p:cNvPr id="4" name="Rectangle 3"/>
+          <p:cNvPr id="4" name="Rounded Rectangle 3"/>
           <p:cNvSpPr/>
           <p:nvPr/>
         </p:nvSpPr>
         <p:spPr>
           <a:xfrm>
-            <a:off x="571500" y="1628775"/>
-            <a:ext cx="11049000" cy="9525"/>
-          </a:xfrm>
-          <a:prstGeom prst="rect">
-            <a:avLst/>
+            <a:off x="6210300" y="2880270"/>
+            <a:ext cx="2571750" cy="2019300"/>
+          </a:xfrm>
+          <a:prstGeom prst="roundRect">
+            <a:avLst>
+              <a:gd name="adj" fmla="val 7547"/>
+            </a:avLst>
           </a:prstGeom>
           <a:solidFill>
-            <a:srgbClr val="757575"/>
+            <a:srgbClr val="F8FAFC"/>
           </a:solidFill>
           <a:ln>
             <a:noFill/>
@@ -4805,9 +4316,55 @@
           </a:p>
         </p:txBody>
       </p:sp>
+      <p:sp>
+        <p:nvSpPr>
+          <p:cNvPr id="5" name="Rounded Rectangle 4"/>
+          <p:cNvSpPr/>
+          <p:nvPr/>
+        </p:nvSpPr>
+        <p:spPr>
+          <a:xfrm>
+            <a:off x="9010650" y="2880270"/>
+            <a:ext cx="2571750" cy="2019300"/>
+          </a:xfrm>
+          <a:prstGeom prst="roundRect">
+            <a:avLst>
+              <a:gd name="adj" fmla="val 7547"/>
+            </a:avLst>
+          </a:prstGeom>
+          <a:solidFill>
+            <a:srgbClr val="F8FAFC"/>
+          </a:solidFill>
+          <a:ln>
+            <a:noFill/>
+          </a:ln>
+          <a:effectLst/>
+        </p:spPr>
+        <p:style>
+          <a:lnRef idx="1">
+            <a:schemeClr val="accent1"/>
+          </a:lnRef>
+          <a:fillRef idx="3">
+            <a:schemeClr val="accent1"/>
+          </a:fillRef>
+          <a:effectRef idx="2">
+            <a:schemeClr val="accent1"/>
+          </a:effectRef>
+          <a:fontRef idx="minor">
+            <a:schemeClr val="lt1"/>
+          </a:fontRef>
+        </p:style>
+        <p:txBody>
+          <a:bodyPr rtlCol="0" anchor="ctr"/>
+          <a:lstStyle/>
+          <a:p>
+            <a:pPr algn="ctr"/>
+          </a:p>
+        </p:txBody>
+      </p:sp>
       <p:pic>
         <p:nvPicPr>
-          <p:cNvPr id="5" name="Picture 4" descr="image.png"/>
+          <p:cNvPr id="6" name="Picture 5" descr="image.png"/>
           <p:cNvPicPr>
             <a:picLocks noChangeAspect="1"/>
           </p:cNvPicPr>
@@ -4821,8 +4378,8 @@
         </p:blipFill>
         <p:spPr>
           <a:xfrm>
-            <a:off x="571500" y="1009650"/>
-            <a:ext cx="857250" cy="476250"/>
+            <a:off x="838200" y="3146970"/>
+            <a:ext cx="381000" cy="381000"/>
           </a:xfrm>
           <a:prstGeom prst="rect">
             <a:avLst/>
@@ -4831,7 +4388,7 @@
       </p:pic>
       <p:pic>
         <p:nvPicPr>
-          <p:cNvPr id="6" name="Picture 5" descr="image.png"/>
+          <p:cNvPr id="7" name="Picture 6" descr="image.png"/>
           <p:cNvPicPr>
             <a:picLocks noChangeAspect="1"/>
           </p:cNvPicPr>
@@ -4845,24 +4402,168 @@
         </p:blipFill>
         <p:spPr>
           <a:xfrm>
-            <a:off x="571500" y="1781175"/>
-            <a:ext cx="857250" cy="476250"/>
+            <a:off x="3638550" y="3146970"/>
+            <a:ext cx="381000" cy="381000"/>
           </a:xfrm>
           <a:prstGeom prst="rect">
             <a:avLst/>
           </a:prstGeom>
         </p:spPr>
       </p:pic>
-      <p:sp>
-        <p:nvSpPr>
-          <p:cNvPr id="7" name="TextBox 6"/>
-          <p:cNvSpPr txBox="1"/>
-          <p:nvPr/>
-        </p:nvSpPr>
-        <p:spPr>
-          <a:xfrm>
-            <a:off x="571500" y="571500"/>
-            <a:ext cx="2150268" cy="295275"/>
+      <p:pic>
+        <p:nvPicPr>
+          <p:cNvPr id="8" name="Picture 7" descr="image.png"/>
+          <p:cNvPicPr>
+            <a:picLocks noChangeAspect="1"/>
+          </p:cNvPicPr>
+          <p:nvPr/>
+        </p:nvPicPr>
+        <p:blipFill>
+          <a:blip r:embed="rId4"/>
+          <a:stretch>
+            <a:fillRect/>
+          </a:stretch>
+        </p:blipFill>
+        <p:spPr>
+          <a:xfrm>
+            <a:off x="6438900" y="3146970"/>
+            <a:ext cx="381000" cy="381000"/>
+          </a:xfrm>
+          <a:prstGeom prst="rect">
+            <a:avLst/>
+          </a:prstGeom>
+        </p:spPr>
+      </p:pic>
+      <p:pic>
+        <p:nvPicPr>
+          <p:cNvPr id="9" name="Picture 8" descr="image.png"/>
+          <p:cNvPicPr>
+            <a:picLocks noChangeAspect="1"/>
+          </p:cNvPicPr>
+          <p:nvPr/>
+        </p:nvPicPr>
+        <p:blipFill>
+          <a:blip r:embed="rId5"/>
+          <a:stretch>
+            <a:fillRect/>
+          </a:stretch>
+        </p:blipFill>
+        <p:spPr>
+          <a:xfrm>
+            <a:off x="9239250" y="3146970"/>
+            <a:ext cx="381000" cy="381000"/>
+          </a:xfrm>
+          <a:prstGeom prst="rect">
+            <a:avLst/>
+          </a:prstGeom>
+        </p:spPr>
+      </p:pic>
+      <p:pic>
+        <p:nvPicPr>
+          <p:cNvPr id="10" name="Picture 9" descr="image.png"/>
+          <p:cNvPicPr>
+            <a:picLocks noChangeAspect="1"/>
+          </p:cNvPicPr>
+          <p:nvPr/>
+        </p:nvPicPr>
+        <p:blipFill>
+          <a:blip r:embed="rId6"/>
+          <a:stretch>
+            <a:fillRect/>
+          </a:stretch>
+        </p:blipFill>
+        <p:spPr>
+          <a:xfrm>
+            <a:off x="942975" y="3251745"/>
+            <a:ext cx="171450" cy="171450"/>
+          </a:xfrm>
+          <a:prstGeom prst="rect">
+            <a:avLst/>
+          </a:prstGeom>
+        </p:spPr>
+      </p:pic>
+      <p:pic>
+        <p:nvPicPr>
+          <p:cNvPr id="11" name="Picture 10" descr="image.png"/>
+          <p:cNvPicPr>
+            <a:picLocks noChangeAspect="1"/>
+          </p:cNvPicPr>
+          <p:nvPr/>
+        </p:nvPicPr>
+        <p:blipFill>
+          <a:blip r:embed="rId7"/>
+          <a:stretch>
+            <a:fillRect/>
+          </a:stretch>
+        </p:blipFill>
+        <p:spPr>
+          <a:xfrm>
+            <a:off x="3719512" y="3251745"/>
+            <a:ext cx="219075" cy="171450"/>
+          </a:xfrm>
+          <a:prstGeom prst="rect">
+            <a:avLst/>
+          </a:prstGeom>
+        </p:spPr>
+      </p:pic>
+      <p:pic>
+        <p:nvPicPr>
+          <p:cNvPr id="12" name="Picture 11" descr="image.png"/>
+          <p:cNvPicPr>
+            <a:picLocks noChangeAspect="1"/>
+          </p:cNvPicPr>
+          <p:nvPr/>
+        </p:nvPicPr>
+        <p:blipFill>
+          <a:blip r:embed="rId8"/>
+          <a:stretch>
+            <a:fillRect/>
+          </a:stretch>
+        </p:blipFill>
+        <p:spPr>
+          <a:xfrm>
+            <a:off x="6543675" y="3251745"/>
+            <a:ext cx="171450" cy="171450"/>
+          </a:xfrm>
+          <a:prstGeom prst="rect">
+            <a:avLst/>
+          </a:prstGeom>
+        </p:spPr>
+      </p:pic>
+      <p:pic>
+        <p:nvPicPr>
+          <p:cNvPr id="13" name="Picture 12" descr="image.png"/>
+          <p:cNvPicPr>
+            <a:picLocks noChangeAspect="1"/>
+          </p:cNvPicPr>
+          <p:nvPr/>
+        </p:nvPicPr>
+        <p:blipFill>
+          <a:blip r:embed="rId9"/>
+          <a:stretch>
+            <a:fillRect/>
+          </a:stretch>
+        </p:blipFill>
+        <p:spPr>
+          <a:xfrm>
+            <a:off x="9344025" y="3251745"/>
+            <a:ext cx="171450" cy="171450"/>
+          </a:xfrm>
+          <a:prstGeom prst="rect">
+            <a:avLst/>
+          </a:prstGeom>
+        </p:spPr>
+      </p:pic>
+      <p:sp>
+        <p:nvSpPr>
+          <p:cNvPr id="14" name="TextBox 13"/>
+          <p:cNvSpPr txBox="1"/>
+          <p:nvPr/>
+        </p:nvSpPr>
+        <p:spPr>
+          <a:xfrm>
+            <a:off x="609600" y="457200"/>
+            <a:ext cx="11582400" cy="171450"/>
           </a:xfrm>
           <a:prstGeom prst="rect">
             <a:avLst/>
@@ -4877,27 +4578,66 @@
           <a:p>
             <a:pPr algn="l"/>
             <a:r>
-              <a:rPr b="1" sz="1800" i="0" u="none">
-                <a:solidFill>
-                  <a:srgbClr val="F8FAFC"/>
+              <a:rPr b="1" sz="1050" i="0" u="none">
+                <a:solidFill>
+                  <a:srgbClr val="E11D48"/>
+                </a:solidFill>
+                <a:latin typeface="Plus Jakarta Sans"/>
+              </a:rPr>
+              <a:t>EVALUACIÓN TÉCNICA</a:t>
+            </a:r>
+          </a:p>
+        </p:txBody>
+      </p:sp>
+      <p:sp>
+        <p:nvSpPr>
+          <p:cNvPr id="15" name="TextBox 14"/>
+          <p:cNvSpPr txBox="1"/>
+          <p:nvPr/>
+        </p:nvSpPr>
+        <p:spPr>
+          <a:xfrm>
+            <a:off x="609600" y="685800"/>
+            <a:ext cx="11582400" cy="388590"/>
+          </a:xfrm>
+          <a:prstGeom prst="rect">
+            <a:avLst/>
+          </a:prstGeom>
+          <a:noFill/>
+        </p:spPr>
+        <p:txBody>
+          <a:bodyPr wrap="none" lIns="0" rIns="0" tIns="0" bIns="0" anchor="t">
+            <a:spAutoFit/>
+          </a:bodyPr>
+          <a:lstStyle/>
+          <a:p>
+            <a:pPr algn="l">
+              <a:lnSpc>
+                <a:spcPts val="3060"/>
+              </a:lnSpc>
+            </a:pPr>
+            <a:r>
+              <a:rPr b="1" sz="2550" i="0" u="none">
+                <a:solidFill>
+                  <a:srgbClr val="0F172A"/>
                 </a:solidFill>
                 <a:latin typeface="Space Grotesk"/>
               </a:rPr>
-              <a:t>Image Sources</a:t>
-            </a:r>
-          </a:p>
-        </p:txBody>
-      </p:sp>
-      <p:sp>
-        <p:nvSpPr>
-          <p:cNvPr id="8" name="TextBox 7"/>
-          <p:cNvSpPr txBox="1"/>
-          <p:nvPr/>
-        </p:nvSpPr>
-        <p:spPr>
-          <a:xfrm>
-            <a:off x="1666875" y="1047750"/>
-            <a:ext cx="6965156" cy="152400"/>
+              <a:t>Límites y Condiciones de Borde</a:t>
+            </a:r>
+          </a:p>
+        </p:txBody>
+      </p:sp>
+      <p:sp>
+        <p:nvSpPr>
+          <p:cNvPr id="16" name="TextBox 15"/>
+          <p:cNvSpPr txBox="1"/>
+          <p:nvPr/>
+        </p:nvSpPr>
+        <p:spPr>
+          <a:xfrm>
+            <a:off x="838200" y="3642270"/>
+            <a:ext cx="2775346" cy="219075"/>
           </a:xfrm>
           <a:prstGeom prst="rect">
             <a:avLst/>
@@ -4912,27 +4652,62 @@
           <a:p>
             <a:pPr algn="l"/>
             <a:r>
-              <a:rPr b="0" sz="975" i="0" u="none">
-                <a:solidFill>
-                  <a:srgbClr val="F8FAFC"/>
+              <a:rPr b="1" sz="1350" i="0" u="none">
+                <a:solidFill>
+                  <a:srgbClr val="0F172A"/>
+                </a:solidFill>
+                <a:latin typeface="Space Grotesk"/>
+              </a:rPr>
+              <a:t>Discrepancia Puntual</a:t>
+            </a:r>
+          </a:p>
+        </p:txBody>
+      </p:sp>
+      <p:sp>
+        <p:nvSpPr>
+          <p:cNvPr id="17" name="TextBox 16"/>
+          <p:cNvSpPr txBox="1"/>
+          <p:nvPr/>
+        </p:nvSpPr>
+        <p:spPr>
+          <a:xfrm>
+            <a:off x="838200" y="3975645"/>
+            <a:ext cx="2209800" cy="657225"/>
+          </a:xfrm>
+          <a:prstGeom prst="rect">
+            <a:avLst/>
+          </a:prstGeom>
+          <a:noFill/>
+        </p:spPr>
+        <p:txBody>
+          <a:bodyPr wrap="square" lIns="0" rIns="0" tIns="0" bIns="0" anchor="t">
+            <a:spAutoFit/>
+          </a:bodyPr>
+          <a:lstStyle/>
+          <a:p>
+            <a:pPr algn="l"/>
+            <a:r>
+              <a:rPr b="0" sz="1350" i="0" u="none">
+                <a:solidFill>
+                  <a:srgbClr val="475569"/>
                 </a:solidFill>
                 <a:latin typeface="Plus Jakarta Sans"/>
               </a:rPr>
-              <a:t>https://www.musicconnection.com/wp-content/uploads/2024/04/2V7A2667-620x420.jpg</a:t>
-            </a:r>
-          </a:p>
-        </p:txBody>
-      </p:sp>
-      <p:sp>
-        <p:nvSpPr>
-          <p:cNvPr id="9" name="TextBox 8"/>
-          <p:cNvSpPr txBox="1"/>
-          <p:nvPr/>
-        </p:nvSpPr>
-        <p:spPr>
-          <a:xfrm>
-            <a:off x="1666875" y="1247775"/>
-            <a:ext cx="3309937" cy="200025"/>
+              <a:t>Regresión: 2.77 d del cruce medido, más que Δt = ±1.92 d.</a:t>
+            </a:r>
+          </a:p>
+        </p:txBody>
+      </p:sp>
+      <p:sp>
+        <p:nvSpPr>
+          <p:cNvPr id="18" name="TextBox 17"/>
+          <p:cNvSpPr txBox="1"/>
+          <p:nvPr/>
+        </p:nvSpPr>
+        <p:spPr>
+          <a:xfrm>
+            <a:off x="3638550" y="3642270"/>
+            <a:ext cx="2775346" cy="219075"/>
           </a:xfrm>
           <a:prstGeom prst="rect">
             <a:avLst/>
@@ -4947,36 +4722,132 @@
           <a:p>
             <a:pPr algn="l"/>
             <a:r>
-              <a:rPr b="0" sz="1200" i="0" u="none">
-                <a:solidFill>
-                  <a:srgbClr val="F8FAFC"/>
+              <a:rPr b="1" sz="1350" i="0" u="none">
+                <a:solidFill>
+                  <a:srgbClr val="0F172A"/>
+                </a:solidFill>
+                <a:latin typeface="Space Grotesk"/>
+              </a:rPr>
+              <a:t>Suavizado del Pico</a:t>
+            </a:r>
+          </a:p>
+        </p:txBody>
+      </p:sp>
+      <p:sp>
+        <p:nvSpPr>
+          <p:cNvPr id="19" name="TextBox 18"/>
+          <p:cNvSpPr txBox="1"/>
+          <p:nvPr/>
+        </p:nvSpPr>
+        <p:spPr>
+          <a:xfrm>
+            <a:off x="3638550" y="3975645"/>
+            <a:ext cx="2209800" cy="657225"/>
+          </a:xfrm>
+          <a:prstGeom prst="rect">
+            <a:avLst/>
+          </a:prstGeom>
+          <a:noFill/>
+        </p:spPr>
+        <p:txBody>
+          <a:bodyPr wrap="square" lIns="0" rIns="0" tIns="0" bIns="0" anchor="t">
+            <a:spAutoFit/>
+          </a:bodyPr>
+          <a:lstStyle/>
+          <a:p>
+            <a:pPr algn="l"/>
+            <a:r>
+              <a:rPr b="0" sz="1350" i="0" u="none">
+                <a:solidFill>
+                  <a:srgbClr val="475569"/>
                 </a:solidFill>
                 <a:latin typeface="Plus Jakarta Sans"/>
               </a:rPr>
-              <a:t>Source: </a:t>
-            </a:r>
-            <a:r>
-              <a:rPr b="0" sz="1200" i="0" u="none">
-                <a:solidFill>
-                  <a:srgbClr val="4F46E5"/>
+              <a:t>Atenúa el máximo un 18 % y lo desplaza 4.6 semanas.</a:t>
+            </a:r>
+          </a:p>
+        </p:txBody>
+      </p:sp>
+      <p:sp>
+        <p:nvSpPr>
+          <p:cNvPr id="20" name="TextBox 19"/>
+          <p:cNvSpPr txBox="1"/>
+          <p:nvPr/>
+        </p:nvSpPr>
+        <p:spPr>
+          <a:xfrm>
+            <a:off x="6438900" y="3642270"/>
+            <a:ext cx="2775346" cy="219075"/>
+          </a:xfrm>
+          <a:prstGeom prst="rect">
+            <a:avLst/>
+          </a:prstGeom>
+          <a:noFill/>
+        </p:spPr>
+        <p:txBody>
+          <a:bodyPr wrap="none" lIns="0" rIns="0" tIns="0" bIns="0" anchor="t">
+            <a:spAutoFit/>
+          </a:bodyPr>
+          <a:lstStyle/>
+          <a:p>
+            <a:pPr algn="l"/>
+            <a:r>
+              <a:rPr b="1" sz="1350" i="0" u="none">
+                <a:solidFill>
+                  <a:srgbClr val="0F172A"/>
+                </a:solidFill>
+                <a:latin typeface="Space Grotesk"/>
+              </a:rPr>
+              <a:t>Alcance Muestral</a:t>
+            </a:r>
+          </a:p>
+        </p:txBody>
+      </p:sp>
+      <p:sp>
+        <p:nvSpPr>
+          <p:cNvPr id="21" name="TextBox 20"/>
+          <p:cNvSpPr txBox="1"/>
+          <p:nvPr/>
+        </p:nvSpPr>
+        <p:spPr>
+          <a:xfrm>
+            <a:off x="6438900" y="3975645"/>
+            <a:ext cx="2209800" cy="657225"/>
+          </a:xfrm>
+          <a:prstGeom prst="rect">
+            <a:avLst/>
+          </a:prstGeom>
+          <a:noFill/>
+        </p:spPr>
+        <p:txBody>
+          <a:bodyPr wrap="square" lIns="0" rIns="0" tIns="0" bIns="0" anchor="t">
+            <a:spAutoFit/>
+          </a:bodyPr>
+          <a:lstStyle/>
+          <a:p>
+            <a:pPr algn="l"/>
+            <a:r>
+              <a:rPr b="0" sz="1350" i="0" u="none">
+                <a:solidFill>
+                  <a:srgbClr val="475569"/>
                 </a:solidFill>
                 <a:latin typeface="Plus Jakarta Sans"/>
               </a:rPr>
-              <a:t>www.musicconnection.com</a:t>
-            </a:r>
-          </a:p>
-        </p:txBody>
-      </p:sp>
-      <p:sp>
-        <p:nvSpPr>
-          <p:cNvPr id="10" name="TextBox 9"/>
-          <p:cNvSpPr txBox="1"/>
-          <p:nvPr/>
-        </p:nvSpPr>
-        <p:spPr>
-          <a:xfrm>
-            <a:off x="1666875" y="1819275"/>
-            <a:ext cx="6274593" cy="152400"/>
+              <a:t>Restringido exclusivamente al Top 200 de Spotify México.</a:t>
+            </a:r>
+          </a:p>
+        </p:txBody>
+      </p:sp>
+      <p:sp>
+        <p:nvSpPr>
+          <p:cNvPr id="22" name="TextBox 21"/>
+          <p:cNvSpPr txBox="1"/>
+          <p:nvPr/>
+        </p:nvSpPr>
+        <p:spPr>
+          <a:xfrm>
+            <a:off x="9239250" y="3642270"/>
+            <a:ext cx="2775346" cy="219075"/>
           </a:xfrm>
           <a:prstGeom prst="rect">
             <a:avLst/>
@@ -4991,57 +4862,48 @@
           <a:p>
             <a:pPr algn="l"/>
             <a:r>
-              <a:rPr b="0" sz="975" i="0" u="none">
-                <a:solidFill>
-                  <a:srgbClr val="F8FAFC"/>
+              <a:rPr b="1" sz="1350" i="0" u="none">
+                <a:solidFill>
+                  <a:srgbClr val="0F172A"/>
+                </a:solidFill>
+                <a:latin typeface="Space Grotesk"/>
+              </a:rPr>
+              <a:t>No Extrapolable</a:t>
+            </a:r>
+          </a:p>
+        </p:txBody>
+      </p:sp>
+      <p:sp>
+        <p:nvSpPr>
+          <p:cNvPr id="23" name="TextBox 22"/>
+          <p:cNvSpPr txBox="1"/>
+          <p:nvPr/>
+        </p:nvSpPr>
+        <p:spPr>
+          <a:xfrm>
+            <a:off x="9239250" y="3975645"/>
+            <a:ext cx="2209800" cy="657225"/>
+          </a:xfrm>
+          <a:prstGeom prst="rect">
+            <a:avLst/>
+          </a:prstGeom>
+          <a:noFill/>
+        </p:spPr>
+        <p:txBody>
+          <a:bodyPr wrap="square" lIns="0" rIns="0" tIns="0" bIns="0" anchor="t">
+            <a:spAutoFit/>
+          </a:bodyPr>
+          <a:lstStyle/>
+          <a:p>
+            <a:pPr algn="l"/>
+            <a:r>
+              <a:rPr b="0" sz="1350" i="0" u="none">
+                <a:solidFill>
+                  <a:srgbClr val="475569"/>
                 </a:solidFill>
                 <a:latin typeface="Plus Jakarta Sans"/>
               </a:rPr>
-              <a:t>https://stagsterlabs.com/images/capabilities/cloud-hosting-websites-mobile.png</a:t>
-            </a:r>
-          </a:p>
-        </p:txBody>
-      </p:sp>
-      <p:sp>
-        <p:nvSpPr>
-          <p:cNvPr id="11" name="TextBox 10"/>
-          <p:cNvSpPr txBox="1"/>
-          <p:nvPr/>
-        </p:nvSpPr>
-        <p:spPr>
-          <a:xfrm>
-            <a:off x="1666875" y="2019300"/>
-            <a:ext cx="2345531" cy="200025"/>
-          </a:xfrm>
-          <a:prstGeom prst="rect">
-            <a:avLst/>
-          </a:prstGeom>
-          <a:noFill/>
-        </p:spPr>
-        <p:txBody>
-          <a:bodyPr wrap="none" lIns="0" rIns="0" tIns="0" bIns="0" anchor="t">
-            <a:spAutoFit/>
-          </a:bodyPr>
-          <a:lstStyle/>
-          <a:p>
-            <a:pPr algn="l"/>
-            <a:r>
-              <a:rPr b="0" sz="1200" i="0" u="none">
-                <a:solidFill>
-                  <a:srgbClr val="F8FAFC"/>
-                </a:solidFill>
-                <a:latin typeface="Plus Jakarta Sans"/>
-              </a:rPr>
-              <a:t>Source: </a:t>
-            </a:r>
-            <a:r>
-              <a:rPr b="0" sz="1200" i="0" u="none">
-                <a:solidFill>
-                  <a:srgbClr val="4F46E5"/>
-                </a:solidFill>
-                <a:latin typeface="Plus Jakarta Sans"/>
-              </a:rPr>
-              <a:t>stagsterlabs.com</a:t>
+              <a:t>El modelo pierde validez fuera del intervalo observado.</a:t>
             </a:r>
           </a:p>
         </p:txBody>
@@ -5080,16 +4942,16 @@
         </p:nvSpPr>
         <p:spPr>
           <a:xfrm>
-            <a:off x="609600" y="1341090"/>
-            <a:ext cx="10972800" cy="1571625"/>
+            <a:off x="609600" y="1379190"/>
+            <a:ext cx="3454449" cy="1266825"/>
           </a:xfrm>
           <a:prstGeom prst="roundRect">
             <a:avLst>
-              <a:gd name="adj" fmla="val 9696"/>
+              <a:gd name="adj" fmla="val 12030"/>
             </a:avLst>
           </a:prstGeom>
           <a:solidFill>
-            <a:srgbClr val="0F172A"/>
+            <a:srgbClr val="FFF1F2"/>
           </a:solidFill>
           <a:ln>
             <a:noFill/>
@@ -5126,13 +4988,103 @@
         </p:nvSpPr>
         <p:spPr>
           <a:xfrm>
-            <a:off x="609600" y="4128045"/>
-            <a:ext cx="3505200" cy="1323975"/>
+            <a:off x="4368849" y="1379190"/>
+            <a:ext cx="3454449" cy="1266825"/>
           </a:xfrm>
           <a:prstGeom prst="roundRect">
             <a:avLst>
-              <a:gd name="adj" fmla="val 10071"/>
+              <a:gd name="adj" fmla="val 12030"/>
             </a:avLst>
+          </a:prstGeom>
+          <a:solidFill>
+            <a:srgbClr val="F0F9FF"/>
+          </a:solidFill>
+          <a:ln>
+            <a:noFill/>
+          </a:ln>
+          <a:effectLst/>
+        </p:spPr>
+        <p:style>
+          <a:lnRef idx="1">
+            <a:schemeClr val="accent1"/>
+          </a:lnRef>
+          <a:fillRef idx="3">
+            <a:schemeClr val="accent1"/>
+          </a:fillRef>
+          <a:effectRef idx="2">
+            <a:schemeClr val="accent1"/>
+          </a:effectRef>
+          <a:fontRef idx="minor">
+            <a:schemeClr val="lt1"/>
+          </a:fontRef>
+        </p:style>
+        <p:txBody>
+          <a:bodyPr rtlCol="0" anchor="ctr"/>
+          <a:lstStyle/>
+          <a:p>
+            <a:pPr algn="ctr"/>
+          </a:p>
+        </p:txBody>
+      </p:sp>
+      <p:sp>
+        <p:nvSpPr>
+          <p:cNvPr id="4" name="Rounded Rectangle 3"/>
+          <p:cNvSpPr/>
+          <p:nvPr/>
+        </p:nvSpPr>
+        <p:spPr>
+          <a:xfrm>
+            <a:off x="8128099" y="1379190"/>
+            <a:ext cx="3454449" cy="1266825"/>
+          </a:xfrm>
+          <a:prstGeom prst="roundRect">
+            <a:avLst>
+              <a:gd name="adj" fmla="val 12030"/>
+            </a:avLst>
+          </a:prstGeom>
+          <a:solidFill>
+            <a:srgbClr val="F0FDF4"/>
+          </a:solidFill>
+          <a:ln>
+            <a:noFill/>
+          </a:ln>
+          <a:effectLst/>
+        </p:spPr>
+        <p:style>
+          <a:lnRef idx="1">
+            <a:schemeClr val="accent1"/>
+          </a:lnRef>
+          <a:fillRef idx="3">
+            <a:schemeClr val="accent1"/>
+          </a:fillRef>
+          <a:effectRef idx="2">
+            <a:schemeClr val="accent1"/>
+          </a:effectRef>
+          <a:fontRef idx="minor">
+            <a:schemeClr val="lt1"/>
+          </a:fontRef>
+        </p:style>
+        <p:txBody>
+          <a:bodyPr rtlCol="0" anchor="ctr"/>
+          <a:lstStyle/>
+          <a:p>
+            <a:pPr algn="ctr"/>
+          </a:p>
+        </p:txBody>
+      </p:sp>
+      <p:sp>
+        <p:nvSpPr>
+          <p:cNvPr id="5" name="Rectangle 4"/>
+          <p:cNvSpPr/>
+          <p:nvPr/>
+        </p:nvSpPr>
+        <p:spPr>
+          <a:xfrm>
+            <a:off x="609600" y="4137570"/>
+            <a:ext cx="5372100" cy="1076325"/>
+          </a:xfrm>
+          <a:prstGeom prst="rect">
+            <a:avLst/>
           </a:prstGeom>
           <a:solidFill>
             <a:srgbClr val="F8FAFC"/>
@@ -5166,19 +5118,17 @@
       </p:sp>
       <p:sp>
         <p:nvSpPr>
-          <p:cNvPr id="4" name="Rounded Rectangle 3"/>
+          <p:cNvPr id="6" name="Rectangle 5"/>
           <p:cNvSpPr/>
           <p:nvPr/>
         </p:nvSpPr>
         <p:spPr>
           <a:xfrm>
-            <a:off x="4343400" y="4128045"/>
-            <a:ext cx="3505200" cy="1323975"/>
-          </a:xfrm>
-          <a:prstGeom prst="roundRect">
-            <a:avLst>
-              <a:gd name="adj" fmla="val 10071"/>
-            </a:avLst>
+            <a:off x="6210300" y="4137570"/>
+            <a:ext cx="5372100" cy="1076325"/>
+          </a:xfrm>
+          <a:prstGeom prst="rect">
+            <a:avLst/>
           </a:prstGeom>
           <a:solidFill>
             <a:srgbClr val="F8FAFC"/>
@@ -5212,19 +5162,541 @@
       </p:sp>
       <p:sp>
         <p:nvSpPr>
-          <p:cNvPr id="5" name="Rounded Rectangle 4"/>
+          <p:cNvPr id="7" name="Rectangle 6"/>
           <p:cNvSpPr/>
           <p:nvPr/>
         </p:nvSpPr>
         <p:spPr>
           <a:xfrm>
-            <a:off x="8077200" y="4128045"/>
-            <a:ext cx="3505200" cy="1323975"/>
-          </a:xfrm>
-          <a:prstGeom prst="roundRect">
-            <a:avLst>
-              <a:gd name="adj" fmla="val 10071"/>
-            </a:avLst>
+            <a:off x="609600" y="4137570"/>
+            <a:ext cx="38100" cy="1076325"/>
+          </a:xfrm>
+          <a:prstGeom prst="rect">
+            <a:avLst/>
+          </a:prstGeom>
+          <a:solidFill>
+            <a:srgbClr val="E11D48"/>
+          </a:solidFill>
+          <a:ln>
+            <a:noFill/>
+          </a:ln>
+          <a:effectLst/>
+        </p:spPr>
+        <p:style>
+          <a:lnRef idx="1">
+            <a:schemeClr val="accent1"/>
+          </a:lnRef>
+          <a:fillRef idx="3">
+            <a:schemeClr val="accent1"/>
+          </a:fillRef>
+          <a:effectRef idx="2">
+            <a:schemeClr val="accent1"/>
+          </a:effectRef>
+          <a:fontRef idx="minor">
+            <a:schemeClr val="lt1"/>
+          </a:fontRef>
+        </p:style>
+        <p:txBody>
+          <a:bodyPr rtlCol="0" anchor="ctr"/>
+          <a:lstStyle/>
+          <a:p>
+            <a:pPr algn="ctr"/>
+          </a:p>
+        </p:txBody>
+      </p:sp>
+      <p:sp>
+        <p:nvSpPr>
+          <p:cNvPr id="8" name="Rectangle 7"/>
+          <p:cNvSpPr/>
+          <p:nvPr/>
+        </p:nvSpPr>
+        <p:spPr>
+          <a:xfrm>
+            <a:off x="6210300" y="4137570"/>
+            <a:ext cx="38100" cy="1076325"/>
+          </a:xfrm>
+          <a:prstGeom prst="rect">
+            <a:avLst/>
+          </a:prstGeom>
+          <a:solidFill>
+            <a:srgbClr val="0284C7"/>
+          </a:solidFill>
+          <a:ln>
+            <a:noFill/>
+          </a:ln>
+          <a:effectLst/>
+        </p:spPr>
+        <p:style>
+          <a:lnRef idx="1">
+            <a:schemeClr val="accent1"/>
+          </a:lnRef>
+          <a:fillRef idx="3">
+            <a:schemeClr val="accent1"/>
+          </a:fillRef>
+          <a:effectRef idx="2">
+            <a:schemeClr val="accent1"/>
+          </a:effectRef>
+          <a:fontRef idx="minor">
+            <a:schemeClr val="lt1"/>
+          </a:fontRef>
+        </p:style>
+        <p:txBody>
+          <a:bodyPr rtlCol="0" anchor="ctr"/>
+          <a:lstStyle/>
+          <a:p>
+            <a:pPr algn="ctr"/>
+          </a:p>
+        </p:txBody>
+      </p:sp>
+      <p:sp>
+        <p:nvSpPr>
+          <p:cNvPr id="9" name="TextBox 8"/>
+          <p:cNvSpPr txBox="1"/>
+          <p:nvPr/>
+        </p:nvSpPr>
+        <p:spPr>
+          <a:xfrm>
+            <a:off x="609600" y="457200"/>
+            <a:ext cx="11582400" cy="171450"/>
+          </a:xfrm>
+          <a:prstGeom prst="rect">
+            <a:avLst/>
+          </a:prstGeom>
+          <a:noFill/>
+        </p:spPr>
+        <p:txBody>
+          <a:bodyPr wrap="none" lIns="0" rIns="0" tIns="0" bIns="0" anchor="t">
+            <a:spAutoFit/>
+          </a:bodyPr>
+          <a:lstStyle/>
+          <a:p>
+            <a:pPr algn="l"/>
+            <a:r>
+              <a:rPr b="1" sz="1050" i="0" u="none">
+                <a:solidFill>
+                  <a:srgbClr val="E11D48"/>
+                </a:solidFill>
+                <a:latin typeface="Plus Jakarta Sans"/>
+              </a:rPr>
+              <a:t>SÍNTESIS DEL PROYECTO</a:t>
+            </a:r>
+          </a:p>
+        </p:txBody>
+      </p:sp>
+      <p:sp>
+        <p:nvSpPr>
+          <p:cNvPr id="10" name="TextBox 9"/>
+          <p:cNvSpPr txBox="1"/>
+          <p:nvPr/>
+        </p:nvSpPr>
+        <p:spPr>
+          <a:xfrm>
+            <a:off x="609600" y="685800"/>
+            <a:ext cx="11582400" cy="388590"/>
+          </a:xfrm>
+          <a:prstGeom prst="rect">
+            <a:avLst/>
+          </a:prstGeom>
+          <a:noFill/>
+        </p:spPr>
+        <p:txBody>
+          <a:bodyPr wrap="none" lIns="0" rIns="0" tIns="0" bIns="0" anchor="t">
+            <a:spAutoFit/>
+          </a:bodyPr>
+          <a:lstStyle/>
+          <a:p>
+            <a:pPr algn="l">
+              <a:lnSpc>
+                <a:spcPts val="3060"/>
+              </a:lnSpc>
+            </a:pPr>
+            <a:r>
+              <a:rPr b="1" sz="2550" i="0" u="none">
+                <a:solidFill>
+                  <a:srgbClr val="0F172A"/>
+                </a:solidFill>
+                <a:latin typeface="Space Grotesk"/>
+              </a:rPr>
+              <a:t>Conclusiones y aplicación a la ingeniería</a:t>
+            </a:r>
+          </a:p>
+        </p:txBody>
+      </p:sp>
+      <p:sp>
+        <p:nvSpPr>
+          <p:cNvPr id="11" name="TextBox 10"/>
+          <p:cNvSpPr txBox="1"/>
+          <p:nvPr/>
+        </p:nvSpPr>
+        <p:spPr>
+          <a:xfrm>
+            <a:off x="511168" y="1645890"/>
+            <a:ext cx="3651312" cy="457200"/>
+          </a:xfrm>
+          <a:prstGeom prst="rect">
+            <a:avLst/>
+          </a:prstGeom>
+          <a:noFill/>
+        </p:spPr>
+        <p:txBody>
+          <a:bodyPr wrap="none" lIns="0" rIns="0" tIns="0" bIns="0" anchor="t">
+            <a:spAutoFit/>
+          </a:bodyPr>
+          <a:lstStyle/>
+          <a:p>
+            <a:pPr algn="ctr">
+              <a:lnSpc>
+                <a:spcPts val="3600"/>
+              </a:lnSpc>
+            </a:pPr>
+            <a:r>
+              <a:rPr b="1" sz="3600" i="0" u="none">
+                <a:solidFill>
+                  <a:srgbClr val="E11D48"/>
+                </a:solidFill>
+                <a:latin typeface="Plus Jakarta Sans"/>
+              </a:rPr>
+              <a:t>99.95%</a:t>
+            </a:r>
+          </a:p>
+        </p:txBody>
+      </p:sp>
+      <p:sp>
+        <p:nvSpPr>
+          <p:cNvPr id="12" name="TextBox 11"/>
+          <p:cNvSpPr txBox="1"/>
+          <p:nvPr/>
+        </p:nvSpPr>
+        <p:spPr>
+          <a:xfrm>
+            <a:off x="511168" y="2179290"/>
+            <a:ext cx="3651312" cy="200025"/>
+          </a:xfrm>
+          <a:prstGeom prst="rect">
+            <a:avLst/>
+          </a:prstGeom>
+          <a:noFill/>
+        </p:spPr>
+        <p:txBody>
+          <a:bodyPr wrap="none" lIns="0" rIns="0" tIns="0" bIns="0" anchor="t">
+            <a:spAutoFit/>
+          </a:bodyPr>
+          <a:lstStyle/>
+          <a:p>
+            <a:pPr algn="ctr"/>
+            <a:r>
+              <a:rPr b="1" sz="1200" i="0" u="none">
+                <a:solidFill>
+                  <a:srgbClr val="475569"/>
+                </a:solidFill>
+                <a:latin typeface="Plus Jakarta Sans"/>
+              </a:rPr>
+              <a:t>Varianza explicada por el ajuste</a:t>
+            </a:r>
+          </a:p>
+        </p:txBody>
+      </p:sp>
+      <p:sp>
+        <p:nvSpPr>
+          <p:cNvPr id="13" name="TextBox 12"/>
+          <p:cNvSpPr txBox="1"/>
+          <p:nvPr/>
+        </p:nvSpPr>
+        <p:spPr>
+          <a:xfrm>
+            <a:off x="4270418" y="1645890"/>
+            <a:ext cx="3651312" cy="457200"/>
+          </a:xfrm>
+          <a:prstGeom prst="rect">
+            <a:avLst/>
+          </a:prstGeom>
+          <a:noFill/>
+        </p:spPr>
+        <p:txBody>
+          <a:bodyPr wrap="none" lIns="0" rIns="0" tIns="0" bIns="0" anchor="t">
+            <a:spAutoFit/>
+          </a:bodyPr>
+          <a:lstStyle/>
+          <a:p>
+            <a:pPr algn="ctr">
+              <a:lnSpc>
+                <a:spcPts val="3600"/>
+              </a:lnSpc>
+            </a:pPr>
+            <a:r>
+              <a:rPr b="1" sz="3600" i="0" u="none">
+                <a:solidFill>
+                  <a:srgbClr val="0284C7"/>
+                </a:solidFill>
+                <a:latin typeface="Plus Jakarta Sans"/>
+              </a:rPr>
+              <a:t>3 vs 15</a:t>
+            </a:r>
+          </a:p>
+        </p:txBody>
+      </p:sp>
+      <p:sp>
+        <p:nvSpPr>
+          <p:cNvPr id="14" name="TextBox 13"/>
+          <p:cNvSpPr txBox="1"/>
+          <p:nvPr/>
+        </p:nvSpPr>
+        <p:spPr>
+          <a:xfrm>
+            <a:off x="4270418" y="2179290"/>
+            <a:ext cx="3651312" cy="200025"/>
+          </a:xfrm>
+          <a:prstGeom prst="rect">
+            <a:avLst/>
+          </a:prstGeom>
+          <a:noFill/>
+        </p:spPr>
+        <p:txBody>
+          <a:bodyPr wrap="none" lIns="0" rIns="0" tIns="0" bIns="0" anchor="t">
+            <a:spAutoFit/>
+          </a:bodyPr>
+          <a:lstStyle/>
+          <a:p>
+            <a:pPr algn="ctr"/>
+            <a:r>
+              <a:rPr b="1" sz="1200" i="0" u="none">
+                <a:solidFill>
+                  <a:srgbClr val="475569"/>
+                </a:solidFill>
+                <a:latin typeface="Plus Jakarta Sans"/>
+              </a:rPr>
+              <a:t>Iteraciones: Newton-Raphson vs. Bisección</a:t>
+            </a:r>
+          </a:p>
+        </p:txBody>
+      </p:sp>
+      <p:sp>
+        <p:nvSpPr>
+          <p:cNvPr id="15" name="TextBox 14"/>
+          <p:cNvSpPr txBox="1"/>
+          <p:nvPr/>
+        </p:nvSpPr>
+        <p:spPr>
+          <a:xfrm>
+            <a:off x="8029668" y="1645890"/>
+            <a:ext cx="3651312" cy="457200"/>
+          </a:xfrm>
+          <a:prstGeom prst="rect">
+            <a:avLst/>
+          </a:prstGeom>
+          <a:noFill/>
+        </p:spPr>
+        <p:txBody>
+          <a:bodyPr wrap="none" lIns="0" rIns="0" tIns="0" bIns="0" anchor="t">
+            <a:spAutoFit/>
+          </a:bodyPr>
+          <a:lstStyle/>
+          <a:p>
+            <a:pPr algn="ctr">
+              <a:lnSpc>
+                <a:spcPts val="3600"/>
+              </a:lnSpc>
+            </a:pPr>
+            <a:r>
+              <a:rPr b="1" sz="3600" i="0" u="none">
+                <a:solidFill>
+                  <a:srgbClr val="16A34A"/>
+                </a:solidFill>
+                <a:latin typeface="Plus Jakarta Sans"/>
+              </a:rPr>
+              <a:t>29/09/2023</a:t>
+            </a:r>
+          </a:p>
+        </p:txBody>
+      </p:sp>
+      <p:sp>
+        <p:nvSpPr>
+          <p:cNvPr id="16" name="TextBox 15"/>
+          <p:cNvSpPr txBox="1"/>
+          <p:nvPr/>
+        </p:nvSpPr>
+        <p:spPr>
+          <a:xfrm>
+            <a:off x="8029668" y="2179290"/>
+            <a:ext cx="3651312" cy="200025"/>
+          </a:xfrm>
+          <a:prstGeom prst="rect">
+            <a:avLst/>
+          </a:prstGeom>
+          <a:noFill/>
+        </p:spPr>
+        <p:txBody>
+          <a:bodyPr wrap="none" lIns="0" rIns="0" tIns="0" bIns="0" anchor="t">
+            <a:spAutoFit/>
+          </a:bodyPr>
+          <a:lstStyle/>
+          <a:p>
+            <a:pPr algn="ctr"/>
+            <a:r>
+              <a:rPr b="1" sz="1200" i="0" u="none">
+                <a:solidFill>
+                  <a:srgbClr val="475569"/>
+                </a:solidFill>
+                <a:latin typeface="Plus Jakarta Sans"/>
+              </a:rPr>
+              <a:t>Hito de 100 M (trazadora, ±2 días)</a:t>
+            </a:r>
+          </a:p>
+        </p:txBody>
+      </p:sp>
+      <p:sp>
+        <p:nvSpPr>
+          <p:cNvPr id="17" name="TextBox 16"/>
+          <p:cNvSpPr txBox="1"/>
+          <p:nvPr/>
+        </p:nvSpPr>
+        <p:spPr>
+          <a:xfrm>
+            <a:off x="876300" y="4328070"/>
+            <a:ext cx="6400800" cy="219075"/>
+          </a:xfrm>
+          <a:prstGeom prst="rect">
+            <a:avLst/>
+          </a:prstGeom>
+          <a:noFill/>
+        </p:spPr>
+        <p:txBody>
+          <a:bodyPr wrap="none" lIns="0" rIns="0" tIns="0" bIns="0" anchor="t">
+            <a:spAutoFit/>
+          </a:bodyPr>
+          <a:lstStyle/>
+          <a:p>
+            <a:pPr algn="l"/>
+            <a:r>
+              <a:rPr b="1" sz="1350" i="0" u="none">
+                <a:solidFill>
+                  <a:srgbClr val="0F172A"/>
+                </a:solidFill>
+                <a:latin typeface="Space Grotesk"/>
+              </a:rPr>
+              <a:t>Modelado continuo</a:t>
+            </a:r>
+          </a:p>
+        </p:txBody>
+      </p:sp>
+      <p:sp>
+        <p:nvSpPr>
+          <p:cNvPr id="18" name="TextBox 17"/>
+          <p:cNvSpPr txBox="1"/>
+          <p:nvPr/>
+        </p:nvSpPr>
+        <p:spPr>
+          <a:xfrm>
+            <a:off x="876300" y="4585245"/>
+            <a:ext cx="4972050" cy="438150"/>
+          </a:xfrm>
+          <a:prstGeom prst="rect">
+            <a:avLst/>
+          </a:prstGeom>
+          <a:noFill/>
+        </p:spPr>
+        <p:txBody>
+          <a:bodyPr wrap="square" lIns="0" rIns="0" tIns="0" bIns="0" anchor="t">
+            <a:spAutoFit/>
+          </a:bodyPr>
+          <a:lstStyle/>
+          <a:p>
+            <a:pPr algn="l"/>
+            <a:r>
+              <a:rPr b="0" sz="1350" i="0" u="none">
+                <a:solidFill>
+                  <a:srgbClr val="64748B"/>
+                </a:solidFill>
+                <a:latin typeface="Plus Jakarta Sans"/>
+              </a:rPr>
+              <a:t>La regresión capta la tendencia, la trazadora respeta los datos y Δt cuantifica el error.</a:t>
+            </a:r>
+          </a:p>
+        </p:txBody>
+      </p:sp>
+      <p:sp>
+        <p:nvSpPr>
+          <p:cNvPr id="19" name="TextBox 18"/>
+          <p:cNvSpPr txBox="1"/>
+          <p:nvPr/>
+        </p:nvSpPr>
+        <p:spPr>
+          <a:xfrm>
+            <a:off x="6477000" y="4328070"/>
+            <a:ext cx="5715000" cy="219075"/>
+          </a:xfrm>
+          <a:prstGeom prst="rect">
+            <a:avLst/>
+          </a:prstGeom>
+          <a:noFill/>
+        </p:spPr>
+        <p:txBody>
+          <a:bodyPr wrap="none" lIns="0" rIns="0" tIns="0" bIns="0" anchor="t">
+            <a:spAutoFit/>
+          </a:bodyPr>
+          <a:lstStyle/>
+          <a:p>
+            <a:pPr algn="l"/>
+            <a:r>
+              <a:rPr b="1" sz="1350" i="0" u="none">
+                <a:solidFill>
+                  <a:srgbClr val="0F172A"/>
+                </a:solidFill>
+                <a:latin typeface="Space Grotesk"/>
+              </a:rPr>
+              <a:t>Previsión de Servidores Cloud</a:t>
+            </a:r>
+          </a:p>
+        </p:txBody>
+      </p:sp>
+      <p:sp>
+        <p:nvSpPr>
+          <p:cNvPr id="20" name="TextBox 19"/>
+          <p:cNvSpPr txBox="1"/>
+          <p:nvPr/>
+        </p:nvSpPr>
+        <p:spPr>
+          <a:xfrm>
+            <a:off x="6477000" y="4585245"/>
+            <a:ext cx="4972050" cy="438150"/>
+          </a:xfrm>
+          <a:prstGeom prst="rect">
+            <a:avLst/>
+          </a:prstGeom>
+          <a:noFill/>
+        </p:spPr>
+        <p:txBody>
+          <a:bodyPr wrap="square" lIns="0" rIns="0" tIns="0" bIns="0" anchor="t">
+            <a:spAutoFit/>
+          </a:bodyPr>
+          <a:lstStyle/>
+          <a:p>
+            <a:pPr algn="l"/>
+            <a:r>
+              <a:rPr b="0" sz="1350" i="0" u="none">
+                <a:solidFill>
+                  <a:srgbClr val="64748B"/>
+                </a:solidFill>
+                <a:latin typeface="Plus Jakarta Sans"/>
+              </a:rPr>
+              <a:t>Pico de 205 Mbps a 160 kbps y 372 TB transferidos al llegar a 100 M de streams.</a:t>
+            </a:r>
+          </a:p>
+        </p:txBody>
+      </p:sp>
+      <p:sp>
+        <p:nvSpPr>
+          <p:cNvPr id="5" name="Rectangle 4"/>
+          <p:cNvSpPr/>
+          <p:nvPr/>
+        </p:nvSpPr>
+        <p:spPr>
+          <a:xfrm>
+            <a:off x="609600" y="2900000"/>
+            <a:ext cx="10972800" cy="1076325"/>
+          </a:xfrm>
+          <a:prstGeom prst="rect">
+            <a:avLst/>
           </a:prstGeom>
           <a:solidFill>
             <a:srgbClr val="F8FAFC"/>
@@ -5258,14 +5730,58 @@
       </p:sp>
       <p:sp>
         <p:nvSpPr>
-          <p:cNvPr id="6" name="TextBox 5"/>
-          <p:cNvSpPr txBox="1"/>
-          <p:nvPr/>
-        </p:nvSpPr>
-        <p:spPr>
-          <a:xfrm>
-            <a:off x="609600" y="457200"/>
-            <a:ext cx="11582400" cy="171450"/>
+          <p:cNvPr id="7" name="Rectangle 6"/>
+          <p:cNvSpPr/>
+          <p:nvPr/>
+        </p:nvSpPr>
+        <p:spPr>
+          <a:xfrm>
+            <a:off x="609600" y="2900000"/>
+            <a:ext cx="38100" cy="1076325"/>
+          </a:xfrm>
+          <a:prstGeom prst="rect">
+            <a:avLst/>
+          </a:prstGeom>
+          <a:solidFill>
+            <a:srgbClr val="16A34A"/>
+          </a:solidFill>
+          <a:ln>
+            <a:noFill/>
+          </a:ln>
+          <a:effectLst/>
+        </p:spPr>
+        <p:style>
+          <a:lnRef idx="1">
+            <a:schemeClr val="accent1"/>
+          </a:lnRef>
+          <a:fillRef idx="3">
+            <a:schemeClr val="accent1"/>
+          </a:fillRef>
+          <a:effectRef idx="2">
+            <a:schemeClr val="accent1"/>
+          </a:effectRef>
+          <a:fontRef idx="minor">
+            <a:schemeClr val="lt1"/>
+          </a:fontRef>
+        </p:style>
+        <p:txBody>
+          <a:bodyPr rtlCol="0" anchor="ctr"/>
+          <a:lstStyle/>
+          <a:p>
+            <a:pPr algn="ctr"/>
+          </a:p>
+        </p:txBody>
+      </p:sp>
+      <p:sp>
+        <p:nvSpPr>
+          <p:cNvPr id="17" name="TextBox 16"/>
+          <p:cNvSpPr txBox="1"/>
+          <p:nvPr/>
+        </p:nvSpPr>
+        <p:spPr>
+          <a:xfrm>
+            <a:off x="876300" y="3090500"/>
+            <a:ext cx="10572800" cy="219075"/>
           </a:xfrm>
           <a:prstGeom prst="rect">
             <a:avLst/>
@@ -5280,517 +5796,48 @@
           <a:p>
             <a:pPr algn="l"/>
             <a:r>
-              <a:rPr b="1" sz="1050" i="0" u="none">
-                <a:solidFill>
-                  <a:srgbClr val="E11D48"/>
+              <a:rPr b="1" sz="1350" i="0" u="none">
+                <a:solidFill>
+                  <a:srgbClr val="0F172A"/>
+                </a:solidFill>
+                <a:latin typeface="Space Grotesk"/>
+              </a:rPr>
+              <a:t>Método generalizable</a:t>
+            </a:r>
+          </a:p>
+        </p:txBody>
+      </p:sp>
+      <p:sp>
+        <p:nvSpPr>
+          <p:cNvPr id="18" name="TextBox 17"/>
+          <p:cNvSpPr txBox="1"/>
+          <p:nvPr/>
+        </p:nvSpPr>
+        <p:spPr>
+          <a:xfrm>
+            <a:off x="876300" y="3347675"/>
+            <a:ext cx="10572800" cy="438150"/>
+          </a:xfrm>
+          <a:prstGeom prst="rect">
+            <a:avLst/>
+          </a:prstGeom>
+          <a:noFill/>
+        </p:spPr>
+        <p:txBody>
+          <a:bodyPr wrap="square" lIns="0" rIns="0" tIns="0" bIns="0" anchor="t">
+            <a:spAutoFit/>
+          </a:bodyPr>
+          <a:lstStyle/>
+          <a:p>
+            <a:pPr algn="l"/>
+            <a:r>
+              <a:rPr b="0" sz="1350" i="0" u="none">
+                <a:solidFill>
+                  <a:srgbClr val="64748B"/>
                 </a:solidFill>
                 <a:latin typeface="Plus Jakarta Sans"/>
               </a:rPr>
-              <a:t>MÉTODO NUMÉRICO 2 · CONTRASTE</a:t>
-            </a:r>
-          </a:p>
-        </p:txBody>
-      </p:sp>
-      <p:sp>
-        <p:nvSpPr>
-          <p:cNvPr id="7" name="TextBox 6"/>
-          <p:cNvSpPr txBox="1"/>
-          <p:nvPr/>
-        </p:nvSpPr>
-        <p:spPr>
-          <a:xfrm>
-            <a:off x="609600" y="685800"/>
-            <a:ext cx="11582400" cy="388590"/>
-          </a:xfrm>
-          <a:prstGeom prst="rect">
-            <a:avLst/>
-          </a:prstGeom>
-          <a:noFill/>
-        </p:spPr>
-        <p:txBody>
-          <a:bodyPr wrap="none" lIns="0" rIns="0" tIns="0" bIns="0" anchor="t">
-            <a:spAutoFit/>
-          </a:bodyPr>
-          <a:lstStyle/>
-          <a:p>
-            <a:pPr algn="l">
-              <a:lnSpc>
-                <a:spcPts val="3060"/>
-              </a:lnSpc>
-            </a:pPr>
-            <a:r>
-              <a:rPr b="1" sz="2550" i="0" u="none">
-                <a:solidFill>
-                  <a:srgbClr val="0F172A"/>
-                </a:solidFill>
-                <a:latin typeface="Space Grotesk"/>
-              </a:rPr>
-              <a:t>Hito Adoptado: Trazadora e Incertidumbre</a:t>
-            </a:r>
-          </a:p>
-        </p:txBody>
-      </p:sp>
-      <p:sp>
-        <p:nvSpPr>
-          <p:cNvPr id="8" name="TextBox 7"/>
-          <p:cNvSpPr txBox="1"/>
-          <p:nvPr/>
-        </p:nvSpPr>
-        <p:spPr>
-          <a:xfrm>
-            <a:off x="990600" y="1645890"/>
-            <a:ext cx="11201400" cy="171450"/>
-          </a:xfrm>
-          <a:prstGeom prst="rect">
-            <a:avLst/>
-          </a:prstGeom>
-          <a:noFill/>
-        </p:spPr>
-        <p:txBody>
-          <a:bodyPr wrap="none" lIns="0" rIns="0" tIns="0" bIns="0" anchor="t">
-            <a:spAutoFit/>
-          </a:bodyPr>
-          <a:lstStyle/>
-          <a:p>
-            <a:pPr algn="l"/>
-            <a:r>
-              <a:rPr b="1" sz="1050" i="0" u="none">
-                <a:solidFill>
-                  <a:srgbClr val="FB7185"/>
-                </a:solidFill>
-                <a:latin typeface="Plus Jakarta Sans"/>
-              </a:rPr>
-              <a:t>HITO DE 100 M SEGÚN LA TRAZADORA CÚBICA NATURAL</a:t>
-            </a:r>
-          </a:p>
-        </p:txBody>
-      </p:sp>
-      <p:sp>
-        <p:nvSpPr>
-          <p:cNvPr id="9" name="TextBox 8"/>
-          <p:cNvSpPr txBox="1"/>
-          <p:nvPr/>
-        </p:nvSpPr>
-        <p:spPr>
-          <a:xfrm>
-            <a:off x="990600" y="1931640"/>
-            <a:ext cx="11201400" cy="323850"/>
-          </a:xfrm>
-          <a:prstGeom prst="rect">
-            <a:avLst/>
-          </a:prstGeom>
-          <a:noFill/>
-        </p:spPr>
-        <p:txBody>
-          <a:bodyPr wrap="none" lIns="0" rIns="0" tIns="0" bIns="0" anchor="t">
-            <a:spAutoFit/>
-          </a:bodyPr>
-          <a:lstStyle/>
-          <a:p>
-            <a:pPr algn="l"/>
-            <a:r>
-              <a:rPr b="1" sz="1950" i="0" u="none">
-                <a:solidFill>
-                  <a:srgbClr val="F8FAFC"/>
-                </a:solidFill>
-                <a:latin typeface="Space Grotesk"/>
-              </a:rPr>
-              <a:t>t* = 35.124 semanas  →  29 de septiembre de 2023</a:t>
-            </a:r>
-          </a:p>
-        </p:txBody>
-      </p:sp>
-      <p:sp>
-        <p:nvSpPr>
-          <p:cNvPr id="10" name="TextBox 9"/>
-          <p:cNvSpPr txBox="1"/>
-          <p:nvPr/>
-        </p:nvSpPr>
-        <p:spPr>
-          <a:xfrm>
-            <a:off x="990600" y="2407890"/>
-            <a:ext cx="11201400" cy="200025"/>
-          </a:xfrm>
-          <a:prstGeom prst="rect">
-            <a:avLst/>
-          </a:prstGeom>
-          <a:noFill/>
-        </p:spPr>
-        <p:txBody>
-          <a:bodyPr wrap="none" lIns="0" rIns="0" tIns="0" bIns="0" anchor="t">
-            <a:spAutoFit/>
-          </a:bodyPr>
-          <a:lstStyle/>
-          <a:p>
-            <a:pPr algn="l"/>
-            <a:r>
-              <a:rPr b="0" sz="1200" i="0" u="none">
-                <a:solidFill>
-                  <a:srgbClr val="94A3B8"/>
-                </a:solidFill>
-                <a:latin typeface="Plus Jakarta Sans"/>
-              </a:rPr>
-              <a:t>La trazadora pasa por los 47 datos medidos y coincide con la interpolación lineal de control (t = 35.127 semanas).</a:t>
-            </a:r>
-          </a:p>
-        </p:txBody>
-      </p:sp>
-      <p:sp>
-        <p:nvSpPr>
-          <p:cNvPr id="41" name="Control"/>
-          <p:cNvSpPr txBox="1"/>
-          <p:nvPr/>
-        </p:nvSpPr>
-        <p:spPr>
-          <a:xfrm>
-            <a:off x="612648" y="3200400"/>
-            <a:ext cx="10972800" cy="548640"/>
-          </a:xfrm>
-          <a:prstGeom prst="rect">
-            <a:avLst/>
-          </a:prstGeom>
-          <a:noFill/>
-        </p:spPr>
-        <p:txBody>
-          <a:bodyPr wrap="square" lIns="0" rIns="0" tIns="0" bIns="0" anchor="t"/>
-          <a:lstStyle/>
-          <a:p>
-            <a:pPr algn="l"/>
-            <a:r>
-              <a:rPr b="0" sz="1200" i="0" u="none">
-                <a:solidFill>
-                  <a:srgbClr val="475569"/>
-                </a:solidFill>
-                <a:latin typeface="Plus Jakarta Sans"/>
-              </a:rPr>
-              <a:t>Control: interpolación lineal entre la semana 35 (99.602 M) y la 36 (102.738 M) da t = 35.127 semanas, a 0.4 horas de la trazadora. La regresión no pasa por esos puntos y ubica el cruce 2.77 días más tarde.</a:t>
-            </a:r>
-          </a:p>
-        </p:txBody>
-      </p:sp>
-      <p:sp>
-        <p:nvSpPr>
-          <p:cNvPr id="11" name="TextBox 10"/>
-          <p:cNvSpPr txBox="1"/>
-          <p:nvPr/>
-        </p:nvSpPr>
-        <p:spPr>
-          <a:xfrm>
-            <a:off x="838200" y="4356645"/>
-            <a:ext cx="3810000" cy="171450"/>
-          </a:xfrm>
-          <a:prstGeom prst="rect">
-            <a:avLst/>
-          </a:prstGeom>
-          <a:noFill/>
-        </p:spPr>
-        <p:txBody>
-          <a:bodyPr wrap="none" lIns="0" rIns="0" tIns="0" bIns="0" anchor="t">
-            <a:spAutoFit/>
-          </a:bodyPr>
-          <a:lstStyle/>
-          <a:p>
-            <a:pPr algn="l"/>
-            <a:r>
-              <a:rPr b="1" sz="1050" i="0" u="none">
-                <a:solidFill>
-                  <a:srgbClr val="64748B"/>
-                </a:solidFill>
-                <a:latin typeface="Plus Jakarta Sans"/>
-              </a:rPr>
-              <a:t>RAÍZ DE LA REGRESIÓN</a:t>
-            </a:r>
-          </a:p>
-        </p:txBody>
-      </p:sp>
-      <p:sp>
-        <p:nvSpPr>
-          <p:cNvPr id="12" name="TextBox 11"/>
-          <p:cNvSpPr txBox="1"/>
-          <p:nvPr/>
-        </p:nvSpPr>
-        <p:spPr>
-          <a:xfrm>
-            <a:off x="838200" y="4585245"/>
-            <a:ext cx="3810000" cy="381000"/>
-          </a:xfrm>
-          <a:prstGeom prst="rect">
-            <a:avLst/>
-          </a:prstGeom>
-          <a:noFill/>
-        </p:spPr>
-        <p:txBody>
-          <a:bodyPr wrap="none" lIns="0" rIns="0" tIns="0" bIns="0" anchor="t">
-            <a:spAutoFit/>
-          </a:bodyPr>
-          <a:lstStyle/>
-          <a:p>
-            <a:pPr algn="l">
-              <a:lnSpc>
-                <a:spcPts val="3000"/>
-              </a:lnSpc>
-            </a:pPr>
-            <a:r>
-              <a:rPr b="1" sz="3000" i="0" u="none">
-                <a:solidFill>
-                  <a:srgbClr val="E11D48"/>
-                </a:solidFill>
-                <a:latin typeface="Plus Jakarta Sans"/>
-              </a:rPr>
-              <a:t>35.520 sem</a:t>
-            </a:r>
-          </a:p>
-        </p:txBody>
-      </p:sp>
-      <p:sp>
-        <p:nvSpPr>
-          <p:cNvPr id="13" name="TextBox 12"/>
-          <p:cNvSpPr txBox="1"/>
-          <p:nvPr/>
-        </p:nvSpPr>
-        <p:spPr>
-          <a:xfrm>
-            <a:off x="838200" y="5023395"/>
-            <a:ext cx="3810000" cy="200025"/>
-          </a:xfrm>
-          <a:prstGeom prst="rect">
-            <a:avLst/>
-          </a:prstGeom>
-          <a:noFill/>
-        </p:spPr>
-        <p:txBody>
-          <a:bodyPr wrap="none" lIns="0" rIns="0" tIns="0" bIns="0" anchor="t">
-            <a:spAutoFit/>
-          </a:bodyPr>
-          <a:lstStyle/>
-          <a:p>
-            <a:pPr algn="l"/>
-            <a:r>
-              <a:rPr b="1" sz="1200" i="0" u="none">
-                <a:solidFill>
-                  <a:srgbClr val="334155"/>
-                </a:solidFill>
-                <a:latin typeface="Plus Jakarta Sans"/>
-              </a:rPr>
-              <a:t>Bisección y Newton coinciden: 2 de octubre</a:t>
-            </a:r>
-          </a:p>
-        </p:txBody>
-      </p:sp>
-      <p:sp>
-        <p:nvSpPr>
-          <p:cNvPr id="14" name="TextBox 13"/>
-          <p:cNvSpPr txBox="1"/>
-          <p:nvPr/>
-        </p:nvSpPr>
-        <p:spPr>
-          <a:xfrm>
-            <a:off x="4572000" y="4356645"/>
-            <a:ext cx="3810000" cy="171450"/>
-          </a:xfrm>
-          <a:prstGeom prst="rect">
-            <a:avLst/>
-          </a:prstGeom>
-          <a:noFill/>
-        </p:spPr>
-        <p:txBody>
-          <a:bodyPr wrap="none" lIns="0" rIns="0" tIns="0" bIns="0" anchor="t">
-            <a:spAutoFit/>
-          </a:bodyPr>
-          <a:lstStyle/>
-          <a:p>
-            <a:pPr algn="l"/>
-            <a:r>
-              <a:rPr b="1" sz="1050" i="0" u="none">
-                <a:solidFill>
-                  <a:srgbClr val="64748B"/>
-                </a:solidFill>
-                <a:latin typeface="Plus Jakarta Sans"/>
-              </a:rPr>
-              <a:t>INCERTIDUMBRE DEL MODELO</a:t>
-            </a:r>
-          </a:p>
-        </p:txBody>
-      </p:sp>
-      <p:sp>
-        <p:nvSpPr>
-          <p:cNvPr id="15" name="TextBox 14"/>
-          <p:cNvSpPr txBox="1"/>
-          <p:nvPr/>
-        </p:nvSpPr>
-        <p:spPr>
-          <a:xfrm>
-            <a:off x="4572000" y="4585245"/>
-            <a:ext cx="3810000" cy="381000"/>
-          </a:xfrm>
-          <a:prstGeom prst="rect">
-            <a:avLst/>
-          </a:prstGeom>
-          <a:noFill/>
-        </p:spPr>
-        <p:txBody>
-          <a:bodyPr wrap="none" lIns="0" rIns="0" tIns="0" bIns="0" anchor="t">
-            <a:spAutoFit/>
-          </a:bodyPr>
-          <a:lstStyle/>
-          <a:p>
-            <a:pPr algn="l">
-              <a:lnSpc>
-                <a:spcPts val="3000"/>
-              </a:lnSpc>
-            </a:pPr>
-            <a:r>
-              <a:rPr b="1" sz="3000" i="0" u="none">
-                <a:solidFill>
-                  <a:srgbClr val="0F172A"/>
-                </a:solidFill>
-                <a:latin typeface="Plus Jakarta Sans"/>
-              </a:rPr>
-              <a:t>± 1.92 días</a:t>
-            </a:r>
-          </a:p>
-        </p:txBody>
-      </p:sp>
-      <p:sp>
-        <p:nvSpPr>
-          <p:cNvPr id="16" name="TextBox 15"/>
-          <p:cNvSpPr txBox="1"/>
-          <p:nvPr/>
-        </p:nvSpPr>
-        <p:spPr>
-          <a:xfrm>
-            <a:off x="4572000" y="5023395"/>
-            <a:ext cx="3810000" cy="200025"/>
-          </a:xfrm>
-          <a:prstGeom prst="rect">
-            <a:avLst/>
-          </a:prstGeom>
-          <a:noFill/>
-        </p:spPr>
-        <p:txBody>
-          <a:bodyPr wrap="none" lIns="0" rIns="0" tIns="0" bIns="0" anchor="t">
-            <a:spAutoFit/>
-          </a:bodyPr>
-          <a:lstStyle/>
-          <a:p>
-            <a:pPr algn="l"/>
-            <a:r>
-              <a:rPr b="1" sz="1200" i="0" u="none">
-                <a:solidFill>
-                  <a:srgbClr val="334155"/>
-                </a:solidFill>
-                <a:latin typeface="Plus Jakarta Sans"/>
-              </a:rPr>
-              <a:t>Δt = S_y/x / S'(t*) = 0.927 / 3.374</a:t>
-            </a:r>
-          </a:p>
-        </p:txBody>
-      </p:sp>
-      <p:sp>
-        <p:nvSpPr>
-          <p:cNvPr id="17" name="TextBox 16"/>
-          <p:cNvSpPr txBox="1"/>
-          <p:nvPr/>
-        </p:nvSpPr>
-        <p:spPr>
-          <a:xfrm>
-            <a:off x="8305800" y="4356645"/>
-            <a:ext cx="3810000" cy="171450"/>
-          </a:xfrm>
-          <a:prstGeom prst="rect">
-            <a:avLst/>
-          </a:prstGeom>
-          <a:noFill/>
-        </p:spPr>
-        <p:txBody>
-          <a:bodyPr wrap="none" lIns="0" rIns="0" tIns="0" bIns="0" anchor="t">
-            <a:spAutoFit/>
-          </a:bodyPr>
-          <a:lstStyle/>
-          <a:p>
-            <a:pPr algn="l"/>
-            <a:r>
-              <a:rPr b="1" sz="1050" i="0" u="none">
-                <a:solidFill>
-                  <a:srgbClr val="64748B"/>
-                </a:solidFill>
-                <a:latin typeface="Plus Jakarta Sans"/>
-              </a:rPr>
-              <a:t>REGRESIÓN VS. TRAZADORA</a:t>
-            </a:r>
-          </a:p>
-        </p:txBody>
-      </p:sp>
-      <p:sp>
-        <p:nvSpPr>
-          <p:cNvPr id="18" name="TextBox 17"/>
-          <p:cNvSpPr txBox="1"/>
-          <p:nvPr/>
-        </p:nvSpPr>
-        <p:spPr>
-          <a:xfrm>
-            <a:off x="8305800" y="4585245"/>
-            <a:ext cx="3810000" cy="381000"/>
-          </a:xfrm>
-          <a:prstGeom prst="rect">
-            <a:avLst/>
-          </a:prstGeom>
-          <a:noFill/>
-        </p:spPr>
-        <p:txBody>
-          <a:bodyPr wrap="none" lIns="0" rIns="0" tIns="0" bIns="0" anchor="t">
-            <a:spAutoFit/>
-          </a:bodyPr>
-          <a:lstStyle/>
-          <a:p>
-            <a:pPr algn="l">
-              <a:lnSpc>
-                <a:spcPts val="3000"/>
-              </a:lnSpc>
-            </a:pPr>
-            <a:r>
-              <a:rPr b="1" sz="3000" i="0" u="none">
-                <a:solidFill>
-                  <a:srgbClr val="0284C7"/>
-                </a:solidFill>
-                <a:latin typeface="Plus Jakarta Sans"/>
-              </a:rPr>
-              <a:t>2.77 días</a:t>
-            </a:r>
-          </a:p>
-        </p:txBody>
-      </p:sp>
-      <p:sp>
-        <p:nvSpPr>
-          <p:cNvPr id="19" name="TextBox 18"/>
-          <p:cNvSpPr txBox="1"/>
-          <p:nvPr/>
-        </p:nvSpPr>
-        <p:spPr>
-          <a:xfrm>
-            <a:off x="8305800" y="5023395"/>
-            <a:ext cx="3810000" cy="200025"/>
-          </a:xfrm>
-          <a:prstGeom prst="rect">
-            <a:avLst/>
-          </a:prstGeom>
-          <a:noFill/>
-        </p:spPr>
-        <p:txBody>
-          <a:bodyPr wrap="none" lIns="0" rIns="0" tIns="0" bIns="0" anchor="t">
-            <a:spAutoFit/>
-          </a:bodyPr>
-          <a:lstStyle/>
-          <a:p>
-            <a:pPr algn="l"/>
-            <a:r>
-              <a:rPr b="1" sz="1200" i="0" u="none">
-                <a:solidFill>
-                  <a:srgbClr val="334155"/>
-                </a:solidFill>
-                <a:latin typeface="Plus Jakarta Sans"/>
-              </a:rPr>
-              <a:t>Supera Δt: se adopta la trazadora</a:t>
+              <a:t>La cúbica local (±6 semanas alrededor del pico) detecta el pico en las 3 canciones, y la regla a &lt; 0 avisa cuándo el ajuste global no sirve.</a:t>
             </a:r>
           </a:p>
         </p:txBody>
@@ -5809,7 +5856,7 @@
     <p:bg>
       <p:bgPr>
         <a:solidFill>
-          <a:srgbClr val="FFFFFF"/>
+          <a:srgbClr val="0F172A"/>
         </a:solidFill>
         <a:effectLst/>
       </p:bgPr>
@@ -5829,16 +5876,16 @@
         </p:nvSpPr>
         <p:spPr>
           <a:xfrm>
-            <a:off x="609600" y="5895975"/>
-            <a:ext cx="5334000" cy="504825"/>
+            <a:off x="3581400" y="4007048"/>
+            <a:ext cx="5029200" cy="600075"/>
           </a:xfrm>
           <a:prstGeom prst="roundRect">
             <a:avLst>
-              <a:gd name="adj" fmla="val 22641"/>
+              <a:gd name="adj" fmla="val 22222"/>
             </a:avLst>
           </a:prstGeom>
           <a:solidFill>
-            <a:srgbClr val="F3E8FF"/>
+            <a:srgbClr val="1E293B"/>
           </a:solidFill>
           <a:ln>
             <a:noFill/>
@@ -5869,84 +5916,49 @@
       </p:sp>
       <p:sp>
         <p:nvSpPr>
-          <p:cNvPr id="3" name="Rounded Rectangle 2"/>
-          <p:cNvSpPr/>
-          <p:nvPr/>
-        </p:nvSpPr>
-        <p:spPr>
-          <a:xfrm>
-            <a:off x="6248400" y="5895975"/>
-            <a:ext cx="5334000" cy="504825"/>
-          </a:xfrm>
-          <a:prstGeom prst="roundRect">
-            <a:avLst>
-              <a:gd name="adj" fmla="val 22641"/>
-            </a:avLst>
-          </a:prstGeom>
-          <a:solidFill>
-            <a:srgbClr val="FEE2E2"/>
-          </a:solidFill>
-          <a:ln>
-            <a:noFill/>
-          </a:ln>
-          <a:effectLst/>
-        </p:spPr>
-        <p:style>
-          <a:lnRef idx="1">
-            <a:schemeClr val="accent1"/>
-          </a:lnRef>
-          <a:fillRef idx="3">
-            <a:schemeClr val="accent1"/>
-          </a:fillRef>
-          <a:effectRef idx="2">
-            <a:schemeClr val="accent1"/>
-          </a:effectRef>
-          <a:fontRef idx="minor">
-            <a:schemeClr val="lt1"/>
-          </a:fontRef>
-        </p:style>
-        <p:txBody>
-          <a:bodyPr rtlCol="0" anchor="ctr"/>
+          <p:cNvPr id="3" name="TextBox 2"/>
+          <p:cNvSpPr txBox="1"/>
+          <p:nvPr/>
+        </p:nvSpPr>
+        <p:spPr>
+          <a:xfrm>
+            <a:off x="4119562" y="1812577"/>
+            <a:ext cx="3952875" cy="171450"/>
+          </a:xfrm>
+          <a:prstGeom prst="rect">
+            <a:avLst/>
+          </a:prstGeom>
+          <a:noFill/>
+        </p:spPr>
+        <p:txBody>
+          <a:bodyPr wrap="none" lIns="0" rIns="0" tIns="0" bIns="0" anchor="t">
+            <a:spAutoFit/>
+          </a:bodyPr>
           <a:lstStyle/>
           <a:p>
             <a:pPr algn="ctr"/>
-          </a:p>
-        </p:txBody>
-      </p:sp>
-      <p:pic>
-        <p:nvPicPr>
-          <p:cNvPr id="4" name="Picture 3" descr="image.png"/>
-          <p:cNvPicPr>
-            <a:picLocks noChangeAspect="1"/>
-          </p:cNvPicPr>
-          <p:nvPr/>
-        </p:nvPicPr>
-        <p:blipFill>
-          <a:blip r:embed="rId2"/>
-          <a:stretch>
-            <a:fillRect/>
-          </a:stretch>
-        </p:blipFill>
-        <p:spPr>
-          <a:xfrm>
-            <a:off x="914400" y="2065883"/>
-            <a:ext cx="10363200" cy="2857500"/>
-          </a:xfrm>
-          <a:prstGeom prst="rect">
-            <a:avLst/>
-          </a:prstGeom>
-        </p:spPr>
-      </p:pic>
-      <p:sp>
-        <p:nvSpPr>
-          <p:cNvPr id="5" name="TextBox 4"/>
-          <p:cNvSpPr txBox="1"/>
-          <p:nvPr/>
-        </p:nvSpPr>
-        <p:spPr>
-          <a:xfrm>
-            <a:off x="609600" y="457200"/>
-            <a:ext cx="8548687" cy="171450"/>
+            <a:r>
+              <a:rPr b="1" sz="1050" i="0" u="none">
+                <a:solidFill>
+                  <a:srgbClr val="FB7185"/>
+                </a:solidFill>
+                <a:latin typeface="Plus Jakarta Sans"/>
+              </a:rPr>
+              <a:t>TALLER DE MÉTODOS NUMÉRICOS 2026</a:t>
+            </a:r>
+          </a:p>
+        </p:txBody>
+      </p:sp>
+      <p:sp>
+        <p:nvSpPr>
+          <p:cNvPr id="4" name="TextBox 3"/>
+          <p:cNvSpPr txBox="1"/>
+          <p:nvPr/>
+        </p:nvSpPr>
+        <p:spPr>
+          <a:xfrm>
+            <a:off x="2814339" y="2136427"/>
+            <a:ext cx="6563320" cy="670470"/>
           </a:xfrm>
           <a:prstGeom prst="rect">
             <a:avLst/>
@@ -5959,54 +5971,93 @@
           </a:bodyPr>
           <a:lstStyle/>
           <a:p>
-            <a:pPr algn="l"/>
-            <a:r>
-              <a:rPr b="1" sz="1050" i="0" u="none">
-                <a:solidFill>
-                  <a:srgbClr val="7C3AED"/>
-                </a:solidFill>
-                <a:latin typeface="Plus Jakarta Sans"/>
-              </a:rPr>
-              <a:t>GENERALIZACIÓN</a:t>
-            </a:r>
-          </a:p>
-        </p:txBody>
-      </p:sp>
-      <p:sp>
-        <p:nvSpPr>
-          <p:cNvPr id="6" name="TextBox 5"/>
-          <p:cNvSpPr txBox="1"/>
-          <p:nvPr/>
-        </p:nvSpPr>
-        <p:spPr>
-          <a:xfrm>
-            <a:off x="609600" y="666750"/>
-            <a:ext cx="8976121" cy="388590"/>
-          </a:xfrm>
-          <a:prstGeom prst="rect">
-            <a:avLst/>
-          </a:prstGeom>
-          <a:noFill/>
-        </p:spPr>
-        <p:txBody>
-          <a:bodyPr wrap="none" lIns="0" rIns="0" tIns="0" bIns="0" anchor="t">
-            <a:spAutoFit/>
-          </a:bodyPr>
-          <a:lstStyle/>
-          <a:p>
-            <a:pPr algn="l">
+            <a:pPr algn="ctr">
               <a:lnSpc>
-                <a:spcPts val="3060"/>
+                <a:spcPts val="5280"/>
               </a:lnSpc>
             </a:pPr>
             <a:r>
-              <a:rPr b="1" sz="2550" i="0" u="none">
-                <a:solidFill>
-                  <a:srgbClr val="0F172A"/>
+              <a:rPr b="1" sz="4800" i="0" u="none">
+                <a:solidFill>
+                  <a:srgbClr val="FFFFFF"/>
                 </a:solidFill>
                 <a:latin typeface="Space Grotesk"/>
               </a:rPr>
-              <a:t>¿Sirve para Cualquier Canción? 3 Casos Reales</a:t>
+              <a:t>¡Muchas Gracias!</a:t>
+            </a:r>
+          </a:p>
+        </p:txBody>
+      </p:sp>
+      <p:sp>
+        <p:nvSpPr>
+          <p:cNvPr id="5" name="TextBox 4"/>
+          <p:cNvSpPr txBox="1"/>
+          <p:nvPr/>
+        </p:nvSpPr>
+        <p:spPr>
+          <a:xfrm>
+            <a:off x="2226468" y="2997398"/>
+            <a:ext cx="7739062" cy="628650"/>
+          </a:xfrm>
+          <a:prstGeom prst="rect">
+            <a:avLst/>
+          </a:prstGeom>
+          <a:noFill/>
+        </p:spPr>
+        <p:txBody>
+          <a:bodyPr wrap="square" lIns="0" rIns="0" tIns="0" bIns="0" anchor="t">
+            <a:spAutoFit/>
+          </a:bodyPr>
+          <a:lstStyle/>
+          <a:p>
+            <a:pPr algn="ctr">
+              <a:lnSpc>
+                <a:spcPts val="2475"/>
+              </a:lnSpc>
+            </a:pPr>
+            <a:r>
+              <a:rPr b="0" sz="1650" i="0" u="none">
+                <a:solidFill>
+                  <a:srgbClr val="94A3B8"/>
+                </a:solidFill>
+                <a:latin typeface="Plus Jakarta Sans"/>
+              </a:rPr>
+              <a:t>¿Preguntas?</a:t>
+            </a:r>
+          </a:p>
+        </p:txBody>
+      </p:sp>
+      <p:sp>
+        <p:nvSpPr>
+          <p:cNvPr id="6" name="TextBox 5"/>
+          <p:cNvSpPr txBox="1"/>
+          <p:nvPr/>
+        </p:nvSpPr>
+        <p:spPr>
+          <a:xfrm>
+            <a:off x="3893343" y="4873823"/>
+            <a:ext cx="4405312" cy="171450"/>
+          </a:xfrm>
+          <a:prstGeom prst="rect">
+            <a:avLst/>
+          </a:prstGeom>
+          <a:noFill/>
+        </p:spPr>
+        <p:txBody>
+          <a:bodyPr wrap="none" lIns="0" rIns="0" tIns="0" bIns="0" anchor="t">
+            <a:spAutoFit/>
+          </a:bodyPr>
+          <a:lstStyle/>
+          <a:p>
+            <a:pPr algn="ctr"/>
+            <a:r>
+              <a:rPr b="0" sz="1050" i="0" u="none">
+                <a:solidFill>
+                  <a:srgbClr val="64748B"/>
+                </a:solidFill>
+                <a:latin typeface="Plus Jakarta Sans"/>
+              </a:rPr>
+              <a:t>Universidad Católica de Córdoba · Facultad de Ingeniería</a:t>
             </a:r>
           </a:p>
         </p:txBody>
@@ -6019,8 +6070,8 @@
         </p:nvSpPr>
         <p:spPr>
           <a:xfrm>
-            <a:off x="800100" y="6048375"/>
-            <a:ext cx="6191250" cy="200025"/>
+            <a:off x="3781425" y="4197548"/>
+            <a:ext cx="1238250" cy="219075"/>
           </a:xfrm>
           <a:prstGeom prst="rect">
             <a:avLst/>
@@ -6033,15 +6084,15 @@
           </a:bodyPr>
           <a:lstStyle/>
           <a:p>
-            <a:pPr algn="l"/>
-            <a:r>
-              <a:rPr b="1" sz="1200" i="0" u="none">
-                <a:solidFill>
-                  <a:srgbClr val="6B21A8"/>
+            <a:pPr algn="ctr"/>
+            <a:r>
+              <a:rPr b="1" sz="1350" i="0" u="none">
+                <a:solidFill>
+                  <a:srgbClr val="E2E8F0"/>
                 </a:solidFill>
                 <a:latin typeface="Plus Jakarta Sans"/>
               </a:rPr>
-              <a:t>Resurgimiento (a negativo): el modelo detecta el pico de demanda.</a:t>
+              <a:t>Pedro Gatti</a:t>
             </a:r>
           </a:p>
         </p:txBody>
@@ -6054,8 +6105,8 @@
         </p:nvSpPr>
         <p:spPr>
           <a:xfrm>
-            <a:off x="6438900" y="6048375"/>
-            <a:ext cx="5753100" cy="200025"/>
+            <a:off x="5230415" y="4197548"/>
+            <a:ext cx="1512093" cy="219075"/>
           </a:xfrm>
           <a:prstGeom prst="rect">
             <a:avLst/>
@@ -6068,15 +6119,15 @@
           </a:bodyPr>
           <a:lstStyle/>
           <a:p>
-            <a:pPr algn="l"/>
-            <a:r>
-              <a:rPr b="1" sz="1200" i="0" u="none">
-                <a:solidFill>
-                  <a:srgbClr val="991B1B"/>
+            <a:pPr algn="ctr"/>
+            <a:r>
+              <a:rPr b="1" sz="1350" i="0" u="none">
+                <a:solidFill>
+                  <a:srgbClr val="E2E8F0"/>
                 </a:solidFill>
                 <a:latin typeface="Plus Jakarta Sans"/>
               </a:rPr>
-              <a:t>Estrenos (a positivo): la inflexión es un mínimo, no aplica.</a:t>
+              <a:t>Facundo Grillo</a:t>
             </a:r>
           </a:p>
         </p:txBody>
@@ -6089,8 +6140,8 @@
         </p:nvSpPr>
         <p:spPr>
           <a:xfrm>
-            <a:off x="612648" y="1207008"/>
-            <a:ext cx="1536192" cy="171450"/>
+            <a:off x="6949678" y="4197548"/>
+            <a:ext cx="1464468" cy="219075"/>
           </a:xfrm>
           <a:prstGeom prst="rect">
             <a:avLst/>
@@ -6103,50 +6154,15 @@
           </a:bodyPr>
           <a:lstStyle/>
           <a:p>
-            <a:pPr algn="l"/>
-            <a:r>
-              <a:rPr b="1" sz="1050" i="0" u="none">
-                <a:solidFill>
-                  <a:srgbClr val="8B5CF6"/>
+            <a:pPr algn="ctr"/>
+            <a:r>
+              <a:rPr b="1" sz="1350" i="0" u="none">
+                <a:solidFill>
+                  <a:srgbClr val="E2E8F0"/>
                 </a:solidFill>
                 <a:latin typeface="Plus Jakarta Sans"/>
               </a:rPr>
-              <a:t>Streams semanales</a:t>
-            </a:r>
-          </a:p>
-        </p:txBody>
-      </p:sp>
-      <p:sp>
-        <p:nvSpPr>
-          <p:cNvPr id="10" name="TextBox 9"/>
-          <p:cNvSpPr txBox="1"/>
-          <p:nvPr/>
-        </p:nvSpPr>
-        <p:spPr>
-          <a:xfrm>
-            <a:off x="2468879" y="1207008"/>
-            <a:ext cx="1700784" cy="171450"/>
-          </a:xfrm>
-          <a:prstGeom prst="rect">
-            <a:avLst/>
-          </a:prstGeom>
-          <a:noFill/>
-        </p:spPr>
-        <p:txBody>
-          <a:bodyPr wrap="none" lIns="0" rIns="0" tIns="0" bIns="0" anchor="t">
-            <a:spAutoFit/>
-          </a:bodyPr>
-          <a:lstStyle/>
-          <a:p>
-            <a:pPr algn="l"/>
-            <a:r>
-              <a:rPr b="1" sz="1050" i="0" u="none">
-                <a:solidFill>
-                  <a:srgbClr val="6D28D9"/>
-                </a:solidFill>
-                <a:latin typeface="Plus Jakarta Sans"/>
-              </a:rPr>
-              <a:t>Derivada del modelo</a:t>
+              <a:t>Gonzalo Marin</a:t>
             </a:r>
           </a:p>
         </p:txBody>
@@ -6165,7 +6181,7 @@
     <p:bg>
       <p:bgPr>
         <a:solidFill>
-          <a:srgbClr val="FFFFFF"/>
+          <a:srgbClr val="090D16"/>
         </a:solidFill>
         <a:effectLst/>
       </p:bgPr>
@@ -6179,22 +6195,62 @@
       <p:grpSpPr/>
       <p:sp>
         <p:nvSpPr>
-          <p:cNvPr id="2" name="Rounded Rectangle 1"/>
+          <p:cNvPr id="2" name="Rectangle 1"/>
           <p:cNvSpPr/>
           <p:nvPr/>
         </p:nvSpPr>
         <p:spPr>
           <a:xfrm>
-            <a:off x="609600" y="5895975"/>
-            <a:ext cx="5334000" cy="504825"/>
-          </a:xfrm>
-          <a:prstGeom prst="roundRect">
-            <a:avLst>
-              <a:gd name="adj" fmla="val 22641"/>
-            </a:avLst>
+            <a:off x="571500" y="866775"/>
+            <a:ext cx="11049000" cy="771525"/>
+          </a:xfrm>
+          <a:prstGeom prst="rect">
+            <a:avLst/>
+          </a:prstGeom>
+          <a:noFill/>
+          <a:ln>
+            <a:noFill/>
+          </a:ln>
+          <a:effectLst/>
+        </p:spPr>
+        <p:style>
+          <a:lnRef idx="1">
+            <a:schemeClr val="accent1"/>
+          </a:lnRef>
+          <a:fillRef idx="3">
+            <a:schemeClr val="accent1"/>
+          </a:fillRef>
+          <a:effectRef idx="2">
+            <a:schemeClr val="accent1"/>
+          </a:effectRef>
+          <a:fontRef idx="minor">
+            <a:schemeClr val="lt1"/>
+          </a:fontRef>
+        </p:style>
+        <p:txBody>
+          <a:bodyPr rtlCol="0" anchor="ctr"/>
+          <a:lstStyle/>
+          <a:p>
+            <a:pPr algn="ctr"/>
+          </a:p>
+        </p:txBody>
+      </p:sp>
+      <p:sp>
+        <p:nvSpPr>
+          <p:cNvPr id="3" name="Rectangle 2"/>
+          <p:cNvSpPr/>
+          <p:nvPr/>
+        </p:nvSpPr>
+        <p:spPr>
+          <a:xfrm>
+            <a:off x="571500" y="1628775"/>
+            <a:ext cx="11049000" cy="9525"/>
+          </a:xfrm>
+          <a:prstGeom prst="rect">
+            <a:avLst/>
           </a:prstGeom>
           <a:solidFill>
-            <a:srgbClr val="F3E8FF"/>
+            <a:srgbClr val="757575"/>
           </a:solidFill>
           <a:ln>
             <a:noFill/>
@@ -6225,22 +6281,20 @@
       </p:sp>
       <p:sp>
         <p:nvSpPr>
-          <p:cNvPr id="3" name="Rounded Rectangle 2"/>
+          <p:cNvPr id="4" name="Rectangle 3"/>
           <p:cNvSpPr/>
           <p:nvPr/>
         </p:nvSpPr>
         <p:spPr>
           <a:xfrm>
-            <a:off x="6248400" y="5895975"/>
-            <a:ext cx="5334000" cy="504825"/>
-          </a:xfrm>
-          <a:prstGeom prst="roundRect">
-            <a:avLst>
-              <a:gd name="adj" fmla="val 22641"/>
-            </a:avLst>
+            <a:off x="571500" y="1628775"/>
+            <a:ext cx="11049000" cy="9525"/>
+          </a:xfrm>
+          <a:prstGeom prst="rect">
+            <a:avLst/>
           </a:prstGeom>
           <a:solidFill>
-            <a:srgbClr val="FEE2E2"/>
+            <a:srgbClr val="757575"/>
           </a:solidFill>
           <a:ln>
             <a:noFill/>
@@ -6271,7 +6325,7 @@
       </p:sp>
       <p:pic>
         <p:nvPicPr>
-          <p:cNvPr id="4" name="Picture 3" descr="image.png"/>
+          <p:cNvPr id="5" name="Picture 4" descr="image.png"/>
           <p:cNvPicPr>
             <a:picLocks noChangeAspect="1"/>
           </p:cNvPicPr>
@@ -6285,24 +6339,48 @@
         </p:blipFill>
         <p:spPr>
           <a:xfrm>
-            <a:off x="914400" y="2065883"/>
-            <a:ext cx="10363200" cy="2857500"/>
+            <a:off x="571500" y="1009650"/>
+            <a:ext cx="857250" cy="476250"/>
           </a:xfrm>
           <a:prstGeom prst="rect">
             <a:avLst/>
           </a:prstGeom>
         </p:spPr>
       </p:pic>
-      <p:sp>
-        <p:nvSpPr>
-          <p:cNvPr id="5" name="TextBox 4"/>
-          <p:cNvSpPr txBox="1"/>
-          <p:nvPr/>
-        </p:nvSpPr>
-        <p:spPr>
-          <a:xfrm>
-            <a:off x="609600" y="457200"/>
-            <a:ext cx="8548687" cy="171450"/>
+      <p:pic>
+        <p:nvPicPr>
+          <p:cNvPr id="6" name="Picture 5" descr="image.png"/>
+          <p:cNvPicPr>
+            <a:picLocks noChangeAspect="1"/>
+          </p:cNvPicPr>
+          <p:nvPr/>
+        </p:nvPicPr>
+        <p:blipFill>
+          <a:blip r:embed="rId3"/>
+          <a:stretch>
+            <a:fillRect/>
+          </a:stretch>
+        </p:blipFill>
+        <p:spPr>
+          <a:xfrm>
+            <a:off x="571500" y="1781175"/>
+            <a:ext cx="857250" cy="476250"/>
+          </a:xfrm>
+          <a:prstGeom prst="rect">
+            <a:avLst/>
+          </a:prstGeom>
+        </p:spPr>
+      </p:pic>
+      <p:sp>
+        <p:nvSpPr>
+          <p:cNvPr id="7" name="TextBox 6"/>
+          <p:cNvSpPr txBox="1"/>
+          <p:nvPr/>
+        </p:nvSpPr>
+        <p:spPr>
+          <a:xfrm>
+            <a:off x="571500" y="571500"/>
+            <a:ext cx="2150268" cy="295275"/>
           </a:xfrm>
           <a:prstGeom prst="rect">
             <a:avLst/>
@@ -6317,27 +6395,62 @@
           <a:p>
             <a:pPr algn="l"/>
             <a:r>
-              <a:rPr b="1" sz="1050" i="0" u="none">
-                <a:solidFill>
-                  <a:srgbClr val="7C3AED"/>
+              <a:rPr b="1" sz="1800" i="0" u="none">
+                <a:solidFill>
+                  <a:srgbClr val="F8FAFC"/>
+                </a:solidFill>
+                <a:latin typeface="Space Grotesk"/>
+              </a:rPr>
+              <a:t>Image Sources</a:t>
+            </a:r>
+          </a:p>
+        </p:txBody>
+      </p:sp>
+      <p:sp>
+        <p:nvSpPr>
+          <p:cNvPr id="8" name="TextBox 7"/>
+          <p:cNvSpPr txBox="1"/>
+          <p:nvPr/>
+        </p:nvSpPr>
+        <p:spPr>
+          <a:xfrm>
+            <a:off x="1666875" y="1047750"/>
+            <a:ext cx="6965156" cy="152400"/>
+          </a:xfrm>
+          <a:prstGeom prst="rect">
+            <a:avLst/>
+          </a:prstGeom>
+          <a:noFill/>
+        </p:spPr>
+        <p:txBody>
+          <a:bodyPr wrap="none" lIns="0" rIns="0" tIns="0" bIns="0" anchor="t">
+            <a:spAutoFit/>
+          </a:bodyPr>
+          <a:lstStyle/>
+          <a:p>
+            <a:pPr algn="l"/>
+            <a:r>
+              <a:rPr b="0" sz="975" i="0" u="none">
+                <a:solidFill>
+                  <a:srgbClr val="F8FAFC"/>
                 </a:solidFill>
                 <a:latin typeface="Plus Jakarta Sans"/>
               </a:rPr>
-              <a:t>APLICACIÓN DE INGENIERÍA</a:t>
-            </a:r>
-          </a:p>
-        </p:txBody>
-      </p:sp>
-      <p:sp>
-        <p:nvSpPr>
-          <p:cNvPr id="6" name="TextBox 5"/>
-          <p:cNvSpPr txBox="1"/>
-          <p:nvPr/>
-        </p:nvSpPr>
-        <p:spPr>
-          <a:xfrm>
-            <a:off x="609600" y="666750"/>
-            <a:ext cx="8976121" cy="388590"/>
+              <a:t>https://www.musicconnection.com/wp-content/uploads/2024/04/2V7A2667-620x420.jpg</a:t>
+            </a:r>
+          </a:p>
+        </p:txBody>
+      </p:sp>
+      <p:sp>
+        <p:nvSpPr>
+          <p:cNvPr id="9" name="TextBox 8"/>
+          <p:cNvSpPr txBox="1"/>
+          <p:nvPr/>
+        </p:nvSpPr>
+        <p:spPr>
+          <a:xfrm>
+            <a:off x="1666875" y="1247775"/>
+            <a:ext cx="3309937" cy="200025"/>
           </a:xfrm>
           <a:prstGeom prst="rect">
             <a:avLst/>
@@ -6350,33 +6463,38 @@
           </a:bodyPr>
           <a:lstStyle/>
           <a:p>
-            <a:pPr algn="l">
-              <a:lnSpc>
-                <a:spcPts val="3060"/>
-              </a:lnSpc>
-            </a:pPr>
-            <a:r>
-              <a:rPr b="1" sz="2550" i="0" u="none">
-                <a:solidFill>
-                  <a:srgbClr val="0F172A"/>
-                </a:solidFill>
-                <a:latin typeface="Space Grotesk"/>
-              </a:rPr>
-              <a:t>Dimensionamiento: Ancho de Banda y Capacidad</a:t>
-            </a:r>
-          </a:p>
-        </p:txBody>
-      </p:sp>
-      <p:sp>
-        <p:nvSpPr>
-          <p:cNvPr id="7" name="TextBox 6"/>
-          <p:cNvSpPr txBox="1"/>
-          <p:nvPr/>
-        </p:nvSpPr>
-        <p:spPr>
-          <a:xfrm>
-            <a:off x="800100" y="6048375"/>
-            <a:ext cx="6191250" cy="200025"/>
+            <a:pPr algn="l"/>
+            <a:r>
+              <a:rPr b="0" sz="1200" i="0" u="none">
+                <a:solidFill>
+                  <a:srgbClr val="F8FAFC"/>
+                </a:solidFill>
+                <a:latin typeface="Plus Jakarta Sans"/>
+              </a:rPr>
+              <a:t>Source: </a:t>
+            </a:r>
+            <a:r>
+              <a:rPr b="0" sz="1200" i="0" u="none">
+                <a:solidFill>
+                  <a:srgbClr val="4F46E5"/>
+                </a:solidFill>
+                <a:latin typeface="Plus Jakarta Sans"/>
+              </a:rPr>
+              <a:t>www.musicconnection.com</a:t>
+            </a:r>
+          </a:p>
+        </p:txBody>
+      </p:sp>
+      <p:sp>
+        <p:nvSpPr>
+          <p:cNvPr id="10" name="TextBox 9"/>
+          <p:cNvSpPr txBox="1"/>
+          <p:nvPr/>
+        </p:nvSpPr>
+        <p:spPr>
+          <a:xfrm>
+            <a:off x="1666875" y="1819275"/>
+            <a:ext cx="6274593" cy="152400"/>
           </a:xfrm>
           <a:prstGeom prst="rect">
             <a:avLst/>
@@ -6391,27 +6509,27 @@
           <a:p>
             <a:pPr algn="l"/>
             <a:r>
-              <a:rPr b="1" sz="1200" i="0" u="none">
-                <a:solidFill>
-                  <a:srgbClr val="6B21A8"/>
+              <a:rPr b="0" sz="975" i="0" u="none">
+                <a:solidFill>
+                  <a:srgbClr val="F8FAFC"/>
                 </a:solidFill>
                 <a:latin typeface="Plus Jakarta Sans"/>
               </a:rPr>
-              <a:t>Pico medido: 205 Mbps (410 en hora pico). Modelo: 169 Mbps.</a:t>
-            </a:r>
-          </a:p>
-        </p:txBody>
-      </p:sp>
-      <p:sp>
-        <p:nvSpPr>
-          <p:cNvPr id="8" name="TextBox 7"/>
-          <p:cNvSpPr txBox="1"/>
-          <p:nvPr/>
-        </p:nvSpPr>
-        <p:spPr>
-          <a:xfrm>
-            <a:off x="6438900" y="6048375"/>
-            <a:ext cx="5753100" cy="200025"/>
+              <a:t>https://stagsterlabs.com/images/capabilities/cloud-hosting-websites-mobile.png</a:t>
+            </a:r>
+          </a:p>
+        </p:txBody>
+      </p:sp>
+      <p:sp>
+        <p:nvSpPr>
+          <p:cNvPr id="11" name="TextBox 10"/>
+          <p:cNvSpPr txBox="1"/>
+          <p:nvPr/>
+        </p:nvSpPr>
+        <p:spPr>
+          <a:xfrm>
+            <a:off x="1666875" y="2019300"/>
+            <a:ext cx="2345531" cy="200025"/>
           </a:xfrm>
           <a:prstGeom prst="rect">
             <a:avLst/>
@@ -6426,116 +6544,22 @@
           <a:p>
             <a:pPr algn="l"/>
             <a:r>
-              <a:rPr b="1" sz="1200" i="0" u="none">
-                <a:solidFill>
-                  <a:srgbClr val="991B1B"/>
+              <a:rPr b="0" sz="1200" i="0" u="none">
+                <a:solidFill>
+                  <a:srgbClr val="F8FAFC"/>
                 </a:solidFill>
                 <a:latin typeface="Plus Jakarta Sans"/>
               </a:rPr>
-              <a:t>S'(t) = C con Bisección y Newton: del 2/06 al 23/11/2023.</a:t>
-            </a:r>
-          </a:p>
-        </p:txBody>
-      </p:sp>
-      <p:sp>
-        <p:nvSpPr>
-          <p:cNvPr id="9" name="TextBox 8"/>
-          <p:cNvSpPr txBox="1"/>
-          <p:nvPr/>
-        </p:nvSpPr>
-        <p:spPr>
-          <a:xfrm>
-            <a:off x="612648" y="1207008"/>
-            <a:ext cx="2770632" cy="171450"/>
-          </a:xfrm>
-          <a:prstGeom prst="rect">
-            <a:avLst/>
-          </a:prstGeom>
-          <a:noFill/>
-        </p:spPr>
-        <p:txBody>
-          <a:bodyPr wrap="none" lIns="0" rIns="0" tIns="0" bIns="0" anchor="t">
-            <a:spAutoFit/>
-          </a:bodyPr>
-          <a:lstStyle/>
-          <a:p>
-            <a:pPr algn="l"/>
-            <a:r>
-              <a:rPr b="1" sz="1050" i="0" u="none">
-                <a:solidFill>
-                  <a:srgbClr val="8B5CF6"/>
+              <a:t>Source: </a:t>
+            </a:r>
+            <a:r>
+              <a:rPr b="0" sz="1200" i="0" u="none">
+                <a:solidFill>
+                  <a:srgbClr val="4F46E5"/>
                 </a:solidFill>
                 <a:latin typeface="Plus Jakarta Sans"/>
               </a:rPr>
-              <a:t>Ancho de banda medido (160 kbps)</a:t>
-            </a:r>
-          </a:p>
-        </p:txBody>
-      </p:sp>
-      <p:sp>
-        <p:nvSpPr>
-          <p:cNvPr id="10" name="TextBox 9"/>
-          <p:cNvSpPr txBox="1"/>
-          <p:nvPr/>
-        </p:nvSpPr>
-        <p:spPr>
-          <a:xfrm>
-            <a:off x="3703320" y="1207008"/>
-            <a:ext cx="1865376" cy="171450"/>
-          </a:xfrm>
-          <a:prstGeom prst="rect">
-            <a:avLst/>
-          </a:prstGeom>
-          <a:noFill/>
-        </p:spPr>
-        <p:txBody>
-          <a:bodyPr wrap="none" lIns="0" rIns="0" tIns="0" bIns="0" anchor="t">
-            <a:spAutoFit/>
-          </a:bodyPr>
-          <a:lstStyle/>
-          <a:p>
-            <a:pPr algn="l"/>
-            <a:r>
-              <a:rPr b="1" sz="1050" i="0" u="none">
-                <a:solidFill>
-                  <a:srgbClr val="6D28D9"/>
-                </a:solidFill>
-                <a:latin typeface="Plus Jakarta Sans"/>
-              </a:rPr>
-              <a:t>Modelo: S'(t) en Mbps</a:t>
-            </a:r>
-          </a:p>
-        </p:txBody>
-      </p:sp>
-      <p:sp>
-        <p:nvSpPr>
-          <p:cNvPr id="42" name="Supuestos"/>
-          <p:cNvSpPr txBox="1"/>
-          <p:nvPr/>
-        </p:nvSpPr>
-        <p:spPr>
-          <a:xfrm>
-            <a:off x="612648" y="5029200"/>
-            <a:ext cx="10972800" cy="548640"/>
-          </a:xfrm>
-          <a:prstGeom prst="rect">
-            <a:avLst/>
-          </a:prstGeom>
-          <a:noFill/>
-        </p:spPr>
-        <p:txBody>
-          <a:bodyPr wrap="square" lIns="0" rIns="0" tIns="0" bIns="0" anchor="t"/>
-          <a:lstStyle/>
-          <a:p>
-            <a:pPr algn="l"/>
-            <a:r>
-              <a:rPr b="0" sz="1200" i="0" u="none">
-                <a:solidFill>
-                  <a:srgbClr val="475569"/>
-                </a:solidFill>
-                <a:latin typeface="Plus Jakarta Sans"/>
-              </a:rPr>
-              <a:t>Supuestos: reproducción de 3:06 a 160 kbps (rango de 96 a 320 kbps), hora pico igual a 2 veces el promedio semanal y sin descontar las reproducciones guardadas en el dispositivo. Son órdenes de magnitud, no datos de Spotify. A 160 kbps, 100 M de reproducciones equivalen a unos 372 TB transferidos.</a:t>
+              <a:t>stagsterlabs.com</a:t>
             </a:r>
           </a:p>
         </p:txBody>
@@ -6998,7 +7022,7 @@
                 </a:solidFill>
                 <a:latin typeface="Space Grotesk"/>
               </a:rPr>
-              <a:t>Tendencia Masiva TikTok (2023)</a:t>
+              <a:t>Tendencia de TikTok (2023)</a:t>
             </a:r>
           </a:p>
         </p:txBody>
@@ -7033,7 +7057,7 @@
                 </a:solidFill>
                 <a:latin typeface="Plus Jakarta Sans"/>
               </a:rPr>
-              <a:t>Viralización masiva bajo el trend de sueños frustrados.</a:t>
+              <a:t>Se viralizó con el trend de los sueños frustrados.</a:t>
             </a:r>
           </a:p>
         </p:txBody>
@@ -7068,7 +7092,7 @@
                 </a:solidFill>
                 <a:latin typeface="Space Grotesk"/>
               </a:rPr>
-              <a:t>Salto de Escala Exponencial</a:t>
+              <a:t>Demanda casi 4 veces mayor</a:t>
             </a:r>
           </a:p>
         </p:txBody>
@@ -7461,7 +7485,7 @@
                 </a:solidFill>
                 <a:latin typeface="Space Grotesk"/>
               </a:rPr>
-              <a:t>Telemetría y Dimensionamiento Cloud</a:t>
+              <a:t>Pronóstico de demanda y dimensionamiento</a:t>
             </a:r>
           </a:p>
         </p:txBody>
@@ -7531,7 +7555,7 @@
                 </a:solidFill>
                 <a:latin typeface="Plus Jakarta Sans"/>
               </a:rPr>
-              <a:t>Dimensionamiento elástico ante aumentos súbitos de demanda.</a:t>
+              <a:t>Dimensionar la red ante aumentos bruscos de demanda.</a:t>
             </a:r>
           </a:p>
         </p:txBody>
@@ -7601,7 +7625,7 @@
                 </a:solidFill>
                 <a:latin typeface="Plus Jakarta Sans"/>
               </a:rPr>
-              <a:t>Muestreo semanal con dispersión y ruido estocástico.</a:t>
+              <a:t>Datos semanales, discretos y con variaciones.</a:t>
             </a:r>
           </a:p>
         </p:txBody>
@@ -7671,7 +7695,7 @@
                 </a:solidFill>
                 <a:latin typeface="Plus Jakarta Sans"/>
               </a:rPr>
-              <a:t>Conversión analítica continua para optimizar recursos.</a:t>
+              <a:t>Un modelo continuo para estimar fechas, ritmos y capacidad.</a:t>
             </a:r>
           </a:p>
         </p:txBody>
@@ -7759,7 +7783,7 @@
         <p:spPr>
           <a:xfrm>
             <a:off x="609600" y="6200775"/>
-            <a:ext cx="4702968" cy="200025"/>
+            <a:ext cx="7223760" cy="200025"/>
           </a:xfrm>
           <a:prstGeom prst="rect">
             <a:avLst/>
@@ -7780,7 +7804,7 @@
                 </a:solidFill>
                 <a:latin typeface="Plus Jakarta Sans"/>
               </a:rPr>
-              <a:t>Fuente Oficial: </a:t>
+              <a:t>Fuente: </a:t>
             </a:r>
             <a:r>
               <a:rPr b="1" sz="1200" i="0" u="none">
@@ -7789,7 +7813,7 @@
                 </a:solidFill>
                 <a:latin typeface="Plus Jakarta Sans"/>
               </a:rPr>
-              <a:t>kworb.net (Top 200 Spotify México)</a:t>
+              <a:t>kworb.net (charts de Spotify México, Top 200)</a:t>
             </a:r>
           </a:p>
         </p:txBody>
@@ -7868,7 +7892,7 @@
                 </a:solidFill>
                 <a:latin typeface="Plus Jakarta Sans"/>
               </a:rPr>
-              <a:t>MUESTREO EXPERIMENTAL</a:t>
+              <a:t>DATOS REALES</a:t>
             </a:r>
           </a:p>
         </p:txBody>
@@ -7907,7 +7931,7 @@
                 </a:solidFill>
                 <a:latin typeface="Space Grotesk"/>
               </a:rPr>
-              <a:t>47 Semanas de Telemetría en Spotify México</a:t>
+              <a:t>47 semanas de streams en Spotify México</a:t>
             </a:r>
           </a:p>
         </p:txBody>
@@ -9791,40 +9815,200 @@
         <p:nvPr/>
       </p:nvGrpSpPr>
       <p:grpSpPr/>
-      <p:pic>
-        <p:nvPicPr>
-          <p:cNvPr id="2" name="Picture 1" descr="image.png"/>
-          <p:cNvPicPr>
-            <a:picLocks noChangeAspect="1"/>
-          </p:cNvPicPr>
-          <p:nvPr/>
-        </p:nvPicPr>
-        <p:blipFill>
-          <a:blip r:embed="rId2"/>
-          <a:stretch>
-            <a:fillRect/>
-          </a:stretch>
-        </p:blipFill>
-        <p:spPr>
-          <a:xfrm>
-            <a:off x="914400" y="2123033"/>
-            <a:ext cx="10363200" cy="3048000"/>
-          </a:xfrm>
-          <a:prstGeom prst="rect">
-            <a:avLst/>
-          </a:prstGeom>
-        </p:spPr>
-      </p:pic>
-      <p:sp>
-        <p:nvSpPr>
-          <p:cNvPr id="3" name="TextBox 2"/>
-          <p:cNvSpPr txBox="1"/>
-          <p:nvPr/>
-        </p:nvSpPr>
-        <p:spPr>
-          <a:xfrm>
-            <a:off x="609600" y="6200775"/>
-            <a:ext cx="4691062" cy="200025"/>
+      <p:sp>
+        <p:nvSpPr>
+          <p:cNvPr id="2" name="Rounded Rectangle 1"/>
+          <p:cNvSpPr/>
+          <p:nvPr/>
+        </p:nvSpPr>
+        <p:spPr>
+          <a:xfrm>
+            <a:off x="609600" y="1341090"/>
+            <a:ext cx="10972800" cy="1571625"/>
+          </a:xfrm>
+          <a:prstGeom prst="roundRect">
+            <a:avLst>
+              <a:gd name="adj" fmla="val 9696"/>
+            </a:avLst>
+          </a:prstGeom>
+          <a:solidFill>
+            <a:srgbClr val="0F172A"/>
+          </a:solidFill>
+          <a:ln>
+            <a:noFill/>
+          </a:ln>
+          <a:effectLst/>
+        </p:spPr>
+        <p:style>
+          <a:lnRef idx="1">
+            <a:schemeClr val="accent1"/>
+          </a:lnRef>
+          <a:fillRef idx="3">
+            <a:schemeClr val="accent1"/>
+          </a:fillRef>
+          <a:effectRef idx="2">
+            <a:schemeClr val="accent1"/>
+          </a:effectRef>
+          <a:fontRef idx="minor">
+            <a:schemeClr val="lt1"/>
+          </a:fontRef>
+        </p:style>
+        <p:txBody>
+          <a:bodyPr rtlCol="0" anchor="ctr"/>
+          <a:lstStyle/>
+          <a:p>
+            <a:pPr algn="ctr"/>
+          </a:p>
+        </p:txBody>
+      </p:sp>
+      <p:sp>
+        <p:nvSpPr>
+          <p:cNvPr id="3" name="Rounded Rectangle 2"/>
+          <p:cNvSpPr/>
+          <p:nvPr/>
+        </p:nvSpPr>
+        <p:spPr>
+          <a:xfrm>
+            <a:off x="609600" y="4128045"/>
+            <a:ext cx="3505200" cy="1323975"/>
+          </a:xfrm>
+          <a:prstGeom prst="roundRect">
+            <a:avLst>
+              <a:gd name="adj" fmla="val 10071"/>
+            </a:avLst>
+          </a:prstGeom>
+          <a:solidFill>
+            <a:srgbClr val="F8FAFC"/>
+          </a:solidFill>
+          <a:ln>
+            <a:noFill/>
+          </a:ln>
+          <a:effectLst/>
+        </p:spPr>
+        <p:style>
+          <a:lnRef idx="1">
+            <a:schemeClr val="accent1"/>
+          </a:lnRef>
+          <a:fillRef idx="3">
+            <a:schemeClr val="accent1"/>
+          </a:fillRef>
+          <a:effectRef idx="2">
+            <a:schemeClr val="accent1"/>
+          </a:effectRef>
+          <a:fontRef idx="minor">
+            <a:schemeClr val="lt1"/>
+          </a:fontRef>
+        </p:style>
+        <p:txBody>
+          <a:bodyPr rtlCol="0" anchor="ctr"/>
+          <a:lstStyle/>
+          <a:p>
+            <a:pPr algn="ctr"/>
+          </a:p>
+        </p:txBody>
+      </p:sp>
+      <p:sp>
+        <p:nvSpPr>
+          <p:cNvPr id="4" name="Rounded Rectangle 3"/>
+          <p:cNvSpPr/>
+          <p:nvPr/>
+        </p:nvSpPr>
+        <p:spPr>
+          <a:xfrm>
+            <a:off x="4343400" y="4128045"/>
+            <a:ext cx="3505200" cy="1323975"/>
+          </a:xfrm>
+          <a:prstGeom prst="roundRect">
+            <a:avLst>
+              <a:gd name="adj" fmla="val 10071"/>
+            </a:avLst>
+          </a:prstGeom>
+          <a:solidFill>
+            <a:srgbClr val="F8FAFC"/>
+          </a:solidFill>
+          <a:ln>
+            <a:noFill/>
+          </a:ln>
+          <a:effectLst/>
+        </p:spPr>
+        <p:style>
+          <a:lnRef idx="1">
+            <a:schemeClr val="accent1"/>
+          </a:lnRef>
+          <a:fillRef idx="3">
+            <a:schemeClr val="accent1"/>
+          </a:fillRef>
+          <a:effectRef idx="2">
+            <a:schemeClr val="accent1"/>
+          </a:effectRef>
+          <a:fontRef idx="minor">
+            <a:schemeClr val="lt1"/>
+          </a:fontRef>
+        </p:style>
+        <p:txBody>
+          <a:bodyPr rtlCol="0" anchor="ctr"/>
+          <a:lstStyle/>
+          <a:p>
+            <a:pPr algn="ctr"/>
+          </a:p>
+        </p:txBody>
+      </p:sp>
+      <p:sp>
+        <p:nvSpPr>
+          <p:cNvPr id="5" name="Rounded Rectangle 4"/>
+          <p:cNvSpPr/>
+          <p:nvPr/>
+        </p:nvSpPr>
+        <p:spPr>
+          <a:xfrm>
+            <a:off x="8077200" y="4128045"/>
+            <a:ext cx="3505200" cy="1323975"/>
+          </a:xfrm>
+          <a:prstGeom prst="roundRect">
+            <a:avLst>
+              <a:gd name="adj" fmla="val 10071"/>
+            </a:avLst>
+          </a:prstGeom>
+          <a:solidFill>
+            <a:srgbClr val="F8FAFC"/>
+          </a:solidFill>
+          <a:ln>
+            <a:noFill/>
+          </a:ln>
+          <a:effectLst/>
+        </p:spPr>
+        <p:style>
+          <a:lnRef idx="1">
+            <a:schemeClr val="accent1"/>
+          </a:lnRef>
+          <a:fillRef idx="3">
+            <a:schemeClr val="accent1"/>
+          </a:fillRef>
+          <a:effectRef idx="2">
+            <a:schemeClr val="accent1"/>
+          </a:effectRef>
+          <a:fontRef idx="minor">
+            <a:schemeClr val="lt1"/>
+          </a:fontRef>
+        </p:style>
+        <p:txBody>
+          <a:bodyPr rtlCol="0" anchor="ctr"/>
+          <a:lstStyle/>
+          <a:p>
+            <a:pPr algn="ctr"/>
+          </a:p>
+        </p:txBody>
+      </p:sp>
+      <p:sp>
+        <p:nvSpPr>
+          <p:cNvPr id="6" name="TextBox 5"/>
+          <p:cNvSpPr txBox="1"/>
+          <p:nvPr/>
+        </p:nvSpPr>
+        <p:spPr>
+          <a:xfrm>
+            <a:off x="609600" y="457200"/>
+            <a:ext cx="11582400" cy="171450"/>
           </a:xfrm>
           <a:prstGeom prst="rect">
             <a:avLst/>
@@ -9839,97 +10023,27 @@
           <a:p>
             <a:pPr algn="l"/>
             <a:r>
-              <a:rPr b="1" sz="1200" i="0" u="none">
-                <a:solidFill>
-                  <a:srgbClr val="0284C7"/>
+              <a:rPr b="1" sz="1050" i="0" u="none">
+                <a:solidFill>
+                  <a:srgbClr val="E11D48"/>
                 </a:solidFill>
                 <a:latin typeface="Plus Jakarta Sans"/>
               </a:rPr>
-              <a:t>Bisección: Robusto e incondicional (15 iteraciones).</a:t>
-            </a:r>
-          </a:p>
-        </p:txBody>
-      </p:sp>
-      <p:sp>
-        <p:nvSpPr>
-          <p:cNvPr id="4" name="TextBox 3"/>
-          <p:cNvSpPr txBox="1"/>
-          <p:nvPr/>
-        </p:nvSpPr>
-        <p:spPr>
-          <a:xfrm>
-            <a:off x="7124700" y="6200775"/>
-            <a:ext cx="5067300" cy="200025"/>
-          </a:xfrm>
-          <a:prstGeom prst="rect">
-            <a:avLst/>
-          </a:prstGeom>
-          <a:noFill/>
-        </p:spPr>
-        <p:txBody>
-          <a:bodyPr wrap="none" lIns="0" rIns="0" tIns="0" bIns="0" anchor="t">
-            <a:spAutoFit/>
-          </a:bodyPr>
-          <a:lstStyle/>
-          <a:p>
-            <a:pPr algn="l"/>
-            <a:r>
-              <a:rPr b="1" sz="1200" i="0" u="none">
-                <a:solidFill>
-                  <a:srgbClr val="E11D48"/>
-                </a:solidFill>
-                <a:latin typeface="Plus Jakarta Sans"/>
-              </a:rPr>
-              <a:t>Newton-Raphson: Convergencia cuadrática en solo 3 pasos.</a:t>
-            </a:r>
-          </a:p>
-        </p:txBody>
-      </p:sp>
-      <p:sp>
-        <p:nvSpPr>
-          <p:cNvPr id="5" name="TextBox 4"/>
-          <p:cNvSpPr txBox="1"/>
-          <p:nvPr/>
-        </p:nvSpPr>
-        <p:spPr>
-          <a:xfrm>
-            <a:off x="609600" y="457200"/>
-            <a:ext cx="7012781" cy="171450"/>
-          </a:xfrm>
-          <a:prstGeom prst="rect">
-            <a:avLst/>
-          </a:prstGeom>
-          <a:noFill/>
-        </p:spPr>
-        <p:txBody>
-          <a:bodyPr wrap="none" lIns="0" rIns="0" tIns="0" bIns="0" anchor="t">
-            <a:spAutoFit/>
-          </a:bodyPr>
-          <a:lstStyle/>
-          <a:p>
-            <a:pPr algn="l"/>
-            <a:r>
-              <a:rPr b="1" sz="1050" i="0" u="none">
-                <a:solidFill>
-                  <a:srgbClr val="E11D48"/>
-                </a:solidFill>
-                <a:latin typeface="Plus Jakarta Sans"/>
-              </a:rPr>
-              <a:t>EFICIENCIA NUMÉRICA</a:t>
-            </a:r>
-          </a:p>
-        </p:txBody>
-      </p:sp>
-      <p:sp>
-        <p:nvSpPr>
-          <p:cNvPr id="6" name="TextBox 5"/>
-          <p:cNvSpPr txBox="1"/>
-          <p:nvPr/>
-        </p:nvSpPr>
-        <p:spPr>
-          <a:xfrm>
-            <a:off x="609600" y="666750"/>
-            <a:ext cx="7363420" cy="388590"/>
+              <a:t>MÉTODO NUMÉRICO 2 · CONTRASTE</a:t>
+            </a:r>
+          </a:p>
+        </p:txBody>
+      </p:sp>
+      <p:sp>
+        <p:nvSpPr>
+          <p:cNvPr id="7" name="TextBox 6"/>
+          <p:cNvSpPr txBox="1"/>
+          <p:nvPr/>
+        </p:nvSpPr>
+        <p:spPr>
+          <a:xfrm>
+            <a:off x="609600" y="685800"/>
+            <a:ext cx="11582400" cy="388590"/>
           </a:xfrm>
           <a:prstGeom prst="rect">
             <a:avLst/>
@@ -9954,21 +10068,21 @@
                 </a:solidFill>
                 <a:latin typeface="Space Grotesk"/>
               </a:rPr>
-              <a:t>Convergencia: Lineal vs. Cuadrática</a:t>
-            </a:r>
-          </a:p>
-        </p:txBody>
-      </p:sp>
-      <p:sp>
-        <p:nvSpPr>
-          <p:cNvPr id="7" name="TextBox 6"/>
-          <p:cNvSpPr txBox="1"/>
-          <p:nvPr/>
-        </p:nvSpPr>
-        <p:spPr>
-          <a:xfrm>
-            <a:off x="6373368" y="883890"/>
-            <a:ext cx="2276856" cy="171450"/>
+              <a:t>Hito Adoptado: Trazadora e Incertidumbre</a:t>
+            </a:r>
+          </a:p>
+        </p:txBody>
+      </p:sp>
+      <p:sp>
+        <p:nvSpPr>
+          <p:cNvPr id="8" name="TextBox 7"/>
+          <p:cNvSpPr txBox="1"/>
+          <p:nvPr/>
+        </p:nvSpPr>
+        <p:spPr>
+          <a:xfrm>
+            <a:off x="990600" y="1645890"/>
+            <a:ext cx="11201400" cy="171450"/>
           </a:xfrm>
           <a:prstGeom prst="rect">
             <a:avLst/>
@@ -9985,25 +10099,420 @@
             <a:r>
               <a:rPr b="1" sz="1050" i="0" u="none">
                 <a:solidFill>
+                  <a:srgbClr val="FB7185"/>
+                </a:solidFill>
+                <a:latin typeface="Plus Jakarta Sans"/>
+              </a:rPr>
+              <a:t>HITO DE 100 M SEGÚN LA TRAZADORA CÚBICA NATURAL</a:t>
+            </a:r>
+          </a:p>
+        </p:txBody>
+      </p:sp>
+      <p:sp>
+        <p:nvSpPr>
+          <p:cNvPr id="9" name="TextBox 8"/>
+          <p:cNvSpPr txBox="1"/>
+          <p:nvPr/>
+        </p:nvSpPr>
+        <p:spPr>
+          <a:xfrm>
+            <a:off x="990600" y="1931640"/>
+            <a:ext cx="11201400" cy="323850"/>
+          </a:xfrm>
+          <a:prstGeom prst="rect">
+            <a:avLst/>
+          </a:prstGeom>
+          <a:noFill/>
+        </p:spPr>
+        <p:txBody>
+          <a:bodyPr wrap="none" lIns="0" rIns="0" tIns="0" bIns="0" anchor="t">
+            <a:spAutoFit/>
+          </a:bodyPr>
+          <a:lstStyle/>
+          <a:p>
+            <a:pPr algn="l"/>
+            <a:r>
+              <a:rPr b="1" sz="1950" i="0" u="none">
+                <a:solidFill>
+                  <a:srgbClr val="F8FAFC"/>
+                </a:solidFill>
+                <a:latin typeface="Space Grotesk"/>
+              </a:rPr>
+              <a:t>t* = 35.124 semanas  →  29 de septiembre de 2023</a:t>
+            </a:r>
+          </a:p>
+        </p:txBody>
+      </p:sp>
+      <p:sp>
+        <p:nvSpPr>
+          <p:cNvPr id="10" name="TextBox 9"/>
+          <p:cNvSpPr txBox="1"/>
+          <p:nvPr/>
+        </p:nvSpPr>
+        <p:spPr>
+          <a:xfrm>
+            <a:off x="990600" y="2407890"/>
+            <a:ext cx="11201400" cy="200025"/>
+          </a:xfrm>
+          <a:prstGeom prst="rect">
+            <a:avLst/>
+          </a:prstGeom>
+          <a:noFill/>
+        </p:spPr>
+        <p:txBody>
+          <a:bodyPr wrap="none" lIns="0" rIns="0" tIns="0" bIns="0" anchor="t">
+            <a:spAutoFit/>
+          </a:bodyPr>
+          <a:lstStyle/>
+          <a:p>
+            <a:pPr algn="l"/>
+            <a:r>
+              <a:rPr b="0" sz="1200" i="0" u="none">
+                <a:solidFill>
+                  <a:srgbClr val="94A3B8"/>
+                </a:solidFill>
+                <a:latin typeface="Plus Jakarta Sans"/>
+              </a:rPr>
+              <a:t>La trazadora pasa por los 47 datos medidos y coincide con la interpolación lineal de control (t = 35.127 semanas).</a:t>
+            </a:r>
+          </a:p>
+        </p:txBody>
+      </p:sp>
+      <p:sp>
+        <p:nvSpPr>
+          <p:cNvPr id="41" name="Control"/>
+          <p:cNvSpPr txBox="1"/>
+          <p:nvPr/>
+        </p:nvSpPr>
+        <p:spPr>
+          <a:xfrm>
+            <a:off x="612648" y="3200400"/>
+            <a:ext cx="10972800" cy="548640"/>
+          </a:xfrm>
+          <a:prstGeom prst="rect">
+            <a:avLst/>
+          </a:prstGeom>
+          <a:noFill/>
+        </p:spPr>
+        <p:txBody>
+          <a:bodyPr wrap="square" lIns="0" rIns="0" tIns="0" bIns="0" anchor="t"/>
+          <a:lstStyle/>
+          <a:p>
+            <a:pPr algn="l"/>
+            <a:r>
+              <a:rPr b="0" sz="1200" i="0" u="none">
+                <a:solidFill>
+                  <a:srgbClr val="475569"/>
+                </a:solidFill>
+                <a:latin typeface="Plus Jakarta Sans"/>
+              </a:rPr>
+              <a:t>Control: interpolación lineal entre la semana 35 (99.602 M) y la 36 (102.738 M) da t = 35.127 semanas, a 0.4 horas de la trazadora. La regresión no pasa por esos puntos y ubica el cruce 2.77 días más tarde.</a:t>
+            </a:r>
+          </a:p>
+        </p:txBody>
+      </p:sp>
+      <p:sp>
+        <p:nvSpPr>
+          <p:cNvPr id="11" name="TextBox 10"/>
+          <p:cNvSpPr txBox="1"/>
+          <p:nvPr/>
+        </p:nvSpPr>
+        <p:spPr>
+          <a:xfrm>
+            <a:off x="838200" y="4356645"/>
+            <a:ext cx="3810000" cy="171450"/>
+          </a:xfrm>
+          <a:prstGeom prst="rect">
+            <a:avLst/>
+          </a:prstGeom>
+          <a:noFill/>
+        </p:spPr>
+        <p:txBody>
+          <a:bodyPr wrap="none" lIns="0" rIns="0" tIns="0" bIns="0" anchor="t">
+            <a:spAutoFit/>
+          </a:bodyPr>
+          <a:lstStyle/>
+          <a:p>
+            <a:pPr algn="l"/>
+            <a:r>
+              <a:rPr b="1" sz="1050" i="0" u="none">
+                <a:solidFill>
+                  <a:srgbClr val="64748B"/>
+                </a:solidFill>
+                <a:latin typeface="Plus Jakarta Sans"/>
+              </a:rPr>
+              <a:t>RAÍZ DE LA REGRESIÓN</a:t>
+            </a:r>
+          </a:p>
+        </p:txBody>
+      </p:sp>
+      <p:sp>
+        <p:nvSpPr>
+          <p:cNvPr id="12" name="TextBox 11"/>
+          <p:cNvSpPr txBox="1"/>
+          <p:nvPr/>
+        </p:nvSpPr>
+        <p:spPr>
+          <a:xfrm>
+            <a:off x="838200" y="4585245"/>
+            <a:ext cx="3810000" cy="381000"/>
+          </a:xfrm>
+          <a:prstGeom prst="rect">
+            <a:avLst/>
+          </a:prstGeom>
+          <a:noFill/>
+        </p:spPr>
+        <p:txBody>
+          <a:bodyPr wrap="none" lIns="0" rIns="0" tIns="0" bIns="0" anchor="t">
+            <a:spAutoFit/>
+          </a:bodyPr>
+          <a:lstStyle/>
+          <a:p>
+            <a:pPr algn="l">
+              <a:lnSpc>
+                <a:spcPts val="3000"/>
+              </a:lnSpc>
+            </a:pPr>
+            <a:r>
+              <a:rPr b="1" sz="3000" i="0" u="none">
+                <a:solidFill>
+                  <a:srgbClr val="E11D48"/>
+                </a:solidFill>
+                <a:latin typeface="Plus Jakarta Sans"/>
+              </a:rPr>
+              <a:t>35.520 sem</a:t>
+            </a:r>
+          </a:p>
+        </p:txBody>
+      </p:sp>
+      <p:sp>
+        <p:nvSpPr>
+          <p:cNvPr id="13" name="TextBox 12"/>
+          <p:cNvSpPr txBox="1"/>
+          <p:nvPr/>
+        </p:nvSpPr>
+        <p:spPr>
+          <a:xfrm>
+            <a:off x="838200" y="5023395"/>
+            <a:ext cx="3810000" cy="200025"/>
+          </a:xfrm>
+          <a:prstGeom prst="rect">
+            <a:avLst/>
+          </a:prstGeom>
+          <a:noFill/>
+        </p:spPr>
+        <p:txBody>
+          <a:bodyPr wrap="none" lIns="0" rIns="0" tIns="0" bIns="0" anchor="t">
+            <a:spAutoFit/>
+          </a:bodyPr>
+          <a:lstStyle/>
+          <a:p>
+            <a:pPr algn="l"/>
+            <a:r>
+              <a:rPr b="1" sz="1200" i="0" u="none">
+                <a:solidFill>
+                  <a:srgbClr val="334155"/>
+                </a:solidFill>
+                <a:latin typeface="Plus Jakarta Sans"/>
+              </a:rPr>
+              <a:t>Bisección y Newton coinciden: 2 de octubre</a:t>
+            </a:r>
+          </a:p>
+        </p:txBody>
+      </p:sp>
+      <p:sp>
+        <p:nvSpPr>
+          <p:cNvPr id="14" name="TextBox 13"/>
+          <p:cNvSpPr txBox="1"/>
+          <p:nvPr/>
+        </p:nvSpPr>
+        <p:spPr>
+          <a:xfrm>
+            <a:off x="4572000" y="4356645"/>
+            <a:ext cx="3810000" cy="171450"/>
+          </a:xfrm>
+          <a:prstGeom prst="rect">
+            <a:avLst/>
+          </a:prstGeom>
+          <a:noFill/>
+        </p:spPr>
+        <p:txBody>
+          <a:bodyPr wrap="none" lIns="0" rIns="0" tIns="0" bIns="0" anchor="t">
+            <a:spAutoFit/>
+          </a:bodyPr>
+          <a:lstStyle/>
+          <a:p>
+            <a:pPr algn="l"/>
+            <a:r>
+              <a:rPr b="1" sz="1050" i="0" u="none">
+                <a:solidFill>
+                  <a:srgbClr val="64748B"/>
+                </a:solidFill>
+                <a:latin typeface="Plus Jakarta Sans"/>
+              </a:rPr>
+              <a:t>INCERTIDUMBRE DEL MODELO</a:t>
+            </a:r>
+          </a:p>
+        </p:txBody>
+      </p:sp>
+      <p:sp>
+        <p:nvSpPr>
+          <p:cNvPr id="15" name="TextBox 14"/>
+          <p:cNvSpPr txBox="1"/>
+          <p:nvPr/>
+        </p:nvSpPr>
+        <p:spPr>
+          <a:xfrm>
+            <a:off x="4572000" y="4585245"/>
+            <a:ext cx="3810000" cy="381000"/>
+          </a:xfrm>
+          <a:prstGeom prst="rect">
+            <a:avLst/>
+          </a:prstGeom>
+          <a:noFill/>
+        </p:spPr>
+        <p:txBody>
+          <a:bodyPr wrap="none" lIns="0" rIns="0" tIns="0" bIns="0" anchor="t">
+            <a:spAutoFit/>
+          </a:bodyPr>
+          <a:lstStyle/>
+          <a:p>
+            <a:pPr algn="l">
+              <a:lnSpc>
+                <a:spcPts val="3000"/>
+              </a:lnSpc>
+            </a:pPr>
+            <a:r>
+              <a:rPr b="1" sz="3000" i="0" u="none">
+                <a:solidFill>
+                  <a:srgbClr val="0F172A"/>
+                </a:solidFill>
+                <a:latin typeface="Plus Jakarta Sans"/>
+              </a:rPr>
+              <a:t>± 1.92 días</a:t>
+            </a:r>
+          </a:p>
+        </p:txBody>
+      </p:sp>
+      <p:sp>
+        <p:nvSpPr>
+          <p:cNvPr id="16" name="TextBox 15"/>
+          <p:cNvSpPr txBox="1"/>
+          <p:nvPr/>
+        </p:nvSpPr>
+        <p:spPr>
+          <a:xfrm>
+            <a:off x="4572000" y="5023395"/>
+            <a:ext cx="3810000" cy="200025"/>
+          </a:xfrm>
+          <a:prstGeom prst="rect">
+            <a:avLst/>
+          </a:prstGeom>
+          <a:noFill/>
+        </p:spPr>
+        <p:txBody>
+          <a:bodyPr wrap="none" lIns="0" rIns="0" tIns="0" bIns="0" anchor="t">
+            <a:spAutoFit/>
+          </a:bodyPr>
+          <a:lstStyle/>
+          <a:p>
+            <a:pPr algn="l"/>
+            <a:r>
+              <a:rPr b="1" sz="1200" i="0" u="none">
+                <a:solidFill>
+                  <a:srgbClr val="334155"/>
+                </a:solidFill>
+                <a:latin typeface="Plus Jakarta Sans"/>
+              </a:rPr>
+              <a:t>Δt = S_y/x / S'(t*) = 0.927 / 3.374</a:t>
+            </a:r>
+          </a:p>
+        </p:txBody>
+      </p:sp>
+      <p:sp>
+        <p:nvSpPr>
+          <p:cNvPr id="17" name="TextBox 16"/>
+          <p:cNvSpPr txBox="1"/>
+          <p:nvPr/>
+        </p:nvSpPr>
+        <p:spPr>
+          <a:xfrm>
+            <a:off x="8305800" y="4356645"/>
+            <a:ext cx="3810000" cy="171450"/>
+          </a:xfrm>
+          <a:prstGeom prst="rect">
+            <a:avLst/>
+          </a:prstGeom>
+          <a:noFill/>
+        </p:spPr>
+        <p:txBody>
+          <a:bodyPr wrap="none" lIns="0" rIns="0" tIns="0" bIns="0" anchor="t">
+            <a:spAutoFit/>
+          </a:bodyPr>
+          <a:lstStyle/>
+          <a:p>
+            <a:pPr algn="l"/>
+            <a:r>
+              <a:rPr b="1" sz="1050" i="0" u="none">
+                <a:solidFill>
+                  <a:srgbClr val="64748B"/>
+                </a:solidFill>
+                <a:latin typeface="Plus Jakarta Sans"/>
+              </a:rPr>
+              <a:t>REGRESIÓN VS. TRAZADORA</a:t>
+            </a:r>
+          </a:p>
+        </p:txBody>
+      </p:sp>
+      <p:sp>
+        <p:nvSpPr>
+          <p:cNvPr id="18" name="TextBox 17"/>
+          <p:cNvSpPr txBox="1"/>
+          <p:nvPr/>
+        </p:nvSpPr>
+        <p:spPr>
+          <a:xfrm>
+            <a:off x="8305800" y="4585245"/>
+            <a:ext cx="3810000" cy="381000"/>
+          </a:xfrm>
+          <a:prstGeom prst="rect">
+            <a:avLst/>
+          </a:prstGeom>
+          <a:noFill/>
+        </p:spPr>
+        <p:txBody>
+          <a:bodyPr wrap="none" lIns="0" rIns="0" tIns="0" bIns="0" anchor="t">
+            <a:spAutoFit/>
+          </a:bodyPr>
+          <a:lstStyle/>
+          <a:p>
+            <a:pPr algn="l">
+              <a:lnSpc>
+                <a:spcPts val="3000"/>
+              </a:lnSpc>
+            </a:pPr>
+            <a:r>
+              <a:rPr b="1" sz="3000" i="0" u="none">
+                <a:solidFill>
                   <a:srgbClr val="0284C7"/>
                 </a:solidFill>
                 <a:latin typeface="Plus Jakarta Sans"/>
               </a:rPr>
-              <a:t>Bisección (15 iteraciones)</a:t>
-            </a:r>
-          </a:p>
-        </p:txBody>
-      </p:sp>
-      <p:sp>
-        <p:nvSpPr>
-          <p:cNvPr id="8" name="TextBox 7"/>
-          <p:cNvSpPr txBox="1"/>
-          <p:nvPr/>
-        </p:nvSpPr>
-        <p:spPr>
-          <a:xfrm>
-            <a:off x="8970264" y="883890"/>
-            <a:ext cx="2606039" cy="171450"/>
+              <a:t>2.77 días</a:t>
+            </a:r>
+          </a:p>
+        </p:txBody>
+      </p:sp>
+      <p:sp>
+        <p:nvSpPr>
+          <p:cNvPr id="19" name="TextBox 18"/>
+          <p:cNvSpPr txBox="1"/>
+          <p:nvPr/>
+        </p:nvSpPr>
+        <p:spPr>
+          <a:xfrm>
+            <a:off x="8305800" y="5023395"/>
+            <a:ext cx="3810000" cy="200025"/>
           </a:xfrm>
           <a:prstGeom prst="rect">
             <a:avLst/>
@@ -10018,13 +10527,13 @@
           <a:p>
             <a:pPr algn="l"/>
             <a:r>
-              <a:rPr b="1" sz="1050" i="0" u="none">
-                <a:solidFill>
-                  <a:srgbClr val="E11D48"/>
+              <a:rPr b="1" sz="1200" i="0" u="none">
+                <a:solidFill>
+                  <a:srgbClr val="334155"/>
                 </a:solidFill>
                 <a:latin typeface="Plus Jakarta Sans"/>
               </a:rPr>
-              <a:t>Newton-Raphson (3 iteraciones)</a:t>
+              <a:t>Supera Δt: se adopta la trazadora</a:t>
             </a:r>
           </a:p>
         </p:txBody>
@@ -10055,101 +10564,9 @@
         <p:nvPr/>
       </p:nvGrpSpPr>
       <p:grpSpPr/>
-      <p:sp>
-        <p:nvSpPr>
-          <p:cNvPr id="2" name="Rounded Rectangle 1"/>
-          <p:cNvSpPr/>
-          <p:nvPr/>
-        </p:nvSpPr>
-        <p:spPr>
-          <a:xfrm>
-            <a:off x="609600" y="5895975"/>
-            <a:ext cx="5334000" cy="504825"/>
-          </a:xfrm>
-          <a:prstGeom prst="roundRect">
-            <a:avLst>
-              <a:gd name="adj" fmla="val 22641"/>
-            </a:avLst>
-          </a:prstGeom>
-          <a:solidFill>
-            <a:srgbClr val="F3E8FF"/>
-          </a:solidFill>
-          <a:ln>
-            <a:noFill/>
-          </a:ln>
-          <a:effectLst/>
-        </p:spPr>
-        <p:style>
-          <a:lnRef idx="1">
-            <a:schemeClr val="accent1"/>
-          </a:lnRef>
-          <a:fillRef idx="3">
-            <a:schemeClr val="accent1"/>
-          </a:fillRef>
-          <a:effectRef idx="2">
-            <a:schemeClr val="accent1"/>
-          </a:effectRef>
-          <a:fontRef idx="minor">
-            <a:schemeClr val="lt1"/>
-          </a:fontRef>
-        </p:style>
-        <p:txBody>
-          <a:bodyPr rtlCol="0" anchor="ctr"/>
-          <a:lstStyle/>
-          <a:p>
-            <a:pPr algn="ctr"/>
-          </a:p>
-        </p:txBody>
-      </p:sp>
-      <p:sp>
-        <p:nvSpPr>
-          <p:cNvPr id="3" name="Rounded Rectangle 2"/>
-          <p:cNvSpPr/>
-          <p:nvPr/>
-        </p:nvSpPr>
-        <p:spPr>
-          <a:xfrm>
-            <a:off x="6248400" y="5895975"/>
-            <a:ext cx="5334000" cy="504825"/>
-          </a:xfrm>
-          <a:prstGeom prst="roundRect">
-            <a:avLst>
-              <a:gd name="adj" fmla="val 22641"/>
-            </a:avLst>
-          </a:prstGeom>
-          <a:solidFill>
-            <a:srgbClr val="FEE2E2"/>
-          </a:solidFill>
-          <a:ln>
-            <a:noFill/>
-          </a:ln>
-          <a:effectLst/>
-        </p:spPr>
-        <p:style>
-          <a:lnRef idx="1">
-            <a:schemeClr val="accent1"/>
-          </a:lnRef>
-          <a:fillRef idx="3">
-            <a:schemeClr val="accent1"/>
-          </a:fillRef>
-          <a:effectRef idx="2">
-            <a:schemeClr val="accent1"/>
-          </a:effectRef>
-          <a:fontRef idx="minor">
-            <a:schemeClr val="lt1"/>
-          </a:fontRef>
-        </p:style>
-        <p:txBody>
-          <a:bodyPr rtlCol="0" anchor="ctr"/>
-          <a:lstStyle/>
-          <a:p>
-            <a:pPr algn="ctr"/>
-          </a:p>
-        </p:txBody>
-      </p:sp>
       <p:pic>
         <p:nvPicPr>
-          <p:cNvPr id="4" name="Picture 3" descr="image.png"/>
+          <p:cNvPr id="2" name="Picture 1" descr="image.png"/>
           <p:cNvPicPr>
             <a:picLocks noChangeAspect="1"/>
           </p:cNvPicPr>
@@ -10163,8 +10580,8 @@
         </p:blipFill>
         <p:spPr>
           <a:xfrm>
-            <a:off x="914400" y="2065883"/>
-            <a:ext cx="10363200" cy="2857500"/>
+            <a:off x="914400" y="2123033"/>
+            <a:ext cx="10363200" cy="3048000"/>
           </a:xfrm>
           <a:prstGeom prst="rect">
             <a:avLst/>
@@ -10173,6 +10590,76 @@
       </p:pic>
       <p:sp>
         <p:nvSpPr>
+          <p:cNvPr id="3" name="TextBox 2"/>
+          <p:cNvSpPr txBox="1"/>
+          <p:nvPr/>
+        </p:nvSpPr>
+        <p:spPr>
+          <a:xfrm>
+            <a:off x="609600" y="6200775"/>
+            <a:ext cx="6309360" cy="200025"/>
+          </a:xfrm>
+          <a:prstGeom prst="rect">
+            <a:avLst/>
+          </a:prstGeom>
+          <a:noFill/>
+        </p:spPr>
+        <p:txBody>
+          <a:bodyPr wrap="none" lIns="0" rIns="0" tIns="0" bIns="0" anchor="t">
+            <a:spAutoFit/>
+          </a:bodyPr>
+          <a:lstStyle/>
+          <a:p>
+            <a:pPr algn="l"/>
+            <a:r>
+              <a:rPr b="1" sz="1200" i="0" u="none">
+                <a:solidFill>
+                  <a:srgbClr val="0284C7"/>
+                </a:solidFill>
+                <a:latin typeface="Plus Jakarta Sans"/>
+              </a:rPr>
+              <a:t>Bisección: Siempre converge si hay cambio de signo (15 iteraciones).</a:t>
+            </a:r>
+          </a:p>
+        </p:txBody>
+      </p:sp>
+      <p:sp>
+        <p:nvSpPr>
+          <p:cNvPr id="4" name="TextBox 3"/>
+          <p:cNvSpPr txBox="1"/>
+          <p:nvPr/>
+        </p:nvSpPr>
+        <p:spPr>
+          <a:xfrm>
+            <a:off x="7124700" y="6200775"/>
+            <a:ext cx="5067300" cy="200025"/>
+          </a:xfrm>
+          <a:prstGeom prst="rect">
+            <a:avLst/>
+          </a:prstGeom>
+          <a:noFill/>
+        </p:spPr>
+        <p:txBody>
+          <a:bodyPr wrap="none" lIns="0" rIns="0" tIns="0" bIns="0" anchor="t">
+            <a:spAutoFit/>
+          </a:bodyPr>
+          <a:lstStyle/>
+          <a:p>
+            <a:pPr algn="l"/>
+            <a:r>
+              <a:rPr b="1" sz="1200" i="0" u="none">
+                <a:solidFill>
+                  <a:srgbClr val="E11D48"/>
+                </a:solidFill>
+                <a:latin typeface="Plus Jakarta Sans"/>
+              </a:rPr>
+              <a:t>Newton-Raphson: Convergencia cuadrática en solo 3 pasos.</a:t>
+            </a:r>
+          </a:p>
+        </p:txBody>
+      </p:sp>
+      <p:sp>
+        <p:nvSpPr>
           <p:cNvPr id="5" name="TextBox 4"/>
           <p:cNvSpPr txBox="1"/>
           <p:nvPr/>
@@ -10180,7 +10667,7 @@
         <p:spPr>
           <a:xfrm>
             <a:off x="609600" y="457200"/>
-            <a:ext cx="8548687" cy="171450"/>
+            <a:ext cx="7012781" cy="171450"/>
           </a:xfrm>
           <a:prstGeom prst="rect">
             <a:avLst/>
@@ -10197,11 +10684,11 @@
             <a:r>
               <a:rPr b="1" sz="1050" i="0" u="none">
                 <a:solidFill>
-                  <a:srgbClr val="7C3AED"/>
+                  <a:srgbClr val="E11D48"/>
                 </a:solidFill>
                 <a:latin typeface="Plus Jakarta Sans"/>
               </a:rPr>
-              <a:t>MÉTODO NUMÉRICO 3</a:t>
+              <a:t>EFICIENCIA NUMÉRICA</a:t>
             </a:r>
           </a:p>
         </p:txBody>
@@ -10215,7 +10702,7 @@
         <p:spPr>
           <a:xfrm>
             <a:off x="609600" y="666750"/>
-            <a:ext cx="8976121" cy="388590"/>
+            <a:ext cx="7363420" cy="388590"/>
           </a:xfrm>
           <a:prstGeom prst="rect">
             <a:avLst/>
@@ -10240,7 +10727,7 @@
                 </a:solidFill>
                 <a:latin typeface="Space Grotesk"/>
               </a:rPr>
-              <a:t>Ritmo de Demanda y Diferenciación (dS/dt)</a:t>
+              <a:t>Convergencia: Lineal vs. Cuadrática</a:t>
             </a:r>
           </a:p>
         </p:txBody>
@@ -10253,8 +10740,8 @@
         </p:nvSpPr>
         <p:spPr>
           <a:xfrm>
-            <a:off x="800100" y="6048375"/>
-            <a:ext cx="6191250" cy="200025"/>
+            <a:off x="6373368" y="883890"/>
+            <a:ext cx="2276856" cy="171450"/>
           </a:xfrm>
           <a:prstGeom prst="rect">
             <a:avLst/>
@@ -10269,13 +10756,13 @@
           <a:p>
             <a:pPr algn="l"/>
             <a:r>
-              <a:rPr b="1" sz="1200" i="0" u="none">
-                <a:solidFill>
-                  <a:srgbClr val="6B21A8"/>
+              <a:rPr b="1" sz="1050" i="0" u="none">
+                <a:solidFill>
+                  <a:srgbClr val="0284C7"/>
                 </a:solidFill>
                 <a:latin typeface="Plus Jakarta Sans"/>
               </a:rPr>
-              <a:t>Pico Real Observado: Semana 26 (4.171 M streams/semana)</a:t>
+              <a:t>Bisección (15 iteraciones)</a:t>
             </a:r>
           </a:p>
         </p:txBody>
@@ -10288,8 +10775,8 @@
         </p:nvSpPr>
         <p:spPr>
           <a:xfrm>
-            <a:off x="6438900" y="6048375"/>
-            <a:ext cx="5753100" cy="200025"/>
+            <a:off x="8970264" y="883890"/>
+            <a:ext cx="2606039" cy="171450"/>
           </a:xfrm>
           <a:prstGeom prst="rect">
             <a:avLst/>
@@ -10304,83 +10791,13 @@
           <a:p>
             <a:pPr algn="l"/>
             <a:r>
-              <a:rPr b="1" sz="1200" i="0" u="none">
-                <a:solidFill>
-                  <a:srgbClr val="991B1B"/>
+              <a:rPr b="1" sz="1050" i="0" u="none">
+                <a:solidFill>
+                  <a:srgbClr val="E11D48"/>
                 </a:solidFill>
                 <a:latin typeface="Plus Jakarta Sans"/>
               </a:rPr>
-              <a:t>Pico del Modelo Cúbico: Semana 30.59 (3.436 M streams/semana)</a:t>
-            </a:r>
-          </a:p>
-        </p:txBody>
-      </p:sp>
-      <p:sp>
-        <p:nvSpPr>
-          <p:cNvPr id="9" name="TextBox 8"/>
-          <p:cNvSpPr txBox="1"/>
-          <p:nvPr/>
-        </p:nvSpPr>
-        <p:spPr>
-          <a:xfrm>
-            <a:off x="612648" y="1207008"/>
-            <a:ext cx="2194560" cy="171450"/>
-          </a:xfrm>
-          <a:prstGeom prst="rect">
-            <a:avLst/>
-          </a:prstGeom>
-          <a:noFill/>
-        </p:spPr>
-        <p:txBody>
-          <a:bodyPr wrap="none" lIns="0" rIns="0" tIns="0" bIns="0" anchor="t">
-            <a:spAutoFit/>
-          </a:bodyPr>
-          <a:lstStyle/>
-          <a:p>
-            <a:pPr algn="l"/>
-            <a:r>
-              <a:rPr b="1" sz="1050" i="0" u="none">
-                <a:solidFill>
-                  <a:srgbClr val="8B5CF6"/>
-                </a:solidFill>
-                <a:latin typeface="Plus Jakarta Sans"/>
-              </a:rPr>
-              <a:t>Streams semanales medidos</a:t>
-            </a:r>
-          </a:p>
-        </p:txBody>
-      </p:sp>
-      <p:sp>
-        <p:nvSpPr>
-          <p:cNvPr id="10" name="TextBox 9"/>
-          <p:cNvSpPr txBox="1"/>
-          <p:nvPr/>
-        </p:nvSpPr>
-        <p:spPr>
-          <a:xfrm>
-            <a:off x="3127248" y="1207008"/>
-            <a:ext cx="2194560" cy="171450"/>
-          </a:xfrm>
-          <a:prstGeom prst="rect">
-            <a:avLst/>
-          </a:prstGeom>
-          <a:noFill/>
-        </p:spPr>
-        <p:txBody>
-          <a:bodyPr wrap="none" lIns="0" rIns="0" tIns="0" bIns="0" anchor="t">
-            <a:spAutoFit/>
-          </a:bodyPr>
-          <a:lstStyle/>
-          <a:p>
-            <a:pPr algn="l"/>
-            <a:r>
-              <a:rPr b="1" sz="1050" i="0" u="none">
-                <a:solidFill>
-                  <a:srgbClr val="6D28D9"/>
-                </a:solidFill>
-                <a:latin typeface="Plus Jakarta Sans"/>
-              </a:rPr>
-              <a:t>Derivada del modelo S'(t)</a:t>
+              <a:t>Newton-Raphson (3 iteraciones)</a:t>
             </a:r>
           </a:p>
         </p:txBody>
@@ -10419,16 +10836,16 @@
         </p:nvSpPr>
         <p:spPr>
           <a:xfrm>
-            <a:off x="609600" y="2880270"/>
-            <a:ext cx="2571750" cy="2019300"/>
+            <a:off x="609600" y="5895975"/>
+            <a:ext cx="5334000" cy="504825"/>
           </a:xfrm>
           <a:prstGeom prst="roundRect">
             <a:avLst>
-              <a:gd name="adj" fmla="val 7547"/>
+              <a:gd name="adj" fmla="val 22641"/>
             </a:avLst>
           </a:prstGeom>
           <a:solidFill>
-            <a:srgbClr val="F8FAFC"/>
+            <a:srgbClr val="F3E8FF"/>
           </a:solidFill>
           <a:ln>
             <a:noFill/>
@@ -10465,16 +10882,16 @@
         </p:nvSpPr>
         <p:spPr>
           <a:xfrm>
-            <a:off x="3409950" y="2880270"/>
-            <a:ext cx="2571750" cy="2019300"/>
+            <a:off x="6248400" y="5895975"/>
+            <a:ext cx="5334000" cy="504825"/>
           </a:xfrm>
           <a:prstGeom prst="roundRect">
             <a:avLst>
-              <a:gd name="adj" fmla="val 7547"/>
+              <a:gd name="adj" fmla="val 22641"/>
             </a:avLst>
           </a:prstGeom>
           <a:solidFill>
-            <a:srgbClr val="F8FAFC"/>
+            <a:srgbClr val="FEE2E2"/>
           </a:solidFill>
           <a:ln>
             <a:noFill/>
@@ -10503,101 +10920,9 @@
           </a:p>
         </p:txBody>
       </p:sp>
-      <p:sp>
-        <p:nvSpPr>
-          <p:cNvPr id="4" name="Rounded Rectangle 3"/>
-          <p:cNvSpPr/>
-          <p:nvPr/>
-        </p:nvSpPr>
-        <p:spPr>
-          <a:xfrm>
-            <a:off x="6210300" y="2880270"/>
-            <a:ext cx="2571750" cy="2019300"/>
-          </a:xfrm>
-          <a:prstGeom prst="roundRect">
-            <a:avLst>
-              <a:gd name="adj" fmla="val 7547"/>
-            </a:avLst>
-          </a:prstGeom>
-          <a:solidFill>
-            <a:srgbClr val="F8FAFC"/>
-          </a:solidFill>
-          <a:ln>
-            <a:noFill/>
-          </a:ln>
-          <a:effectLst/>
-        </p:spPr>
-        <p:style>
-          <a:lnRef idx="1">
-            <a:schemeClr val="accent1"/>
-          </a:lnRef>
-          <a:fillRef idx="3">
-            <a:schemeClr val="accent1"/>
-          </a:fillRef>
-          <a:effectRef idx="2">
-            <a:schemeClr val="accent1"/>
-          </a:effectRef>
-          <a:fontRef idx="minor">
-            <a:schemeClr val="lt1"/>
-          </a:fontRef>
-        </p:style>
-        <p:txBody>
-          <a:bodyPr rtlCol="0" anchor="ctr"/>
-          <a:lstStyle/>
-          <a:p>
-            <a:pPr algn="ctr"/>
-          </a:p>
-        </p:txBody>
-      </p:sp>
-      <p:sp>
-        <p:nvSpPr>
-          <p:cNvPr id="5" name="Rounded Rectangle 4"/>
-          <p:cNvSpPr/>
-          <p:nvPr/>
-        </p:nvSpPr>
-        <p:spPr>
-          <a:xfrm>
-            <a:off x="9010650" y="2880270"/>
-            <a:ext cx="2571750" cy="2019300"/>
-          </a:xfrm>
-          <a:prstGeom prst="roundRect">
-            <a:avLst>
-              <a:gd name="adj" fmla="val 7547"/>
-            </a:avLst>
-          </a:prstGeom>
-          <a:solidFill>
-            <a:srgbClr val="F8FAFC"/>
-          </a:solidFill>
-          <a:ln>
-            <a:noFill/>
-          </a:ln>
-          <a:effectLst/>
-        </p:spPr>
-        <p:style>
-          <a:lnRef idx="1">
-            <a:schemeClr val="accent1"/>
-          </a:lnRef>
-          <a:fillRef idx="3">
-            <a:schemeClr val="accent1"/>
-          </a:fillRef>
-          <a:effectRef idx="2">
-            <a:schemeClr val="accent1"/>
-          </a:effectRef>
-          <a:fontRef idx="minor">
-            <a:schemeClr val="lt1"/>
-          </a:fontRef>
-        </p:style>
-        <p:txBody>
-          <a:bodyPr rtlCol="0" anchor="ctr"/>
-          <a:lstStyle/>
-          <a:p>
-            <a:pPr algn="ctr"/>
-          </a:p>
-        </p:txBody>
-      </p:sp>
       <p:pic>
         <p:nvPicPr>
-          <p:cNvPr id="6" name="Picture 5" descr="image.png"/>
+          <p:cNvPr id="4" name="Picture 3" descr="image.png"/>
           <p:cNvPicPr>
             <a:picLocks noChangeAspect="1"/>
           </p:cNvPicPr>
@@ -10611,192 +10936,24 @@
         </p:blipFill>
         <p:spPr>
           <a:xfrm>
-            <a:off x="838200" y="3146970"/>
-            <a:ext cx="381000" cy="381000"/>
+            <a:off x="914400" y="2065883"/>
+            <a:ext cx="10363200" cy="2857500"/>
           </a:xfrm>
           <a:prstGeom prst="rect">
             <a:avLst/>
           </a:prstGeom>
         </p:spPr>
       </p:pic>
-      <p:pic>
-        <p:nvPicPr>
-          <p:cNvPr id="7" name="Picture 6" descr="image.png"/>
-          <p:cNvPicPr>
-            <a:picLocks noChangeAspect="1"/>
-          </p:cNvPicPr>
-          <p:nvPr/>
-        </p:nvPicPr>
-        <p:blipFill>
-          <a:blip r:embed="rId3"/>
-          <a:stretch>
-            <a:fillRect/>
-          </a:stretch>
-        </p:blipFill>
-        <p:spPr>
-          <a:xfrm>
-            <a:off x="3638550" y="3146970"/>
-            <a:ext cx="381000" cy="381000"/>
-          </a:xfrm>
-          <a:prstGeom prst="rect">
-            <a:avLst/>
-          </a:prstGeom>
-        </p:spPr>
-      </p:pic>
-      <p:pic>
-        <p:nvPicPr>
-          <p:cNvPr id="8" name="Picture 7" descr="image.png"/>
-          <p:cNvPicPr>
-            <a:picLocks noChangeAspect="1"/>
-          </p:cNvPicPr>
-          <p:nvPr/>
-        </p:nvPicPr>
-        <p:blipFill>
-          <a:blip r:embed="rId4"/>
-          <a:stretch>
-            <a:fillRect/>
-          </a:stretch>
-        </p:blipFill>
-        <p:spPr>
-          <a:xfrm>
-            <a:off x="6438900" y="3146970"/>
-            <a:ext cx="381000" cy="381000"/>
-          </a:xfrm>
-          <a:prstGeom prst="rect">
-            <a:avLst/>
-          </a:prstGeom>
-        </p:spPr>
-      </p:pic>
-      <p:pic>
-        <p:nvPicPr>
-          <p:cNvPr id="9" name="Picture 8" descr="image.png"/>
-          <p:cNvPicPr>
-            <a:picLocks noChangeAspect="1"/>
-          </p:cNvPicPr>
-          <p:nvPr/>
-        </p:nvPicPr>
-        <p:blipFill>
-          <a:blip r:embed="rId5"/>
-          <a:stretch>
-            <a:fillRect/>
-          </a:stretch>
-        </p:blipFill>
-        <p:spPr>
-          <a:xfrm>
-            <a:off x="9239250" y="3146970"/>
-            <a:ext cx="381000" cy="381000"/>
-          </a:xfrm>
-          <a:prstGeom prst="rect">
-            <a:avLst/>
-          </a:prstGeom>
-        </p:spPr>
-      </p:pic>
-      <p:pic>
-        <p:nvPicPr>
-          <p:cNvPr id="10" name="Picture 9" descr="image.png"/>
-          <p:cNvPicPr>
-            <a:picLocks noChangeAspect="1"/>
-          </p:cNvPicPr>
-          <p:nvPr/>
-        </p:nvPicPr>
-        <p:blipFill>
-          <a:blip r:embed="rId6"/>
-          <a:stretch>
-            <a:fillRect/>
-          </a:stretch>
-        </p:blipFill>
-        <p:spPr>
-          <a:xfrm>
-            <a:off x="942975" y="3251745"/>
-            <a:ext cx="171450" cy="171450"/>
-          </a:xfrm>
-          <a:prstGeom prst="rect">
-            <a:avLst/>
-          </a:prstGeom>
-        </p:spPr>
-      </p:pic>
-      <p:pic>
-        <p:nvPicPr>
-          <p:cNvPr id="11" name="Picture 10" descr="image.png"/>
-          <p:cNvPicPr>
-            <a:picLocks noChangeAspect="1"/>
-          </p:cNvPicPr>
-          <p:nvPr/>
-        </p:nvPicPr>
-        <p:blipFill>
-          <a:blip r:embed="rId7"/>
-          <a:stretch>
-            <a:fillRect/>
-          </a:stretch>
-        </p:blipFill>
-        <p:spPr>
-          <a:xfrm>
-            <a:off x="3719512" y="3251745"/>
-            <a:ext cx="219075" cy="171450"/>
-          </a:xfrm>
-          <a:prstGeom prst="rect">
-            <a:avLst/>
-          </a:prstGeom>
-        </p:spPr>
-      </p:pic>
-      <p:pic>
-        <p:nvPicPr>
-          <p:cNvPr id="12" name="Picture 11" descr="image.png"/>
-          <p:cNvPicPr>
-            <a:picLocks noChangeAspect="1"/>
-          </p:cNvPicPr>
-          <p:nvPr/>
-        </p:nvPicPr>
-        <p:blipFill>
-          <a:blip r:embed="rId8"/>
-          <a:stretch>
-            <a:fillRect/>
-          </a:stretch>
-        </p:blipFill>
-        <p:spPr>
-          <a:xfrm>
-            <a:off x="6543675" y="3251745"/>
-            <a:ext cx="171450" cy="171450"/>
-          </a:xfrm>
-          <a:prstGeom prst="rect">
-            <a:avLst/>
-          </a:prstGeom>
-        </p:spPr>
-      </p:pic>
-      <p:pic>
-        <p:nvPicPr>
-          <p:cNvPr id="13" name="Picture 12" descr="image.png"/>
-          <p:cNvPicPr>
-            <a:picLocks noChangeAspect="1"/>
-          </p:cNvPicPr>
-          <p:nvPr/>
-        </p:nvPicPr>
-        <p:blipFill>
-          <a:blip r:embed="rId9"/>
-          <a:stretch>
-            <a:fillRect/>
-          </a:stretch>
-        </p:blipFill>
-        <p:spPr>
-          <a:xfrm>
-            <a:off x="9344025" y="3251745"/>
-            <a:ext cx="171450" cy="171450"/>
-          </a:xfrm>
-          <a:prstGeom prst="rect">
-            <a:avLst/>
-          </a:prstGeom>
-        </p:spPr>
-      </p:pic>
-      <p:sp>
-        <p:nvSpPr>
-          <p:cNvPr id="14" name="TextBox 13"/>
+      <p:sp>
+        <p:nvSpPr>
+          <p:cNvPr id="5" name="TextBox 4"/>
           <p:cNvSpPr txBox="1"/>
           <p:nvPr/>
         </p:nvSpPr>
         <p:spPr>
           <a:xfrm>
             <a:off x="609600" y="457200"/>
-            <a:ext cx="11582400" cy="171450"/>
+            <a:ext cx="8548687" cy="171450"/>
           </a:xfrm>
           <a:prstGeom prst="rect">
             <a:avLst/>
@@ -10813,25 +10970,25 @@
             <a:r>
               <a:rPr b="1" sz="1050" i="0" u="none">
                 <a:solidFill>
-                  <a:srgbClr val="E11D48"/>
+                  <a:srgbClr val="7C3AED"/>
                 </a:solidFill>
                 <a:latin typeface="Plus Jakarta Sans"/>
               </a:rPr>
-              <a:t>EVALUACIÓN TÉCNICA</a:t>
-            </a:r>
-          </a:p>
-        </p:txBody>
-      </p:sp>
-      <p:sp>
-        <p:nvSpPr>
-          <p:cNvPr id="15" name="TextBox 14"/>
-          <p:cNvSpPr txBox="1"/>
-          <p:nvPr/>
-        </p:nvSpPr>
-        <p:spPr>
-          <a:xfrm>
-            <a:off x="609600" y="685800"/>
-            <a:ext cx="11582400" cy="388590"/>
+              <a:t>MÉTODO NUMÉRICO 3</a:t>
+            </a:r>
+          </a:p>
+        </p:txBody>
+      </p:sp>
+      <p:sp>
+        <p:nvSpPr>
+          <p:cNvPr id="6" name="TextBox 5"/>
+          <p:cNvSpPr txBox="1"/>
+          <p:nvPr/>
+        </p:nvSpPr>
+        <p:spPr>
+          <a:xfrm>
+            <a:off x="609600" y="666750"/>
+            <a:ext cx="8976121" cy="388590"/>
           </a:xfrm>
           <a:prstGeom prst="rect">
             <a:avLst/>
@@ -10856,21 +11013,21 @@
                 </a:solidFill>
                 <a:latin typeface="Space Grotesk"/>
               </a:rPr>
-              <a:t>Límites y Condiciones de Borde</a:t>
-            </a:r>
-          </a:p>
-        </p:txBody>
-      </p:sp>
-      <p:sp>
-        <p:nvSpPr>
-          <p:cNvPr id="16" name="TextBox 15"/>
-          <p:cNvSpPr txBox="1"/>
-          <p:nvPr/>
-        </p:nvSpPr>
-        <p:spPr>
-          <a:xfrm>
-            <a:off x="838200" y="3642270"/>
-            <a:ext cx="2775346" cy="219075"/>
+              <a:t>Ritmo de Demanda y Diferenciación (dS/dt)</a:t>
+            </a:r>
+          </a:p>
+        </p:txBody>
+      </p:sp>
+      <p:sp>
+        <p:nvSpPr>
+          <p:cNvPr id="7" name="TextBox 6"/>
+          <p:cNvSpPr txBox="1"/>
+          <p:nvPr/>
+        </p:nvSpPr>
+        <p:spPr>
+          <a:xfrm>
+            <a:off x="800100" y="6048375"/>
+            <a:ext cx="6191250" cy="200025"/>
           </a:xfrm>
           <a:prstGeom prst="rect">
             <a:avLst/>
@@ -10885,62 +11042,62 @@
           <a:p>
             <a:pPr algn="l"/>
             <a:r>
-              <a:rPr b="1" sz="1350" i="0" u="none">
-                <a:solidFill>
-                  <a:srgbClr val="0F172A"/>
-                </a:solidFill>
-                <a:latin typeface="Space Grotesk"/>
-              </a:rPr>
-              <a:t>Discrepancia Puntual</a:t>
-            </a:r>
-          </a:p>
-        </p:txBody>
-      </p:sp>
-      <p:sp>
-        <p:nvSpPr>
-          <p:cNvPr id="17" name="TextBox 16"/>
-          <p:cNvSpPr txBox="1"/>
-          <p:nvPr/>
-        </p:nvSpPr>
-        <p:spPr>
-          <a:xfrm>
-            <a:off x="838200" y="3975645"/>
-            <a:ext cx="2209800" cy="657225"/>
-          </a:xfrm>
-          <a:prstGeom prst="rect">
-            <a:avLst/>
-          </a:prstGeom>
-          <a:noFill/>
-        </p:spPr>
-        <p:txBody>
-          <a:bodyPr wrap="square" lIns="0" rIns="0" tIns="0" bIns="0" anchor="t">
+              <a:rPr b="1" sz="1200" i="0" u="none">
+                <a:solidFill>
+                  <a:srgbClr val="6B21A8"/>
+                </a:solidFill>
+                <a:latin typeface="Plus Jakarta Sans"/>
+              </a:rPr>
+              <a:t>Pico Real Observado: Semana 26 (4.171 M streams/semana)</a:t>
+            </a:r>
+          </a:p>
+        </p:txBody>
+      </p:sp>
+      <p:sp>
+        <p:nvSpPr>
+          <p:cNvPr id="8" name="TextBox 7"/>
+          <p:cNvSpPr txBox="1"/>
+          <p:nvPr/>
+        </p:nvSpPr>
+        <p:spPr>
+          <a:xfrm>
+            <a:off x="6438900" y="6048375"/>
+            <a:ext cx="5753100" cy="200025"/>
+          </a:xfrm>
+          <a:prstGeom prst="rect">
+            <a:avLst/>
+          </a:prstGeom>
+          <a:noFill/>
+        </p:spPr>
+        <p:txBody>
+          <a:bodyPr wrap="none" lIns="0" rIns="0" tIns="0" bIns="0" anchor="t">
             <a:spAutoFit/>
           </a:bodyPr>
           <a:lstStyle/>
           <a:p>
             <a:pPr algn="l"/>
             <a:r>
-              <a:rPr b="0" sz="1350" i="0" u="none">
-                <a:solidFill>
-                  <a:srgbClr val="475569"/>
+              <a:rPr b="1" sz="1200" i="0" u="none">
+                <a:solidFill>
+                  <a:srgbClr val="991B1B"/>
                 </a:solidFill>
                 <a:latin typeface="Plus Jakarta Sans"/>
               </a:rPr>
-              <a:t>Regresión: 2.77 d del cruce medido, más que Δt = ±1.92 d.</a:t>
-            </a:r>
-          </a:p>
-        </p:txBody>
-      </p:sp>
-      <p:sp>
-        <p:nvSpPr>
-          <p:cNvPr id="18" name="TextBox 17"/>
-          <p:cNvSpPr txBox="1"/>
-          <p:nvPr/>
-        </p:nvSpPr>
-        <p:spPr>
-          <a:xfrm>
-            <a:off x="3638550" y="3642270"/>
-            <a:ext cx="2775346" cy="219075"/>
+              <a:t>Pico del Modelo Cúbico: Semana 30.59 (3.436 M streams/semana)</a:t>
+            </a:r>
+          </a:p>
+        </p:txBody>
+      </p:sp>
+      <p:sp>
+        <p:nvSpPr>
+          <p:cNvPr id="9" name="TextBox 8"/>
+          <p:cNvSpPr txBox="1"/>
+          <p:nvPr/>
+        </p:nvSpPr>
+        <p:spPr>
+          <a:xfrm>
+            <a:off x="612648" y="1207008"/>
+            <a:ext cx="2194560" cy="171450"/>
           </a:xfrm>
           <a:prstGeom prst="rect">
             <a:avLst/>
@@ -10955,188 +11112,48 @@
           <a:p>
             <a:pPr algn="l"/>
             <a:r>
-              <a:rPr b="1" sz="1350" i="0" u="none">
-                <a:solidFill>
-                  <a:srgbClr val="0F172A"/>
-                </a:solidFill>
-                <a:latin typeface="Space Grotesk"/>
-              </a:rPr>
-              <a:t>Suavizado del Pico</a:t>
-            </a:r>
-          </a:p>
-        </p:txBody>
-      </p:sp>
-      <p:sp>
-        <p:nvSpPr>
-          <p:cNvPr id="19" name="TextBox 18"/>
-          <p:cNvSpPr txBox="1"/>
-          <p:nvPr/>
-        </p:nvSpPr>
-        <p:spPr>
-          <a:xfrm>
-            <a:off x="3638550" y="3975645"/>
-            <a:ext cx="2209800" cy="657225"/>
-          </a:xfrm>
-          <a:prstGeom prst="rect">
-            <a:avLst/>
-          </a:prstGeom>
-          <a:noFill/>
-        </p:spPr>
-        <p:txBody>
-          <a:bodyPr wrap="square" lIns="0" rIns="0" tIns="0" bIns="0" anchor="t">
+              <a:rPr b="1" sz="1050" i="0" u="none">
+                <a:solidFill>
+                  <a:srgbClr val="8B5CF6"/>
+                </a:solidFill>
+                <a:latin typeface="Plus Jakarta Sans"/>
+              </a:rPr>
+              <a:t>Streams semanales medidos</a:t>
+            </a:r>
+          </a:p>
+        </p:txBody>
+      </p:sp>
+      <p:sp>
+        <p:nvSpPr>
+          <p:cNvPr id="10" name="TextBox 9"/>
+          <p:cNvSpPr txBox="1"/>
+          <p:nvPr/>
+        </p:nvSpPr>
+        <p:spPr>
+          <a:xfrm>
+            <a:off x="3127248" y="1207008"/>
+            <a:ext cx="2194560" cy="171450"/>
+          </a:xfrm>
+          <a:prstGeom prst="rect">
+            <a:avLst/>
+          </a:prstGeom>
+          <a:noFill/>
+        </p:spPr>
+        <p:txBody>
+          <a:bodyPr wrap="none" lIns="0" rIns="0" tIns="0" bIns="0" anchor="t">
             <a:spAutoFit/>
           </a:bodyPr>
           <a:lstStyle/>
           <a:p>
             <a:pPr algn="l"/>
             <a:r>
-              <a:rPr b="0" sz="1350" i="0" u="none">
-                <a:solidFill>
-                  <a:srgbClr val="475569"/>
+              <a:rPr b="1" sz="1050" i="0" u="none">
+                <a:solidFill>
+                  <a:srgbClr val="6D28D9"/>
                 </a:solidFill>
                 <a:latin typeface="Plus Jakarta Sans"/>
               </a:rPr>
-              <a:t>Atenúa el máximo un 18 % y lo desplaza 4.6 semanas.</a:t>
-            </a:r>
-          </a:p>
-        </p:txBody>
-      </p:sp>
-      <p:sp>
-        <p:nvSpPr>
-          <p:cNvPr id="20" name="TextBox 19"/>
-          <p:cNvSpPr txBox="1"/>
-          <p:nvPr/>
-        </p:nvSpPr>
-        <p:spPr>
-          <a:xfrm>
-            <a:off x="6438900" y="3642270"/>
-            <a:ext cx="2775346" cy="219075"/>
-          </a:xfrm>
-          <a:prstGeom prst="rect">
-            <a:avLst/>
-          </a:prstGeom>
-          <a:noFill/>
-        </p:spPr>
-        <p:txBody>
-          <a:bodyPr wrap="none" lIns="0" rIns="0" tIns="0" bIns="0" anchor="t">
-            <a:spAutoFit/>
-          </a:bodyPr>
-          <a:lstStyle/>
-          <a:p>
-            <a:pPr algn="l"/>
-            <a:r>
-              <a:rPr b="1" sz="1350" i="0" u="none">
-                <a:solidFill>
-                  <a:srgbClr val="0F172A"/>
-                </a:solidFill>
-                <a:latin typeface="Space Grotesk"/>
-              </a:rPr>
-              <a:t>Alcance Muestral</a:t>
-            </a:r>
-          </a:p>
-        </p:txBody>
-      </p:sp>
-      <p:sp>
-        <p:nvSpPr>
-          <p:cNvPr id="21" name="TextBox 20"/>
-          <p:cNvSpPr txBox="1"/>
-          <p:nvPr/>
-        </p:nvSpPr>
-        <p:spPr>
-          <a:xfrm>
-            <a:off x="6438900" y="3975645"/>
-            <a:ext cx="2209800" cy="657225"/>
-          </a:xfrm>
-          <a:prstGeom prst="rect">
-            <a:avLst/>
-          </a:prstGeom>
-          <a:noFill/>
-        </p:spPr>
-        <p:txBody>
-          <a:bodyPr wrap="square" lIns="0" rIns="0" tIns="0" bIns="0" anchor="t">
-            <a:spAutoFit/>
-          </a:bodyPr>
-          <a:lstStyle/>
-          <a:p>
-            <a:pPr algn="l"/>
-            <a:r>
-              <a:rPr b="0" sz="1350" i="0" u="none">
-                <a:solidFill>
-                  <a:srgbClr val="475569"/>
-                </a:solidFill>
-                <a:latin typeface="Plus Jakarta Sans"/>
-              </a:rPr>
-              <a:t>Restringido exclusivamente al Top 200 de Spotify México.</a:t>
-            </a:r>
-          </a:p>
-        </p:txBody>
-      </p:sp>
-      <p:sp>
-        <p:nvSpPr>
-          <p:cNvPr id="22" name="TextBox 21"/>
-          <p:cNvSpPr txBox="1"/>
-          <p:nvPr/>
-        </p:nvSpPr>
-        <p:spPr>
-          <a:xfrm>
-            <a:off x="9239250" y="3642270"/>
-            <a:ext cx="2775346" cy="219075"/>
-          </a:xfrm>
-          <a:prstGeom prst="rect">
-            <a:avLst/>
-          </a:prstGeom>
-          <a:noFill/>
-        </p:spPr>
-        <p:txBody>
-          <a:bodyPr wrap="none" lIns="0" rIns="0" tIns="0" bIns="0" anchor="t">
-            <a:spAutoFit/>
-          </a:bodyPr>
-          <a:lstStyle/>
-          <a:p>
-            <a:pPr algn="l"/>
-            <a:r>
-              <a:rPr b="1" sz="1350" i="0" u="none">
-                <a:solidFill>
-                  <a:srgbClr val="0F172A"/>
-                </a:solidFill>
-                <a:latin typeface="Space Grotesk"/>
-              </a:rPr>
-              <a:t>No Extrapolable</a:t>
-            </a:r>
-          </a:p>
-        </p:txBody>
-      </p:sp>
-      <p:sp>
-        <p:nvSpPr>
-          <p:cNvPr id="23" name="TextBox 22"/>
-          <p:cNvSpPr txBox="1"/>
-          <p:nvPr/>
-        </p:nvSpPr>
-        <p:spPr>
-          <a:xfrm>
-            <a:off x="9239250" y="3975645"/>
-            <a:ext cx="2209800" cy="657225"/>
-          </a:xfrm>
-          <a:prstGeom prst="rect">
-            <a:avLst/>
-          </a:prstGeom>
-          <a:noFill/>
-        </p:spPr>
-        <p:txBody>
-          <a:bodyPr wrap="square" lIns="0" rIns="0" tIns="0" bIns="0" anchor="t">
-            <a:spAutoFit/>
-          </a:bodyPr>
-          <a:lstStyle/>
-          <a:p>
-            <a:pPr algn="l"/>
-            <a:r>
-              <a:rPr b="0" sz="1350" i="0" u="none">
-                <a:solidFill>
-                  <a:srgbClr val="475569"/>
-                </a:solidFill>
-                <a:latin typeface="Plus Jakarta Sans"/>
-              </a:rPr>
-              <a:t>El término cúbico negativo colapsa fuera del intervalo anual.</a:t>
+              <a:t>Derivada del modelo S'(t)</a:t>
             </a:r>
           </a:p>
         </p:txBody>

--- a/ENTREGABLES/Presentacion_Rosa_Pastel_Metodos_Numericos.pptx
+++ b/ENTREGABLES/Presentacion_Rosa_Pastel_Metodos_Numericos.pptx
@@ -11,9 +11,7 @@
     <p:sldId id="259" r:id="rId10"/>
     <p:sldId id="260" r:id="rId11"/>
     <p:sldId id="261" r:id="rId12"/>
-    <p:sldId id="268" r:id="rId19"/>
     <p:sldId id="262" r:id="rId13"/>
-    <p:sldId id="263" r:id="rId14"/>
     <p:sldId id="270" r:id="rId21"/>
     <p:sldId id="269" r:id="rId20"/>
     <p:sldId id="264" r:id="rId15"/>
@@ -3333,7 +3331,7 @@
                 </a:solidFill>
                 <a:latin typeface="Plus Jakarta Sans"/>
               </a:rPr>
-              <a:t>Mínimos cuadrados con eliminación gaussiana, trazadora cúbica natural, Bisección vs. Newton-Raphson y diferenciación numérica sobre 47 semanas de datos reales.</a:t>
+              <a:t>Interpolación de Newton y Bisección vs. Newton-Raphson sobre 47 semanas de datos reales de Spotify México.</a:t>
             </a:r>
           </a:p>
         </p:txBody>
@@ -3582,16 +3580,16 @@
         </p:nvSpPr>
         <p:spPr>
           <a:xfrm>
-            <a:off x="609600" y="5895975"/>
-            <a:ext cx="5334000" cy="504825"/>
+            <a:off x="609600" y="2880270"/>
+            <a:ext cx="2571750" cy="2019300"/>
           </a:xfrm>
           <a:prstGeom prst="roundRect">
             <a:avLst>
-              <a:gd name="adj" fmla="val 22641"/>
+              <a:gd name="adj" fmla="val 7547"/>
             </a:avLst>
           </a:prstGeom>
           <a:solidFill>
-            <a:srgbClr val="F3E8FF"/>
+            <a:srgbClr val="F8FAFC"/>
           </a:solidFill>
           <a:ln>
             <a:noFill/>
@@ -3628,16 +3626,16 @@
         </p:nvSpPr>
         <p:spPr>
           <a:xfrm>
-            <a:off x="6248400" y="5895975"/>
-            <a:ext cx="5334000" cy="504825"/>
+            <a:off x="3409950" y="2880270"/>
+            <a:ext cx="2571750" cy="2019300"/>
           </a:xfrm>
           <a:prstGeom prst="roundRect">
             <a:avLst>
-              <a:gd name="adj" fmla="val 22641"/>
+              <a:gd name="adj" fmla="val 7547"/>
             </a:avLst>
           </a:prstGeom>
           <a:solidFill>
-            <a:srgbClr val="FEE2E2"/>
+            <a:srgbClr val="F8FAFC"/>
           </a:solidFill>
           <a:ln>
             <a:noFill/>
@@ -3666,9 +3664,101 @@
           </a:p>
         </p:txBody>
       </p:sp>
+      <p:sp>
+        <p:nvSpPr>
+          <p:cNvPr id="4" name="Rounded Rectangle 3"/>
+          <p:cNvSpPr/>
+          <p:nvPr/>
+        </p:nvSpPr>
+        <p:spPr>
+          <a:xfrm>
+            <a:off x="6210300" y="2880270"/>
+            <a:ext cx="2571750" cy="2019300"/>
+          </a:xfrm>
+          <a:prstGeom prst="roundRect">
+            <a:avLst>
+              <a:gd name="adj" fmla="val 7547"/>
+            </a:avLst>
+          </a:prstGeom>
+          <a:solidFill>
+            <a:srgbClr val="F8FAFC"/>
+          </a:solidFill>
+          <a:ln>
+            <a:noFill/>
+          </a:ln>
+          <a:effectLst/>
+        </p:spPr>
+        <p:style>
+          <a:lnRef idx="1">
+            <a:schemeClr val="accent1"/>
+          </a:lnRef>
+          <a:fillRef idx="3">
+            <a:schemeClr val="accent1"/>
+          </a:fillRef>
+          <a:effectRef idx="2">
+            <a:schemeClr val="accent1"/>
+          </a:effectRef>
+          <a:fontRef idx="minor">
+            <a:schemeClr val="lt1"/>
+          </a:fontRef>
+        </p:style>
+        <p:txBody>
+          <a:bodyPr rtlCol="0" anchor="ctr"/>
+          <a:lstStyle/>
+          <a:p>
+            <a:pPr algn="ctr"/>
+          </a:p>
+        </p:txBody>
+      </p:sp>
+      <p:sp>
+        <p:nvSpPr>
+          <p:cNvPr id="5" name="Rounded Rectangle 4"/>
+          <p:cNvSpPr/>
+          <p:nvPr/>
+        </p:nvSpPr>
+        <p:spPr>
+          <a:xfrm>
+            <a:off x="9010650" y="2880270"/>
+            <a:ext cx="2571750" cy="2019300"/>
+          </a:xfrm>
+          <a:prstGeom prst="roundRect">
+            <a:avLst>
+              <a:gd name="adj" fmla="val 7547"/>
+            </a:avLst>
+          </a:prstGeom>
+          <a:solidFill>
+            <a:srgbClr val="F8FAFC"/>
+          </a:solidFill>
+          <a:ln>
+            <a:noFill/>
+          </a:ln>
+          <a:effectLst/>
+        </p:spPr>
+        <p:style>
+          <a:lnRef idx="1">
+            <a:schemeClr val="accent1"/>
+          </a:lnRef>
+          <a:fillRef idx="3">
+            <a:schemeClr val="accent1"/>
+          </a:fillRef>
+          <a:effectRef idx="2">
+            <a:schemeClr val="accent1"/>
+          </a:effectRef>
+          <a:fontRef idx="minor">
+            <a:schemeClr val="lt1"/>
+          </a:fontRef>
+        </p:style>
+        <p:txBody>
+          <a:bodyPr rtlCol="0" anchor="ctr"/>
+          <a:lstStyle/>
+          <a:p>
+            <a:pPr algn="ctr"/>
+          </a:p>
+        </p:txBody>
+      </p:sp>
       <p:pic>
         <p:nvPicPr>
-          <p:cNvPr id="4" name="Picture 3" descr="image.png"/>
+          <p:cNvPr id="6" name="Picture 5" descr="image.png"/>
           <p:cNvPicPr>
             <a:picLocks noChangeAspect="1"/>
           </p:cNvPicPr>
@@ -3682,24 +3772,192 @@
         </p:blipFill>
         <p:spPr>
           <a:xfrm>
-            <a:off x="914400" y="2065883"/>
-            <a:ext cx="10363200" cy="2857500"/>
+            <a:off x="838200" y="3146970"/>
+            <a:ext cx="381000" cy="381000"/>
           </a:xfrm>
           <a:prstGeom prst="rect">
             <a:avLst/>
           </a:prstGeom>
         </p:spPr>
       </p:pic>
-      <p:sp>
-        <p:nvSpPr>
-          <p:cNvPr id="5" name="TextBox 4"/>
+      <p:pic>
+        <p:nvPicPr>
+          <p:cNvPr id="7" name="Picture 6" descr="image.png"/>
+          <p:cNvPicPr>
+            <a:picLocks noChangeAspect="1"/>
+          </p:cNvPicPr>
+          <p:nvPr/>
+        </p:nvPicPr>
+        <p:blipFill>
+          <a:blip r:embed="rId3"/>
+          <a:stretch>
+            <a:fillRect/>
+          </a:stretch>
+        </p:blipFill>
+        <p:spPr>
+          <a:xfrm>
+            <a:off x="3638550" y="3146970"/>
+            <a:ext cx="381000" cy="381000"/>
+          </a:xfrm>
+          <a:prstGeom prst="rect">
+            <a:avLst/>
+          </a:prstGeom>
+        </p:spPr>
+      </p:pic>
+      <p:pic>
+        <p:nvPicPr>
+          <p:cNvPr id="8" name="Picture 7" descr="image.png"/>
+          <p:cNvPicPr>
+            <a:picLocks noChangeAspect="1"/>
+          </p:cNvPicPr>
+          <p:nvPr/>
+        </p:nvPicPr>
+        <p:blipFill>
+          <a:blip r:embed="rId4"/>
+          <a:stretch>
+            <a:fillRect/>
+          </a:stretch>
+        </p:blipFill>
+        <p:spPr>
+          <a:xfrm>
+            <a:off x="6438900" y="3146970"/>
+            <a:ext cx="381000" cy="381000"/>
+          </a:xfrm>
+          <a:prstGeom prst="rect">
+            <a:avLst/>
+          </a:prstGeom>
+        </p:spPr>
+      </p:pic>
+      <p:pic>
+        <p:nvPicPr>
+          <p:cNvPr id="9" name="Picture 8" descr="image.png"/>
+          <p:cNvPicPr>
+            <a:picLocks noChangeAspect="1"/>
+          </p:cNvPicPr>
+          <p:nvPr/>
+        </p:nvPicPr>
+        <p:blipFill>
+          <a:blip r:embed="rId5"/>
+          <a:stretch>
+            <a:fillRect/>
+          </a:stretch>
+        </p:blipFill>
+        <p:spPr>
+          <a:xfrm>
+            <a:off x="9239250" y="3146970"/>
+            <a:ext cx="381000" cy="381000"/>
+          </a:xfrm>
+          <a:prstGeom prst="rect">
+            <a:avLst/>
+          </a:prstGeom>
+        </p:spPr>
+      </p:pic>
+      <p:pic>
+        <p:nvPicPr>
+          <p:cNvPr id="10" name="Picture 9" descr="image.png"/>
+          <p:cNvPicPr>
+            <a:picLocks noChangeAspect="1"/>
+          </p:cNvPicPr>
+          <p:nvPr/>
+        </p:nvPicPr>
+        <p:blipFill>
+          <a:blip r:embed="rId6"/>
+          <a:stretch>
+            <a:fillRect/>
+          </a:stretch>
+        </p:blipFill>
+        <p:spPr>
+          <a:xfrm>
+            <a:off x="942975" y="3251745"/>
+            <a:ext cx="171450" cy="171450"/>
+          </a:xfrm>
+          <a:prstGeom prst="rect">
+            <a:avLst/>
+          </a:prstGeom>
+        </p:spPr>
+      </p:pic>
+      <p:pic>
+        <p:nvPicPr>
+          <p:cNvPr id="11" name="Picture 10" descr="image.png"/>
+          <p:cNvPicPr>
+            <a:picLocks noChangeAspect="1"/>
+          </p:cNvPicPr>
+          <p:nvPr/>
+        </p:nvPicPr>
+        <p:blipFill>
+          <a:blip r:embed="rId7"/>
+          <a:stretch>
+            <a:fillRect/>
+          </a:stretch>
+        </p:blipFill>
+        <p:spPr>
+          <a:xfrm>
+            <a:off x="3719512" y="3251745"/>
+            <a:ext cx="219075" cy="171450"/>
+          </a:xfrm>
+          <a:prstGeom prst="rect">
+            <a:avLst/>
+          </a:prstGeom>
+        </p:spPr>
+      </p:pic>
+      <p:pic>
+        <p:nvPicPr>
+          <p:cNvPr id="12" name="Picture 11" descr="image.png"/>
+          <p:cNvPicPr>
+            <a:picLocks noChangeAspect="1"/>
+          </p:cNvPicPr>
+          <p:nvPr/>
+        </p:nvPicPr>
+        <p:blipFill>
+          <a:blip r:embed="rId8"/>
+          <a:stretch>
+            <a:fillRect/>
+          </a:stretch>
+        </p:blipFill>
+        <p:spPr>
+          <a:xfrm>
+            <a:off x="6543675" y="3251745"/>
+            <a:ext cx="171450" cy="171450"/>
+          </a:xfrm>
+          <a:prstGeom prst="rect">
+            <a:avLst/>
+          </a:prstGeom>
+        </p:spPr>
+      </p:pic>
+      <p:pic>
+        <p:nvPicPr>
+          <p:cNvPr id="13" name="Picture 12" descr="image.png"/>
+          <p:cNvPicPr>
+            <a:picLocks noChangeAspect="1"/>
+          </p:cNvPicPr>
+          <p:nvPr/>
+        </p:nvPicPr>
+        <p:blipFill>
+          <a:blip r:embed="rId9"/>
+          <a:stretch>
+            <a:fillRect/>
+          </a:stretch>
+        </p:blipFill>
+        <p:spPr>
+          <a:xfrm>
+            <a:off x="9344025" y="3251745"/>
+            <a:ext cx="171450" cy="171450"/>
+          </a:xfrm>
+          <a:prstGeom prst="rect">
+            <a:avLst/>
+          </a:prstGeom>
+        </p:spPr>
+      </p:pic>
+      <p:sp>
+        <p:nvSpPr>
+          <p:cNvPr id="14" name="TextBox 13"/>
           <p:cNvSpPr txBox="1"/>
           <p:nvPr/>
         </p:nvSpPr>
         <p:spPr>
           <a:xfrm>
             <a:off x="609600" y="457200"/>
-            <a:ext cx="8548687" cy="171450"/>
+            <a:ext cx="11582400" cy="171450"/>
           </a:xfrm>
           <a:prstGeom prst="rect">
             <a:avLst/>
@@ -3716,25 +3974,25 @@
             <a:r>
               <a:rPr b="1" sz="1050" i="0" u="none">
                 <a:solidFill>
-                  <a:srgbClr val="7C3AED"/>
+                  <a:srgbClr val="E11D48"/>
                 </a:solidFill>
                 <a:latin typeface="Plus Jakarta Sans"/>
               </a:rPr>
-              <a:t>APLICACIÓN DE INGENIERÍA</a:t>
-            </a:r>
-          </a:p>
-        </p:txBody>
-      </p:sp>
-      <p:sp>
-        <p:nvSpPr>
-          <p:cNvPr id="6" name="TextBox 5"/>
-          <p:cNvSpPr txBox="1"/>
-          <p:nvPr/>
-        </p:nvSpPr>
-        <p:spPr>
-          <a:xfrm>
-            <a:off x="609600" y="666750"/>
-            <a:ext cx="8976121" cy="388590"/>
+              <a:t>EVALUACIÓN TÉCNICA</a:t>
+            </a:r>
+          </a:p>
+        </p:txBody>
+      </p:sp>
+      <p:sp>
+        <p:nvSpPr>
+          <p:cNvPr id="15" name="TextBox 14"/>
+          <p:cNvSpPr txBox="1"/>
+          <p:nvPr/>
+        </p:nvSpPr>
+        <p:spPr>
+          <a:xfrm>
+            <a:off x="609600" y="685800"/>
+            <a:ext cx="11582400" cy="388590"/>
           </a:xfrm>
           <a:prstGeom prst="rect">
             <a:avLst/>
@@ -3759,21 +4017,21 @@
                 </a:solidFill>
                 <a:latin typeface="Space Grotesk"/>
               </a:rPr>
-              <a:t>Dimensionamiento: Ancho de Banda y Capacidad</a:t>
-            </a:r>
-          </a:p>
-        </p:txBody>
-      </p:sp>
-      <p:sp>
-        <p:nvSpPr>
-          <p:cNvPr id="7" name="TextBox 6"/>
-          <p:cNvSpPr txBox="1"/>
-          <p:nvPr/>
-        </p:nvSpPr>
-        <p:spPr>
-          <a:xfrm>
-            <a:off x="800100" y="6048375"/>
-            <a:ext cx="6191250" cy="200025"/>
+              <a:t>Límites y Condiciones de Borde</a:t>
+            </a:r>
+          </a:p>
+        </p:txBody>
+      </p:sp>
+      <p:sp>
+        <p:nvSpPr>
+          <p:cNvPr id="16" name="TextBox 15"/>
+          <p:cNvSpPr txBox="1"/>
+          <p:nvPr/>
+        </p:nvSpPr>
+        <p:spPr>
+          <a:xfrm>
+            <a:off x="838200" y="3642270"/>
+            <a:ext cx="2194560" cy="219075"/>
           </a:xfrm>
           <a:prstGeom prst="rect">
             <a:avLst/>
@@ -3788,27 +4046,62 @@
           <a:p>
             <a:pPr algn="l"/>
             <a:r>
-              <a:rPr b="1" sz="1200" i="0" u="none">
-                <a:solidFill>
-                  <a:srgbClr val="6B21A8"/>
+              <a:rPr b="1" sz="1600" i="0" u="none">
+                <a:solidFill>
+                  <a:srgbClr val="0F172A"/>
+                </a:solidFill>
+                <a:latin typeface="Space Grotesk"/>
+              </a:rPr>
+              <a:t>Alcance de los datos</a:t>
+            </a:r>
+          </a:p>
+        </p:txBody>
+      </p:sp>
+      <p:sp>
+        <p:nvSpPr>
+          <p:cNvPr id="17" name="TextBox 16"/>
+          <p:cNvSpPr txBox="1"/>
+          <p:nvPr/>
+        </p:nvSpPr>
+        <p:spPr>
+          <a:xfrm>
+            <a:off x="838200" y="3975645"/>
+            <a:ext cx="2209800" cy="768096"/>
+          </a:xfrm>
+          <a:prstGeom prst="rect">
+            <a:avLst/>
+          </a:prstGeom>
+          <a:noFill/>
+        </p:spPr>
+        <p:txBody>
+          <a:bodyPr wrap="square" lIns="0" rIns="0" tIns="0" bIns="0" anchor="t">
+            <a:spAutoFit/>
+          </a:bodyPr>
+          <a:lstStyle/>
+          <a:p>
+            <a:pPr algn="l"/>
+            <a:r>
+              <a:rPr b="0" sz="1500" i="0" u="none">
+                <a:solidFill>
+                  <a:srgbClr val="475569"/>
                 </a:solidFill>
                 <a:latin typeface="Plus Jakarta Sans"/>
               </a:rPr>
-              <a:t>Pico medido: 205 Mbps (410 en hora pico). Modelo: 169 Mbps.</a:t>
-            </a:r>
-          </a:p>
-        </p:txBody>
-      </p:sp>
-      <p:sp>
-        <p:nvSpPr>
-          <p:cNvPr id="8" name="TextBox 7"/>
-          <p:cNvSpPr txBox="1"/>
-          <p:nvPr/>
-        </p:nvSpPr>
-        <p:spPr>
-          <a:xfrm>
-            <a:off x="6438900" y="6048375"/>
-            <a:ext cx="5753100" cy="200025"/>
+              <a:t>Solo Spotify México, Top 200.</a:t>
+            </a:r>
+          </a:p>
+        </p:txBody>
+      </p:sp>
+      <p:sp>
+        <p:nvSpPr>
+          <p:cNvPr id="18" name="TextBox 17"/>
+          <p:cNvSpPr txBox="1"/>
+          <p:nvPr/>
+        </p:nvSpPr>
+        <p:spPr>
+          <a:xfrm>
+            <a:off x="3638550" y="3642270"/>
+            <a:ext cx="2194560" cy="219075"/>
           </a:xfrm>
           <a:prstGeom prst="rect">
             <a:avLst/>
@@ -3823,27 +4116,62 @@
           <a:p>
             <a:pPr algn="l"/>
             <a:r>
-              <a:rPr b="1" sz="1200" i="0" u="none">
-                <a:solidFill>
-                  <a:srgbClr val="991B1B"/>
+              <a:rPr b="1" sz="1600" i="0" u="none">
+                <a:solidFill>
+                  <a:srgbClr val="0F172A"/>
+                </a:solidFill>
+                <a:latin typeface="Space Grotesk"/>
+              </a:rPr>
+              <a:t>Datos semanales</a:t>
+            </a:r>
+          </a:p>
+        </p:txBody>
+      </p:sp>
+      <p:sp>
+        <p:nvSpPr>
+          <p:cNvPr id="19" name="TextBox 18"/>
+          <p:cNvSpPr txBox="1"/>
+          <p:nvPr/>
+        </p:nvSpPr>
+        <p:spPr>
+          <a:xfrm>
+            <a:off x="3638550" y="3975645"/>
+            <a:ext cx="2209800" cy="768096"/>
+          </a:xfrm>
+          <a:prstGeom prst="rect">
+            <a:avLst/>
+          </a:prstGeom>
+          <a:noFill/>
+        </p:spPr>
+        <p:txBody>
+          <a:bodyPr wrap="square" lIns="0" rIns="0" tIns="0" bIns="0" anchor="t">
+            <a:spAutoFit/>
+          </a:bodyPr>
+          <a:lstStyle/>
+          <a:p>
+            <a:pPr algn="l"/>
+            <a:r>
+              <a:rPr b="0" sz="1500" i="0" u="none">
+                <a:solidFill>
+                  <a:srgbClr val="475569"/>
                 </a:solidFill>
                 <a:latin typeface="Plus Jakarta Sans"/>
               </a:rPr>
-              <a:t>S'(t) = C con Bisección y Newton: del 2/06 al 23/11/2023.</a:t>
-            </a:r>
-          </a:p>
-        </p:txBody>
-      </p:sp>
-      <p:sp>
-        <p:nvSpPr>
-          <p:cNvPr id="9" name="TextBox 8"/>
-          <p:cNvSpPr txBox="1"/>
-          <p:nvPr/>
-        </p:nvSpPr>
-        <p:spPr>
-          <a:xfrm>
-            <a:off x="612648" y="1207008"/>
-            <a:ext cx="2770632" cy="171450"/>
+              <a:t>Suponemos crecimiento suave dentro de la semana.</a:t>
+            </a:r>
+          </a:p>
+        </p:txBody>
+      </p:sp>
+      <p:sp>
+        <p:nvSpPr>
+          <p:cNvPr id="20" name="TextBox 19"/>
+          <p:cNvSpPr txBox="1"/>
+          <p:nvPr/>
+        </p:nvSpPr>
+        <p:spPr>
+          <a:xfrm>
+            <a:off x="6438900" y="3642270"/>
+            <a:ext cx="2194560" cy="219075"/>
           </a:xfrm>
           <a:prstGeom prst="rect">
             <a:avLst/>
@@ -3858,27 +4186,62 @@
           <a:p>
             <a:pPr algn="l"/>
             <a:r>
-              <a:rPr b="1" sz="1050" i="0" u="none">
-                <a:solidFill>
-                  <a:srgbClr val="8B5CF6"/>
+              <a:rPr b="1" sz="1600" i="0" u="none">
+                <a:solidFill>
+                  <a:srgbClr val="0F172A"/>
+                </a:solidFill>
+                <a:latin typeface="Space Grotesk"/>
+              </a:rPr>
+              <a:t>Interpolación</a:t>
+            </a:r>
+          </a:p>
+        </p:txBody>
+      </p:sp>
+      <p:sp>
+        <p:nvSpPr>
+          <p:cNvPr id="21" name="TextBox 20"/>
+          <p:cNvSpPr txBox="1"/>
+          <p:nvPr/>
+        </p:nvSpPr>
+        <p:spPr>
+          <a:xfrm>
+            <a:off x="6438900" y="3975645"/>
+            <a:ext cx="2209800" cy="768096"/>
+          </a:xfrm>
+          <a:prstGeom prst="rect">
+            <a:avLst/>
+          </a:prstGeom>
+          <a:noFill/>
+        </p:spPr>
+        <p:txBody>
+          <a:bodyPr wrap="square" lIns="0" rIns="0" tIns="0" bIns="0" anchor="t">
+            <a:spAutoFit/>
+          </a:bodyPr>
+          <a:lstStyle/>
+          <a:p>
+            <a:pPr algn="l"/>
+            <a:r>
+              <a:rPr b="0" sz="1500" i="0" u="none">
+                <a:solidFill>
+                  <a:srgbClr val="475569"/>
                 </a:solidFill>
                 <a:latin typeface="Plus Jakarta Sans"/>
               </a:rPr>
-              <a:t>Ancho de banda medido (160 kbps)</a:t>
-            </a:r>
-          </a:p>
-        </p:txBody>
-      </p:sp>
-      <p:sp>
-        <p:nvSpPr>
-          <p:cNvPr id="10" name="TextBox 9"/>
-          <p:cNvSpPr txBox="1"/>
-          <p:nvPr/>
-        </p:nvSpPr>
-        <p:spPr>
-          <a:xfrm>
-            <a:off x="3703320" y="1207008"/>
-            <a:ext cx="1865376" cy="171450"/>
+              <a:t>Entre datos medidos: no predice a futuro.</a:t>
+            </a:r>
+          </a:p>
+        </p:txBody>
+      </p:sp>
+      <p:sp>
+        <p:nvSpPr>
+          <p:cNvPr id="22" name="TextBox 21"/>
+          <p:cNvSpPr txBox="1"/>
+          <p:nvPr/>
+        </p:nvSpPr>
+        <p:spPr>
+          <a:xfrm>
+            <a:off x="9239250" y="3642270"/>
+            <a:ext cx="2194560" cy="219075"/>
           </a:xfrm>
           <a:prstGeom prst="rect">
             <a:avLst/>
@@ -3893,46 +4256,48 @@
           <a:p>
             <a:pPr algn="l"/>
             <a:r>
-              <a:rPr b="1" sz="1050" i="0" u="none">
-                <a:solidFill>
-                  <a:srgbClr val="6D28D9"/>
+              <a:rPr b="1" sz="1600" i="0" u="none">
+                <a:solidFill>
+                  <a:srgbClr val="0F172A"/>
+                </a:solidFill>
+                <a:latin typeface="Space Grotesk"/>
+              </a:rPr>
+              <a:t>Supuestos de audio</a:t>
+            </a:r>
+          </a:p>
+        </p:txBody>
+      </p:sp>
+      <p:sp>
+        <p:nvSpPr>
+          <p:cNvPr id="23" name="TextBox 22"/>
+          <p:cNvSpPr txBox="1"/>
+          <p:nvPr/>
+        </p:nvSpPr>
+        <p:spPr>
+          <a:xfrm>
+            <a:off x="9239250" y="3975645"/>
+            <a:ext cx="2209800" cy="768096"/>
+          </a:xfrm>
+          <a:prstGeom prst="rect">
+            <a:avLst/>
+          </a:prstGeom>
+          <a:noFill/>
+        </p:spPr>
+        <p:txBody>
+          <a:bodyPr wrap="square" lIns="0" rIns="0" tIns="0" bIns="0" anchor="t">
+            <a:spAutoFit/>
+          </a:bodyPr>
+          <a:lstStyle/>
+          <a:p>
+            <a:pPr algn="l"/>
+            <a:r>
+              <a:rPr b="0" sz="1500" i="0" u="none">
+                <a:solidFill>
+                  <a:srgbClr val="475569"/>
                 </a:solidFill>
                 <a:latin typeface="Plus Jakarta Sans"/>
               </a:rPr>
-              <a:t>Modelo: S'(t) en Mbps</a:t>
-            </a:r>
-          </a:p>
-        </p:txBody>
-      </p:sp>
-      <p:sp>
-        <p:nvSpPr>
-          <p:cNvPr id="42" name="Supuestos"/>
-          <p:cNvSpPr txBox="1"/>
-          <p:nvPr/>
-        </p:nvSpPr>
-        <p:spPr>
-          <a:xfrm>
-            <a:off x="612648" y="5029200"/>
-            <a:ext cx="10972800" cy="548640"/>
-          </a:xfrm>
-          <a:prstGeom prst="rect">
-            <a:avLst/>
-          </a:prstGeom>
-          <a:noFill/>
-        </p:spPr>
-        <p:txBody>
-          <a:bodyPr wrap="square" lIns="0" rIns="0" tIns="0" bIns="0" anchor="t"/>
-          <a:lstStyle/>
-          <a:p>
-            <a:pPr algn="l"/>
-            <a:r>
-              <a:rPr b="0" sz="1200" i="0" u="none">
-                <a:solidFill>
-                  <a:srgbClr val="475569"/>
-                </a:solidFill>
-                <a:latin typeface="Plus Jakarta Sans"/>
-              </a:rPr>
-              <a:t>Supuestos: reproducción de 3:06 a 160 kbps (rango de 96 a 320 kbps), hora pico igual a 2 veces el promedio semanal y sin descontar las reproducciones guardadas en el dispositivo. Son órdenes de magnitud, no datos de Spotify. A 160 kbps, 100 M de reproducciones equivalen a unos 372 TB transferidos.</a:t>
+              <a:t>El ancho de banda usa supuestos (3:06, 160 kbps).</a:t>
             </a:r>
           </a:p>
         </p:txBody>
@@ -3965,14 +4330,328 @@
       <p:grpSpPr/>
       <p:sp>
         <p:nvSpPr>
-          <p:cNvPr id="5" name="TextBox 4"/>
+          <p:cNvPr id="2" name="Rounded Rectangle 1"/>
+          <p:cNvSpPr/>
+          <p:nvPr/>
+        </p:nvSpPr>
+        <p:spPr>
+          <a:xfrm>
+            <a:off x="609600" y="1379190"/>
+            <a:ext cx="3454449" cy="1266825"/>
+          </a:xfrm>
+          <a:prstGeom prst="roundRect">
+            <a:avLst>
+              <a:gd name="adj" fmla="val 12030"/>
+            </a:avLst>
+          </a:prstGeom>
+          <a:solidFill>
+            <a:srgbClr val="FFF1F2"/>
+          </a:solidFill>
+          <a:ln>
+            <a:noFill/>
+          </a:ln>
+          <a:effectLst/>
+        </p:spPr>
+        <p:style>
+          <a:lnRef idx="1">
+            <a:schemeClr val="accent1"/>
+          </a:lnRef>
+          <a:fillRef idx="3">
+            <a:schemeClr val="accent1"/>
+          </a:fillRef>
+          <a:effectRef idx="2">
+            <a:schemeClr val="accent1"/>
+          </a:effectRef>
+          <a:fontRef idx="minor">
+            <a:schemeClr val="lt1"/>
+          </a:fontRef>
+        </p:style>
+        <p:txBody>
+          <a:bodyPr rtlCol="0" anchor="ctr"/>
+          <a:lstStyle/>
+          <a:p>
+            <a:pPr algn="ctr"/>
+          </a:p>
+        </p:txBody>
+      </p:sp>
+      <p:sp>
+        <p:nvSpPr>
+          <p:cNvPr id="3" name="Rounded Rectangle 2"/>
+          <p:cNvSpPr/>
+          <p:nvPr/>
+        </p:nvSpPr>
+        <p:spPr>
+          <a:xfrm>
+            <a:off x="4368849" y="1379190"/>
+            <a:ext cx="3454449" cy="1266825"/>
+          </a:xfrm>
+          <a:prstGeom prst="roundRect">
+            <a:avLst>
+              <a:gd name="adj" fmla="val 12030"/>
+            </a:avLst>
+          </a:prstGeom>
+          <a:solidFill>
+            <a:srgbClr val="F0F9FF"/>
+          </a:solidFill>
+          <a:ln>
+            <a:noFill/>
+          </a:ln>
+          <a:effectLst/>
+        </p:spPr>
+        <p:style>
+          <a:lnRef idx="1">
+            <a:schemeClr val="accent1"/>
+          </a:lnRef>
+          <a:fillRef idx="3">
+            <a:schemeClr val="accent1"/>
+          </a:fillRef>
+          <a:effectRef idx="2">
+            <a:schemeClr val="accent1"/>
+          </a:effectRef>
+          <a:fontRef idx="minor">
+            <a:schemeClr val="lt1"/>
+          </a:fontRef>
+        </p:style>
+        <p:txBody>
+          <a:bodyPr rtlCol="0" anchor="ctr"/>
+          <a:lstStyle/>
+          <a:p>
+            <a:pPr algn="ctr"/>
+          </a:p>
+        </p:txBody>
+      </p:sp>
+      <p:sp>
+        <p:nvSpPr>
+          <p:cNvPr id="4" name="Rounded Rectangle 3"/>
+          <p:cNvSpPr/>
+          <p:nvPr/>
+        </p:nvSpPr>
+        <p:spPr>
+          <a:xfrm>
+            <a:off x="8128099" y="1379190"/>
+            <a:ext cx="3454449" cy="1266825"/>
+          </a:xfrm>
+          <a:prstGeom prst="roundRect">
+            <a:avLst>
+              <a:gd name="adj" fmla="val 12030"/>
+            </a:avLst>
+          </a:prstGeom>
+          <a:solidFill>
+            <a:srgbClr val="F0FDF4"/>
+          </a:solidFill>
+          <a:ln>
+            <a:noFill/>
+          </a:ln>
+          <a:effectLst/>
+        </p:spPr>
+        <p:style>
+          <a:lnRef idx="1">
+            <a:schemeClr val="accent1"/>
+          </a:lnRef>
+          <a:fillRef idx="3">
+            <a:schemeClr val="accent1"/>
+          </a:fillRef>
+          <a:effectRef idx="2">
+            <a:schemeClr val="accent1"/>
+          </a:effectRef>
+          <a:fontRef idx="minor">
+            <a:schemeClr val="lt1"/>
+          </a:fontRef>
+        </p:style>
+        <p:txBody>
+          <a:bodyPr rtlCol="0" anchor="ctr"/>
+          <a:lstStyle/>
+          <a:p>
+            <a:pPr algn="ctr"/>
+          </a:p>
+        </p:txBody>
+      </p:sp>
+      <p:sp>
+        <p:nvSpPr>
+          <p:cNvPr id="5" name="Rectangle 4"/>
+          <p:cNvSpPr/>
+          <p:nvPr/>
+        </p:nvSpPr>
+        <p:spPr>
+          <a:xfrm>
+            <a:off x="609600" y="4137570"/>
+            <a:ext cx="5372100" cy="1076325"/>
+          </a:xfrm>
+          <a:prstGeom prst="rect">
+            <a:avLst/>
+          </a:prstGeom>
+          <a:solidFill>
+            <a:srgbClr val="F8FAFC"/>
+          </a:solidFill>
+          <a:ln>
+            <a:noFill/>
+          </a:ln>
+          <a:effectLst/>
+        </p:spPr>
+        <p:style>
+          <a:lnRef idx="1">
+            <a:schemeClr val="accent1"/>
+          </a:lnRef>
+          <a:fillRef idx="3">
+            <a:schemeClr val="accent1"/>
+          </a:fillRef>
+          <a:effectRef idx="2">
+            <a:schemeClr val="accent1"/>
+          </a:effectRef>
+          <a:fontRef idx="minor">
+            <a:schemeClr val="lt1"/>
+          </a:fontRef>
+        </p:style>
+        <p:txBody>
+          <a:bodyPr rtlCol="0" anchor="ctr"/>
+          <a:lstStyle/>
+          <a:p>
+            <a:pPr algn="ctr"/>
+          </a:p>
+        </p:txBody>
+      </p:sp>
+      <p:sp>
+        <p:nvSpPr>
+          <p:cNvPr id="6" name="Rectangle 5"/>
+          <p:cNvSpPr/>
+          <p:nvPr/>
+        </p:nvSpPr>
+        <p:spPr>
+          <a:xfrm>
+            <a:off x="6210300" y="4137570"/>
+            <a:ext cx="5372100" cy="1076325"/>
+          </a:xfrm>
+          <a:prstGeom prst="rect">
+            <a:avLst/>
+          </a:prstGeom>
+          <a:solidFill>
+            <a:srgbClr val="F8FAFC"/>
+          </a:solidFill>
+          <a:ln>
+            <a:noFill/>
+          </a:ln>
+          <a:effectLst/>
+        </p:spPr>
+        <p:style>
+          <a:lnRef idx="1">
+            <a:schemeClr val="accent1"/>
+          </a:lnRef>
+          <a:fillRef idx="3">
+            <a:schemeClr val="accent1"/>
+          </a:fillRef>
+          <a:effectRef idx="2">
+            <a:schemeClr val="accent1"/>
+          </a:effectRef>
+          <a:fontRef idx="minor">
+            <a:schemeClr val="lt1"/>
+          </a:fontRef>
+        </p:style>
+        <p:txBody>
+          <a:bodyPr rtlCol="0" anchor="ctr"/>
+          <a:lstStyle/>
+          <a:p>
+            <a:pPr algn="ctr"/>
+          </a:p>
+        </p:txBody>
+      </p:sp>
+      <p:sp>
+        <p:nvSpPr>
+          <p:cNvPr id="7" name="Rectangle 6"/>
+          <p:cNvSpPr/>
+          <p:nvPr/>
+        </p:nvSpPr>
+        <p:spPr>
+          <a:xfrm>
+            <a:off x="609600" y="4137570"/>
+            <a:ext cx="38100" cy="1076325"/>
+          </a:xfrm>
+          <a:prstGeom prst="rect">
+            <a:avLst/>
+          </a:prstGeom>
+          <a:solidFill>
+            <a:srgbClr val="E11D48"/>
+          </a:solidFill>
+          <a:ln>
+            <a:noFill/>
+          </a:ln>
+          <a:effectLst/>
+        </p:spPr>
+        <p:style>
+          <a:lnRef idx="1">
+            <a:schemeClr val="accent1"/>
+          </a:lnRef>
+          <a:fillRef idx="3">
+            <a:schemeClr val="accent1"/>
+          </a:fillRef>
+          <a:effectRef idx="2">
+            <a:schemeClr val="accent1"/>
+          </a:effectRef>
+          <a:fontRef idx="minor">
+            <a:schemeClr val="lt1"/>
+          </a:fontRef>
+        </p:style>
+        <p:txBody>
+          <a:bodyPr rtlCol="0" anchor="ctr"/>
+          <a:lstStyle/>
+          <a:p>
+            <a:pPr algn="ctr"/>
+          </a:p>
+        </p:txBody>
+      </p:sp>
+      <p:sp>
+        <p:nvSpPr>
+          <p:cNvPr id="8" name="Rectangle 7"/>
+          <p:cNvSpPr/>
+          <p:nvPr/>
+        </p:nvSpPr>
+        <p:spPr>
+          <a:xfrm>
+            <a:off x="6210300" y="4137570"/>
+            <a:ext cx="38100" cy="1076325"/>
+          </a:xfrm>
+          <a:prstGeom prst="rect">
+            <a:avLst/>
+          </a:prstGeom>
+          <a:solidFill>
+            <a:srgbClr val="0284C7"/>
+          </a:solidFill>
+          <a:ln>
+            <a:noFill/>
+          </a:ln>
+          <a:effectLst/>
+        </p:spPr>
+        <p:style>
+          <a:lnRef idx="1">
+            <a:schemeClr val="accent1"/>
+          </a:lnRef>
+          <a:fillRef idx="3">
+            <a:schemeClr val="accent1"/>
+          </a:fillRef>
+          <a:effectRef idx="2">
+            <a:schemeClr val="accent1"/>
+          </a:effectRef>
+          <a:fontRef idx="minor">
+            <a:schemeClr val="lt1"/>
+          </a:fontRef>
+        </p:style>
+        <p:txBody>
+          <a:bodyPr rtlCol="0" anchor="ctr"/>
+          <a:lstStyle/>
+          <a:p>
+            <a:pPr algn="ctr"/>
+          </a:p>
+        </p:txBody>
+      </p:sp>
+      <p:sp>
+        <p:nvSpPr>
+          <p:cNvPr id="9" name="TextBox 8"/>
           <p:cNvSpPr txBox="1"/>
           <p:nvPr/>
         </p:nvSpPr>
         <p:spPr>
           <a:xfrm>
             <a:off x="609600" y="457200"/>
-            <a:ext cx="8548687" cy="171450"/>
+            <a:ext cx="11582400" cy="171450"/>
           </a:xfrm>
           <a:prstGeom prst="rect">
             <a:avLst/>
@@ -3989,25 +4668,25 @@
             <a:r>
               <a:rPr b="1" sz="1050" i="0" u="none">
                 <a:solidFill>
-                  <a:srgbClr val="7C3AED"/>
+                  <a:srgbClr val="E11D48"/>
                 </a:solidFill>
                 <a:latin typeface="Plus Jakarta Sans"/>
               </a:rPr>
-              <a:t>GENERALIZACIÓN</a:t>
-            </a:r>
-          </a:p>
-        </p:txBody>
-      </p:sp>
-      <p:sp>
-        <p:nvSpPr>
-          <p:cNvPr id="6" name="TextBox 5"/>
-          <p:cNvSpPr txBox="1"/>
-          <p:nvPr/>
-        </p:nvSpPr>
-        <p:spPr>
-          <a:xfrm>
-            <a:off x="609600" y="666750"/>
-            <a:ext cx="8976121" cy="388590"/>
+              <a:t>SÍNTESIS DEL PROYECTO</a:t>
+            </a:r>
+          </a:p>
+        </p:txBody>
+      </p:sp>
+      <p:sp>
+        <p:nvSpPr>
+          <p:cNvPr id="10" name="TextBox 9"/>
+          <p:cNvSpPr txBox="1"/>
+          <p:nvPr/>
+        </p:nvSpPr>
+        <p:spPr>
+          <a:xfrm>
+            <a:off x="609600" y="685800"/>
+            <a:ext cx="11582400" cy="388590"/>
           </a:xfrm>
           <a:prstGeom prst="rect">
             <a:avLst/>
@@ -4032,35 +4711,50 @@
                 </a:solidFill>
                 <a:latin typeface="Space Grotesk"/>
               </a:rPr>
-              <a:t>¿Sirve para Cualquier Canción? 3 Casos Reales</a:t>
-            </a:r>
-          </a:p>
-        </p:txBody>
-      </p:sp>
-      <p:pic>
-        <p:nvPicPr>
-          <p:cNvPr id="11" name="Picture 10" descr="grafico_4_comparacion_canciones.png"/>
-          <p:cNvPicPr>
-            <a:picLocks noChangeAspect="1"/>
-          </p:cNvPicPr>
-          <p:nvPr/>
-        </p:nvPicPr>
-        <p:blipFill>
-          <a:blip r:embed="rId3"/>
-          <a:stretch>
-            <a:fillRect/>
-          </a:stretch>
-        </p:blipFill>
-        <p:spPr>
-          <a:xfrm>
-            <a:off x="7360920" y="1417320"/>
-            <a:ext cx="4152900" cy="4983480"/>
-          </a:xfrm>
-          <a:prstGeom prst="rect">
-            <a:avLst/>
-          </a:prstGeom>
-        </p:spPr>
-      </p:pic>
+              <a:t>Conclusiones y aplicación a la ingeniería</a:t>
+            </a:r>
+          </a:p>
+        </p:txBody>
+      </p:sp>
+      <p:sp>
+        <p:nvSpPr>
+          <p:cNvPr id="11" name="TextBox 10"/>
+          <p:cNvSpPr txBox="1"/>
+          <p:nvPr/>
+        </p:nvSpPr>
+        <p:spPr>
+          <a:xfrm>
+            <a:off x="511168" y="1645890"/>
+            <a:ext cx="3651312" cy="457200"/>
+          </a:xfrm>
+          <a:prstGeom prst="rect">
+            <a:avLst/>
+          </a:prstGeom>
+          <a:noFill/>
+        </p:spPr>
+        <p:txBody>
+          <a:bodyPr wrap="none" lIns="0" rIns="0" tIns="0" bIns="0" anchor="t">
+            <a:spAutoFit/>
+          </a:bodyPr>
+          <a:lstStyle/>
+          <a:p>
+            <a:pPr algn="ctr">
+              <a:lnSpc>
+                <a:spcPts val="3600"/>
+              </a:lnSpc>
+            </a:pPr>
+            <a:r>
+              <a:rPr b="1" sz="3600" i="0" u="none">
+                <a:solidFill>
+                  <a:srgbClr val="E11D48"/>
+                </a:solidFill>
+                <a:latin typeface="Plus Jakarta Sans"/>
+              </a:rPr>
+              <a:t>28/09/2023</a:t>
+            </a:r>
+          </a:p>
+        </p:txBody>
+      </p:sp>
       <p:sp>
         <p:nvSpPr>
           <p:cNvPr id="12" name="TextBox 11"/>
@@ -4069,85 +4763,475 @@
         </p:nvSpPr>
         <p:spPr>
           <a:xfrm>
-            <a:off x="731520" y="1645920"/>
-            <a:ext cx="6309360" cy="4480560"/>
-          </a:xfrm>
-          <a:prstGeom prst="rect">
-            <a:avLst/>
-          </a:prstGeom>
-          <a:noFill/>
-        </p:spPr>
-        <p:txBody>
-          <a:bodyPr wrap="square">
-            <a:spAutoFit/>
-          </a:bodyPr>
-          <a:lstStyle/>
-          <a:p>
-            <a:pPr marL="182880" indent="-164592">
-              <a:spcAft>
-                <a:spcPts val="1800"/>
-              </a:spcAft>
-              <a:buChar char="•"/>
+            <a:off x="511168" y="2179290"/>
+            <a:ext cx="3651312" cy="200025"/>
+          </a:xfrm>
+          <a:prstGeom prst="rect">
+            <a:avLst/>
+          </a:prstGeom>
+          <a:noFill/>
+        </p:spPr>
+        <p:txBody>
+          <a:bodyPr wrap="none" lIns="0" rIns="0" tIns="0" bIns="0" anchor="t">
+            <a:spAutoFit/>
+          </a:bodyPr>
+          <a:lstStyle/>
+          <a:p>
+            <a:pPr algn="ctr"/>
+            <a:r>
+              <a:rPr b="1" sz="1200" i="0" u="none">
+                <a:solidFill>
+                  <a:srgbClr val="475569"/>
+                </a:solidFill>
+                <a:latin typeface="Plus Jakarta Sans"/>
+              </a:rPr>
+              <a:t>Hito de 100 M</a:t>
+            </a:r>
+          </a:p>
+        </p:txBody>
+      </p:sp>
+      <p:sp>
+        <p:nvSpPr>
+          <p:cNvPr id="13" name="TextBox 12"/>
+          <p:cNvSpPr txBox="1"/>
+          <p:nvPr/>
+        </p:nvSpPr>
+        <p:spPr>
+          <a:xfrm>
+            <a:off x="4270418" y="1645890"/>
+            <a:ext cx="3651312" cy="457200"/>
+          </a:xfrm>
+          <a:prstGeom prst="rect">
+            <a:avLst/>
+          </a:prstGeom>
+          <a:noFill/>
+        </p:spPr>
+        <p:txBody>
+          <a:bodyPr wrap="none" lIns="0" rIns="0" tIns="0" bIns="0" anchor="t">
+            <a:spAutoFit/>
+          </a:bodyPr>
+          <a:lstStyle/>
+          <a:p>
+            <a:pPr algn="ctr">
+              <a:lnSpc>
+                <a:spcPts val="3600"/>
+              </a:lnSpc>
             </a:pPr>
             <a:r>
-              <a:rPr b="0" sz="1800" i="0" u="none">
+              <a:rPr b="1" sz="3600" i="0" u="none">
+                <a:solidFill>
+                  <a:srgbClr val="0284C7"/>
+                </a:solidFill>
+                <a:latin typeface="Plus Jakarta Sans"/>
+              </a:rPr>
+              <a:t>3 vs 15</a:t>
+            </a:r>
+          </a:p>
+        </p:txBody>
+      </p:sp>
+      <p:sp>
+        <p:nvSpPr>
+          <p:cNvPr id="14" name="TextBox 13"/>
+          <p:cNvSpPr txBox="1"/>
+          <p:nvPr/>
+        </p:nvSpPr>
+        <p:spPr>
+          <a:xfrm>
+            <a:off x="4270418" y="2179290"/>
+            <a:ext cx="3651312" cy="200025"/>
+          </a:xfrm>
+          <a:prstGeom prst="rect">
+            <a:avLst/>
+          </a:prstGeom>
+          <a:noFill/>
+        </p:spPr>
+        <p:txBody>
+          <a:bodyPr wrap="none" lIns="0" rIns="0" tIns="0" bIns="0" anchor="t">
+            <a:spAutoFit/>
+          </a:bodyPr>
+          <a:lstStyle/>
+          <a:p>
+            <a:pPr algn="ctr"/>
+            <a:r>
+              <a:rPr b="1" sz="1200" i="0" u="none">
                 <a:solidFill>
                   <a:srgbClr val="475569"/>
                 </a:solidFill>
                 <a:latin typeface="Plus Jakarta Sans"/>
               </a:rPr>
-              <a:t>Cúbica global: S′ es una parábola simétrica; sirve si el pico está a mitad del período (a &lt; 0).</a:t>
-            </a:r>
-          </a:p>
-          <a:p>
-            <a:pPr marL="182880" indent="-164592">
-              <a:spcAft>
-                <a:spcPts val="1800"/>
-              </a:spcAft>
-              <a:buChar char="•"/>
+              <a:t>Iteraciones Newton vs bisección</a:t>
+            </a:r>
+          </a:p>
+        </p:txBody>
+      </p:sp>
+      <p:sp>
+        <p:nvSpPr>
+          <p:cNvPr id="15" name="TextBox 14"/>
+          <p:cNvSpPr txBox="1"/>
+          <p:nvPr/>
+        </p:nvSpPr>
+        <p:spPr>
+          <a:xfrm>
+            <a:off x="8029668" y="1645890"/>
+            <a:ext cx="3651312" cy="457200"/>
+          </a:xfrm>
+          <a:prstGeom prst="rect">
+            <a:avLst/>
+          </a:prstGeom>
+          <a:noFill/>
+        </p:spPr>
+        <p:txBody>
+          <a:bodyPr wrap="none" lIns="0" rIns="0" tIns="0" bIns="0" anchor="t">
+            <a:spAutoFit/>
+          </a:bodyPr>
+          <a:lstStyle/>
+          <a:p>
+            <a:pPr algn="ctr">
+              <a:lnSpc>
+                <a:spcPts val="3600"/>
+              </a:lnSpc>
             </a:pPr>
             <a:r>
-              <a:rPr b="0" sz="1800" i="0" u="none">
+              <a:rPr b="1" sz="3600" i="0" u="none">
+                <a:solidFill>
+                  <a:srgbClr val="16A34A"/>
+                </a:solidFill>
+                <a:latin typeface="Plus Jakarta Sans"/>
+              </a:rPr>
+              <a:t>≈ 205 Mbps</a:t>
+            </a:r>
+          </a:p>
+        </p:txBody>
+      </p:sp>
+      <p:sp>
+        <p:nvSpPr>
+          <p:cNvPr id="16" name="TextBox 15"/>
+          <p:cNvSpPr txBox="1"/>
+          <p:nvPr/>
+        </p:nvSpPr>
+        <p:spPr>
+          <a:xfrm>
+            <a:off x="8029668" y="2179290"/>
+            <a:ext cx="3651312" cy="200025"/>
+          </a:xfrm>
+          <a:prstGeom prst="rect">
+            <a:avLst/>
+          </a:prstGeom>
+          <a:noFill/>
+        </p:spPr>
+        <p:txBody>
+          <a:bodyPr wrap="none" lIns="0" rIns="0" tIns="0" bIns="0" anchor="t">
+            <a:spAutoFit/>
+          </a:bodyPr>
+          <a:lstStyle/>
+          <a:p>
+            <a:pPr algn="ctr"/>
+            <a:r>
+              <a:rPr b="1" sz="1200" i="0" u="none">
                 <a:solidFill>
                   <a:srgbClr val="475569"/>
                 </a:solidFill>
                 <a:latin typeface="Plus Jakarta Sans"/>
               </a:rPr>
-              <a:t>Estrenos: pico en la semana 5–6 y cola larga → a &gt; 0, no hay máximo.</a:t>
-            </a:r>
-          </a:p>
-          <a:p>
-            <a:pPr marL="182880" indent="-164592">
-              <a:spcAft>
-                <a:spcPts val="1800"/>
-              </a:spcAft>
-              <a:buChar char="•"/>
-            </a:pPr>
-            <a:r>
-              <a:rPr b="0" sz="1800" i="0" u="none">
-                <a:solidFill>
-                  <a:srgbClr val="475569"/>
+              <a:t>Semana pico</a:t>
+            </a:r>
+          </a:p>
+        </p:txBody>
+      </p:sp>
+      <p:sp>
+        <p:nvSpPr>
+          <p:cNvPr id="17" name="TextBox 16"/>
+          <p:cNvSpPr txBox="1"/>
+          <p:nvPr/>
+        </p:nvSpPr>
+        <p:spPr>
+          <a:xfrm>
+            <a:off x="876300" y="4328070"/>
+            <a:ext cx="4754880" cy="219075"/>
+          </a:xfrm>
+          <a:prstGeom prst="rect">
+            <a:avLst/>
+          </a:prstGeom>
+          <a:noFill/>
+        </p:spPr>
+        <p:txBody>
+          <a:bodyPr wrap="none" lIns="0" rIns="0" tIns="0" bIns="0" anchor="t">
+            <a:spAutoFit/>
+          </a:bodyPr>
+          <a:lstStyle/>
+          <a:p>
+            <a:pPr algn="l"/>
+            <a:r>
+              <a:rPr b="1" sz="1350" i="0" u="none">
+                <a:solidFill>
+                  <a:srgbClr val="0F172A"/>
+                </a:solidFill>
+                <a:latin typeface="Space Grotesk"/>
+              </a:rPr>
+              <a:t>Interpolación de Newton</a:t>
+            </a:r>
+          </a:p>
+        </p:txBody>
+      </p:sp>
+      <p:sp>
+        <p:nvSpPr>
+          <p:cNvPr id="18" name="TextBox 17"/>
+          <p:cNvSpPr txBox="1"/>
+          <p:nvPr/>
+        </p:nvSpPr>
+        <p:spPr>
+          <a:xfrm>
+            <a:off x="876300" y="4585245"/>
+            <a:ext cx="4972050" cy="438150"/>
+          </a:xfrm>
+          <a:prstGeom prst="rect">
+            <a:avLst/>
+          </a:prstGeom>
+          <a:noFill/>
+        </p:spPr>
+        <p:txBody>
+          <a:bodyPr wrap="square" lIns="0" rIns="0" tIns="0" bIns="0" anchor="t">
+            <a:spAutoFit/>
+          </a:bodyPr>
+          <a:lstStyle/>
+          <a:p>
+            <a:pPr algn="l"/>
+            <a:r>
+              <a:rPr b="0" sz="1350" i="0" u="none">
+                <a:solidFill>
+                  <a:srgbClr val="64748B"/>
                 </a:solidFill>
                 <a:latin typeface="Plus Jakarta Sans"/>
               </a:rPr>
-              <a:t>Regresión local (±6 semanas alrededor del pico): a &lt; 0 en las 3 canciones; picos 28.6, 3.8 y 6.4.</a:t>
-            </a:r>
-          </a:p>
-          <a:p>
-            <a:pPr marL="182880" indent="-164592">
-              <a:spcAft>
-                <a:spcPts val="1800"/>
-              </a:spcAft>
-              <a:buChar char="•"/>
-            </a:pPr>
-            <a:r>
-              <a:rPr b="0" sz="1800" i="0" u="none">
-                <a:solidFill>
-                  <a:srgbClr val="475569"/>
+              <a:t>Estima el instante entre dos mediciones semanales.</a:t>
+            </a:r>
+          </a:p>
+        </p:txBody>
+      </p:sp>
+      <p:sp>
+        <p:nvSpPr>
+          <p:cNvPr id="19" name="TextBox 18"/>
+          <p:cNvSpPr txBox="1"/>
+          <p:nvPr/>
+        </p:nvSpPr>
+        <p:spPr>
+          <a:xfrm>
+            <a:off x="6477000" y="4328070"/>
+            <a:ext cx="4754880" cy="219075"/>
+          </a:xfrm>
+          <a:prstGeom prst="rect">
+            <a:avLst/>
+          </a:prstGeom>
+          <a:noFill/>
+        </p:spPr>
+        <p:txBody>
+          <a:bodyPr wrap="none" lIns="0" rIns="0" tIns="0" bIns="0" anchor="t">
+            <a:spAutoFit/>
+          </a:bodyPr>
+          <a:lstStyle/>
+          <a:p>
+            <a:pPr algn="l"/>
+            <a:r>
+              <a:rPr b="1" sz="1350" i="0" u="none">
+                <a:solidFill>
+                  <a:srgbClr val="0F172A"/>
+                </a:solidFill>
+                <a:latin typeface="Space Grotesk"/>
+              </a:rPr>
+              <a:t>Métodos de raíces</a:t>
+            </a:r>
+          </a:p>
+        </p:txBody>
+      </p:sp>
+      <p:sp>
+        <p:nvSpPr>
+          <p:cNvPr id="20" name="TextBox 19"/>
+          <p:cNvSpPr txBox="1"/>
+          <p:nvPr/>
+        </p:nvSpPr>
+        <p:spPr>
+          <a:xfrm>
+            <a:off x="6477000" y="4585245"/>
+            <a:ext cx="4972050" cy="438150"/>
+          </a:xfrm>
+          <a:prstGeom prst="rect">
+            <a:avLst/>
+          </a:prstGeom>
+          <a:noFill/>
+        </p:spPr>
+        <p:txBody>
+          <a:bodyPr wrap="square" lIns="0" rIns="0" tIns="0" bIns="0" anchor="t">
+            <a:spAutoFit/>
+          </a:bodyPr>
+          <a:lstStyle/>
+          <a:p>
+            <a:pPr algn="l"/>
+            <a:r>
+              <a:rPr b="0" sz="1350" i="0" u="none">
+                <a:solidFill>
+                  <a:srgbClr val="64748B"/>
                 </a:solidFill>
                 <a:latin typeface="Plus Jakarta Sans"/>
               </a:rPr>
-              <a:t>Mismo método y misma regla: la herramienta valida su modelo.</a:t>
+              <a:t>Newton-Raphson converge mucho más rápido; bisección es más segura.</a:t>
+            </a:r>
+          </a:p>
+        </p:txBody>
+      </p:sp>
+      <p:sp>
+        <p:nvSpPr>
+          <p:cNvPr id="5" name="Rectangle 4"/>
+          <p:cNvSpPr/>
+          <p:nvPr/>
+        </p:nvSpPr>
+        <p:spPr>
+          <a:xfrm>
+            <a:off x="609600" y="2900000"/>
+            <a:ext cx="10972800" cy="1076325"/>
+          </a:xfrm>
+          <a:prstGeom prst="rect">
+            <a:avLst/>
+          </a:prstGeom>
+          <a:solidFill>
+            <a:srgbClr val="F8FAFC"/>
+          </a:solidFill>
+          <a:ln>
+            <a:noFill/>
+          </a:ln>
+          <a:effectLst/>
+        </p:spPr>
+        <p:style>
+          <a:lnRef idx="1">
+            <a:schemeClr val="accent1"/>
+          </a:lnRef>
+          <a:fillRef idx="3">
+            <a:schemeClr val="accent1"/>
+          </a:fillRef>
+          <a:effectRef idx="2">
+            <a:schemeClr val="accent1"/>
+          </a:effectRef>
+          <a:fontRef idx="minor">
+            <a:schemeClr val="lt1"/>
+          </a:fontRef>
+        </p:style>
+        <p:txBody>
+          <a:bodyPr rtlCol="0" anchor="ctr"/>
+          <a:lstStyle/>
+          <a:p>
+            <a:pPr algn="ctr"/>
+          </a:p>
+        </p:txBody>
+      </p:sp>
+      <p:sp>
+        <p:nvSpPr>
+          <p:cNvPr id="7" name="Rectangle 6"/>
+          <p:cNvSpPr/>
+          <p:nvPr/>
+        </p:nvSpPr>
+        <p:spPr>
+          <a:xfrm>
+            <a:off x="609600" y="2900000"/>
+            <a:ext cx="38100" cy="1076325"/>
+          </a:xfrm>
+          <a:prstGeom prst="rect">
+            <a:avLst/>
+          </a:prstGeom>
+          <a:solidFill>
+            <a:srgbClr val="16A34A"/>
+          </a:solidFill>
+          <a:ln>
+            <a:noFill/>
+          </a:ln>
+          <a:effectLst/>
+        </p:spPr>
+        <p:style>
+          <a:lnRef idx="1">
+            <a:schemeClr val="accent1"/>
+          </a:lnRef>
+          <a:fillRef idx="3">
+            <a:schemeClr val="accent1"/>
+          </a:fillRef>
+          <a:effectRef idx="2">
+            <a:schemeClr val="accent1"/>
+          </a:effectRef>
+          <a:fontRef idx="minor">
+            <a:schemeClr val="lt1"/>
+          </a:fontRef>
+        </p:style>
+        <p:txBody>
+          <a:bodyPr rtlCol="0" anchor="ctr"/>
+          <a:lstStyle/>
+          <a:p>
+            <a:pPr algn="ctr"/>
+          </a:p>
+        </p:txBody>
+      </p:sp>
+      <p:sp>
+        <p:nvSpPr>
+          <p:cNvPr id="17" name="TextBox 16"/>
+          <p:cNvSpPr txBox="1"/>
+          <p:nvPr/>
+        </p:nvSpPr>
+        <p:spPr>
+          <a:xfrm>
+            <a:off x="876300" y="3090500"/>
+            <a:ext cx="10572800" cy="219075"/>
+          </a:xfrm>
+          <a:prstGeom prst="rect">
+            <a:avLst/>
+          </a:prstGeom>
+          <a:noFill/>
+        </p:spPr>
+        <p:txBody>
+          <a:bodyPr wrap="none" lIns="0" rIns="0" tIns="0" bIns="0" anchor="t">
+            <a:spAutoFit/>
+          </a:bodyPr>
+          <a:lstStyle/>
+          <a:p>
+            <a:pPr algn="l"/>
+            <a:r>
+              <a:rPr b="1" sz="1350" i="0" u="none">
+                <a:solidFill>
+                  <a:srgbClr val="0F172A"/>
+                </a:solidFill>
+                <a:latin typeface="Space Grotesk"/>
+              </a:rPr>
+              <a:t>Generalizable</a:t>
+            </a:r>
+          </a:p>
+        </p:txBody>
+      </p:sp>
+      <p:sp>
+        <p:nvSpPr>
+          <p:cNvPr id="18" name="TextBox 17"/>
+          <p:cNvSpPr txBox="1"/>
+          <p:nvPr/>
+        </p:nvSpPr>
+        <p:spPr>
+          <a:xfrm>
+            <a:off x="876300" y="3347675"/>
+            <a:ext cx="10572800" cy="438150"/>
+          </a:xfrm>
+          <a:prstGeom prst="rect">
+            <a:avLst/>
+          </a:prstGeom>
+          <a:noFill/>
+        </p:spPr>
+        <p:txBody>
+          <a:bodyPr wrap="square" lIns="0" rIns="0" tIns="0" bIns="0" anchor="t">
+            <a:spAutoFit/>
+          </a:bodyPr>
+          <a:lstStyle/>
+          <a:p>
+            <a:pPr algn="l"/>
+            <a:r>
+              <a:rPr b="0" sz="1350" i="0" u="none">
+                <a:solidFill>
+                  <a:srgbClr val="64748B"/>
+                </a:solidFill>
+                <a:latin typeface="Plus Jakarta Sans"/>
+              </a:rPr>
+              <a:t>El mismo programa sirve para cualquier canción con datos semanales.</a:t>
             </a:r>
           </a:p>
         </p:txBody>
@@ -4161,1696 +5245,6 @@
 </file>
 
 <file path=ppt/slides/slide12.xml><?xml version="1.0" encoding="utf-8"?>
-<p:sld xmlns:a="http://schemas.openxmlformats.org/drawingml/2006/main" xmlns:p="http://schemas.openxmlformats.org/presentationml/2006/main" xmlns:r="http://schemas.openxmlformats.org/officeDocument/2006/relationships">
-  <p:cSld>
-    <p:bg>
-      <p:bgPr>
-        <a:solidFill>
-          <a:srgbClr val="FFFFFF"/>
-        </a:solidFill>
-        <a:effectLst/>
-      </p:bgPr>
-    </p:bg>
-    <p:spTree>
-      <p:nvGrpSpPr>
-        <p:cNvPr id="1" name=""/>
-        <p:cNvGrpSpPr/>
-        <p:nvPr/>
-      </p:nvGrpSpPr>
-      <p:grpSpPr/>
-      <p:sp>
-        <p:nvSpPr>
-          <p:cNvPr id="2" name="Rounded Rectangle 1"/>
-          <p:cNvSpPr/>
-          <p:nvPr/>
-        </p:nvSpPr>
-        <p:spPr>
-          <a:xfrm>
-            <a:off x="609600" y="2880270"/>
-            <a:ext cx="2571750" cy="2019300"/>
-          </a:xfrm>
-          <a:prstGeom prst="roundRect">
-            <a:avLst>
-              <a:gd name="adj" fmla="val 7547"/>
-            </a:avLst>
-          </a:prstGeom>
-          <a:solidFill>
-            <a:srgbClr val="F8FAFC"/>
-          </a:solidFill>
-          <a:ln>
-            <a:noFill/>
-          </a:ln>
-          <a:effectLst/>
-        </p:spPr>
-        <p:style>
-          <a:lnRef idx="1">
-            <a:schemeClr val="accent1"/>
-          </a:lnRef>
-          <a:fillRef idx="3">
-            <a:schemeClr val="accent1"/>
-          </a:fillRef>
-          <a:effectRef idx="2">
-            <a:schemeClr val="accent1"/>
-          </a:effectRef>
-          <a:fontRef idx="minor">
-            <a:schemeClr val="lt1"/>
-          </a:fontRef>
-        </p:style>
-        <p:txBody>
-          <a:bodyPr rtlCol="0" anchor="ctr"/>
-          <a:lstStyle/>
-          <a:p>
-            <a:pPr algn="ctr"/>
-          </a:p>
-        </p:txBody>
-      </p:sp>
-      <p:sp>
-        <p:nvSpPr>
-          <p:cNvPr id="3" name="Rounded Rectangle 2"/>
-          <p:cNvSpPr/>
-          <p:nvPr/>
-        </p:nvSpPr>
-        <p:spPr>
-          <a:xfrm>
-            <a:off x="3409950" y="2880270"/>
-            <a:ext cx="2571750" cy="2019300"/>
-          </a:xfrm>
-          <a:prstGeom prst="roundRect">
-            <a:avLst>
-              <a:gd name="adj" fmla="val 7547"/>
-            </a:avLst>
-          </a:prstGeom>
-          <a:solidFill>
-            <a:srgbClr val="F8FAFC"/>
-          </a:solidFill>
-          <a:ln>
-            <a:noFill/>
-          </a:ln>
-          <a:effectLst/>
-        </p:spPr>
-        <p:style>
-          <a:lnRef idx="1">
-            <a:schemeClr val="accent1"/>
-          </a:lnRef>
-          <a:fillRef idx="3">
-            <a:schemeClr val="accent1"/>
-          </a:fillRef>
-          <a:effectRef idx="2">
-            <a:schemeClr val="accent1"/>
-          </a:effectRef>
-          <a:fontRef idx="minor">
-            <a:schemeClr val="lt1"/>
-          </a:fontRef>
-        </p:style>
-        <p:txBody>
-          <a:bodyPr rtlCol="0" anchor="ctr"/>
-          <a:lstStyle/>
-          <a:p>
-            <a:pPr algn="ctr"/>
-          </a:p>
-        </p:txBody>
-      </p:sp>
-      <p:sp>
-        <p:nvSpPr>
-          <p:cNvPr id="4" name="Rounded Rectangle 3"/>
-          <p:cNvSpPr/>
-          <p:nvPr/>
-        </p:nvSpPr>
-        <p:spPr>
-          <a:xfrm>
-            <a:off x="6210300" y="2880270"/>
-            <a:ext cx="2571750" cy="2019300"/>
-          </a:xfrm>
-          <a:prstGeom prst="roundRect">
-            <a:avLst>
-              <a:gd name="adj" fmla="val 7547"/>
-            </a:avLst>
-          </a:prstGeom>
-          <a:solidFill>
-            <a:srgbClr val="F8FAFC"/>
-          </a:solidFill>
-          <a:ln>
-            <a:noFill/>
-          </a:ln>
-          <a:effectLst/>
-        </p:spPr>
-        <p:style>
-          <a:lnRef idx="1">
-            <a:schemeClr val="accent1"/>
-          </a:lnRef>
-          <a:fillRef idx="3">
-            <a:schemeClr val="accent1"/>
-          </a:fillRef>
-          <a:effectRef idx="2">
-            <a:schemeClr val="accent1"/>
-          </a:effectRef>
-          <a:fontRef idx="minor">
-            <a:schemeClr val="lt1"/>
-          </a:fontRef>
-        </p:style>
-        <p:txBody>
-          <a:bodyPr rtlCol="0" anchor="ctr"/>
-          <a:lstStyle/>
-          <a:p>
-            <a:pPr algn="ctr"/>
-          </a:p>
-        </p:txBody>
-      </p:sp>
-      <p:sp>
-        <p:nvSpPr>
-          <p:cNvPr id="5" name="Rounded Rectangle 4"/>
-          <p:cNvSpPr/>
-          <p:nvPr/>
-        </p:nvSpPr>
-        <p:spPr>
-          <a:xfrm>
-            <a:off x="9010650" y="2880270"/>
-            <a:ext cx="2571750" cy="2019300"/>
-          </a:xfrm>
-          <a:prstGeom prst="roundRect">
-            <a:avLst>
-              <a:gd name="adj" fmla="val 7547"/>
-            </a:avLst>
-          </a:prstGeom>
-          <a:solidFill>
-            <a:srgbClr val="F8FAFC"/>
-          </a:solidFill>
-          <a:ln>
-            <a:noFill/>
-          </a:ln>
-          <a:effectLst/>
-        </p:spPr>
-        <p:style>
-          <a:lnRef idx="1">
-            <a:schemeClr val="accent1"/>
-          </a:lnRef>
-          <a:fillRef idx="3">
-            <a:schemeClr val="accent1"/>
-          </a:fillRef>
-          <a:effectRef idx="2">
-            <a:schemeClr val="accent1"/>
-          </a:effectRef>
-          <a:fontRef idx="minor">
-            <a:schemeClr val="lt1"/>
-          </a:fontRef>
-        </p:style>
-        <p:txBody>
-          <a:bodyPr rtlCol="0" anchor="ctr"/>
-          <a:lstStyle/>
-          <a:p>
-            <a:pPr algn="ctr"/>
-          </a:p>
-        </p:txBody>
-      </p:sp>
-      <p:pic>
-        <p:nvPicPr>
-          <p:cNvPr id="6" name="Picture 5" descr="image.png"/>
-          <p:cNvPicPr>
-            <a:picLocks noChangeAspect="1"/>
-          </p:cNvPicPr>
-          <p:nvPr/>
-        </p:nvPicPr>
-        <p:blipFill>
-          <a:blip r:embed="rId2"/>
-          <a:stretch>
-            <a:fillRect/>
-          </a:stretch>
-        </p:blipFill>
-        <p:spPr>
-          <a:xfrm>
-            <a:off x="838200" y="3146970"/>
-            <a:ext cx="381000" cy="381000"/>
-          </a:xfrm>
-          <a:prstGeom prst="rect">
-            <a:avLst/>
-          </a:prstGeom>
-        </p:spPr>
-      </p:pic>
-      <p:pic>
-        <p:nvPicPr>
-          <p:cNvPr id="7" name="Picture 6" descr="image.png"/>
-          <p:cNvPicPr>
-            <a:picLocks noChangeAspect="1"/>
-          </p:cNvPicPr>
-          <p:nvPr/>
-        </p:nvPicPr>
-        <p:blipFill>
-          <a:blip r:embed="rId3"/>
-          <a:stretch>
-            <a:fillRect/>
-          </a:stretch>
-        </p:blipFill>
-        <p:spPr>
-          <a:xfrm>
-            <a:off x="3638550" y="3146970"/>
-            <a:ext cx="381000" cy="381000"/>
-          </a:xfrm>
-          <a:prstGeom prst="rect">
-            <a:avLst/>
-          </a:prstGeom>
-        </p:spPr>
-      </p:pic>
-      <p:pic>
-        <p:nvPicPr>
-          <p:cNvPr id="8" name="Picture 7" descr="image.png"/>
-          <p:cNvPicPr>
-            <a:picLocks noChangeAspect="1"/>
-          </p:cNvPicPr>
-          <p:nvPr/>
-        </p:nvPicPr>
-        <p:blipFill>
-          <a:blip r:embed="rId4"/>
-          <a:stretch>
-            <a:fillRect/>
-          </a:stretch>
-        </p:blipFill>
-        <p:spPr>
-          <a:xfrm>
-            <a:off x="6438900" y="3146970"/>
-            <a:ext cx="381000" cy="381000"/>
-          </a:xfrm>
-          <a:prstGeom prst="rect">
-            <a:avLst/>
-          </a:prstGeom>
-        </p:spPr>
-      </p:pic>
-      <p:pic>
-        <p:nvPicPr>
-          <p:cNvPr id="9" name="Picture 8" descr="image.png"/>
-          <p:cNvPicPr>
-            <a:picLocks noChangeAspect="1"/>
-          </p:cNvPicPr>
-          <p:nvPr/>
-        </p:nvPicPr>
-        <p:blipFill>
-          <a:blip r:embed="rId5"/>
-          <a:stretch>
-            <a:fillRect/>
-          </a:stretch>
-        </p:blipFill>
-        <p:spPr>
-          <a:xfrm>
-            <a:off x="9239250" y="3146970"/>
-            <a:ext cx="381000" cy="381000"/>
-          </a:xfrm>
-          <a:prstGeom prst="rect">
-            <a:avLst/>
-          </a:prstGeom>
-        </p:spPr>
-      </p:pic>
-      <p:pic>
-        <p:nvPicPr>
-          <p:cNvPr id="10" name="Picture 9" descr="image.png"/>
-          <p:cNvPicPr>
-            <a:picLocks noChangeAspect="1"/>
-          </p:cNvPicPr>
-          <p:nvPr/>
-        </p:nvPicPr>
-        <p:blipFill>
-          <a:blip r:embed="rId6"/>
-          <a:stretch>
-            <a:fillRect/>
-          </a:stretch>
-        </p:blipFill>
-        <p:spPr>
-          <a:xfrm>
-            <a:off x="942975" y="3251745"/>
-            <a:ext cx="171450" cy="171450"/>
-          </a:xfrm>
-          <a:prstGeom prst="rect">
-            <a:avLst/>
-          </a:prstGeom>
-        </p:spPr>
-      </p:pic>
-      <p:pic>
-        <p:nvPicPr>
-          <p:cNvPr id="11" name="Picture 10" descr="image.png"/>
-          <p:cNvPicPr>
-            <a:picLocks noChangeAspect="1"/>
-          </p:cNvPicPr>
-          <p:nvPr/>
-        </p:nvPicPr>
-        <p:blipFill>
-          <a:blip r:embed="rId7"/>
-          <a:stretch>
-            <a:fillRect/>
-          </a:stretch>
-        </p:blipFill>
-        <p:spPr>
-          <a:xfrm>
-            <a:off x="3719512" y="3251745"/>
-            <a:ext cx="219075" cy="171450"/>
-          </a:xfrm>
-          <a:prstGeom prst="rect">
-            <a:avLst/>
-          </a:prstGeom>
-        </p:spPr>
-      </p:pic>
-      <p:pic>
-        <p:nvPicPr>
-          <p:cNvPr id="12" name="Picture 11" descr="image.png"/>
-          <p:cNvPicPr>
-            <a:picLocks noChangeAspect="1"/>
-          </p:cNvPicPr>
-          <p:nvPr/>
-        </p:nvPicPr>
-        <p:blipFill>
-          <a:blip r:embed="rId8"/>
-          <a:stretch>
-            <a:fillRect/>
-          </a:stretch>
-        </p:blipFill>
-        <p:spPr>
-          <a:xfrm>
-            <a:off x="6543675" y="3251745"/>
-            <a:ext cx="171450" cy="171450"/>
-          </a:xfrm>
-          <a:prstGeom prst="rect">
-            <a:avLst/>
-          </a:prstGeom>
-        </p:spPr>
-      </p:pic>
-      <p:pic>
-        <p:nvPicPr>
-          <p:cNvPr id="13" name="Picture 12" descr="image.png"/>
-          <p:cNvPicPr>
-            <a:picLocks noChangeAspect="1"/>
-          </p:cNvPicPr>
-          <p:nvPr/>
-        </p:nvPicPr>
-        <p:blipFill>
-          <a:blip r:embed="rId9"/>
-          <a:stretch>
-            <a:fillRect/>
-          </a:stretch>
-        </p:blipFill>
-        <p:spPr>
-          <a:xfrm>
-            <a:off x="9344025" y="3251745"/>
-            <a:ext cx="171450" cy="171450"/>
-          </a:xfrm>
-          <a:prstGeom prst="rect">
-            <a:avLst/>
-          </a:prstGeom>
-        </p:spPr>
-      </p:pic>
-      <p:sp>
-        <p:nvSpPr>
-          <p:cNvPr id="14" name="TextBox 13"/>
-          <p:cNvSpPr txBox="1"/>
-          <p:nvPr/>
-        </p:nvSpPr>
-        <p:spPr>
-          <a:xfrm>
-            <a:off x="609600" y="457200"/>
-            <a:ext cx="11582400" cy="171450"/>
-          </a:xfrm>
-          <a:prstGeom prst="rect">
-            <a:avLst/>
-          </a:prstGeom>
-          <a:noFill/>
-        </p:spPr>
-        <p:txBody>
-          <a:bodyPr wrap="none" lIns="0" rIns="0" tIns="0" bIns="0" anchor="t">
-            <a:spAutoFit/>
-          </a:bodyPr>
-          <a:lstStyle/>
-          <a:p>
-            <a:pPr algn="l"/>
-            <a:r>
-              <a:rPr b="1" sz="1050" i="0" u="none">
-                <a:solidFill>
-                  <a:srgbClr val="E11D48"/>
-                </a:solidFill>
-                <a:latin typeface="Plus Jakarta Sans"/>
-              </a:rPr>
-              <a:t>EVALUACIÓN TÉCNICA</a:t>
-            </a:r>
-          </a:p>
-        </p:txBody>
-      </p:sp>
-      <p:sp>
-        <p:nvSpPr>
-          <p:cNvPr id="15" name="TextBox 14"/>
-          <p:cNvSpPr txBox="1"/>
-          <p:nvPr/>
-        </p:nvSpPr>
-        <p:spPr>
-          <a:xfrm>
-            <a:off x="609600" y="685800"/>
-            <a:ext cx="11582400" cy="388590"/>
-          </a:xfrm>
-          <a:prstGeom prst="rect">
-            <a:avLst/>
-          </a:prstGeom>
-          <a:noFill/>
-        </p:spPr>
-        <p:txBody>
-          <a:bodyPr wrap="none" lIns="0" rIns="0" tIns="0" bIns="0" anchor="t">
-            <a:spAutoFit/>
-          </a:bodyPr>
-          <a:lstStyle/>
-          <a:p>
-            <a:pPr algn="l">
-              <a:lnSpc>
-                <a:spcPts val="3060"/>
-              </a:lnSpc>
-            </a:pPr>
-            <a:r>
-              <a:rPr b="1" sz="2550" i="0" u="none">
-                <a:solidFill>
-                  <a:srgbClr val="0F172A"/>
-                </a:solidFill>
-                <a:latin typeface="Space Grotesk"/>
-              </a:rPr>
-              <a:t>Límites y Condiciones de Borde</a:t>
-            </a:r>
-          </a:p>
-        </p:txBody>
-      </p:sp>
-      <p:sp>
-        <p:nvSpPr>
-          <p:cNvPr id="16" name="TextBox 15"/>
-          <p:cNvSpPr txBox="1"/>
-          <p:nvPr/>
-        </p:nvSpPr>
-        <p:spPr>
-          <a:xfrm>
-            <a:off x="838200" y="3642270"/>
-            <a:ext cx="2775346" cy="219075"/>
-          </a:xfrm>
-          <a:prstGeom prst="rect">
-            <a:avLst/>
-          </a:prstGeom>
-          <a:noFill/>
-        </p:spPr>
-        <p:txBody>
-          <a:bodyPr wrap="none" lIns="0" rIns="0" tIns="0" bIns="0" anchor="t">
-            <a:spAutoFit/>
-          </a:bodyPr>
-          <a:lstStyle/>
-          <a:p>
-            <a:pPr algn="l"/>
-            <a:r>
-              <a:rPr b="1" sz="1350" i="0" u="none">
-                <a:solidFill>
-                  <a:srgbClr val="0F172A"/>
-                </a:solidFill>
-                <a:latin typeface="Space Grotesk"/>
-              </a:rPr>
-              <a:t>Discrepancia Puntual</a:t>
-            </a:r>
-          </a:p>
-        </p:txBody>
-      </p:sp>
-      <p:sp>
-        <p:nvSpPr>
-          <p:cNvPr id="17" name="TextBox 16"/>
-          <p:cNvSpPr txBox="1"/>
-          <p:nvPr/>
-        </p:nvSpPr>
-        <p:spPr>
-          <a:xfrm>
-            <a:off x="838200" y="3975645"/>
-            <a:ext cx="2209800" cy="657225"/>
-          </a:xfrm>
-          <a:prstGeom prst="rect">
-            <a:avLst/>
-          </a:prstGeom>
-          <a:noFill/>
-        </p:spPr>
-        <p:txBody>
-          <a:bodyPr wrap="square" lIns="0" rIns="0" tIns="0" bIns="0" anchor="t">
-            <a:spAutoFit/>
-          </a:bodyPr>
-          <a:lstStyle/>
-          <a:p>
-            <a:pPr algn="l"/>
-            <a:r>
-              <a:rPr b="0" sz="1350" i="0" u="none">
-                <a:solidFill>
-                  <a:srgbClr val="475569"/>
-                </a:solidFill>
-                <a:latin typeface="Plus Jakarta Sans"/>
-              </a:rPr>
-              <a:t>Regresión: 2.77 d del cruce medido, más que Δt = ±1.92 d.</a:t>
-            </a:r>
-          </a:p>
-        </p:txBody>
-      </p:sp>
-      <p:sp>
-        <p:nvSpPr>
-          <p:cNvPr id="18" name="TextBox 17"/>
-          <p:cNvSpPr txBox="1"/>
-          <p:nvPr/>
-        </p:nvSpPr>
-        <p:spPr>
-          <a:xfrm>
-            <a:off x="3638550" y="3642270"/>
-            <a:ext cx="2775346" cy="219075"/>
-          </a:xfrm>
-          <a:prstGeom prst="rect">
-            <a:avLst/>
-          </a:prstGeom>
-          <a:noFill/>
-        </p:spPr>
-        <p:txBody>
-          <a:bodyPr wrap="none" lIns="0" rIns="0" tIns="0" bIns="0" anchor="t">
-            <a:spAutoFit/>
-          </a:bodyPr>
-          <a:lstStyle/>
-          <a:p>
-            <a:pPr algn="l"/>
-            <a:r>
-              <a:rPr b="1" sz="1350" i="0" u="none">
-                <a:solidFill>
-                  <a:srgbClr val="0F172A"/>
-                </a:solidFill>
-                <a:latin typeface="Space Grotesk"/>
-              </a:rPr>
-              <a:t>Suavizado del Pico</a:t>
-            </a:r>
-          </a:p>
-        </p:txBody>
-      </p:sp>
-      <p:sp>
-        <p:nvSpPr>
-          <p:cNvPr id="19" name="TextBox 18"/>
-          <p:cNvSpPr txBox="1"/>
-          <p:nvPr/>
-        </p:nvSpPr>
-        <p:spPr>
-          <a:xfrm>
-            <a:off x="3638550" y="3975645"/>
-            <a:ext cx="2209800" cy="657225"/>
-          </a:xfrm>
-          <a:prstGeom prst="rect">
-            <a:avLst/>
-          </a:prstGeom>
-          <a:noFill/>
-        </p:spPr>
-        <p:txBody>
-          <a:bodyPr wrap="square" lIns="0" rIns="0" tIns="0" bIns="0" anchor="t">
-            <a:spAutoFit/>
-          </a:bodyPr>
-          <a:lstStyle/>
-          <a:p>
-            <a:pPr algn="l"/>
-            <a:r>
-              <a:rPr b="0" sz="1350" i="0" u="none">
-                <a:solidFill>
-                  <a:srgbClr val="475569"/>
-                </a:solidFill>
-                <a:latin typeface="Plus Jakarta Sans"/>
-              </a:rPr>
-              <a:t>Atenúa el máximo un 18 % y lo desplaza 4.6 semanas.</a:t>
-            </a:r>
-          </a:p>
-        </p:txBody>
-      </p:sp>
-      <p:sp>
-        <p:nvSpPr>
-          <p:cNvPr id="20" name="TextBox 19"/>
-          <p:cNvSpPr txBox="1"/>
-          <p:nvPr/>
-        </p:nvSpPr>
-        <p:spPr>
-          <a:xfrm>
-            <a:off x="6438900" y="3642270"/>
-            <a:ext cx="2775346" cy="219075"/>
-          </a:xfrm>
-          <a:prstGeom prst="rect">
-            <a:avLst/>
-          </a:prstGeom>
-          <a:noFill/>
-        </p:spPr>
-        <p:txBody>
-          <a:bodyPr wrap="none" lIns="0" rIns="0" tIns="0" bIns="0" anchor="t">
-            <a:spAutoFit/>
-          </a:bodyPr>
-          <a:lstStyle/>
-          <a:p>
-            <a:pPr algn="l"/>
-            <a:r>
-              <a:rPr b="1" sz="1350" i="0" u="none">
-                <a:solidFill>
-                  <a:srgbClr val="0F172A"/>
-                </a:solidFill>
-                <a:latin typeface="Space Grotesk"/>
-              </a:rPr>
-              <a:t>Alcance Muestral</a:t>
-            </a:r>
-          </a:p>
-        </p:txBody>
-      </p:sp>
-      <p:sp>
-        <p:nvSpPr>
-          <p:cNvPr id="21" name="TextBox 20"/>
-          <p:cNvSpPr txBox="1"/>
-          <p:nvPr/>
-        </p:nvSpPr>
-        <p:spPr>
-          <a:xfrm>
-            <a:off x="6438900" y="3975645"/>
-            <a:ext cx="2209800" cy="657225"/>
-          </a:xfrm>
-          <a:prstGeom prst="rect">
-            <a:avLst/>
-          </a:prstGeom>
-          <a:noFill/>
-        </p:spPr>
-        <p:txBody>
-          <a:bodyPr wrap="square" lIns="0" rIns="0" tIns="0" bIns="0" anchor="t">
-            <a:spAutoFit/>
-          </a:bodyPr>
-          <a:lstStyle/>
-          <a:p>
-            <a:pPr algn="l"/>
-            <a:r>
-              <a:rPr b="0" sz="1350" i="0" u="none">
-                <a:solidFill>
-                  <a:srgbClr val="475569"/>
-                </a:solidFill>
-                <a:latin typeface="Plus Jakarta Sans"/>
-              </a:rPr>
-              <a:t>Restringido exclusivamente al Top 200 de Spotify México.</a:t>
-            </a:r>
-          </a:p>
-        </p:txBody>
-      </p:sp>
-      <p:sp>
-        <p:nvSpPr>
-          <p:cNvPr id="22" name="TextBox 21"/>
-          <p:cNvSpPr txBox="1"/>
-          <p:nvPr/>
-        </p:nvSpPr>
-        <p:spPr>
-          <a:xfrm>
-            <a:off x="9239250" y="3642270"/>
-            <a:ext cx="2775346" cy="219075"/>
-          </a:xfrm>
-          <a:prstGeom prst="rect">
-            <a:avLst/>
-          </a:prstGeom>
-          <a:noFill/>
-        </p:spPr>
-        <p:txBody>
-          <a:bodyPr wrap="none" lIns="0" rIns="0" tIns="0" bIns="0" anchor="t">
-            <a:spAutoFit/>
-          </a:bodyPr>
-          <a:lstStyle/>
-          <a:p>
-            <a:pPr algn="l"/>
-            <a:r>
-              <a:rPr b="1" sz="1350" i="0" u="none">
-                <a:solidFill>
-                  <a:srgbClr val="0F172A"/>
-                </a:solidFill>
-                <a:latin typeface="Space Grotesk"/>
-              </a:rPr>
-              <a:t>No Extrapolable</a:t>
-            </a:r>
-          </a:p>
-        </p:txBody>
-      </p:sp>
-      <p:sp>
-        <p:nvSpPr>
-          <p:cNvPr id="23" name="TextBox 22"/>
-          <p:cNvSpPr txBox="1"/>
-          <p:nvPr/>
-        </p:nvSpPr>
-        <p:spPr>
-          <a:xfrm>
-            <a:off x="9239250" y="3975645"/>
-            <a:ext cx="2209800" cy="657225"/>
-          </a:xfrm>
-          <a:prstGeom prst="rect">
-            <a:avLst/>
-          </a:prstGeom>
-          <a:noFill/>
-        </p:spPr>
-        <p:txBody>
-          <a:bodyPr wrap="square" lIns="0" rIns="0" tIns="0" bIns="0" anchor="t">
-            <a:spAutoFit/>
-          </a:bodyPr>
-          <a:lstStyle/>
-          <a:p>
-            <a:pPr algn="l"/>
-            <a:r>
-              <a:rPr b="0" sz="1350" i="0" u="none">
-                <a:solidFill>
-                  <a:srgbClr val="475569"/>
-                </a:solidFill>
-                <a:latin typeface="Plus Jakarta Sans"/>
-              </a:rPr>
-              <a:t>El modelo pierde validez fuera del intervalo observado.</a:t>
-            </a:r>
-          </a:p>
-        </p:txBody>
-      </p:sp>
-    </p:spTree>
-  </p:cSld>
-  <p:clrMapOvr>
-    <a:masterClrMapping/>
-  </p:clrMapOvr>
-</p:sld>
-</file>
-
-<file path=ppt/slides/slide13.xml><?xml version="1.0" encoding="utf-8"?>
-<p:sld xmlns:a="http://schemas.openxmlformats.org/drawingml/2006/main" xmlns:p="http://schemas.openxmlformats.org/presentationml/2006/main" xmlns:r="http://schemas.openxmlformats.org/officeDocument/2006/relationships">
-  <p:cSld>
-    <p:bg>
-      <p:bgPr>
-        <a:solidFill>
-          <a:srgbClr val="FFFFFF"/>
-        </a:solidFill>
-        <a:effectLst/>
-      </p:bgPr>
-    </p:bg>
-    <p:spTree>
-      <p:nvGrpSpPr>
-        <p:cNvPr id="1" name=""/>
-        <p:cNvGrpSpPr/>
-        <p:nvPr/>
-      </p:nvGrpSpPr>
-      <p:grpSpPr/>
-      <p:sp>
-        <p:nvSpPr>
-          <p:cNvPr id="2" name="Rounded Rectangle 1"/>
-          <p:cNvSpPr/>
-          <p:nvPr/>
-        </p:nvSpPr>
-        <p:spPr>
-          <a:xfrm>
-            <a:off x="609600" y="1379190"/>
-            <a:ext cx="3454449" cy="1266825"/>
-          </a:xfrm>
-          <a:prstGeom prst="roundRect">
-            <a:avLst>
-              <a:gd name="adj" fmla="val 12030"/>
-            </a:avLst>
-          </a:prstGeom>
-          <a:solidFill>
-            <a:srgbClr val="FFF1F2"/>
-          </a:solidFill>
-          <a:ln>
-            <a:noFill/>
-          </a:ln>
-          <a:effectLst/>
-        </p:spPr>
-        <p:style>
-          <a:lnRef idx="1">
-            <a:schemeClr val="accent1"/>
-          </a:lnRef>
-          <a:fillRef idx="3">
-            <a:schemeClr val="accent1"/>
-          </a:fillRef>
-          <a:effectRef idx="2">
-            <a:schemeClr val="accent1"/>
-          </a:effectRef>
-          <a:fontRef idx="minor">
-            <a:schemeClr val="lt1"/>
-          </a:fontRef>
-        </p:style>
-        <p:txBody>
-          <a:bodyPr rtlCol="0" anchor="ctr"/>
-          <a:lstStyle/>
-          <a:p>
-            <a:pPr algn="ctr"/>
-          </a:p>
-        </p:txBody>
-      </p:sp>
-      <p:sp>
-        <p:nvSpPr>
-          <p:cNvPr id="3" name="Rounded Rectangle 2"/>
-          <p:cNvSpPr/>
-          <p:nvPr/>
-        </p:nvSpPr>
-        <p:spPr>
-          <a:xfrm>
-            <a:off x="4368849" y="1379190"/>
-            <a:ext cx="3454449" cy="1266825"/>
-          </a:xfrm>
-          <a:prstGeom prst="roundRect">
-            <a:avLst>
-              <a:gd name="adj" fmla="val 12030"/>
-            </a:avLst>
-          </a:prstGeom>
-          <a:solidFill>
-            <a:srgbClr val="F0F9FF"/>
-          </a:solidFill>
-          <a:ln>
-            <a:noFill/>
-          </a:ln>
-          <a:effectLst/>
-        </p:spPr>
-        <p:style>
-          <a:lnRef idx="1">
-            <a:schemeClr val="accent1"/>
-          </a:lnRef>
-          <a:fillRef idx="3">
-            <a:schemeClr val="accent1"/>
-          </a:fillRef>
-          <a:effectRef idx="2">
-            <a:schemeClr val="accent1"/>
-          </a:effectRef>
-          <a:fontRef idx="minor">
-            <a:schemeClr val="lt1"/>
-          </a:fontRef>
-        </p:style>
-        <p:txBody>
-          <a:bodyPr rtlCol="0" anchor="ctr"/>
-          <a:lstStyle/>
-          <a:p>
-            <a:pPr algn="ctr"/>
-          </a:p>
-        </p:txBody>
-      </p:sp>
-      <p:sp>
-        <p:nvSpPr>
-          <p:cNvPr id="4" name="Rounded Rectangle 3"/>
-          <p:cNvSpPr/>
-          <p:nvPr/>
-        </p:nvSpPr>
-        <p:spPr>
-          <a:xfrm>
-            <a:off x="8128099" y="1379190"/>
-            <a:ext cx="3454449" cy="1266825"/>
-          </a:xfrm>
-          <a:prstGeom prst="roundRect">
-            <a:avLst>
-              <a:gd name="adj" fmla="val 12030"/>
-            </a:avLst>
-          </a:prstGeom>
-          <a:solidFill>
-            <a:srgbClr val="F0FDF4"/>
-          </a:solidFill>
-          <a:ln>
-            <a:noFill/>
-          </a:ln>
-          <a:effectLst/>
-        </p:spPr>
-        <p:style>
-          <a:lnRef idx="1">
-            <a:schemeClr val="accent1"/>
-          </a:lnRef>
-          <a:fillRef idx="3">
-            <a:schemeClr val="accent1"/>
-          </a:fillRef>
-          <a:effectRef idx="2">
-            <a:schemeClr val="accent1"/>
-          </a:effectRef>
-          <a:fontRef idx="minor">
-            <a:schemeClr val="lt1"/>
-          </a:fontRef>
-        </p:style>
-        <p:txBody>
-          <a:bodyPr rtlCol="0" anchor="ctr"/>
-          <a:lstStyle/>
-          <a:p>
-            <a:pPr algn="ctr"/>
-          </a:p>
-        </p:txBody>
-      </p:sp>
-      <p:sp>
-        <p:nvSpPr>
-          <p:cNvPr id="5" name="Rectangle 4"/>
-          <p:cNvSpPr/>
-          <p:nvPr/>
-        </p:nvSpPr>
-        <p:spPr>
-          <a:xfrm>
-            <a:off x="609600" y="4137570"/>
-            <a:ext cx="5372100" cy="1076325"/>
-          </a:xfrm>
-          <a:prstGeom prst="rect">
-            <a:avLst/>
-          </a:prstGeom>
-          <a:solidFill>
-            <a:srgbClr val="F8FAFC"/>
-          </a:solidFill>
-          <a:ln>
-            <a:noFill/>
-          </a:ln>
-          <a:effectLst/>
-        </p:spPr>
-        <p:style>
-          <a:lnRef idx="1">
-            <a:schemeClr val="accent1"/>
-          </a:lnRef>
-          <a:fillRef idx="3">
-            <a:schemeClr val="accent1"/>
-          </a:fillRef>
-          <a:effectRef idx="2">
-            <a:schemeClr val="accent1"/>
-          </a:effectRef>
-          <a:fontRef idx="minor">
-            <a:schemeClr val="lt1"/>
-          </a:fontRef>
-        </p:style>
-        <p:txBody>
-          <a:bodyPr rtlCol="0" anchor="ctr"/>
-          <a:lstStyle/>
-          <a:p>
-            <a:pPr algn="ctr"/>
-          </a:p>
-        </p:txBody>
-      </p:sp>
-      <p:sp>
-        <p:nvSpPr>
-          <p:cNvPr id="6" name="Rectangle 5"/>
-          <p:cNvSpPr/>
-          <p:nvPr/>
-        </p:nvSpPr>
-        <p:spPr>
-          <a:xfrm>
-            <a:off x="6210300" y="4137570"/>
-            <a:ext cx="5372100" cy="1076325"/>
-          </a:xfrm>
-          <a:prstGeom prst="rect">
-            <a:avLst/>
-          </a:prstGeom>
-          <a:solidFill>
-            <a:srgbClr val="F8FAFC"/>
-          </a:solidFill>
-          <a:ln>
-            <a:noFill/>
-          </a:ln>
-          <a:effectLst/>
-        </p:spPr>
-        <p:style>
-          <a:lnRef idx="1">
-            <a:schemeClr val="accent1"/>
-          </a:lnRef>
-          <a:fillRef idx="3">
-            <a:schemeClr val="accent1"/>
-          </a:fillRef>
-          <a:effectRef idx="2">
-            <a:schemeClr val="accent1"/>
-          </a:effectRef>
-          <a:fontRef idx="minor">
-            <a:schemeClr val="lt1"/>
-          </a:fontRef>
-        </p:style>
-        <p:txBody>
-          <a:bodyPr rtlCol="0" anchor="ctr"/>
-          <a:lstStyle/>
-          <a:p>
-            <a:pPr algn="ctr"/>
-          </a:p>
-        </p:txBody>
-      </p:sp>
-      <p:sp>
-        <p:nvSpPr>
-          <p:cNvPr id="7" name="Rectangle 6"/>
-          <p:cNvSpPr/>
-          <p:nvPr/>
-        </p:nvSpPr>
-        <p:spPr>
-          <a:xfrm>
-            <a:off x="609600" y="4137570"/>
-            <a:ext cx="38100" cy="1076325"/>
-          </a:xfrm>
-          <a:prstGeom prst="rect">
-            <a:avLst/>
-          </a:prstGeom>
-          <a:solidFill>
-            <a:srgbClr val="E11D48"/>
-          </a:solidFill>
-          <a:ln>
-            <a:noFill/>
-          </a:ln>
-          <a:effectLst/>
-        </p:spPr>
-        <p:style>
-          <a:lnRef idx="1">
-            <a:schemeClr val="accent1"/>
-          </a:lnRef>
-          <a:fillRef idx="3">
-            <a:schemeClr val="accent1"/>
-          </a:fillRef>
-          <a:effectRef idx="2">
-            <a:schemeClr val="accent1"/>
-          </a:effectRef>
-          <a:fontRef idx="minor">
-            <a:schemeClr val="lt1"/>
-          </a:fontRef>
-        </p:style>
-        <p:txBody>
-          <a:bodyPr rtlCol="0" anchor="ctr"/>
-          <a:lstStyle/>
-          <a:p>
-            <a:pPr algn="ctr"/>
-          </a:p>
-        </p:txBody>
-      </p:sp>
-      <p:sp>
-        <p:nvSpPr>
-          <p:cNvPr id="8" name="Rectangle 7"/>
-          <p:cNvSpPr/>
-          <p:nvPr/>
-        </p:nvSpPr>
-        <p:spPr>
-          <a:xfrm>
-            <a:off x="6210300" y="4137570"/>
-            <a:ext cx="38100" cy="1076325"/>
-          </a:xfrm>
-          <a:prstGeom prst="rect">
-            <a:avLst/>
-          </a:prstGeom>
-          <a:solidFill>
-            <a:srgbClr val="0284C7"/>
-          </a:solidFill>
-          <a:ln>
-            <a:noFill/>
-          </a:ln>
-          <a:effectLst/>
-        </p:spPr>
-        <p:style>
-          <a:lnRef idx="1">
-            <a:schemeClr val="accent1"/>
-          </a:lnRef>
-          <a:fillRef idx="3">
-            <a:schemeClr val="accent1"/>
-          </a:fillRef>
-          <a:effectRef idx="2">
-            <a:schemeClr val="accent1"/>
-          </a:effectRef>
-          <a:fontRef idx="minor">
-            <a:schemeClr val="lt1"/>
-          </a:fontRef>
-        </p:style>
-        <p:txBody>
-          <a:bodyPr rtlCol="0" anchor="ctr"/>
-          <a:lstStyle/>
-          <a:p>
-            <a:pPr algn="ctr"/>
-          </a:p>
-        </p:txBody>
-      </p:sp>
-      <p:sp>
-        <p:nvSpPr>
-          <p:cNvPr id="9" name="TextBox 8"/>
-          <p:cNvSpPr txBox="1"/>
-          <p:nvPr/>
-        </p:nvSpPr>
-        <p:spPr>
-          <a:xfrm>
-            <a:off x="609600" y="457200"/>
-            <a:ext cx="11582400" cy="171450"/>
-          </a:xfrm>
-          <a:prstGeom prst="rect">
-            <a:avLst/>
-          </a:prstGeom>
-          <a:noFill/>
-        </p:spPr>
-        <p:txBody>
-          <a:bodyPr wrap="none" lIns="0" rIns="0" tIns="0" bIns="0" anchor="t">
-            <a:spAutoFit/>
-          </a:bodyPr>
-          <a:lstStyle/>
-          <a:p>
-            <a:pPr algn="l"/>
-            <a:r>
-              <a:rPr b="1" sz="1050" i="0" u="none">
-                <a:solidFill>
-                  <a:srgbClr val="E11D48"/>
-                </a:solidFill>
-                <a:latin typeface="Plus Jakarta Sans"/>
-              </a:rPr>
-              <a:t>SÍNTESIS DEL PROYECTO</a:t>
-            </a:r>
-          </a:p>
-        </p:txBody>
-      </p:sp>
-      <p:sp>
-        <p:nvSpPr>
-          <p:cNvPr id="10" name="TextBox 9"/>
-          <p:cNvSpPr txBox="1"/>
-          <p:nvPr/>
-        </p:nvSpPr>
-        <p:spPr>
-          <a:xfrm>
-            <a:off x="609600" y="685800"/>
-            <a:ext cx="11582400" cy="388590"/>
-          </a:xfrm>
-          <a:prstGeom prst="rect">
-            <a:avLst/>
-          </a:prstGeom>
-          <a:noFill/>
-        </p:spPr>
-        <p:txBody>
-          <a:bodyPr wrap="none" lIns="0" rIns="0" tIns="0" bIns="0" anchor="t">
-            <a:spAutoFit/>
-          </a:bodyPr>
-          <a:lstStyle/>
-          <a:p>
-            <a:pPr algn="l">
-              <a:lnSpc>
-                <a:spcPts val="3060"/>
-              </a:lnSpc>
-            </a:pPr>
-            <a:r>
-              <a:rPr b="1" sz="2550" i="0" u="none">
-                <a:solidFill>
-                  <a:srgbClr val="0F172A"/>
-                </a:solidFill>
-                <a:latin typeface="Space Grotesk"/>
-              </a:rPr>
-              <a:t>Conclusiones y aplicación a la ingeniería</a:t>
-            </a:r>
-          </a:p>
-        </p:txBody>
-      </p:sp>
-      <p:sp>
-        <p:nvSpPr>
-          <p:cNvPr id="11" name="TextBox 10"/>
-          <p:cNvSpPr txBox="1"/>
-          <p:nvPr/>
-        </p:nvSpPr>
-        <p:spPr>
-          <a:xfrm>
-            <a:off x="511168" y="1645890"/>
-            <a:ext cx="3651312" cy="457200"/>
-          </a:xfrm>
-          <a:prstGeom prst="rect">
-            <a:avLst/>
-          </a:prstGeom>
-          <a:noFill/>
-        </p:spPr>
-        <p:txBody>
-          <a:bodyPr wrap="none" lIns="0" rIns="0" tIns="0" bIns="0" anchor="t">
-            <a:spAutoFit/>
-          </a:bodyPr>
-          <a:lstStyle/>
-          <a:p>
-            <a:pPr algn="ctr">
-              <a:lnSpc>
-                <a:spcPts val="3600"/>
-              </a:lnSpc>
-            </a:pPr>
-            <a:r>
-              <a:rPr b="1" sz="3600" i="0" u="none">
-                <a:solidFill>
-                  <a:srgbClr val="E11D48"/>
-                </a:solidFill>
-                <a:latin typeface="Plus Jakarta Sans"/>
-              </a:rPr>
-              <a:t>99.95%</a:t>
-            </a:r>
-          </a:p>
-        </p:txBody>
-      </p:sp>
-      <p:sp>
-        <p:nvSpPr>
-          <p:cNvPr id="12" name="TextBox 11"/>
-          <p:cNvSpPr txBox="1"/>
-          <p:nvPr/>
-        </p:nvSpPr>
-        <p:spPr>
-          <a:xfrm>
-            <a:off x="511168" y="2179290"/>
-            <a:ext cx="3651312" cy="200025"/>
-          </a:xfrm>
-          <a:prstGeom prst="rect">
-            <a:avLst/>
-          </a:prstGeom>
-          <a:noFill/>
-        </p:spPr>
-        <p:txBody>
-          <a:bodyPr wrap="none" lIns="0" rIns="0" tIns="0" bIns="0" anchor="t">
-            <a:spAutoFit/>
-          </a:bodyPr>
-          <a:lstStyle/>
-          <a:p>
-            <a:pPr algn="ctr"/>
-            <a:r>
-              <a:rPr b="1" sz="1200" i="0" u="none">
-                <a:solidFill>
-                  <a:srgbClr val="475569"/>
-                </a:solidFill>
-                <a:latin typeface="Plus Jakarta Sans"/>
-              </a:rPr>
-              <a:t>Varianza explicada por el ajuste</a:t>
-            </a:r>
-          </a:p>
-        </p:txBody>
-      </p:sp>
-      <p:sp>
-        <p:nvSpPr>
-          <p:cNvPr id="13" name="TextBox 12"/>
-          <p:cNvSpPr txBox="1"/>
-          <p:nvPr/>
-        </p:nvSpPr>
-        <p:spPr>
-          <a:xfrm>
-            <a:off x="4270418" y="1645890"/>
-            <a:ext cx="3651312" cy="457200"/>
-          </a:xfrm>
-          <a:prstGeom prst="rect">
-            <a:avLst/>
-          </a:prstGeom>
-          <a:noFill/>
-        </p:spPr>
-        <p:txBody>
-          <a:bodyPr wrap="none" lIns="0" rIns="0" tIns="0" bIns="0" anchor="t">
-            <a:spAutoFit/>
-          </a:bodyPr>
-          <a:lstStyle/>
-          <a:p>
-            <a:pPr algn="ctr">
-              <a:lnSpc>
-                <a:spcPts val="3600"/>
-              </a:lnSpc>
-            </a:pPr>
-            <a:r>
-              <a:rPr b="1" sz="3600" i="0" u="none">
-                <a:solidFill>
-                  <a:srgbClr val="0284C7"/>
-                </a:solidFill>
-                <a:latin typeface="Plus Jakarta Sans"/>
-              </a:rPr>
-              <a:t>3 vs 15</a:t>
-            </a:r>
-          </a:p>
-        </p:txBody>
-      </p:sp>
-      <p:sp>
-        <p:nvSpPr>
-          <p:cNvPr id="14" name="TextBox 13"/>
-          <p:cNvSpPr txBox="1"/>
-          <p:nvPr/>
-        </p:nvSpPr>
-        <p:spPr>
-          <a:xfrm>
-            <a:off x="4270418" y="2179290"/>
-            <a:ext cx="3651312" cy="200025"/>
-          </a:xfrm>
-          <a:prstGeom prst="rect">
-            <a:avLst/>
-          </a:prstGeom>
-          <a:noFill/>
-        </p:spPr>
-        <p:txBody>
-          <a:bodyPr wrap="none" lIns="0" rIns="0" tIns="0" bIns="0" anchor="t">
-            <a:spAutoFit/>
-          </a:bodyPr>
-          <a:lstStyle/>
-          <a:p>
-            <a:pPr algn="ctr"/>
-            <a:r>
-              <a:rPr b="1" sz="1200" i="0" u="none">
-                <a:solidFill>
-                  <a:srgbClr val="475569"/>
-                </a:solidFill>
-                <a:latin typeface="Plus Jakarta Sans"/>
-              </a:rPr>
-              <a:t>Iteraciones: Newton-Raphson vs. Bisección</a:t>
-            </a:r>
-          </a:p>
-        </p:txBody>
-      </p:sp>
-      <p:sp>
-        <p:nvSpPr>
-          <p:cNvPr id="15" name="TextBox 14"/>
-          <p:cNvSpPr txBox="1"/>
-          <p:nvPr/>
-        </p:nvSpPr>
-        <p:spPr>
-          <a:xfrm>
-            <a:off x="8029668" y="1645890"/>
-            <a:ext cx="3651312" cy="457200"/>
-          </a:xfrm>
-          <a:prstGeom prst="rect">
-            <a:avLst/>
-          </a:prstGeom>
-          <a:noFill/>
-        </p:spPr>
-        <p:txBody>
-          <a:bodyPr wrap="none" lIns="0" rIns="0" tIns="0" bIns="0" anchor="t">
-            <a:spAutoFit/>
-          </a:bodyPr>
-          <a:lstStyle/>
-          <a:p>
-            <a:pPr algn="ctr">
-              <a:lnSpc>
-                <a:spcPts val="3600"/>
-              </a:lnSpc>
-            </a:pPr>
-            <a:r>
-              <a:rPr b="1" sz="3600" i="0" u="none">
-                <a:solidFill>
-                  <a:srgbClr val="16A34A"/>
-                </a:solidFill>
-                <a:latin typeface="Plus Jakarta Sans"/>
-              </a:rPr>
-              <a:t>29/09/2023</a:t>
-            </a:r>
-          </a:p>
-        </p:txBody>
-      </p:sp>
-      <p:sp>
-        <p:nvSpPr>
-          <p:cNvPr id="16" name="TextBox 15"/>
-          <p:cNvSpPr txBox="1"/>
-          <p:nvPr/>
-        </p:nvSpPr>
-        <p:spPr>
-          <a:xfrm>
-            <a:off x="8029668" y="2179290"/>
-            <a:ext cx="3651312" cy="200025"/>
-          </a:xfrm>
-          <a:prstGeom prst="rect">
-            <a:avLst/>
-          </a:prstGeom>
-          <a:noFill/>
-        </p:spPr>
-        <p:txBody>
-          <a:bodyPr wrap="none" lIns="0" rIns="0" tIns="0" bIns="0" anchor="t">
-            <a:spAutoFit/>
-          </a:bodyPr>
-          <a:lstStyle/>
-          <a:p>
-            <a:pPr algn="ctr"/>
-            <a:r>
-              <a:rPr b="1" sz="1200" i="0" u="none">
-                <a:solidFill>
-                  <a:srgbClr val="475569"/>
-                </a:solidFill>
-                <a:latin typeface="Plus Jakarta Sans"/>
-              </a:rPr>
-              <a:t>Hito de 100 M (trazadora, ±2 días)</a:t>
-            </a:r>
-          </a:p>
-        </p:txBody>
-      </p:sp>
-      <p:sp>
-        <p:nvSpPr>
-          <p:cNvPr id="17" name="TextBox 16"/>
-          <p:cNvSpPr txBox="1"/>
-          <p:nvPr/>
-        </p:nvSpPr>
-        <p:spPr>
-          <a:xfrm>
-            <a:off x="876300" y="4328070"/>
-            <a:ext cx="6400800" cy="219075"/>
-          </a:xfrm>
-          <a:prstGeom prst="rect">
-            <a:avLst/>
-          </a:prstGeom>
-          <a:noFill/>
-        </p:spPr>
-        <p:txBody>
-          <a:bodyPr wrap="none" lIns="0" rIns="0" tIns="0" bIns="0" anchor="t">
-            <a:spAutoFit/>
-          </a:bodyPr>
-          <a:lstStyle/>
-          <a:p>
-            <a:pPr algn="l"/>
-            <a:r>
-              <a:rPr b="1" sz="1350" i="0" u="none">
-                <a:solidFill>
-                  <a:srgbClr val="0F172A"/>
-                </a:solidFill>
-                <a:latin typeface="Space Grotesk"/>
-              </a:rPr>
-              <a:t>Modelado continuo</a:t>
-            </a:r>
-          </a:p>
-        </p:txBody>
-      </p:sp>
-      <p:sp>
-        <p:nvSpPr>
-          <p:cNvPr id="18" name="TextBox 17"/>
-          <p:cNvSpPr txBox="1"/>
-          <p:nvPr/>
-        </p:nvSpPr>
-        <p:spPr>
-          <a:xfrm>
-            <a:off x="876300" y="4585245"/>
-            <a:ext cx="4972050" cy="438150"/>
-          </a:xfrm>
-          <a:prstGeom prst="rect">
-            <a:avLst/>
-          </a:prstGeom>
-          <a:noFill/>
-        </p:spPr>
-        <p:txBody>
-          <a:bodyPr wrap="square" lIns="0" rIns="0" tIns="0" bIns="0" anchor="t">
-            <a:spAutoFit/>
-          </a:bodyPr>
-          <a:lstStyle/>
-          <a:p>
-            <a:pPr algn="l"/>
-            <a:r>
-              <a:rPr b="0" sz="1350" i="0" u="none">
-                <a:solidFill>
-                  <a:srgbClr val="64748B"/>
-                </a:solidFill>
-                <a:latin typeface="Plus Jakarta Sans"/>
-              </a:rPr>
-              <a:t>La regresión capta la tendencia, la trazadora respeta los datos y Δt cuantifica el error.</a:t>
-            </a:r>
-          </a:p>
-        </p:txBody>
-      </p:sp>
-      <p:sp>
-        <p:nvSpPr>
-          <p:cNvPr id="19" name="TextBox 18"/>
-          <p:cNvSpPr txBox="1"/>
-          <p:nvPr/>
-        </p:nvSpPr>
-        <p:spPr>
-          <a:xfrm>
-            <a:off x="6477000" y="4328070"/>
-            <a:ext cx="5715000" cy="219075"/>
-          </a:xfrm>
-          <a:prstGeom prst="rect">
-            <a:avLst/>
-          </a:prstGeom>
-          <a:noFill/>
-        </p:spPr>
-        <p:txBody>
-          <a:bodyPr wrap="none" lIns="0" rIns="0" tIns="0" bIns="0" anchor="t">
-            <a:spAutoFit/>
-          </a:bodyPr>
-          <a:lstStyle/>
-          <a:p>
-            <a:pPr algn="l"/>
-            <a:r>
-              <a:rPr b="1" sz="1350" i="0" u="none">
-                <a:solidFill>
-                  <a:srgbClr val="0F172A"/>
-                </a:solidFill>
-                <a:latin typeface="Space Grotesk"/>
-              </a:rPr>
-              <a:t>Previsión de Servidores Cloud</a:t>
-            </a:r>
-          </a:p>
-        </p:txBody>
-      </p:sp>
-      <p:sp>
-        <p:nvSpPr>
-          <p:cNvPr id="20" name="TextBox 19"/>
-          <p:cNvSpPr txBox="1"/>
-          <p:nvPr/>
-        </p:nvSpPr>
-        <p:spPr>
-          <a:xfrm>
-            <a:off x="6477000" y="4585245"/>
-            <a:ext cx="4972050" cy="438150"/>
-          </a:xfrm>
-          <a:prstGeom prst="rect">
-            <a:avLst/>
-          </a:prstGeom>
-          <a:noFill/>
-        </p:spPr>
-        <p:txBody>
-          <a:bodyPr wrap="square" lIns="0" rIns="0" tIns="0" bIns="0" anchor="t">
-            <a:spAutoFit/>
-          </a:bodyPr>
-          <a:lstStyle/>
-          <a:p>
-            <a:pPr algn="l"/>
-            <a:r>
-              <a:rPr b="0" sz="1350" i="0" u="none">
-                <a:solidFill>
-                  <a:srgbClr val="64748B"/>
-                </a:solidFill>
-                <a:latin typeface="Plus Jakarta Sans"/>
-              </a:rPr>
-              <a:t>Pico de 205 Mbps a 160 kbps y 372 TB transferidos al llegar a 100 M de streams.</a:t>
-            </a:r>
-          </a:p>
-        </p:txBody>
-      </p:sp>
-      <p:sp>
-        <p:nvSpPr>
-          <p:cNvPr id="5" name="Rectangle 4"/>
-          <p:cNvSpPr/>
-          <p:nvPr/>
-        </p:nvSpPr>
-        <p:spPr>
-          <a:xfrm>
-            <a:off x="609600" y="2900000"/>
-            <a:ext cx="10972800" cy="1076325"/>
-          </a:xfrm>
-          <a:prstGeom prst="rect">
-            <a:avLst/>
-          </a:prstGeom>
-          <a:solidFill>
-            <a:srgbClr val="F8FAFC"/>
-          </a:solidFill>
-          <a:ln>
-            <a:noFill/>
-          </a:ln>
-          <a:effectLst/>
-        </p:spPr>
-        <p:style>
-          <a:lnRef idx="1">
-            <a:schemeClr val="accent1"/>
-          </a:lnRef>
-          <a:fillRef idx="3">
-            <a:schemeClr val="accent1"/>
-          </a:fillRef>
-          <a:effectRef idx="2">
-            <a:schemeClr val="accent1"/>
-          </a:effectRef>
-          <a:fontRef idx="minor">
-            <a:schemeClr val="lt1"/>
-          </a:fontRef>
-        </p:style>
-        <p:txBody>
-          <a:bodyPr rtlCol="0" anchor="ctr"/>
-          <a:lstStyle/>
-          <a:p>
-            <a:pPr algn="ctr"/>
-          </a:p>
-        </p:txBody>
-      </p:sp>
-      <p:sp>
-        <p:nvSpPr>
-          <p:cNvPr id="7" name="Rectangle 6"/>
-          <p:cNvSpPr/>
-          <p:nvPr/>
-        </p:nvSpPr>
-        <p:spPr>
-          <a:xfrm>
-            <a:off x="609600" y="2900000"/>
-            <a:ext cx="38100" cy="1076325"/>
-          </a:xfrm>
-          <a:prstGeom prst="rect">
-            <a:avLst/>
-          </a:prstGeom>
-          <a:solidFill>
-            <a:srgbClr val="16A34A"/>
-          </a:solidFill>
-          <a:ln>
-            <a:noFill/>
-          </a:ln>
-          <a:effectLst/>
-        </p:spPr>
-        <p:style>
-          <a:lnRef idx="1">
-            <a:schemeClr val="accent1"/>
-          </a:lnRef>
-          <a:fillRef idx="3">
-            <a:schemeClr val="accent1"/>
-          </a:fillRef>
-          <a:effectRef idx="2">
-            <a:schemeClr val="accent1"/>
-          </a:effectRef>
-          <a:fontRef idx="minor">
-            <a:schemeClr val="lt1"/>
-          </a:fontRef>
-        </p:style>
-        <p:txBody>
-          <a:bodyPr rtlCol="0" anchor="ctr"/>
-          <a:lstStyle/>
-          <a:p>
-            <a:pPr algn="ctr"/>
-          </a:p>
-        </p:txBody>
-      </p:sp>
-      <p:sp>
-        <p:nvSpPr>
-          <p:cNvPr id="17" name="TextBox 16"/>
-          <p:cNvSpPr txBox="1"/>
-          <p:nvPr/>
-        </p:nvSpPr>
-        <p:spPr>
-          <a:xfrm>
-            <a:off x="876300" y="3090500"/>
-            <a:ext cx="10572800" cy="219075"/>
-          </a:xfrm>
-          <a:prstGeom prst="rect">
-            <a:avLst/>
-          </a:prstGeom>
-          <a:noFill/>
-        </p:spPr>
-        <p:txBody>
-          <a:bodyPr wrap="none" lIns="0" rIns="0" tIns="0" bIns="0" anchor="t">
-            <a:spAutoFit/>
-          </a:bodyPr>
-          <a:lstStyle/>
-          <a:p>
-            <a:pPr algn="l"/>
-            <a:r>
-              <a:rPr b="1" sz="1350" i="0" u="none">
-                <a:solidFill>
-                  <a:srgbClr val="0F172A"/>
-                </a:solidFill>
-                <a:latin typeface="Space Grotesk"/>
-              </a:rPr>
-              <a:t>Método generalizable</a:t>
-            </a:r>
-          </a:p>
-        </p:txBody>
-      </p:sp>
-      <p:sp>
-        <p:nvSpPr>
-          <p:cNvPr id="18" name="TextBox 17"/>
-          <p:cNvSpPr txBox="1"/>
-          <p:nvPr/>
-        </p:nvSpPr>
-        <p:spPr>
-          <a:xfrm>
-            <a:off x="876300" y="3347675"/>
-            <a:ext cx="10572800" cy="438150"/>
-          </a:xfrm>
-          <a:prstGeom prst="rect">
-            <a:avLst/>
-          </a:prstGeom>
-          <a:noFill/>
-        </p:spPr>
-        <p:txBody>
-          <a:bodyPr wrap="square" lIns="0" rIns="0" tIns="0" bIns="0" anchor="t">
-            <a:spAutoFit/>
-          </a:bodyPr>
-          <a:lstStyle/>
-          <a:p>
-            <a:pPr algn="l"/>
-            <a:r>
-              <a:rPr b="0" sz="1350" i="0" u="none">
-                <a:solidFill>
-                  <a:srgbClr val="64748B"/>
-                </a:solidFill>
-                <a:latin typeface="Plus Jakarta Sans"/>
-              </a:rPr>
-              <a:t>La cúbica local (±6 semanas alrededor del pico) detecta el pico en las 3 canciones, y la regla a &lt; 0 avisa cuándo el ajuste global no sirve.</a:t>
-            </a:r>
-          </a:p>
-        </p:txBody>
-      </p:sp>
-    </p:spTree>
-  </p:cSld>
-  <p:clrMapOvr>
-    <a:masterClrMapping/>
-  </p:clrMapOvr>
-</p:sld>
-</file>
-
-<file path=ppt/slides/slide14.xml><?xml version="1.0" encoding="utf-8"?>
 <p:sld xmlns:a="http://schemas.openxmlformats.org/drawingml/2006/main" xmlns:p="http://schemas.openxmlformats.org/presentationml/2006/main" xmlns:r="http://schemas.openxmlformats.org/officeDocument/2006/relationships">
   <p:cSld>
     <p:bg>
@@ -6175,7 +5569,7 @@
 </p:sld>
 </file>
 
-<file path=ppt/slides/slide15.xml><?xml version="1.0" encoding="utf-8"?>
+<file path=ppt/slides/slide13.xml><?xml version="1.0" encoding="utf-8"?>
 <p:sld xmlns:a="http://schemas.openxmlformats.org/drawingml/2006/main" xmlns:p="http://schemas.openxmlformats.org/presentationml/2006/main" xmlns:r="http://schemas.openxmlformats.org/officeDocument/2006/relationships">
   <p:cSld>
     <p:bg>
@@ -7674,7 +7068,7 @@
         <p:spPr>
           <a:xfrm>
             <a:off x="6553200" y="5151983"/>
-            <a:ext cx="5638800" cy="219075"/>
+            <a:ext cx="4754880" cy="219075"/>
           </a:xfrm>
           <a:prstGeom prst="rect">
             <a:avLst/>
@@ -7695,7 +7089,7 @@
                 </a:solidFill>
                 <a:latin typeface="Plus Jakarta Sans"/>
               </a:rPr>
-              <a:t>Un modelo continuo para estimar fechas, ritmos y capacidad.</a:t>
+              <a:t>Estimar cuándo se alcanza una meta de demanda.</a:t>
             </a:r>
           </a:p>
         </p:txBody>
@@ -7750,30 +7144,6 @@
           </a:prstGeom>
         </p:spPr>
       </p:pic>
-      <p:pic>
-        <p:nvPicPr>
-          <p:cNvPr id="3" name="Picture 2" descr="image.png"/>
-          <p:cNvPicPr>
-            <a:picLocks noChangeAspect="1"/>
-          </p:cNvPicPr>
-          <p:nvPr/>
-        </p:nvPicPr>
-        <p:blipFill>
-          <a:blip r:embed="rId3"/>
-          <a:stretch>
-            <a:fillRect/>
-          </a:stretch>
-        </p:blipFill>
-        <p:spPr>
-          <a:xfrm>
-            <a:off x="914400" y="2123033"/>
-            <a:ext cx="10363200" cy="3048000"/>
-          </a:xfrm>
-          <a:prstGeom prst="rect">
-            <a:avLst/>
-          </a:prstGeom>
-        </p:spPr>
-      </p:pic>
       <p:sp>
         <p:nvSpPr>
           <p:cNvPr id="4" name="TextBox 3"/>
@@ -7936,111 +7306,30 @@
           </a:p>
         </p:txBody>
       </p:sp>
-      <p:sp>
-        <p:nvSpPr>
-          <p:cNvPr id="8" name="TextBox 7"/>
-          <p:cNvSpPr txBox="1"/>
-          <p:nvPr/>
-        </p:nvSpPr>
-        <p:spPr>
-          <a:xfrm>
-            <a:off x="7726680" y="883890"/>
-            <a:ext cx="1124712" cy="171450"/>
-          </a:xfrm>
-          <a:prstGeom prst="rect">
-            <a:avLst/>
-          </a:prstGeom>
-          <a:noFill/>
-        </p:spPr>
-        <p:txBody>
-          <a:bodyPr wrap="none" lIns="0" rIns="0" tIns="0" bIns="0" anchor="t">
-            <a:spAutoFit/>
-          </a:bodyPr>
-          <a:lstStyle/>
-          <a:p>
-            <a:pPr algn="l"/>
-            <a:r>
-              <a:rPr b="1" sz="1050" i="0" u="none">
-                <a:solidFill>
-                  <a:srgbClr val="E11D48"/>
-                </a:solidFill>
-                <a:latin typeface="Plus Jakarta Sans"/>
-              </a:rPr>
-              <a:t>Datos reales</a:t>
-            </a:r>
-          </a:p>
-        </p:txBody>
-      </p:sp>
-      <p:sp>
-        <p:nvSpPr>
-          <p:cNvPr id="9" name="TextBox 8"/>
-          <p:cNvSpPr txBox="1"/>
-          <p:nvPr/>
-        </p:nvSpPr>
-        <p:spPr>
-          <a:xfrm>
-            <a:off x="9171432" y="883890"/>
-            <a:ext cx="1207007" cy="171450"/>
-          </a:xfrm>
-          <a:prstGeom prst="rect">
-            <a:avLst/>
-          </a:prstGeom>
-          <a:noFill/>
-        </p:spPr>
-        <p:txBody>
-          <a:bodyPr wrap="none" lIns="0" rIns="0" tIns="0" bIns="0" anchor="t">
-            <a:spAutoFit/>
-          </a:bodyPr>
-          <a:lstStyle/>
-          <a:p>
-            <a:pPr algn="l"/>
-            <a:r>
-              <a:rPr b="1" sz="1050" i="0" u="none">
-                <a:solidFill>
-                  <a:srgbClr val="0F172A"/>
-                </a:solidFill>
-                <a:latin typeface="Plus Jakarta Sans"/>
-              </a:rPr>
-              <a:t>Ajuste cúbico</a:t>
-            </a:r>
-          </a:p>
-        </p:txBody>
-      </p:sp>
-      <p:sp>
-        <p:nvSpPr>
-          <p:cNvPr id="10" name="TextBox 9"/>
-          <p:cNvSpPr txBox="1"/>
-          <p:nvPr/>
-        </p:nvSpPr>
-        <p:spPr>
-          <a:xfrm>
-            <a:off x="10698480" y="883890"/>
-            <a:ext cx="877824" cy="171450"/>
-          </a:xfrm>
-          <a:prstGeom prst="rect">
-            <a:avLst/>
-          </a:prstGeom>
-          <a:noFill/>
-        </p:spPr>
-        <p:txBody>
-          <a:bodyPr wrap="none" lIns="0" rIns="0" tIns="0" bIns="0" anchor="t">
-            <a:spAutoFit/>
-          </a:bodyPr>
-          <a:lstStyle/>
-          <a:p>
-            <a:pPr algn="l"/>
-            <a:r>
-              <a:rPr b="1" sz="1050" i="0" u="none">
-                <a:solidFill>
-                  <a:srgbClr val="0D9488"/>
-                </a:solidFill>
-                <a:latin typeface="Plus Jakarta Sans"/>
-              </a:rPr>
-              <a:t>Trazadora</a:t>
-            </a:r>
-          </a:p>
-        </p:txBody>
-      </p:sp>
+      <p:pic>
+        <p:nvPicPr>
+          <p:cNvPr id="8" name="Picture 7" descr="grafico_1_ajuste_curva_streams.png"/>
+          <p:cNvPicPr>
+            <a:picLocks noChangeAspect="1"/>
+          </p:cNvPicPr>
+          <p:nvPr/>
+        </p:nvPicPr>
+        <p:blipFill>
+          <a:blip r:embed="rId4"/>
+          <a:stretch>
+            <a:fillRect/>
+          </a:stretch>
+        </p:blipFill>
+        <p:spPr>
+          <a:xfrm>
+            <a:off x="777240" y="1353136"/>
+            <a:ext cx="10634472" cy="4499199"/>
+          </a:xfrm>
+          <a:prstGeom prst="rect">
+            <a:avLst/>
+          </a:prstGeom>
+        </p:spPr>
+      </p:pic>
     </p:spTree>
   </p:cSld>
   <p:clrMapOvr>
@@ -8121,8 +7410,8 @@
         </p:nvSpPr>
         <p:spPr>
           <a:xfrm>
-            <a:off x="609600" y="4128045"/>
-            <a:ext cx="3505200" cy="1323975"/>
+            <a:off x="609600" y="4617720"/>
+            <a:ext cx="3505200" cy="1261872"/>
           </a:xfrm>
           <a:prstGeom prst="roundRect">
             <a:avLst>
@@ -8167,8 +7456,8 @@
         </p:nvSpPr>
         <p:spPr>
           <a:xfrm>
-            <a:off x="4343400" y="4128045"/>
-            <a:ext cx="3505200" cy="1323975"/>
+            <a:off x="4343400" y="4617720"/>
+            <a:ext cx="3505200" cy="1261872"/>
           </a:xfrm>
           <a:prstGeom prst="roundRect">
             <a:avLst>
@@ -8213,8 +7502,8 @@
         </p:nvSpPr>
         <p:spPr>
           <a:xfrm>
-            <a:off x="8077200" y="4128045"/>
-            <a:ext cx="3505200" cy="1323975"/>
+            <a:off x="8077200" y="4617720"/>
+            <a:ext cx="3505200" cy="1261872"/>
           </a:xfrm>
           <a:prstGeom prst="roundRect">
             <a:avLst>
@@ -8314,13 +7603,13 @@
               </a:lnSpc>
             </a:pPr>
             <a:r>
-              <a:rPr b="1" sz="2550" i="0" u="none">
+              <a:rPr b="1" sz="2800" i="0" u="none">
                 <a:solidFill>
                   <a:srgbClr val="0F172A"/>
                 </a:solidFill>
                 <a:latin typeface="Space Grotesk"/>
               </a:rPr>
-              <a:t>Ajuste de Curvas por Mínimos Cuadrados</a:t>
+              <a:t>Interpolación de Newton (diferencias divididas)</a:t>
             </a:r>
           </a:p>
         </p:txBody>
@@ -8355,7 +7644,7 @@
                 </a:solidFill>
                 <a:latin typeface="Plus Jakarta Sans"/>
               </a:rPr>
-              <a:t>MODELO CONTINUO CÚBICO OBTENIDO</a:t>
+              <a:t>POLINOMIO P(t) DE GRADO 3 · S(t) EN MILLONES</a:t>
             </a:r>
           </a:p>
         </p:txBody>
@@ -8368,8 +7657,8 @@
         </p:nvSpPr>
         <p:spPr>
           <a:xfrm>
-            <a:off x="990600" y="1931640"/>
-            <a:ext cx="11201400" cy="323850"/>
+            <a:off x="987552" y="1883664"/>
+            <a:ext cx="10241280" cy="576072"/>
           </a:xfrm>
           <a:prstGeom prst="rect">
             <a:avLst/>
@@ -8384,13 +7673,14 @@
           <a:p>
             <a:pPr algn="l"/>
             <a:r>
-              <a:rPr b="1" sz="1950" i="0" u="none">
+              <a:rPr b="1" sz="1900" i="0" u="none">
                 <a:solidFill>
                   <a:srgbClr val="F8FAFC"/>
                 </a:solidFill>
                 <a:latin typeface="Space Grotesk"/>
               </a:rPr>
-              <a:t>S(t) = -0.000839 · t³ + 0.076977 · t² + 1.081162 · t + 2.072898</a:t>
+              <a:t>P(t) = 96.349 + 3.25351(t−34) − 0.05879(t−34)(t−35)
+          − 0.009340(t−34)(t−35)(t−36)</a:t>
             </a:r>
           </a:p>
         </p:txBody>
@@ -8403,8 +7693,8 @@
         </p:nvSpPr>
         <p:spPr>
           <a:xfrm>
-            <a:off x="990600" y="2407890"/>
-            <a:ext cx="11201400" cy="200025"/>
+            <a:off x="987552" y="2551176"/>
+            <a:ext cx="10241280" cy="237744"/>
           </a:xfrm>
           <a:prstGeom prst="rect">
             <a:avLst/>
@@ -8419,81 +7709,48 @@
           <a:p>
             <a:pPr algn="l"/>
             <a:r>
-              <a:rPr b="0" sz="1200" i="0" u="none">
+              <a:rPr b="0" sz="1400" i="0" u="none">
                 <a:solidFill>
                   <a:srgbClr val="94A3B8"/>
                 </a:solidFill>
                 <a:latin typeface="Plus Jakarta Sans"/>
               </a:rPr>
-              <a:t>Permite representar la concavidad de aceleración inicial y la posterior estabilización anual.</a:t>
-            </a:r>
-          </a:p>
-        </p:txBody>
-      </p:sp>
-      <p:sp>
-        <p:nvSpPr>
-          <p:cNvPr id="40" name="Gauss"/>
-          <p:cNvSpPr txBox="1"/>
-          <p:nvPr/>
-        </p:nvSpPr>
-        <p:spPr>
-          <a:xfrm>
-            <a:off x="612648" y="3200400"/>
-            <a:ext cx="10972800" cy="548640"/>
-          </a:xfrm>
-          <a:prstGeom prst="rect">
-            <a:avLst/>
-          </a:prstGeom>
-          <a:noFill/>
-        </p:spPr>
-        <p:txBody>
-          <a:bodyPr wrap="square" lIns="0" rIns="0" tIns="0" bIns="0" anchor="t"/>
+              <a:t>Cuatro datos cercanos a la meta permiten seguir la curvatura entre las mediciones.</a:t>
+            </a:r>
+          </a:p>
+        </p:txBody>
+      </p:sp>
+      <p:sp>
+        <p:nvSpPr>
+          <p:cNvPr id="11" name="TextBox 10"/>
+          <p:cNvSpPr txBox="1"/>
+          <p:nvPr/>
+        </p:nvSpPr>
+        <p:spPr>
+          <a:xfrm>
+            <a:off x="838200" y="4850421"/>
+            <a:ext cx="3063240" cy="171450"/>
+          </a:xfrm>
+          <a:prstGeom prst="rect">
+            <a:avLst/>
+          </a:prstGeom>
+          <a:noFill/>
+        </p:spPr>
+        <p:txBody>
+          <a:bodyPr wrap="none" lIns="0" rIns="0" tIns="0" bIns="0" anchor="t">
+            <a:spAutoFit/>
+          </a:bodyPr>
           <a:lstStyle/>
           <a:p>
             <a:pPr algn="l"/>
             <a:r>
-              <a:rPr b="0" sz="1200" i="0" u="none">
-                <a:solidFill>
-                  <a:srgbClr val="475569"/>
+              <a:rPr b="1" sz="1050" i="0" u="none">
+                <a:solidFill>
+                  <a:srgbClr val="64748B"/>
                 </a:solidFill>
                 <a:latin typeface="Plus Jakarta Sans"/>
               </a:rPr>
-              <a:t>Las ecuaciones normales (sistema 4×4) se resolvieron con eliminación gaussiana programada a mano: triangulación y sustitución hacia atrás. Los coeficientes coinciden con NumPy hasta 10⁻¹².</a:t>
-            </a:r>
-          </a:p>
-        </p:txBody>
-      </p:sp>
-      <p:sp>
-        <p:nvSpPr>
-          <p:cNvPr id="11" name="TextBox 10"/>
-          <p:cNvSpPr txBox="1"/>
-          <p:nvPr/>
-        </p:nvSpPr>
-        <p:spPr>
-          <a:xfrm>
-            <a:off x="838200" y="4356645"/>
-            <a:ext cx="3810000" cy="171450"/>
-          </a:xfrm>
-          <a:prstGeom prst="rect">
-            <a:avLst/>
-          </a:prstGeom>
-          <a:noFill/>
-        </p:spPr>
-        <p:txBody>
-          <a:bodyPr wrap="none" lIns="0" rIns="0" tIns="0" bIns="0" anchor="t">
-            <a:spAutoFit/>
-          </a:bodyPr>
-          <a:lstStyle/>
-          <a:p>
-            <a:pPr algn="l"/>
-            <a:r>
-              <a:rPr b="1" sz="1050" i="0" u="none">
-                <a:solidFill>
-                  <a:srgbClr val="64748B"/>
-                </a:solidFill>
-                <a:latin typeface="Plus Jakarta Sans"/>
-              </a:rPr>
-              <a:t>BONDAD DE AJUSTE</a:t>
+              <a:t>DATOS CERCANOS</a:t>
             </a:r>
           </a:p>
         </p:txBody>
@@ -8506,8 +7763,8 @@
         </p:nvSpPr>
         <p:spPr>
           <a:xfrm>
-            <a:off x="838200" y="4585245"/>
-            <a:ext cx="3810000" cy="381000"/>
+            <a:off x="838200" y="5079021"/>
+            <a:ext cx="3063240" cy="381000"/>
           </a:xfrm>
           <a:prstGeom prst="rect">
             <a:avLst/>
@@ -8532,7 +7789,7 @@
                 </a:solidFill>
                 <a:latin typeface="Plus Jakarta Sans"/>
               </a:rPr>
-              <a:t>99.95%</a:t>
+              <a:t>4 datos</a:t>
             </a:r>
           </a:p>
         </p:txBody>
@@ -8545,8 +7802,8 @@
         </p:nvSpPr>
         <p:spPr>
           <a:xfrm>
-            <a:off x="838200" y="5023395"/>
-            <a:ext cx="3810000" cy="200025"/>
+            <a:off x="838200" y="5517171"/>
+            <a:ext cx="3063240" cy="200025"/>
           </a:xfrm>
           <a:prstGeom prst="rect">
             <a:avLst/>
@@ -8567,7 +7824,7 @@
                 </a:solidFill>
                 <a:latin typeface="Plus Jakarta Sans"/>
               </a:rPr>
-              <a:t>R² = 0.999533</a:t>
+              <a:t>Semanas 34, 35, 36 y 37</a:t>
             </a:r>
           </a:p>
         </p:txBody>
@@ -8580,8 +7837,8 @@
         </p:nvSpPr>
         <p:spPr>
           <a:xfrm>
-            <a:off x="4572000" y="4356645"/>
-            <a:ext cx="3810000" cy="171450"/>
+            <a:off x="4572000" y="4850421"/>
+            <a:ext cx="3063240" cy="171450"/>
           </a:xfrm>
           <a:prstGeom prst="rect">
             <a:avLst/>
@@ -8602,7 +7859,7 @@
                 </a:solidFill>
                 <a:latin typeface="Plus Jakarta Sans"/>
               </a:rPr>
-              <a:t>ERROR ESTÁNDAR</a:t>
+              <a:t>GRADO DEL POLINOMIO</a:t>
             </a:r>
           </a:p>
         </p:txBody>
@@ -8615,8 +7872,8 @@
         </p:nvSpPr>
         <p:spPr>
           <a:xfrm>
-            <a:off x="4572000" y="4585245"/>
-            <a:ext cx="3810000" cy="381000"/>
+            <a:off x="4572000" y="5079021"/>
+            <a:ext cx="3063240" cy="381000"/>
           </a:xfrm>
           <a:prstGeom prst="rect">
             <a:avLst/>
@@ -8641,7 +7898,7 @@
                 </a:solidFill>
                 <a:latin typeface="Plus Jakarta Sans"/>
               </a:rPr>
-              <a:t>0.927 M</a:t>
+              <a:t>3</a:t>
             </a:r>
           </a:p>
         </p:txBody>
@@ -8654,8 +7911,8 @@
         </p:nvSpPr>
         <p:spPr>
           <a:xfrm>
-            <a:off x="4572000" y="5023395"/>
-            <a:ext cx="3810000" cy="200025"/>
+            <a:off x="4572000" y="5517171"/>
+            <a:ext cx="3063240" cy="200025"/>
           </a:xfrm>
           <a:prstGeom prst="rect">
             <a:avLst/>
@@ -8676,7 +7933,7 @@
                 </a:solidFill>
                 <a:latin typeface="Plus Jakarta Sans"/>
               </a:rPr>
-              <a:t>S_y/x de estimación</a:t>
+              <a:t>Pasa exactamente por los datos.</a:t>
             </a:r>
           </a:p>
         </p:txBody>
@@ -8689,8 +7946,8 @@
         </p:nvSpPr>
         <p:spPr>
           <a:xfrm>
-            <a:off x="8305800" y="4356645"/>
-            <a:ext cx="3810000" cy="171450"/>
+            <a:off x="8305800" y="4850421"/>
+            <a:ext cx="3063240" cy="171450"/>
           </a:xfrm>
           <a:prstGeom prst="rect">
             <a:avLst/>
@@ -8711,7 +7968,7 @@
                 </a:solidFill>
                 <a:latin typeface="Plus Jakarta Sans"/>
               </a:rPr>
-              <a:t>SUMA DE CUADRADOS</a:t>
+              <a:t>¿POR QUÉ NO LOS 47?</a:t>
             </a:r>
           </a:p>
         </p:txBody>
@@ -8724,8 +7981,8 @@
         </p:nvSpPr>
         <p:spPr>
           <a:xfrm>
-            <a:off x="8305800" y="4585245"/>
-            <a:ext cx="3810000" cy="381000"/>
+            <a:off x="8305800" y="5079021"/>
+            <a:ext cx="3063240" cy="381000"/>
           </a:xfrm>
           <a:prstGeom prst="rect">
             <a:avLst/>
@@ -8750,7 +8007,7 @@
                 </a:solidFill>
                 <a:latin typeface="Plus Jakarta Sans"/>
               </a:rPr>
-              <a:t>36.94</a:t>
+              <a:t>Grado 46</a:t>
             </a:r>
           </a:p>
         </p:txBody>
@@ -8763,8 +8020,8 @@
         </p:nvSpPr>
         <p:spPr>
           <a:xfrm>
-            <a:off x="8305800" y="5023395"/>
-            <a:ext cx="3810000" cy="200025"/>
+            <a:off x="8305800" y="5517171"/>
+            <a:ext cx="3063240" cy="200025"/>
           </a:xfrm>
           <a:prstGeom prst="rect">
             <a:avLst/>
@@ -8785,11 +8042,571 @@
                 </a:solidFill>
                 <a:latin typeface="Plus Jakarta Sans"/>
               </a:rPr>
-              <a:t>S_r de los residuos</a:t>
-            </a:r>
-          </a:p>
-        </p:txBody>
-      </p:sp>
+              <a:t>Con tantos puntos puede oscilar.</a:t>
+            </a:r>
+          </a:p>
+        </p:txBody>
+      </p:sp>
+      <p:graphicFrame>
+        <p:nvGraphicFramePr>
+          <p:cNvPr id="20" name="Table 19"/>
+          <p:cNvGraphicFramePr>
+            <a:graphicFrameLocks noGrp="1"/>
+          </p:cNvGraphicFramePr>
+          <p:nvPr/>
+        </p:nvGraphicFramePr>
+        <p:xfrm>
+          <a:off x="822960" y="3072384"/>
+          <a:ext cx="10533888" cy="1280160"/>
+        </p:xfrm>
+        <a:graphic>
+          <a:graphicData uri="http://schemas.openxmlformats.org/drawingml/2006/table">
+            <a:tbl>
+              <a:tblPr firstRow="1" bandRow="1">
+                <a:tableStyleId>{5C22544A-7EE6-4342-B048-85BDC9FD1C3A}</a:tableStyleId>
+              </a:tblPr>
+              <a:tblGrid>
+                <a:gridCol w="914400"/>
+                <a:gridCol w="2103120"/>
+                <a:gridCol w="2505456"/>
+                <a:gridCol w="2505456"/>
+                <a:gridCol w="2505456"/>
+              </a:tblGrid>
+              <a:tr h="256032">
+                <a:tc>
+                  <a:txBody>
+                    <a:bodyPr/>
+                    <a:lstStyle/>
+                    <a:p>
+                      <a:pPr algn="ctr"/>
+                      <a:r>
+                        <a:rPr sz="1300">
+                          <a:solidFill>
+                            <a:srgbClr val="FFFFFF"/>
+                          </a:solidFill>
+                          <a:latin typeface="Aptos"/>
+                        </a:rPr>
+                        <a:t>t</a:t>
+                      </a:r>
+                    </a:p>
+                  </a:txBody>
+                  <a:tcPr marT="22860" marB="22860">
+                    <a:solidFill>
+                      <a:srgbClr val="101829"/>
+                    </a:solidFill>
+                  </a:tcPr>
+                </a:tc>
+                <a:tc>
+                  <a:txBody>
+                    <a:bodyPr/>
+                    <a:lstStyle/>
+                    <a:p>
+                      <a:pPr algn="ctr"/>
+                      <a:r>
+                        <a:rPr sz="1300">
+                          <a:solidFill>
+                            <a:srgbClr val="FFFFFF"/>
+                          </a:solidFill>
+                          <a:latin typeface="Aptos"/>
+                        </a:rPr>
+                        <a:t>S(t) [M]</a:t>
+                      </a:r>
+                    </a:p>
+                  </a:txBody>
+                  <a:tcPr marT="22860" marB="22860">
+                    <a:solidFill>
+                      <a:srgbClr val="101829"/>
+                    </a:solidFill>
+                  </a:tcPr>
+                </a:tc>
+                <a:tc>
+                  <a:txBody>
+                    <a:bodyPr/>
+                    <a:lstStyle/>
+                    <a:p>
+                      <a:pPr algn="ctr"/>
+                      <a:r>
+                        <a:rPr sz="1300">
+                          <a:solidFill>
+                            <a:srgbClr val="FFFFFF"/>
+                          </a:solidFill>
+                          <a:latin typeface="Aptos"/>
+                        </a:rPr>
+                        <a:t>1ra diferencia</a:t>
+                      </a:r>
+                    </a:p>
+                  </a:txBody>
+                  <a:tcPr marT="22860" marB="22860">
+                    <a:solidFill>
+                      <a:srgbClr val="101829"/>
+                    </a:solidFill>
+                  </a:tcPr>
+                </a:tc>
+                <a:tc>
+                  <a:txBody>
+                    <a:bodyPr/>
+                    <a:lstStyle/>
+                    <a:p>
+                      <a:pPr algn="ctr"/>
+                      <a:r>
+                        <a:rPr sz="1300">
+                          <a:solidFill>
+                            <a:srgbClr val="FFFFFF"/>
+                          </a:solidFill>
+                          <a:latin typeface="Aptos"/>
+                        </a:rPr>
+                        <a:t>2da diferencia</a:t>
+                      </a:r>
+                    </a:p>
+                  </a:txBody>
+                  <a:tcPr marT="22860" marB="22860">
+                    <a:solidFill>
+                      <a:srgbClr val="101829"/>
+                    </a:solidFill>
+                  </a:tcPr>
+                </a:tc>
+                <a:tc>
+                  <a:txBody>
+                    <a:bodyPr/>
+                    <a:lstStyle/>
+                    <a:p>
+                      <a:pPr algn="ctr"/>
+                      <a:r>
+                        <a:rPr sz="1300">
+                          <a:solidFill>
+                            <a:srgbClr val="FFFFFF"/>
+                          </a:solidFill>
+                          <a:latin typeface="Aptos"/>
+                        </a:rPr>
+                        <a:t>3ra diferencia</a:t>
+                      </a:r>
+                    </a:p>
+                  </a:txBody>
+                  <a:tcPr marT="22860" marB="22860">
+                    <a:solidFill>
+                      <a:srgbClr val="101829"/>
+                    </a:solidFill>
+                  </a:tcPr>
+                </a:tc>
+              </a:tr>
+              <a:tr h="256032">
+                <a:tc>
+                  <a:txBody>
+                    <a:bodyPr/>
+                    <a:lstStyle/>
+                    <a:p>
+                      <a:pPr algn="ctr"/>
+                      <a:r>
+                        <a:rPr sz="1300">
+                          <a:solidFill>
+                            <a:srgbClr val="172033"/>
+                          </a:solidFill>
+                          <a:latin typeface="Aptos"/>
+                        </a:rPr>
+                        <a:t>34</a:t>
+                      </a:r>
+                    </a:p>
+                  </a:txBody>
+                  <a:tcPr marT="22860" marB="22860">
+                    <a:solidFill>
+                      <a:srgbClr val="F4F7FA"/>
+                    </a:solidFill>
+                  </a:tcPr>
+                </a:tc>
+                <a:tc>
+                  <a:txBody>
+                    <a:bodyPr/>
+                    <a:lstStyle/>
+                    <a:p>
+                      <a:pPr algn="ctr"/>
+                      <a:r>
+                        <a:rPr sz="1300">
+                          <a:solidFill>
+                            <a:srgbClr val="172033"/>
+                          </a:solidFill>
+                          <a:latin typeface="Aptos"/>
+                        </a:rPr>
+                        <a:t>96.349</a:t>
+                      </a:r>
+                    </a:p>
+                  </a:txBody>
+                  <a:tcPr marT="22860" marB="22860">
+                    <a:solidFill>
+                      <a:srgbClr val="F4F7FA"/>
+                    </a:solidFill>
+                  </a:tcPr>
+                </a:tc>
+                <a:tc>
+                  <a:txBody>
+                    <a:bodyPr/>
+                    <a:lstStyle/>
+                    <a:p>
+                      <a:pPr algn="ctr"/>
+                      <a:r>
+                        <a:rPr sz="1300">
+                          <a:solidFill>
+                            <a:srgbClr val="172033"/>
+                          </a:solidFill>
+                          <a:latin typeface="Aptos"/>
+                        </a:rPr>
+                        <a:t>3.25351</a:t>
+                      </a:r>
+                    </a:p>
+                  </a:txBody>
+                  <a:tcPr marT="22860" marB="22860">
+                    <a:solidFill>
+                      <a:srgbClr val="F4F7FA"/>
+                    </a:solidFill>
+                  </a:tcPr>
+                </a:tc>
+                <a:tc>
+                  <a:txBody>
+                    <a:bodyPr/>
+                    <a:lstStyle/>
+                    <a:p>
+                      <a:pPr algn="ctr"/>
+                      <a:r>
+                        <a:rPr sz="1300">
+                          <a:solidFill>
+                            <a:srgbClr val="172033"/>
+                          </a:solidFill>
+                          <a:latin typeface="Aptos"/>
+                        </a:rPr>
+                        <a:t>−0.05879</a:t>
+                      </a:r>
+                    </a:p>
+                  </a:txBody>
+                  <a:tcPr marT="22860" marB="22860">
+                    <a:solidFill>
+                      <a:srgbClr val="F4F7FA"/>
+                    </a:solidFill>
+                  </a:tcPr>
+                </a:tc>
+                <a:tc>
+                  <a:txBody>
+                    <a:bodyPr/>
+                    <a:lstStyle/>
+                    <a:p>
+                      <a:pPr algn="ctr"/>
+                      <a:r>
+                        <a:rPr sz="1300">
+                          <a:solidFill>
+                            <a:srgbClr val="172033"/>
+                          </a:solidFill>
+                          <a:latin typeface="Aptos"/>
+                        </a:rPr>
+                        <a:t>−0.00934</a:t>
+                      </a:r>
+                    </a:p>
+                  </a:txBody>
+                  <a:tcPr marT="22860" marB="22860">
+                    <a:solidFill>
+                      <a:srgbClr val="F4F7FA"/>
+                    </a:solidFill>
+                  </a:tcPr>
+                </a:tc>
+              </a:tr>
+              <a:tr h="256032">
+                <a:tc>
+                  <a:txBody>
+                    <a:bodyPr/>
+                    <a:lstStyle/>
+                    <a:p>
+                      <a:pPr algn="ctr"/>
+                      <a:r>
+                        <a:rPr sz="1300">
+                          <a:solidFill>
+                            <a:srgbClr val="172033"/>
+                          </a:solidFill>
+                          <a:latin typeface="Aptos"/>
+                        </a:rPr>
+                        <a:t>35</a:t>
+                      </a:r>
+                    </a:p>
+                  </a:txBody>
+                  <a:tcPr marT="22860" marB="22860">
+                    <a:solidFill>
+                      <a:srgbClr val="F4F7FA"/>
+                    </a:solidFill>
+                  </a:tcPr>
+                </a:tc>
+                <a:tc>
+                  <a:txBody>
+                    <a:bodyPr/>
+                    <a:lstStyle/>
+                    <a:p>
+                      <a:pPr algn="ctr"/>
+                      <a:r>
+                        <a:rPr sz="1300">
+                          <a:solidFill>
+                            <a:srgbClr val="172033"/>
+                          </a:solidFill>
+                          <a:latin typeface="Aptos"/>
+                        </a:rPr>
+                        <a:t>99.602</a:t>
+                      </a:r>
+                    </a:p>
+                  </a:txBody>
+                  <a:tcPr marT="22860" marB="22860">
+                    <a:solidFill>
+                      <a:srgbClr val="F4F7FA"/>
+                    </a:solidFill>
+                  </a:tcPr>
+                </a:tc>
+                <a:tc>
+                  <a:txBody>
+                    <a:bodyPr/>
+                    <a:lstStyle/>
+                    <a:p>
+                      <a:pPr algn="ctr"/>
+                      <a:r>
+                        <a:rPr sz="1300">
+                          <a:solidFill>
+                            <a:srgbClr val="172033"/>
+                          </a:solidFill>
+                          <a:latin typeface="Aptos"/>
+                        </a:rPr>
+                        <a:t>3.13594</a:t>
+                      </a:r>
+                    </a:p>
+                  </a:txBody>
+                  <a:tcPr marT="22860" marB="22860">
+                    <a:solidFill>
+                      <a:srgbClr val="F4F7FA"/>
+                    </a:solidFill>
+                  </a:tcPr>
+                </a:tc>
+                <a:tc>
+                  <a:txBody>
+                    <a:bodyPr/>
+                    <a:lstStyle/>
+                    <a:p>
+                      <a:pPr algn="ctr"/>
+                      <a:r>
+                        <a:rPr sz="1300">
+                          <a:solidFill>
+                            <a:srgbClr val="172033"/>
+                          </a:solidFill>
+                          <a:latin typeface="Aptos"/>
+                        </a:rPr>
+                        <a:t>−0.08681</a:t>
+                      </a:r>
+                    </a:p>
+                  </a:txBody>
+                  <a:tcPr marT="22860" marB="22860">
+                    <a:solidFill>
+                      <a:srgbClr val="F4F7FA"/>
+                    </a:solidFill>
+                  </a:tcPr>
+                </a:tc>
+                <a:tc>
+                  <a:txBody>
+                    <a:bodyPr/>
+                    <a:lstStyle/>
+                    <a:p>
+                      <a:pPr algn="ctr"/>
+                    </a:p>
+                  </a:txBody>
+                  <a:tcPr marT="22860" marB="22860">
+                    <a:solidFill>
+                      <a:srgbClr val="F4F7FA"/>
+                    </a:solidFill>
+                  </a:tcPr>
+                </a:tc>
+              </a:tr>
+              <a:tr h="256032">
+                <a:tc>
+                  <a:txBody>
+                    <a:bodyPr/>
+                    <a:lstStyle/>
+                    <a:p>
+                      <a:pPr algn="ctr"/>
+                      <a:r>
+                        <a:rPr sz="1300">
+                          <a:solidFill>
+                            <a:srgbClr val="172033"/>
+                          </a:solidFill>
+                          <a:latin typeface="Aptos"/>
+                        </a:rPr>
+                        <a:t>36</a:t>
+                      </a:r>
+                    </a:p>
+                  </a:txBody>
+                  <a:tcPr marT="22860" marB="22860">
+                    <a:solidFill>
+                      <a:srgbClr val="F4F7FA"/>
+                    </a:solidFill>
+                  </a:tcPr>
+                </a:tc>
+                <a:tc>
+                  <a:txBody>
+                    <a:bodyPr/>
+                    <a:lstStyle/>
+                    <a:p>
+                      <a:pPr algn="ctr"/>
+                      <a:r>
+                        <a:rPr sz="1300">
+                          <a:solidFill>
+                            <a:srgbClr val="172033"/>
+                          </a:solidFill>
+                          <a:latin typeface="Aptos"/>
+                        </a:rPr>
+                        <a:t>102.738</a:t>
+                      </a:r>
+                    </a:p>
+                  </a:txBody>
+                  <a:tcPr marT="22860" marB="22860">
+                    <a:solidFill>
+                      <a:srgbClr val="F4F7FA"/>
+                    </a:solidFill>
+                  </a:tcPr>
+                </a:tc>
+                <a:tc>
+                  <a:txBody>
+                    <a:bodyPr/>
+                    <a:lstStyle/>
+                    <a:p>
+                      <a:pPr algn="ctr"/>
+                      <a:r>
+                        <a:rPr sz="1300">
+                          <a:solidFill>
+                            <a:srgbClr val="172033"/>
+                          </a:solidFill>
+                          <a:latin typeface="Aptos"/>
+                        </a:rPr>
+                        <a:t>2.96232</a:t>
+                      </a:r>
+                    </a:p>
+                  </a:txBody>
+                  <a:tcPr marT="22860" marB="22860">
+                    <a:solidFill>
+                      <a:srgbClr val="F4F7FA"/>
+                    </a:solidFill>
+                  </a:tcPr>
+                </a:tc>
+                <a:tc>
+                  <a:txBody>
+                    <a:bodyPr/>
+                    <a:lstStyle/>
+                    <a:p>
+                      <a:pPr algn="ctr"/>
+                    </a:p>
+                  </a:txBody>
+                  <a:tcPr marT="22860" marB="22860">
+                    <a:solidFill>
+                      <a:srgbClr val="F4F7FA"/>
+                    </a:solidFill>
+                  </a:tcPr>
+                </a:tc>
+                <a:tc>
+                  <a:txBody>
+                    <a:bodyPr/>
+                    <a:lstStyle/>
+                    <a:p>
+                      <a:pPr algn="ctr"/>
+                    </a:p>
+                  </a:txBody>
+                  <a:tcPr marT="22860" marB="22860">
+                    <a:solidFill>
+                      <a:srgbClr val="F4F7FA"/>
+                    </a:solidFill>
+                  </a:tcPr>
+                </a:tc>
+              </a:tr>
+              <a:tr h="256032">
+                <a:tc>
+                  <a:txBody>
+                    <a:bodyPr/>
+                    <a:lstStyle/>
+                    <a:p>
+                      <a:pPr algn="ctr"/>
+                      <a:r>
+                        <a:rPr sz="1300">
+                          <a:solidFill>
+                            <a:srgbClr val="172033"/>
+                          </a:solidFill>
+                          <a:latin typeface="Aptos"/>
+                        </a:rPr>
+                        <a:t>37</a:t>
+                      </a:r>
+                    </a:p>
+                  </a:txBody>
+                  <a:tcPr marT="22860" marB="22860">
+                    <a:solidFill>
+                      <a:srgbClr val="F4F7FA"/>
+                    </a:solidFill>
+                  </a:tcPr>
+                </a:tc>
+                <a:tc>
+                  <a:txBody>
+                    <a:bodyPr/>
+                    <a:lstStyle/>
+                    <a:p>
+                      <a:pPr algn="ctr"/>
+                      <a:r>
+                        <a:rPr sz="1300">
+                          <a:solidFill>
+                            <a:srgbClr val="172033"/>
+                          </a:solidFill>
+                          <a:latin typeface="Aptos"/>
+                        </a:rPr>
+                        <a:t>105.700</a:t>
+                      </a:r>
+                    </a:p>
+                  </a:txBody>
+                  <a:tcPr marT="22860" marB="22860">
+                    <a:solidFill>
+                      <a:srgbClr val="F4F7FA"/>
+                    </a:solidFill>
+                  </a:tcPr>
+                </a:tc>
+                <a:tc>
+                  <a:txBody>
+                    <a:bodyPr/>
+                    <a:lstStyle/>
+                    <a:p>
+                      <a:pPr algn="ctr"/>
+                    </a:p>
+                  </a:txBody>
+                  <a:tcPr marT="22860" marB="22860">
+                    <a:solidFill>
+                      <a:srgbClr val="F4F7FA"/>
+                    </a:solidFill>
+                  </a:tcPr>
+                </a:tc>
+                <a:tc>
+                  <a:txBody>
+                    <a:bodyPr/>
+                    <a:lstStyle/>
+                    <a:p>
+                      <a:pPr algn="ctr"/>
+                    </a:p>
+                  </a:txBody>
+                  <a:tcPr marT="22860" marB="22860">
+                    <a:solidFill>
+                      <a:srgbClr val="F4F7FA"/>
+                    </a:solidFill>
+                  </a:tcPr>
+                </a:tc>
+                <a:tc>
+                  <a:txBody>
+                    <a:bodyPr/>
+                    <a:lstStyle/>
+                    <a:p>
+                      <a:pPr algn="ctr"/>
+                    </a:p>
+                  </a:txBody>
+                  <a:tcPr marT="22860" marB="22860">
+                    <a:solidFill>
+                      <a:srgbClr val="F4F7FA"/>
+                    </a:solidFill>
+                  </a:tcPr>
+                </a:tc>
+              </a:tr>
+            </a:tbl>
+          </a:graphicData>
+        </a:graphic>
+      </p:graphicFrame>
     </p:spTree>
   </p:cSld>
   <p:clrMapOvr>
@@ -9254,8 +9071,8 @@
         </p:nvSpPr>
         <p:spPr>
           <a:xfrm>
-            <a:off x="609600" y="1112490"/>
-            <a:ext cx="11582400" cy="228600"/>
+            <a:off x="612648" y="1170432"/>
+            <a:ext cx="10972800" cy="1033271"/>
           </a:xfrm>
           <a:prstGeom prst="rect">
             <a:avLst/>
@@ -9270,27 +9087,73 @@
           <a:p>
             <a:pPr algn="l"/>
             <a:r>
+              <a:rPr b="0" sz="1500" i="0" u="none">
+                <a:solidFill>
+                  <a:srgbClr val="64748B"/>
+                </a:solidFill>
+                <a:latin typeface="Plus Jakarta Sans"/>
+              </a:rPr>
+              <a:t>f(t) = P(t) − 100 = 0 · |Ea| &lt; 10⁻⁴ % (error relativo porcentual aproximado)
+f(35) = −0.3978 &lt; 0 &lt; f(36) = 2.7381
+Newton a mano: t₀ = 35, f′(35) = 3.2041, x₁ = 35 − (−0.3978)/3.2041 = 35.1242</a:t>
+            </a:r>
+          </a:p>
+        </p:txBody>
+      </p:sp>
+      <p:sp>
+        <p:nvSpPr>
+          <p:cNvPr id="13" name="TextBox 12"/>
+          <p:cNvSpPr txBox="1"/>
+          <p:nvPr/>
+        </p:nvSpPr>
+        <p:spPr>
+          <a:xfrm>
+            <a:off x="914400" y="3289845"/>
+            <a:ext cx="4663440" cy="219075"/>
+          </a:xfrm>
+          <a:prstGeom prst="rect">
+            <a:avLst/>
+          </a:prstGeom>
+          <a:noFill/>
+        </p:spPr>
+        <p:txBody>
+          <a:bodyPr wrap="none" lIns="0" rIns="0" tIns="0" bIns="0" anchor="t">
+            <a:spAutoFit/>
+          </a:bodyPr>
+          <a:lstStyle/>
+          <a:p>
+            <a:pPr algn="l"/>
+            <a:r>
               <a:rPr b="0" sz="1350" i="0" u="none">
                 <a:solidFill>
-                  <a:srgbClr val="64748B"/>
+                  <a:srgbClr val="334155"/>
                 </a:solidFill>
                 <a:latin typeface="Plus Jakarta Sans"/>
               </a:rPr>
-              <a:t>Planteo de raíz f(t) = S(t) - 100 = 0 con tolerancia exigida |Ea%| &lt; 10⁻⁴ %</a:t>
-            </a:r>
-          </a:p>
-        </p:txBody>
-      </p:sp>
-      <p:sp>
-        <p:nvSpPr>
-          <p:cNvPr id="13" name="TextBox 12"/>
-          <p:cNvSpPr txBox="1"/>
-          <p:nvPr/>
-        </p:nvSpPr>
-        <p:spPr>
-          <a:xfrm>
-            <a:off x="914400" y="3289845"/>
-            <a:ext cx="5905500" cy="219075"/>
+              <a:t>Intervalo inicial: [35, 36]</a:t>
+            </a:r>
+            <a:r>
+              <a:rPr b="1" sz="1350" i="0" u="none">
+                <a:solidFill>
+                  <a:srgbClr val="334155"/>
+                </a:solidFill>
+                <a:latin typeface="Plus Jakarta Sans"/>
+              </a:rPr>
+              <a:t/>
+            </a:r>
+          </a:p>
+        </p:txBody>
+      </p:sp>
+      <p:sp>
+        <p:nvSpPr>
+          <p:cNvPr id="14" name="TextBox 13"/>
+          <p:cNvSpPr txBox="1"/>
+          <p:nvPr/>
+        </p:nvSpPr>
+        <p:spPr>
+          <a:xfrm>
+            <a:off x="914400" y="4394745"/>
+            <a:ext cx="4663440" cy="219075"/>
           </a:xfrm>
           <a:prstGeom prst="rect">
             <a:avLst/>
@@ -9305,13 +9168,48 @@
           <a:p>
             <a:pPr algn="l"/>
             <a:r>
+              <a:rPr b="0" sz="1400" i="0" u="none">
+                <a:solidFill>
+                  <a:srgbClr val="475569"/>
+                </a:solidFill>
+                <a:latin typeface="Plus Jakarta Sans"/>
+              </a:rPr>
+              <a:t>Lineal. Requiere cambio de signo. Segura y lenta.</a:t>
+            </a:r>
+          </a:p>
+        </p:txBody>
+      </p:sp>
+      <p:sp>
+        <p:nvSpPr>
+          <p:cNvPr id="15" name="TextBox 14"/>
+          <p:cNvSpPr txBox="1"/>
+          <p:nvPr/>
+        </p:nvSpPr>
+        <p:spPr>
+          <a:xfrm>
+            <a:off x="6553200" y="3285083"/>
+            <a:ext cx="4663440" cy="228600"/>
+          </a:xfrm>
+          <a:prstGeom prst="rect">
+            <a:avLst/>
+          </a:prstGeom>
+          <a:noFill/>
+        </p:spPr>
+        <p:txBody>
+          <a:bodyPr wrap="none" lIns="0" rIns="0" tIns="0" bIns="0" anchor="t">
+            <a:spAutoFit/>
+          </a:bodyPr>
+          <a:lstStyle/>
+          <a:p>
+            <a:pPr algn="l"/>
+            <a:r>
               <a:rPr b="0" sz="1350" i="0" u="none">
                 <a:solidFill>
                   <a:srgbClr val="334155"/>
                 </a:solidFill>
                 <a:latin typeface="Plus Jakarta Sans"/>
               </a:rPr>
-              <a:t>Intervalo inicial: </a:t>
+              <a:t>Semilla inicial: t₀ = 35 semanas</a:t>
             </a:r>
             <a:r>
               <a:rPr b="1" sz="1350" i="0" u="none">
@@ -9320,21 +9218,21 @@
                 </a:solidFill>
                 <a:latin typeface="Plus Jakarta Sans"/>
               </a:rPr>
-              <a:t>[35.0, 36.0]</a:t>
-            </a:r>
-          </a:p>
-        </p:txBody>
-      </p:sp>
-      <p:sp>
-        <p:nvSpPr>
-          <p:cNvPr id="14" name="TextBox 13"/>
-          <p:cNvSpPr txBox="1"/>
-          <p:nvPr/>
-        </p:nvSpPr>
-        <p:spPr>
-          <a:xfrm>
-            <a:off x="914400" y="4394745"/>
-            <a:ext cx="5905500" cy="219075"/>
+              <a:t/>
+            </a:r>
+          </a:p>
+        </p:txBody>
+      </p:sp>
+      <p:sp>
+        <p:nvSpPr>
+          <p:cNvPr id="16" name="TextBox 15"/>
+          <p:cNvSpPr txBox="1"/>
+          <p:nvPr/>
+        </p:nvSpPr>
+        <p:spPr>
+          <a:xfrm>
+            <a:off x="6553200" y="4399508"/>
+            <a:ext cx="4663440" cy="219075"/>
           </a:xfrm>
           <a:prstGeom prst="rect">
             <a:avLst/>
@@ -9349,92 +9247,13 @@
           <a:p>
             <a:pPr algn="l"/>
             <a:r>
-              <a:rPr b="0" sz="1350" i="0" u="none">
+              <a:rPr b="0" sz="1400" i="0" u="none">
                 <a:solidFill>
                   <a:srgbClr val="475569"/>
                 </a:solidFill>
                 <a:latin typeface="Plus Jakarta Sans"/>
               </a:rPr>
-              <a:t>Convergencia lineal estable con factor 0.5.</a:t>
-            </a:r>
-          </a:p>
-        </p:txBody>
-      </p:sp>
-      <p:sp>
-        <p:nvSpPr>
-          <p:cNvPr id="15" name="TextBox 14"/>
-          <p:cNvSpPr txBox="1"/>
-          <p:nvPr/>
-        </p:nvSpPr>
-        <p:spPr>
-          <a:xfrm>
-            <a:off x="6553200" y="3285083"/>
-            <a:ext cx="5638800" cy="228600"/>
-          </a:xfrm>
-          <a:prstGeom prst="rect">
-            <a:avLst/>
-          </a:prstGeom>
-          <a:noFill/>
-        </p:spPr>
-        <p:txBody>
-          <a:bodyPr wrap="none" lIns="0" rIns="0" tIns="0" bIns="0" anchor="t">
-            <a:spAutoFit/>
-          </a:bodyPr>
-          <a:lstStyle/>
-          <a:p>
-            <a:pPr algn="l"/>
-            <a:r>
-              <a:rPr b="0" sz="1350" i="0" u="none">
-                <a:solidFill>
-                  <a:srgbClr val="334155"/>
-                </a:solidFill>
-                <a:latin typeface="Plus Jakarta Sans"/>
-              </a:rPr>
-              <a:t>Semilla inicial: </a:t>
-            </a:r>
-            <a:r>
-              <a:rPr b="1" sz="1350" i="0" u="none">
-                <a:solidFill>
-                  <a:srgbClr val="334155"/>
-                </a:solidFill>
-                <a:latin typeface="Plus Jakarta Sans"/>
-              </a:rPr>
-              <a:t>t₀ = 35.0 semanas</a:t>
-            </a:r>
-          </a:p>
-        </p:txBody>
-      </p:sp>
-      <p:sp>
-        <p:nvSpPr>
-          <p:cNvPr id="16" name="TextBox 15"/>
-          <p:cNvSpPr txBox="1"/>
-          <p:nvPr/>
-        </p:nvSpPr>
-        <p:spPr>
-          <a:xfrm>
-            <a:off x="6553200" y="4399508"/>
-            <a:ext cx="5638800" cy="219075"/>
-          </a:xfrm>
-          <a:prstGeom prst="rect">
-            <a:avLst/>
-          </a:prstGeom>
-          <a:noFill/>
-        </p:spPr>
-        <p:txBody>
-          <a:bodyPr wrap="none" lIns="0" rIns="0" tIns="0" bIns="0" anchor="t">
-            <a:spAutoFit/>
-          </a:bodyPr>
-          <a:lstStyle/>
-          <a:p>
-            <a:pPr algn="l"/>
-            <a:r>
-              <a:rPr b="0" sz="1350" i="0" u="none">
-                <a:solidFill>
-                  <a:srgbClr val="475569"/>
-                </a:solidFill>
-                <a:latin typeface="Plus Jakarta Sans"/>
-              </a:rPr>
-              <a:t>Convergencia cuadrática acelerada por tangentes.</a:t>
+              <a:t>Cuadrática. Requiere f′(t) y buen t₀. Rápida.</a:t>
             </a:r>
           </a:p>
         </p:txBody>
@@ -9588,7 +9407,7 @@
         <p:spPr>
           <a:xfrm>
             <a:off x="914400" y="4909095"/>
-            <a:ext cx="5905500" cy="219075"/>
+            <a:ext cx="4663440" cy="219075"/>
           </a:xfrm>
           <a:prstGeom prst="rect">
             <a:avLst/>
@@ -9609,7 +9428,7 @@
                 </a:solidFill>
                 <a:latin typeface="Plus Jakarta Sans"/>
               </a:rPr>
-              <a:t>Raíz de la regresión: t* = 35.520172 semanas</a:t>
+              <a:t>t* = 35.124481 semanas</a:t>
             </a:r>
           </a:p>
         </p:txBody>
@@ -9763,7 +9582,7 @@
         <p:spPr>
           <a:xfrm>
             <a:off x="6553200" y="4913858"/>
-            <a:ext cx="5638800" cy="219075"/>
+            <a:ext cx="4663440" cy="219075"/>
           </a:xfrm>
           <a:prstGeom prst="rect">
             <a:avLst/>
@@ -9784,7 +9603,42 @@
                 </a:solidFill>
                 <a:latin typeface="Plus Jakarta Sans"/>
               </a:rPr>
-              <a:t>Raíz de la regresión: t* = 35.520148 semanas</a:t>
+              <a:t>t* = 35.124460 semanas</a:t>
+            </a:r>
+          </a:p>
+        </p:txBody>
+      </p:sp>
+      <p:sp>
+        <p:nvSpPr>
+          <p:cNvPr id="12" name="TextBox 11"/>
+          <p:cNvSpPr txBox="1"/>
+          <p:nvPr/>
+        </p:nvSpPr>
+        <p:spPr>
+          <a:xfrm>
+            <a:off x="731520" y="5806440"/>
+            <a:ext cx="10789920" cy="365760"/>
+          </a:xfrm>
+          <a:prstGeom prst="rect">
+            <a:avLst/>
+          </a:prstGeom>
+          <a:noFill/>
+        </p:spPr>
+        <p:txBody>
+          <a:bodyPr wrap="none" lIns="0" rIns="0" tIns="0" bIns="0" anchor="t">
+            <a:spAutoFit/>
+          </a:bodyPr>
+          <a:lstStyle/>
+          <a:p>
+            <a:pPr algn="l"/>
+            <a:r>
+              <a:rPr b="0" sz="2300" i="0" u="none">
+                <a:solidFill>
+                  <a:srgbClr val="64748B"/>
+                </a:solidFill>
+                <a:latin typeface="Plus Jakarta Sans"/>
+              </a:rPr>
+              <a:t>Resultado: t* ≈ 35.12 semanas ≈ 28/09/2023</a:t>
             </a:r>
           </a:p>
         </p:txBody>
@@ -9817,185 +9671,106 @@
       <p:grpSpPr/>
       <p:sp>
         <p:nvSpPr>
-          <p:cNvPr id="2" name="Rounded Rectangle 1"/>
-          <p:cNvSpPr/>
-          <p:nvPr/>
-        </p:nvSpPr>
-        <p:spPr>
-          <a:xfrm>
-            <a:off x="609600" y="1341090"/>
-            <a:ext cx="10972800" cy="1571625"/>
-          </a:xfrm>
-          <a:prstGeom prst="roundRect">
-            <a:avLst>
-              <a:gd name="adj" fmla="val 9696"/>
-            </a:avLst>
-          </a:prstGeom>
-          <a:solidFill>
-            <a:srgbClr val="0F172A"/>
-          </a:solidFill>
-          <a:ln>
-            <a:noFill/>
-          </a:ln>
-          <a:effectLst/>
-        </p:spPr>
-        <p:style>
-          <a:lnRef idx="1">
-            <a:schemeClr val="accent1"/>
-          </a:lnRef>
-          <a:fillRef idx="3">
-            <a:schemeClr val="accent1"/>
-          </a:fillRef>
-          <a:effectRef idx="2">
-            <a:schemeClr val="accent1"/>
-          </a:effectRef>
-          <a:fontRef idx="minor">
-            <a:schemeClr val="lt1"/>
-          </a:fontRef>
-        </p:style>
-        <p:txBody>
-          <a:bodyPr rtlCol="0" anchor="ctr"/>
-          <a:lstStyle/>
-          <a:p>
-            <a:pPr algn="ctr"/>
-          </a:p>
-        </p:txBody>
-      </p:sp>
-      <p:sp>
-        <p:nvSpPr>
-          <p:cNvPr id="3" name="Rounded Rectangle 2"/>
-          <p:cNvSpPr/>
-          <p:nvPr/>
-        </p:nvSpPr>
-        <p:spPr>
-          <a:xfrm>
-            <a:off x="609600" y="4128045"/>
-            <a:ext cx="3505200" cy="1323975"/>
-          </a:xfrm>
-          <a:prstGeom prst="roundRect">
-            <a:avLst>
-              <a:gd name="adj" fmla="val 10071"/>
-            </a:avLst>
-          </a:prstGeom>
-          <a:solidFill>
-            <a:srgbClr val="F8FAFC"/>
-          </a:solidFill>
-          <a:ln>
-            <a:noFill/>
-          </a:ln>
-          <a:effectLst/>
-        </p:spPr>
-        <p:style>
-          <a:lnRef idx="1">
-            <a:schemeClr val="accent1"/>
-          </a:lnRef>
-          <a:fillRef idx="3">
-            <a:schemeClr val="accent1"/>
-          </a:fillRef>
-          <a:effectRef idx="2">
-            <a:schemeClr val="accent1"/>
-          </a:effectRef>
-          <a:fontRef idx="minor">
-            <a:schemeClr val="lt1"/>
-          </a:fontRef>
-        </p:style>
-        <p:txBody>
-          <a:bodyPr rtlCol="0" anchor="ctr"/>
-          <a:lstStyle/>
-          <a:p>
-            <a:pPr algn="ctr"/>
-          </a:p>
-        </p:txBody>
-      </p:sp>
-      <p:sp>
-        <p:nvSpPr>
-          <p:cNvPr id="4" name="Rounded Rectangle 3"/>
-          <p:cNvSpPr/>
-          <p:nvPr/>
-        </p:nvSpPr>
-        <p:spPr>
-          <a:xfrm>
-            <a:off x="4343400" y="4128045"/>
-            <a:ext cx="3505200" cy="1323975"/>
-          </a:xfrm>
-          <a:prstGeom prst="roundRect">
-            <a:avLst>
-              <a:gd name="adj" fmla="val 10071"/>
-            </a:avLst>
-          </a:prstGeom>
-          <a:solidFill>
-            <a:srgbClr val="F8FAFC"/>
-          </a:solidFill>
-          <a:ln>
-            <a:noFill/>
-          </a:ln>
-          <a:effectLst/>
-        </p:spPr>
-        <p:style>
-          <a:lnRef idx="1">
-            <a:schemeClr val="accent1"/>
-          </a:lnRef>
-          <a:fillRef idx="3">
-            <a:schemeClr val="accent1"/>
-          </a:fillRef>
-          <a:effectRef idx="2">
-            <a:schemeClr val="accent1"/>
-          </a:effectRef>
-          <a:fontRef idx="minor">
-            <a:schemeClr val="lt1"/>
-          </a:fontRef>
-        </p:style>
-        <p:txBody>
-          <a:bodyPr rtlCol="0" anchor="ctr"/>
-          <a:lstStyle/>
-          <a:p>
-            <a:pPr algn="ctr"/>
-          </a:p>
-        </p:txBody>
-      </p:sp>
-      <p:sp>
-        <p:nvSpPr>
-          <p:cNvPr id="5" name="Rounded Rectangle 4"/>
-          <p:cNvSpPr/>
-          <p:nvPr/>
-        </p:nvSpPr>
-        <p:spPr>
-          <a:xfrm>
-            <a:off x="8077200" y="4128045"/>
-            <a:ext cx="3505200" cy="1323975"/>
-          </a:xfrm>
-          <a:prstGeom prst="roundRect">
-            <a:avLst>
-              <a:gd name="adj" fmla="val 10071"/>
-            </a:avLst>
-          </a:prstGeom>
-          <a:solidFill>
-            <a:srgbClr val="F8FAFC"/>
-          </a:solidFill>
-          <a:ln>
-            <a:noFill/>
-          </a:ln>
-          <a:effectLst/>
-        </p:spPr>
-        <p:style>
-          <a:lnRef idx="1">
-            <a:schemeClr val="accent1"/>
-          </a:lnRef>
-          <a:fillRef idx="3">
-            <a:schemeClr val="accent1"/>
-          </a:fillRef>
-          <a:effectRef idx="2">
-            <a:schemeClr val="accent1"/>
-          </a:effectRef>
-          <a:fontRef idx="minor">
-            <a:schemeClr val="lt1"/>
-          </a:fontRef>
-        </p:style>
-        <p:txBody>
-          <a:bodyPr rtlCol="0" anchor="ctr"/>
-          <a:lstStyle/>
-          <a:p>
-            <a:pPr algn="ctr"/>
+          <p:cNvPr id="3" name="TextBox 2"/>
+          <p:cNvSpPr txBox="1"/>
+          <p:nvPr/>
+        </p:nvSpPr>
+        <p:spPr>
+          <a:xfrm>
+            <a:off x="609600" y="6200775"/>
+            <a:ext cx="6309360" cy="200025"/>
+          </a:xfrm>
+          <a:prstGeom prst="rect">
+            <a:avLst/>
+          </a:prstGeom>
+          <a:noFill/>
+        </p:spPr>
+        <p:txBody>
+          <a:bodyPr wrap="none" lIns="0" rIns="0" tIns="0" bIns="0" anchor="t">
+            <a:spAutoFit/>
+          </a:bodyPr>
+          <a:lstStyle/>
+          <a:p>
+            <a:pPr algn="l"/>
+            <a:r>
+              <a:rPr b="1" sz="1200" i="0" u="none">
+                <a:solidFill>
+                  <a:srgbClr val="0284C7"/>
+                </a:solidFill>
+                <a:latin typeface="Plus Jakarta Sans"/>
+              </a:rPr>
+              <a:t>Bisección: Siempre converge si hay cambio de signo (15 iteraciones).</a:t>
+            </a:r>
+          </a:p>
+        </p:txBody>
+      </p:sp>
+      <p:sp>
+        <p:nvSpPr>
+          <p:cNvPr id="4" name="TextBox 3"/>
+          <p:cNvSpPr txBox="1"/>
+          <p:nvPr/>
+        </p:nvSpPr>
+        <p:spPr>
+          <a:xfrm>
+            <a:off x="7124700" y="6200775"/>
+            <a:ext cx="5067300" cy="200025"/>
+          </a:xfrm>
+          <a:prstGeom prst="rect">
+            <a:avLst/>
+          </a:prstGeom>
+          <a:noFill/>
+        </p:spPr>
+        <p:txBody>
+          <a:bodyPr wrap="none" lIns="0" rIns="0" tIns="0" bIns="0" anchor="t">
+            <a:spAutoFit/>
+          </a:bodyPr>
+          <a:lstStyle/>
+          <a:p>
+            <a:pPr algn="l"/>
+            <a:r>
+              <a:rPr b="1" sz="1200" i="0" u="none">
+                <a:solidFill>
+                  <a:srgbClr val="E11D48"/>
+                </a:solidFill>
+                <a:latin typeface="Plus Jakarta Sans"/>
+              </a:rPr>
+              <a:t>Newton-Raphson: Convergencia cuadrática en solo 3 pasos.</a:t>
+            </a:r>
+          </a:p>
+        </p:txBody>
+      </p:sp>
+      <p:sp>
+        <p:nvSpPr>
+          <p:cNvPr id="5" name="TextBox 4"/>
+          <p:cNvSpPr txBox="1"/>
+          <p:nvPr/>
+        </p:nvSpPr>
+        <p:spPr>
+          <a:xfrm>
+            <a:off x="609600" y="457200"/>
+            <a:ext cx="7012781" cy="171450"/>
+          </a:xfrm>
+          <a:prstGeom prst="rect">
+            <a:avLst/>
+          </a:prstGeom>
+          <a:noFill/>
+        </p:spPr>
+        <p:txBody>
+          <a:bodyPr wrap="none" lIns="0" rIns="0" tIns="0" bIns="0" anchor="t">
+            <a:spAutoFit/>
+          </a:bodyPr>
+          <a:lstStyle/>
+          <a:p>
+            <a:pPr algn="l"/>
+            <a:r>
+              <a:rPr b="1" sz="1050" i="0" u="none">
+                <a:solidFill>
+                  <a:srgbClr val="E11D48"/>
+                </a:solidFill>
+                <a:latin typeface="Plus Jakarta Sans"/>
+              </a:rPr>
+              <a:t>EFICIENCIA NUMÉRICA</a:t>
+            </a:r>
           </a:p>
         </p:txBody>
       </p:sp>
@@ -10007,43 +9782,8 @@
         </p:nvSpPr>
         <p:spPr>
           <a:xfrm>
-            <a:off x="609600" y="457200"/>
-            <a:ext cx="11582400" cy="171450"/>
-          </a:xfrm>
-          <a:prstGeom prst="rect">
-            <a:avLst/>
-          </a:prstGeom>
-          <a:noFill/>
-        </p:spPr>
-        <p:txBody>
-          <a:bodyPr wrap="none" lIns="0" rIns="0" tIns="0" bIns="0" anchor="t">
-            <a:spAutoFit/>
-          </a:bodyPr>
-          <a:lstStyle/>
-          <a:p>
-            <a:pPr algn="l"/>
-            <a:r>
-              <a:rPr b="1" sz="1050" i="0" u="none">
-                <a:solidFill>
-                  <a:srgbClr val="E11D48"/>
-                </a:solidFill>
-                <a:latin typeface="Plus Jakarta Sans"/>
-              </a:rPr>
-              <a:t>MÉTODO NUMÉRICO 2 · CONTRASTE</a:t>
-            </a:r>
-          </a:p>
-        </p:txBody>
-      </p:sp>
-      <p:sp>
-        <p:nvSpPr>
-          <p:cNvPr id="7" name="TextBox 6"/>
-          <p:cNvSpPr txBox="1"/>
-          <p:nvPr/>
-        </p:nvSpPr>
-        <p:spPr>
-          <a:xfrm>
-            <a:off x="609600" y="685800"/>
-            <a:ext cx="11582400" cy="388590"/>
+            <a:off x="609600" y="666750"/>
+            <a:ext cx="7363420" cy="388590"/>
           </a:xfrm>
           <a:prstGeom prst="rect">
             <a:avLst/>
@@ -10068,476 +9808,35 @@
                 </a:solidFill>
                 <a:latin typeface="Space Grotesk"/>
               </a:rPr>
-              <a:t>Hito Adoptado: Trazadora e Incertidumbre</a:t>
-            </a:r>
-          </a:p>
-        </p:txBody>
-      </p:sp>
-      <p:sp>
-        <p:nvSpPr>
-          <p:cNvPr id="8" name="TextBox 7"/>
-          <p:cNvSpPr txBox="1"/>
-          <p:nvPr/>
-        </p:nvSpPr>
-        <p:spPr>
-          <a:xfrm>
-            <a:off x="990600" y="1645890"/>
-            <a:ext cx="11201400" cy="171450"/>
-          </a:xfrm>
-          <a:prstGeom prst="rect">
-            <a:avLst/>
-          </a:prstGeom>
-          <a:noFill/>
-        </p:spPr>
-        <p:txBody>
-          <a:bodyPr wrap="none" lIns="0" rIns="0" tIns="0" bIns="0" anchor="t">
-            <a:spAutoFit/>
-          </a:bodyPr>
-          <a:lstStyle/>
-          <a:p>
-            <a:pPr algn="l"/>
-            <a:r>
-              <a:rPr b="1" sz="1050" i="0" u="none">
-                <a:solidFill>
-                  <a:srgbClr val="FB7185"/>
-                </a:solidFill>
-                <a:latin typeface="Plus Jakarta Sans"/>
-              </a:rPr>
-              <a:t>HITO DE 100 M SEGÚN LA TRAZADORA CÚBICA NATURAL</a:t>
-            </a:r>
-          </a:p>
-        </p:txBody>
-      </p:sp>
-      <p:sp>
-        <p:nvSpPr>
-          <p:cNvPr id="9" name="TextBox 8"/>
-          <p:cNvSpPr txBox="1"/>
-          <p:nvPr/>
-        </p:nvSpPr>
-        <p:spPr>
-          <a:xfrm>
-            <a:off x="990600" y="1931640"/>
-            <a:ext cx="11201400" cy="323850"/>
-          </a:xfrm>
-          <a:prstGeom prst="rect">
-            <a:avLst/>
-          </a:prstGeom>
-          <a:noFill/>
-        </p:spPr>
-        <p:txBody>
-          <a:bodyPr wrap="none" lIns="0" rIns="0" tIns="0" bIns="0" anchor="t">
-            <a:spAutoFit/>
-          </a:bodyPr>
-          <a:lstStyle/>
-          <a:p>
-            <a:pPr algn="l"/>
-            <a:r>
-              <a:rPr b="1" sz="1950" i="0" u="none">
-                <a:solidFill>
-                  <a:srgbClr val="F8FAFC"/>
-                </a:solidFill>
-                <a:latin typeface="Space Grotesk"/>
-              </a:rPr>
-              <a:t>t* = 35.124 semanas  →  29 de septiembre de 2023</a:t>
-            </a:r>
-          </a:p>
-        </p:txBody>
-      </p:sp>
-      <p:sp>
-        <p:nvSpPr>
-          <p:cNvPr id="10" name="TextBox 9"/>
-          <p:cNvSpPr txBox="1"/>
-          <p:nvPr/>
-        </p:nvSpPr>
-        <p:spPr>
-          <a:xfrm>
-            <a:off x="990600" y="2407890"/>
-            <a:ext cx="11201400" cy="200025"/>
-          </a:xfrm>
-          <a:prstGeom prst="rect">
-            <a:avLst/>
-          </a:prstGeom>
-          <a:noFill/>
-        </p:spPr>
-        <p:txBody>
-          <a:bodyPr wrap="none" lIns="0" rIns="0" tIns="0" bIns="0" anchor="t">
-            <a:spAutoFit/>
-          </a:bodyPr>
-          <a:lstStyle/>
-          <a:p>
-            <a:pPr algn="l"/>
-            <a:r>
-              <a:rPr b="0" sz="1200" i="0" u="none">
-                <a:solidFill>
-                  <a:srgbClr val="94A3B8"/>
-                </a:solidFill>
-                <a:latin typeface="Plus Jakarta Sans"/>
-              </a:rPr>
-              <a:t>La trazadora pasa por los 47 datos medidos y coincide con la interpolación lineal de control (t = 35.127 semanas).</a:t>
-            </a:r>
-          </a:p>
-        </p:txBody>
-      </p:sp>
-      <p:sp>
-        <p:nvSpPr>
-          <p:cNvPr id="41" name="Control"/>
-          <p:cNvSpPr txBox="1"/>
-          <p:nvPr/>
-        </p:nvSpPr>
-        <p:spPr>
-          <a:xfrm>
-            <a:off x="612648" y="3200400"/>
-            <a:ext cx="10972800" cy="548640"/>
-          </a:xfrm>
-          <a:prstGeom prst="rect">
-            <a:avLst/>
-          </a:prstGeom>
-          <a:noFill/>
-        </p:spPr>
-        <p:txBody>
-          <a:bodyPr wrap="square" lIns="0" rIns="0" tIns="0" bIns="0" anchor="t"/>
-          <a:lstStyle/>
-          <a:p>
-            <a:pPr algn="l"/>
-            <a:r>
-              <a:rPr b="0" sz="1200" i="0" u="none">
-                <a:solidFill>
-                  <a:srgbClr val="475569"/>
-                </a:solidFill>
-                <a:latin typeface="Plus Jakarta Sans"/>
-              </a:rPr>
-              <a:t>Control: interpolación lineal entre la semana 35 (99.602 M) y la 36 (102.738 M) da t = 35.127 semanas, a 0.4 horas de la trazadora. La regresión no pasa por esos puntos y ubica el cruce 2.77 días más tarde.</a:t>
-            </a:r>
-          </a:p>
-        </p:txBody>
-      </p:sp>
-      <p:sp>
-        <p:nvSpPr>
-          <p:cNvPr id="11" name="TextBox 10"/>
-          <p:cNvSpPr txBox="1"/>
-          <p:nvPr/>
-        </p:nvSpPr>
-        <p:spPr>
-          <a:xfrm>
-            <a:off x="838200" y="4356645"/>
-            <a:ext cx="3810000" cy="171450"/>
-          </a:xfrm>
-          <a:prstGeom prst="rect">
-            <a:avLst/>
-          </a:prstGeom>
-          <a:noFill/>
-        </p:spPr>
-        <p:txBody>
-          <a:bodyPr wrap="none" lIns="0" rIns="0" tIns="0" bIns="0" anchor="t">
-            <a:spAutoFit/>
-          </a:bodyPr>
-          <a:lstStyle/>
-          <a:p>
-            <a:pPr algn="l"/>
-            <a:r>
-              <a:rPr b="1" sz="1050" i="0" u="none">
-                <a:solidFill>
-                  <a:srgbClr val="64748B"/>
-                </a:solidFill>
-                <a:latin typeface="Plus Jakarta Sans"/>
-              </a:rPr>
-              <a:t>RAÍZ DE LA REGRESIÓN</a:t>
-            </a:r>
-          </a:p>
-        </p:txBody>
-      </p:sp>
-      <p:sp>
-        <p:nvSpPr>
-          <p:cNvPr id="12" name="TextBox 11"/>
-          <p:cNvSpPr txBox="1"/>
-          <p:nvPr/>
-        </p:nvSpPr>
-        <p:spPr>
-          <a:xfrm>
-            <a:off x="838200" y="4585245"/>
-            <a:ext cx="3810000" cy="381000"/>
-          </a:xfrm>
-          <a:prstGeom prst="rect">
-            <a:avLst/>
-          </a:prstGeom>
-          <a:noFill/>
-        </p:spPr>
-        <p:txBody>
-          <a:bodyPr wrap="none" lIns="0" rIns="0" tIns="0" bIns="0" anchor="t">
-            <a:spAutoFit/>
-          </a:bodyPr>
-          <a:lstStyle/>
-          <a:p>
-            <a:pPr algn="l">
-              <a:lnSpc>
-                <a:spcPts val="3000"/>
-              </a:lnSpc>
-            </a:pPr>
-            <a:r>
-              <a:rPr b="1" sz="3000" i="0" u="none">
-                <a:solidFill>
-                  <a:srgbClr val="E11D48"/>
-                </a:solidFill>
-                <a:latin typeface="Plus Jakarta Sans"/>
-              </a:rPr>
-              <a:t>35.520 sem</a:t>
-            </a:r>
-          </a:p>
-        </p:txBody>
-      </p:sp>
-      <p:sp>
-        <p:nvSpPr>
-          <p:cNvPr id="13" name="TextBox 12"/>
-          <p:cNvSpPr txBox="1"/>
-          <p:nvPr/>
-        </p:nvSpPr>
-        <p:spPr>
-          <a:xfrm>
-            <a:off x="838200" y="5023395"/>
-            <a:ext cx="3810000" cy="200025"/>
-          </a:xfrm>
-          <a:prstGeom prst="rect">
-            <a:avLst/>
-          </a:prstGeom>
-          <a:noFill/>
-        </p:spPr>
-        <p:txBody>
-          <a:bodyPr wrap="none" lIns="0" rIns="0" tIns="0" bIns="0" anchor="t">
-            <a:spAutoFit/>
-          </a:bodyPr>
-          <a:lstStyle/>
-          <a:p>
-            <a:pPr algn="l"/>
-            <a:r>
-              <a:rPr b="1" sz="1200" i="0" u="none">
-                <a:solidFill>
-                  <a:srgbClr val="334155"/>
-                </a:solidFill>
-                <a:latin typeface="Plus Jakarta Sans"/>
-              </a:rPr>
-              <a:t>Bisección y Newton coinciden: 2 de octubre</a:t>
-            </a:r>
-          </a:p>
-        </p:txBody>
-      </p:sp>
-      <p:sp>
-        <p:nvSpPr>
-          <p:cNvPr id="14" name="TextBox 13"/>
-          <p:cNvSpPr txBox="1"/>
-          <p:nvPr/>
-        </p:nvSpPr>
-        <p:spPr>
-          <a:xfrm>
-            <a:off x="4572000" y="4356645"/>
-            <a:ext cx="3810000" cy="171450"/>
-          </a:xfrm>
-          <a:prstGeom prst="rect">
-            <a:avLst/>
-          </a:prstGeom>
-          <a:noFill/>
-        </p:spPr>
-        <p:txBody>
-          <a:bodyPr wrap="none" lIns="0" rIns="0" tIns="0" bIns="0" anchor="t">
-            <a:spAutoFit/>
-          </a:bodyPr>
-          <a:lstStyle/>
-          <a:p>
-            <a:pPr algn="l"/>
-            <a:r>
-              <a:rPr b="1" sz="1050" i="0" u="none">
-                <a:solidFill>
-                  <a:srgbClr val="64748B"/>
-                </a:solidFill>
-                <a:latin typeface="Plus Jakarta Sans"/>
-              </a:rPr>
-              <a:t>INCERTIDUMBRE DEL MODELO</a:t>
-            </a:r>
-          </a:p>
-        </p:txBody>
-      </p:sp>
-      <p:sp>
-        <p:nvSpPr>
-          <p:cNvPr id="15" name="TextBox 14"/>
-          <p:cNvSpPr txBox="1"/>
-          <p:nvPr/>
-        </p:nvSpPr>
-        <p:spPr>
-          <a:xfrm>
-            <a:off x="4572000" y="4585245"/>
-            <a:ext cx="3810000" cy="381000"/>
-          </a:xfrm>
-          <a:prstGeom prst="rect">
-            <a:avLst/>
-          </a:prstGeom>
-          <a:noFill/>
-        </p:spPr>
-        <p:txBody>
-          <a:bodyPr wrap="none" lIns="0" rIns="0" tIns="0" bIns="0" anchor="t">
-            <a:spAutoFit/>
-          </a:bodyPr>
-          <a:lstStyle/>
-          <a:p>
-            <a:pPr algn="l">
-              <a:lnSpc>
-                <a:spcPts val="3000"/>
-              </a:lnSpc>
-            </a:pPr>
-            <a:r>
-              <a:rPr b="1" sz="3000" i="0" u="none">
-                <a:solidFill>
-                  <a:srgbClr val="0F172A"/>
-                </a:solidFill>
-                <a:latin typeface="Plus Jakarta Sans"/>
-              </a:rPr>
-              <a:t>± 1.92 días</a:t>
-            </a:r>
-          </a:p>
-        </p:txBody>
-      </p:sp>
-      <p:sp>
-        <p:nvSpPr>
-          <p:cNvPr id="16" name="TextBox 15"/>
-          <p:cNvSpPr txBox="1"/>
-          <p:nvPr/>
-        </p:nvSpPr>
-        <p:spPr>
-          <a:xfrm>
-            <a:off x="4572000" y="5023395"/>
-            <a:ext cx="3810000" cy="200025"/>
-          </a:xfrm>
-          <a:prstGeom prst="rect">
-            <a:avLst/>
-          </a:prstGeom>
-          <a:noFill/>
-        </p:spPr>
-        <p:txBody>
-          <a:bodyPr wrap="none" lIns="0" rIns="0" tIns="0" bIns="0" anchor="t">
-            <a:spAutoFit/>
-          </a:bodyPr>
-          <a:lstStyle/>
-          <a:p>
-            <a:pPr algn="l"/>
-            <a:r>
-              <a:rPr b="1" sz="1200" i="0" u="none">
-                <a:solidFill>
-                  <a:srgbClr val="334155"/>
-                </a:solidFill>
-                <a:latin typeface="Plus Jakarta Sans"/>
-              </a:rPr>
-              <a:t>Δt = S_y/x / S'(t*) = 0.927 / 3.374</a:t>
-            </a:r>
-          </a:p>
-        </p:txBody>
-      </p:sp>
-      <p:sp>
-        <p:nvSpPr>
-          <p:cNvPr id="17" name="TextBox 16"/>
-          <p:cNvSpPr txBox="1"/>
-          <p:nvPr/>
-        </p:nvSpPr>
-        <p:spPr>
-          <a:xfrm>
-            <a:off x="8305800" y="4356645"/>
-            <a:ext cx="3810000" cy="171450"/>
-          </a:xfrm>
-          <a:prstGeom prst="rect">
-            <a:avLst/>
-          </a:prstGeom>
-          <a:noFill/>
-        </p:spPr>
-        <p:txBody>
-          <a:bodyPr wrap="none" lIns="0" rIns="0" tIns="0" bIns="0" anchor="t">
-            <a:spAutoFit/>
-          </a:bodyPr>
-          <a:lstStyle/>
-          <a:p>
-            <a:pPr algn="l"/>
-            <a:r>
-              <a:rPr b="1" sz="1050" i="0" u="none">
-                <a:solidFill>
-                  <a:srgbClr val="64748B"/>
-                </a:solidFill>
-                <a:latin typeface="Plus Jakarta Sans"/>
-              </a:rPr>
-              <a:t>REGRESIÓN VS. TRAZADORA</a:t>
-            </a:r>
-          </a:p>
-        </p:txBody>
-      </p:sp>
-      <p:sp>
-        <p:nvSpPr>
-          <p:cNvPr id="18" name="TextBox 17"/>
-          <p:cNvSpPr txBox="1"/>
-          <p:nvPr/>
-        </p:nvSpPr>
-        <p:spPr>
-          <a:xfrm>
-            <a:off x="8305800" y="4585245"/>
-            <a:ext cx="3810000" cy="381000"/>
-          </a:xfrm>
-          <a:prstGeom prst="rect">
-            <a:avLst/>
-          </a:prstGeom>
-          <a:noFill/>
-        </p:spPr>
-        <p:txBody>
-          <a:bodyPr wrap="none" lIns="0" rIns="0" tIns="0" bIns="0" anchor="t">
-            <a:spAutoFit/>
-          </a:bodyPr>
-          <a:lstStyle/>
-          <a:p>
-            <a:pPr algn="l">
-              <a:lnSpc>
-                <a:spcPts val="3000"/>
-              </a:lnSpc>
-            </a:pPr>
-            <a:r>
-              <a:rPr b="1" sz="3000" i="0" u="none">
-                <a:solidFill>
-                  <a:srgbClr val="0284C7"/>
-                </a:solidFill>
-                <a:latin typeface="Plus Jakarta Sans"/>
-              </a:rPr>
-              <a:t>2.77 días</a:t>
-            </a:r>
-          </a:p>
-        </p:txBody>
-      </p:sp>
-      <p:sp>
-        <p:nvSpPr>
-          <p:cNvPr id="19" name="TextBox 18"/>
-          <p:cNvSpPr txBox="1"/>
-          <p:nvPr/>
-        </p:nvSpPr>
-        <p:spPr>
-          <a:xfrm>
-            <a:off x="8305800" y="5023395"/>
-            <a:ext cx="3810000" cy="200025"/>
-          </a:xfrm>
-          <a:prstGeom prst="rect">
-            <a:avLst/>
-          </a:prstGeom>
-          <a:noFill/>
-        </p:spPr>
-        <p:txBody>
-          <a:bodyPr wrap="none" lIns="0" rIns="0" tIns="0" bIns="0" anchor="t">
-            <a:spAutoFit/>
-          </a:bodyPr>
-          <a:lstStyle/>
-          <a:p>
-            <a:pPr algn="l"/>
-            <a:r>
-              <a:rPr b="1" sz="1200" i="0" u="none">
-                <a:solidFill>
-                  <a:srgbClr val="334155"/>
-                </a:solidFill>
-                <a:latin typeface="Plus Jakarta Sans"/>
-              </a:rPr>
-              <a:t>Supera Δt: se adopta la trazadora</a:t>
-            </a:r>
-          </a:p>
-        </p:txBody>
-      </p:sp>
+              <a:t>Convergencia: Lineal vs. Cuadrática</a:t>
+            </a:r>
+          </a:p>
+        </p:txBody>
+      </p:sp>
+      <p:pic>
+        <p:nvPicPr>
+          <p:cNvPr id="9" name="Picture 8" descr="grafico_2_convergencia_biseccion_vs_newton.png"/>
+          <p:cNvPicPr>
+            <a:picLocks noChangeAspect="1"/>
+          </p:cNvPicPr>
+          <p:nvPr/>
+        </p:nvPicPr>
+        <p:blipFill>
+          <a:blip r:embed="rId3"/>
+          <a:stretch>
+            <a:fillRect/>
+          </a:stretch>
+        </p:blipFill>
+        <p:spPr>
+          <a:xfrm>
+            <a:off x="2360675" y="1463040"/>
+            <a:ext cx="7467600" cy="4480560"/>
+          </a:xfrm>
+          <a:prstGeom prst="rect">
+            <a:avLst/>
+          </a:prstGeom>
+        </p:spPr>
+      </p:pic>
     </p:spTree>
   </p:cSld>
   <p:clrMapOvr>
@@ -10564,40 +9863,108 @@
         <p:nvPr/>
       </p:nvGrpSpPr>
       <p:grpSpPr/>
-      <p:pic>
-        <p:nvPicPr>
-          <p:cNvPr id="2" name="Picture 1" descr="image.png"/>
-          <p:cNvPicPr>
-            <a:picLocks noChangeAspect="1"/>
-          </p:cNvPicPr>
-          <p:nvPr/>
-        </p:nvPicPr>
-        <p:blipFill>
-          <a:blip r:embed="rId2"/>
-          <a:stretch>
-            <a:fillRect/>
-          </a:stretch>
-        </p:blipFill>
-        <p:spPr>
-          <a:xfrm>
-            <a:off x="914400" y="2123033"/>
-            <a:ext cx="10363200" cy="3048000"/>
-          </a:xfrm>
-          <a:prstGeom prst="rect">
-            <a:avLst/>
-          </a:prstGeom>
-        </p:spPr>
-      </p:pic>
-      <p:sp>
-        <p:nvSpPr>
-          <p:cNvPr id="3" name="TextBox 2"/>
-          <p:cNvSpPr txBox="1"/>
-          <p:nvPr/>
-        </p:nvSpPr>
-        <p:spPr>
-          <a:xfrm>
-            <a:off x="609600" y="6200775"/>
-            <a:ext cx="6309360" cy="200025"/>
+      <p:sp>
+        <p:nvSpPr>
+          <p:cNvPr id="2" name="Rounded Rectangle 1"/>
+          <p:cNvSpPr/>
+          <p:nvPr/>
+        </p:nvSpPr>
+        <p:spPr>
+          <a:xfrm>
+            <a:off x="612648" y="1600200"/>
+            <a:ext cx="5330952" cy="1143000"/>
+          </a:xfrm>
+          <a:prstGeom prst="roundRect">
+            <a:avLst>
+              <a:gd name="adj" fmla="val 22641"/>
+            </a:avLst>
+          </a:prstGeom>
+          <a:solidFill>
+            <a:srgbClr val="F3E8FF"/>
+          </a:solidFill>
+          <a:ln>
+            <a:noFill/>
+          </a:ln>
+          <a:effectLst/>
+        </p:spPr>
+        <p:style>
+          <a:lnRef idx="1">
+            <a:schemeClr val="accent1"/>
+          </a:lnRef>
+          <a:fillRef idx="3">
+            <a:schemeClr val="accent1"/>
+          </a:fillRef>
+          <a:effectRef idx="2">
+            <a:schemeClr val="accent1"/>
+          </a:effectRef>
+          <a:fontRef idx="minor">
+            <a:schemeClr val="lt1"/>
+          </a:fontRef>
+        </p:style>
+        <p:txBody>
+          <a:bodyPr rtlCol="0" anchor="ctr"/>
+          <a:lstStyle/>
+          <a:p>
+            <a:pPr algn="ctr"/>
+          </a:p>
+        </p:txBody>
+      </p:sp>
+      <p:sp>
+        <p:nvSpPr>
+          <p:cNvPr id="3" name="Rounded Rectangle 2"/>
+          <p:cNvSpPr/>
+          <p:nvPr/>
+        </p:nvSpPr>
+        <p:spPr>
+          <a:xfrm>
+            <a:off x="6245352" y="1600200"/>
+            <a:ext cx="5330952" cy="1143000"/>
+          </a:xfrm>
+          <a:prstGeom prst="roundRect">
+            <a:avLst>
+              <a:gd name="adj" fmla="val 22641"/>
+            </a:avLst>
+          </a:prstGeom>
+          <a:solidFill>
+            <a:srgbClr val="FEE2E2"/>
+          </a:solidFill>
+          <a:ln>
+            <a:noFill/>
+          </a:ln>
+          <a:effectLst/>
+        </p:spPr>
+        <p:style>
+          <a:lnRef idx="1">
+            <a:schemeClr val="accent1"/>
+          </a:lnRef>
+          <a:fillRef idx="3">
+            <a:schemeClr val="accent1"/>
+          </a:fillRef>
+          <a:effectRef idx="2">
+            <a:schemeClr val="accent1"/>
+          </a:effectRef>
+          <a:fontRef idx="minor">
+            <a:schemeClr val="lt1"/>
+          </a:fontRef>
+        </p:style>
+        <p:txBody>
+          <a:bodyPr rtlCol="0" anchor="ctr"/>
+          <a:lstStyle/>
+          <a:p>
+            <a:pPr algn="ctr"/>
+          </a:p>
+        </p:txBody>
+      </p:sp>
+      <p:sp>
+        <p:nvSpPr>
+          <p:cNvPr id="5" name="TextBox 4"/>
+          <p:cNvSpPr txBox="1"/>
+          <p:nvPr/>
+        </p:nvSpPr>
+        <p:spPr>
+          <a:xfrm>
+            <a:off x="609600" y="457200"/>
+            <a:ext cx="8548687" cy="171450"/>
           </a:xfrm>
           <a:prstGeom prst="rect">
             <a:avLst/>
@@ -10612,83 +9979,13 @@
           <a:p>
             <a:pPr algn="l"/>
             <a:r>
-              <a:rPr b="1" sz="1200" i="0" u="none">
-                <a:solidFill>
-                  <a:srgbClr val="0284C7"/>
+              <a:rPr b="1" sz="1050" i="0" u="none">
+                <a:solidFill>
+                  <a:srgbClr val="7C3AED"/>
                 </a:solidFill>
                 <a:latin typeface="Plus Jakarta Sans"/>
               </a:rPr>
-              <a:t>Bisección: Siempre converge si hay cambio de signo (15 iteraciones).</a:t>
-            </a:r>
-          </a:p>
-        </p:txBody>
-      </p:sp>
-      <p:sp>
-        <p:nvSpPr>
-          <p:cNvPr id="4" name="TextBox 3"/>
-          <p:cNvSpPr txBox="1"/>
-          <p:nvPr/>
-        </p:nvSpPr>
-        <p:spPr>
-          <a:xfrm>
-            <a:off x="7124700" y="6200775"/>
-            <a:ext cx="5067300" cy="200025"/>
-          </a:xfrm>
-          <a:prstGeom prst="rect">
-            <a:avLst/>
-          </a:prstGeom>
-          <a:noFill/>
-        </p:spPr>
-        <p:txBody>
-          <a:bodyPr wrap="none" lIns="0" rIns="0" tIns="0" bIns="0" anchor="t">
-            <a:spAutoFit/>
-          </a:bodyPr>
-          <a:lstStyle/>
-          <a:p>
-            <a:pPr algn="l"/>
-            <a:r>
-              <a:rPr b="1" sz="1200" i="0" u="none">
-                <a:solidFill>
-                  <a:srgbClr val="E11D48"/>
-                </a:solidFill>
-                <a:latin typeface="Plus Jakarta Sans"/>
-              </a:rPr>
-              <a:t>Newton-Raphson: Convergencia cuadrática en solo 3 pasos.</a:t>
-            </a:r>
-          </a:p>
-        </p:txBody>
-      </p:sp>
-      <p:sp>
-        <p:nvSpPr>
-          <p:cNvPr id="5" name="TextBox 4"/>
-          <p:cNvSpPr txBox="1"/>
-          <p:nvPr/>
-        </p:nvSpPr>
-        <p:spPr>
-          <a:xfrm>
-            <a:off x="609600" y="457200"/>
-            <a:ext cx="7012781" cy="171450"/>
-          </a:xfrm>
-          <a:prstGeom prst="rect">
-            <a:avLst/>
-          </a:prstGeom>
-          <a:noFill/>
-        </p:spPr>
-        <p:txBody>
-          <a:bodyPr wrap="none" lIns="0" rIns="0" tIns="0" bIns="0" anchor="t">
-            <a:spAutoFit/>
-          </a:bodyPr>
-          <a:lstStyle/>
-          <a:p>
-            <a:pPr algn="l"/>
-            <a:r>
-              <a:rPr b="1" sz="1050" i="0" u="none">
-                <a:solidFill>
-                  <a:srgbClr val="E11D48"/>
-                </a:solidFill>
-                <a:latin typeface="Plus Jakarta Sans"/>
-              </a:rPr>
-              <a:t>EFICIENCIA NUMÉRICA</a:t>
+              <a:t>APLICACIÓN DE INGENIERÍA</a:t>
             </a:r>
           </a:p>
         </p:txBody>
@@ -10702,7 +9999,7 @@
         <p:spPr>
           <a:xfrm>
             <a:off x="609600" y="666750"/>
-            <a:ext cx="7363420" cy="388590"/>
+            <a:ext cx="8976121" cy="388590"/>
           </a:xfrm>
           <a:prstGeom prst="rect">
             <a:avLst/>
@@ -10721,13 +10018,13 @@
               </a:lnSpc>
             </a:pPr>
             <a:r>
-              <a:rPr b="1" sz="2550" i="0" u="none">
+              <a:rPr b="1" sz="2800" i="0" u="none">
                 <a:solidFill>
                   <a:srgbClr val="0F172A"/>
                 </a:solidFill>
                 <a:latin typeface="Space Grotesk"/>
               </a:rPr>
-              <a:t>Convergencia: Lineal vs. Cuadrática</a:t>
+              <a:t>Ancho de banda en la semana pico</a:t>
             </a:r>
           </a:p>
         </p:txBody>
@@ -10740,8 +10037,8 @@
         </p:nvSpPr>
         <p:spPr>
           <a:xfrm>
-            <a:off x="6373368" y="883890"/>
-            <a:ext cx="2276856" cy="171450"/>
+            <a:off x="868680" y="1819656"/>
+            <a:ext cx="4828032" cy="667512"/>
           </a:xfrm>
           <a:prstGeom prst="rect">
             <a:avLst/>
@@ -10756,13 +10053,14 @@
           <a:p>
             <a:pPr algn="l"/>
             <a:r>
-              <a:rPr b="1" sz="1050" i="0" u="none">
-                <a:solidFill>
-                  <a:srgbClr val="0284C7"/>
+              <a:rPr b="1" sz="2100" i="0" u="none">
+                <a:solidFill>
+                  <a:srgbClr val="6B21A8"/>
                 </a:solidFill>
                 <a:latin typeface="Plus Jakarta Sans"/>
               </a:rPr>
-              <a:t>Bisección (15 iteraciones)</a:t>
+              <a:t>Semana pico: 26 (27/07/2023)
+4.17 M reproducciones</a:t>
             </a:r>
           </a:p>
         </p:txBody>
@@ -10775,8 +10073,8 @@
         </p:nvSpPr>
         <p:spPr>
           <a:xfrm>
-            <a:off x="8970264" y="883890"/>
-            <a:ext cx="2606039" cy="171450"/>
+            <a:off x="6501384" y="1819656"/>
+            <a:ext cx="4800600" cy="667512"/>
           </a:xfrm>
           <a:prstGeom prst="rect">
             <a:avLst/>
@@ -10791,13 +10089,119 @@
           <a:p>
             <a:pPr algn="l"/>
             <a:r>
-              <a:rPr b="1" sz="1050" i="0" u="none">
-                <a:solidFill>
-                  <a:srgbClr val="E11D48"/>
+              <a:rPr b="1" sz="2300" i="0" u="none">
+                <a:solidFill>
+                  <a:srgbClr val="991B1B"/>
                 </a:solidFill>
                 <a:latin typeface="Plus Jakarta Sans"/>
               </a:rPr>
-              <a:t>Newton-Raphson (3 iteraciones)</a:t>
+              <a:t>≈ 205 Mbps
+de ancho de banda promedio</a:t>
+            </a:r>
+          </a:p>
+        </p:txBody>
+      </p:sp>
+      <p:sp>
+        <p:nvSpPr>
+          <p:cNvPr id="9" name="TextBox 8"/>
+          <p:cNvSpPr txBox="1"/>
+          <p:nvPr/>
+        </p:nvSpPr>
+        <p:spPr>
+          <a:xfrm>
+            <a:off x="777240" y="3200400"/>
+            <a:ext cx="10698480" cy="438912"/>
+          </a:xfrm>
+          <a:prstGeom prst="rect">
+            <a:avLst/>
+          </a:prstGeom>
+          <a:noFill/>
+        </p:spPr>
+        <p:txBody>
+          <a:bodyPr wrap="none" lIns="0" rIns="0" tIns="0" bIns="0" anchor="t">
+            <a:spAutoFit/>
+          </a:bodyPr>
+          <a:lstStyle/>
+          <a:p>
+            <a:pPr algn="l"/>
+            <a:r>
+              <a:rPr b="1" sz="2000" i="0" u="none">
+                <a:solidFill>
+                  <a:srgbClr val="8B5CF6"/>
+                </a:solidFill>
+                <a:latin typeface="Plus Jakarta Sans"/>
+              </a:rPr>
+              <a:t>Mbps = reproducciones/semana × 160 kbps × 186 s ÷ 1000 ÷ 604 800 s</a:t>
+            </a:r>
+          </a:p>
+        </p:txBody>
+      </p:sp>
+      <p:sp>
+        <p:nvSpPr>
+          <p:cNvPr id="10" name="TextBox 9"/>
+          <p:cNvSpPr txBox="1"/>
+          <p:nvPr/>
+        </p:nvSpPr>
+        <p:spPr>
+          <a:xfrm>
+            <a:off x="777240" y="5394960"/>
+            <a:ext cx="10698480" cy="685800"/>
+          </a:xfrm>
+          <a:prstGeom prst="rect">
+            <a:avLst/>
+          </a:prstGeom>
+          <a:noFill/>
+        </p:spPr>
+        <p:txBody>
+          <a:bodyPr wrap="none" lIns="0" rIns="0" tIns="0" bIns="0" anchor="t">
+            <a:spAutoFit/>
+          </a:bodyPr>
+          <a:lstStyle/>
+          <a:p>
+            <a:pPr algn="l"/>
+            <a:r>
+              <a:rPr b="1" sz="2200" i="0" u="none">
+                <a:solidFill>
+                  <a:srgbClr val="6D28D9"/>
+                </a:solidFill>
+                <a:latin typeface="Plus Jakarta Sans"/>
+              </a:rPr>
+              <a:t>La red tiene que soportar unos 205 Mbps solo para esta canción en México.</a:t>
+            </a:r>
+          </a:p>
+        </p:txBody>
+      </p:sp>
+      <p:sp>
+        <p:nvSpPr>
+          <p:cNvPr id="42" name="Supuestos"/>
+          <p:cNvSpPr txBox="1"/>
+          <p:nvPr/>
+        </p:nvSpPr>
+        <p:spPr>
+          <a:xfrm>
+            <a:off x="777240" y="3977639"/>
+            <a:ext cx="10698480" cy="1051560"/>
+          </a:xfrm>
+          <a:prstGeom prst="rect">
+            <a:avLst/>
+          </a:prstGeom>
+          <a:noFill/>
+        </p:spPr>
+        <p:txBody>
+          <a:bodyPr wrap="square" lIns="0" rIns="0" tIns="0" bIns="0" anchor="t"/>
+          <a:lstStyle/>
+          <a:p>
+            <a:pPr algn="l"/>
+            <a:r>
+              <a:rPr b="0" sz="1700" i="0" u="none">
+                <a:solidFill>
+                  <a:srgbClr val="475569"/>
+                </a:solidFill>
+                <a:latin typeface="Plus Jakarta Sans"/>
+              </a:rPr>
+              <a:t>Supuestos: duración de 3:06 (186 s) y audio a 160 kbps.
+Son órdenes de magnitud, no datos de Spotify.
+Referencias: Wikipedia, Dulce Beat (duración), y Spotify, Calidad de audio.</a:t>
             </a:r>
           </a:p>
         </p:txBody>
@@ -10830,122 +10234,6 @@
       <p:grpSpPr/>
       <p:sp>
         <p:nvSpPr>
-          <p:cNvPr id="2" name="Rounded Rectangle 1"/>
-          <p:cNvSpPr/>
-          <p:nvPr/>
-        </p:nvSpPr>
-        <p:spPr>
-          <a:xfrm>
-            <a:off x="609600" y="5895975"/>
-            <a:ext cx="5334000" cy="504825"/>
-          </a:xfrm>
-          <a:prstGeom prst="roundRect">
-            <a:avLst>
-              <a:gd name="adj" fmla="val 22641"/>
-            </a:avLst>
-          </a:prstGeom>
-          <a:solidFill>
-            <a:srgbClr val="F3E8FF"/>
-          </a:solidFill>
-          <a:ln>
-            <a:noFill/>
-          </a:ln>
-          <a:effectLst/>
-        </p:spPr>
-        <p:style>
-          <a:lnRef idx="1">
-            <a:schemeClr val="accent1"/>
-          </a:lnRef>
-          <a:fillRef idx="3">
-            <a:schemeClr val="accent1"/>
-          </a:fillRef>
-          <a:effectRef idx="2">
-            <a:schemeClr val="accent1"/>
-          </a:effectRef>
-          <a:fontRef idx="minor">
-            <a:schemeClr val="lt1"/>
-          </a:fontRef>
-        </p:style>
-        <p:txBody>
-          <a:bodyPr rtlCol="0" anchor="ctr"/>
-          <a:lstStyle/>
-          <a:p>
-            <a:pPr algn="ctr"/>
-          </a:p>
-        </p:txBody>
-      </p:sp>
-      <p:sp>
-        <p:nvSpPr>
-          <p:cNvPr id="3" name="Rounded Rectangle 2"/>
-          <p:cNvSpPr/>
-          <p:nvPr/>
-        </p:nvSpPr>
-        <p:spPr>
-          <a:xfrm>
-            <a:off x="6248400" y="5895975"/>
-            <a:ext cx="5334000" cy="504825"/>
-          </a:xfrm>
-          <a:prstGeom prst="roundRect">
-            <a:avLst>
-              <a:gd name="adj" fmla="val 22641"/>
-            </a:avLst>
-          </a:prstGeom>
-          <a:solidFill>
-            <a:srgbClr val="FEE2E2"/>
-          </a:solidFill>
-          <a:ln>
-            <a:noFill/>
-          </a:ln>
-          <a:effectLst/>
-        </p:spPr>
-        <p:style>
-          <a:lnRef idx="1">
-            <a:schemeClr val="accent1"/>
-          </a:lnRef>
-          <a:fillRef idx="3">
-            <a:schemeClr val="accent1"/>
-          </a:fillRef>
-          <a:effectRef idx="2">
-            <a:schemeClr val="accent1"/>
-          </a:effectRef>
-          <a:fontRef idx="minor">
-            <a:schemeClr val="lt1"/>
-          </a:fontRef>
-        </p:style>
-        <p:txBody>
-          <a:bodyPr rtlCol="0" anchor="ctr"/>
-          <a:lstStyle/>
-          <a:p>
-            <a:pPr algn="ctr"/>
-          </a:p>
-        </p:txBody>
-      </p:sp>
-      <p:pic>
-        <p:nvPicPr>
-          <p:cNvPr id="4" name="Picture 3" descr="image.png"/>
-          <p:cNvPicPr>
-            <a:picLocks noChangeAspect="1"/>
-          </p:cNvPicPr>
-          <p:nvPr/>
-        </p:nvPicPr>
-        <p:blipFill>
-          <a:blip r:embed="rId2"/>
-          <a:stretch>
-            <a:fillRect/>
-          </a:stretch>
-        </p:blipFill>
-        <p:spPr>
-          <a:xfrm>
-            <a:off x="914400" y="2065883"/>
-            <a:ext cx="10363200" cy="2857500"/>
-          </a:xfrm>
-          <a:prstGeom prst="rect">
-            <a:avLst/>
-          </a:prstGeom>
-        </p:spPr>
-      </p:pic>
-      <p:sp>
-        <p:nvSpPr>
           <p:cNvPr id="5" name="TextBox 4"/>
           <p:cNvSpPr txBox="1"/>
           <p:nvPr/>
@@ -10974,7 +10262,7 @@
                 </a:solidFill>
                 <a:latin typeface="Plus Jakarta Sans"/>
               </a:rPr>
-              <a:t>MÉTODO NUMÉRICO 3</a:t>
+              <a:t>GENERALIZACIÓN</a:t>
             </a:r>
           </a:p>
         </p:txBody>
@@ -11013,151 +10301,126 @@
                 </a:solidFill>
                 <a:latin typeface="Space Grotesk"/>
               </a:rPr>
-              <a:t>Ritmo de Demanda y Diferenciación (dS/dt)</a:t>
-            </a:r>
-          </a:p>
-        </p:txBody>
-      </p:sp>
-      <p:sp>
-        <p:nvSpPr>
-          <p:cNvPr id="7" name="TextBox 6"/>
-          <p:cNvSpPr txBox="1"/>
-          <p:nvPr/>
-        </p:nvSpPr>
-        <p:spPr>
-          <a:xfrm>
-            <a:off x="800100" y="6048375"/>
-            <a:ext cx="6191250" cy="200025"/>
-          </a:xfrm>
-          <a:prstGeom prst="rect">
-            <a:avLst/>
-          </a:prstGeom>
-          <a:noFill/>
-        </p:spPr>
-        <p:txBody>
-          <a:bodyPr wrap="none" lIns="0" rIns="0" tIns="0" bIns="0" anchor="t">
-            <a:spAutoFit/>
-          </a:bodyPr>
-          <a:lstStyle/>
-          <a:p>
-            <a:pPr algn="l"/>
-            <a:r>
-              <a:rPr b="1" sz="1200" i="0" u="none">
-                <a:solidFill>
-                  <a:srgbClr val="6B21A8"/>
+              <a:t>¿Sirve para Cualquier Canción? 3 Casos Reales</a:t>
+            </a:r>
+          </a:p>
+        </p:txBody>
+      </p:sp>
+      <p:sp>
+        <p:nvSpPr>
+          <p:cNvPr id="12" name="TextBox 11"/>
+          <p:cNvSpPr txBox="1"/>
+          <p:nvPr/>
+        </p:nvSpPr>
+        <p:spPr>
+          <a:xfrm>
+            <a:off x="777240" y="4983480"/>
+            <a:ext cx="10698480" cy="1417320"/>
+          </a:xfrm>
+          <a:prstGeom prst="rect">
+            <a:avLst/>
+          </a:prstGeom>
+          <a:noFill/>
+        </p:spPr>
+        <p:txBody>
+          <a:bodyPr wrap="square">
+            <a:spAutoFit/>
+          </a:bodyPr>
+          <a:lstStyle/>
+          <a:p>
+            <a:pPr marL="182880" indent="-164592">
+              <a:spcAft>
+                <a:spcPts val="500"/>
+              </a:spcAft>
+              <a:buChar char="•"/>
+            </a:pPr>
+            <a:r>
+              <a:rPr b="0" sz="1500" i="0" u="none">
+                <a:solidFill>
+                  <a:srgbClr val="475569"/>
                 </a:solidFill>
                 <a:latin typeface="Plus Jakarta Sans"/>
               </a:rPr>
-              <a:t>Pico Real Observado: Semana 26 (4.171 M streams/semana)</a:t>
-            </a:r>
-          </a:p>
-        </p:txBody>
-      </p:sp>
-      <p:sp>
-        <p:nvSpPr>
-          <p:cNvPr id="8" name="TextBox 7"/>
-          <p:cNvSpPr txBox="1"/>
-          <p:nvPr/>
-        </p:nvSpPr>
-        <p:spPr>
-          <a:xfrm>
-            <a:off x="6438900" y="6048375"/>
-            <a:ext cx="5753100" cy="200025"/>
-          </a:xfrm>
-          <a:prstGeom prst="rect">
-            <a:avLst/>
-          </a:prstGeom>
-          <a:noFill/>
-        </p:spPr>
-        <p:txBody>
-          <a:bodyPr wrap="none" lIns="0" rIns="0" tIns="0" bIns="0" anchor="t">
-            <a:spAutoFit/>
-          </a:bodyPr>
-          <a:lstStyle/>
-          <a:p>
-            <a:pPr algn="l"/>
-            <a:r>
-              <a:rPr b="1" sz="1200" i="0" u="none">
-                <a:solidFill>
-                  <a:srgbClr val="991B1B"/>
+              <a:t>Mismo programa: solo cambia el archivo CSV.</a:t>
+            </a:r>
+          </a:p>
+          <a:p>
+            <a:pPr marL="182880" indent="-164592">
+              <a:spcAft>
+                <a:spcPts val="500"/>
+              </a:spcAft>
+              <a:buChar char="•"/>
+            </a:pPr>
+            <a:r>
+              <a:rPr b="0" sz="1500" i="0" u="none">
+                <a:solidFill>
+                  <a:srgbClr val="475569"/>
                 </a:solidFill>
                 <a:latin typeface="Plus Jakarta Sans"/>
               </a:rPr>
-              <a:t>Pico del Modelo Cúbico: Semana 30.59 (3.436 M streams/semana)</a:t>
-            </a:r>
-          </a:p>
-        </p:txBody>
-      </p:sp>
-      <p:sp>
-        <p:nvSpPr>
-          <p:cNvPr id="9" name="TextBox 8"/>
-          <p:cNvSpPr txBox="1"/>
-          <p:nvPr/>
-        </p:nvSpPr>
-        <p:spPr>
-          <a:xfrm>
-            <a:off x="612648" y="1207008"/>
-            <a:ext cx="2194560" cy="171450"/>
-          </a:xfrm>
-          <a:prstGeom prst="rect">
-            <a:avLst/>
-          </a:prstGeom>
-          <a:noFill/>
-        </p:spPr>
-        <p:txBody>
-          <a:bodyPr wrap="none" lIns="0" rIns="0" tIns="0" bIns="0" anchor="t">
-            <a:spAutoFit/>
-          </a:bodyPr>
-          <a:lstStyle/>
-          <a:p>
-            <a:pPr algn="l"/>
-            <a:r>
-              <a:rPr b="1" sz="1050" i="0" u="none">
-                <a:solidFill>
-                  <a:srgbClr val="8B5CF6"/>
+              <a:t>Hito de 100 M: Rosa Pastel 28/09/2023, Ella Baila Sola 19/04/2023, Tití 21/07/2022.</a:t>
+            </a:r>
+          </a:p>
+          <a:p>
+            <a:pPr marL="182880" indent="-164592">
+              <a:spcAft>
+                <a:spcPts val="500"/>
+              </a:spcAft>
+              <a:buChar char="•"/>
+            </a:pPr>
+            <a:r>
+              <a:rPr b="0" sz="1500" i="0" u="none">
+                <a:solidFill>
+                  <a:srgbClr val="475569"/>
                 </a:solidFill>
                 <a:latin typeface="Plus Jakarta Sans"/>
               </a:rPr>
-              <a:t>Streams semanales medidos</a:t>
-            </a:r>
-          </a:p>
-        </p:txBody>
-      </p:sp>
-      <p:sp>
-        <p:nvSpPr>
-          <p:cNvPr id="10" name="TextBox 9"/>
-          <p:cNvSpPr txBox="1"/>
-          <p:nvPr/>
-        </p:nvSpPr>
-        <p:spPr>
-          <a:xfrm>
-            <a:off x="3127248" y="1207008"/>
-            <a:ext cx="2194560" cy="171450"/>
-          </a:xfrm>
-          <a:prstGeom prst="rect">
-            <a:avLst/>
-          </a:prstGeom>
-          <a:noFill/>
-        </p:spPr>
-        <p:txBody>
-          <a:bodyPr wrap="none" lIns="0" rIns="0" tIns="0" bIns="0" anchor="t">
-            <a:spAutoFit/>
-          </a:bodyPr>
-          <a:lstStyle/>
-          <a:p>
-            <a:pPr algn="l"/>
-            <a:r>
-              <a:rPr b="1" sz="1050" i="0" u="none">
-                <a:solidFill>
-                  <a:srgbClr val="6D28D9"/>
+              <a:t>Bisección: 15 a 18 iteraciones; Newton: 3 o 4.</a:t>
+            </a:r>
+          </a:p>
+          <a:p>
+            <a:pPr marL="182880" indent="-164592">
+              <a:spcAft>
+                <a:spcPts val="500"/>
+              </a:spcAft>
+              <a:buChar char="•"/>
+            </a:pPr>
+            <a:r>
+              <a:rPr b="0" sz="1500" i="0" u="none">
+                <a:solidFill>
+                  <a:srgbClr val="475569"/>
                 </a:solidFill>
                 <a:latin typeface="Plus Jakarta Sans"/>
               </a:rPr>
-              <a:t>Derivada del modelo S'(t)</a:t>
-            </a:r>
-          </a:p>
-        </p:txBody>
-      </p:sp>
+              <a:t>Sirve para estimar cuándo cualquier contenido alcanza una meta de demanda.</a:t>
+            </a:r>
+          </a:p>
+        </p:txBody>
+      </p:sp>
+      <p:pic>
+        <p:nvPicPr>
+          <p:cNvPr id="13" name="Picture 12" descr="grafico_3_comparacion_canciones.png"/>
+          <p:cNvPicPr>
+            <a:picLocks noChangeAspect="1"/>
+          </p:cNvPicPr>
+          <p:nvPr/>
+        </p:nvPicPr>
+        <p:blipFill>
+          <a:blip r:embed="rId4"/>
+          <a:stretch>
+            <a:fillRect/>
+          </a:stretch>
+        </p:blipFill>
+        <p:spPr>
+          <a:xfrm>
+            <a:off x="644651" y="1280160"/>
+            <a:ext cx="10917936" cy="3639312"/>
+          </a:xfrm>
+          <a:prstGeom prst="rect">
+            <a:avLst/>
+          </a:prstGeom>
+        </p:spPr>
+      </p:pic>
     </p:spTree>
   </p:cSld>
   <p:clrMapOvr>

--- a/ENTREGABLES/Presentacion_Rosa_Pastel_Metodos_Numericos.pptx
+++ b/ENTREGABLES/Presentacion_Rosa_Pastel_Metodos_Numericos.pptx
@@ -9,6 +9,7 @@
     <p:sldId id="257" r:id="rId8"/>
     <p:sldId id="258" r:id="rId9"/>
     <p:sldId id="259" r:id="rId10"/>
+    <p:sldId id="271" r:id="rId22"/>
     <p:sldId id="260" r:id="rId11"/>
     <p:sldId id="261" r:id="rId12"/>
     <p:sldId id="262" r:id="rId13"/>
@@ -3574,239 +3575,172 @@
       <p:grpSpPr/>
       <p:sp>
         <p:nvSpPr>
-          <p:cNvPr id="2" name="Rounded Rectangle 1"/>
-          <p:cNvSpPr/>
-          <p:nvPr/>
-        </p:nvSpPr>
-        <p:spPr>
-          <a:xfrm>
-            <a:off x="609600" y="2880270"/>
-            <a:ext cx="2571750" cy="2019300"/>
-          </a:xfrm>
-          <a:prstGeom prst="roundRect">
-            <a:avLst>
-              <a:gd name="adj" fmla="val 7547"/>
-            </a:avLst>
-          </a:prstGeom>
-          <a:solidFill>
-            <a:srgbClr val="F8FAFC"/>
-          </a:solidFill>
-          <a:ln>
-            <a:noFill/>
-          </a:ln>
-          <a:effectLst/>
-        </p:spPr>
-        <p:style>
-          <a:lnRef idx="1">
-            <a:schemeClr val="accent1"/>
-          </a:lnRef>
-          <a:fillRef idx="3">
-            <a:schemeClr val="accent1"/>
-          </a:fillRef>
-          <a:effectRef idx="2">
-            <a:schemeClr val="accent1"/>
-          </a:effectRef>
-          <a:fontRef idx="minor">
-            <a:schemeClr val="lt1"/>
-          </a:fontRef>
-        </p:style>
-        <p:txBody>
-          <a:bodyPr rtlCol="0" anchor="ctr"/>
-          <a:lstStyle/>
-          <a:p>
-            <a:pPr algn="ctr"/>
-          </a:p>
-        </p:txBody>
-      </p:sp>
-      <p:sp>
-        <p:nvSpPr>
-          <p:cNvPr id="3" name="Rounded Rectangle 2"/>
-          <p:cNvSpPr/>
-          <p:nvPr/>
-        </p:nvSpPr>
-        <p:spPr>
-          <a:xfrm>
-            <a:off x="3409950" y="2880270"/>
-            <a:ext cx="2571750" cy="2019300"/>
-          </a:xfrm>
-          <a:prstGeom prst="roundRect">
-            <a:avLst>
-              <a:gd name="adj" fmla="val 7547"/>
-            </a:avLst>
-          </a:prstGeom>
-          <a:solidFill>
-            <a:srgbClr val="F8FAFC"/>
-          </a:solidFill>
-          <a:ln>
-            <a:noFill/>
-          </a:ln>
-          <a:effectLst/>
-        </p:spPr>
-        <p:style>
-          <a:lnRef idx="1">
-            <a:schemeClr val="accent1"/>
-          </a:lnRef>
-          <a:fillRef idx="3">
-            <a:schemeClr val="accent1"/>
-          </a:fillRef>
-          <a:effectRef idx="2">
-            <a:schemeClr val="accent1"/>
-          </a:effectRef>
-          <a:fontRef idx="minor">
-            <a:schemeClr val="lt1"/>
-          </a:fontRef>
-        </p:style>
-        <p:txBody>
-          <a:bodyPr rtlCol="0" anchor="ctr"/>
-          <a:lstStyle/>
-          <a:p>
-            <a:pPr algn="ctr"/>
-          </a:p>
-        </p:txBody>
-      </p:sp>
-      <p:sp>
-        <p:nvSpPr>
-          <p:cNvPr id="4" name="Rounded Rectangle 3"/>
-          <p:cNvSpPr/>
-          <p:nvPr/>
-        </p:nvSpPr>
-        <p:spPr>
-          <a:xfrm>
-            <a:off x="6210300" y="2880270"/>
-            <a:ext cx="2571750" cy="2019300"/>
-          </a:xfrm>
-          <a:prstGeom prst="roundRect">
-            <a:avLst>
-              <a:gd name="adj" fmla="val 7547"/>
-            </a:avLst>
-          </a:prstGeom>
-          <a:solidFill>
-            <a:srgbClr val="F8FAFC"/>
-          </a:solidFill>
-          <a:ln>
-            <a:noFill/>
-          </a:ln>
-          <a:effectLst/>
-        </p:spPr>
-        <p:style>
-          <a:lnRef idx="1">
-            <a:schemeClr val="accent1"/>
-          </a:lnRef>
-          <a:fillRef idx="3">
-            <a:schemeClr val="accent1"/>
-          </a:fillRef>
-          <a:effectRef idx="2">
-            <a:schemeClr val="accent1"/>
-          </a:effectRef>
-          <a:fontRef idx="minor">
-            <a:schemeClr val="lt1"/>
-          </a:fontRef>
-        </p:style>
-        <p:txBody>
-          <a:bodyPr rtlCol="0" anchor="ctr"/>
-          <a:lstStyle/>
-          <a:p>
-            <a:pPr algn="ctr"/>
-          </a:p>
-        </p:txBody>
-      </p:sp>
-      <p:sp>
-        <p:nvSpPr>
-          <p:cNvPr id="5" name="Rounded Rectangle 4"/>
-          <p:cNvSpPr/>
-          <p:nvPr/>
-        </p:nvSpPr>
-        <p:spPr>
-          <a:xfrm>
-            <a:off x="9010650" y="2880270"/>
-            <a:ext cx="2571750" cy="2019300"/>
-          </a:xfrm>
-          <a:prstGeom prst="roundRect">
-            <a:avLst>
-              <a:gd name="adj" fmla="val 7547"/>
-            </a:avLst>
-          </a:prstGeom>
-          <a:solidFill>
-            <a:srgbClr val="F8FAFC"/>
-          </a:solidFill>
-          <a:ln>
-            <a:noFill/>
-          </a:ln>
-          <a:effectLst/>
-        </p:spPr>
-        <p:style>
-          <a:lnRef idx="1">
-            <a:schemeClr val="accent1"/>
-          </a:lnRef>
-          <a:fillRef idx="3">
-            <a:schemeClr val="accent1"/>
-          </a:fillRef>
-          <a:effectRef idx="2">
-            <a:schemeClr val="accent1"/>
-          </a:effectRef>
-          <a:fontRef idx="minor">
-            <a:schemeClr val="lt1"/>
-          </a:fontRef>
-        </p:style>
-        <p:txBody>
-          <a:bodyPr rtlCol="0" anchor="ctr"/>
-          <a:lstStyle/>
-          <a:p>
-            <a:pPr algn="ctr"/>
+          <p:cNvPr id="5" name="TextBox 4"/>
+          <p:cNvSpPr txBox="1"/>
+          <p:nvPr/>
+        </p:nvSpPr>
+        <p:spPr>
+          <a:xfrm>
+            <a:off x="609600" y="457200"/>
+            <a:ext cx="8548687" cy="171450"/>
+          </a:xfrm>
+          <a:prstGeom prst="rect">
+            <a:avLst/>
+          </a:prstGeom>
+          <a:noFill/>
+        </p:spPr>
+        <p:txBody>
+          <a:bodyPr wrap="none" lIns="0" rIns="0" tIns="0" bIns="0" anchor="t">
+            <a:spAutoFit/>
+          </a:bodyPr>
+          <a:lstStyle/>
+          <a:p>
+            <a:pPr algn="l"/>
+            <a:r>
+              <a:rPr b="1" sz="1050" i="0" u="none">
+                <a:solidFill>
+                  <a:srgbClr val="7C3AED"/>
+                </a:solidFill>
+                <a:latin typeface="Plus Jakarta Sans"/>
+              </a:rPr>
+              <a:t>GENERALIZACIÓN</a:t>
+            </a:r>
+          </a:p>
+        </p:txBody>
+      </p:sp>
+      <p:sp>
+        <p:nvSpPr>
+          <p:cNvPr id="6" name="TextBox 5"/>
+          <p:cNvSpPr txBox="1"/>
+          <p:nvPr/>
+        </p:nvSpPr>
+        <p:spPr>
+          <a:xfrm>
+            <a:off x="609600" y="666750"/>
+            <a:ext cx="8976121" cy="388590"/>
+          </a:xfrm>
+          <a:prstGeom prst="rect">
+            <a:avLst/>
+          </a:prstGeom>
+          <a:noFill/>
+        </p:spPr>
+        <p:txBody>
+          <a:bodyPr wrap="none" lIns="0" rIns="0" tIns="0" bIns="0" anchor="t">
+            <a:spAutoFit/>
+          </a:bodyPr>
+          <a:lstStyle/>
+          <a:p>
+            <a:pPr algn="l">
+              <a:lnSpc>
+                <a:spcPts val="3060"/>
+              </a:lnSpc>
+            </a:pPr>
+            <a:r>
+              <a:rPr b="1" sz="2550" i="0" u="none">
+                <a:solidFill>
+                  <a:srgbClr val="0F172A"/>
+                </a:solidFill>
+                <a:latin typeface="Space Grotesk"/>
+              </a:rPr>
+              <a:t>¿Sirve para Cualquier Canción? 3 Casos Reales</a:t>
+            </a:r>
+          </a:p>
+        </p:txBody>
+      </p:sp>
+      <p:sp>
+        <p:nvSpPr>
+          <p:cNvPr id="12" name="TextBox 11"/>
+          <p:cNvSpPr txBox="1"/>
+          <p:nvPr/>
+        </p:nvSpPr>
+        <p:spPr>
+          <a:xfrm>
+            <a:off x="777240" y="4983480"/>
+            <a:ext cx="10698480" cy="1417320"/>
+          </a:xfrm>
+          <a:prstGeom prst="rect">
+            <a:avLst/>
+          </a:prstGeom>
+          <a:noFill/>
+        </p:spPr>
+        <p:txBody>
+          <a:bodyPr wrap="square">
+            <a:spAutoFit/>
+          </a:bodyPr>
+          <a:lstStyle/>
+          <a:p>
+            <a:pPr marL="182880" indent="-164592">
+              <a:spcAft>
+                <a:spcPts val="500"/>
+              </a:spcAft>
+              <a:buChar char="•"/>
+            </a:pPr>
+            <a:r>
+              <a:rPr b="0" sz="1500" i="0" u="none">
+                <a:solidFill>
+                  <a:srgbClr val="475569"/>
+                </a:solidFill>
+                <a:latin typeface="Plus Jakarta Sans"/>
+              </a:rPr>
+              <a:t>Mismo programa: solo cambia el archivo CSV.</a:t>
+            </a:r>
+          </a:p>
+          <a:p>
+            <a:pPr marL="182880" indent="-164592">
+              <a:spcAft>
+                <a:spcPts val="500"/>
+              </a:spcAft>
+              <a:buChar char="•"/>
+            </a:pPr>
+            <a:r>
+              <a:rPr b="0" sz="1500" i="0" u="none">
+                <a:solidFill>
+                  <a:srgbClr val="475569"/>
+                </a:solidFill>
+                <a:latin typeface="Plus Jakarta Sans"/>
+              </a:rPr>
+              <a:t>Hito de 100 M: Rosa Pastel 28/09/2023, Ella Baila Sola 19/04/2023, Tití 21/07/2022.</a:t>
+            </a:r>
+          </a:p>
+          <a:p>
+            <a:pPr marL="182880" indent="-164592">
+              <a:spcAft>
+                <a:spcPts val="500"/>
+              </a:spcAft>
+              <a:buChar char="•"/>
+            </a:pPr>
+            <a:r>
+              <a:rPr b="0" sz="1500" i="0" u="none">
+                <a:solidFill>
+                  <a:srgbClr val="475569"/>
+                </a:solidFill>
+                <a:latin typeface="Plus Jakarta Sans"/>
+              </a:rPr>
+              <a:t>Bisección: 15 a 18 iteraciones; Newton: 3 o 4.</a:t>
+            </a:r>
+          </a:p>
+          <a:p>
+            <a:pPr marL="182880" indent="-164592">
+              <a:spcAft>
+                <a:spcPts val="500"/>
+              </a:spcAft>
+              <a:buChar char="•"/>
+            </a:pPr>
+            <a:r>
+              <a:rPr b="0" sz="1500" i="0" u="none">
+                <a:solidFill>
+                  <a:srgbClr val="475569"/>
+                </a:solidFill>
+                <a:latin typeface="Plus Jakarta Sans"/>
+              </a:rPr>
+              <a:t>Sirve para estimar cuándo cualquier contenido alcanza una meta de demanda.</a:t>
+            </a:r>
           </a:p>
         </p:txBody>
       </p:sp>
       <p:pic>
         <p:nvPicPr>
-          <p:cNvPr id="6" name="Picture 5" descr="image.png"/>
-          <p:cNvPicPr>
-            <a:picLocks noChangeAspect="1"/>
-          </p:cNvPicPr>
-          <p:nvPr/>
-        </p:nvPicPr>
-        <p:blipFill>
-          <a:blip r:embed="rId2"/>
-          <a:stretch>
-            <a:fillRect/>
-          </a:stretch>
-        </p:blipFill>
-        <p:spPr>
-          <a:xfrm>
-            <a:off x="838200" y="3146970"/>
-            <a:ext cx="381000" cy="381000"/>
-          </a:xfrm>
-          <a:prstGeom prst="rect">
-            <a:avLst/>
-          </a:prstGeom>
-        </p:spPr>
-      </p:pic>
-      <p:pic>
-        <p:nvPicPr>
-          <p:cNvPr id="7" name="Picture 6" descr="image.png"/>
-          <p:cNvPicPr>
-            <a:picLocks noChangeAspect="1"/>
-          </p:cNvPicPr>
-          <p:nvPr/>
-        </p:nvPicPr>
-        <p:blipFill>
-          <a:blip r:embed="rId3"/>
-          <a:stretch>
-            <a:fillRect/>
-          </a:stretch>
-        </p:blipFill>
-        <p:spPr>
-          <a:xfrm>
-            <a:off x="3638550" y="3146970"/>
-            <a:ext cx="381000" cy="381000"/>
-          </a:xfrm>
-          <a:prstGeom prst="rect">
-            <a:avLst/>
-          </a:prstGeom>
-        </p:spPr>
-      </p:pic>
-      <p:pic>
-        <p:nvPicPr>
-          <p:cNvPr id="8" name="Picture 7" descr="image.png"/>
+          <p:cNvPr id="13" name="Picture 12" descr="grafico_3_comparacion_canciones.png"/>
           <p:cNvPicPr>
             <a:picLocks noChangeAspect="1"/>
           </p:cNvPicPr>
@@ -3820,488 +3754,14 @@
         </p:blipFill>
         <p:spPr>
           <a:xfrm>
-            <a:off x="6438900" y="3146970"/>
-            <a:ext cx="381000" cy="381000"/>
+            <a:off x="644651" y="1280160"/>
+            <a:ext cx="10917936" cy="3639312"/>
           </a:xfrm>
           <a:prstGeom prst="rect">
             <a:avLst/>
           </a:prstGeom>
         </p:spPr>
       </p:pic>
-      <p:pic>
-        <p:nvPicPr>
-          <p:cNvPr id="9" name="Picture 8" descr="image.png"/>
-          <p:cNvPicPr>
-            <a:picLocks noChangeAspect="1"/>
-          </p:cNvPicPr>
-          <p:nvPr/>
-        </p:nvPicPr>
-        <p:blipFill>
-          <a:blip r:embed="rId5"/>
-          <a:stretch>
-            <a:fillRect/>
-          </a:stretch>
-        </p:blipFill>
-        <p:spPr>
-          <a:xfrm>
-            <a:off x="9239250" y="3146970"/>
-            <a:ext cx="381000" cy="381000"/>
-          </a:xfrm>
-          <a:prstGeom prst="rect">
-            <a:avLst/>
-          </a:prstGeom>
-        </p:spPr>
-      </p:pic>
-      <p:pic>
-        <p:nvPicPr>
-          <p:cNvPr id="10" name="Picture 9" descr="image.png"/>
-          <p:cNvPicPr>
-            <a:picLocks noChangeAspect="1"/>
-          </p:cNvPicPr>
-          <p:nvPr/>
-        </p:nvPicPr>
-        <p:blipFill>
-          <a:blip r:embed="rId6"/>
-          <a:stretch>
-            <a:fillRect/>
-          </a:stretch>
-        </p:blipFill>
-        <p:spPr>
-          <a:xfrm>
-            <a:off x="942975" y="3251745"/>
-            <a:ext cx="171450" cy="171450"/>
-          </a:xfrm>
-          <a:prstGeom prst="rect">
-            <a:avLst/>
-          </a:prstGeom>
-        </p:spPr>
-      </p:pic>
-      <p:pic>
-        <p:nvPicPr>
-          <p:cNvPr id="11" name="Picture 10" descr="image.png"/>
-          <p:cNvPicPr>
-            <a:picLocks noChangeAspect="1"/>
-          </p:cNvPicPr>
-          <p:nvPr/>
-        </p:nvPicPr>
-        <p:blipFill>
-          <a:blip r:embed="rId7"/>
-          <a:stretch>
-            <a:fillRect/>
-          </a:stretch>
-        </p:blipFill>
-        <p:spPr>
-          <a:xfrm>
-            <a:off x="3719512" y="3251745"/>
-            <a:ext cx="219075" cy="171450"/>
-          </a:xfrm>
-          <a:prstGeom prst="rect">
-            <a:avLst/>
-          </a:prstGeom>
-        </p:spPr>
-      </p:pic>
-      <p:pic>
-        <p:nvPicPr>
-          <p:cNvPr id="12" name="Picture 11" descr="image.png"/>
-          <p:cNvPicPr>
-            <a:picLocks noChangeAspect="1"/>
-          </p:cNvPicPr>
-          <p:nvPr/>
-        </p:nvPicPr>
-        <p:blipFill>
-          <a:blip r:embed="rId8"/>
-          <a:stretch>
-            <a:fillRect/>
-          </a:stretch>
-        </p:blipFill>
-        <p:spPr>
-          <a:xfrm>
-            <a:off x="6543675" y="3251745"/>
-            <a:ext cx="171450" cy="171450"/>
-          </a:xfrm>
-          <a:prstGeom prst="rect">
-            <a:avLst/>
-          </a:prstGeom>
-        </p:spPr>
-      </p:pic>
-      <p:pic>
-        <p:nvPicPr>
-          <p:cNvPr id="13" name="Picture 12" descr="image.png"/>
-          <p:cNvPicPr>
-            <a:picLocks noChangeAspect="1"/>
-          </p:cNvPicPr>
-          <p:nvPr/>
-        </p:nvPicPr>
-        <p:blipFill>
-          <a:blip r:embed="rId9"/>
-          <a:stretch>
-            <a:fillRect/>
-          </a:stretch>
-        </p:blipFill>
-        <p:spPr>
-          <a:xfrm>
-            <a:off x="9344025" y="3251745"/>
-            <a:ext cx="171450" cy="171450"/>
-          </a:xfrm>
-          <a:prstGeom prst="rect">
-            <a:avLst/>
-          </a:prstGeom>
-        </p:spPr>
-      </p:pic>
-      <p:sp>
-        <p:nvSpPr>
-          <p:cNvPr id="14" name="TextBox 13"/>
-          <p:cNvSpPr txBox="1"/>
-          <p:nvPr/>
-        </p:nvSpPr>
-        <p:spPr>
-          <a:xfrm>
-            <a:off x="609600" y="457200"/>
-            <a:ext cx="11582400" cy="171450"/>
-          </a:xfrm>
-          <a:prstGeom prst="rect">
-            <a:avLst/>
-          </a:prstGeom>
-          <a:noFill/>
-        </p:spPr>
-        <p:txBody>
-          <a:bodyPr wrap="none" lIns="0" rIns="0" tIns="0" bIns="0" anchor="t">
-            <a:spAutoFit/>
-          </a:bodyPr>
-          <a:lstStyle/>
-          <a:p>
-            <a:pPr algn="l"/>
-            <a:r>
-              <a:rPr b="1" sz="1050" i="0" u="none">
-                <a:solidFill>
-                  <a:srgbClr val="E11D48"/>
-                </a:solidFill>
-                <a:latin typeface="Plus Jakarta Sans"/>
-              </a:rPr>
-              <a:t>EVALUACIÓN TÉCNICA</a:t>
-            </a:r>
-          </a:p>
-        </p:txBody>
-      </p:sp>
-      <p:sp>
-        <p:nvSpPr>
-          <p:cNvPr id="15" name="TextBox 14"/>
-          <p:cNvSpPr txBox="1"/>
-          <p:nvPr/>
-        </p:nvSpPr>
-        <p:spPr>
-          <a:xfrm>
-            <a:off x="609600" y="685800"/>
-            <a:ext cx="11582400" cy="388590"/>
-          </a:xfrm>
-          <a:prstGeom prst="rect">
-            <a:avLst/>
-          </a:prstGeom>
-          <a:noFill/>
-        </p:spPr>
-        <p:txBody>
-          <a:bodyPr wrap="none" lIns="0" rIns="0" tIns="0" bIns="0" anchor="t">
-            <a:spAutoFit/>
-          </a:bodyPr>
-          <a:lstStyle/>
-          <a:p>
-            <a:pPr algn="l">
-              <a:lnSpc>
-                <a:spcPts val="3060"/>
-              </a:lnSpc>
-            </a:pPr>
-            <a:r>
-              <a:rPr b="1" sz="2550" i="0" u="none">
-                <a:solidFill>
-                  <a:srgbClr val="0F172A"/>
-                </a:solidFill>
-                <a:latin typeface="Space Grotesk"/>
-              </a:rPr>
-              <a:t>Límites y Condiciones de Borde</a:t>
-            </a:r>
-          </a:p>
-        </p:txBody>
-      </p:sp>
-      <p:sp>
-        <p:nvSpPr>
-          <p:cNvPr id="16" name="TextBox 15"/>
-          <p:cNvSpPr txBox="1"/>
-          <p:nvPr/>
-        </p:nvSpPr>
-        <p:spPr>
-          <a:xfrm>
-            <a:off x="838200" y="3642270"/>
-            <a:ext cx="2194560" cy="219075"/>
-          </a:xfrm>
-          <a:prstGeom prst="rect">
-            <a:avLst/>
-          </a:prstGeom>
-          <a:noFill/>
-        </p:spPr>
-        <p:txBody>
-          <a:bodyPr wrap="none" lIns="0" rIns="0" tIns="0" bIns="0" anchor="t">
-            <a:spAutoFit/>
-          </a:bodyPr>
-          <a:lstStyle/>
-          <a:p>
-            <a:pPr algn="l"/>
-            <a:r>
-              <a:rPr b="1" sz="1600" i="0" u="none">
-                <a:solidFill>
-                  <a:srgbClr val="0F172A"/>
-                </a:solidFill>
-                <a:latin typeface="Space Grotesk"/>
-              </a:rPr>
-              <a:t>Alcance de los datos</a:t>
-            </a:r>
-          </a:p>
-        </p:txBody>
-      </p:sp>
-      <p:sp>
-        <p:nvSpPr>
-          <p:cNvPr id="17" name="TextBox 16"/>
-          <p:cNvSpPr txBox="1"/>
-          <p:nvPr/>
-        </p:nvSpPr>
-        <p:spPr>
-          <a:xfrm>
-            <a:off x="838200" y="3975645"/>
-            <a:ext cx="2209800" cy="768096"/>
-          </a:xfrm>
-          <a:prstGeom prst="rect">
-            <a:avLst/>
-          </a:prstGeom>
-          <a:noFill/>
-        </p:spPr>
-        <p:txBody>
-          <a:bodyPr wrap="square" lIns="0" rIns="0" tIns="0" bIns="0" anchor="t">
-            <a:spAutoFit/>
-          </a:bodyPr>
-          <a:lstStyle/>
-          <a:p>
-            <a:pPr algn="l"/>
-            <a:r>
-              <a:rPr b="0" sz="1500" i="0" u="none">
-                <a:solidFill>
-                  <a:srgbClr val="475569"/>
-                </a:solidFill>
-                <a:latin typeface="Plus Jakarta Sans"/>
-              </a:rPr>
-              <a:t>Solo Spotify México, Top 200.</a:t>
-            </a:r>
-          </a:p>
-        </p:txBody>
-      </p:sp>
-      <p:sp>
-        <p:nvSpPr>
-          <p:cNvPr id="18" name="TextBox 17"/>
-          <p:cNvSpPr txBox="1"/>
-          <p:nvPr/>
-        </p:nvSpPr>
-        <p:spPr>
-          <a:xfrm>
-            <a:off x="3638550" y="3642270"/>
-            <a:ext cx="2194560" cy="219075"/>
-          </a:xfrm>
-          <a:prstGeom prst="rect">
-            <a:avLst/>
-          </a:prstGeom>
-          <a:noFill/>
-        </p:spPr>
-        <p:txBody>
-          <a:bodyPr wrap="none" lIns="0" rIns="0" tIns="0" bIns="0" anchor="t">
-            <a:spAutoFit/>
-          </a:bodyPr>
-          <a:lstStyle/>
-          <a:p>
-            <a:pPr algn="l"/>
-            <a:r>
-              <a:rPr b="1" sz="1600" i="0" u="none">
-                <a:solidFill>
-                  <a:srgbClr val="0F172A"/>
-                </a:solidFill>
-                <a:latin typeface="Space Grotesk"/>
-              </a:rPr>
-              <a:t>Datos semanales</a:t>
-            </a:r>
-          </a:p>
-        </p:txBody>
-      </p:sp>
-      <p:sp>
-        <p:nvSpPr>
-          <p:cNvPr id="19" name="TextBox 18"/>
-          <p:cNvSpPr txBox="1"/>
-          <p:nvPr/>
-        </p:nvSpPr>
-        <p:spPr>
-          <a:xfrm>
-            <a:off x="3638550" y="3975645"/>
-            <a:ext cx="2209800" cy="768096"/>
-          </a:xfrm>
-          <a:prstGeom prst="rect">
-            <a:avLst/>
-          </a:prstGeom>
-          <a:noFill/>
-        </p:spPr>
-        <p:txBody>
-          <a:bodyPr wrap="square" lIns="0" rIns="0" tIns="0" bIns="0" anchor="t">
-            <a:spAutoFit/>
-          </a:bodyPr>
-          <a:lstStyle/>
-          <a:p>
-            <a:pPr algn="l"/>
-            <a:r>
-              <a:rPr b="0" sz="1500" i="0" u="none">
-                <a:solidFill>
-                  <a:srgbClr val="475569"/>
-                </a:solidFill>
-                <a:latin typeface="Plus Jakarta Sans"/>
-              </a:rPr>
-              <a:t>Suponemos crecimiento suave dentro de la semana.</a:t>
-            </a:r>
-          </a:p>
-        </p:txBody>
-      </p:sp>
-      <p:sp>
-        <p:nvSpPr>
-          <p:cNvPr id="20" name="TextBox 19"/>
-          <p:cNvSpPr txBox="1"/>
-          <p:nvPr/>
-        </p:nvSpPr>
-        <p:spPr>
-          <a:xfrm>
-            <a:off x="6438900" y="3642270"/>
-            <a:ext cx="2194560" cy="219075"/>
-          </a:xfrm>
-          <a:prstGeom prst="rect">
-            <a:avLst/>
-          </a:prstGeom>
-          <a:noFill/>
-        </p:spPr>
-        <p:txBody>
-          <a:bodyPr wrap="none" lIns="0" rIns="0" tIns="0" bIns="0" anchor="t">
-            <a:spAutoFit/>
-          </a:bodyPr>
-          <a:lstStyle/>
-          <a:p>
-            <a:pPr algn="l"/>
-            <a:r>
-              <a:rPr b="1" sz="1600" i="0" u="none">
-                <a:solidFill>
-                  <a:srgbClr val="0F172A"/>
-                </a:solidFill>
-                <a:latin typeface="Space Grotesk"/>
-              </a:rPr>
-              <a:t>Interpolación</a:t>
-            </a:r>
-          </a:p>
-        </p:txBody>
-      </p:sp>
-      <p:sp>
-        <p:nvSpPr>
-          <p:cNvPr id="21" name="TextBox 20"/>
-          <p:cNvSpPr txBox="1"/>
-          <p:nvPr/>
-        </p:nvSpPr>
-        <p:spPr>
-          <a:xfrm>
-            <a:off x="6438900" y="3975645"/>
-            <a:ext cx="2209800" cy="768096"/>
-          </a:xfrm>
-          <a:prstGeom prst="rect">
-            <a:avLst/>
-          </a:prstGeom>
-          <a:noFill/>
-        </p:spPr>
-        <p:txBody>
-          <a:bodyPr wrap="square" lIns="0" rIns="0" tIns="0" bIns="0" anchor="t">
-            <a:spAutoFit/>
-          </a:bodyPr>
-          <a:lstStyle/>
-          <a:p>
-            <a:pPr algn="l"/>
-            <a:r>
-              <a:rPr b="0" sz="1500" i="0" u="none">
-                <a:solidFill>
-                  <a:srgbClr val="475569"/>
-                </a:solidFill>
-                <a:latin typeface="Plus Jakarta Sans"/>
-              </a:rPr>
-              <a:t>Entre datos medidos: no predice a futuro.</a:t>
-            </a:r>
-          </a:p>
-        </p:txBody>
-      </p:sp>
-      <p:sp>
-        <p:nvSpPr>
-          <p:cNvPr id="22" name="TextBox 21"/>
-          <p:cNvSpPr txBox="1"/>
-          <p:nvPr/>
-        </p:nvSpPr>
-        <p:spPr>
-          <a:xfrm>
-            <a:off x="9239250" y="3642270"/>
-            <a:ext cx="2194560" cy="219075"/>
-          </a:xfrm>
-          <a:prstGeom prst="rect">
-            <a:avLst/>
-          </a:prstGeom>
-          <a:noFill/>
-        </p:spPr>
-        <p:txBody>
-          <a:bodyPr wrap="none" lIns="0" rIns="0" tIns="0" bIns="0" anchor="t">
-            <a:spAutoFit/>
-          </a:bodyPr>
-          <a:lstStyle/>
-          <a:p>
-            <a:pPr algn="l"/>
-            <a:r>
-              <a:rPr b="1" sz="1600" i="0" u="none">
-                <a:solidFill>
-                  <a:srgbClr val="0F172A"/>
-                </a:solidFill>
-                <a:latin typeface="Space Grotesk"/>
-              </a:rPr>
-              <a:t>Supuestos de audio</a:t>
-            </a:r>
-          </a:p>
-        </p:txBody>
-      </p:sp>
-      <p:sp>
-        <p:nvSpPr>
-          <p:cNvPr id="23" name="TextBox 22"/>
-          <p:cNvSpPr txBox="1"/>
-          <p:nvPr/>
-        </p:nvSpPr>
-        <p:spPr>
-          <a:xfrm>
-            <a:off x="9239250" y="3975645"/>
-            <a:ext cx="2209800" cy="768096"/>
-          </a:xfrm>
-          <a:prstGeom prst="rect">
-            <a:avLst/>
-          </a:prstGeom>
-          <a:noFill/>
-        </p:spPr>
-        <p:txBody>
-          <a:bodyPr wrap="square" lIns="0" rIns="0" tIns="0" bIns="0" anchor="t">
-            <a:spAutoFit/>
-          </a:bodyPr>
-          <a:lstStyle/>
-          <a:p>
-            <a:pPr algn="l"/>
-            <a:r>
-              <a:rPr b="0" sz="1500" i="0" u="none">
-                <a:solidFill>
-                  <a:srgbClr val="475569"/>
-                </a:solidFill>
-                <a:latin typeface="Plus Jakarta Sans"/>
-              </a:rPr>
-              <a:t>El ancho de banda usa supuestos (3:06, 160 kbps).</a:t>
-            </a:r>
-          </a:p>
-        </p:txBody>
-      </p:sp>
     </p:spTree>
   </p:cSld>
   <p:clrMapOvr>
@@ -4336,149 +3796,13 @@
         </p:nvSpPr>
         <p:spPr>
           <a:xfrm>
-            <a:off x="609600" y="1379190"/>
-            <a:ext cx="3454449" cy="1266825"/>
+            <a:off x="609600" y="2880270"/>
+            <a:ext cx="2571750" cy="2019300"/>
           </a:xfrm>
           <a:prstGeom prst="roundRect">
             <a:avLst>
-              <a:gd name="adj" fmla="val 12030"/>
+              <a:gd name="adj" fmla="val 7547"/>
             </a:avLst>
-          </a:prstGeom>
-          <a:solidFill>
-            <a:srgbClr val="FFF1F2"/>
-          </a:solidFill>
-          <a:ln>
-            <a:noFill/>
-          </a:ln>
-          <a:effectLst/>
-        </p:spPr>
-        <p:style>
-          <a:lnRef idx="1">
-            <a:schemeClr val="accent1"/>
-          </a:lnRef>
-          <a:fillRef idx="3">
-            <a:schemeClr val="accent1"/>
-          </a:fillRef>
-          <a:effectRef idx="2">
-            <a:schemeClr val="accent1"/>
-          </a:effectRef>
-          <a:fontRef idx="minor">
-            <a:schemeClr val="lt1"/>
-          </a:fontRef>
-        </p:style>
-        <p:txBody>
-          <a:bodyPr rtlCol="0" anchor="ctr"/>
-          <a:lstStyle/>
-          <a:p>
-            <a:pPr algn="ctr"/>
-          </a:p>
-        </p:txBody>
-      </p:sp>
-      <p:sp>
-        <p:nvSpPr>
-          <p:cNvPr id="3" name="Rounded Rectangle 2"/>
-          <p:cNvSpPr/>
-          <p:nvPr/>
-        </p:nvSpPr>
-        <p:spPr>
-          <a:xfrm>
-            <a:off x="4368849" y="1379190"/>
-            <a:ext cx="3454449" cy="1266825"/>
-          </a:xfrm>
-          <a:prstGeom prst="roundRect">
-            <a:avLst>
-              <a:gd name="adj" fmla="val 12030"/>
-            </a:avLst>
-          </a:prstGeom>
-          <a:solidFill>
-            <a:srgbClr val="F0F9FF"/>
-          </a:solidFill>
-          <a:ln>
-            <a:noFill/>
-          </a:ln>
-          <a:effectLst/>
-        </p:spPr>
-        <p:style>
-          <a:lnRef idx="1">
-            <a:schemeClr val="accent1"/>
-          </a:lnRef>
-          <a:fillRef idx="3">
-            <a:schemeClr val="accent1"/>
-          </a:fillRef>
-          <a:effectRef idx="2">
-            <a:schemeClr val="accent1"/>
-          </a:effectRef>
-          <a:fontRef idx="minor">
-            <a:schemeClr val="lt1"/>
-          </a:fontRef>
-        </p:style>
-        <p:txBody>
-          <a:bodyPr rtlCol="0" anchor="ctr"/>
-          <a:lstStyle/>
-          <a:p>
-            <a:pPr algn="ctr"/>
-          </a:p>
-        </p:txBody>
-      </p:sp>
-      <p:sp>
-        <p:nvSpPr>
-          <p:cNvPr id="4" name="Rounded Rectangle 3"/>
-          <p:cNvSpPr/>
-          <p:nvPr/>
-        </p:nvSpPr>
-        <p:spPr>
-          <a:xfrm>
-            <a:off x="8128099" y="1379190"/>
-            <a:ext cx="3454449" cy="1266825"/>
-          </a:xfrm>
-          <a:prstGeom prst="roundRect">
-            <a:avLst>
-              <a:gd name="adj" fmla="val 12030"/>
-            </a:avLst>
-          </a:prstGeom>
-          <a:solidFill>
-            <a:srgbClr val="F0FDF4"/>
-          </a:solidFill>
-          <a:ln>
-            <a:noFill/>
-          </a:ln>
-          <a:effectLst/>
-        </p:spPr>
-        <p:style>
-          <a:lnRef idx="1">
-            <a:schemeClr val="accent1"/>
-          </a:lnRef>
-          <a:fillRef idx="3">
-            <a:schemeClr val="accent1"/>
-          </a:fillRef>
-          <a:effectRef idx="2">
-            <a:schemeClr val="accent1"/>
-          </a:effectRef>
-          <a:fontRef idx="minor">
-            <a:schemeClr val="lt1"/>
-          </a:fontRef>
-        </p:style>
-        <p:txBody>
-          <a:bodyPr rtlCol="0" anchor="ctr"/>
-          <a:lstStyle/>
-          <a:p>
-            <a:pPr algn="ctr"/>
-          </a:p>
-        </p:txBody>
-      </p:sp>
-      <p:sp>
-        <p:nvSpPr>
-          <p:cNvPr id="5" name="Rectangle 4"/>
-          <p:cNvSpPr/>
-          <p:nvPr/>
-        </p:nvSpPr>
-        <p:spPr>
-          <a:xfrm>
-            <a:off x="609600" y="4137570"/>
-            <a:ext cx="5372100" cy="1076325"/>
-          </a:xfrm>
-          <a:prstGeom prst="rect">
-            <a:avLst/>
           </a:prstGeom>
           <a:solidFill>
             <a:srgbClr val="F8FAFC"/>
@@ -4512,17 +3836,19 @@
       </p:sp>
       <p:sp>
         <p:nvSpPr>
-          <p:cNvPr id="6" name="Rectangle 5"/>
+          <p:cNvPr id="3" name="Rounded Rectangle 2"/>
           <p:cNvSpPr/>
           <p:nvPr/>
         </p:nvSpPr>
         <p:spPr>
           <a:xfrm>
-            <a:off x="6210300" y="4137570"/>
-            <a:ext cx="5372100" cy="1076325"/>
-          </a:xfrm>
-          <a:prstGeom prst="rect">
-            <a:avLst/>
+            <a:off x="3409950" y="2880270"/>
+            <a:ext cx="2571750" cy="2019300"/>
+          </a:xfrm>
+          <a:prstGeom prst="roundRect">
+            <a:avLst>
+              <a:gd name="adj" fmla="val 7547"/>
+            </a:avLst>
           </a:prstGeom>
           <a:solidFill>
             <a:srgbClr val="F8FAFC"/>
@@ -4556,541 +3882,19 @@
       </p:sp>
       <p:sp>
         <p:nvSpPr>
-          <p:cNvPr id="7" name="Rectangle 6"/>
+          <p:cNvPr id="4" name="Rounded Rectangle 3"/>
           <p:cNvSpPr/>
           <p:nvPr/>
         </p:nvSpPr>
         <p:spPr>
           <a:xfrm>
-            <a:off x="609600" y="4137570"/>
-            <a:ext cx="38100" cy="1076325"/>
-          </a:xfrm>
-          <a:prstGeom prst="rect">
-            <a:avLst/>
-          </a:prstGeom>
-          <a:solidFill>
-            <a:srgbClr val="E11D48"/>
-          </a:solidFill>
-          <a:ln>
-            <a:noFill/>
-          </a:ln>
-          <a:effectLst/>
-        </p:spPr>
-        <p:style>
-          <a:lnRef idx="1">
-            <a:schemeClr val="accent1"/>
-          </a:lnRef>
-          <a:fillRef idx="3">
-            <a:schemeClr val="accent1"/>
-          </a:fillRef>
-          <a:effectRef idx="2">
-            <a:schemeClr val="accent1"/>
-          </a:effectRef>
-          <a:fontRef idx="minor">
-            <a:schemeClr val="lt1"/>
-          </a:fontRef>
-        </p:style>
-        <p:txBody>
-          <a:bodyPr rtlCol="0" anchor="ctr"/>
-          <a:lstStyle/>
-          <a:p>
-            <a:pPr algn="ctr"/>
-          </a:p>
-        </p:txBody>
-      </p:sp>
-      <p:sp>
-        <p:nvSpPr>
-          <p:cNvPr id="8" name="Rectangle 7"/>
-          <p:cNvSpPr/>
-          <p:nvPr/>
-        </p:nvSpPr>
-        <p:spPr>
-          <a:xfrm>
-            <a:off x="6210300" y="4137570"/>
-            <a:ext cx="38100" cy="1076325"/>
-          </a:xfrm>
-          <a:prstGeom prst="rect">
-            <a:avLst/>
-          </a:prstGeom>
-          <a:solidFill>
-            <a:srgbClr val="0284C7"/>
-          </a:solidFill>
-          <a:ln>
-            <a:noFill/>
-          </a:ln>
-          <a:effectLst/>
-        </p:spPr>
-        <p:style>
-          <a:lnRef idx="1">
-            <a:schemeClr val="accent1"/>
-          </a:lnRef>
-          <a:fillRef idx="3">
-            <a:schemeClr val="accent1"/>
-          </a:fillRef>
-          <a:effectRef idx="2">
-            <a:schemeClr val="accent1"/>
-          </a:effectRef>
-          <a:fontRef idx="minor">
-            <a:schemeClr val="lt1"/>
-          </a:fontRef>
-        </p:style>
-        <p:txBody>
-          <a:bodyPr rtlCol="0" anchor="ctr"/>
-          <a:lstStyle/>
-          <a:p>
-            <a:pPr algn="ctr"/>
-          </a:p>
-        </p:txBody>
-      </p:sp>
-      <p:sp>
-        <p:nvSpPr>
-          <p:cNvPr id="9" name="TextBox 8"/>
-          <p:cNvSpPr txBox="1"/>
-          <p:nvPr/>
-        </p:nvSpPr>
-        <p:spPr>
-          <a:xfrm>
-            <a:off x="609600" y="457200"/>
-            <a:ext cx="11582400" cy="171450"/>
-          </a:xfrm>
-          <a:prstGeom prst="rect">
-            <a:avLst/>
-          </a:prstGeom>
-          <a:noFill/>
-        </p:spPr>
-        <p:txBody>
-          <a:bodyPr wrap="none" lIns="0" rIns="0" tIns="0" bIns="0" anchor="t">
-            <a:spAutoFit/>
-          </a:bodyPr>
-          <a:lstStyle/>
-          <a:p>
-            <a:pPr algn="l"/>
-            <a:r>
-              <a:rPr b="1" sz="1050" i="0" u="none">
-                <a:solidFill>
-                  <a:srgbClr val="E11D48"/>
-                </a:solidFill>
-                <a:latin typeface="Plus Jakarta Sans"/>
-              </a:rPr>
-              <a:t>SÍNTESIS DEL PROYECTO</a:t>
-            </a:r>
-          </a:p>
-        </p:txBody>
-      </p:sp>
-      <p:sp>
-        <p:nvSpPr>
-          <p:cNvPr id="10" name="TextBox 9"/>
-          <p:cNvSpPr txBox="1"/>
-          <p:nvPr/>
-        </p:nvSpPr>
-        <p:spPr>
-          <a:xfrm>
-            <a:off x="609600" y="685800"/>
-            <a:ext cx="11582400" cy="388590"/>
-          </a:xfrm>
-          <a:prstGeom prst="rect">
-            <a:avLst/>
-          </a:prstGeom>
-          <a:noFill/>
-        </p:spPr>
-        <p:txBody>
-          <a:bodyPr wrap="none" lIns="0" rIns="0" tIns="0" bIns="0" anchor="t">
-            <a:spAutoFit/>
-          </a:bodyPr>
-          <a:lstStyle/>
-          <a:p>
-            <a:pPr algn="l">
-              <a:lnSpc>
-                <a:spcPts val="3060"/>
-              </a:lnSpc>
-            </a:pPr>
-            <a:r>
-              <a:rPr b="1" sz="2550" i="0" u="none">
-                <a:solidFill>
-                  <a:srgbClr val="0F172A"/>
-                </a:solidFill>
-                <a:latin typeface="Space Grotesk"/>
-              </a:rPr>
-              <a:t>Conclusiones y aplicación a la ingeniería</a:t>
-            </a:r>
-          </a:p>
-        </p:txBody>
-      </p:sp>
-      <p:sp>
-        <p:nvSpPr>
-          <p:cNvPr id="11" name="TextBox 10"/>
-          <p:cNvSpPr txBox="1"/>
-          <p:nvPr/>
-        </p:nvSpPr>
-        <p:spPr>
-          <a:xfrm>
-            <a:off x="511168" y="1645890"/>
-            <a:ext cx="3651312" cy="457200"/>
-          </a:xfrm>
-          <a:prstGeom prst="rect">
-            <a:avLst/>
-          </a:prstGeom>
-          <a:noFill/>
-        </p:spPr>
-        <p:txBody>
-          <a:bodyPr wrap="none" lIns="0" rIns="0" tIns="0" bIns="0" anchor="t">
-            <a:spAutoFit/>
-          </a:bodyPr>
-          <a:lstStyle/>
-          <a:p>
-            <a:pPr algn="ctr">
-              <a:lnSpc>
-                <a:spcPts val="3600"/>
-              </a:lnSpc>
-            </a:pPr>
-            <a:r>
-              <a:rPr b="1" sz="3600" i="0" u="none">
-                <a:solidFill>
-                  <a:srgbClr val="E11D48"/>
-                </a:solidFill>
-                <a:latin typeface="Plus Jakarta Sans"/>
-              </a:rPr>
-              <a:t>28/09/2023</a:t>
-            </a:r>
-          </a:p>
-        </p:txBody>
-      </p:sp>
-      <p:sp>
-        <p:nvSpPr>
-          <p:cNvPr id="12" name="TextBox 11"/>
-          <p:cNvSpPr txBox="1"/>
-          <p:nvPr/>
-        </p:nvSpPr>
-        <p:spPr>
-          <a:xfrm>
-            <a:off x="511168" y="2179290"/>
-            <a:ext cx="3651312" cy="200025"/>
-          </a:xfrm>
-          <a:prstGeom prst="rect">
-            <a:avLst/>
-          </a:prstGeom>
-          <a:noFill/>
-        </p:spPr>
-        <p:txBody>
-          <a:bodyPr wrap="none" lIns="0" rIns="0" tIns="0" bIns="0" anchor="t">
-            <a:spAutoFit/>
-          </a:bodyPr>
-          <a:lstStyle/>
-          <a:p>
-            <a:pPr algn="ctr"/>
-            <a:r>
-              <a:rPr b="1" sz="1200" i="0" u="none">
-                <a:solidFill>
-                  <a:srgbClr val="475569"/>
-                </a:solidFill>
-                <a:latin typeface="Plus Jakarta Sans"/>
-              </a:rPr>
-              <a:t>Hito de 100 M</a:t>
-            </a:r>
-          </a:p>
-        </p:txBody>
-      </p:sp>
-      <p:sp>
-        <p:nvSpPr>
-          <p:cNvPr id="13" name="TextBox 12"/>
-          <p:cNvSpPr txBox="1"/>
-          <p:nvPr/>
-        </p:nvSpPr>
-        <p:spPr>
-          <a:xfrm>
-            <a:off x="4270418" y="1645890"/>
-            <a:ext cx="3651312" cy="457200"/>
-          </a:xfrm>
-          <a:prstGeom prst="rect">
-            <a:avLst/>
-          </a:prstGeom>
-          <a:noFill/>
-        </p:spPr>
-        <p:txBody>
-          <a:bodyPr wrap="none" lIns="0" rIns="0" tIns="0" bIns="0" anchor="t">
-            <a:spAutoFit/>
-          </a:bodyPr>
-          <a:lstStyle/>
-          <a:p>
-            <a:pPr algn="ctr">
-              <a:lnSpc>
-                <a:spcPts val="3600"/>
-              </a:lnSpc>
-            </a:pPr>
-            <a:r>
-              <a:rPr b="1" sz="3600" i="0" u="none">
-                <a:solidFill>
-                  <a:srgbClr val="0284C7"/>
-                </a:solidFill>
-                <a:latin typeface="Plus Jakarta Sans"/>
-              </a:rPr>
-              <a:t>3 vs 15</a:t>
-            </a:r>
-          </a:p>
-        </p:txBody>
-      </p:sp>
-      <p:sp>
-        <p:nvSpPr>
-          <p:cNvPr id="14" name="TextBox 13"/>
-          <p:cNvSpPr txBox="1"/>
-          <p:nvPr/>
-        </p:nvSpPr>
-        <p:spPr>
-          <a:xfrm>
-            <a:off x="4270418" y="2179290"/>
-            <a:ext cx="3651312" cy="200025"/>
-          </a:xfrm>
-          <a:prstGeom prst="rect">
-            <a:avLst/>
-          </a:prstGeom>
-          <a:noFill/>
-        </p:spPr>
-        <p:txBody>
-          <a:bodyPr wrap="none" lIns="0" rIns="0" tIns="0" bIns="0" anchor="t">
-            <a:spAutoFit/>
-          </a:bodyPr>
-          <a:lstStyle/>
-          <a:p>
-            <a:pPr algn="ctr"/>
-            <a:r>
-              <a:rPr b="1" sz="1200" i="0" u="none">
-                <a:solidFill>
-                  <a:srgbClr val="475569"/>
-                </a:solidFill>
-                <a:latin typeface="Plus Jakarta Sans"/>
-              </a:rPr>
-              <a:t>Iteraciones Newton vs bisección</a:t>
-            </a:r>
-          </a:p>
-        </p:txBody>
-      </p:sp>
-      <p:sp>
-        <p:nvSpPr>
-          <p:cNvPr id="15" name="TextBox 14"/>
-          <p:cNvSpPr txBox="1"/>
-          <p:nvPr/>
-        </p:nvSpPr>
-        <p:spPr>
-          <a:xfrm>
-            <a:off x="8029668" y="1645890"/>
-            <a:ext cx="3651312" cy="457200"/>
-          </a:xfrm>
-          <a:prstGeom prst="rect">
-            <a:avLst/>
-          </a:prstGeom>
-          <a:noFill/>
-        </p:spPr>
-        <p:txBody>
-          <a:bodyPr wrap="none" lIns="0" rIns="0" tIns="0" bIns="0" anchor="t">
-            <a:spAutoFit/>
-          </a:bodyPr>
-          <a:lstStyle/>
-          <a:p>
-            <a:pPr algn="ctr">
-              <a:lnSpc>
-                <a:spcPts val="3600"/>
-              </a:lnSpc>
-            </a:pPr>
-            <a:r>
-              <a:rPr b="1" sz="3600" i="0" u="none">
-                <a:solidFill>
-                  <a:srgbClr val="16A34A"/>
-                </a:solidFill>
-                <a:latin typeface="Plus Jakarta Sans"/>
-              </a:rPr>
-              <a:t>≈ 205 Mbps</a:t>
-            </a:r>
-          </a:p>
-        </p:txBody>
-      </p:sp>
-      <p:sp>
-        <p:nvSpPr>
-          <p:cNvPr id="16" name="TextBox 15"/>
-          <p:cNvSpPr txBox="1"/>
-          <p:nvPr/>
-        </p:nvSpPr>
-        <p:spPr>
-          <a:xfrm>
-            <a:off x="8029668" y="2179290"/>
-            <a:ext cx="3651312" cy="200025"/>
-          </a:xfrm>
-          <a:prstGeom prst="rect">
-            <a:avLst/>
-          </a:prstGeom>
-          <a:noFill/>
-        </p:spPr>
-        <p:txBody>
-          <a:bodyPr wrap="none" lIns="0" rIns="0" tIns="0" bIns="0" anchor="t">
-            <a:spAutoFit/>
-          </a:bodyPr>
-          <a:lstStyle/>
-          <a:p>
-            <a:pPr algn="ctr"/>
-            <a:r>
-              <a:rPr b="1" sz="1200" i="0" u="none">
-                <a:solidFill>
-                  <a:srgbClr val="475569"/>
-                </a:solidFill>
-                <a:latin typeface="Plus Jakarta Sans"/>
-              </a:rPr>
-              <a:t>Semana pico</a:t>
-            </a:r>
-          </a:p>
-        </p:txBody>
-      </p:sp>
-      <p:sp>
-        <p:nvSpPr>
-          <p:cNvPr id="17" name="TextBox 16"/>
-          <p:cNvSpPr txBox="1"/>
-          <p:nvPr/>
-        </p:nvSpPr>
-        <p:spPr>
-          <a:xfrm>
-            <a:off x="876300" y="4328070"/>
-            <a:ext cx="4754880" cy="219075"/>
-          </a:xfrm>
-          <a:prstGeom prst="rect">
-            <a:avLst/>
-          </a:prstGeom>
-          <a:noFill/>
-        </p:spPr>
-        <p:txBody>
-          <a:bodyPr wrap="none" lIns="0" rIns="0" tIns="0" bIns="0" anchor="t">
-            <a:spAutoFit/>
-          </a:bodyPr>
-          <a:lstStyle/>
-          <a:p>
-            <a:pPr algn="l"/>
-            <a:r>
-              <a:rPr b="1" sz="1350" i="0" u="none">
-                <a:solidFill>
-                  <a:srgbClr val="0F172A"/>
-                </a:solidFill>
-                <a:latin typeface="Space Grotesk"/>
-              </a:rPr>
-              <a:t>Interpolación de Newton</a:t>
-            </a:r>
-          </a:p>
-        </p:txBody>
-      </p:sp>
-      <p:sp>
-        <p:nvSpPr>
-          <p:cNvPr id="18" name="TextBox 17"/>
-          <p:cNvSpPr txBox="1"/>
-          <p:nvPr/>
-        </p:nvSpPr>
-        <p:spPr>
-          <a:xfrm>
-            <a:off x="876300" y="4585245"/>
-            <a:ext cx="4972050" cy="438150"/>
-          </a:xfrm>
-          <a:prstGeom prst="rect">
-            <a:avLst/>
-          </a:prstGeom>
-          <a:noFill/>
-        </p:spPr>
-        <p:txBody>
-          <a:bodyPr wrap="square" lIns="0" rIns="0" tIns="0" bIns="0" anchor="t">
-            <a:spAutoFit/>
-          </a:bodyPr>
-          <a:lstStyle/>
-          <a:p>
-            <a:pPr algn="l"/>
-            <a:r>
-              <a:rPr b="0" sz="1350" i="0" u="none">
-                <a:solidFill>
-                  <a:srgbClr val="64748B"/>
-                </a:solidFill>
-                <a:latin typeface="Plus Jakarta Sans"/>
-              </a:rPr>
-              <a:t>Estima el instante entre dos mediciones semanales.</a:t>
-            </a:r>
-          </a:p>
-        </p:txBody>
-      </p:sp>
-      <p:sp>
-        <p:nvSpPr>
-          <p:cNvPr id="19" name="TextBox 18"/>
-          <p:cNvSpPr txBox="1"/>
-          <p:nvPr/>
-        </p:nvSpPr>
-        <p:spPr>
-          <a:xfrm>
-            <a:off x="6477000" y="4328070"/>
-            <a:ext cx="4754880" cy="219075"/>
-          </a:xfrm>
-          <a:prstGeom prst="rect">
-            <a:avLst/>
-          </a:prstGeom>
-          <a:noFill/>
-        </p:spPr>
-        <p:txBody>
-          <a:bodyPr wrap="none" lIns="0" rIns="0" tIns="0" bIns="0" anchor="t">
-            <a:spAutoFit/>
-          </a:bodyPr>
-          <a:lstStyle/>
-          <a:p>
-            <a:pPr algn="l"/>
-            <a:r>
-              <a:rPr b="1" sz="1350" i="0" u="none">
-                <a:solidFill>
-                  <a:srgbClr val="0F172A"/>
-                </a:solidFill>
-                <a:latin typeface="Space Grotesk"/>
-              </a:rPr>
-              <a:t>Métodos de raíces</a:t>
-            </a:r>
-          </a:p>
-        </p:txBody>
-      </p:sp>
-      <p:sp>
-        <p:nvSpPr>
-          <p:cNvPr id="20" name="TextBox 19"/>
-          <p:cNvSpPr txBox="1"/>
-          <p:nvPr/>
-        </p:nvSpPr>
-        <p:spPr>
-          <a:xfrm>
-            <a:off x="6477000" y="4585245"/>
-            <a:ext cx="4972050" cy="438150"/>
-          </a:xfrm>
-          <a:prstGeom prst="rect">
-            <a:avLst/>
-          </a:prstGeom>
-          <a:noFill/>
-        </p:spPr>
-        <p:txBody>
-          <a:bodyPr wrap="square" lIns="0" rIns="0" tIns="0" bIns="0" anchor="t">
-            <a:spAutoFit/>
-          </a:bodyPr>
-          <a:lstStyle/>
-          <a:p>
-            <a:pPr algn="l"/>
-            <a:r>
-              <a:rPr b="0" sz="1350" i="0" u="none">
-                <a:solidFill>
-                  <a:srgbClr val="64748B"/>
-                </a:solidFill>
-                <a:latin typeface="Plus Jakarta Sans"/>
-              </a:rPr>
-              <a:t>Newton-Raphson converge mucho más rápido; bisección es más segura.</a:t>
-            </a:r>
-          </a:p>
-        </p:txBody>
-      </p:sp>
-      <p:sp>
-        <p:nvSpPr>
-          <p:cNvPr id="5" name="Rectangle 4"/>
-          <p:cNvSpPr/>
-          <p:nvPr/>
-        </p:nvSpPr>
-        <p:spPr>
-          <a:xfrm>
-            <a:off x="609600" y="2900000"/>
-            <a:ext cx="10972800" cy="1076325"/>
-          </a:xfrm>
-          <a:prstGeom prst="rect">
-            <a:avLst/>
+            <a:off x="6210300" y="2880270"/>
+            <a:ext cx="2571750" cy="2019300"/>
+          </a:xfrm>
+          <a:prstGeom prst="roundRect">
+            <a:avLst>
+              <a:gd name="adj" fmla="val 7547"/>
+            </a:avLst>
           </a:prstGeom>
           <a:solidFill>
             <a:srgbClr val="F8FAFC"/>
@@ -5124,20 +3928,22 @@
       </p:sp>
       <p:sp>
         <p:nvSpPr>
-          <p:cNvPr id="7" name="Rectangle 6"/>
+          <p:cNvPr id="5" name="Rounded Rectangle 4"/>
           <p:cNvSpPr/>
           <p:nvPr/>
         </p:nvSpPr>
         <p:spPr>
           <a:xfrm>
-            <a:off x="609600" y="2900000"/>
-            <a:ext cx="38100" cy="1076325"/>
-          </a:xfrm>
-          <a:prstGeom prst="rect">
-            <a:avLst/>
+            <a:off x="9010650" y="2880270"/>
+            <a:ext cx="2571750" cy="2019300"/>
+          </a:xfrm>
+          <a:prstGeom prst="roundRect">
+            <a:avLst>
+              <a:gd name="adj" fmla="val 7547"/>
+            </a:avLst>
           </a:prstGeom>
           <a:solidFill>
-            <a:srgbClr val="16A34A"/>
+            <a:srgbClr val="F8FAFC"/>
           </a:solidFill>
           <a:ln>
             <a:noFill/>
@@ -5166,6 +3972,307 @@
           </a:p>
         </p:txBody>
       </p:sp>
+      <p:pic>
+        <p:nvPicPr>
+          <p:cNvPr id="6" name="Picture 5" descr="image.png"/>
+          <p:cNvPicPr>
+            <a:picLocks noChangeAspect="1"/>
+          </p:cNvPicPr>
+          <p:nvPr/>
+        </p:nvPicPr>
+        <p:blipFill>
+          <a:blip r:embed="rId2"/>
+          <a:stretch>
+            <a:fillRect/>
+          </a:stretch>
+        </p:blipFill>
+        <p:spPr>
+          <a:xfrm>
+            <a:off x="838200" y="3146970"/>
+            <a:ext cx="381000" cy="381000"/>
+          </a:xfrm>
+          <a:prstGeom prst="rect">
+            <a:avLst/>
+          </a:prstGeom>
+        </p:spPr>
+      </p:pic>
+      <p:pic>
+        <p:nvPicPr>
+          <p:cNvPr id="7" name="Picture 6" descr="image.png"/>
+          <p:cNvPicPr>
+            <a:picLocks noChangeAspect="1"/>
+          </p:cNvPicPr>
+          <p:nvPr/>
+        </p:nvPicPr>
+        <p:blipFill>
+          <a:blip r:embed="rId3"/>
+          <a:stretch>
+            <a:fillRect/>
+          </a:stretch>
+        </p:blipFill>
+        <p:spPr>
+          <a:xfrm>
+            <a:off x="3638550" y="3146970"/>
+            <a:ext cx="381000" cy="381000"/>
+          </a:xfrm>
+          <a:prstGeom prst="rect">
+            <a:avLst/>
+          </a:prstGeom>
+        </p:spPr>
+      </p:pic>
+      <p:pic>
+        <p:nvPicPr>
+          <p:cNvPr id="8" name="Picture 7" descr="image.png"/>
+          <p:cNvPicPr>
+            <a:picLocks noChangeAspect="1"/>
+          </p:cNvPicPr>
+          <p:nvPr/>
+        </p:nvPicPr>
+        <p:blipFill>
+          <a:blip r:embed="rId4"/>
+          <a:stretch>
+            <a:fillRect/>
+          </a:stretch>
+        </p:blipFill>
+        <p:spPr>
+          <a:xfrm>
+            <a:off x="6438900" y="3146970"/>
+            <a:ext cx="381000" cy="381000"/>
+          </a:xfrm>
+          <a:prstGeom prst="rect">
+            <a:avLst/>
+          </a:prstGeom>
+        </p:spPr>
+      </p:pic>
+      <p:pic>
+        <p:nvPicPr>
+          <p:cNvPr id="9" name="Picture 8" descr="image.png"/>
+          <p:cNvPicPr>
+            <a:picLocks noChangeAspect="1"/>
+          </p:cNvPicPr>
+          <p:nvPr/>
+        </p:nvPicPr>
+        <p:blipFill>
+          <a:blip r:embed="rId5"/>
+          <a:stretch>
+            <a:fillRect/>
+          </a:stretch>
+        </p:blipFill>
+        <p:spPr>
+          <a:xfrm>
+            <a:off x="9239250" y="3146970"/>
+            <a:ext cx="381000" cy="381000"/>
+          </a:xfrm>
+          <a:prstGeom prst="rect">
+            <a:avLst/>
+          </a:prstGeom>
+        </p:spPr>
+      </p:pic>
+      <p:pic>
+        <p:nvPicPr>
+          <p:cNvPr id="10" name="Picture 9" descr="image.png"/>
+          <p:cNvPicPr>
+            <a:picLocks noChangeAspect="1"/>
+          </p:cNvPicPr>
+          <p:nvPr/>
+        </p:nvPicPr>
+        <p:blipFill>
+          <a:blip r:embed="rId6"/>
+          <a:stretch>
+            <a:fillRect/>
+          </a:stretch>
+        </p:blipFill>
+        <p:spPr>
+          <a:xfrm>
+            <a:off x="942975" y="3251745"/>
+            <a:ext cx="171450" cy="171450"/>
+          </a:xfrm>
+          <a:prstGeom prst="rect">
+            <a:avLst/>
+          </a:prstGeom>
+        </p:spPr>
+      </p:pic>
+      <p:pic>
+        <p:nvPicPr>
+          <p:cNvPr id="11" name="Picture 10" descr="image.png"/>
+          <p:cNvPicPr>
+            <a:picLocks noChangeAspect="1"/>
+          </p:cNvPicPr>
+          <p:nvPr/>
+        </p:nvPicPr>
+        <p:blipFill>
+          <a:blip r:embed="rId7"/>
+          <a:stretch>
+            <a:fillRect/>
+          </a:stretch>
+        </p:blipFill>
+        <p:spPr>
+          <a:xfrm>
+            <a:off x="3719512" y="3251745"/>
+            <a:ext cx="219075" cy="171450"/>
+          </a:xfrm>
+          <a:prstGeom prst="rect">
+            <a:avLst/>
+          </a:prstGeom>
+        </p:spPr>
+      </p:pic>
+      <p:pic>
+        <p:nvPicPr>
+          <p:cNvPr id="12" name="Picture 11" descr="image.png"/>
+          <p:cNvPicPr>
+            <a:picLocks noChangeAspect="1"/>
+          </p:cNvPicPr>
+          <p:nvPr/>
+        </p:nvPicPr>
+        <p:blipFill>
+          <a:blip r:embed="rId8"/>
+          <a:stretch>
+            <a:fillRect/>
+          </a:stretch>
+        </p:blipFill>
+        <p:spPr>
+          <a:xfrm>
+            <a:off x="6543675" y="3251745"/>
+            <a:ext cx="171450" cy="171450"/>
+          </a:xfrm>
+          <a:prstGeom prst="rect">
+            <a:avLst/>
+          </a:prstGeom>
+        </p:spPr>
+      </p:pic>
+      <p:pic>
+        <p:nvPicPr>
+          <p:cNvPr id="13" name="Picture 12" descr="image.png"/>
+          <p:cNvPicPr>
+            <a:picLocks noChangeAspect="1"/>
+          </p:cNvPicPr>
+          <p:nvPr/>
+        </p:nvPicPr>
+        <p:blipFill>
+          <a:blip r:embed="rId9"/>
+          <a:stretch>
+            <a:fillRect/>
+          </a:stretch>
+        </p:blipFill>
+        <p:spPr>
+          <a:xfrm>
+            <a:off x="9344025" y="3251745"/>
+            <a:ext cx="171450" cy="171450"/>
+          </a:xfrm>
+          <a:prstGeom prst="rect">
+            <a:avLst/>
+          </a:prstGeom>
+        </p:spPr>
+      </p:pic>
+      <p:sp>
+        <p:nvSpPr>
+          <p:cNvPr id="14" name="TextBox 13"/>
+          <p:cNvSpPr txBox="1"/>
+          <p:nvPr/>
+        </p:nvSpPr>
+        <p:spPr>
+          <a:xfrm>
+            <a:off x="609600" y="457200"/>
+            <a:ext cx="11582400" cy="171450"/>
+          </a:xfrm>
+          <a:prstGeom prst="rect">
+            <a:avLst/>
+          </a:prstGeom>
+          <a:noFill/>
+        </p:spPr>
+        <p:txBody>
+          <a:bodyPr wrap="none" lIns="0" rIns="0" tIns="0" bIns="0" anchor="t">
+            <a:spAutoFit/>
+          </a:bodyPr>
+          <a:lstStyle/>
+          <a:p>
+            <a:pPr algn="l"/>
+            <a:r>
+              <a:rPr b="1" sz="1050" i="0" u="none">
+                <a:solidFill>
+                  <a:srgbClr val="E11D48"/>
+                </a:solidFill>
+                <a:latin typeface="Plus Jakarta Sans"/>
+              </a:rPr>
+              <a:t>EVALUACIÓN TÉCNICA</a:t>
+            </a:r>
+          </a:p>
+        </p:txBody>
+      </p:sp>
+      <p:sp>
+        <p:nvSpPr>
+          <p:cNvPr id="15" name="TextBox 14"/>
+          <p:cNvSpPr txBox="1"/>
+          <p:nvPr/>
+        </p:nvSpPr>
+        <p:spPr>
+          <a:xfrm>
+            <a:off x="609600" y="685800"/>
+            <a:ext cx="11582400" cy="388590"/>
+          </a:xfrm>
+          <a:prstGeom prst="rect">
+            <a:avLst/>
+          </a:prstGeom>
+          <a:noFill/>
+        </p:spPr>
+        <p:txBody>
+          <a:bodyPr wrap="none" lIns="0" rIns="0" tIns="0" bIns="0" anchor="t">
+            <a:spAutoFit/>
+          </a:bodyPr>
+          <a:lstStyle/>
+          <a:p>
+            <a:pPr algn="l">
+              <a:lnSpc>
+                <a:spcPts val="3060"/>
+              </a:lnSpc>
+            </a:pPr>
+            <a:r>
+              <a:rPr b="1" sz="2550" i="0" u="none">
+                <a:solidFill>
+                  <a:srgbClr val="0F172A"/>
+                </a:solidFill>
+                <a:latin typeface="Space Grotesk"/>
+              </a:rPr>
+              <a:t>Límites y Condiciones de Borde</a:t>
+            </a:r>
+          </a:p>
+        </p:txBody>
+      </p:sp>
+      <p:sp>
+        <p:nvSpPr>
+          <p:cNvPr id="16" name="TextBox 15"/>
+          <p:cNvSpPr txBox="1"/>
+          <p:nvPr/>
+        </p:nvSpPr>
+        <p:spPr>
+          <a:xfrm>
+            <a:off x="838200" y="3642270"/>
+            <a:ext cx="2194560" cy="219075"/>
+          </a:xfrm>
+          <a:prstGeom prst="rect">
+            <a:avLst/>
+          </a:prstGeom>
+          <a:noFill/>
+        </p:spPr>
+        <p:txBody>
+          <a:bodyPr wrap="none" lIns="0" rIns="0" tIns="0" bIns="0" anchor="t">
+            <a:spAutoFit/>
+          </a:bodyPr>
+          <a:lstStyle/>
+          <a:p>
+            <a:pPr algn="l"/>
+            <a:r>
+              <a:rPr b="1" sz="1600" i="0" u="none">
+                <a:solidFill>
+                  <a:srgbClr val="0F172A"/>
+                </a:solidFill>
+                <a:latin typeface="Space Grotesk"/>
+              </a:rPr>
+              <a:t>Alcance de los datos</a:t>
+            </a:r>
+          </a:p>
+        </p:txBody>
+      </p:sp>
       <p:sp>
         <p:nvSpPr>
           <p:cNvPr id="17" name="TextBox 16"/>
@@ -5174,8 +4281,43 @@
         </p:nvSpPr>
         <p:spPr>
           <a:xfrm>
-            <a:off x="876300" y="3090500"/>
-            <a:ext cx="10572800" cy="219075"/>
+            <a:off x="838200" y="3975645"/>
+            <a:ext cx="2209800" cy="768096"/>
+          </a:xfrm>
+          <a:prstGeom prst="rect">
+            <a:avLst/>
+          </a:prstGeom>
+          <a:noFill/>
+        </p:spPr>
+        <p:txBody>
+          <a:bodyPr wrap="square" lIns="0" rIns="0" tIns="0" bIns="0" anchor="t">
+            <a:spAutoFit/>
+          </a:bodyPr>
+          <a:lstStyle/>
+          <a:p>
+            <a:pPr algn="l"/>
+            <a:r>
+              <a:rPr b="0" sz="1500" i="0" u="none">
+                <a:solidFill>
+                  <a:srgbClr val="475569"/>
+                </a:solidFill>
+                <a:latin typeface="Plus Jakarta Sans"/>
+              </a:rPr>
+              <a:t>Solo Spotify México, Top 200.</a:t>
+            </a:r>
+          </a:p>
+        </p:txBody>
+      </p:sp>
+      <p:sp>
+        <p:nvSpPr>
+          <p:cNvPr id="18" name="TextBox 17"/>
+          <p:cNvSpPr txBox="1"/>
+          <p:nvPr/>
+        </p:nvSpPr>
+        <p:spPr>
+          <a:xfrm>
+            <a:off x="3638550" y="3642270"/>
+            <a:ext cx="2194560" cy="219075"/>
           </a:xfrm>
           <a:prstGeom prst="rect">
             <a:avLst/>
@@ -5190,27 +4332,27 @@
           <a:p>
             <a:pPr algn="l"/>
             <a:r>
-              <a:rPr b="1" sz="1350" i="0" u="none">
+              <a:rPr b="1" sz="1600" i="0" u="none">
                 <a:solidFill>
                   <a:srgbClr val="0F172A"/>
                 </a:solidFill>
                 <a:latin typeface="Space Grotesk"/>
               </a:rPr>
-              <a:t>Generalizable</a:t>
-            </a:r>
-          </a:p>
-        </p:txBody>
-      </p:sp>
-      <p:sp>
-        <p:nvSpPr>
-          <p:cNvPr id="18" name="TextBox 17"/>
-          <p:cNvSpPr txBox="1"/>
-          <p:nvPr/>
-        </p:nvSpPr>
-        <p:spPr>
-          <a:xfrm>
-            <a:off x="876300" y="3347675"/>
-            <a:ext cx="10572800" cy="438150"/>
+              <a:t>Datos semanales</a:t>
+            </a:r>
+          </a:p>
+        </p:txBody>
+      </p:sp>
+      <p:sp>
+        <p:nvSpPr>
+          <p:cNvPr id="19" name="TextBox 18"/>
+          <p:cNvSpPr txBox="1"/>
+          <p:nvPr/>
+        </p:nvSpPr>
+        <p:spPr>
+          <a:xfrm>
+            <a:off x="3638550" y="3975645"/>
+            <a:ext cx="2209800" cy="768096"/>
           </a:xfrm>
           <a:prstGeom prst="rect">
             <a:avLst/>
@@ -5225,13 +4367,153 @@
           <a:p>
             <a:pPr algn="l"/>
             <a:r>
-              <a:rPr b="0" sz="1350" i="0" u="none">
-                <a:solidFill>
-                  <a:srgbClr val="64748B"/>
+              <a:rPr b="0" sz="1500" i="0" u="none">
+                <a:solidFill>
+                  <a:srgbClr val="475569"/>
                 </a:solidFill>
                 <a:latin typeface="Plus Jakarta Sans"/>
               </a:rPr>
-              <a:t>El mismo programa sirve para cualquier canción con datos semanales.</a:t>
+              <a:t>Se supone un crecimiento suave dentro de la semana.</a:t>
+            </a:r>
+          </a:p>
+        </p:txBody>
+      </p:sp>
+      <p:sp>
+        <p:nvSpPr>
+          <p:cNvPr id="20" name="TextBox 19"/>
+          <p:cNvSpPr txBox="1"/>
+          <p:nvPr/>
+        </p:nvSpPr>
+        <p:spPr>
+          <a:xfrm>
+            <a:off x="6438900" y="3642270"/>
+            <a:ext cx="2194560" cy="219075"/>
+          </a:xfrm>
+          <a:prstGeom prst="rect">
+            <a:avLst/>
+          </a:prstGeom>
+          <a:noFill/>
+        </p:spPr>
+        <p:txBody>
+          <a:bodyPr wrap="none" lIns="0" rIns="0" tIns="0" bIns="0" anchor="t">
+            <a:spAutoFit/>
+          </a:bodyPr>
+          <a:lstStyle/>
+          <a:p>
+            <a:pPr algn="l"/>
+            <a:r>
+              <a:rPr b="1" sz="1600" i="0" u="none">
+                <a:solidFill>
+                  <a:srgbClr val="0F172A"/>
+                </a:solidFill>
+                <a:latin typeface="Space Grotesk"/>
+              </a:rPr>
+              <a:t>Interpolación</a:t>
+            </a:r>
+          </a:p>
+        </p:txBody>
+      </p:sp>
+      <p:sp>
+        <p:nvSpPr>
+          <p:cNvPr id="21" name="TextBox 20"/>
+          <p:cNvSpPr txBox="1"/>
+          <p:nvPr/>
+        </p:nvSpPr>
+        <p:spPr>
+          <a:xfrm>
+            <a:off x="6438900" y="3975645"/>
+            <a:ext cx="2209800" cy="768096"/>
+          </a:xfrm>
+          <a:prstGeom prst="rect">
+            <a:avLst/>
+          </a:prstGeom>
+          <a:noFill/>
+        </p:spPr>
+        <p:txBody>
+          <a:bodyPr wrap="square" lIns="0" rIns="0" tIns="0" bIns="0" anchor="t">
+            <a:spAutoFit/>
+          </a:bodyPr>
+          <a:lstStyle/>
+          <a:p>
+            <a:pPr algn="l"/>
+            <a:r>
+              <a:rPr b="0" sz="1500" i="0" u="none">
+                <a:solidFill>
+                  <a:srgbClr val="475569"/>
+                </a:solidFill>
+                <a:latin typeface="Plus Jakarta Sans"/>
+              </a:rPr>
+              <a:t>Entre datos medidos: no predice a futuro.</a:t>
+            </a:r>
+          </a:p>
+        </p:txBody>
+      </p:sp>
+      <p:sp>
+        <p:nvSpPr>
+          <p:cNvPr id="22" name="TextBox 21"/>
+          <p:cNvSpPr txBox="1"/>
+          <p:nvPr/>
+        </p:nvSpPr>
+        <p:spPr>
+          <a:xfrm>
+            <a:off x="9239250" y="3642270"/>
+            <a:ext cx="2194560" cy="219075"/>
+          </a:xfrm>
+          <a:prstGeom prst="rect">
+            <a:avLst/>
+          </a:prstGeom>
+          <a:noFill/>
+        </p:spPr>
+        <p:txBody>
+          <a:bodyPr wrap="none" lIns="0" rIns="0" tIns="0" bIns="0" anchor="t">
+            <a:spAutoFit/>
+          </a:bodyPr>
+          <a:lstStyle/>
+          <a:p>
+            <a:pPr algn="l"/>
+            <a:r>
+              <a:rPr b="1" sz="1600" i="0" u="none">
+                <a:solidFill>
+                  <a:srgbClr val="0F172A"/>
+                </a:solidFill>
+                <a:latin typeface="Space Grotesk"/>
+              </a:rPr>
+              <a:t>Supuestos de audio</a:t>
+            </a:r>
+          </a:p>
+        </p:txBody>
+      </p:sp>
+      <p:sp>
+        <p:nvSpPr>
+          <p:cNvPr id="23" name="TextBox 22"/>
+          <p:cNvSpPr txBox="1"/>
+          <p:nvPr/>
+        </p:nvSpPr>
+        <p:spPr>
+          <a:xfrm>
+            <a:off x="9239250" y="3975645"/>
+            <a:ext cx="2209800" cy="768096"/>
+          </a:xfrm>
+          <a:prstGeom prst="rect">
+            <a:avLst/>
+          </a:prstGeom>
+          <a:noFill/>
+        </p:spPr>
+        <p:txBody>
+          <a:bodyPr wrap="square" lIns="0" rIns="0" tIns="0" bIns="0" anchor="t">
+            <a:spAutoFit/>
+          </a:bodyPr>
+          <a:lstStyle/>
+          <a:p>
+            <a:pPr algn="l"/>
+            <a:r>
+              <a:rPr b="0" sz="1500" i="0" u="none">
+                <a:solidFill>
+                  <a:srgbClr val="475569"/>
+                </a:solidFill>
+                <a:latin typeface="Plus Jakarta Sans"/>
+              </a:rPr>
+              <a:t>Volumen y Mbps usan supuestos (3:06, 160 kbps).</a:t>
             </a:r>
           </a:p>
         </p:txBody>
@@ -5245,6 +4527,940 @@
 </file>
 
 <file path=ppt/slides/slide12.xml><?xml version="1.0" encoding="utf-8"?>
+<p:sld xmlns:a="http://schemas.openxmlformats.org/drawingml/2006/main" xmlns:p="http://schemas.openxmlformats.org/presentationml/2006/main" xmlns:r="http://schemas.openxmlformats.org/officeDocument/2006/relationships">
+  <p:cSld>
+    <p:bg>
+      <p:bgPr>
+        <a:solidFill>
+          <a:srgbClr val="FFFFFF"/>
+        </a:solidFill>
+        <a:effectLst/>
+      </p:bgPr>
+    </p:bg>
+    <p:spTree>
+      <p:nvGrpSpPr>
+        <p:cNvPr id="1" name=""/>
+        <p:cNvGrpSpPr/>
+        <p:nvPr/>
+      </p:nvGrpSpPr>
+      <p:grpSpPr/>
+      <p:sp>
+        <p:nvSpPr>
+          <p:cNvPr id="2" name="Rounded Rectangle 1"/>
+          <p:cNvSpPr/>
+          <p:nvPr/>
+        </p:nvSpPr>
+        <p:spPr>
+          <a:xfrm>
+            <a:off x="609600" y="1379190"/>
+            <a:ext cx="3454449" cy="1266825"/>
+          </a:xfrm>
+          <a:prstGeom prst="roundRect">
+            <a:avLst>
+              <a:gd name="adj" fmla="val 12030"/>
+            </a:avLst>
+          </a:prstGeom>
+          <a:solidFill>
+            <a:srgbClr val="FFF1F2"/>
+          </a:solidFill>
+          <a:ln>
+            <a:noFill/>
+          </a:ln>
+          <a:effectLst/>
+        </p:spPr>
+        <p:style>
+          <a:lnRef idx="1">
+            <a:schemeClr val="accent1"/>
+          </a:lnRef>
+          <a:fillRef idx="3">
+            <a:schemeClr val="accent1"/>
+          </a:fillRef>
+          <a:effectRef idx="2">
+            <a:schemeClr val="accent1"/>
+          </a:effectRef>
+          <a:fontRef idx="minor">
+            <a:schemeClr val="lt1"/>
+          </a:fontRef>
+        </p:style>
+        <p:txBody>
+          <a:bodyPr rtlCol="0" anchor="ctr"/>
+          <a:lstStyle/>
+          <a:p>
+            <a:pPr algn="ctr"/>
+          </a:p>
+        </p:txBody>
+      </p:sp>
+      <p:sp>
+        <p:nvSpPr>
+          <p:cNvPr id="3" name="Rounded Rectangle 2"/>
+          <p:cNvSpPr/>
+          <p:nvPr/>
+        </p:nvSpPr>
+        <p:spPr>
+          <a:xfrm>
+            <a:off x="4368849" y="1379190"/>
+            <a:ext cx="3454449" cy="1266825"/>
+          </a:xfrm>
+          <a:prstGeom prst="roundRect">
+            <a:avLst>
+              <a:gd name="adj" fmla="val 12030"/>
+            </a:avLst>
+          </a:prstGeom>
+          <a:solidFill>
+            <a:srgbClr val="F0F9FF"/>
+          </a:solidFill>
+          <a:ln>
+            <a:noFill/>
+          </a:ln>
+          <a:effectLst/>
+        </p:spPr>
+        <p:style>
+          <a:lnRef idx="1">
+            <a:schemeClr val="accent1"/>
+          </a:lnRef>
+          <a:fillRef idx="3">
+            <a:schemeClr val="accent1"/>
+          </a:fillRef>
+          <a:effectRef idx="2">
+            <a:schemeClr val="accent1"/>
+          </a:effectRef>
+          <a:fontRef idx="minor">
+            <a:schemeClr val="lt1"/>
+          </a:fontRef>
+        </p:style>
+        <p:txBody>
+          <a:bodyPr rtlCol="0" anchor="ctr"/>
+          <a:lstStyle/>
+          <a:p>
+            <a:pPr algn="ctr"/>
+          </a:p>
+        </p:txBody>
+      </p:sp>
+      <p:sp>
+        <p:nvSpPr>
+          <p:cNvPr id="4" name="Rounded Rectangle 3"/>
+          <p:cNvSpPr/>
+          <p:nvPr/>
+        </p:nvSpPr>
+        <p:spPr>
+          <a:xfrm>
+            <a:off x="8128099" y="1379190"/>
+            <a:ext cx="3454449" cy="1266825"/>
+          </a:xfrm>
+          <a:prstGeom prst="roundRect">
+            <a:avLst>
+              <a:gd name="adj" fmla="val 12030"/>
+            </a:avLst>
+          </a:prstGeom>
+          <a:solidFill>
+            <a:srgbClr val="F0FDF4"/>
+          </a:solidFill>
+          <a:ln>
+            <a:noFill/>
+          </a:ln>
+          <a:effectLst/>
+        </p:spPr>
+        <p:style>
+          <a:lnRef idx="1">
+            <a:schemeClr val="accent1"/>
+          </a:lnRef>
+          <a:fillRef idx="3">
+            <a:schemeClr val="accent1"/>
+          </a:fillRef>
+          <a:effectRef idx="2">
+            <a:schemeClr val="accent1"/>
+          </a:effectRef>
+          <a:fontRef idx="minor">
+            <a:schemeClr val="lt1"/>
+          </a:fontRef>
+        </p:style>
+        <p:txBody>
+          <a:bodyPr rtlCol="0" anchor="ctr"/>
+          <a:lstStyle/>
+          <a:p>
+            <a:pPr algn="ctr"/>
+          </a:p>
+        </p:txBody>
+      </p:sp>
+      <p:sp>
+        <p:nvSpPr>
+          <p:cNvPr id="5" name="Rectangle 4"/>
+          <p:cNvSpPr/>
+          <p:nvPr/>
+        </p:nvSpPr>
+        <p:spPr>
+          <a:xfrm>
+            <a:off x="609600" y="4137570"/>
+            <a:ext cx="5372100" cy="1076325"/>
+          </a:xfrm>
+          <a:prstGeom prst="rect">
+            <a:avLst/>
+          </a:prstGeom>
+          <a:solidFill>
+            <a:srgbClr val="F8FAFC"/>
+          </a:solidFill>
+          <a:ln>
+            <a:noFill/>
+          </a:ln>
+          <a:effectLst/>
+        </p:spPr>
+        <p:style>
+          <a:lnRef idx="1">
+            <a:schemeClr val="accent1"/>
+          </a:lnRef>
+          <a:fillRef idx="3">
+            <a:schemeClr val="accent1"/>
+          </a:fillRef>
+          <a:effectRef idx="2">
+            <a:schemeClr val="accent1"/>
+          </a:effectRef>
+          <a:fontRef idx="minor">
+            <a:schemeClr val="lt1"/>
+          </a:fontRef>
+        </p:style>
+        <p:txBody>
+          <a:bodyPr rtlCol="0" anchor="ctr"/>
+          <a:lstStyle/>
+          <a:p>
+            <a:pPr algn="ctr"/>
+          </a:p>
+        </p:txBody>
+      </p:sp>
+      <p:sp>
+        <p:nvSpPr>
+          <p:cNvPr id="6" name="Rectangle 5"/>
+          <p:cNvSpPr/>
+          <p:nvPr/>
+        </p:nvSpPr>
+        <p:spPr>
+          <a:xfrm>
+            <a:off x="6210300" y="4137570"/>
+            <a:ext cx="5372100" cy="1076325"/>
+          </a:xfrm>
+          <a:prstGeom prst="rect">
+            <a:avLst/>
+          </a:prstGeom>
+          <a:solidFill>
+            <a:srgbClr val="F8FAFC"/>
+          </a:solidFill>
+          <a:ln>
+            <a:noFill/>
+          </a:ln>
+          <a:effectLst/>
+        </p:spPr>
+        <p:style>
+          <a:lnRef idx="1">
+            <a:schemeClr val="accent1"/>
+          </a:lnRef>
+          <a:fillRef idx="3">
+            <a:schemeClr val="accent1"/>
+          </a:fillRef>
+          <a:effectRef idx="2">
+            <a:schemeClr val="accent1"/>
+          </a:effectRef>
+          <a:fontRef idx="minor">
+            <a:schemeClr val="lt1"/>
+          </a:fontRef>
+        </p:style>
+        <p:txBody>
+          <a:bodyPr rtlCol="0" anchor="ctr"/>
+          <a:lstStyle/>
+          <a:p>
+            <a:pPr algn="ctr"/>
+          </a:p>
+        </p:txBody>
+      </p:sp>
+      <p:sp>
+        <p:nvSpPr>
+          <p:cNvPr id="7" name="Rectangle 6"/>
+          <p:cNvSpPr/>
+          <p:nvPr/>
+        </p:nvSpPr>
+        <p:spPr>
+          <a:xfrm>
+            <a:off x="609600" y="4137570"/>
+            <a:ext cx="38100" cy="1076325"/>
+          </a:xfrm>
+          <a:prstGeom prst="rect">
+            <a:avLst/>
+          </a:prstGeom>
+          <a:solidFill>
+            <a:srgbClr val="E11D48"/>
+          </a:solidFill>
+          <a:ln>
+            <a:noFill/>
+          </a:ln>
+          <a:effectLst/>
+        </p:spPr>
+        <p:style>
+          <a:lnRef idx="1">
+            <a:schemeClr val="accent1"/>
+          </a:lnRef>
+          <a:fillRef idx="3">
+            <a:schemeClr val="accent1"/>
+          </a:fillRef>
+          <a:effectRef idx="2">
+            <a:schemeClr val="accent1"/>
+          </a:effectRef>
+          <a:fontRef idx="minor">
+            <a:schemeClr val="lt1"/>
+          </a:fontRef>
+        </p:style>
+        <p:txBody>
+          <a:bodyPr rtlCol="0" anchor="ctr"/>
+          <a:lstStyle/>
+          <a:p>
+            <a:pPr algn="ctr"/>
+          </a:p>
+        </p:txBody>
+      </p:sp>
+      <p:sp>
+        <p:nvSpPr>
+          <p:cNvPr id="8" name="Rectangle 7"/>
+          <p:cNvSpPr/>
+          <p:nvPr/>
+        </p:nvSpPr>
+        <p:spPr>
+          <a:xfrm>
+            <a:off x="6210300" y="4137570"/>
+            <a:ext cx="38100" cy="1076325"/>
+          </a:xfrm>
+          <a:prstGeom prst="rect">
+            <a:avLst/>
+          </a:prstGeom>
+          <a:solidFill>
+            <a:srgbClr val="0284C7"/>
+          </a:solidFill>
+          <a:ln>
+            <a:noFill/>
+          </a:ln>
+          <a:effectLst/>
+        </p:spPr>
+        <p:style>
+          <a:lnRef idx="1">
+            <a:schemeClr val="accent1"/>
+          </a:lnRef>
+          <a:fillRef idx="3">
+            <a:schemeClr val="accent1"/>
+          </a:fillRef>
+          <a:effectRef idx="2">
+            <a:schemeClr val="accent1"/>
+          </a:effectRef>
+          <a:fontRef idx="minor">
+            <a:schemeClr val="lt1"/>
+          </a:fontRef>
+        </p:style>
+        <p:txBody>
+          <a:bodyPr rtlCol="0" anchor="ctr"/>
+          <a:lstStyle/>
+          <a:p>
+            <a:pPr algn="ctr"/>
+          </a:p>
+        </p:txBody>
+      </p:sp>
+      <p:sp>
+        <p:nvSpPr>
+          <p:cNvPr id="9" name="TextBox 8"/>
+          <p:cNvSpPr txBox="1"/>
+          <p:nvPr/>
+        </p:nvSpPr>
+        <p:spPr>
+          <a:xfrm>
+            <a:off x="609600" y="457200"/>
+            <a:ext cx="11582400" cy="171450"/>
+          </a:xfrm>
+          <a:prstGeom prst="rect">
+            <a:avLst/>
+          </a:prstGeom>
+          <a:noFill/>
+        </p:spPr>
+        <p:txBody>
+          <a:bodyPr wrap="none" lIns="0" rIns="0" tIns="0" bIns="0" anchor="t">
+            <a:spAutoFit/>
+          </a:bodyPr>
+          <a:lstStyle/>
+          <a:p>
+            <a:pPr algn="l"/>
+            <a:r>
+              <a:rPr b="1" sz="1050" i="0" u="none">
+                <a:solidFill>
+                  <a:srgbClr val="E11D48"/>
+                </a:solidFill>
+                <a:latin typeface="Plus Jakarta Sans"/>
+              </a:rPr>
+              <a:t>SÍNTESIS DEL PROYECTO</a:t>
+            </a:r>
+          </a:p>
+        </p:txBody>
+      </p:sp>
+      <p:sp>
+        <p:nvSpPr>
+          <p:cNvPr id="10" name="TextBox 9"/>
+          <p:cNvSpPr txBox="1"/>
+          <p:nvPr/>
+        </p:nvSpPr>
+        <p:spPr>
+          <a:xfrm>
+            <a:off x="609600" y="685800"/>
+            <a:ext cx="11582400" cy="388590"/>
+          </a:xfrm>
+          <a:prstGeom prst="rect">
+            <a:avLst/>
+          </a:prstGeom>
+          <a:noFill/>
+        </p:spPr>
+        <p:txBody>
+          <a:bodyPr wrap="none" lIns="0" rIns="0" tIns="0" bIns="0" anchor="t">
+            <a:spAutoFit/>
+          </a:bodyPr>
+          <a:lstStyle/>
+          <a:p>
+            <a:pPr algn="l">
+              <a:lnSpc>
+                <a:spcPts val="3060"/>
+              </a:lnSpc>
+            </a:pPr>
+            <a:r>
+              <a:rPr b="1" sz="2550" i="0" u="none">
+                <a:solidFill>
+                  <a:srgbClr val="0F172A"/>
+                </a:solidFill>
+                <a:latin typeface="Space Grotesk"/>
+              </a:rPr>
+              <a:t>Conclusiones y aplicación a la ingeniería</a:t>
+            </a:r>
+          </a:p>
+        </p:txBody>
+      </p:sp>
+      <p:sp>
+        <p:nvSpPr>
+          <p:cNvPr id="11" name="TextBox 10"/>
+          <p:cNvSpPr txBox="1"/>
+          <p:nvPr/>
+        </p:nvSpPr>
+        <p:spPr>
+          <a:xfrm>
+            <a:off x="511168" y="1645890"/>
+            <a:ext cx="3651312" cy="457200"/>
+          </a:xfrm>
+          <a:prstGeom prst="rect">
+            <a:avLst/>
+          </a:prstGeom>
+          <a:noFill/>
+        </p:spPr>
+        <p:txBody>
+          <a:bodyPr wrap="none" lIns="0" rIns="0" tIns="0" bIns="0" anchor="t">
+            <a:spAutoFit/>
+          </a:bodyPr>
+          <a:lstStyle/>
+          <a:p>
+            <a:pPr algn="ctr">
+              <a:lnSpc>
+                <a:spcPts val="3600"/>
+              </a:lnSpc>
+            </a:pPr>
+            <a:r>
+              <a:rPr b="1" sz="3600" i="0" u="none">
+                <a:solidFill>
+                  <a:srgbClr val="E11D48"/>
+                </a:solidFill>
+                <a:latin typeface="Plus Jakarta Sans"/>
+              </a:rPr>
+              <a:t>28/09/2023</a:t>
+            </a:r>
+          </a:p>
+        </p:txBody>
+      </p:sp>
+      <p:sp>
+        <p:nvSpPr>
+          <p:cNvPr id="12" name="TextBox 11"/>
+          <p:cNvSpPr txBox="1"/>
+          <p:nvPr/>
+        </p:nvSpPr>
+        <p:spPr>
+          <a:xfrm>
+            <a:off x="511168" y="2179290"/>
+            <a:ext cx="3651312" cy="200025"/>
+          </a:xfrm>
+          <a:prstGeom prst="rect">
+            <a:avLst/>
+          </a:prstGeom>
+          <a:noFill/>
+        </p:spPr>
+        <p:txBody>
+          <a:bodyPr wrap="none" lIns="0" rIns="0" tIns="0" bIns="0" anchor="t">
+            <a:spAutoFit/>
+          </a:bodyPr>
+          <a:lstStyle/>
+          <a:p>
+            <a:pPr algn="ctr"/>
+            <a:r>
+              <a:rPr b="1" sz="1200" i="0" u="none">
+                <a:solidFill>
+                  <a:srgbClr val="475569"/>
+                </a:solidFill>
+                <a:latin typeface="Plus Jakarta Sans"/>
+              </a:rPr>
+              <a:t>Hito de 100 M</a:t>
+            </a:r>
+          </a:p>
+        </p:txBody>
+      </p:sp>
+      <p:sp>
+        <p:nvSpPr>
+          <p:cNvPr id="13" name="TextBox 12"/>
+          <p:cNvSpPr txBox="1"/>
+          <p:nvPr/>
+        </p:nvSpPr>
+        <p:spPr>
+          <a:xfrm>
+            <a:off x="4270418" y="1645890"/>
+            <a:ext cx="3651312" cy="457200"/>
+          </a:xfrm>
+          <a:prstGeom prst="rect">
+            <a:avLst/>
+          </a:prstGeom>
+          <a:noFill/>
+        </p:spPr>
+        <p:txBody>
+          <a:bodyPr wrap="none" lIns="0" rIns="0" tIns="0" bIns="0" anchor="t">
+            <a:spAutoFit/>
+          </a:bodyPr>
+          <a:lstStyle/>
+          <a:p>
+            <a:pPr algn="ctr">
+              <a:lnSpc>
+                <a:spcPts val="3600"/>
+              </a:lnSpc>
+            </a:pPr>
+            <a:r>
+              <a:rPr b="1" sz="3600" i="0" u="none">
+                <a:solidFill>
+                  <a:srgbClr val="0284C7"/>
+                </a:solidFill>
+                <a:latin typeface="Plus Jakarta Sans"/>
+              </a:rPr>
+              <a:t>3 vs 15</a:t>
+            </a:r>
+          </a:p>
+        </p:txBody>
+      </p:sp>
+      <p:sp>
+        <p:nvSpPr>
+          <p:cNvPr id="14" name="TextBox 13"/>
+          <p:cNvSpPr txBox="1"/>
+          <p:nvPr/>
+        </p:nvSpPr>
+        <p:spPr>
+          <a:xfrm>
+            <a:off x="4270418" y="2179290"/>
+            <a:ext cx="3651312" cy="200025"/>
+          </a:xfrm>
+          <a:prstGeom prst="rect">
+            <a:avLst/>
+          </a:prstGeom>
+          <a:noFill/>
+        </p:spPr>
+        <p:txBody>
+          <a:bodyPr wrap="none" lIns="0" rIns="0" tIns="0" bIns="0" anchor="t">
+            <a:spAutoFit/>
+          </a:bodyPr>
+          <a:lstStyle/>
+          <a:p>
+            <a:pPr algn="ctr"/>
+            <a:r>
+              <a:rPr b="1" sz="1200" i="0" u="none">
+                <a:solidFill>
+                  <a:srgbClr val="475569"/>
+                </a:solidFill>
+                <a:latin typeface="Plus Jakarta Sans"/>
+              </a:rPr>
+              <a:t>Iteraciones Newton vs bisección</a:t>
+            </a:r>
+          </a:p>
+        </p:txBody>
+      </p:sp>
+      <p:sp>
+        <p:nvSpPr>
+          <p:cNvPr id="15" name="TextBox 14"/>
+          <p:cNvSpPr txBox="1"/>
+          <p:nvPr/>
+        </p:nvSpPr>
+        <p:spPr>
+          <a:xfrm>
+            <a:off x="8029668" y="1645890"/>
+            <a:ext cx="3651312" cy="457200"/>
+          </a:xfrm>
+          <a:prstGeom prst="rect">
+            <a:avLst/>
+          </a:prstGeom>
+          <a:noFill/>
+        </p:spPr>
+        <p:txBody>
+          <a:bodyPr wrap="none" lIns="0" rIns="0" tIns="0" bIns="0" anchor="t">
+            <a:spAutoFit/>
+          </a:bodyPr>
+          <a:lstStyle/>
+          <a:p>
+            <a:pPr algn="ctr">
+              <a:lnSpc>
+                <a:spcPts val="3600"/>
+              </a:lnSpc>
+            </a:pPr>
+            <a:r>
+              <a:rPr b="1" sz="3600" i="0" u="none">
+                <a:solidFill>
+                  <a:srgbClr val="16A34A"/>
+                </a:solidFill>
+                <a:latin typeface="Plus Jakarta Sans"/>
+              </a:rPr>
+              <a:t>≈ 205 Mbps</a:t>
+            </a:r>
+          </a:p>
+        </p:txBody>
+      </p:sp>
+      <p:sp>
+        <p:nvSpPr>
+          <p:cNvPr id="16" name="TextBox 15"/>
+          <p:cNvSpPr txBox="1"/>
+          <p:nvPr/>
+        </p:nvSpPr>
+        <p:spPr>
+          <a:xfrm>
+            <a:off x="8029668" y="2179290"/>
+            <a:ext cx="3651312" cy="200025"/>
+          </a:xfrm>
+          <a:prstGeom prst="rect">
+            <a:avLst/>
+          </a:prstGeom>
+          <a:noFill/>
+        </p:spPr>
+        <p:txBody>
+          <a:bodyPr wrap="none" lIns="0" rIns="0" tIns="0" bIns="0" anchor="t">
+            <a:spAutoFit/>
+          </a:bodyPr>
+          <a:lstStyle/>
+          <a:p>
+            <a:pPr algn="ctr"/>
+            <a:r>
+              <a:rPr b="1" sz="1200" i="0" u="none">
+                <a:solidFill>
+                  <a:srgbClr val="475569"/>
+                </a:solidFill>
+                <a:latin typeface="Plus Jakarta Sans"/>
+              </a:rPr>
+              <a:t>Semana pico</a:t>
+            </a:r>
+          </a:p>
+        </p:txBody>
+      </p:sp>
+      <p:sp>
+        <p:nvSpPr>
+          <p:cNvPr id="17" name="TextBox 16"/>
+          <p:cNvSpPr txBox="1"/>
+          <p:nvPr/>
+        </p:nvSpPr>
+        <p:spPr>
+          <a:xfrm>
+            <a:off x="876300" y="4328070"/>
+            <a:ext cx="4754880" cy="219075"/>
+          </a:xfrm>
+          <a:prstGeom prst="rect">
+            <a:avLst/>
+          </a:prstGeom>
+          <a:noFill/>
+        </p:spPr>
+        <p:txBody>
+          <a:bodyPr wrap="none" lIns="0" rIns="0" tIns="0" bIns="0" anchor="t">
+            <a:spAutoFit/>
+          </a:bodyPr>
+          <a:lstStyle/>
+          <a:p>
+            <a:pPr algn="l"/>
+            <a:r>
+              <a:rPr b="1" sz="1350" i="0" u="none">
+                <a:solidFill>
+                  <a:srgbClr val="0F172A"/>
+                </a:solidFill>
+                <a:latin typeface="Space Grotesk"/>
+              </a:rPr>
+              <a:t>Interpolación de Newton</a:t>
+            </a:r>
+          </a:p>
+        </p:txBody>
+      </p:sp>
+      <p:sp>
+        <p:nvSpPr>
+          <p:cNvPr id="18" name="TextBox 17"/>
+          <p:cNvSpPr txBox="1"/>
+          <p:nvPr/>
+        </p:nvSpPr>
+        <p:spPr>
+          <a:xfrm>
+            <a:off x="876300" y="4585245"/>
+            <a:ext cx="4972050" cy="438150"/>
+          </a:xfrm>
+          <a:prstGeom prst="rect">
+            <a:avLst/>
+          </a:prstGeom>
+          <a:noFill/>
+        </p:spPr>
+        <p:txBody>
+          <a:bodyPr wrap="square" lIns="0" rIns="0" tIns="0" bIns="0" anchor="t">
+            <a:spAutoFit/>
+          </a:bodyPr>
+          <a:lstStyle/>
+          <a:p>
+            <a:pPr algn="l"/>
+            <a:r>
+              <a:rPr b="0" sz="1350" i="0" u="none">
+                <a:solidFill>
+                  <a:srgbClr val="64748B"/>
+                </a:solidFill>
+                <a:latin typeface="Plus Jakarta Sans"/>
+              </a:rPr>
+              <a:t>Estima el instante entre dos mediciones semanales; el hito equivale a ≈ 372 TB.</a:t>
+            </a:r>
+          </a:p>
+        </p:txBody>
+      </p:sp>
+      <p:sp>
+        <p:nvSpPr>
+          <p:cNvPr id="19" name="TextBox 18"/>
+          <p:cNvSpPr txBox="1"/>
+          <p:nvPr/>
+        </p:nvSpPr>
+        <p:spPr>
+          <a:xfrm>
+            <a:off x="6477000" y="4328070"/>
+            <a:ext cx="4754880" cy="219075"/>
+          </a:xfrm>
+          <a:prstGeom prst="rect">
+            <a:avLst/>
+          </a:prstGeom>
+          <a:noFill/>
+        </p:spPr>
+        <p:txBody>
+          <a:bodyPr wrap="none" lIns="0" rIns="0" tIns="0" bIns="0" anchor="t">
+            <a:spAutoFit/>
+          </a:bodyPr>
+          <a:lstStyle/>
+          <a:p>
+            <a:pPr algn="l"/>
+            <a:r>
+              <a:rPr b="1" sz="1350" i="0" u="none">
+                <a:solidFill>
+                  <a:srgbClr val="0F172A"/>
+                </a:solidFill>
+                <a:latin typeface="Space Grotesk"/>
+              </a:rPr>
+              <a:t>Métodos de raíces</a:t>
+            </a:r>
+          </a:p>
+        </p:txBody>
+      </p:sp>
+      <p:sp>
+        <p:nvSpPr>
+          <p:cNvPr id="20" name="TextBox 19"/>
+          <p:cNvSpPr txBox="1"/>
+          <p:nvPr/>
+        </p:nvSpPr>
+        <p:spPr>
+          <a:xfrm>
+            <a:off x="6477000" y="4585245"/>
+            <a:ext cx="4972050" cy="438150"/>
+          </a:xfrm>
+          <a:prstGeom prst="rect">
+            <a:avLst/>
+          </a:prstGeom>
+          <a:noFill/>
+        </p:spPr>
+        <p:txBody>
+          <a:bodyPr wrap="square" lIns="0" rIns="0" tIns="0" bIns="0" anchor="t">
+            <a:spAutoFit/>
+          </a:bodyPr>
+          <a:lstStyle/>
+          <a:p>
+            <a:pPr algn="l"/>
+            <a:r>
+              <a:rPr b="0" sz="1350" i="0" u="none">
+                <a:solidFill>
+                  <a:srgbClr val="64748B"/>
+                </a:solidFill>
+                <a:latin typeface="Plus Jakarta Sans"/>
+              </a:rPr>
+              <a:t>Newton-Raphson converge mucho más rápido; bisección es más segura.</a:t>
+            </a:r>
+          </a:p>
+        </p:txBody>
+      </p:sp>
+      <p:sp>
+        <p:nvSpPr>
+          <p:cNvPr id="5" name="Rectangle 4"/>
+          <p:cNvSpPr/>
+          <p:nvPr/>
+        </p:nvSpPr>
+        <p:spPr>
+          <a:xfrm>
+            <a:off x="609600" y="2900000"/>
+            <a:ext cx="10972800" cy="1076325"/>
+          </a:xfrm>
+          <a:prstGeom prst="rect">
+            <a:avLst/>
+          </a:prstGeom>
+          <a:solidFill>
+            <a:srgbClr val="F8FAFC"/>
+          </a:solidFill>
+          <a:ln>
+            <a:noFill/>
+          </a:ln>
+          <a:effectLst/>
+        </p:spPr>
+        <p:style>
+          <a:lnRef idx="1">
+            <a:schemeClr val="accent1"/>
+          </a:lnRef>
+          <a:fillRef idx="3">
+            <a:schemeClr val="accent1"/>
+          </a:fillRef>
+          <a:effectRef idx="2">
+            <a:schemeClr val="accent1"/>
+          </a:effectRef>
+          <a:fontRef idx="minor">
+            <a:schemeClr val="lt1"/>
+          </a:fontRef>
+        </p:style>
+        <p:txBody>
+          <a:bodyPr rtlCol="0" anchor="ctr"/>
+          <a:lstStyle/>
+          <a:p>
+            <a:pPr algn="ctr"/>
+          </a:p>
+        </p:txBody>
+      </p:sp>
+      <p:sp>
+        <p:nvSpPr>
+          <p:cNvPr id="7" name="Rectangle 6"/>
+          <p:cNvSpPr/>
+          <p:nvPr/>
+        </p:nvSpPr>
+        <p:spPr>
+          <a:xfrm>
+            <a:off x="609600" y="2900000"/>
+            <a:ext cx="38100" cy="1076325"/>
+          </a:xfrm>
+          <a:prstGeom prst="rect">
+            <a:avLst/>
+          </a:prstGeom>
+          <a:solidFill>
+            <a:srgbClr val="16A34A"/>
+          </a:solidFill>
+          <a:ln>
+            <a:noFill/>
+          </a:ln>
+          <a:effectLst/>
+        </p:spPr>
+        <p:style>
+          <a:lnRef idx="1">
+            <a:schemeClr val="accent1"/>
+          </a:lnRef>
+          <a:fillRef idx="3">
+            <a:schemeClr val="accent1"/>
+          </a:fillRef>
+          <a:effectRef idx="2">
+            <a:schemeClr val="accent1"/>
+          </a:effectRef>
+          <a:fontRef idx="minor">
+            <a:schemeClr val="lt1"/>
+          </a:fontRef>
+        </p:style>
+        <p:txBody>
+          <a:bodyPr rtlCol="0" anchor="ctr"/>
+          <a:lstStyle/>
+          <a:p>
+            <a:pPr algn="ctr"/>
+          </a:p>
+        </p:txBody>
+      </p:sp>
+      <p:sp>
+        <p:nvSpPr>
+          <p:cNvPr id="17" name="TextBox 16"/>
+          <p:cNvSpPr txBox="1"/>
+          <p:nvPr/>
+        </p:nvSpPr>
+        <p:spPr>
+          <a:xfrm>
+            <a:off x="876300" y="3090500"/>
+            <a:ext cx="10572800" cy="219075"/>
+          </a:xfrm>
+          <a:prstGeom prst="rect">
+            <a:avLst/>
+          </a:prstGeom>
+          <a:noFill/>
+        </p:spPr>
+        <p:txBody>
+          <a:bodyPr wrap="none" lIns="0" rIns="0" tIns="0" bIns="0" anchor="t">
+            <a:spAutoFit/>
+          </a:bodyPr>
+          <a:lstStyle/>
+          <a:p>
+            <a:pPr algn="l"/>
+            <a:r>
+              <a:rPr b="1" sz="1350" i="0" u="none">
+                <a:solidFill>
+                  <a:srgbClr val="0F172A"/>
+                </a:solidFill>
+                <a:latin typeface="Space Grotesk"/>
+              </a:rPr>
+              <a:t>Generalizable</a:t>
+            </a:r>
+          </a:p>
+        </p:txBody>
+      </p:sp>
+      <p:sp>
+        <p:nvSpPr>
+          <p:cNvPr id="18" name="TextBox 17"/>
+          <p:cNvSpPr txBox="1"/>
+          <p:nvPr/>
+        </p:nvSpPr>
+        <p:spPr>
+          <a:xfrm>
+            <a:off x="876300" y="3347675"/>
+            <a:ext cx="10572800" cy="438150"/>
+          </a:xfrm>
+          <a:prstGeom prst="rect">
+            <a:avLst/>
+          </a:prstGeom>
+          <a:noFill/>
+        </p:spPr>
+        <p:txBody>
+          <a:bodyPr wrap="square" lIns="0" rIns="0" tIns="0" bIns="0" anchor="t">
+            <a:spAutoFit/>
+          </a:bodyPr>
+          <a:lstStyle/>
+          <a:p>
+            <a:pPr algn="l"/>
+            <a:r>
+              <a:rPr b="0" sz="1350" i="0" u="none">
+                <a:solidFill>
+                  <a:srgbClr val="64748B"/>
+                </a:solidFill>
+                <a:latin typeface="Plus Jakarta Sans"/>
+              </a:rPr>
+              <a:t>El mismo programa sirve para cualquier canción con datos semanales.</a:t>
+            </a:r>
+          </a:p>
+        </p:txBody>
+      </p:sp>
+    </p:spTree>
+  </p:cSld>
+  <p:clrMapOvr>
+    <a:masterClrMapping/>
+  </p:clrMapOvr>
+</p:sld>
+</file>
+
+<file path=ppt/slides/slide13.xml><?xml version="1.0" encoding="utf-8"?>
 <p:sld xmlns:a="http://schemas.openxmlformats.org/drawingml/2006/main" xmlns:p="http://schemas.openxmlformats.org/presentationml/2006/main" xmlns:r="http://schemas.openxmlformats.org/officeDocument/2006/relationships">
   <p:cSld>
     <p:bg>
@@ -5569,7 +5785,7 @@
 </p:sld>
 </file>
 
-<file path=ppt/slides/slide13.xml><?xml version="1.0" encoding="utf-8"?>
+<file path=ppt/slides/slide14.xml><?xml version="1.0" encoding="utf-8"?>
 <p:sld xmlns:a="http://schemas.openxmlformats.org/drawingml/2006/main" xmlns:p="http://schemas.openxmlformats.org/presentationml/2006/main" xmlns:r="http://schemas.openxmlformats.org/officeDocument/2006/relationships">
   <p:cSld>
     <p:bg>
@@ -6521,7 +6737,7 @@
                 </a:solidFill>
                 <a:latin typeface="Plus Jakarta Sans"/>
               </a:rPr>
-              <a:t>De 1.1 M a pico de 4.17 M semanales en México.</a:t>
+              <a:t>De 1,1 M a pico de 4,17 M semanales en México.</a:t>
             </a:r>
           </a:p>
         </p:txBody>
@@ -7227,7 +7443,7 @@
                 </a:solidFill>
                 <a:latin typeface="Plus Jakarta Sans"/>
               </a:rPr>
-              <a:t>132.9 M</a:t>
+              <a:t>132,9 M</a:t>
             </a:r>
           </a:p>
         </p:txBody>
@@ -7364,6 +7580,657 @@
         </p:nvSpPr>
         <p:spPr>
           <a:xfrm>
+            <a:off x="609600" y="2880270"/>
+            <a:ext cx="2571750" cy="2019300"/>
+          </a:xfrm>
+          <a:prstGeom prst="roundRect">
+            <a:avLst>
+              <a:gd name="adj" fmla="val 7547"/>
+            </a:avLst>
+          </a:prstGeom>
+          <a:solidFill>
+            <a:srgbClr val="F8FAFC"/>
+          </a:solidFill>
+          <a:ln>
+            <a:noFill/>
+          </a:ln>
+          <a:effectLst/>
+        </p:spPr>
+        <p:style>
+          <a:lnRef idx="1">
+            <a:schemeClr val="accent1"/>
+          </a:lnRef>
+          <a:fillRef idx="3">
+            <a:schemeClr val="accent1"/>
+          </a:fillRef>
+          <a:effectRef idx="2">
+            <a:schemeClr val="accent1"/>
+          </a:effectRef>
+          <a:fontRef idx="minor">
+            <a:schemeClr val="lt1"/>
+          </a:fontRef>
+        </p:style>
+        <p:txBody>
+          <a:bodyPr rtlCol="0" anchor="ctr"/>
+          <a:lstStyle/>
+          <a:p>
+            <a:pPr algn="ctr"/>
+          </a:p>
+        </p:txBody>
+      </p:sp>
+      <p:sp>
+        <p:nvSpPr>
+          <p:cNvPr id="3" name="Rounded Rectangle 2"/>
+          <p:cNvSpPr/>
+          <p:nvPr/>
+        </p:nvSpPr>
+        <p:spPr>
+          <a:xfrm>
+            <a:off x="3409950" y="2880270"/>
+            <a:ext cx="2571750" cy="2019300"/>
+          </a:xfrm>
+          <a:prstGeom prst="roundRect">
+            <a:avLst>
+              <a:gd name="adj" fmla="val 7547"/>
+            </a:avLst>
+          </a:prstGeom>
+          <a:solidFill>
+            <a:srgbClr val="F8FAFC"/>
+          </a:solidFill>
+          <a:ln>
+            <a:noFill/>
+          </a:ln>
+          <a:effectLst/>
+        </p:spPr>
+        <p:style>
+          <a:lnRef idx="1">
+            <a:schemeClr val="accent1"/>
+          </a:lnRef>
+          <a:fillRef idx="3">
+            <a:schemeClr val="accent1"/>
+          </a:fillRef>
+          <a:effectRef idx="2">
+            <a:schemeClr val="accent1"/>
+          </a:effectRef>
+          <a:fontRef idx="minor">
+            <a:schemeClr val="lt1"/>
+          </a:fontRef>
+        </p:style>
+        <p:txBody>
+          <a:bodyPr rtlCol="0" anchor="ctr"/>
+          <a:lstStyle/>
+          <a:p>
+            <a:pPr algn="ctr"/>
+          </a:p>
+        </p:txBody>
+      </p:sp>
+      <p:sp>
+        <p:nvSpPr>
+          <p:cNvPr id="4" name="Rounded Rectangle 3"/>
+          <p:cNvSpPr/>
+          <p:nvPr/>
+        </p:nvSpPr>
+        <p:spPr>
+          <a:xfrm>
+            <a:off x="6210300" y="2880270"/>
+            <a:ext cx="2571750" cy="2019300"/>
+          </a:xfrm>
+          <a:prstGeom prst="roundRect">
+            <a:avLst>
+              <a:gd name="adj" fmla="val 7547"/>
+            </a:avLst>
+          </a:prstGeom>
+          <a:solidFill>
+            <a:srgbClr val="F8FAFC"/>
+          </a:solidFill>
+          <a:ln>
+            <a:noFill/>
+          </a:ln>
+          <a:effectLst/>
+        </p:spPr>
+        <p:style>
+          <a:lnRef idx="1">
+            <a:schemeClr val="accent1"/>
+          </a:lnRef>
+          <a:fillRef idx="3">
+            <a:schemeClr val="accent1"/>
+          </a:fillRef>
+          <a:effectRef idx="2">
+            <a:schemeClr val="accent1"/>
+          </a:effectRef>
+          <a:fontRef idx="minor">
+            <a:schemeClr val="lt1"/>
+          </a:fontRef>
+        </p:style>
+        <p:txBody>
+          <a:bodyPr rtlCol="0" anchor="ctr"/>
+          <a:lstStyle/>
+          <a:p>
+            <a:pPr algn="ctr"/>
+          </a:p>
+        </p:txBody>
+      </p:sp>
+      <p:sp>
+        <p:nvSpPr>
+          <p:cNvPr id="5" name="Rounded Rectangle 4"/>
+          <p:cNvSpPr/>
+          <p:nvPr/>
+        </p:nvSpPr>
+        <p:spPr>
+          <a:xfrm>
+            <a:off x="9010650" y="2880270"/>
+            <a:ext cx="2571750" cy="2019300"/>
+          </a:xfrm>
+          <a:prstGeom prst="roundRect">
+            <a:avLst>
+              <a:gd name="adj" fmla="val 7547"/>
+            </a:avLst>
+          </a:prstGeom>
+          <a:solidFill>
+            <a:srgbClr val="F8FAFC"/>
+          </a:solidFill>
+          <a:ln>
+            <a:noFill/>
+          </a:ln>
+          <a:effectLst/>
+        </p:spPr>
+        <p:style>
+          <a:lnRef idx="1">
+            <a:schemeClr val="accent1"/>
+          </a:lnRef>
+          <a:fillRef idx="3">
+            <a:schemeClr val="accent1"/>
+          </a:fillRef>
+          <a:effectRef idx="2">
+            <a:schemeClr val="accent1"/>
+          </a:effectRef>
+          <a:fontRef idx="minor">
+            <a:schemeClr val="lt1"/>
+          </a:fontRef>
+        </p:style>
+        <p:txBody>
+          <a:bodyPr rtlCol="0" anchor="ctr"/>
+          <a:lstStyle/>
+          <a:p>
+            <a:pPr algn="ctr"/>
+          </a:p>
+        </p:txBody>
+      </p:sp>
+      <p:sp>
+        <p:nvSpPr>
+          <p:cNvPr id="14" name="TextBox 13"/>
+          <p:cNvSpPr txBox="1"/>
+          <p:nvPr/>
+        </p:nvSpPr>
+        <p:spPr>
+          <a:xfrm>
+            <a:off x="609600" y="457200"/>
+            <a:ext cx="11582400" cy="171450"/>
+          </a:xfrm>
+          <a:prstGeom prst="rect">
+            <a:avLst/>
+          </a:prstGeom>
+          <a:noFill/>
+        </p:spPr>
+        <p:txBody>
+          <a:bodyPr wrap="none" lIns="0" rIns="0" tIns="0" bIns="0" anchor="t">
+            <a:spAutoFit/>
+          </a:bodyPr>
+          <a:lstStyle/>
+          <a:p>
+            <a:pPr algn="l"/>
+            <a:r>
+              <a:rPr b="1" sz="1050" i="0" u="none">
+                <a:solidFill>
+                  <a:srgbClr val="E11D48"/>
+                </a:solidFill>
+                <a:latin typeface="Plus Jakarta Sans"/>
+              </a:rPr>
+              <a:t>JUSTIFICACIÓN DE LOS MÉTODOS</a:t>
+            </a:r>
+          </a:p>
+        </p:txBody>
+      </p:sp>
+      <p:sp>
+        <p:nvSpPr>
+          <p:cNvPr id="15" name="TextBox 14"/>
+          <p:cNvSpPr txBox="1"/>
+          <p:nvPr/>
+        </p:nvSpPr>
+        <p:spPr>
+          <a:xfrm>
+            <a:off x="609600" y="685800"/>
+            <a:ext cx="11582400" cy="388590"/>
+          </a:xfrm>
+          <a:prstGeom prst="rect">
+            <a:avLst/>
+          </a:prstGeom>
+          <a:noFill/>
+        </p:spPr>
+        <p:txBody>
+          <a:bodyPr wrap="none" lIns="0" rIns="0" tIns="0" bIns="0" anchor="t">
+            <a:spAutoFit/>
+          </a:bodyPr>
+          <a:lstStyle/>
+          <a:p>
+            <a:pPr algn="l">
+              <a:lnSpc>
+                <a:spcPts val="3060"/>
+              </a:lnSpc>
+            </a:pPr>
+            <a:r>
+              <a:rPr b="1" sz="2550" i="0" u="none">
+                <a:solidFill>
+                  <a:srgbClr val="0F172A"/>
+                </a:solidFill>
+                <a:latin typeface="Space Grotesk"/>
+              </a:rPr>
+              <a:t>¿Por qué estos métodos?</a:t>
+            </a:r>
+          </a:p>
+        </p:txBody>
+      </p:sp>
+      <p:sp>
+        <p:nvSpPr>
+          <p:cNvPr id="16" name="TextBox 15"/>
+          <p:cNvSpPr txBox="1"/>
+          <p:nvPr/>
+        </p:nvSpPr>
+        <p:spPr>
+          <a:xfrm>
+            <a:off x="838200" y="3261270"/>
+            <a:ext cx="2194560" cy="219075"/>
+          </a:xfrm>
+          <a:prstGeom prst="rect">
+            <a:avLst/>
+          </a:prstGeom>
+          <a:noFill/>
+        </p:spPr>
+        <p:txBody>
+          <a:bodyPr wrap="none" lIns="0" rIns="0" tIns="0" bIns="0" anchor="t">
+            <a:spAutoFit/>
+          </a:bodyPr>
+          <a:lstStyle/>
+          <a:p>
+            <a:pPr algn="l"/>
+            <a:r>
+              <a:rPr b="1" sz="1600" i="0" u="none">
+                <a:solidFill>
+                  <a:srgbClr val="0F172A"/>
+                </a:solidFill>
+                <a:latin typeface="Space Grotesk"/>
+              </a:rPr>
+              <a:t>Interpolación lineal</a:t>
+            </a:r>
+          </a:p>
+        </p:txBody>
+      </p:sp>
+      <p:sp>
+        <p:nvSpPr>
+          <p:cNvPr id="17" name="TextBox 16"/>
+          <p:cNvSpPr txBox="1"/>
+          <p:nvPr/>
+        </p:nvSpPr>
+        <p:spPr>
+          <a:xfrm>
+            <a:off x="838200" y="3594645"/>
+            <a:ext cx="2209800" cy="768096"/>
+          </a:xfrm>
+          <a:prstGeom prst="rect">
+            <a:avLst/>
+          </a:prstGeom>
+          <a:noFill/>
+        </p:spPr>
+        <p:txBody>
+          <a:bodyPr wrap="square" lIns="0" rIns="0" tIns="0" bIns="0" anchor="t">
+            <a:spAutoFit/>
+          </a:bodyPr>
+          <a:lstStyle/>
+          <a:p>
+            <a:pPr algn="l"/>
+            <a:r>
+              <a:rPr b="0" sz="1500" i="0" u="none">
+                <a:solidFill>
+                  <a:srgbClr val="475569"/>
+                </a:solidFill>
+                <a:latin typeface="Plus Jakarta Sans"/>
+              </a:rPr>
+              <a:t>Ignora la curvatura. Da 35,127 semanas: se usa como control.</a:t>
+            </a:r>
+          </a:p>
+        </p:txBody>
+      </p:sp>
+      <p:sp>
+        <p:nvSpPr>
+          <p:cNvPr id="18" name="TextBox 17"/>
+          <p:cNvSpPr txBox="1"/>
+          <p:nvPr/>
+        </p:nvSpPr>
+        <p:spPr>
+          <a:xfrm>
+            <a:off x="3638550" y="3261270"/>
+            <a:ext cx="2194560" cy="219075"/>
+          </a:xfrm>
+          <a:prstGeom prst="rect">
+            <a:avLst/>
+          </a:prstGeom>
+          <a:noFill/>
+        </p:spPr>
+        <p:txBody>
+          <a:bodyPr wrap="none" lIns="0" rIns="0" tIns="0" bIns="0" anchor="t">
+            <a:spAutoFit/>
+          </a:bodyPr>
+          <a:lstStyle/>
+          <a:p>
+            <a:pPr algn="l"/>
+            <a:r>
+              <a:rPr b="1" sz="1600" i="0" u="none">
+                <a:solidFill>
+                  <a:srgbClr val="0F172A"/>
+                </a:solidFill>
+                <a:latin typeface="Space Grotesk"/>
+              </a:rPr>
+              <a:t>Lagrange (5.4)</a:t>
+            </a:r>
+          </a:p>
+        </p:txBody>
+      </p:sp>
+      <p:sp>
+        <p:nvSpPr>
+          <p:cNvPr id="19" name="TextBox 18"/>
+          <p:cNvSpPr txBox="1"/>
+          <p:nvPr/>
+        </p:nvSpPr>
+        <p:spPr>
+          <a:xfrm>
+            <a:off x="3638550" y="3594645"/>
+            <a:ext cx="2209800" cy="768096"/>
+          </a:xfrm>
+          <a:prstGeom prst="rect">
+            <a:avLst/>
+          </a:prstGeom>
+          <a:noFill/>
+        </p:spPr>
+        <p:txBody>
+          <a:bodyPr wrap="square" lIns="0" rIns="0" tIns="0" bIns="0" anchor="t">
+            <a:spAutoFit/>
+          </a:bodyPr>
+          <a:lstStyle/>
+          <a:p>
+            <a:pPr algn="l"/>
+            <a:r>
+              <a:rPr b="0" sz="1500" i="0" u="none">
+                <a:solidFill>
+                  <a:srgbClr val="475569"/>
+                </a:solidFill>
+                <a:latin typeface="Plus Jakarta Sans"/>
+              </a:rPr>
+              <a:t>Con los mismos 4 puntos da el mismo polinomio, sin la tabla de diferencias.</a:t>
+            </a:r>
+          </a:p>
+        </p:txBody>
+      </p:sp>
+      <p:sp>
+        <p:nvSpPr>
+          <p:cNvPr id="20" name="TextBox 19"/>
+          <p:cNvSpPr txBox="1"/>
+          <p:nvPr/>
+        </p:nvSpPr>
+        <p:spPr>
+          <a:xfrm>
+            <a:off x="6438900" y="3261270"/>
+            <a:ext cx="2194560" cy="219075"/>
+          </a:xfrm>
+          <a:prstGeom prst="rect">
+            <a:avLst/>
+          </a:prstGeom>
+          <a:noFill/>
+        </p:spPr>
+        <p:txBody>
+          <a:bodyPr wrap="none" lIns="0" rIns="0" tIns="0" bIns="0" anchor="t">
+            <a:spAutoFit/>
+          </a:bodyPr>
+          <a:lstStyle/>
+          <a:p>
+            <a:pPr algn="l"/>
+            <a:r>
+              <a:rPr b="1" sz="1600" i="0" u="none">
+                <a:solidFill>
+                  <a:srgbClr val="0F172A"/>
+                </a:solidFill>
+                <a:latin typeface="Space Grotesk"/>
+              </a:rPr>
+              <a:t>Trazadora cúbica (5.5)</a:t>
+            </a:r>
+          </a:p>
+        </p:txBody>
+      </p:sp>
+      <p:sp>
+        <p:nvSpPr>
+          <p:cNvPr id="21" name="TextBox 20"/>
+          <p:cNvSpPr txBox="1"/>
+          <p:nvPr/>
+        </p:nvSpPr>
+        <p:spPr>
+          <a:xfrm>
+            <a:off x="6438900" y="3594645"/>
+            <a:ext cx="2209800" cy="768096"/>
+          </a:xfrm>
+          <a:prstGeom prst="rect">
+            <a:avLst/>
+          </a:prstGeom>
+          <a:noFill/>
+        </p:spPr>
+        <p:txBody>
+          <a:bodyPr wrap="square" lIns="0" rIns="0" tIns="0" bIns="0" anchor="t">
+            <a:spAutoFit/>
+          </a:bodyPr>
+          <a:lstStyle/>
+          <a:p>
+            <a:pPr algn="l"/>
+            <a:r>
+              <a:rPr b="0" sz="1500" i="0" u="none">
+                <a:solidFill>
+                  <a:srgbClr val="475569"/>
+                </a:solidFill>
+                <a:latin typeface="Plus Jakarta Sans"/>
+              </a:rPr>
+              <a:t>Necesita los 47 datos; el cruce solo depende de 4.</a:t>
+            </a:r>
+          </a:p>
+        </p:txBody>
+      </p:sp>
+      <p:sp>
+        <p:nvSpPr>
+          <p:cNvPr id="22" name="TextBox 21"/>
+          <p:cNvSpPr txBox="1"/>
+          <p:nvPr/>
+        </p:nvSpPr>
+        <p:spPr>
+          <a:xfrm>
+            <a:off x="9239250" y="3261270"/>
+            <a:ext cx="2194560" cy="219075"/>
+          </a:xfrm>
+          <a:prstGeom prst="rect">
+            <a:avLst/>
+          </a:prstGeom>
+          <a:noFill/>
+        </p:spPr>
+        <p:txBody>
+          <a:bodyPr wrap="none" lIns="0" rIns="0" tIns="0" bIns="0" anchor="t">
+            <a:spAutoFit/>
+          </a:bodyPr>
+          <a:lstStyle/>
+          <a:p>
+            <a:pPr algn="l"/>
+            <a:r>
+              <a:rPr b="1" sz="1600" i="0" u="none">
+                <a:solidFill>
+                  <a:srgbClr val="0F172A"/>
+                </a:solidFill>
+                <a:latin typeface="Space Grotesk"/>
+              </a:rPr>
+              <a:t>Regresión (5.2)</a:t>
+            </a:r>
+          </a:p>
+        </p:txBody>
+      </p:sp>
+      <p:sp>
+        <p:nvSpPr>
+          <p:cNvPr id="23" name="TextBox 22"/>
+          <p:cNvSpPr txBox="1"/>
+          <p:nvPr/>
+        </p:nvSpPr>
+        <p:spPr>
+          <a:xfrm>
+            <a:off x="9239250" y="3594645"/>
+            <a:ext cx="2209800" cy="768096"/>
+          </a:xfrm>
+          <a:prstGeom prst="rect">
+            <a:avLst/>
+          </a:prstGeom>
+          <a:noFill/>
+        </p:spPr>
+        <p:txBody>
+          <a:bodyPr wrap="square" lIns="0" rIns="0" tIns="0" bIns="0" anchor="t">
+            <a:spAutoFit/>
+          </a:bodyPr>
+          <a:lstStyle/>
+          <a:p>
+            <a:pPr algn="l"/>
+            <a:r>
+              <a:rPr b="0" sz="1500" i="0" u="none">
+                <a:solidFill>
+                  <a:srgbClr val="475569"/>
+                </a:solidFill>
+                <a:latin typeface="Plus Jakarta Sans"/>
+              </a:rPr>
+              <a:t>El apunte trae la recta: no pasa por los datos medidos.</a:t>
+            </a:r>
+          </a:p>
+        </p:txBody>
+      </p:sp>
+      <p:sp>
+        <p:nvSpPr>
+          <p:cNvPr id="121" name="TextBox 16"/>
+          <p:cNvSpPr txBox="1"/>
+          <p:nvPr/>
+        </p:nvSpPr>
+        <p:spPr>
+          <a:xfrm>
+            <a:off x="609600" y="1920240"/>
+            <a:ext cx="10789920" cy="762000"/>
+          </a:xfrm>
+          <a:prstGeom prst="rect">
+            <a:avLst/>
+          </a:prstGeom>
+          <a:noFill/>
+        </p:spPr>
+        <p:txBody>
+          <a:bodyPr wrap="square" lIns="0" rIns="0" tIns="0" bIns="0" anchor="t">
+            <a:spAutoFit/>
+          </a:bodyPr>
+          <a:lstStyle/>
+          <a:p>
+            <a:pPr algn="l"/>
+            <a:r>
+              <a:rPr b="0" sz="1600" i="0" u="none">
+                <a:solidFill>
+                  <a:srgbClr val="475569"/>
+                </a:solidFill>
+                <a:latin typeface="Plus Jakarta Sans"/>
+              </a:rPr>
+              <a:t>Se eligió la interpolación de Newton (apartado 5.3) frente a las otras opciones de los apuntes:</a:t>
+            </a:r>
+          </a:p>
+        </p:txBody>
+      </p:sp>
+      <p:sp>
+        <p:nvSpPr>
+          <p:cNvPr id="157" name="TextBox 16"/>
+          <p:cNvSpPr txBox="1"/>
+          <p:nvPr/>
+        </p:nvSpPr>
+        <p:spPr>
+          <a:xfrm>
+            <a:off x="609600" y="5257800"/>
+            <a:ext cx="10789920" cy="762000"/>
+          </a:xfrm>
+          <a:prstGeom prst="rect">
+            <a:avLst/>
+          </a:prstGeom>
+          <a:noFill/>
+        </p:spPr>
+        <p:txBody>
+          <a:bodyPr wrap="square" lIns="0" rIns="0" tIns="0" bIns="0" anchor="t">
+            <a:spAutoFit/>
+          </a:bodyPr>
+          <a:lstStyle/>
+          <a:p>
+            <a:pPr algn="l"/>
+            <a:r>
+              <a:rPr b="0" sz="1600" i="0" u="none">
+                <a:solidFill>
+                  <a:srgbClr val="475569"/>
+                </a:solidFill>
+                <a:latin typeface="Plus Jakarta Sans"/>
+              </a:rPr>
+              <a:t>Raíces: Bisección (cerrado, segura) vs. Newton-Raphson (abierto, rápido).</a:t>
+            </a:r>
+            <a:br>
+              <a:rPr b="0" sz="1600" i="0" u="none">
+                <a:solidFill>
+                  <a:srgbClr val="475569"/>
+                </a:solidFill>
+                <a:latin typeface="Plus Jakarta Sans"/>
+              </a:rPr>
+            </a:br>
+            <a:r>
+              <a:rPr b="0" sz="1600" i="0" u="none">
+                <a:solidFill>
+                  <a:srgbClr val="475569"/>
+                </a:solidFill>
+                <a:latin typeface="Plus Jakarta Sans"/>
+              </a:rPr>
+              <a:t>La secante no hace falta: la derivada de P(t) se obtiene analíticamente.</a:t>
+            </a:r>
+          </a:p>
+        </p:txBody>
+      </p:sp>
+    </p:spTree>
+  </p:cSld>
+  <p:clrMapOvr>
+    <a:masterClrMapping/>
+  </p:clrMapOvr>
+</p:sld>
+</file>
+
+<file path=ppt/slides/slide6.xml><?xml version="1.0" encoding="utf-8"?>
+<p:sld xmlns:a="http://schemas.openxmlformats.org/drawingml/2006/main" xmlns:p="http://schemas.openxmlformats.org/presentationml/2006/main" xmlns:r="http://schemas.openxmlformats.org/officeDocument/2006/relationships">
+  <p:cSld>
+    <p:bg>
+      <p:bgPr>
+        <a:solidFill>
+          <a:srgbClr val="FFFFFF"/>
+        </a:solidFill>
+        <a:effectLst/>
+      </p:bgPr>
+    </p:bg>
+    <p:spTree>
+      <p:nvGrpSpPr>
+        <p:cNvPr id="1" name=""/>
+        <p:cNvGrpSpPr/>
+        <p:nvPr/>
+      </p:nvGrpSpPr>
+      <p:grpSpPr/>
+      <p:sp>
+        <p:nvSpPr>
+          <p:cNvPr id="2" name="Rounded Rectangle 1"/>
+          <p:cNvSpPr/>
+          <p:nvPr/>
+        </p:nvSpPr>
+        <p:spPr>
+          <a:xfrm>
             <a:off x="609600" y="1341090"/>
             <a:ext cx="10972800" cy="1571625"/>
           </a:xfrm>
@@ -7679,8 +8546,8 @@
                 </a:solidFill>
                 <a:latin typeface="Space Grotesk"/>
               </a:rPr>
-              <a:t>P(t) = 96.349 + 3.25351(t−34) − 0.05879(t−34)(t−35)
-          − 0.009340(t−34)(t−35)(t−36)</a:t>
+              <a:t>P(t) = 96,349 + 3,25351(t−34) − 0,05879(t−34)(t−35)
+          − 0,009340(t−34)(t−35)(t−36)</a:t>
             </a:r>
           </a:p>
         </p:txBody>
@@ -8226,7 +9093,7 @@
                           </a:solidFill>
                           <a:latin typeface="Aptos"/>
                         </a:rPr>
-                        <a:t>96.349</a:t>
+                        <a:t>96,349</a:t>
                       </a:r>
                     </a:p>
                   </a:txBody>
@@ -8249,7 +9116,7 @@
                           </a:solidFill>
                           <a:latin typeface="Aptos"/>
                         </a:rPr>
-                        <a:t>3.25351</a:t>
+                        <a:t>3,25351</a:t>
                       </a:r>
                     </a:p>
                   </a:txBody>
@@ -8272,7 +9139,7 @@
                           </a:solidFill>
                           <a:latin typeface="Aptos"/>
                         </a:rPr>
-                        <a:t>−0.05879</a:t>
+                        <a:t>−0,05879</a:t>
                       </a:r>
                     </a:p>
                   </a:txBody>
@@ -8295,7 +9162,7 @@
                           </a:solidFill>
                           <a:latin typeface="Aptos"/>
                         </a:rPr>
-                        <a:t>−0.00934</a:t>
+                        <a:t>−0,00934</a:t>
                       </a:r>
                     </a:p>
                   </a:txBody>
@@ -8343,7 +9210,7 @@
                           </a:solidFill>
                           <a:latin typeface="Aptos"/>
                         </a:rPr>
-                        <a:t>99.602</a:t>
+                        <a:t>99,602</a:t>
                       </a:r>
                     </a:p>
                   </a:txBody>
@@ -8366,7 +9233,7 @@
                           </a:solidFill>
                           <a:latin typeface="Aptos"/>
                         </a:rPr>
-                        <a:t>3.13594</a:t>
+                        <a:t>3,13594</a:t>
                       </a:r>
                     </a:p>
                   </a:txBody>
@@ -8389,7 +9256,7 @@
                           </a:solidFill>
                           <a:latin typeface="Aptos"/>
                         </a:rPr>
-                        <a:t>−0.08681</a:t>
+                        <a:t>−0,08681</a:t>
                       </a:r>
                     </a:p>
                   </a:txBody>
@@ -8451,7 +9318,7 @@
                           </a:solidFill>
                           <a:latin typeface="Aptos"/>
                         </a:rPr>
-                        <a:t>102.738</a:t>
+                        <a:t>102,738</a:t>
                       </a:r>
                     </a:p>
                   </a:txBody>
@@ -8474,7 +9341,7 @@
                           </a:solidFill>
                           <a:latin typeface="Aptos"/>
                         </a:rPr>
-                        <a:t>2.96232</a:t>
+                        <a:t>2,96232</a:t>
                       </a:r>
                     </a:p>
                   </a:txBody>
@@ -8550,7 +9417,7 @@
                           </a:solidFill>
                           <a:latin typeface="Aptos"/>
                         </a:rPr>
-                        <a:t>105.700</a:t>
+                        <a:t>105,700</a:t>
                       </a:r>
                     </a:p>
                   </a:txBody>
@@ -8615,1042 +9482,6 @@
 </p:sld>
 </file>
 
-<file path=ppt/slides/slide6.xml><?xml version="1.0" encoding="utf-8"?>
-<p:sld xmlns:a="http://schemas.openxmlformats.org/drawingml/2006/main" xmlns:p="http://schemas.openxmlformats.org/presentationml/2006/main" xmlns:r="http://schemas.openxmlformats.org/officeDocument/2006/relationships">
-  <p:cSld>
-    <p:bg>
-      <p:bgPr>
-        <a:solidFill>
-          <a:srgbClr val="FFFFFF"/>
-        </a:solidFill>
-        <a:effectLst/>
-      </p:bgPr>
-    </p:bg>
-    <p:spTree>
-      <p:nvGrpSpPr>
-        <p:cNvPr id="1" name=""/>
-        <p:cNvGrpSpPr/>
-        <p:nvPr/>
-      </p:nvGrpSpPr>
-      <p:grpSpPr/>
-      <p:sp>
-        <p:nvSpPr>
-          <p:cNvPr id="2" name="Rounded Rectangle 1"/>
-          <p:cNvSpPr/>
-          <p:nvPr/>
-        </p:nvSpPr>
-        <p:spPr>
-          <a:xfrm>
-            <a:off x="609600" y="2537370"/>
-            <a:ext cx="5334000" cy="2895600"/>
-          </a:xfrm>
-          <a:prstGeom prst="roundRect">
-            <a:avLst>
-              <a:gd name="adj" fmla="val 5263"/>
-            </a:avLst>
-          </a:prstGeom>
-          <a:solidFill>
-            <a:srgbClr val="F8FAFC"/>
-          </a:solidFill>
-          <a:ln>
-            <a:noFill/>
-          </a:ln>
-          <a:effectLst/>
-        </p:spPr>
-        <p:style>
-          <a:lnRef idx="1">
-            <a:schemeClr val="accent1"/>
-          </a:lnRef>
-          <a:fillRef idx="3">
-            <a:schemeClr val="accent1"/>
-          </a:fillRef>
-          <a:effectRef idx="2">
-            <a:schemeClr val="accent1"/>
-          </a:effectRef>
-          <a:fontRef idx="minor">
-            <a:schemeClr val="lt1"/>
-          </a:fontRef>
-        </p:style>
-        <p:txBody>
-          <a:bodyPr rtlCol="0" anchor="ctr"/>
-          <a:lstStyle/>
-          <a:p>
-            <a:pPr algn="ctr"/>
-          </a:p>
-        </p:txBody>
-      </p:sp>
-      <p:sp>
-        <p:nvSpPr>
-          <p:cNvPr id="3" name="Rounded Rectangle 2"/>
-          <p:cNvSpPr/>
-          <p:nvPr/>
-        </p:nvSpPr>
-        <p:spPr>
-          <a:xfrm>
-            <a:off x="6248400" y="2532608"/>
-            <a:ext cx="5334000" cy="2905125"/>
-          </a:xfrm>
-          <a:prstGeom prst="roundRect">
-            <a:avLst>
-              <a:gd name="adj" fmla="val 5245"/>
-            </a:avLst>
-          </a:prstGeom>
-          <a:solidFill>
-            <a:srgbClr val="FFF1F2"/>
-          </a:solidFill>
-          <a:ln>
-            <a:noFill/>
-          </a:ln>
-          <a:effectLst/>
-        </p:spPr>
-        <p:style>
-          <a:lnRef idx="1">
-            <a:schemeClr val="accent1"/>
-          </a:lnRef>
-          <a:fillRef idx="3">
-            <a:schemeClr val="accent1"/>
-          </a:fillRef>
-          <a:effectRef idx="2">
-            <a:schemeClr val="accent1"/>
-          </a:effectRef>
-          <a:fontRef idx="minor">
-            <a:schemeClr val="lt1"/>
-          </a:fontRef>
-        </p:style>
-        <p:txBody>
-          <a:bodyPr rtlCol="0" anchor="ctr"/>
-          <a:lstStyle/>
-          <a:p>
-            <a:pPr algn="ctr"/>
-          </a:p>
-        </p:txBody>
-      </p:sp>
-      <p:sp>
-        <p:nvSpPr>
-          <p:cNvPr id="4" name="Rectangle 3"/>
-          <p:cNvSpPr/>
-          <p:nvPr/>
-        </p:nvSpPr>
-        <p:spPr>
-          <a:xfrm>
-            <a:off x="914400" y="4766220"/>
-            <a:ext cx="4724400" cy="361950"/>
-          </a:xfrm>
-          <a:prstGeom prst="rect">
-            <a:avLst/>
-          </a:prstGeom>
-          <a:noFill/>
-          <a:ln>
-            <a:noFill/>
-          </a:ln>
-          <a:effectLst/>
-        </p:spPr>
-        <p:style>
-          <a:lnRef idx="1">
-            <a:schemeClr val="accent1"/>
-          </a:lnRef>
-          <a:fillRef idx="3">
-            <a:schemeClr val="accent1"/>
-          </a:fillRef>
-          <a:effectRef idx="2">
-            <a:schemeClr val="accent1"/>
-          </a:effectRef>
-          <a:fontRef idx="minor">
-            <a:schemeClr val="lt1"/>
-          </a:fontRef>
-        </p:style>
-        <p:txBody>
-          <a:bodyPr rtlCol="0" anchor="ctr"/>
-          <a:lstStyle/>
-          <a:p>
-            <a:pPr algn="ctr"/>
-          </a:p>
-        </p:txBody>
-      </p:sp>
-      <p:sp>
-        <p:nvSpPr>
-          <p:cNvPr id="5" name="Rectangle 4"/>
-          <p:cNvSpPr/>
-          <p:nvPr/>
-        </p:nvSpPr>
-        <p:spPr>
-          <a:xfrm>
-            <a:off x="6553200" y="4770983"/>
-            <a:ext cx="4724400" cy="361950"/>
-          </a:xfrm>
-          <a:prstGeom prst="rect">
-            <a:avLst/>
-          </a:prstGeom>
-          <a:noFill/>
-          <a:ln>
-            <a:noFill/>
-          </a:ln>
-          <a:effectLst/>
-        </p:spPr>
-        <p:style>
-          <a:lnRef idx="1">
-            <a:schemeClr val="accent1"/>
-          </a:lnRef>
-          <a:fillRef idx="3">
-            <a:schemeClr val="accent1"/>
-          </a:fillRef>
-          <a:effectRef idx="2">
-            <a:schemeClr val="accent1"/>
-          </a:effectRef>
-          <a:fontRef idx="minor">
-            <a:schemeClr val="lt1"/>
-          </a:fontRef>
-        </p:style>
-        <p:txBody>
-          <a:bodyPr rtlCol="0" anchor="ctr"/>
-          <a:lstStyle/>
-          <a:p>
-            <a:pPr algn="ctr"/>
-          </a:p>
-        </p:txBody>
-      </p:sp>
-      <p:sp>
-        <p:nvSpPr>
-          <p:cNvPr id="6" name="Rounded Rectangle 5"/>
-          <p:cNvSpPr/>
-          <p:nvPr/>
-        </p:nvSpPr>
-        <p:spPr>
-          <a:xfrm>
-            <a:off x="4876800" y="2865983"/>
-            <a:ext cx="762000" cy="247650"/>
-          </a:xfrm>
-          <a:prstGeom prst="roundRect">
-            <a:avLst>
-              <a:gd name="adj" fmla="val 30769"/>
-            </a:avLst>
-          </a:prstGeom>
-          <a:solidFill>
-            <a:srgbClr val="E2E8F0"/>
-          </a:solidFill>
-          <a:ln>
-            <a:noFill/>
-          </a:ln>
-          <a:effectLst/>
-        </p:spPr>
-        <p:style>
-          <a:lnRef idx="1">
-            <a:schemeClr val="accent1"/>
-          </a:lnRef>
-          <a:fillRef idx="3">
-            <a:schemeClr val="accent1"/>
-          </a:fillRef>
-          <a:effectRef idx="2">
-            <a:schemeClr val="accent1"/>
-          </a:effectRef>
-          <a:fontRef idx="minor">
-            <a:schemeClr val="lt1"/>
-          </a:fontRef>
-        </p:style>
-        <p:txBody>
-          <a:bodyPr rtlCol="0" anchor="ctr"/>
-          <a:lstStyle/>
-          <a:p>
-            <a:pPr algn="ctr"/>
-          </a:p>
-        </p:txBody>
-      </p:sp>
-      <p:sp>
-        <p:nvSpPr>
-          <p:cNvPr id="7" name="Rectangle 6"/>
-          <p:cNvSpPr/>
-          <p:nvPr/>
-        </p:nvSpPr>
-        <p:spPr>
-          <a:xfrm>
-            <a:off x="914400" y="4766220"/>
-            <a:ext cx="4724400" cy="9525"/>
-          </a:xfrm>
-          <a:prstGeom prst="rect">
-            <a:avLst/>
-          </a:prstGeom>
-          <a:solidFill>
-            <a:srgbClr val="E2E8F0"/>
-          </a:solidFill>
-          <a:ln>
-            <a:noFill/>
-          </a:ln>
-          <a:effectLst/>
-        </p:spPr>
-        <p:style>
-          <a:lnRef idx="1">
-            <a:schemeClr val="accent1"/>
-          </a:lnRef>
-          <a:fillRef idx="3">
-            <a:schemeClr val="accent1"/>
-          </a:fillRef>
-          <a:effectRef idx="2">
-            <a:schemeClr val="accent1"/>
-          </a:effectRef>
-          <a:fontRef idx="minor">
-            <a:schemeClr val="lt1"/>
-          </a:fontRef>
-        </p:style>
-        <p:txBody>
-          <a:bodyPr rtlCol="0" anchor="ctr"/>
-          <a:lstStyle/>
-          <a:p>
-            <a:pPr algn="ctr"/>
-          </a:p>
-        </p:txBody>
-      </p:sp>
-      <p:sp>
-        <p:nvSpPr>
-          <p:cNvPr id="8" name="Rounded Rectangle 7"/>
-          <p:cNvSpPr/>
-          <p:nvPr/>
-        </p:nvSpPr>
-        <p:spPr>
-          <a:xfrm>
-            <a:off x="10553700" y="2861220"/>
-            <a:ext cx="723900" cy="247650"/>
-          </a:xfrm>
-          <a:prstGeom prst="roundRect">
-            <a:avLst>
-              <a:gd name="adj" fmla="val 30769"/>
-            </a:avLst>
-          </a:prstGeom>
-          <a:solidFill>
-            <a:srgbClr val="FECDD3"/>
-          </a:solidFill>
-          <a:ln>
-            <a:noFill/>
-          </a:ln>
-          <a:effectLst/>
-        </p:spPr>
-        <p:style>
-          <a:lnRef idx="1">
-            <a:schemeClr val="accent1"/>
-          </a:lnRef>
-          <a:fillRef idx="3">
-            <a:schemeClr val="accent1"/>
-          </a:fillRef>
-          <a:effectRef idx="2">
-            <a:schemeClr val="accent1"/>
-          </a:effectRef>
-          <a:fontRef idx="minor">
-            <a:schemeClr val="lt1"/>
-          </a:fontRef>
-        </p:style>
-        <p:txBody>
-          <a:bodyPr rtlCol="0" anchor="ctr"/>
-          <a:lstStyle/>
-          <a:p>
-            <a:pPr algn="ctr"/>
-          </a:p>
-        </p:txBody>
-      </p:sp>
-      <p:sp>
-        <p:nvSpPr>
-          <p:cNvPr id="9" name="Rectangle 8"/>
-          <p:cNvSpPr/>
-          <p:nvPr/>
-        </p:nvSpPr>
-        <p:spPr>
-          <a:xfrm>
-            <a:off x="6553200" y="4770983"/>
-            <a:ext cx="4724400" cy="9525"/>
-          </a:xfrm>
-          <a:prstGeom prst="rect">
-            <a:avLst/>
-          </a:prstGeom>
-          <a:solidFill>
-            <a:srgbClr val="FECDD3"/>
-          </a:solidFill>
-          <a:ln>
-            <a:noFill/>
-          </a:ln>
-          <a:effectLst/>
-        </p:spPr>
-        <p:style>
-          <a:lnRef idx="1">
-            <a:schemeClr val="accent1"/>
-          </a:lnRef>
-          <a:fillRef idx="3">
-            <a:schemeClr val="accent1"/>
-          </a:fillRef>
-          <a:effectRef idx="2">
-            <a:schemeClr val="accent1"/>
-          </a:effectRef>
-          <a:fontRef idx="minor">
-            <a:schemeClr val="lt1"/>
-          </a:fontRef>
-        </p:style>
-        <p:txBody>
-          <a:bodyPr rtlCol="0" anchor="ctr"/>
-          <a:lstStyle/>
-          <a:p>
-            <a:pPr algn="ctr"/>
-          </a:p>
-        </p:txBody>
-      </p:sp>
-      <p:sp>
-        <p:nvSpPr>
-          <p:cNvPr id="10" name="TextBox 9"/>
-          <p:cNvSpPr txBox="1"/>
-          <p:nvPr/>
-        </p:nvSpPr>
-        <p:spPr>
-          <a:xfrm>
-            <a:off x="609600" y="457200"/>
-            <a:ext cx="11582400" cy="171450"/>
-          </a:xfrm>
-          <a:prstGeom prst="rect">
-            <a:avLst/>
-          </a:prstGeom>
-          <a:noFill/>
-        </p:spPr>
-        <p:txBody>
-          <a:bodyPr wrap="none" lIns="0" rIns="0" tIns="0" bIns="0" anchor="t">
-            <a:spAutoFit/>
-          </a:bodyPr>
-          <a:lstStyle/>
-          <a:p>
-            <a:pPr algn="l"/>
-            <a:r>
-              <a:rPr b="1" sz="1050" i="0" u="none">
-                <a:solidFill>
-                  <a:srgbClr val="E11D48"/>
-                </a:solidFill>
-                <a:latin typeface="Plus Jakarta Sans"/>
-              </a:rPr>
-              <a:t>MÉTODO NUMÉRICO 2</a:t>
-            </a:r>
-          </a:p>
-        </p:txBody>
-      </p:sp>
-      <p:sp>
-        <p:nvSpPr>
-          <p:cNvPr id="11" name="TextBox 10"/>
-          <p:cNvSpPr txBox="1"/>
-          <p:nvPr/>
-        </p:nvSpPr>
-        <p:spPr>
-          <a:xfrm>
-            <a:off x="609600" y="685800"/>
-            <a:ext cx="11582400" cy="388590"/>
-          </a:xfrm>
-          <a:prstGeom prst="rect">
-            <a:avLst/>
-          </a:prstGeom>
-          <a:noFill/>
-        </p:spPr>
-        <p:txBody>
-          <a:bodyPr wrap="none" lIns="0" rIns="0" tIns="0" bIns="0" anchor="t">
-            <a:spAutoFit/>
-          </a:bodyPr>
-          <a:lstStyle/>
-          <a:p>
-            <a:pPr algn="l">
-              <a:lnSpc>
-                <a:spcPts val="3060"/>
-              </a:lnSpc>
-            </a:pPr>
-            <a:r>
-              <a:rPr b="1" sz="2550" i="0" u="none">
-                <a:solidFill>
-                  <a:srgbClr val="0F172A"/>
-                </a:solidFill>
-                <a:latin typeface="Space Grotesk"/>
-              </a:rPr>
-              <a:t>Determinación del Hito de 100 Millones</a:t>
-            </a:r>
-          </a:p>
-        </p:txBody>
-      </p:sp>
-      <p:sp>
-        <p:nvSpPr>
-          <p:cNvPr id="12" name="TextBox 11"/>
-          <p:cNvSpPr txBox="1"/>
-          <p:nvPr/>
-        </p:nvSpPr>
-        <p:spPr>
-          <a:xfrm>
-            <a:off x="612648" y="1170432"/>
-            <a:ext cx="10972800" cy="1033271"/>
-          </a:xfrm>
-          <a:prstGeom prst="rect">
-            <a:avLst/>
-          </a:prstGeom>
-          <a:noFill/>
-        </p:spPr>
-        <p:txBody>
-          <a:bodyPr wrap="none" lIns="0" rIns="0" tIns="0" bIns="0" anchor="t">
-            <a:spAutoFit/>
-          </a:bodyPr>
-          <a:lstStyle/>
-          <a:p>
-            <a:pPr algn="l"/>
-            <a:r>
-              <a:rPr b="0" sz="1500" i="0" u="none">
-                <a:solidFill>
-                  <a:srgbClr val="64748B"/>
-                </a:solidFill>
-                <a:latin typeface="Plus Jakarta Sans"/>
-              </a:rPr>
-              <a:t>f(t) = P(t) − 100 = 0 · |Ea| &lt; 10⁻⁴ % (error relativo porcentual aproximado)
-f(35) = −0.3978 &lt; 0 &lt; f(36) = 2.7381
-Newton a mano: t₀ = 35, f′(35) = 3.2041, x₁ = 35 − (−0.3978)/3.2041 = 35.1242</a:t>
-            </a:r>
-          </a:p>
-        </p:txBody>
-      </p:sp>
-      <p:sp>
-        <p:nvSpPr>
-          <p:cNvPr id="13" name="TextBox 12"/>
-          <p:cNvSpPr txBox="1"/>
-          <p:nvPr/>
-        </p:nvSpPr>
-        <p:spPr>
-          <a:xfrm>
-            <a:off x="914400" y="3289845"/>
-            <a:ext cx="4663440" cy="219075"/>
-          </a:xfrm>
-          <a:prstGeom prst="rect">
-            <a:avLst/>
-          </a:prstGeom>
-          <a:noFill/>
-        </p:spPr>
-        <p:txBody>
-          <a:bodyPr wrap="none" lIns="0" rIns="0" tIns="0" bIns="0" anchor="t">
-            <a:spAutoFit/>
-          </a:bodyPr>
-          <a:lstStyle/>
-          <a:p>
-            <a:pPr algn="l"/>
-            <a:r>
-              <a:rPr b="0" sz="1350" i="0" u="none">
-                <a:solidFill>
-                  <a:srgbClr val="334155"/>
-                </a:solidFill>
-                <a:latin typeface="Plus Jakarta Sans"/>
-              </a:rPr>
-              <a:t>Intervalo inicial: [35, 36]</a:t>
-            </a:r>
-            <a:r>
-              <a:rPr b="1" sz="1350" i="0" u="none">
-                <a:solidFill>
-                  <a:srgbClr val="334155"/>
-                </a:solidFill>
-                <a:latin typeface="Plus Jakarta Sans"/>
-              </a:rPr>
-              <a:t/>
-            </a:r>
-          </a:p>
-        </p:txBody>
-      </p:sp>
-      <p:sp>
-        <p:nvSpPr>
-          <p:cNvPr id="14" name="TextBox 13"/>
-          <p:cNvSpPr txBox="1"/>
-          <p:nvPr/>
-        </p:nvSpPr>
-        <p:spPr>
-          <a:xfrm>
-            <a:off x="914400" y="4394745"/>
-            <a:ext cx="4663440" cy="219075"/>
-          </a:xfrm>
-          <a:prstGeom prst="rect">
-            <a:avLst/>
-          </a:prstGeom>
-          <a:noFill/>
-        </p:spPr>
-        <p:txBody>
-          <a:bodyPr wrap="none" lIns="0" rIns="0" tIns="0" bIns="0" anchor="t">
-            <a:spAutoFit/>
-          </a:bodyPr>
-          <a:lstStyle/>
-          <a:p>
-            <a:pPr algn="l"/>
-            <a:r>
-              <a:rPr b="0" sz="1400" i="0" u="none">
-                <a:solidFill>
-                  <a:srgbClr val="475569"/>
-                </a:solidFill>
-                <a:latin typeface="Plus Jakarta Sans"/>
-              </a:rPr>
-              <a:t>Lineal. Requiere cambio de signo. Segura y lenta.</a:t>
-            </a:r>
-          </a:p>
-        </p:txBody>
-      </p:sp>
-      <p:sp>
-        <p:nvSpPr>
-          <p:cNvPr id="15" name="TextBox 14"/>
-          <p:cNvSpPr txBox="1"/>
-          <p:nvPr/>
-        </p:nvSpPr>
-        <p:spPr>
-          <a:xfrm>
-            <a:off x="6553200" y="3285083"/>
-            <a:ext cx="4663440" cy="228600"/>
-          </a:xfrm>
-          <a:prstGeom prst="rect">
-            <a:avLst/>
-          </a:prstGeom>
-          <a:noFill/>
-        </p:spPr>
-        <p:txBody>
-          <a:bodyPr wrap="none" lIns="0" rIns="0" tIns="0" bIns="0" anchor="t">
-            <a:spAutoFit/>
-          </a:bodyPr>
-          <a:lstStyle/>
-          <a:p>
-            <a:pPr algn="l"/>
-            <a:r>
-              <a:rPr b="0" sz="1350" i="0" u="none">
-                <a:solidFill>
-                  <a:srgbClr val="334155"/>
-                </a:solidFill>
-                <a:latin typeface="Plus Jakarta Sans"/>
-              </a:rPr>
-              <a:t>Semilla inicial: t₀ = 35 semanas</a:t>
-            </a:r>
-            <a:r>
-              <a:rPr b="1" sz="1350" i="0" u="none">
-                <a:solidFill>
-                  <a:srgbClr val="334155"/>
-                </a:solidFill>
-                <a:latin typeface="Plus Jakarta Sans"/>
-              </a:rPr>
-              <a:t/>
-            </a:r>
-          </a:p>
-        </p:txBody>
-      </p:sp>
-      <p:sp>
-        <p:nvSpPr>
-          <p:cNvPr id="16" name="TextBox 15"/>
-          <p:cNvSpPr txBox="1"/>
-          <p:nvPr/>
-        </p:nvSpPr>
-        <p:spPr>
-          <a:xfrm>
-            <a:off x="6553200" y="4399508"/>
-            <a:ext cx="4663440" cy="219075"/>
-          </a:xfrm>
-          <a:prstGeom prst="rect">
-            <a:avLst/>
-          </a:prstGeom>
-          <a:noFill/>
-        </p:spPr>
-        <p:txBody>
-          <a:bodyPr wrap="none" lIns="0" rIns="0" tIns="0" bIns="0" anchor="t">
-            <a:spAutoFit/>
-          </a:bodyPr>
-          <a:lstStyle/>
-          <a:p>
-            <a:pPr algn="l"/>
-            <a:r>
-              <a:rPr b="0" sz="1400" i="0" u="none">
-                <a:solidFill>
-                  <a:srgbClr val="475569"/>
-                </a:solidFill>
-                <a:latin typeface="Plus Jakarta Sans"/>
-              </a:rPr>
-              <a:t>Cuadrática. Requiere f′(t) y buen t₀. Rápida.</a:t>
-            </a:r>
-          </a:p>
-        </p:txBody>
-      </p:sp>
-      <p:sp>
-        <p:nvSpPr>
-          <p:cNvPr id="17" name="TextBox 16"/>
-          <p:cNvSpPr txBox="1"/>
-          <p:nvPr/>
-        </p:nvSpPr>
-        <p:spPr>
-          <a:xfrm>
-            <a:off x="914400" y="2842170"/>
-            <a:ext cx="1430178" cy="295275"/>
-          </a:xfrm>
-          <a:prstGeom prst="rect">
-            <a:avLst/>
-          </a:prstGeom>
-          <a:noFill/>
-        </p:spPr>
-        <p:txBody>
-          <a:bodyPr wrap="none" lIns="0" rIns="0" tIns="0" bIns="0" anchor="t">
-            <a:spAutoFit/>
-          </a:bodyPr>
-          <a:lstStyle/>
-          <a:p>
-            <a:pPr algn="l"/>
-            <a:r>
-              <a:rPr b="1" sz="1800" i="0" u="none">
-                <a:solidFill>
-                  <a:srgbClr val="0F172A"/>
-                </a:solidFill>
-                <a:latin typeface="Space Grotesk"/>
-              </a:rPr>
-              <a:t>Bisección</a:t>
-            </a:r>
-          </a:p>
-        </p:txBody>
-      </p:sp>
-      <p:sp>
-        <p:nvSpPr>
-          <p:cNvPr id="18" name="TextBox 17"/>
-          <p:cNvSpPr txBox="1"/>
-          <p:nvPr/>
-        </p:nvSpPr>
-        <p:spPr>
-          <a:xfrm>
-            <a:off x="4991100" y="2904083"/>
-            <a:ext cx="628650" cy="171450"/>
-          </a:xfrm>
-          <a:prstGeom prst="rect">
-            <a:avLst/>
-          </a:prstGeom>
-          <a:noFill/>
-        </p:spPr>
-        <p:txBody>
-          <a:bodyPr wrap="square" lIns="0" rIns="0" tIns="0" bIns="0" anchor="t">
-            <a:spAutoFit/>
-          </a:bodyPr>
-          <a:lstStyle/>
-          <a:p>
-            <a:pPr algn="l"/>
-            <a:r>
-              <a:rPr b="1" sz="1050" i="0" u="none">
-                <a:solidFill>
-                  <a:srgbClr val="475569"/>
-                </a:solidFill>
-                <a:latin typeface="Plus Jakarta Sans"/>
-              </a:rPr>
-              <a:t>Cerrado</a:t>
-            </a:r>
-          </a:p>
-        </p:txBody>
-      </p:sp>
-      <p:sp>
-        <p:nvSpPr>
-          <p:cNvPr id="19" name="TextBox 18"/>
-          <p:cNvSpPr txBox="1"/>
-          <p:nvPr/>
-        </p:nvSpPr>
-        <p:spPr>
-          <a:xfrm>
-            <a:off x="914400" y="3661320"/>
-            <a:ext cx="752475" cy="581025"/>
-          </a:xfrm>
-          <a:prstGeom prst="rect">
-            <a:avLst/>
-          </a:prstGeom>
-          <a:noFill/>
-        </p:spPr>
-        <p:txBody>
-          <a:bodyPr wrap="none" lIns="0" rIns="0" tIns="0" bIns="0" anchor="t">
-            <a:spAutoFit/>
-          </a:bodyPr>
-          <a:lstStyle/>
-          <a:p>
-            <a:pPr algn="l"/>
-            <a:r>
-              <a:rPr b="1" sz="3600" i="0" u="none">
-                <a:solidFill>
-                  <a:srgbClr val="0284C7"/>
-                </a:solidFill>
-                <a:latin typeface="Plus Jakarta Sans"/>
-              </a:rPr>
-              <a:t>15</a:t>
-            </a:r>
-          </a:p>
-        </p:txBody>
-      </p:sp>
-      <p:sp>
-        <p:nvSpPr>
-          <p:cNvPr id="20" name="TextBox 19"/>
-          <p:cNvSpPr txBox="1"/>
-          <p:nvPr/>
-        </p:nvSpPr>
-        <p:spPr>
-          <a:xfrm>
-            <a:off x="1457325" y="3956595"/>
-            <a:ext cx="1209675" cy="219075"/>
-          </a:xfrm>
-          <a:prstGeom prst="rect">
-            <a:avLst/>
-          </a:prstGeom>
-          <a:noFill/>
-        </p:spPr>
-        <p:txBody>
-          <a:bodyPr wrap="none" lIns="0" rIns="0" tIns="0" bIns="0" anchor="t">
-            <a:spAutoFit/>
-          </a:bodyPr>
-          <a:lstStyle/>
-          <a:p>
-            <a:pPr algn="l"/>
-            <a:r>
-              <a:rPr b="1" sz="1350" i="0" u="none">
-                <a:solidFill>
-                  <a:srgbClr val="64748B"/>
-                </a:solidFill>
-                <a:latin typeface="Plus Jakarta Sans"/>
-              </a:rPr>
-              <a:t>iteraciones</a:t>
-            </a:r>
-          </a:p>
-        </p:txBody>
-      </p:sp>
-      <p:sp>
-        <p:nvSpPr>
-          <p:cNvPr id="21" name="TextBox 20"/>
-          <p:cNvSpPr txBox="1"/>
-          <p:nvPr/>
-        </p:nvSpPr>
-        <p:spPr>
-          <a:xfrm>
-            <a:off x="914400" y="4909095"/>
-            <a:ext cx="4663440" cy="219075"/>
-          </a:xfrm>
-          <a:prstGeom prst="rect">
-            <a:avLst/>
-          </a:prstGeom>
-          <a:noFill/>
-        </p:spPr>
-        <p:txBody>
-          <a:bodyPr wrap="none" lIns="0" rIns="0" tIns="0" bIns="0" anchor="t">
-            <a:spAutoFit/>
-          </a:bodyPr>
-          <a:lstStyle/>
-          <a:p>
-            <a:pPr algn="l"/>
-            <a:r>
-              <a:rPr b="1" sz="1350" i="0" u="none">
-                <a:solidFill>
-                  <a:srgbClr val="0F172A"/>
-                </a:solidFill>
-                <a:latin typeface="Plus Jakarta Sans"/>
-              </a:rPr>
-              <a:t>t* = 35.124481 semanas</a:t>
-            </a:r>
-          </a:p>
-        </p:txBody>
-      </p:sp>
-      <p:sp>
-        <p:nvSpPr>
-          <p:cNvPr id="22" name="TextBox 21"/>
-          <p:cNvSpPr txBox="1"/>
-          <p:nvPr/>
-        </p:nvSpPr>
-        <p:spPr>
-          <a:xfrm>
-            <a:off x="6553200" y="2837408"/>
-            <a:ext cx="2525315" cy="295275"/>
-          </a:xfrm>
-          <a:prstGeom prst="rect">
-            <a:avLst/>
-          </a:prstGeom>
-          <a:noFill/>
-        </p:spPr>
-        <p:txBody>
-          <a:bodyPr wrap="none" lIns="0" rIns="0" tIns="0" bIns="0" anchor="t">
-            <a:spAutoFit/>
-          </a:bodyPr>
-          <a:lstStyle/>
-          <a:p>
-            <a:pPr algn="l"/>
-            <a:r>
-              <a:rPr b="1" sz="1800" i="0" u="none">
-                <a:solidFill>
-                  <a:srgbClr val="BE123C"/>
-                </a:solidFill>
-                <a:latin typeface="Space Grotesk"/>
-              </a:rPr>
-              <a:t>Newton-Raphson</a:t>
-            </a:r>
-          </a:p>
-        </p:txBody>
-      </p:sp>
-      <p:sp>
-        <p:nvSpPr>
-          <p:cNvPr id="23" name="TextBox 22"/>
-          <p:cNvSpPr txBox="1"/>
-          <p:nvPr/>
-        </p:nvSpPr>
-        <p:spPr>
-          <a:xfrm>
-            <a:off x="10668000" y="2899320"/>
-            <a:ext cx="590550" cy="171450"/>
-          </a:xfrm>
-          <a:prstGeom prst="rect">
-            <a:avLst/>
-          </a:prstGeom>
-          <a:noFill/>
-        </p:spPr>
-        <p:txBody>
-          <a:bodyPr wrap="square" lIns="0" rIns="0" tIns="0" bIns="0" anchor="t">
-            <a:spAutoFit/>
-          </a:bodyPr>
-          <a:lstStyle/>
-          <a:p>
-            <a:pPr algn="l"/>
-            <a:r>
-              <a:rPr b="1" sz="1050" i="0" u="none">
-                <a:solidFill>
-                  <a:srgbClr val="9F1239"/>
-                </a:solidFill>
-                <a:latin typeface="Plus Jakarta Sans"/>
-              </a:rPr>
-              <a:t>Abierto</a:t>
-            </a:r>
-          </a:p>
-        </p:txBody>
-      </p:sp>
-      <p:sp>
-        <p:nvSpPr>
-          <p:cNvPr id="24" name="TextBox 23"/>
-          <p:cNvSpPr txBox="1"/>
-          <p:nvPr/>
-        </p:nvSpPr>
-        <p:spPr>
-          <a:xfrm>
-            <a:off x="6553200" y="3666083"/>
-            <a:ext cx="561975" cy="581025"/>
-          </a:xfrm>
-          <a:prstGeom prst="rect">
-            <a:avLst/>
-          </a:prstGeom>
-          <a:noFill/>
-        </p:spPr>
-        <p:txBody>
-          <a:bodyPr wrap="none" lIns="0" rIns="0" tIns="0" bIns="0" anchor="t">
-            <a:spAutoFit/>
-          </a:bodyPr>
-          <a:lstStyle/>
-          <a:p>
-            <a:pPr algn="l"/>
-            <a:r>
-              <a:rPr b="1" sz="3600" i="0" u="none">
-                <a:solidFill>
-                  <a:srgbClr val="E11D48"/>
-                </a:solidFill>
-                <a:latin typeface="Plus Jakarta Sans"/>
-              </a:rPr>
-              <a:t>3</a:t>
-            </a:r>
-          </a:p>
-        </p:txBody>
-      </p:sp>
-      <p:sp>
-        <p:nvSpPr>
-          <p:cNvPr id="25" name="TextBox 24"/>
-          <p:cNvSpPr txBox="1"/>
-          <p:nvPr/>
-        </p:nvSpPr>
-        <p:spPr>
-          <a:xfrm>
-            <a:off x="6905625" y="3961358"/>
-            <a:ext cx="2643187" cy="219075"/>
-          </a:xfrm>
-          <a:prstGeom prst="rect">
-            <a:avLst/>
-          </a:prstGeom>
-          <a:noFill/>
-        </p:spPr>
-        <p:txBody>
-          <a:bodyPr wrap="none" lIns="0" rIns="0" tIns="0" bIns="0" anchor="t">
-            <a:spAutoFit/>
-          </a:bodyPr>
-          <a:lstStyle/>
-          <a:p>
-            <a:pPr algn="l"/>
-            <a:r>
-              <a:rPr b="1" sz="1350" i="0" u="none">
-                <a:solidFill>
-                  <a:srgbClr val="BE123C"/>
-                </a:solidFill>
-                <a:latin typeface="Plus Jakarta Sans"/>
-              </a:rPr>
-              <a:t>iteraciones (5× menos)</a:t>
-            </a:r>
-          </a:p>
-        </p:txBody>
-      </p:sp>
-      <p:sp>
-        <p:nvSpPr>
-          <p:cNvPr id="26" name="TextBox 25"/>
-          <p:cNvSpPr txBox="1"/>
-          <p:nvPr/>
-        </p:nvSpPr>
-        <p:spPr>
-          <a:xfrm>
-            <a:off x="6553200" y="4913858"/>
-            <a:ext cx="4663440" cy="219075"/>
-          </a:xfrm>
-          <a:prstGeom prst="rect">
-            <a:avLst/>
-          </a:prstGeom>
-          <a:noFill/>
-        </p:spPr>
-        <p:txBody>
-          <a:bodyPr wrap="none" lIns="0" rIns="0" tIns="0" bIns="0" anchor="t">
-            <a:spAutoFit/>
-          </a:bodyPr>
-          <a:lstStyle/>
-          <a:p>
-            <a:pPr algn="l"/>
-            <a:r>
-              <a:rPr b="1" sz="1350" i="0" u="none">
-                <a:solidFill>
-                  <a:srgbClr val="9F1239"/>
-                </a:solidFill>
-                <a:latin typeface="Plus Jakarta Sans"/>
-              </a:rPr>
-              <a:t>t* = 35.124460 semanas</a:t>
-            </a:r>
-          </a:p>
-        </p:txBody>
-      </p:sp>
-      <p:sp>
-        <p:nvSpPr>
-          <p:cNvPr id="12" name="TextBox 11"/>
-          <p:cNvSpPr txBox="1"/>
-          <p:nvPr/>
-        </p:nvSpPr>
-        <p:spPr>
-          <a:xfrm>
-            <a:off x="731520" y="5806440"/>
-            <a:ext cx="10789920" cy="365760"/>
-          </a:xfrm>
-          <a:prstGeom prst="rect">
-            <a:avLst/>
-          </a:prstGeom>
-          <a:noFill/>
-        </p:spPr>
-        <p:txBody>
-          <a:bodyPr wrap="none" lIns="0" rIns="0" tIns="0" bIns="0" anchor="t">
-            <a:spAutoFit/>
-          </a:bodyPr>
-          <a:lstStyle/>
-          <a:p>
-            <a:pPr algn="l"/>
-            <a:r>
-              <a:rPr b="0" sz="2300" i="0" u="none">
-                <a:solidFill>
-                  <a:srgbClr val="64748B"/>
-                </a:solidFill>
-                <a:latin typeface="Plus Jakarta Sans"/>
-              </a:rPr>
-              <a:t>Resultado: t* ≈ 35.12 semanas ≈ 28/09/2023</a:t>
-            </a:r>
-          </a:p>
-        </p:txBody>
-      </p:sp>
-    </p:spTree>
-  </p:cSld>
-  <p:clrMapOvr>
-    <a:masterClrMapping/>
-  </p:clrMapOvr>
-</p:sld>
-</file>
-
 <file path=ppt/slides/slide7.xml><?xml version="1.0" encoding="utf-8"?>
 <p:sld xmlns:a="http://schemas.openxmlformats.org/drawingml/2006/main" xmlns:p="http://schemas.openxmlformats.org/presentationml/2006/main" xmlns:r="http://schemas.openxmlformats.org/officeDocument/2006/relationships">
   <p:cSld>
@@ -9671,14 +9502,370 @@
       <p:grpSpPr/>
       <p:sp>
         <p:nvSpPr>
-          <p:cNvPr id="3" name="TextBox 2"/>
-          <p:cNvSpPr txBox="1"/>
-          <p:nvPr/>
-        </p:nvSpPr>
-        <p:spPr>
-          <a:xfrm>
-            <a:off x="609600" y="6200775"/>
-            <a:ext cx="6309360" cy="200025"/>
+          <p:cNvPr id="2" name="Rounded Rectangle 1"/>
+          <p:cNvSpPr/>
+          <p:nvPr/>
+        </p:nvSpPr>
+        <p:spPr>
+          <a:xfrm>
+            <a:off x="609600" y="2537370"/>
+            <a:ext cx="5334000" cy="2895600"/>
+          </a:xfrm>
+          <a:prstGeom prst="roundRect">
+            <a:avLst>
+              <a:gd name="adj" fmla="val 5263"/>
+            </a:avLst>
+          </a:prstGeom>
+          <a:solidFill>
+            <a:srgbClr val="F8FAFC"/>
+          </a:solidFill>
+          <a:ln>
+            <a:noFill/>
+          </a:ln>
+          <a:effectLst/>
+        </p:spPr>
+        <p:style>
+          <a:lnRef idx="1">
+            <a:schemeClr val="accent1"/>
+          </a:lnRef>
+          <a:fillRef idx="3">
+            <a:schemeClr val="accent1"/>
+          </a:fillRef>
+          <a:effectRef idx="2">
+            <a:schemeClr val="accent1"/>
+          </a:effectRef>
+          <a:fontRef idx="minor">
+            <a:schemeClr val="lt1"/>
+          </a:fontRef>
+        </p:style>
+        <p:txBody>
+          <a:bodyPr rtlCol="0" anchor="ctr"/>
+          <a:lstStyle/>
+          <a:p>
+            <a:pPr algn="ctr"/>
+          </a:p>
+        </p:txBody>
+      </p:sp>
+      <p:sp>
+        <p:nvSpPr>
+          <p:cNvPr id="3" name="Rounded Rectangle 2"/>
+          <p:cNvSpPr/>
+          <p:nvPr/>
+        </p:nvSpPr>
+        <p:spPr>
+          <a:xfrm>
+            <a:off x="6248400" y="2532608"/>
+            <a:ext cx="5334000" cy="2905125"/>
+          </a:xfrm>
+          <a:prstGeom prst="roundRect">
+            <a:avLst>
+              <a:gd name="adj" fmla="val 5245"/>
+            </a:avLst>
+          </a:prstGeom>
+          <a:solidFill>
+            <a:srgbClr val="FFF1F2"/>
+          </a:solidFill>
+          <a:ln>
+            <a:noFill/>
+          </a:ln>
+          <a:effectLst/>
+        </p:spPr>
+        <p:style>
+          <a:lnRef idx="1">
+            <a:schemeClr val="accent1"/>
+          </a:lnRef>
+          <a:fillRef idx="3">
+            <a:schemeClr val="accent1"/>
+          </a:fillRef>
+          <a:effectRef idx="2">
+            <a:schemeClr val="accent1"/>
+          </a:effectRef>
+          <a:fontRef idx="minor">
+            <a:schemeClr val="lt1"/>
+          </a:fontRef>
+        </p:style>
+        <p:txBody>
+          <a:bodyPr rtlCol="0" anchor="ctr"/>
+          <a:lstStyle/>
+          <a:p>
+            <a:pPr algn="ctr"/>
+          </a:p>
+        </p:txBody>
+      </p:sp>
+      <p:sp>
+        <p:nvSpPr>
+          <p:cNvPr id="4" name="Rectangle 3"/>
+          <p:cNvSpPr/>
+          <p:nvPr/>
+        </p:nvSpPr>
+        <p:spPr>
+          <a:xfrm>
+            <a:off x="914400" y="4766220"/>
+            <a:ext cx="4724400" cy="361950"/>
+          </a:xfrm>
+          <a:prstGeom prst="rect">
+            <a:avLst/>
+          </a:prstGeom>
+          <a:noFill/>
+          <a:ln>
+            <a:noFill/>
+          </a:ln>
+          <a:effectLst/>
+        </p:spPr>
+        <p:style>
+          <a:lnRef idx="1">
+            <a:schemeClr val="accent1"/>
+          </a:lnRef>
+          <a:fillRef idx="3">
+            <a:schemeClr val="accent1"/>
+          </a:fillRef>
+          <a:effectRef idx="2">
+            <a:schemeClr val="accent1"/>
+          </a:effectRef>
+          <a:fontRef idx="minor">
+            <a:schemeClr val="lt1"/>
+          </a:fontRef>
+        </p:style>
+        <p:txBody>
+          <a:bodyPr rtlCol="0" anchor="ctr"/>
+          <a:lstStyle/>
+          <a:p>
+            <a:pPr algn="ctr"/>
+          </a:p>
+        </p:txBody>
+      </p:sp>
+      <p:sp>
+        <p:nvSpPr>
+          <p:cNvPr id="5" name="Rectangle 4"/>
+          <p:cNvSpPr/>
+          <p:nvPr/>
+        </p:nvSpPr>
+        <p:spPr>
+          <a:xfrm>
+            <a:off x="6553200" y="4770983"/>
+            <a:ext cx="4724400" cy="361950"/>
+          </a:xfrm>
+          <a:prstGeom prst="rect">
+            <a:avLst/>
+          </a:prstGeom>
+          <a:noFill/>
+          <a:ln>
+            <a:noFill/>
+          </a:ln>
+          <a:effectLst/>
+        </p:spPr>
+        <p:style>
+          <a:lnRef idx="1">
+            <a:schemeClr val="accent1"/>
+          </a:lnRef>
+          <a:fillRef idx="3">
+            <a:schemeClr val="accent1"/>
+          </a:fillRef>
+          <a:effectRef idx="2">
+            <a:schemeClr val="accent1"/>
+          </a:effectRef>
+          <a:fontRef idx="minor">
+            <a:schemeClr val="lt1"/>
+          </a:fontRef>
+        </p:style>
+        <p:txBody>
+          <a:bodyPr rtlCol="0" anchor="ctr"/>
+          <a:lstStyle/>
+          <a:p>
+            <a:pPr algn="ctr"/>
+          </a:p>
+        </p:txBody>
+      </p:sp>
+      <p:sp>
+        <p:nvSpPr>
+          <p:cNvPr id="6" name="Rounded Rectangle 5"/>
+          <p:cNvSpPr/>
+          <p:nvPr/>
+        </p:nvSpPr>
+        <p:spPr>
+          <a:xfrm>
+            <a:off x="4876800" y="2865983"/>
+            <a:ext cx="762000" cy="247650"/>
+          </a:xfrm>
+          <a:prstGeom prst="roundRect">
+            <a:avLst>
+              <a:gd name="adj" fmla="val 30769"/>
+            </a:avLst>
+          </a:prstGeom>
+          <a:solidFill>
+            <a:srgbClr val="E2E8F0"/>
+          </a:solidFill>
+          <a:ln>
+            <a:noFill/>
+          </a:ln>
+          <a:effectLst/>
+        </p:spPr>
+        <p:style>
+          <a:lnRef idx="1">
+            <a:schemeClr val="accent1"/>
+          </a:lnRef>
+          <a:fillRef idx="3">
+            <a:schemeClr val="accent1"/>
+          </a:fillRef>
+          <a:effectRef idx="2">
+            <a:schemeClr val="accent1"/>
+          </a:effectRef>
+          <a:fontRef idx="minor">
+            <a:schemeClr val="lt1"/>
+          </a:fontRef>
+        </p:style>
+        <p:txBody>
+          <a:bodyPr rtlCol="0" anchor="ctr"/>
+          <a:lstStyle/>
+          <a:p>
+            <a:pPr algn="ctr"/>
+          </a:p>
+        </p:txBody>
+      </p:sp>
+      <p:sp>
+        <p:nvSpPr>
+          <p:cNvPr id="7" name="Rectangle 6"/>
+          <p:cNvSpPr/>
+          <p:nvPr/>
+        </p:nvSpPr>
+        <p:spPr>
+          <a:xfrm>
+            <a:off x="914400" y="4766220"/>
+            <a:ext cx="4724400" cy="9525"/>
+          </a:xfrm>
+          <a:prstGeom prst="rect">
+            <a:avLst/>
+          </a:prstGeom>
+          <a:solidFill>
+            <a:srgbClr val="E2E8F0"/>
+          </a:solidFill>
+          <a:ln>
+            <a:noFill/>
+          </a:ln>
+          <a:effectLst/>
+        </p:spPr>
+        <p:style>
+          <a:lnRef idx="1">
+            <a:schemeClr val="accent1"/>
+          </a:lnRef>
+          <a:fillRef idx="3">
+            <a:schemeClr val="accent1"/>
+          </a:fillRef>
+          <a:effectRef idx="2">
+            <a:schemeClr val="accent1"/>
+          </a:effectRef>
+          <a:fontRef idx="minor">
+            <a:schemeClr val="lt1"/>
+          </a:fontRef>
+        </p:style>
+        <p:txBody>
+          <a:bodyPr rtlCol="0" anchor="ctr"/>
+          <a:lstStyle/>
+          <a:p>
+            <a:pPr algn="ctr"/>
+          </a:p>
+        </p:txBody>
+      </p:sp>
+      <p:sp>
+        <p:nvSpPr>
+          <p:cNvPr id="8" name="Rounded Rectangle 7"/>
+          <p:cNvSpPr/>
+          <p:nvPr/>
+        </p:nvSpPr>
+        <p:spPr>
+          <a:xfrm>
+            <a:off x="10553700" y="2861220"/>
+            <a:ext cx="723900" cy="247650"/>
+          </a:xfrm>
+          <a:prstGeom prst="roundRect">
+            <a:avLst>
+              <a:gd name="adj" fmla="val 30769"/>
+            </a:avLst>
+          </a:prstGeom>
+          <a:solidFill>
+            <a:srgbClr val="FECDD3"/>
+          </a:solidFill>
+          <a:ln>
+            <a:noFill/>
+          </a:ln>
+          <a:effectLst/>
+        </p:spPr>
+        <p:style>
+          <a:lnRef idx="1">
+            <a:schemeClr val="accent1"/>
+          </a:lnRef>
+          <a:fillRef idx="3">
+            <a:schemeClr val="accent1"/>
+          </a:fillRef>
+          <a:effectRef idx="2">
+            <a:schemeClr val="accent1"/>
+          </a:effectRef>
+          <a:fontRef idx="minor">
+            <a:schemeClr val="lt1"/>
+          </a:fontRef>
+        </p:style>
+        <p:txBody>
+          <a:bodyPr rtlCol="0" anchor="ctr"/>
+          <a:lstStyle/>
+          <a:p>
+            <a:pPr algn="ctr"/>
+          </a:p>
+        </p:txBody>
+      </p:sp>
+      <p:sp>
+        <p:nvSpPr>
+          <p:cNvPr id="9" name="Rectangle 8"/>
+          <p:cNvSpPr/>
+          <p:nvPr/>
+        </p:nvSpPr>
+        <p:spPr>
+          <a:xfrm>
+            <a:off x="6553200" y="4770983"/>
+            <a:ext cx="4724400" cy="9525"/>
+          </a:xfrm>
+          <a:prstGeom prst="rect">
+            <a:avLst/>
+          </a:prstGeom>
+          <a:solidFill>
+            <a:srgbClr val="FECDD3"/>
+          </a:solidFill>
+          <a:ln>
+            <a:noFill/>
+          </a:ln>
+          <a:effectLst/>
+        </p:spPr>
+        <p:style>
+          <a:lnRef idx="1">
+            <a:schemeClr val="accent1"/>
+          </a:lnRef>
+          <a:fillRef idx="3">
+            <a:schemeClr val="accent1"/>
+          </a:fillRef>
+          <a:effectRef idx="2">
+            <a:schemeClr val="accent1"/>
+          </a:effectRef>
+          <a:fontRef idx="minor">
+            <a:schemeClr val="lt1"/>
+          </a:fontRef>
+        </p:style>
+        <p:txBody>
+          <a:bodyPr rtlCol="0" anchor="ctr"/>
+          <a:lstStyle/>
+          <a:p>
+            <a:pPr algn="ctr"/>
+          </a:p>
+        </p:txBody>
+      </p:sp>
+      <p:sp>
+        <p:nvSpPr>
+          <p:cNvPr id="10" name="TextBox 9"/>
+          <p:cNvSpPr txBox="1"/>
+          <p:nvPr/>
+        </p:nvSpPr>
+        <p:spPr>
+          <a:xfrm>
+            <a:off x="609600" y="457200"/>
+            <a:ext cx="11582400" cy="171450"/>
           </a:xfrm>
           <a:prstGeom prst="rect">
             <a:avLst/>
@@ -9693,97 +9880,27 @@
           <a:p>
             <a:pPr algn="l"/>
             <a:r>
-              <a:rPr b="1" sz="1200" i="0" u="none">
-                <a:solidFill>
-                  <a:srgbClr val="0284C7"/>
+              <a:rPr b="1" sz="1050" i="0" u="none">
+                <a:solidFill>
+                  <a:srgbClr val="E11D48"/>
                 </a:solidFill>
                 <a:latin typeface="Plus Jakarta Sans"/>
               </a:rPr>
-              <a:t>Bisección: Siempre converge si hay cambio de signo (15 iteraciones).</a:t>
-            </a:r>
-          </a:p>
-        </p:txBody>
-      </p:sp>
-      <p:sp>
-        <p:nvSpPr>
-          <p:cNvPr id="4" name="TextBox 3"/>
-          <p:cNvSpPr txBox="1"/>
-          <p:nvPr/>
-        </p:nvSpPr>
-        <p:spPr>
-          <a:xfrm>
-            <a:off x="7124700" y="6200775"/>
-            <a:ext cx="5067300" cy="200025"/>
-          </a:xfrm>
-          <a:prstGeom prst="rect">
-            <a:avLst/>
-          </a:prstGeom>
-          <a:noFill/>
-        </p:spPr>
-        <p:txBody>
-          <a:bodyPr wrap="none" lIns="0" rIns="0" tIns="0" bIns="0" anchor="t">
-            <a:spAutoFit/>
-          </a:bodyPr>
-          <a:lstStyle/>
-          <a:p>
-            <a:pPr algn="l"/>
-            <a:r>
-              <a:rPr b="1" sz="1200" i="0" u="none">
-                <a:solidFill>
-                  <a:srgbClr val="E11D48"/>
-                </a:solidFill>
-                <a:latin typeface="Plus Jakarta Sans"/>
-              </a:rPr>
-              <a:t>Newton-Raphson: Convergencia cuadrática en solo 3 pasos.</a:t>
-            </a:r>
-          </a:p>
-        </p:txBody>
-      </p:sp>
-      <p:sp>
-        <p:nvSpPr>
-          <p:cNvPr id="5" name="TextBox 4"/>
-          <p:cNvSpPr txBox="1"/>
-          <p:nvPr/>
-        </p:nvSpPr>
-        <p:spPr>
-          <a:xfrm>
-            <a:off x="609600" y="457200"/>
-            <a:ext cx="7012781" cy="171450"/>
-          </a:xfrm>
-          <a:prstGeom prst="rect">
-            <a:avLst/>
-          </a:prstGeom>
-          <a:noFill/>
-        </p:spPr>
-        <p:txBody>
-          <a:bodyPr wrap="none" lIns="0" rIns="0" tIns="0" bIns="0" anchor="t">
-            <a:spAutoFit/>
-          </a:bodyPr>
-          <a:lstStyle/>
-          <a:p>
-            <a:pPr algn="l"/>
-            <a:r>
-              <a:rPr b="1" sz="1050" i="0" u="none">
-                <a:solidFill>
-                  <a:srgbClr val="E11D48"/>
-                </a:solidFill>
-                <a:latin typeface="Plus Jakarta Sans"/>
-              </a:rPr>
-              <a:t>EFICIENCIA NUMÉRICA</a:t>
-            </a:r>
-          </a:p>
-        </p:txBody>
-      </p:sp>
-      <p:sp>
-        <p:nvSpPr>
-          <p:cNvPr id="6" name="TextBox 5"/>
-          <p:cNvSpPr txBox="1"/>
-          <p:nvPr/>
-        </p:nvSpPr>
-        <p:spPr>
-          <a:xfrm>
-            <a:off x="609600" y="666750"/>
-            <a:ext cx="7363420" cy="388590"/>
+              <a:t>MÉTODO NUMÉRICO 2</a:t>
+            </a:r>
+          </a:p>
+        </p:txBody>
+      </p:sp>
+      <p:sp>
+        <p:nvSpPr>
+          <p:cNvPr id="11" name="TextBox 10"/>
+          <p:cNvSpPr txBox="1"/>
+          <p:nvPr/>
+        </p:nvSpPr>
+        <p:spPr>
+          <a:xfrm>
+            <a:off x="609600" y="685800"/>
+            <a:ext cx="11582400" cy="388590"/>
           </a:xfrm>
           <a:prstGeom prst="rect">
             <a:avLst/>
@@ -9808,35 +9925,623 @@
                 </a:solidFill>
                 <a:latin typeface="Space Grotesk"/>
               </a:rPr>
-              <a:t>Convergencia: Lineal vs. Cuadrática</a:t>
-            </a:r>
-          </a:p>
-        </p:txBody>
-      </p:sp>
-      <p:pic>
-        <p:nvPicPr>
-          <p:cNvPr id="9" name="Picture 8" descr="grafico_2_convergencia_biseccion_vs_newton.png"/>
-          <p:cNvPicPr>
-            <a:picLocks noChangeAspect="1"/>
-          </p:cNvPicPr>
-          <p:nvPr/>
-        </p:nvPicPr>
-        <p:blipFill>
-          <a:blip r:embed="rId3"/>
-          <a:stretch>
-            <a:fillRect/>
-          </a:stretch>
-        </p:blipFill>
-        <p:spPr>
-          <a:xfrm>
-            <a:off x="2360675" y="1463040"/>
-            <a:ext cx="7467600" cy="4480560"/>
-          </a:xfrm>
-          <a:prstGeom prst="rect">
-            <a:avLst/>
-          </a:prstGeom>
-        </p:spPr>
-      </p:pic>
+              <a:t>Determinación del Hito de 100 Millones</a:t>
+            </a:r>
+          </a:p>
+        </p:txBody>
+      </p:sp>
+      <p:sp>
+        <p:nvSpPr>
+          <p:cNvPr id="12" name="TextBox 11"/>
+          <p:cNvSpPr txBox="1"/>
+          <p:nvPr/>
+        </p:nvSpPr>
+        <p:spPr>
+          <a:xfrm>
+            <a:off x="612648" y="1170432"/>
+            <a:ext cx="10972800" cy="1033271"/>
+          </a:xfrm>
+          <a:prstGeom prst="rect">
+            <a:avLst/>
+          </a:prstGeom>
+          <a:noFill/>
+        </p:spPr>
+        <p:txBody>
+          <a:bodyPr wrap="none" lIns="0" rIns="0" tIns="0" bIns="0" anchor="t">
+            <a:spAutoFit/>
+          </a:bodyPr>
+          <a:lstStyle/>
+          <a:p>
+            <a:pPr algn="l"/>
+            <a:r>
+              <a:rPr b="0" sz="1500" i="0" u="none">
+                <a:solidFill>
+                  <a:srgbClr val="64748B"/>
+                </a:solidFill>
+                <a:latin typeface="Plus Jakarta Sans"/>
+              </a:rPr>
+              <a:t>f(t) = P(t) − 100 = 0 · |Ea| &lt; 10⁻⁴ % (error relativo porcentual aproximado)</a:t>
+            </a:r>
+            <a:br>
+              <a:rPr b="0" sz="1500" i="0" u="none">
+                <a:solidFill>
+                  <a:srgbClr val="64748B"/>
+                </a:solidFill>
+                <a:latin typeface="Plus Jakarta Sans"/>
+              </a:rPr>
+            </a:br>
+            <a:r>
+              <a:rPr b="0" sz="1500" i="0" u="none">
+                <a:solidFill>
+                  <a:srgbClr val="64748B"/>
+                </a:solidFill>
+                <a:latin typeface="Plus Jakarta Sans"/>
+              </a:rPr>
+              <a:t>f(35) = −0,3978 &lt; 0 &lt; f(36) = 2,7381</a:t>
+            </a:r>
+            <a:br>
+              <a:rPr b="0" sz="1500" i="0" u="none">
+                <a:solidFill>
+                  <a:srgbClr val="64748B"/>
+                </a:solidFill>
+                <a:latin typeface="Plus Jakarta Sans"/>
+              </a:rPr>
+            </a:br>
+            <a:r>
+              <a:rPr b="0" sz="1500" i="0" u="none">
+                <a:solidFill>
+                  <a:srgbClr val="64748B"/>
+                </a:solidFill>
+                <a:latin typeface="Plus Jakarta Sans"/>
+              </a:rPr>
+              <a:t>Newton a mano: t₀ = 35; f′(35) = 3,2041; x₁ = 35 − (−0,3978) / 3,2041 = 35,1242</a:t>
+            </a:r>
+          </a:p>
+        </p:txBody>
+      </p:sp>
+      <p:sp>
+        <p:nvSpPr>
+          <p:cNvPr id="13" name="TextBox 12"/>
+          <p:cNvSpPr txBox="1"/>
+          <p:nvPr/>
+        </p:nvSpPr>
+        <p:spPr>
+          <a:xfrm>
+            <a:off x="914400" y="3289845"/>
+            <a:ext cx="4663440" cy="219075"/>
+          </a:xfrm>
+          <a:prstGeom prst="rect">
+            <a:avLst/>
+          </a:prstGeom>
+          <a:noFill/>
+        </p:spPr>
+        <p:txBody>
+          <a:bodyPr wrap="none" lIns="0" rIns="0" tIns="0" bIns="0" anchor="t">
+            <a:spAutoFit/>
+          </a:bodyPr>
+          <a:lstStyle/>
+          <a:p>
+            <a:pPr algn="l"/>
+            <a:r>
+              <a:rPr b="0" sz="1350" i="0" u="none">
+                <a:solidFill>
+                  <a:srgbClr val="334155"/>
+                </a:solidFill>
+                <a:latin typeface="Plus Jakarta Sans"/>
+              </a:rPr>
+              <a:t>Intervalo inicial: [35; 36]</a:t>
+            </a:r>
+            <a:r>
+              <a:rPr b="1" sz="1350" i="0" u="none">
+                <a:solidFill>
+                  <a:srgbClr val="334155"/>
+                </a:solidFill>
+                <a:latin typeface="Plus Jakarta Sans"/>
+              </a:rPr>
+              <a:t/>
+            </a:r>
+          </a:p>
+        </p:txBody>
+      </p:sp>
+      <p:sp>
+        <p:nvSpPr>
+          <p:cNvPr id="14" name="TextBox 13"/>
+          <p:cNvSpPr txBox="1"/>
+          <p:nvPr/>
+        </p:nvSpPr>
+        <p:spPr>
+          <a:xfrm>
+            <a:off x="914400" y="4394745"/>
+            <a:ext cx="4663440" cy="219075"/>
+          </a:xfrm>
+          <a:prstGeom prst="rect">
+            <a:avLst/>
+          </a:prstGeom>
+          <a:noFill/>
+        </p:spPr>
+        <p:txBody>
+          <a:bodyPr wrap="none" lIns="0" rIns="0" tIns="0" bIns="0" anchor="t">
+            <a:spAutoFit/>
+          </a:bodyPr>
+          <a:lstStyle/>
+          <a:p>
+            <a:pPr algn="l"/>
+            <a:r>
+              <a:rPr b="0" sz="1400" i="0" u="none">
+                <a:solidFill>
+                  <a:srgbClr val="475569"/>
+                </a:solidFill>
+                <a:latin typeface="Plus Jakarta Sans"/>
+              </a:rPr>
+              <a:t>Lineal. Requiere cambio de signo. Segura y lenta.</a:t>
+            </a:r>
+          </a:p>
+        </p:txBody>
+      </p:sp>
+      <p:sp>
+        <p:nvSpPr>
+          <p:cNvPr id="15" name="TextBox 14"/>
+          <p:cNvSpPr txBox="1"/>
+          <p:nvPr/>
+        </p:nvSpPr>
+        <p:spPr>
+          <a:xfrm>
+            <a:off x="6553200" y="3285083"/>
+            <a:ext cx="4663440" cy="228600"/>
+          </a:xfrm>
+          <a:prstGeom prst="rect">
+            <a:avLst/>
+          </a:prstGeom>
+          <a:noFill/>
+        </p:spPr>
+        <p:txBody>
+          <a:bodyPr wrap="none" lIns="0" rIns="0" tIns="0" bIns="0" anchor="t">
+            <a:spAutoFit/>
+          </a:bodyPr>
+          <a:lstStyle/>
+          <a:p>
+            <a:pPr algn="l"/>
+            <a:r>
+              <a:rPr b="0" sz="1350" i="0" u="none">
+                <a:solidFill>
+                  <a:srgbClr val="334155"/>
+                </a:solidFill>
+                <a:latin typeface="Plus Jakarta Sans"/>
+              </a:rPr>
+              <a:t>Semilla inicial: t₀ = 35 semanas</a:t>
+            </a:r>
+            <a:r>
+              <a:rPr b="1" sz="1350" i="0" u="none">
+                <a:solidFill>
+                  <a:srgbClr val="334155"/>
+                </a:solidFill>
+                <a:latin typeface="Plus Jakarta Sans"/>
+              </a:rPr>
+              <a:t/>
+            </a:r>
+          </a:p>
+        </p:txBody>
+      </p:sp>
+      <p:sp>
+        <p:nvSpPr>
+          <p:cNvPr id="16" name="TextBox 15"/>
+          <p:cNvSpPr txBox="1"/>
+          <p:nvPr/>
+        </p:nvSpPr>
+        <p:spPr>
+          <a:xfrm>
+            <a:off x="6553200" y="4399508"/>
+            <a:ext cx="4663440" cy="219075"/>
+          </a:xfrm>
+          <a:prstGeom prst="rect">
+            <a:avLst/>
+          </a:prstGeom>
+          <a:noFill/>
+        </p:spPr>
+        <p:txBody>
+          <a:bodyPr wrap="none" lIns="0" rIns="0" tIns="0" bIns="0" anchor="t">
+            <a:spAutoFit/>
+          </a:bodyPr>
+          <a:lstStyle/>
+          <a:p>
+            <a:pPr algn="l"/>
+            <a:r>
+              <a:rPr b="0" sz="1400" i="0" u="none">
+                <a:solidFill>
+                  <a:srgbClr val="475569"/>
+                </a:solidFill>
+                <a:latin typeface="Plus Jakarta Sans"/>
+              </a:rPr>
+              <a:t>Cuadrática. Requiere f′(t) y buen t₀. Rápida.</a:t>
+            </a:r>
+          </a:p>
+        </p:txBody>
+      </p:sp>
+      <p:sp>
+        <p:nvSpPr>
+          <p:cNvPr id="17" name="TextBox 16"/>
+          <p:cNvSpPr txBox="1"/>
+          <p:nvPr/>
+        </p:nvSpPr>
+        <p:spPr>
+          <a:xfrm>
+            <a:off x="914400" y="2842170"/>
+            <a:ext cx="1430178" cy="295275"/>
+          </a:xfrm>
+          <a:prstGeom prst="rect">
+            <a:avLst/>
+          </a:prstGeom>
+          <a:noFill/>
+        </p:spPr>
+        <p:txBody>
+          <a:bodyPr wrap="none" lIns="0" rIns="0" tIns="0" bIns="0" anchor="t">
+            <a:spAutoFit/>
+          </a:bodyPr>
+          <a:lstStyle/>
+          <a:p>
+            <a:pPr algn="l"/>
+            <a:r>
+              <a:rPr b="1" sz="1800" i="0" u="none">
+                <a:solidFill>
+                  <a:srgbClr val="0F172A"/>
+                </a:solidFill>
+                <a:latin typeface="Space Grotesk"/>
+              </a:rPr>
+              <a:t>Bisección</a:t>
+            </a:r>
+          </a:p>
+        </p:txBody>
+      </p:sp>
+      <p:sp>
+        <p:nvSpPr>
+          <p:cNvPr id="18" name="TextBox 17"/>
+          <p:cNvSpPr txBox="1"/>
+          <p:nvPr/>
+        </p:nvSpPr>
+        <p:spPr>
+          <a:xfrm>
+            <a:off x="4991100" y="2904083"/>
+            <a:ext cx="628650" cy="171450"/>
+          </a:xfrm>
+          <a:prstGeom prst="rect">
+            <a:avLst/>
+          </a:prstGeom>
+          <a:noFill/>
+        </p:spPr>
+        <p:txBody>
+          <a:bodyPr wrap="square" lIns="0" rIns="0" tIns="0" bIns="0" anchor="t">
+            <a:spAutoFit/>
+          </a:bodyPr>
+          <a:lstStyle/>
+          <a:p>
+            <a:pPr algn="l"/>
+            <a:r>
+              <a:rPr b="1" sz="1050" i="0" u="none">
+                <a:solidFill>
+                  <a:srgbClr val="475569"/>
+                </a:solidFill>
+                <a:latin typeface="Plus Jakarta Sans"/>
+              </a:rPr>
+              <a:t>Cerrado</a:t>
+            </a:r>
+          </a:p>
+        </p:txBody>
+      </p:sp>
+      <p:sp>
+        <p:nvSpPr>
+          <p:cNvPr id="19" name="TextBox 18"/>
+          <p:cNvSpPr txBox="1"/>
+          <p:nvPr/>
+        </p:nvSpPr>
+        <p:spPr>
+          <a:xfrm>
+            <a:off x="914400" y="3661320"/>
+            <a:ext cx="752475" cy="581025"/>
+          </a:xfrm>
+          <a:prstGeom prst="rect">
+            <a:avLst/>
+          </a:prstGeom>
+          <a:noFill/>
+        </p:spPr>
+        <p:txBody>
+          <a:bodyPr wrap="none" lIns="0" rIns="0" tIns="0" bIns="0" anchor="t">
+            <a:spAutoFit/>
+          </a:bodyPr>
+          <a:lstStyle/>
+          <a:p>
+            <a:pPr algn="l"/>
+            <a:r>
+              <a:rPr b="1" sz="3600" i="0" u="none">
+                <a:solidFill>
+                  <a:srgbClr val="0284C7"/>
+                </a:solidFill>
+                <a:latin typeface="Plus Jakarta Sans"/>
+              </a:rPr>
+              <a:t>15</a:t>
+            </a:r>
+          </a:p>
+        </p:txBody>
+      </p:sp>
+      <p:sp>
+        <p:nvSpPr>
+          <p:cNvPr id="20" name="TextBox 19"/>
+          <p:cNvSpPr txBox="1"/>
+          <p:nvPr/>
+        </p:nvSpPr>
+        <p:spPr>
+          <a:xfrm>
+            <a:off x="1457325" y="3956595"/>
+            <a:ext cx="1209675" cy="219075"/>
+          </a:xfrm>
+          <a:prstGeom prst="rect">
+            <a:avLst/>
+          </a:prstGeom>
+          <a:noFill/>
+        </p:spPr>
+        <p:txBody>
+          <a:bodyPr wrap="none" lIns="0" rIns="0" tIns="0" bIns="0" anchor="t">
+            <a:spAutoFit/>
+          </a:bodyPr>
+          <a:lstStyle/>
+          <a:p>
+            <a:pPr algn="l"/>
+            <a:r>
+              <a:rPr b="1" sz="1350" i="0" u="none">
+                <a:solidFill>
+                  <a:srgbClr val="64748B"/>
+                </a:solidFill>
+                <a:latin typeface="Plus Jakarta Sans"/>
+              </a:rPr>
+              <a:t>iteraciones</a:t>
+            </a:r>
+          </a:p>
+        </p:txBody>
+      </p:sp>
+      <p:sp>
+        <p:nvSpPr>
+          <p:cNvPr id="21" name="TextBox 20"/>
+          <p:cNvSpPr txBox="1"/>
+          <p:nvPr/>
+        </p:nvSpPr>
+        <p:spPr>
+          <a:xfrm>
+            <a:off x="914400" y="4909095"/>
+            <a:ext cx="4663440" cy="219075"/>
+          </a:xfrm>
+          <a:prstGeom prst="rect">
+            <a:avLst/>
+          </a:prstGeom>
+          <a:noFill/>
+        </p:spPr>
+        <p:txBody>
+          <a:bodyPr wrap="none" lIns="0" rIns="0" tIns="0" bIns="0" anchor="t">
+            <a:spAutoFit/>
+          </a:bodyPr>
+          <a:lstStyle/>
+          <a:p>
+            <a:pPr algn="l"/>
+            <a:r>
+              <a:rPr b="1" sz="1350" i="0" u="none">
+                <a:solidFill>
+                  <a:srgbClr val="0F172A"/>
+                </a:solidFill>
+                <a:latin typeface="Plus Jakarta Sans"/>
+              </a:rPr>
+              <a:t>t* = 35,124481 semanas</a:t>
+            </a:r>
+          </a:p>
+        </p:txBody>
+      </p:sp>
+      <p:sp>
+        <p:nvSpPr>
+          <p:cNvPr id="22" name="TextBox 21"/>
+          <p:cNvSpPr txBox="1"/>
+          <p:nvPr/>
+        </p:nvSpPr>
+        <p:spPr>
+          <a:xfrm>
+            <a:off x="6553200" y="2837408"/>
+            <a:ext cx="2525315" cy="295275"/>
+          </a:xfrm>
+          <a:prstGeom prst="rect">
+            <a:avLst/>
+          </a:prstGeom>
+          <a:noFill/>
+        </p:spPr>
+        <p:txBody>
+          <a:bodyPr wrap="none" lIns="0" rIns="0" tIns="0" bIns="0" anchor="t">
+            <a:spAutoFit/>
+          </a:bodyPr>
+          <a:lstStyle/>
+          <a:p>
+            <a:pPr algn="l"/>
+            <a:r>
+              <a:rPr b="1" sz="1800" i="0" u="none">
+                <a:solidFill>
+                  <a:srgbClr val="BE123C"/>
+                </a:solidFill>
+                <a:latin typeface="Space Grotesk"/>
+              </a:rPr>
+              <a:t>Newton-Raphson</a:t>
+            </a:r>
+          </a:p>
+        </p:txBody>
+      </p:sp>
+      <p:sp>
+        <p:nvSpPr>
+          <p:cNvPr id="23" name="TextBox 22"/>
+          <p:cNvSpPr txBox="1"/>
+          <p:nvPr/>
+        </p:nvSpPr>
+        <p:spPr>
+          <a:xfrm>
+            <a:off x="10668000" y="2899320"/>
+            <a:ext cx="590550" cy="171450"/>
+          </a:xfrm>
+          <a:prstGeom prst="rect">
+            <a:avLst/>
+          </a:prstGeom>
+          <a:noFill/>
+        </p:spPr>
+        <p:txBody>
+          <a:bodyPr wrap="square" lIns="0" rIns="0" tIns="0" bIns="0" anchor="t">
+            <a:spAutoFit/>
+          </a:bodyPr>
+          <a:lstStyle/>
+          <a:p>
+            <a:pPr algn="l"/>
+            <a:r>
+              <a:rPr b="1" sz="1050" i="0" u="none">
+                <a:solidFill>
+                  <a:srgbClr val="9F1239"/>
+                </a:solidFill>
+                <a:latin typeface="Plus Jakarta Sans"/>
+              </a:rPr>
+              <a:t>Abierto</a:t>
+            </a:r>
+          </a:p>
+        </p:txBody>
+      </p:sp>
+      <p:sp>
+        <p:nvSpPr>
+          <p:cNvPr id="24" name="TextBox 23"/>
+          <p:cNvSpPr txBox="1"/>
+          <p:nvPr/>
+        </p:nvSpPr>
+        <p:spPr>
+          <a:xfrm>
+            <a:off x="6553200" y="3666083"/>
+            <a:ext cx="561975" cy="581025"/>
+          </a:xfrm>
+          <a:prstGeom prst="rect">
+            <a:avLst/>
+          </a:prstGeom>
+          <a:noFill/>
+        </p:spPr>
+        <p:txBody>
+          <a:bodyPr wrap="none" lIns="0" rIns="0" tIns="0" bIns="0" anchor="t">
+            <a:spAutoFit/>
+          </a:bodyPr>
+          <a:lstStyle/>
+          <a:p>
+            <a:pPr algn="l"/>
+            <a:r>
+              <a:rPr b="1" sz="3600" i="0" u="none">
+                <a:solidFill>
+                  <a:srgbClr val="E11D48"/>
+                </a:solidFill>
+                <a:latin typeface="Plus Jakarta Sans"/>
+              </a:rPr>
+              <a:t>3</a:t>
+            </a:r>
+          </a:p>
+        </p:txBody>
+      </p:sp>
+      <p:sp>
+        <p:nvSpPr>
+          <p:cNvPr id="25" name="TextBox 24"/>
+          <p:cNvSpPr txBox="1"/>
+          <p:nvPr/>
+        </p:nvSpPr>
+        <p:spPr>
+          <a:xfrm>
+            <a:off x="6905625" y="3961358"/>
+            <a:ext cx="2643187" cy="219075"/>
+          </a:xfrm>
+          <a:prstGeom prst="rect">
+            <a:avLst/>
+          </a:prstGeom>
+          <a:noFill/>
+        </p:spPr>
+        <p:txBody>
+          <a:bodyPr wrap="none" lIns="0" rIns="0" tIns="0" bIns="0" anchor="t">
+            <a:spAutoFit/>
+          </a:bodyPr>
+          <a:lstStyle/>
+          <a:p>
+            <a:pPr algn="l"/>
+            <a:r>
+              <a:rPr b="1" sz="1350" i="0" u="none">
+                <a:solidFill>
+                  <a:srgbClr val="BE123C"/>
+                </a:solidFill>
+                <a:latin typeface="Plus Jakarta Sans"/>
+              </a:rPr>
+              <a:t>iteraciones (5× menos)</a:t>
+            </a:r>
+          </a:p>
+        </p:txBody>
+      </p:sp>
+      <p:sp>
+        <p:nvSpPr>
+          <p:cNvPr id="26" name="TextBox 25"/>
+          <p:cNvSpPr txBox="1"/>
+          <p:nvPr/>
+        </p:nvSpPr>
+        <p:spPr>
+          <a:xfrm>
+            <a:off x="6553200" y="4913858"/>
+            <a:ext cx="4663440" cy="219075"/>
+          </a:xfrm>
+          <a:prstGeom prst="rect">
+            <a:avLst/>
+          </a:prstGeom>
+          <a:noFill/>
+        </p:spPr>
+        <p:txBody>
+          <a:bodyPr wrap="none" lIns="0" rIns="0" tIns="0" bIns="0" anchor="t">
+            <a:spAutoFit/>
+          </a:bodyPr>
+          <a:lstStyle/>
+          <a:p>
+            <a:pPr algn="l"/>
+            <a:r>
+              <a:rPr b="1" sz="1350" i="0" u="none">
+                <a:solidFill>
+                  <a:srgbClr val="9F1239"/>
+                </a:solidFill>
+                <a:latin typeface="Plus Jakarta Sans"/>
+              </a:rPr>
+              <a:t>t* = 35,124460 semanas</a:t>
+            </a:r>
+          </a:p>
+        </p:txBody>
+      </p:sp>
+      <p:sp>
+        <p:nvSpPr>
+          <p:cNvPr id="12" name="TextBox 11"/>
+          <p:cNvSpPr txBox="1"/>
+          <p:nvPr/>
+        </p:nvSpPr>
+        <p:spPr>
+          <a:xfrm>
+            <a:off x="731520" y="5806440"/>
+            <a:ext cx="10789920" cy="365760"/>
+          </a:xfrm>
+          <a:prstGeom prst="rect">
+            <a:avLst/>
+          </a:prstGeom>
+          <a:noFill/>
+        </p:spPr>
+        <p:txBody>
+          <a:bodyPr wrap="none" lIns="0" rIns="0" tIns="0" bIns="0" anchor="t">
+            <a:spAutoFit/>
+          </a:bodyPr>
+          <a:lstStyle/>
+          <a:p>
+            <a:pPr algn="l"/>
+            <a:r>
+              <a:rPr b="0" sz="2300" i="0" u="none">
+                <a:solidFill>
+                  <a:srgbClr val="64748B"/>
+                </a:solidFill>
+                <a:latin typeface="Plus Jakarta Sans"/>
+              </a:rPr>
+              <a:t>Resultado: t* ≈ 35,12 semanas ≈ 28/09/2023 (≈ 21 h)</a:t>
+            </a:r>
+          </a:p>
+        </p:txBody>
+      </p:sp>
     </p:spTree>
   </p:cSld>
   <p:clrMapOvr>
@@ -9865,93 +10570,71 @@
       <p:grpSpPr/>
       <p:sp>
         <p:nvSpPr>
-          <p:cNvPr id="2" name="Rounded Rectangle 1"/>
-          <p:cNvSpPr/>
-          <p:nvPr/>
-        </p:nvSpPr>
-        <p:spPr>
-          <a:xfrm>
-            <a:off x="612648" y="1600200"/>
-            <a:ext cx="5330952" cy="1143000"/>
-          </a:xfrm>
-          <a:prstGeom prst="roundRect">
-            <a:avLst>
-              <a:gd name="adj" fmla="val 22641"/>
-            </a:avLst>
-          </a:prstGeom>
-          <a:solidFill>
-            <a:srgbClr val="F3E8FF"/>
-          </a:solidFill>
-          <a:ln>
-            <a:noFill/>
-          </a:ln>
-          <a:effectLst/>
-        </p:spPr>
-        <p:style>
-          <a:lnRef idx="1">
-            <a:schemeClr val="accent1"/>
-          </a:lnRef>
-          <a:fillRef idx="3">
-            <a:schemeClr val="accent1"/>
-          </a:fillRef>
-          <a:effectRef idx="2">
-            <a:schemeClr val="accent1"/>
-          </a:effectRef>
-          <a:fontRef idx="minor">
-            <a:schemeClr val="lt1"/>
-          </a:fontRef>
-        </p:style>
-        <p:txBody>
-          <a:bodyPr rtlCol="0" anchor="ctr"/>
-          <a:lstStyle/>
-          <a:p>
-            <a:pPr algn="ctr"/>
-          </a:p>
-        </p:txBody>
-      </p:sp>
-      <p:sp>
-        <p:nvSpPr>
-          <p:cNvPr id="3" name="Rounded Rectangle 2"/>
-          <p:cNvSpPr/>
-          <p:nvPr/>
-        </p:nvSpPr>
-        <p:spPr>
-          <a:xfrm>
-            <a:off x="6245352" y="1600200"/>
-            <a:ext cx="5330952" cy="1143000"/>
-          </a:xfrm>
-          <a:prstGeom prst="roundRect">
-            <a:avLst>
-              <a:gd name="adj" fmla="val 22641"/>
-            </a:avLst>
-          </a:prstGeom>
-          <a:solidFill>
-            <a:srgbClr val="FEE2E2"/>
-          </a:solidFill>
-          <a:ln>
-            <a:noFill/>
-          </a:ln>
-          <a:effectLst/>
-        </p:spPr>
-        <p:style>
-          <a:lnRef idx="1">
-            <a:schemeClr val="accent1"/>
-          </a:lnRef>
-          <a:fillRef idx="3">
-            <a:schemeClr val="accent1"/>
-          </a:fillRef>
-          <a:effectRef idx="2">
-            <a:schemeClr val="accent1"/>
-          </a:effectRef>
-          <a:fontRef idx="minor">
-            <a:schemeClr val="lt1"/>
-          </a:fontRef>
-        </p:style>
-        <p:txBody>
-          <a:bodyPr rtlCol="0" anchor="ctr"/>
-          <a:lstStyle/>
-          <a:p>
-            <a:pPr algn="ctr"/>
+          <p:cNvPr id="3" name="TextBox 2"/>
+          <p:cNvSpPr txBox="1"/>
+          <p:nvPr/>
+        </p:nvSpPr>
+        <p:spPr>
+          <a:xfrm>
+            <a:off x="609600" y="6200775"/>
+            <a:ext cx="6309360" cy="200025"/>
+          </a:xfrm>
+          <a:prstGeom prst="rect">
+            <a:avLst/>
+          </a:prstGeom>
+          <a:noFill/>
+        </p:spPr>
+        <p:txBody>
+          <a:bodyPr wrap="none" lIns="0" rIns="0" tIns="0" bIns="0" anchor="t">
+            <a:spAutoFit/>
+          </a:bodyPr>
+          <a:lstStyle/>
+          <a:p>
+            <a:pPr algn="l"/>
+            <a:r>
+              <a:rPr b="1" sz="1200" i="0" u="none">
+                <a:solidFill>
+                  <a:srgbClr val="0284C7"/>
+                </a:solidFill>
+                <a:latin typeface="Plus Jakarta Sans"/>
+              </a:rPr>
+              <a:t>Bisección: Siempre converge si hay cambio de signo (15 iteraciones).</a:t>
+            </a:r>
+          </a:p>
+        </p:txBody>
+      </p:sp>
+      <p:sp>
+        <p:nvSpPr>
+          <p:cNvPr id="4" name="TextBox 3"/>
+          <p:cNvSpPr txBox="1"/>
+          <p:nvPr/>
+        </p:nvSpPr>
+        <p:spPr>
+          <a:xfrm>
+            <a:off x="7124700" y="6200775"/>
+            <a:ext cx="5067300" cy="200025"/>
+          </a:xfrm>
+          <a:prstGeom prst="rect">
+            <a:avLst/>
+          </a:prstGeom>
+          <a:noFill/>
+        </p:spPr>
+        <p:txBody>
+          <a:bodyPr wrap="none" lIns="0" rIns="0" tIns="0" bIns="0" anchor="t">
+            <a:spAutoFit/>
+          </a:bodyPr>
+          <a:lstStyle/>
+          <a:p>
+            <a:pPr algn="l"/>
+            <a:r>
+              <a:rPr b="1" sz="1200" i="0" u="none">
+                <a:solidFill>
+                  <a:srgbClr val="E11D48"/>
+                </a:solidFill>
+                <a:latin typeface="Plus Jakarta Sans"/>
+              </a:rPr>
+              <a:t>Newton-Raphson: Convergencia cuadrática en solo 3 pasos.</a:t>
+            </a:r>
           </a:p>
         </p:txBody>
       </p:sp>
@@ -9964,7 +10647,7 @@
         <p:spPr>
           <a:xfrm>
             <a:off x="609600" y="457200"/>
-            <a:ext cx="8548687" cy="171450"/>
+            <a:ext cx="7012781" cy="171450"/>
           </a:xfrm>
           <a:prstGeom prst="rect">
             <a:avLst/>
@@ -9981,11 +10664,11 @@
             <a:r>
               <a:rPr b="1" sz="1050" i="0" u="none">
                 <a:solidFill>
-                  <a:srgbClr val="7C3AED"/>
+                  <a:srgbClr val="E11D48"/>
                 </a:solidFill>
                 <a:latin typeface="Plus Jakarta Sans"/>
               </a:rPr>
-              <a:t>APLICACIÓN DE INGENIERÍA</a:t>
+              <a:t>EFICIENCIA NUMÉRICA</a:t>
             </a:r>
           </a:p>
         </p:txBody>
@@ -9999,7 +10682,7 @@
         <p:spPr>
           <a:xfrm>
             <a:off x="609600" y="666750"/>
-            <a:ext cx="8976121" cy="388590"/>
+            <a:ext cx="7363420" cy="388590"/>
           </a:xfrm>
           <a:prstGeom prst="rect">
             <a:avLst/>
@@ -10018,194 +10701,41 @@
               </a:lnSpc>
             </a:pPr>
             <a:r>
-              <a:rPr b="1" sz="2800" i="0" u="none">
+              <a:rPr b="1" sz="2550" i="0" u="none">
                 <a:solidFill>
                   <a:srgbClr val="0F172A"/>
                 </a:solidFill>
                 <a:latin typeface="Space Grotesk"/>
               </a:rPr>
-              <a:t>Ancho de banda en la semana pico</a:t>
-            </a:r>
-          </a:p>
-        </p:txBody>
-      </p:sp>
-      <p:sp>
-        <p:nvSpPr>
-          <p:cNvPr id="7" name="TextBox 6"/>
-          <p:cNvSpPr txBox="1"/>
-          <p:nvPr/>
-        </p:nvSpPr>
-        <p:spPr>
-          <a:xfrm>
-            <a:off x="868680" y="1819656"/>
-            <a:ext cx="4828032" cy="667512"/>
-          </a:xfrm>
-          <a:prstGeom prst="rect">
-            <a:avLst/>
-          </a:prstGeom>
-          <a:noFill/>
-        </p:spPr>
-        <p:txBody>
-          <a:bodyPr wrap="none" lIns="0" rIns="0" tIns="0" bIns="0" anchor="t">
-            <a:spAutoFit/>
-          </a:bodyPr>
-          <a:lstStyle/>
-          <a:p>
-            <a:pPr algn="l"/>
-            <a:r>
-              <a:rPr b="1" sz="2100" i="0" u="none">
-                <a:solidFill>
-                  <a:srgbClr val="6B21A8"/>
-                </a:solidFill>
-                <a:latin typeface="Plus Jakarta Sans"/>
-              </a:rPr>
-              <a:t>Semana pico: 26 (27/07/2023)
-4.17 M reproducciones</a:t>
-            </a:r>
-          </a:p>
-        </p:txBody>
-      </p:sp>
-      <p:sp>
-        <p:nvSpPr>
-          <p:cNvPr id="8" name="TextBox 7"/>
-          <p:cNvSpPr txBox="1"/>
-          <p:nvPr/>
-        </p:nvSpPr>
-        <p:spPr>
-          <a:xfrm>
-            <a:off x="6501384" y="1819656"/>
-            <a:ext cx="4800600" cy="667512"/>
-          </a:xfrm>
-          <a:prstGeom prst="rect">
-            <a:avLst/>
-          </a:prstGeom>
-          <a:noFill/>
-        </p:spPr>
-        <p:txBody>
-          <a:bodyPr wrap="none" lIns="0" rIns="0" tIns="0" bIns="0" anchor="t">
-            <a:spAutoFit/>
-          </a:bodyPr>
-          <a:lstStyle/>
-          <a:p>
-            <a:pPr algn="l"/>
-            <a:r>
-              <a:rPr b="1" sz="2300" i="0" u="none">
-                <a:solidFill>
-                  <a:srgbClr val="991B1B"/>
-                </a:solidFill>
-                <a:latin typeface="Plus Jakarta Sans"/>
-              </a:rPr>
-              <a:t>≈ 205 Mbps
-de ancho de banda promedio</a:t>
-            </a:r>
-          </a:p>
-        </p:txBody>
-      </p:sp>
-      <p:sp>
-        <p:nvSpPr>
-          <p:cNvPr id="9" name="TextBox 8"/>
-          <p:cNvSpPr txBox="1"/>
-          <p:nvPr/>
-        </p:nvSpPr>
-        <p:spPr>
-          <a:xfrm>
-            <a:off x="777240" y="3200400"/>
-            <a:ext cx="10698480" cy="438912"/>
-          </a:xfrm>
-          <a:prstGeom prst="rect">
-            <a:avLst/>
-          </a:prstGeom>
-          <a:noFill/>
-        </p:spPr>
-        <p:txBody>
-          <a:bodyPr wrap="none" lIns="0" rIns="0" tIns="0" bIns="0" anchor="t">
-            <a:spAutoFit/>
-          </a:bodyPr>
-          <a:lstStyle/>
-          <a:p>
-            <a:pPr algn="l"/>
-            <a:r>
-              <a:rPr b="1" sz="2000" i="0" u="none">
-                <a:solidFill>
-                  <a:srgbClr val="8B5CF6"/>
-                </a:solidFill>
-                <a:latin typeface="Plus Jakarta Sans"/>
-              </a:rPr>
-              <a:t>Mbps = reproducciones/semana × 160 kbps × 186 s ÷ 1000 ÷ 604 800 s</a:t>
-            </a:r>
-          </a:p>
-        </p:txBody>
-      </p:sp>
-      <p:sp>
-        <p:nvSpPr>
-          <p:cNvPr id="10" name="TextBox 9"/>
-          <p:cNvSpPr txBox="1"/>
-          <p:nvPr/>
-        </p:nvSpPr>
-        <p:spPr>
-          <a:xfrm>
-            <a:off x="777240" y="5394960"/>
-            <a:ext cx="10698480" cy="685800"/>
-          </a:xfrm>
-          <a:prstGeom prst="rect">
-            <a:avLst/>
-          </a:prstGeom>
-          <a:noFill/>
-        </p:spPr>
-        <p:txBody>
-          <a:bodyPr wrap="none" lIns="0" rIns="0" tIns="0" bIns="0" anchor="t">
-            <a:spAutoFit/>
-          </a:bodyPr>
-          <a:lstStyle/>
-          <a:p>
-            <a:pPr algn="l"/>
-            <a:r>
-              <a:rPr b="1" sz="2200" i="0" u="none">
-                <a:solidFill>
-                  <a:srgbClr val="6D28D9"/>
-                </a:solidFill>
-                <a:latin typeface="Plus Jakarta Sans"/>
-              </a:rPr>
-              <a:t>La red tiene que soportar unos 205 Mbps solo para esta canción en México.</a:t>
-            </a:r>
-          </a:p>
-        </p:txBody>
-      </p:sp>
-      <p:sp>
-        <p:nvSpPr>
-          <p:cNvPr id="42" name="Supuestos"/>
-          <p:cNvSpPr txBox="1"/>
-          <p:nvPr/>
-        </p:nvSpPr>
-        <p:spPr>
-          <a:xfrm>
-            <a:off x="777240" y="3977639"/>
-            <a:ext cx="10698480" cy="1051560"/>
-          </a:xfrm>
-          <a:prstGeom prst="rect">
-            <a:avLst/>
-          </a:prstGeom>
-          <a:noFill/>
-        </p:spPr>
-        <p:txBody>
-          <a:bodyPr wrap="square" lIns="0" rIns="0" tIns="0" bIns="0" anchor="t"/>
-          <a:lstStyle/>
-          <a:p>
-            <a:pPr algn="l"/>
-            <a:r>
-              <a:rPr b="0" sz="1700" i="0" u="none">
-                <a:solidFill>
-                  <a:srgbClr val="475569"/>
-                </a:solidFill>
-                <a:latin typeface="Plus Jakarta Sans"/>
-              </a:rPr>
-              <a:t>Supuestos: duración de 3:06 (186 s) y audio a 160 kbps.
-Son órdenes de magnitud, no datos de Spotify.
-Referencias: Wikipedia, Dulce Beat (duración), y Spotify, Calidad de audio.</a:t>
-            </a:r>
-          </a:p>
-        </p:txBody>
-      </p:sp>
+              <a:t>Convergencia: Lineal vs. Cuadrática</a:t>
+            </a:r>
+          </a:p>
+        </p:txBody>
+      </p:sp>
+      <p:pic>
+        <p:nvPicPr>
+          <p:cNvPr id="9" name="Picture 8" descr="grafico_2_convergencia_biseccion_vs_newton.png"/>
+          <p:cNvPicPr>
+            <a:picLocks noChangeAspect="1"/>
+          </p:cNvPicPr>
+          <p:nvPr/>
+        </p:nvPicPr>
+        <p:blipFill>
+          <a:blip r:embed="rId3"/>
+          <a:stretch>
+            <a:fillRect/>
+          </a:stretch>
+        </p:blipFill>
+        <p:spPr>
+          <a:xfrm>
+            <a:off x="2360675" y="1463040"/>
+            <a:ext cx="7467600" cy="4480560"/>
+          </a:xfrm>
+          <a:prstGeom prst="rect">
+            <a:avLst/>
+          </a:prstGeom>
+        </p:spPr>
+      </p:pic>
     </p:spTree>
   </p:cSld>
   <p:clrMapOvr>
@@ -10234,6 +10764,98 @@
       <p:grpSpPr/>
       <p:sp>
         <p:nvSpPr>
+          <p:cNvPr id="2" name="Rounded Rectangle 1"/>
+          <p:cNvSpPr/>
+          <p:nvPr/>
+        </p:nvSpPr>
+        <p:spPr>
+          <a:xfrm>
+            <a:off x="612648" y="1600200"/>
+            <a:ext cx="5330952" cy="1143000"/>
+          </a:xfrm>
+          <a:prstGeom prst="roundRect">
+            <a:avLst>
+              <a:gd name="adj" fmla="val 22641"/>
+            </a:avLst>
+          </a:prstGeom>
+          <a:solidFill>
+            <a:srgbClr val="F3E8FF"/>
+          </a:solidFill>
+          <a:ln>
+            <a:noFill/>
+          </a:ln>
+          <a:effectLst/>
+        </p:spPr>
+        <p:style>
+          <a:lnRef idx="1">
+            <a:schemeClr val="accent1"/>
+          </a:lnRef>
+          <a:fillRef idx="3">
+            <a:schemeClr val="accent1"/>
+          </a:fillRef>
+          <a:effectRef idx="2">
+            <a:schemeClr val="accent1"/>
+          </a:effectRef>
+          <a:fontRef idx="minor">
+            <a:schemeClr val="lt1"/>
+          </a:fontRef>
+        </p:style>
+        <p:txBody>
+          <a:bodyPr rtlCol="0" anchor="ctr"/>
+          <a:lstStyle/>
+          <a:p>
+            <a:pPr algn="ctr"/>
+          </a:p>
+        </p:txBody>
+      </p:sp>
+      <p:sp>
+        <p:nvSpPr>
+          <p:cNvPr id="3" name="Rounded Rectangle 2"/>
+          <p:cNvSpPr/>
+          <p:nvPr/>
+        </p:nvSpPr>
+        <p:spPr>
+          <a:xfrm>
+            <a:off x="6245352" y="1600200"/>
+            <a:ext cx="5330952" cy="1143000"/>
+          </a:xfrm>
+          <a:prstGeom prst="roundRect">
+            <a:avLst>
+              <a:gd name="adj" fmla="val 22641"/>
+            </a:avLst>
+          </a:prstGeom>
+          <a:solidFill>
+            <a:srgbClr val="FEE2E2"/>
+          </a:solidFill>
+          <a:ln>
+            <a:noFill/>
+          </a:ln>
+          <a:effectLst/>
+        </p:spPr>
+        <p:style>
+          <a:lnRef idx="1">
+            <a:schemeClr val="accent1"/>
+          </a:lnRef>
+          <a:fillRef idx="3">
+            <a:schemeClr val="accent1"/>
+          </a:fillRef>
+          <a:effectRef idx="2">
+            <a:schemeClr val="accent1"/>
+          </a:effectRef>
+          <a:fontRef idx="minor">
+            <a:schemeClr val="lt1"/>
+          </a:fontRef>
+        </p:style>
+        <p:txBody>
+          <a:bodyPr rtlCol="0" anchor="ctr"/>
+          <a:lstStyle/>
+          <a:p>
+            <a:pPr algn="ctr"/>
+          </a:p>
+        </p:txBody>
+      </p:sp>
+      <p:sp>
+        <p:nvSpPr>
           <p:cNvPr id="5" name="TextBox 4"/>
           <p:cNvSpPr txBox="1"/>
           <p:nvPr/>
@@ -10262,7 +10884,7 @@
                 </a:solidFill>
                 <a:latin typeface="Plus Jakarta Sans"/>
               </a:rPr>
-              <a:t>GENERALIZACIÓN</a:t>
+              <a:t>APLICACIÓN DE INGENIERÍA</a:t>
             </a:r>
           </a:p>
         </p:txBody>
@@ -10295,132 +10917,260 @@
               </a:lnSpc>
             </a:pPr>
             <a:r>
-              <a:rPr b="1" sz="2550" i="0" u="none">
+              <a:rPr b="1" sz="2800" i="0" u="none">
                 <a:solidFill>
                   <a:srgbClr val="0F172A"/>
                 </a:solidFill>
                 <a:latin typeface="Space Grotesk"/>
               </a:rPr>
-              <a:t>¿Sirve para Cualquier Canción? 3 Casos Reales</a:t>
-            </a:r>
-          </a:p>
-        </p:txBody>
-      </p:sp>
-      <p:sp>
-        <p:nvSpPr>
-          <p:cNvPr id="12" name="TextBox 11"/>
-          <p:cNvSpPr txBox="1"/>
-          <p:nvPr/>
-        </p:nvSpPr>
-        <p:spPr>
-          <a:xfrm>
-            <a:off x="777240" y="4983480"/>
-            <a:ext cx="10698480" cy="1417320"/>
-          </a:xfrm>
-          <a:prstGeom prst="rect">
-            <a:avLst/>
-          </a:prstGeom>
-          <a:noFill/>
-        </p:spPr>
-        <p:txBody>
-          <a:bodyPr wrap="square">
-            <a:spAutoFit/>
-          </a:bodyPr>
-          <a:lstStyle/>
-          <a:p>
-            <a:pPr marL="182880" indent="-164592">
-              <a:spcAft>
-                <a:spcPts val="500"/>
-              </a:spcAft>
-              <a:buChar char="•"/>
-            </a:pPr>
-            <a:r>
-              <a:rPr b="0" sz="1500" i="0" u="none">
+              <a:t>Volumen y ancho de banda</a:t>
+            </a:r>
+          </a:p>
+        </p:txBody>
+      </p:sp>
+      <p:sp>
+        <p:nvSpPr>
+          <p:cNvPr id="7" name="TextBox 6"/>
+          <p:cNvSpPr txBox="1"/>
+          <p:nvPr/>
+        </p:nvSpPr>
+        <p:spPr>
+          <a:xfrm>
+            <a:off x="868680" y="1819656"/>
+            <a:ext cx="4828032" cy="667512"/>
+          </a:xfrm>
+          <a:prstGeom prst="rect">
+            <a:avLst/>
+          </a:prstGeom>
+          <a:noFill/>
+        </p:spPr>
+        <p:txBody>
+          <a:bodyPr wrap="none" lIns="0" rIns="0" tIns="0" bIns="0" anchor="t">
+            <a:spAutoFit/>
+          </a:bodyPr>
+          <a:lstStyle/>
+          <a:p>
+            <a:pPr algn="l"/>
+            <a:r>
+              <a:rPr b="1" sz="2100" i="0" u="none">
+                <a:solidFill>
+                  <a:srgbClr val="6B21A8"/>
+                </a:solidFill>
+                <a:latin typeface="Plus Jakarta Sans"/>
+              </a:rPr>
+              <a:t>≈ 372 TB</a:t>
+            </a:r>
+            <a:br>
+              <a:rPr b="1" sz="2100" i="0" u="none">
+                <a:solidFill>
+                  <a:srgbClr val="6B21A8"/>
+                </a:solidFill>
+                <a:latin typeface="Plus Jakarta Sans"/>
+              </a:rPr>
+            </a:br>
+            <a:r>
+              <a:rPr b="1" sz="2100" i="0" u="none">
+                <a:solidFill>
+                  <a:srgbClr val="6B21A8"/>
+                </a:solidFill>
+                <a:latin typeface="Plus Jakarta Sans"/>
+              </a:rPr>
+              <a:t>transferidos hasta el hito</a:t>
+            </a:r>
+          </a:p>
+        </p:txBody>
+      </p:sp>
+      <p:sp>
+        <p:nvSpPr>
+          <p:cNvPr id="8" name="TextBox 7"/>
+          <p:cNvSpPr txBox="1"/>
+          <p:nvPr/>
+        </p:nvSpPr>
+        <p:spPr>
+          <a:xfrm>
+            <a:off x="6501384" y="1819656"/>
+            <a:ext cx="4800600" cy="667512"/>
+          </a:xfrm>
+          <a:prstGeom prst="rect">
+            <a:avLst/>
+          </a:prstGeom>
+          <a:noFill/>
+        </p:spPr>
+        <p:txBody>
+          <a:bodyPr wrap="none" lIns="0" rIns="0" tIns="0" bIns="0" anchor="t">
+            <a:spAutoFit/>
+          </a:bodyPr>
+          <a:lstStyle/>
+          <a:p>
+            <a:pPr algn="l"/>
+            <a:r>
+              <a:rPr b="1" sz="2300" i="0" u="none">
+                <a:solidFill>
+                  <a:srgbClr val="991B1B"/>
+                </a:solidFill>
+                <a:latin typeface="Plus Jakarta Sans"/>
+              </a:rPr>
+              <a:t>≈ 205 Mbps</a:t>
+            </a:r>
+            <a:br>
+              <a:rPr b="1" sz="2300" i="0" u="none">
+                <a:solidFill>
+                  <a:srgbClr val="991B1B"/>
+                </a:solidFill>
+                <a:latin typeface="Plus Jakarta Sans"/>
+              </a:rPr>
+            </a:br>
+            <a:r>
+              <a:rPr b="1" sz="2300" i="0" u="none">
+                <a:solidFill>
+                  <a:srgbClr val="991B1B"/>
+                </a:solidFill>
+                <a:latin typeface="Plus Jakarta Sans"/>
+              </a:rPr>
+              <a:t>promedio en la semana pico</a:t>
+            </a:r>
+          </a:p>
+        </p:txBody>
+      </p:sp>
+      <p:sp>
+        <p:nvSpPr>
+          <p:cNvPr id="9" name="TextBox 8"/>
+          <p:cNvSpPr txBox="1"/>
+          <p:nvPr/>
+        </p:nvSpPr>
+        <p:spPr>
+          <a:xfrm>
+            <a:off x="777240" y="3200400"/>
+            <a:ext cx="10698480" cy="438912"/>
+          </a:xfrm>
+          <a:prstGeom prst="rect">
+            <a:avLst/>
+          </a:prstGeom>
+          <a:noFill/>
+        </p:spPr>
+        <p:txBody>
+          <a:bodyPr wrap="none" lIns="0" rIns="0" tIns="0" bIns="0" anchor="t">
+            <a:spAutoFit/>
+          </a:bodyPr>
+          <a:lstStyle/>
+          <a:p>
+            <a:pPr algn="l"/>
+            <a:r>
+              <a:rPr b="1" sz="1700" i="0" u="none">
+                <a:solidFill>
+                  <a:srgbClr val="8B5CF6"/>
+                </a:solidFill>
+                <a:latin typeface="Plus Jakarta Sans"/>
+              </a:rPr>
+              <a:t>Volumen = reproducciones × 160 kbps × 186 s ÷ 8 → 3,72 MB por reproducción</a:t>
+            </a:r>
+            <a:br>
+              <a:rPr b="1" sz="1700" i="0" u="none">
+                <a:solidFill>
+                  <a:srgbClr val="8B5CF6"/>
+                </a:solidFill>
+                <a:latin typeface="Plus Jakarta Sans"/>
+              </a:rPr>
+            </a:br>
+            <a:r>
+              <a:rPr b="1" sz="1700" i="0" u="none">
+                <a:solidFill>
+                  <a:srgbClr val="8B5CF6"/>
+                </a:solidFill>
+                <a:latin typeface="Plus Jakarta Sans"/>
+              </a:rPr>
+              <a:t>Ancho de banda = reproducciones/semana × 160 kbps × 186 s ÷ 1000 ÷ 604.800 s</a:t>
+            </a:r>
+          </a:p>
+        </p:txBody>
+      </p:sp>
+      <p:sp>
+        <p:nvSpPr>
+          <p:cNvPr id="10" name="TextBox 9"/>
+          <p:cNvSpPr txBox="1"/>
+          <p:nvPr/>
+        </p:nvSpPr>
+        <p:spPr>
+          <a:xfrm>
+            <a:off x="777240" y="5257800"/>
+            <a:ext cx="10698480" cy="685800"/>
+          </a:xfrm>
+          <a:prstGeom prst="rect">
+            <a:avLst/>
+          </a:prstGeom>
+          <a:noFill/>
+        </p:spPr>
+        <p:txBody>
+          <a:bodyPr wrap="none" lIns="0" rIns="0" tIns="0" bIns="0" anchor="t">
+            <a:spAutoFit/>
+          </a:bodyPr>
+          <a:lstStyle/>
+          <a:p>
+            <a:pPr algn="l"/>
+            <a:r>
+              <a:rPr b="1" sz="1800" i="0" u="none">
+                <a:solidFill>
+                  <a:srgbClr val="6D28D9"/>
+                </a:solidFill>
+                <a:latin typeface="Plus Jakarta Sans"/>
+              </a:rPr>
+              <a:t>Al superar los 100 M (28/09/2023) se habían servido unos 372 TB;</a:t>
+            </a:r>
+            <a:br>
+              <a:rPr b="1" sz="1800" i="0" u="none">
+                <a:solidFill>
+                  <a:srgbClr val="6D28D9"/>
+                </a:solidFill>
+                <a:latin typeface="Plus Jakarta Sans"/>
+              </a:rPr>
+            </a:br>
+            <a:r>
+              <a:rPr b="1" sz="1800" i="0" u="none">
+                <a:solidFill>
+                  <a:srgbClr val="6D28D9"/>
+                </a:solidFill>
+                <a:latin typeface="Plus Jakarta Sans"/>
+              </a:rPr>
+              <a:t>en la semana pico (27/07/2023) la red necesitó unos 205 Mbps solo para esta canción.</a:t>
+            </a:r>
+          </a:p>
+        </p:txBody>
+      </p:sp>
+      <p:sp>
+        <p:nvSpPr>
+          <p:cNvPr id="42" name="Supuestos"/>
+          <p:cNvSpPr txBox="1"/>
+          <p:nvPr/>
+        </p:nvSpPr>
+        <p:spPr>
+          <a:xfrm>
+            <a:off x="777240" y="4155439"/>
+            <a:ext cx="10698480" cy="1051560"/>
+          </a:xfrm>
+          <a:prstGeom prst="rect">
+            <a:avLst/>
+          </a:prstGeom>
+          <a:noFill/>
+        </p:spPr>
+        <p:txBody>
+          <a:bodyPr wrap="square" lIns="0" rIns="0" tIns="0" bIns="0" anchor="t"/>
+          <a:lstStyle/>
+          <a:p>
+            <a:pPr algn="l"/>
+            <a:r>
+              <a:rPr b="0" sz="1700" i="0" u="none">
                 <a:solidFill>
                   <a:srgbClr val="475569"/>
                 </a:solidFill>
                 <a:latin typeface="Plus Jakarta Sans"/>
               </a:rPr>
-              <a:t>Mismo programa: solo cambia el archivo CSV.</a:t>
-            </a:r>
-          </a:p>
-          <a:p>
-            <a:pPr marL="182880" indent="-164592">
-              <a:spcAft>
-                <a:spcPts val="500"/>
-              </a:spcAft>
-              <a:buChar char="•"/>
-            </a:pPr>
-            <a:r>
-              <a:rPr b="0" sz="1500" i="0" u="none">
-                <a:solidFill>
-                  <a:srgbClr val="475569"/>
-                </a:solidFill>
-                <a:latin typeface="Plus Jakarta Sans"/>
-              </a:rPr>
-              <a:t>Hito de 100 M: Rosa Pastel 28/09/2023, Ella Baila Sola 19/04/2023, Tití 21/07/2022.</a:t>
-            </a:r>
-          </a:p>
-          <a:p>
-            <a:pPr marL="182880" indent="-164592">
-              <a:spcAft>
-                <a:spcPts val="500"/>
-              </a:spcAft>
-              <a:buChar char="•"/>
-            </a:pPr>
-            <a:r>
-              <a:rPr b="0" sz="1500" i="0" u="none">
-                <a:solidFill>
-                  <a:srgbClr val="475569"/>
-                </a:solidFill>
-                <a:latin typeface="Plus Jakarta Sans"/>
-              </a:rPr>
-              <a:t>Bisección: 15 a 18 iteraciones; Newton: 3 o 4.</a:t>
-            </a:r>
-          </a:p>
-          <a:p>
-            <a:pPr marL="182880" indent="-164592">
-              <a:spcAft>
-                <a:spcPts val="500"/>
-              </a:spcAft>
-              <a:buChar char="•"/>
-            </a:pPr>
-            <a:r>
-              <a:rPr b="0" sz="1500" i="0" u="none">
-                <a:solidFill>
-                  <a:srgbClr val="475569"/>
-                </a:solidFill>
-                <a:latin typeface="Plus Jakarta Sans"/>
-              </a:rPr>
-              <a:t>Sirve para estimar cuándo cualquier contenido alcanza una meta de demanda.</a:t>
-            </a:r>
-          </a:p>
-        </p:txBody>
-      </p:sp>
-      <p:pic>
-        <p:nvPicPr>
-          <p:cNvPr id="13" name="Picture 12" descr="grafico_3_comparacion_canciones.png"/>
-          <p:cNvPicPr>
-            <a:picLocks noChangeAspect="1"/>
-          </p:cNvPicPr>
-          <p:nvPr/>
-        </p:nvPicPr>
-        <p:blipFill>
-          <a:blip r:embed="rId4"/>
-          <a:stretch>
-            <a:fillRect/>
-          </a:stretch>
-        </p:blipFill>
-        <p:spPr>
-          <a:xfrm>
-            <a:off x="644651" y="1280160"/>
-            <a:ext cx="10917936" cy="3639312"/>
-          </a:xfrm>
-          <a:prstGeom prst="rect">
-            <a:avLst/>
-          </a:prstGeom>
-        </p:spPr>
-      </p:pic>
+              <a:t>Supuestos: duración de 3:06 (186 s) y audio a 160 kbps.
+Son órdenes de magnitud, no datos de Spotify.
+Referencias: Wikipedia, Dulce Beat (duración), y Spotify, Calidad de audio.</a:t>
+            </a:r>
+          </a:p>
+        </p:txBody>
+      </p:sp>
     </p:spTree>
   </p:cSld>
   <p:clrMapOvr>

--- a/ENTREGABLES/Presentacion_Rosa_Pastel_Metodos_Numericos.pptx
+++ b/ENTREGABLES/Presentacion_Rosa_Pastel_Metodos_Numericos.pptx
@@ -8035,7 +8035,7 @@
                 </a:solidFill>
                 <a:latin typeface="Plus Jakarta Sans"/>
               </a:rPr>
-              <a:t>Necesita los 47 datos; el cruce solo depende de 4.</a:t>
+              <a:t>Pensada para muchos puntos: en un tramo corto fuerza curvatura nula en los bordes.</a:t>
             </a:r>
           </a:p>
         </p:txBody>

--- a/ENTREGABLES/Presentacion_Rosa_Pastel_Metodos_Numericos.pptx
+++ b/ENTREGABLES/Presentacion_Rosa_Pastel_Metodos_Numericos.pptx
@@ -8175,7 +8175,7 @@
                 </a:solidFill>
                 <a:latin typeface="Plus Jakarta Sans"/>
               </a:rPr>
-              <a:t>Raíces: Bisección (cerrado, segura) vs. Newton-Raphson (abierto, rápido).</a:t>
+              <a:t>Raíces: Bisección (intervalo, confiable) vs. Newton-Raphson (abierto, rápido).</a:t>
             </a:r>
             <a:br>
               <a:rPr b="0" sz="1600" i="0" u="none">
@@ -10073,7 +10073,7 @@
                 </a:solidFill>
                 <a:latin typeface="Plus Jakarta Sans"/>
               </a:rPr>
-              <a:t>Lineal. Requiere cambio de signo. Segura y lenta.</a:t>
+              <a:t>Requiere cambio de signo. Confiable, pero lenta.</a:t>
             </a:r>
           </a:p>
         </p:txBody>
@@ -10108,7 +10108,7 @@
                 </a:solidFill>
                 <a:latin typeface="Plus Jakarta Sans"/>
               </a:rPr>
-              <a:t>Semilla inicial: t₀ = 35 semanas</a:t>
+              <a:t>Valor inicial: t₀ = 35 semanas</a:t>
             </a:r>
             <a:r>
               <a:rPr b="1" sz="1350" i="0" u="none">
@@ -10152,7 +10152,7 @@
                 </a:solidFill>
                 <a:latin typeface="Plus Jakarta Sans"/>
               </a:rPr>
-              <a:t>Cuadrática. Requiere f′(t) y buen t₀. Rápida.</a:t>
+              <a:t>Requiere f′(t) y buen t₀. Rápida.</a:t>
             </a:r>
           </a:p>
         </p:txBody>
@@ -10222,7 +10222,7 @@
                 </a:solidFill>
                 <a:latin typeface="Plus Jakarta Sans"/>
               </a:rPr>
-              <a:t>Cerrado</a:t>
+              <a:t>Intervalo</a:t>
             </a:r>
           </a:p>
         </p:txBody>
@@ -10633,7 +10633,7 @@
                 </a:solidFill>
                 <a:latin typeface="Plus Jakarta Sans"/>
               </a:rPr>
-              <a:t>Newton-Raphson: Convergencia cuadrática en solo 3 pasos.</a:t>
+              <a:t>Newton-Raphson: convergencia rápida, solo 3 pasos.</a:t>
             </a:r>
           </a:p>
         </p:txBody>
@@ -10707,7 +10707,7 @@
                 </a:solidFill>
                 <a:latin typeface="Space Grotesk"/>
               </a:rPr>
-              <a:t>Convergencia: Lineal vs. Cuadrática</a:t>
+              <a:t>Convergencia: Lenta vs. Rápida</a:t>
             </a:r>
           </a:p>
         </p:txBody>

--- a/ENTREGABLES/Presentacion_Rosa_Pastel_Metodos_Numericos.pptx
+++ b/ENTREGABLES/Presentacion_Rosa_Pastel_Metodos_Numericos.pptx
@@ -3507,7 +3507,7 @@
                 </a:solidFill>
                 <a:latin typeface="Plus Jakarta Sans"/>
               </a:rPr>
-              <a:t>CÁTEDRA DE MÉTODOS NUMÉRICOS</a:t>
+              <a:t>MÉTODOS NUMÉRICOS · CÁTEDRA G</a:t>
             </a:r>
           </a:p>
         </p:txBody>

--- a/ENTREGABLES/Presentacion_Rosa_Pastel_Metodos_Numericos.pptx
+++ b/ENTREGABLES/Presentacion_Rosa_Pastel_Metodos_Numericos.pptx
@@ -7581,7 +7581,7 @@
         <p:spPr>
           <a:xfrm>
             <a:off x="609600" y="2880270"/>
-            <a:ext cx="2571750" cy="2019300"/>
+            <a:ext cx="3505200" cy="2019300"/>
           </a:xfrm>
           <a:prstGeom prst="roundRect">
             <a:avLst>
@@ -7626,8 +7626,8 @@
         </p:nvSpPr>
         <p:spPr>
           <a:xfrm>
-            <a:off x="3409950" y="2880270"/>
-            <a:ext cx="2571750" cy="2019300"/>
+            <a:off x="4343400" y="2880270"/>
+            <a:ext cx="3505200" cy="2019300"/>
           </a:xfrm>
           <a:prstGeom prst="roundRect">
             <a:avLst>
@@ -7666,14 +7666,14 @@
       </p:sp>
       <p:sp>
         <p:nvSpPr>
-          <p:cNvPr id="4" name="Rounded Rectangle 3"/>
+          <p:cNvPr id="5" name="Rounded Rectangle 4"/>
           <p:cNvSpPr/>
           <p:nvPr/>
         </p:nvSpPr>
         <p:spPr>
           <a:xfrm>
-            <a:off x="6210300" y="2880270"/>
-            <a:ext cx="2571750" cy="2019300"/>
+            <a:off x="8077200" y="2880270"/>
+            <a:ext cx="3505200" cy="2019300"/>
           </a:xfrm>
           <a:prstGeom prst="roundRect">
             <a:avLst>
@@ -7712,52 +7712,6 @@
       </p:sp>
       <p:sp>
         <p:nvSpPr>
-          <p:cNvPr id="5" name="Rounded Rectangle 4"/>
-          <p:cNvSpPr/>
-          <p:nvPr/>
-        </p:nvSpPr>
-        <p:spPr>
-          <a:xfrm>
-            <a:off x="9010650" y="2880270"/>
-            <a:ext cx="2571750" cy="2019300"/>
-          </a:xfrm>
-          <a:prstGeom prst="roundRect">
-            <a:avLst>
-              <a:gd name="adj" fmla="val 7547"/>
-            </a:avLst>
-          </a:prstGeom>
-          <a:solidFill>
-            <a:srgbClr val="F8FAFC"/>
-          </a:solidFill>
-          <a:ln>
-            <a:noFill/>
-          </a:ln>
-          <a:effectLst/>
-        </p:spPr>
-        <p:style>
-          <a:lnRef idx="1">
-            <a:schemeClr val="accent1"/>
-          </a:lnRef>
-          <a:fillRef idx="3">
-            <a:schemeClr val="accent1"/>
-          </a:fillRef>
-          <a:effectRef idx="2">
-            <a:schemeClr val="accent1"/>
-          </a:effectRef>
-          <a:fontRef idx="minor">
-            <a:schemeClr val="lt1"/>
-          </a:fontRef>
-        </p:style>
-        <p:txBody>
-          <a:bodyPr rtlCol="0" anchor="ctr"/>
-          <a:lstStyle/>
-          <a:p>
-            <a:pPr algn="ctr"/>
-          </a:p>
-        </p:txBody>
-      </p:sp>
-      <p:sp>
-        <p:nvSpPr>
           <p:cNvPr id="14" name="TextBox 13"/>
           <p:cNvSpPr txBox="1"/>
           <p:nvPr/>
@@ -7839,7 +7793,7 @@
         <p:spPr>
           <a:xfrm>
             <a:off x="838200" y="3261270"/>
-            <a:ext cx="2194560" cy="219075"/>
+            <a:ext cx="3048000" cy="219075"/>
           </a:xfrm>
           <a:prstGeom prst="rect">
             <a:avLst/>
@@ -7874,7 +7828,7 @@
         <p:spPr>
           <a:xfrm>
             <a:off x="838200" y="3594645"/>
-            <a:ext cx="2209800" cy="768096"/>
+            <a:ext cx="3048000" cy="768096"/>
           </a:xfrm>
           <a:prstGeom prst="rect">
             <a:avLst/>
@@ -7908,8 +7862,8 @@
         </p:nvSpPr>
         <p:spPr>
           <a:xfrm>
-            <a:off x="3638550" y="3261270"/>
-            <a:ext cx="2194560" cy="219075"/>
+            <a:off x="4572000" y="3261270"/>
+            <a:ext cx="3048000" cy="219075"/>
           </a:xfrm>
           <a:prstGeom prst="rect">
             <a:avLst/>
@@ -7930,7 +7884,7 @@
                 </a:solidFill>
                 <a:latin typeface="Space Grotesk"/>
               </a:rPr>
-              <a:t>Lagrange (5.4)</a:t>
+              <a:t>Lagrange</a:t>
             </a:r>
           </a:p>
         </p:txBody>
@@ -7943,8 +7897,8 @@
         </p:nvSpPr>
         <p:spPr>
           <a:xfrm>
-            <a:off x="3638550" y="3594645"/>
-            <a:ext cx="2209800" cy="768096"/>
+            <a:off x="4572000" y="3594645"/>
+            <a:ext cx="3048000" cy="768096"/>
           </a:xfrm>
           <a:prstGeom prst="rect">
             <a:avLst/>
@@ -7972,14 +7926,14 @@
       </p:sp>
       <p:sp>
         <p:nvSpPr>
-          <p:cNvPr id="20" name="TextBox 19"/>
-          <p:cNvSpPr txBox="1"/>
-          <p:nvPr/>
-        </p:nvSpPr>
-        <p:spPr>
-          <a:xfrm>
-            <a:off x="6438900" y="3261270"/>
-            <a:ext cx="2194560" cy="219075"/>
+          <p:cNvPr id="22" name="TextBox 21"/>
+          <p:cNvSpPr txBox="1"/>
+          <p:nvPr/>
+        </p:nvSpPr>
+        <p:spPr>
+          <a:xfrm>
+            <a:off x="8305800" y="3261270"/>
+            <a:ext cx="3048000" cy="219075"/>
           </a:xfrm>
           <a:prstGeom prst="rect">
             <a:avLst/>
@@ -8000,77 +7954,7 @@
                 </a:solidFill>
                 <a:latin typeface="Space Grotesk"/>
               </a:rPr>
-              <a:t>Trazadora cúbica (5.5)</a:t>
-            </a:r>
-          </a:p>
-        </p:txBody>
-      </p:sp>
-      <p:sp>
-        <p:nvSpPr>
-          <p:cNvPr id="21" name="TextBox 20"/>
-          <p:cNvSpPr txBox="1"/>
-          <p:nvPr/>
-        </p:nvSpPr>
-        <p:spPr>
-          <a:xfrm>
-            <a:off x="6438900" y="3594645"/>
-            <a:ext cx="2209800" cy="768096"/>
-          </a:xfrm>
-          <a:prstGeom prst="rect">
-            <a:avLst/>
-          </a:prstGeom>
-          <a:noFill/>
-        </p:spPr>
-        <p:txBody>
-          <a:bodyPr wrap="square" lIns="0" rIns="0" tIns="0" bIns="0" anchor="t">
-            <a:spAutoFit/>
-          </a:bodyPr>
-          <a:lstStyle/>
-          <a:p>
-            <a:pPr algn="l"/>
-            <a:r>
-              <a:rPr b="0" sz="1500" i="0" u="none">
-                <a:solidFill>
-                  <a:srgbClr val="475569"/>
-                </a:solidFill>
-                <a:latin typeface="Plus Jakarta Sans"/>
-              </a:rPr>
-              <a:t>Pensada para muchos puntos: en un tramo corto fuerza curvatura nula en los bordes.</a:t>
-            </a:r>
-          </a:p>
-        </p:txBody>
-      </p:sp>
-      <p:sp>
-        <p:nvSpPr>
-          <p:cNvPr id="22" name="TextBox 21"/>
-          <p:cNvSpPr txBox="1"/>
-          <p:nvPr/>
-        </p:nvSpPr>
-        <p:spPr>
-          <a:xfrm>
-            <a:off x="9239250" y="3261270"/>
-            <a:ext cx="2194560" cy="219075"/>
-          </a:xfrm>
-          <a:prstGeom prst="rect">
-            <a:avLst/>
-          </a:prstGeom>
-          <a:noFill/>
-        </p:spPr>
-        <p:txBody>
-          <a:bodyPr wrap="none" lIns="0" rIns="0" tIns="0" bIns="0" anchor="t">
-            <a:spAutoFit/>
-          </a:bodyPr>
-          <a:lstStyle/>
-          <a:p>
-            <a:pPr algn="l"/>
-            <a:r>
-              <a:rPr b="1" sz="1600" i="0" u="none">
-                <a:solidFill>
-                  <a:srgbClr val="0F172A"/>
-                </a:solidFill>
-                <a:latin typeface="Space Grotesk"/>
-              </a:rPr>
-              <a:t>Regresión (5.2)</a:t>
+              <a:t>Regresión</a:t>
             </a:r>
           </a:p>
         </p:txBody>
@@ -8083,8 +7967,8 @@
         </p:nvSpPr>
         <p:spPr>
           <a:xfrm>
-            <a:off x="9239250" y="3594645"/>
-            <a:ext cx="2209800" cy="768096"/>
+            <a:off x="8305800" y="3594645"/>
+            <a:ext cx="3048000" cy="768096"/>
           </a:xfrm>
           <a:prstGeom prst="rect">
             <a:avLst/>
@@ -8140,7 +8024,7 @@
                 </a:solidFill>
                 <a:latin typeface="Plus Jakarta Sans"/>
               </a:rPr>
-              <a:t>Se eligió la interpolación de Newton (apartado 5.3) frente a las otras opciones de los apuntes:</a:t>
+              <a:t>Se eligió la interpolación de Newton frente a las otras opciones de los apuntes:</a:t>
             </a:r>
           </a:p>
         </p:txBody>

--- a/ENTREGABLES/Presentacion_Rosa_Pastel_Metodos_Numericos.pptx
+++ b/ENTREGABLES/Presentacion_Rosa_Pastel_Metodos_Numericos.pptx
@@ -1,36 +1,36 @@
 
 <file path=ppt/presentation.xml><?xml version="1.0" encoding="utf-8"?>
-<p:presentation xmlns:p="http://schemas.openxmlformats.org/presentationml/2006/main" xmlns:r="http://schemas.openxmlformats.org/officeDocument/2006/relationships" xmlns:a="http://schemas.openxmlformats.org/drawingml/2006/main" saveSubsetFonts="1" autoCompressPictures="0" embedTrueTypeFonts="1">
+<p:presentation xmlns:a="http://schemas.openxmlformats.org/drawingml/2006/main" xmlns:r="http://schemas.openxmlformats.org/officeDocument/2006/relationships" xmlns:p="http://schemas.openxmlformats.org/presentationml/2006/main" embedTrueTypeFonts="1" saveSubsetFonts="1" autoCompressPictures="0">
   <p:sldMasterIdLst>
     <p:sldMasterId id="2147483648" r:id="rId1"/>
   </p:sldMasterIdLst>
   <p:sldIdLst>
-    <p:sldId id="256" r:id="rId7"/>
-    <p:sldId id="257" r:id="rId8"/>
-    <p:sldId id="258" r:id="rId9"/>
-    <p:sldId id="259" r:id="rId10"/>
-    <p:sldId id="271" r:id="rId22"/>
-    <p:sldId id="260" r:id="rId11"/>
-    <p:sldId id="261" r:id="rId12"/>
-    <p:sldId id="262" r:id="rId13"/>
-    <p:sldId id="270" r:id="rId21"/>
-    <p:sldId id="269" r:id="rId20"/>
-    <p:sldId id="264" r:id="rId15"/>
-    <p:sldId id="265" r:id="rId16"/>
-    <p:sldId id="266" r:id="rId17"/>
-    <p:sldId id="267" r:id="rId18"/>
+    <p:sldId id="256" r:id="rId2"/>
+    <p:sldId id="257" r:id="rId3"/>
+    <p:sldId id="258" r:id="rId4"/>
+    <p:sldId id="259" r:id="rId5"/>
+    <p:sldId id="271" r:id="rId6"/>
+    <p:sldId id="260" r:id="rId7"/>
+    <p:sldId id="261" r:id="rId8"/>
+    <p:sldId id="262" r:id="rId9"/>
+    <p:sldId id="270" r:id="rId10"/>
+    <p:sldId id="269" r:id="rId11"/>
+    <p:sldId id="264" r:id="rId12"/>
+    <p:sldId id="265" r:id="rId13"/>
+    <p:sldId id="266" r:id="rId14"/>
+    <p:sldId id="267" r:id="rId15"/>
   </p:sldIdLst>
-  <p:sldSz cx="12192000" cy="6858000" type="screen4x3"/>
+  <p:sldSz cx="12192000" cy="6858000"/>
   <p:notesSz cx="6858000" cy="9144000"/>
   <p:embeddedFontLst>
     <p:embeddedFont>
-      <p:font typeface="Space Grotesk"/>
-      <p:bold r:id="rIdFont19"/>
+      <p:font typeface="Plus Jakarta Sans"/>
+      <p:regular r:id="rId16"/>
+      <p:bold r:id="rId17"/>
     </p:embeddedFont>
     <p:embeddedFont>
-      <p:font typeface="Plus Jakarta Sans"/>
-      <p:regular r:id="rIdFont21"/>
-      <p:bold r:id="rIdFont20"/>
+      <p:font typeface="Space Grotesk"/>
+      <p:bold r:id="rId18"/>
     </p:embeddedFont>
   </p:embeddedFontLst>
   <p:defaultTextStyle>
@@ -128,6 +128,22 @@
       </a:defRPr>
     </a:lvl9pPr>
   </p:defaultTextStyle>
+  <p:extLst>
+    <p:ext uri="{EFAFB233-063F-42B5-8137-9DF3F51BA10A}">
+      <p15:sldGuideLst xmlns:p15="http://schemas.microsoft.com/office/powerpoint/2012/main">
+        <p15:guide id="1" orient="horz" pos="2160">
+          <p15:clr>
+            <a:srgbClr val="A4A3A4"/>
+          </p15:clr>
+        </p15:guide>
+        <p15:guide id="2" pos="2880">
+          <p15:clr>
+            <a:srgbClr val="A4A3A4"/>
+          </p15:clr>
+        </p15:guide>
+      </p15:sldGuideLst>
+    </p:ext>
+  </p:extLst>
 </p:presentation>
 </file>
 
@@ -169,10 +185,9 @@
           <a:lstStyle/>
           <a:p>
             <a:r>
-              <a:rPr lang="en-US" smtClean="0"/>
+              <a:rPr lang="en-US"/>
               <a:t>Click to edit Master title style</a:t>
             </a:r>
-            <a:endParaRPr lang="en-US"/>
           </a:p>
         </p:txBody>
       </p:sp>
@@ -288,10 +303,9 @@
           </a:lstStyle>
           <a:p>
             <a:r>
-              <a:rPr lang="en-US" smtClean="0"/>
+              <a:rPr lang="en-US"/>
               <a:t>Click to edit Master subtitle style</a:t>
             </a:r>
-            <a:endParaRPr lang="en-US"/>
           </a:p>
         </p:txBody>
       </p:sp>
@@ -312,7 +326,7 @@
           <a:p>
             <a:fld id="{5BCAD085-E8A6-8845-BD4E-CB4CCA059FC4}" type="datetimeFigureOut">
               <a:rPr lang="en-US" smtClean="0"/>
-              <a:t>1/27/13</a:t>
+              <a:t>10/29/26</a:t>
             </a:fld>
             <a:endParaRPr lang="en-US"/>
           </a:p>
@@ -406,10 +420,9 @@
           <a:lstStyle/>
           <a:p>
             <a:r>
-              <a:rPr lang="en-US" smtClean="0"/>
+              <a:rPr lang="en-US"/>
               <a:t>Click to edit Master title style</a:t>
             </a:r>
-            <a:endParaRPr lang="en-US"/>
           </a:p>
         </p:txBody>
       </p:sp>
@@ -430,38 +443,37 @@
           <a:p>
             <a:pPr lvl="0"/>
             <a:r>
-              <a:rPr lang="en-US" smtClean="0"/>
+              <a:rPr lang="en-US"/>
               <a:t>Click to edit Master text styles</a:t>
             </a:r>
           </a:p>
           <a:p>
             <a:pPr lvl="1"/>
             <a:r>
-              <a:rPr lang="en-US" smtClean="0"/>
+              <a:rPr lang="en-US"/>
               <a:t>Second level</a:t>
             </a:r>
           </a:p>
           <a:p>
             <a:pPr lvl="2"/>
             <a:r>
-              <a:rPr lang="en-US" smtClean="0"/>
+              <a:rPr lang="en-US"/>
               <a:t>Third level</a:t>
             </a:r>
           </a:p>
           <a:p>
             <a:pPr lvl="3"/>
             <a:r>
-              <a:rPr lang="en-US" smtClean="0"/>
+              <a:rPr lang="en-US"/>
               <a:t>Fourth level</a:t>
             </a:r>
           </a:p>
           <a:p>
             <a:pPr lvl="4"/>
             <a:r>
-              <a:rPr lang="en-US" smtClean="0"/>
+              <a:rPr lang="en-US"/>
               <a:t>Fifth level</a:t>
             </a:r>
-            <a:endParaRPr lang="en-US"/>
           </a:p>
         </p:txBody>
       </p:sp>
@@ -482,7 +494,7 @@
           <a:p>
             <a:fld id="{5BCAD085-E8A6-8845-BD4E-CB4CCA059FC4}" type="datetimeFigureOut">
               <a:rPr lang="en-US" smtClean="0"/>
-              <a:t>1/27/13</a:t>
+              <a:t>10/29/26</a:t>
             </a:fld>
             <a:endParaRPr lang="en-US"/>
           </a:p>
@@ -581,10 +593,9 @@
           <a:lstStyle/>
           <a:p>
             <a:r>
-              <a:rPr lang="en-US" smtClean="0"/>
+              <a:rPr lang="en-US"/>
               <a:t>Click to edit Master title style</a:t>
             </a:r>
-            <a:endParaRPr lang="en-US"/>
           </a:p>
         </p:txBody>
       </p:sp>
@@ -610,38 +621,37 @@
           <a:p>
             <a:pPr lvl="0"/>
             <a:r>
-              <a:rPr lang="en-US" smtClean="0"/>
+              <a:rPr lang="en-US"/>
               <a:t>Click to edit Master text styles</a:t>
             </a:r>
           </a:p>
           <a:p>
             <a:pPr lvl="1"/>
             <a:r>
-              <a:rPr lang="en-US" smtClean="0"/>
+              <a:rPr lang="en-US"/>
               <a:t>Second level</a:t>
             </a:r>
           </a:p>
           <a:p>
             <a:pPr lvl="2"/>
             <a:r>
-              <a:rPr lang="en-US" smtClean="0"/>
+              <a:rPr lang="en-US"/>
               <a:t>Third level</a:t>
             </a:r>
           </a:p>
           <a:p>
             <a:pPr lvl="3"/>
             <a:r>
-              <a:rPr lang="en-US" smtClean="0"/>
+              <a:rPr lang="en-US"/>
               <a:t>Fourth level</a:t>
             </a:r>
           </a:p>
           <a:p>
             <a:pPr lvl="4"/>
             <a:r>
-              <a:rPr lang="en-US" smtClean="0"/>
+              <a:rPr lang="en-US"/>
               <a:t>Fifth level</a:t>
             </a:r>
-            <a:endParaRPr lang="en-US"/>
           </a:p>
         </p:txBody>
       </p:sp>
@@ -662,7 +672,7 @@
           <a:p>
             <a:fld id="{5BCAD085-E8A6-8845-BD4E-CB4CCA059FC4}" type="datetimeFigureOut">
               <a:rPr lang="en-US" smtClean="0"/>
-              <a:t>1/27/13</a:t>
+              <a:t>10/29/26</a:t>
             </a:fld>
             <a:endParaRPr lang="en-US"/>
           </a:p>
@@ -756,10 +766,9 @@
           <a:lstStyle/>
           <a:p>
             <a:r>
-              <a:rPr lang="en-US" smtClean="0"/>
+              <a:rPr lang="en-US"/>
               <a:t>Click to edit Master title style</a:t>
             </a:r>
-            <a:endParaRPr lang="en-US"/>
           </a:p>
         </p:txBody>
       </p:sp>
@@ -780,38 +789,37 @@
           <a:p>
             <a:pPr lvl="0"/>
             <a:r>
-              <a:rPr lang="en-US" smtClean="0"/>
+              <a:rPr lang="en-US"/>
               <a:t>Click to edit Master text styles</a:t>
             </a:r>
           </a:p>
           <a:p>
             <a:pPr lvl="1"/>
             <a:r>
-              <a:rPr lang="en-US" smtClean="0"/>
+              <a:rPr lang="en-US"/>
               <a:t>Second level</a:t>
             </a:r>
           </a:p>
           <a:p>
             <a:pPr lvl="2"/>
             <a:r>
-              <a:rPr lang="en-US" smtClean="0"/>
+              <a:rPr lang="en-US"/>
               <a:t>Third level</a:t>
             </a:r>
           </a:p>
           <a:p>
             <a:pPr lvl="3"/>
             <a:r>
-              <a:rPr lang="en-US" smtClean="0"/>
+              <a:rPr lang="en-US"/>
               <a:t>Fourth level</a:t>
             </a:r>
           </a:p>
           <a:p>
             <a:pPr lvl="4"/>
             <a:r>
-              <a:rPr lang="en-US" smtClean="0"/>
+              <a:rPr lang="en-US"/>
               <a:t>Fifth level</a:t>
             </a:r>
-            <a:endParaRPr lang="en-US"/>
           </a:p>
         </p:txBody>
       </p:sp>
@@ -832,7 +840,7 @@
           <a:p>
             <a:fld id="{5BCAD085-E8A6-8845-BD4E-CB4CCA059FC4}" type="datetimeFigureOut">
               <a:rPr lang="en-US" smtClean="0"/>
-              <a:t>1/27/13</a:t>
+              <a:t>10/29/26</a:t>
             </a:fld>
             <a:endParaRPr lang="en-US"/>
           </a:p>
@@ -935,10 +943,9 @@
           </a:lstStyle>
           <a:p>
             <a:r>
-              <a:rPr lang="en-US" smtClean="0"/>
+              <a:rPr lang="en-US"/>
               <a:t>Click to edit Master title style</a:t>
             </a:r>
-            <a:endParaRPr lang="en-US"/>
           </a:p>
         </p:txBody>
       </p:sp>
@@ -1055,7 +1062,7 @@
           <a:p>
             <a:pPr lvl="0"/>
             <a:r>
-              <a:rPr lang="en-US" smtClean="0"/>
+              <a:rPr lang="en-US"/>
               <a:t>Click to edit Master text styles</a:t>
             </a:r>
           </a:p>
@@ -1078,7 +1085,7 @@
           <a:p>
             <a:fld id="{5BCAD085-E8A6-8845-BD4E-CB4CCA059FC4}" type="datetimeFigureOut">
               <a:rPr lang="en-US" smtClean="0"/>
-              <a:t>1/27/13</a:t>
+              <a:t>10/29/26</a:t>
             </a:fld>
             <a:endParaRPr lang="en-US"/>
           </a:p>
@@ -1172,10 +1179,9 @@
           <a:lstStyle/>
           <a:p>
             <a:r>
-              <a:rPr lang="en-US" smtClean="0"/>
+              <a:rPr lang="en-US"/>
               <a:t>Click to edit Master title style</a:t>
             </a:r>
-            <a:endParaRPr lang="en-US"/>
           </a:p>
         </p:txBody>
       </p:sp>
@@ -1229,38 +1235,37 @@
           <a:p>
             <a:pPr lvl="0"/>
             <a:r>
-              <a:rPr lang="en-US" smtClean="0"/>
+              <a:rPr lang="en-US"/>
               <a:t>Click to edit Master text styles</a:t>
             </a:r>
           </a:p>
           <a:p>
             <a:pPr lvl="1"/>
             <a:r>
-              <a:rPr lang="en-US" smtClean="0"/>
+              <a:rPr lang="en-US"/>
               <a:t>Second level</a:t>
             </a:r>
           </a:p>
           <a:p>
             <a:pPr lvl="2"/>
             <a:r>
-              <a:rPr lang="en-US" smtClean="0"/>
+              <a:rPr lang="en-US"/>
               <a:t>Third level</a:t>
             </a:r>
           </a:p>
           <a:p>
             <a:pPr lvl="3"/>
             <a:r>
-              <a:rPr lang="en-US" smtClean="0"/>
+              <a:rPr lang="en-US"/>
               <a:t>Fourth level</a:t>
             </a:r>
           </a:p>
           <a:p>
             <a:pPr lvl="4"/>
             <a:r>
-              <a:rPr lang="en-US" smtClean="0"/>
+              <a:rPr lang="en-US"/>
               <a:t>Fifth level</a:t>
             </a:r>
-            <a:endParaRPr lang="en-US"/>
           </a:p>
         </p:txBody>
       </p:sp>
@@ -1314,38 +1319,37 @@
           <a:p>
             <a:pPr lvl="0"/>
             <a:r>
-              <a:rPr lang="en-US" smtClean="0"/>
+              <a:rPr lang="en-US"/>
               <a:t>Click to edit Master text styles</a:t>
             </a:r>
           </a:p>
           <a:p>
             <a:pPr lvl="1"/>
             <a:r>
-              <a:rPr lang="en-US" smtClean="0"/>
+              <a:rPr lang="en-US"/>
               <a:t>Second level</a:t>
             </a:r>
           </a:p>
           <a:p>
             <a:pPr lvl="2"/>
             <a:r>
-              <a:rPr lang="en-US" smtClean="0"/>
+              <a:rPr lang="en-US"/>
               <a:t>Third level</a:t>
             </a:r>
           </a:p>
           <a:p>
             <a:pPr lvl="3"/>
             <a:r>
-              <a:rPr lang="en-US" smtClean="0"/>
+              <a:rPr lang="en-US"/>
               <a:t>Fourth level</a:t>
             </a:r>
           </a:p>
           <a:p>
             <a:pPr lvl="4"/>
             <a:r>
-              <a:rPr lang="en-US" smtClean="0"/>
+              <a:rPr lang="en-US"/>
               <a:t>Fifth level</a:t>
             </a:r>
-            <a:endParaRPr lang="en-US"/>
           </a:p>
         </p:txBody>
       </p:sp>
@@ -1366,7 +1370,7 @@
           <a:p>
             <a:fld id="{5BCAD085-E8A6-8845-BD4E-CB4CCA059FC4}" type="datetimeFigureOut">
               <a:rPr lang="en-US" smtClean="0"/>
-              <a:t>1/27/13</a:t>
+              <a:t>10/29/26</a:t>
             </a:fld>
             <a:endParaRPr lang="en-US"/>
           </a:p>
@@ -1464,10 +1468,9 @@
           </a:lstStyle>
           <a:p>
             <a:r>
-              <a:rPr lang="en-US" smtClean="0"/>
+              <a:rPr lang="en-US"/>
               <a:t>Click to edit Master title style</a:t>
             </a:r>
-            <a:endParaRPr lang="en-US"/>
           </a:p>
         </p:txBody>
       </p:sp>
@@ -1530,7 +1533,7 @@
           <a:p>
             <a:pPr lvl="0"/>
             <a:r>
-              <a:rPr lang="en-US" smtClean="0"/>
+              <a:rPr lang="en-US"/>
               <a:t>Click to edit Master text styles</a:t>
             </a:r>
           </a:p>
@@ -1586,38 +1589,37 @@
           <a:p>
             <a:pPr lvl="0"/>
             <a:r>
-              <a:rPr lang="en-US" smtClean="0"/>
+              <a:rPr lang="en-US"/>
               <a:t>Click to edit Master text styles</a:t>
             </a:r>
           </a:p>
           <a:p>
             <a:pPr lvl="1"/>
             <a:r>
-              <a:rPr lang="en-US" smtClean="0"/>
+              <a:rPr lang="en-US"/>
               <a:t>Second level</a:t>
             </a:r>
           </a:p>
           <a:p>
             <a:pPr lvl="2"/>
             <a:r>
-              <a:rPr lang="en-US" smtClean="0"/>
+              <a:rPr lang="en-US"/>
               <a:t>Third level</a:t>
             </a:r>
           </a:p>
           <a:p>
             <a:pPr lvl="3"/>
             <a:r>
-              <a:rPr lang="en-US" smtClean="0"/>
+              <a:rPr lang="en-US"/>
               <a:t>Fourth level</a:t>
             </a:r>
           </a:p>
           <a:p>
             <a:pPr lvl="4"/>
             <a:r>
-              <a:rPr lang="en-US" smtClean="0"/>
+              <a:rPr lang="en-US"/>
               <a:t>Fifth level</a:t>
             </a:r>
-            <a:endParaRPr lang="en-US"/>
           </a:p>
         </p:txBody>
       </p:sp>
@@ -1680,7 +1682,7 @@
           <a:p>
             <a:pPr lvl="0"/>
             <a:r>
-              <a:rPr lang="en-US" smtClean="0"/>
+              <a:rPr lang="en-US"/>
               <a:t>Click to edit Master text styles</a:t>
             </a:r>
           </a:p>
@@ -1736,38 +1738,37 @@
           <a:p>
             <a:pPr lvl="0"/>
             <a:r>
-              <a:rPr lang="en-US" smtClean="0"/>
+              <a:rPr lang="en-US"/>
               <a:t>Click to edit Master text styles</a:t>
             </a:r>
           </a:p>
           <a:p>
             <a:pPr lvl="1"/>
             <a:r>
-              <a:rPr lang="en-US" smtClean="0"/>
+              <a:rPr lang="en-US"/>
               <a:t>Second level</a:t>
             </a:r>
           </a:p>
           <a:p>
             <a:pPr lvl="2"/>
             <a:r>
-              <a:rPr lang="en-US" smtClean="0"/>
+              <a:rPr lang="en-US"/>
               <a:t>Third level</a:t>
             </a:r>
           </a:p>
           <a:p>
             <a:pPr lvl="3"/>
             <a:r>
-              <a:rPr lang="en-US" smtClean="0"/>
+              <a:rPr lang="en-US"/>
               <a:t>Fourth level</a:t>
             </a:r>
           </a:p>
           <a:p>
             <a:pPr lvl="4"/>
             <a:r>
-              <a:rPr lang="en-US" smtClean="0"/>
+              <a:rPr lang="en-US"/>
               <a:t>Fifth level</a:t>
             </a:r>
-            <a:endParaRPr lang="en-US"/>
           </a:p>
         </p:txBody>
       </p:sp>
@@ -1788,7 +1789,7 @@
           <a:p>
             <a:fld id="{5BCAD085-E8A6-8845-BD4E-CB4CCA059FC4}" type="datetimeFigureOut">
               <a:rPr lang="en-US" smtClean="0"/>
-              <a:t>1/27/13</a:t>
+              <a:t>10/29/26</a:t>
             </a:fld>
             <a:endParaRPr lang="en-US"/>
           </a:p>
@@ -1882,10 +1883,9 @@
           <a:lstStyle/>
           <a:p>
             <a:r>
-              <a:rPr lang="en-US" smtClean="0"/>
+              <a:rPr lang="en-US"/>
               <a:t>Click to edit Master title style</a:t>
             </a:r>
-            <a:endParaRPr lang="en-US"/>
           </a:p>
         </p:txBody>
       </p:sp>
@@ -1906,7 +1906,7 @@
           <a:p>
             <a:fld id="{5BCAD085-E8A6-8845-BD4E-CB4CCA059FC4}" type="datetimeFigureOut">
               <a:rPr lang="en-US" smtClean="0"/>
-              <a:t>1/27/13</a:t>
+              <a:t>10/29/26</a:t>
             </a:fld>
             <a:endParaRPr lang="en-US"/>
           </a:p>
@@ -2001,7 +2001,7 @@
           <a:p>
             <a:fld id="{5BCAD085-E8A6-8845-BD4E-CB4CCA059FC4}" type="datetimeFigureOut">
               <a:rPr lang="en-US" smtClean="0"/>
-              <a:t>1/27/13</a:t>
+              <a:t>10/29/26</a:t>
             </a:fld>
             <a:endParaRPr lang="en-US"/>
           </a:p>
@@ -2104,10 +2104,9 @@
           </a:lstStyle>
           <a:p>
             <a:r>
-              <a:rPr lang="en-US" smtClean="0"/>
+              <a:rPr lang="en-US"/>
               <a:t>Click to edit Master title style</a:t>
             </a:r>
-            <a:endParaRPr lang="en-US"/>
           </a:p>
         </p:txBody>
       </p:sp>
@@ -2161,38 +2160,37 @@
           <a:p>
             <a:pPr lvl="0"/>
             <a:r>
-              <a:rPr lang="en-US" smtClean="0"/>
+              <a:rPr lang="en-US"/>
               <a:t>Click to edit Master text styles</a:t>
             </a:r>
           </a:p>
           <a:p>
             <a:pPr lvl="1"/>
             <a:r>
-              <a:rPr lang="en-US" smtClean="0"/>
+              <a:rPr lang="en-US"/>
               <a:t>Second level</a:t>
             </a:r>
           </a:p>
           <a:p>
             <a:pPr lvl="2"/>
             <a:r>
-              <a:rPr lang="en-US" smtClean="0"/>
+              <a:rPr lang="en-US"/>
               <a:t>Third level</a:t>
             </a:r>
           </a:p>
           <a:p>
             <a:pPr lvl="3"/>
             <a:r>
-              <a:rPr lang="en-US" smtClean="0"/>
+              <a:rPr lang="en-US"/>
               <a:t>Fourth level</a:t>
             </a:r>
           </a:p>
           <a:p>
             <a:pPr lvl="4"/>
             <a:r>
-              <a:rPr lang="en-US" smtClean="0"/>
+              <a:rPr lang="en-US"/>
               <a:t>Fifth level</a:t>
             </a:r>
-            <a:endParaRPr lang="en-US"/>
           </a:p>
         </p:txBody>
       </p:sp>
@@ -2255,7 +2253,7 @@
           <a:p>
             <a:pPr lvl="0"/>
             <a:r>
-              <a:rPr lang="en-US" smtClean="0"/>
+              <a:rPr lang="en-US"/>
               <a:t>Click to edit Master text styles</a:t>
             </a:r>
           </a:p>
@@ -2278,7 +2276,7 @@
           <a:p>
             <a:fld id="{5BCAD085-E8A6-8845-BD4E-CB4CCA059FC4}" type="datetimeFigureOut">
               <a:rPr lang="en-US" smtClean="0"/>
-              <a:t>1/27/13</a:t>
+              <a:t>10/29/26</a:t>
             </a:fld>
             <a:endParaRPr lang="en-US"/>
           </a:p>
@@ -2381,10 +2379,9 @@
           </a:lstStyle>
           <a:p>
             <a:r>
-              <a:rPr lang="en-US" smtClean="0"/>
+              <a:rPr lang="en-US"/>
               <a:t>Click to edit Master title style</a:t>
             </a:r>
-            <a:endParaRPr lang="en-US"/>
           </a:p>
         </p:txBody>
       </p:sp>
@@ -2508,7 +2505,7 @@
           <a:p>
             <a:pPr lvl="0"/>
             <a:r>
-              <a:rPr lang="en-US" smtClean="0"/>
+              <a:rPr lang="en-US"/>
               <a:t>Click to edit Master text styles</a:t>
             </a:r>
           </a:p>
@@ -2531,7 +2528,7 @@
           <a:p>
             <a:fld id="{5BCAD085-E8A6-8845-BD4E-CB4CCA059FC4}" type="datetimeFigureOut">
               <a:rPr lang="en-US" smtClean="0"/>
-              <a:t>1/27/13</a:t>
+              <a:t>10/29/26</a:t>
             </a:fld>
             <a:endParaRPr lang="en-US"/>
           </a:p>
@@ -2640,10 +2637,9 @@
           <a:lstStyle/>
           <a:p>
             <a:r>
-              <a:rPr lang="en-US" smtClean="0"/>
+              <a:rPr lang="en-US"/>
               <a:t>Click to edit Master title style</a:t>
             </a:r>
-            <a:endParaRPr lang="en-US"/>
           </a:p>
         </p:txBody>
       </p:sp>
@@ -2674,38 +2670,37 @@
           <a:p>
             <a:pPr lvl="0"/>
             <a:r>
-              <a:rPr lang="en-US" smtClean="0"/>
+              <a:rPr lang="en-US"/>
               <a:t>Click to edit Master text styles</a:t>
             </a:r>
           </a:p>
           <a:p>
             <a:pPr lvl="1"/>
             <a:r>
-              <a:rPr lang="en-US" smtClean="0"/>
+              <a:rPr lang="en-US"/>
               <a:t>Second level</a:t>
             </a:r>
           </a:p>
           <a:p>
             <a:pPr lvl="2"/>
             <a:r>
-              <a:rPr lang="en-US" smtClean="0"/>
+              <a:rPr lang="en-US"/>
               <a:t>Third level</a:t>
             </a:r>
           </a:p>
           <a:p>
             <a:pPr lvl="3"/>
             <a:r>
-              <a:rPr lang="en-US" smtClean="0"/>
+              <a:rPr lang="en-US"/>
               <a:t>Fourth level</a:t>
             </a:r>
           </a:p>
           <a:p>
             <a:pPr lvl="4"/>
             <a:r>
-              <a:rPr lang="en-US" smtClean="0"/>
+              <a:rPr lang="en-US"/>
               <a:t>Fifth level</a:t>
             </a:r>
-            <a:endParaRPr lang="en-US"/>
           </a:p>
         </p:txBody>
       </p:sp>
@@ -2744,7 +2739,7 @@
           <a:p>
             <a:fld id="{5BCAD085-E8A6-8845-BD4E-CB4CCA059FC4}" type="datetimeFigureOut">
               <a:rPr lang="en-US" smtClean="0"/>
-              <a:t>1/27/13</a:t>
+              <a:t>10/29/26</a:t>
             </a:fld>
             <a:endParaRPr lang="en-US"/>
           </a:p>
@@ -3103,7 +3098,7 @@
 </file>
 
 <file path=ppt/slides/slide1.xml><?xml version="1.0" encoding="utf-8"?>
-<p:sld xmlns:a="http://schemas.openxmlformats.org/drawingml/2006/main" xmlns:p="http://schemas.openxmlformats.org/presentationml/2006/main" xmlns:r="http://schemas.openxmlformats.org/officeDocument/2006/relationships">
+<p:sld xmlns:a="http://schemas.openxmlformats.org/drawingml/2006/main" xmlns:r="http://schemas.openxmlformats.org/officeDocument/2006/relationships" xmlns:p="http://schemas.openxmlformats.org/presentationml/2006/main">
   <p:cSld>
     <p:bg>
       <p:bgPr>
@@ -3119,7 +3114,14 @@
         <p:cNvGrpSpPr/>
         <p:nvPr/>
       </p:nvGrpSpPr>
-      <p:grpSpPr/>
+      <p:grpSpPr>
+        <a:xfrm>
+          <a:off x="0" y="0"/>
+          <a:ext cx="0" cy="0"/>
+          <a:chOff x="0" y="0"/>
+          <a:chExt cx="0" cy="0"/>
+        </a:xfrm>
+      </p:grpSpPr>
       <p:sp>
         <p:nvSpPr>
           <p:cNvPr id="2" name="Rectangle 1"/>
@@ -3159,6 +3161,7 @@
           <a:lstStyle/>
           <a:p>
             <a:pPr algn="ctr"/>
+            <a:endParaRPr/>
           </a:p>
         </p:txBody>
       </p:sp>
@@ -3203,6 +3206,7 @@
           <a:lstStyle/>
           <a:p>
             <a:pPr algn="ctr"/>
+            <a:endParaRPr/>
           </a:p>
         </p:txBody>
       </p:sp>
@@ -3223,14 +3227,14 @@
           <a:noFill/>
         </p:spPr>
         <p:txBody>
-          <a:bodyPr wrap="none" lIns="0" rIns="0" tIns="0" bIns="0" anchor="t">
+          <a:bodyPr wrap="none" lIns="0" tIns="0" rIns="0" bIns="0" anchor="t">
             <a:spAutoFit/>
           </a:bodyPr>
           <a:lstStyle/>
           <a:p>
             <a:pPr algn="l"/>
             <a:r>
-              <a:rPr b="1" sz="1050" i="0" u="none">
+              <a:rPr sz="1050" b="1" i="0" u="none">
                 <a:solidFill>
                   <a:srgbClr val="F43F5E"/>
                 </a:solidFill>
@@ -3258,7 +3262,7 @@
           <a:noFill/>
         </p:spPr>
         <p:txBody>
-          <a:bodyPr wrap="square" lIns="0" rIns="0" tIns="0" bIns="0" anchor="t">
+          <a:bodyPr wrap="square" lIns="0" tIns="0" rIns="0" bIns="0" anchor="t">
             <a:spAutoFit/>
           </a:bodyPr>
           <a:lstStyle/>
@@ -3269,7 +3273,7 @@
               </a:lnSpc>
             </a:pPr>
             <a:r>
-              <a:rPr b="1" sz="3900" i="0" u="none">
+              <a:rPr sz="3900" b="1" i="0" u="none">
                 <a:solidFill>
                   <a:srgbClr val="FFFFFF"/>
                 </a:solidFill>
@@ -3278,7 +3282,7 @@
               <a:t>Modelado Numérico del Fenómeno </a:t>
             </a:r>
             <a:r>
-              <a:rPr b="1" sz="3900" i="0" u="none">
+              <a:rPr sz="3900" b="1" i="0" u="none">
                 <a:solidFill>
                   <a:srgbClr val="FB7185"/>
                 </a:solidFill>
@@ -3287,7 +3291,7 @@
               <a:t>'Rosa Pastel'</a:t>
             </a:r>
             <a:r>
-              <a:rPr b="1" sz="3900" i="0" u="none">
+              <a:rPr sz="3900" b="1" i="0" u="none">
                 <a:solidFill>
                   <a:srgbClr val="FFFFFF"/>
                 </a:solidFill>
@@ -3315,7 +3319,7 @@
           <a:noFill/>
         </p:spPr>
         <p:txBody>
-          <a:bodyPr wrap="square" lIns="0" rIns="0" tIns="0" bIns="0" anchor="t">
+          <a:bodyPr wrap="square" lIns="0" tIns="0" rIns="0" bIns="0" anchor="t">
             <a:spAutoFit/>
           </a:bodyPr>
           <a:lstStyle/>
@@ -3326,7 +3330,7 @@
               </a:lnSpc>
             </a:pPr>
             <a:r>
-              <a:rPr b="0" sz="1500" i="0" u="none">
+              <a:rPr sz="1500" b="0" i="0" u="none">
                 <a:solidFill>
                   <a:srgbClr val="94A3B8"/>
                 </a:solidFill>
@@ -3354,14 +3358,14 @@
           <a:noFill/>
         </p:spPr>
         <p:txBody>
-          <a:bodyPr wrap="none" lIns="0" rIns="0" tIns="0" bIns="0" anchor="t">
+          <a:bodyPr wrap="none" lIns="0" tIns="0" rIns="0" bIns="0" anchor="t">
             <a:spAutoFit/>
           </a:bodyPr>
           <a:lstStyle/>
           <a:p>
             <a:pPr algn="l"/>
             <a:r>
-              <a:rPr b="1" sz="1050" i="0" u="none">
+              <a:rPr sz="1050" b="1" i="0" u="none">
                 <a:solidFill>
                   <a:srgbClr val="94A3B8"/>
                 </a:solidFill>
@@ -3381,29 +3385,44 @@
         <p:spPr>
           <a:xfrm>
             <a:off x="10553700" y="533400"/>
-            <a:ext cx="1314450" cy="171450"/>
-          </a:xfrm>
-          <a:prstGeom prst="rect">
-            <a:avLst/>
-          </a:prstGeom>
-          <a:noFill/>
-        </p:spPr>
-        <p:txBody>
-          <a:bodyPr wrap="none" lIns="0" rIns="0" tIns="0" bIns="0" anchor="t">
+            <a:ext cx="634789" cy="161583"/>
+          </a:xfrm>
+          <a:prstGeom prst="rect">
+            <a:avLst/>
+          </a:prstGeom>
+          <a:noFill/>
+        </p:spPr>
+        <p:txBody>
+          <a:bodyPr wrap="none" lIns="0" tIns="0" rIns="0" bIns="0" anchor="t">
             <a:spAutoFit/>
           </a:bodyPr>
           <a:lstStyle/>
           <a:p>
             <a:pPr algn="l"/>
             <a:r>
-              <a:rPr b="1" sz="1050" i="0" u="none">
+              <a:rPr sz="1050" b="1" i="0" u="none" dirty="0">
                 <a:solidFill>
                   <a:srgbClr val="94A3B8"/>
                 </a:solidFill>
                 <a:latin typeface="Plus Jakarta Sans"/>
               </a:rPr>
-              <a:t>Comisión 46324</a:t>
-            </a:r>
+              <a:t>Comisión </a:t>
+            </a:r>
+            <a:r>
+              <a:rPr lang="en-US" sz="1050" b="1" dirty="0">
+                <a:solidFill>
+                  <a:srgbClr val="94A3B8"/>
+                </a:solidFill>
+                <a:latin typeface="Plus Jakarta Sans"/>
+              </a:rPr>
+              <a:t>G</a:t>
+            </a:r>
+            <a:endParaRPr sz="1050" b="1" i="0" u="none" dirty="0">
+              <a:solidFill>
+                <a:srgbClr val="94A3B8"/>
+              </a:solidFill>
+              <a:latin typeface="Plus Jakarta Sans"/>
+            </a:endParaRPr>
           </a:p>
         </p:txBody>
       </p:sp>
@@ -3424,14 +3443,14 @@
           <a:noFill/>
         </p:spPr>
         <p:txBody>
-          <a:bodyPr wrap="none" lIns="0" rIns="0" tIns="0" bIns="0" anchor="t">
+          <a:bodyPr wrap="none" lIns="0" tIns="0" rIns="0" bIns="0" anchor="t">
             <a:spAutoFit/>
           </a:bodyPr>
           <a:lstStyle/>
           <a:p>
             <a:pPr algn="l"/>
             <a:r>
-              <a:rPr b="1" sz="1050" i="0" u="none">
+              <a:rPr sz="1050" b="1" i="0" u="none">
                 <a:solidFill>
                   <a:srgbClr val="F43F5E"/>
                 </a:solidFill>
@@ -3459,14 +3478,14 @@
           <a:noFill/>
         </p:spPr>
         <p:txBody>
-          <a:bodyPr wrap="none" lIns="0" rIns="0" tIns="0" bIns="0" anchor="t">
+          <a:bodyPr wrap="none" lIns="0" tIns="0" rIns="0" bIns="0" anchor="t">
             <a:spAutoFit/>
           </a:bodyPr>
           <a:lstStyle/>
           <a:p>
             <a:pPr algn="l"/>
             <a:r>
-              <a:rPr b="1" sz="1350" i="0" u="none">
+              <a:rPr sz="1350" b="1" i="0" u="none">
                 <a:solidFill>
                   <a:srgbClr val="E2E8F0"/>
                 </a:solidFill>
@@ -3494,14 +3513,14 @@
           <a:noFill/>
         </p:spPr>
         <p:txBody>
-          <a:bodyPr wrap="none" lIns="0" rIns="0" tIns="0" bIns="0" anchor="t">
+          <a:bodyPr wrap="none" lIns="0" tIns="0" rIns="0" bIns="0" anchor="t">
             <a:spAutoFit/>
           </a:bodyPr>
           <a:lstStyle/>
           <a:p>
             <a:pPr algn="r"/>
             <a:r>
-              <a:rPr b="1" sz="1050" i="0" u="none">
+              <a:rPr sz="1050" b="1" i="0" u="none">
                 <a:solidFill>
                   <a:srgbClr val="94A3B8"/>
                 </a:solidFill>
@@ -3529,14 +3548,14 @@
           <a:noFill/>
         </p:spPr>
         <p:txBody>
-          <a:bodyPr wrap="none" lIns="0" rIns="0" tIns="0" bIns="0" anchor="t">
+          <a:bodyPr wrap="none" lIns="0" tIns="0" rIns="0" bIns="0" anchor="t">
             <a:spAutoFit/>
           </a:bodyPr>
           <a:lstStyle/>
           <a:p>
             <a:pPr algn="r"/>
             <a:r>
-              <a:rPr b="0" sz="1350" i="0" u="none">
+              <a:rPr sz="1350" b="0" i="0" u="none">
                 <a:solidFill>
                   <a:srgbClr val="CBD5E1"/>
                 </a:solidFill>
@@ -3556,7 +3575,7 @@
 </file>
 
 <file path=ppt/slides/slide10.xml><?xml version="1.0" encoding="utf-8"?>
-<p:sld xmlns:a="http://schemas.openxmlformats.org/drawingml/2006/main" xmlns:p="http://schemas.openxmlformats.org/presentationml/2006/main" xmlns:r="http://schemas.openxmlformats.org/officeDocument/2006/relationships">
+<p:sld xmlns:a="http://schemas.openxmlformats.org/drawingml/2006/main" xmlns:r="http://schemas.openxmlformats.org/officeDocument/2006/relationships" xmlns:p="http://schemas.openxmlformats.org/presentationml/2006/main">
   <p:cSld>
     <p:bg>
       <p:bgPr>
@@ -3572,7 +3591,14 @@
         <p:cNvGrpSpPr/>
         <p:nvPr/>
       </p:nvGrpSpPr>
-      <p:grpSpPr/>
+      <p:grpSpPr>
+        <a:xfrm>
+          <a:off x="0" y="0"/>
+          <a:ext cx="0" cy="0"/>
+          <a:chOff x="0" y="0"/>
+          <a:chExt cx="0" cy="0"/>
+        </a:xfrm>
+      </p:grpSpPr>
       <p:sp>
         <p:nvSpPr>
           <p:cNvPr id="5" name="TextBox 4"/>
@@ -3590,14 +3616,14 @@
           <a:noFill/>
         </p:spPr>
         <p:txBody>
-          <a:bodyPr wrap="none" lIns="0" rIns="0" tIns="0" bIns="0" anchor="t">
+          <a:bodyPr wrap="none" lIns="0" tIns="0" rIns="0" bIns="0" anchor="t">
             <a:spAutoFit/>
           </a:bodyPr>
           <a:lstStyle/>
           <a:p>
             <a:pPr algn="l"/>
             <a:r>
-              <a:rPr b="1" sz="1050" i="0" u="none">
+              <a:rPr sz="1050" b="1" i="0" u="none">
                 <a:solidFill>
                   <a:srgbClr val="7C3AED"/>
                 </a:solidFill>
@@ -3625,7 +3651,7 @@
           <a:noFill/>
         </p:spPr>
         <p:txBody>
-          <a:bodyPr wrap="none" lIns="0" rIns="0" tIns="0" bIns="0" anchor="t">
+          <a:bodyPr wrap="none" lIns="0" tIns="0" rIns="0" bIns="0" anchor="t">
             <a:spAutoFit/>
           </a:bodyPr>
           <a:lstStyle/>
@@ -3636,7 +3662,7 @@
               </a:lnSpc>
             </a:pPr>
             <a:r>
-              <a:rPr b="1" sz="2550" i="0" u="none">
+              <a:rPr sz="2550" b="1" i="0" u="none">
                 <a:solidFill>
                   <a:srgbClr val="0F172A"/>
                 </a:solidFill>
@@ -3676,7 +3702,7 @@
               <a:buChar char="•"/>
             </a:pPr>
             <a:r>
-              <a:rPr b="0" sz="1500" i="0" u="none">
+              <a:rPr sz="1500" b="0" i="0" u="none">
                 <a:solidFill>
                   <a:srgbClr val="475569"/>
                 </a:solidFill>
@@ -3693,7 +3719,7 @@
               <a:buChar char="•"/>
             </a:pPr>
             <a:r>
-              <a:rPr b="0" sz="1500" i="0" u="none">
+              <a:rPr sz="1500" b="0" i="0" u="none">
                 <a:solidFill>
                   <a:srgbClr val="475569"/>
                 </a:solidFill>
@@ -3710,7 +3736,7 @@
               <a:buChar char="•"/>
             </a:pPr>
             <a:r>
-              <a:rPr b="0" sz="1500" i="0" u="none">
+              <a:rPr sz="1500" b="0" i="0" u="none">
                 <a:solidFill>
                   <a:srgbClr val="475569"/>
                 </a:solidFill>
@@ -3727,7 +3753,7 @@
               <a:buChar char="•"/>
             </a:pPr>
             <a:r>
-              <a:rPr b="0" sz="1500" i="0" u="none">
+              <a:rPr sz="1500" b="0" i="0" u="none">
                 <a:solidFill>
                   <a:srgbClr val="475569"/>
                 </a:solidFill>
@@ -3747,7 +3773,7 @@
           <p:nvPr/>
         </p:nvPicPr>
         <p:blipFill>
-          <a:blip r:embed="rId4"/>
+          <a:blip r:embed="rId2"/>
           <a:stretch>
             <a:fillRect/>
           </a:stretch>
@@ -3771,7 +3797,7 @@
 </file>
 
 <file path=ppt/slides/slide11.xml><?xml version="1.0" encoding="utf-8"?>
-<p:sld xmlns:a="http://schemas.openxmlformats.org/drawingml/2006/main" xmlns:p="http://schemas.openxmlformats.org/presentationml/2006/main" xmlns:r="http://schemas.openxmlformats.org/officeDocument/2006/relationships">
+<p:sld xmlns:a="http://schemas.openxmlformats.org/drawingml/2006/main" xmlns:r="http://schemas.openxmlformats.org/officeDocument/2006/relationships" xmlns:p="http://schemas.openxmlformats.org/presentationml/2006/main">
   <p:cSld>
     <p:bg>
       <p:bgPr>
@@ -3787,7 +3813,14 @@
         <p:cNvGrpSpPr/>
         <p:nvPr/>
       </p:nvGrpSpPr>
-      <p:grpSpPr/>
+      <p:grpSpPr>
+        <a:xfrm>
+          <a:off x="0" y="0"/>
+          <a:ext cx="0" cy="0"/>
+          <a:chOff x="0" y="0"/>
+          <a:chExt cx="0" cy="0"/>
+        </a:xfrm>
+      </p:grpSpPr>
       <p:sp>
         <p:nvSpPr>
           <p:cNvPr id="2" name="Rounded Rectangle 1"/>
@@ -3831,6 +3864,7 @@
           <a:lstStyle/>
           <a:p>
             <a:pPr algn="ctr"/>
+            <a:endParaRPr/>
           </a:p>
         </p:txBody>
       </p:sp>
@@ -3877,6 +3911,7 @@
           <a:lstStyle/>
           <a:p>
             <a:pPr algn="ctr"/>
+            <a:endParaRPr/>
           </a:p>
         </p:txBody>
       </p:sp>
@@ -3923,6 +3958,7 @@
           <a:lstStyle/>
           <a:p>
             <a:pPr algn="ctr"/>
+            <a:endParaRPr/>
           </a:p>
         </p:txBody>
       </p:sp>
@@ -3969,6 +4005,7 @@
           <a:lstStyle/>
           <a:p>
             <a:pPr algn="ctr"/>
+            <a:endParaRPr/>
           </a:p>
         </p:txBody>
       </p:sp>
@@ -4181,14 +4218,14 @@
           <a:noFill/>
         </p:spPr>
         <p:txBody>
-          <a:bodyPr wrap="none" lIns="0" rIns="0" tIns="0" bIns="0" anchor="t">
+          <a:bodyPr wrap="none" lIns="0" tIns="0" rIns="0" bIns="0" anchor="t">
             <a:spAutoFit/>
           </a:bodyPr>
           <a:lstStyle/>
           <a:p>
             <a:pPr algn="l"/>
             <a:r>
-              <a:rPr b="1" sz="1050" i="0" u="none">
+              <a:rPr sz="1050" b="1" i="0" u="none">
                 <a:solidFill>
                   <a:srgbClr val="E11D48"/>
                 </a:solidFill>
@@ -4216,7 +4253,7 @@
           <a:noFill/>
         </p:spPr>
         <p:txBody>
-          <a:bodyPr wrap="none" lIns="0" rIns="0" tIns="0" bIns="0" anchor="t">
+          <a:bodyPr wrap="none" lIns="0" tIns="0" rIns="0" bIns="0" anchor="t">
             <a:spAutoFit/>
           </a:bodyPr>
           <a:lstStyle/>
@@ -4227,7 +4264,7 @@
               </a:lnSpc>
             </a:pPr>
             <a:r>
-              <a:rPr b="1" sz="2550" i="0" u="none">
+              <a:rPr sz="2550" b="1" i="0" u="none">
                 <a:solidFill>
                   <a:srgbClr val="0F172A"/>
                 </a:solidFill>
@@ -4255,14 +4292,14 @@
           <a:noFill/>
         </p:spPr>
         <p:txBody>
-          <a:bodyPr wrap="none" lIns="0" rIns="0" tIns="0" bIns="0" anchor="t">
+          <a:bodyPr wrap="none" lIns="0" tIns="0" rIns="0" bIns="0" anchor="t">
             <a:spAutoFit/>
           </a:bodyPr>
           <a:lstStyle/>
           <a:p>
             <a:pPr algn="l"/>
             <a:r>
-              <a:rPr b="1" sz="1600" i="0" u="none">
+              <a:rPr sz="1600" b="1" i="0" u="none">
                 <a:solidFill>
                   <a:srgbClr val="0F172A"/>
                 </a:solidFill>
@@ -4290,14 +4327,14 @@
           <a:noFill/>
         </p:spPr>
         <p:txBody>
-          <a:bodyPr wrap="square" lIns="0" rIns="0" tIns="0" bIns="0" anchor="t">
+          <a:bodyPr wrap="square" lIns="0" tIns="0" rIns="0" bIns="0" anchor="t">
             <a:spAutoFit/>
           </a:bodyPr>
           <a:lstStyle/>
           <a:p>
             <a:pPr algn="l"/>
             <a:r>
-              <a:rPr b="0" sz="1500" i="0" u="none">
+              <a:rPr sz="1500" b="0" i="0" u="none">
                 <a:solidFill>
                   <a:srgbClr val="475569"/>
                 </a:solidFill>
@@ -4325,14 +4362,14 @@
           <a:noFill/>
         </p:spPr>
         <p:txBody>
-          <a:bodyPr wrap="none" lIns="0" rIns="0" tIns="0" bIns="0" anchor="t">
+          <a:bodyPr wrap="none" lIns="0" tIns="0" rIns="0" bIns="0" anchor="t">
             <a:spAutoFit/>
           </a:bodyPr>
           <a:lstStyle/>
           <a:p>
             <a:pPr algn="l"/>
             <a:r>
-              <a:rPr b="1" sz="1600" i="0" u="none">
+              <a:rPr sz="1600" b="1" i="0" u="none">
                 <a:solidFill>
                   <a:srgbClr val="0F172A"/>
                 </a:solidFill>
@@ -4360,14 +4397,14 @@
           <a:noFill/>
         </p:spPr>
         <p:txBody>
-          <a:bodyPr wrap="square" lIns="0" rIns="0" tIns="0" bIns="0" anchor="t">
+          <a:bodyPr wrap="square" lIns="0" tIns="0" rIns="0" bIns="0" anchor="t">
             <a:spAutoFit/>
           </a:bodyPr>
           <a:lstStyle/>
           <a:p>
             <a:pPr algn="l"/>
             <a:r>
-              <a:rPr b="0" sz="1500" i="0" u="none">
+              <a:rPr sz="1500" b="0" i="0" u="none">
                 <a:solidFill>
                   <a:srgbClr val="475569"/>
                 </a:solidFill>
@@ -4395,14 +4432,14 @@
           <a:noFill/>
         </p:spPr>
         <p:txBody>
-          <a:bodyPr wrap="none" lIns="0" rIns="0" tIns="0" bIns="0" anchor="t">
+          <a:bodyPr wrap="none" lIns="0" tIns="0" rIns="0" bIns="0" anchor="t">
             <a:spAutoFit/>
           </a:bodyPr>
           <a:lstStyle/>
           <a:p>
             <a:pPr algn="l"/>
             <a:r>
-              <a:rPr b="1" sz="1600" i="0" u="none">
+              <a:rPr sz="1600" b="1" i="0" u="none">
                 <a:solidFill>
                   <a:srgbClr val="0F172A"/>
                 </a:solidFill>
@@ -4430,14 +4467,14 @@
           <a:noFill/>
         </p:spPr>
         <p:txBody>
-          <a:bodyPr wrap="square" lIns="0" rIns="0" tIns="0" bIns="0" anchor="t">
+          <a:bodyPr wrap="square" lIns="0" tIns="0" rIns="0" bIns="0" anchor="t">
             <a:spAutoFit/>
           </a:bodyPr>
           <a:lstStyle/>
           <a:p>
             <a:pPr algn="l"/>
             <a:r>
-              <a:rPr b="0" sz="1500" i="0" u="none">
+              <a:rPr sz="1500" b="0" i="0" u="none">
                 <a:solidFill>
                   <a:srgbClr val="475569"/>
                 </a:solidFill>
@@ -4465,14 +4502,14 @@
           <a:noFill/>
         </p:spPr>
         <p:txBody>
-          <a:bodyPr wrap="none" lIns="0" rIns="0" tIns="0" bIns="0" anchor="t">
+          <a:bodyPr wrap="none" lIns="0" tIns="0" rIns="0" bIns="0" anchor="t">
             <a:spAutoFit/>
           </a:bodyPr>
           <a:lstStyle/>
           <a:p>
             <a:pPr algn="l"/>
             <a:r>
-              <a:rPr b="1" sz="1600" i="0" u="none">
+              <a:rPr sz="1600" b="1" i="0" u="none">
                 <a:solidFill>
                   <a:srgbClr val="0F172A"/>
                 </a:solidFill>
@@ -4500,14 +4537,14 @@
           <a:noFill/>
         </p:spPr>
         <p:txBody>
-          <a:bodyPr wrap="square" lIns="0" rIns="0" tIns="0" bIns="0" anchor="t">
+          <a:bodyPr wrap="square" lIns="0" tIns="0" rIns="0" bIns="0" anchor="t">
             <a:spAutoFit/>
           </a:bodyPr>
           <a:lstStyle/>
           <a:p>
             <a:pPr algn="l"/>
             <a:r>
-              <a:rPr b="0" sz="1500" i="0" u="none">
+              <a:rPr sz="1500" b="0" i="0" u="none">
                 <a:solidFill>
                   <a:srgbClr val="475569"/>
                 </a:solidFill>
@@ -4527,7 +4564,7 @@
 </file>
 
 <file path=ppt/slides/slide12.xml><?xml version="1.0" encoding="utf-8"?>
-<p:sld xmlns:a="http://schemas.openxmlformats.org/drawingml/2006/main" xmlns:p="http://schemas.openxmlformats.org/presentationml/2006/main" xmlns:r="http://schemas.openxmlformats.org/officeDocument/2006/relationships">
+<p:sld xmlns:a="http://schemas.openxmlformats.org/drawingml/2006/main" xmlns:r="http://schemas.openxmlformats.org/officeDocument/2006/relationships" xmlns:p="http://schemas.openxmlformats.org/presentationml/2006/main">
   <p:cSld>
     <p:bg>
       <p:bgPr>
@@ -4543,7 +4580,14 @@
         <p:cNvGrpSpPr/>
         <p:nvPr/>
       </p:nvGrpSpPr>
-      <p:grpSpPr/>
+      <p:grpSpPr>
+        <a:xfrm>
+          <a:off x="0" y="0"/>
+          <a:ext cx="0" cy="0"/>
+          <a:chOff x="0" y="0"/>
+          <a:chExt cx="0" cy="0"/>
+        </a:xfrm>
+      </p:grpSpPr>
       <p:sp>
         <p:nvSpPr>
           <p:cNvPr id="2" name="Rounded Rectangle 1"/>
@@ -4587,6 +4631,7 @@
           <a:lstStyle/>
           <a:p>
             <a:pPr algn="ctr"/>
+            <a:endParaRPr/>
           </a:p>
         </p:txBody>
       </p:sp>
@@ -4633,6 +4678,7 @@
           <a:lstStyle/>
           <a:p>
             <a:pPr algn="ctr"/>
+            <a:endParaRPr/>
           </a:p>
         </p:txBody>
       </p:sp>
@@ -4679,6 +4725,7 @@
           <a:lstStyle/>
           <a:p>
             <a:pPr algn="ctr"/>
+            <a:endParaRPr/>
           </a:p>
         </p:txBody>
       </p:sp>
@@ -4723,6 +4770,7 @@
           <a:lstStyle/>
           <a:p>
             <a:pPr algn="ctr"/>
+            <a:endParaRPr/>
           </a:p>
         </p:txBody>
       </p:sp>
@@ -4767,6 +4815,7 @@
           <a:lstStyle/>
           <a:p>
             <a:pPr algn="ctr"/>
+            <a:endParaRPr/>
           </a:p>
         </p:txBody>
       </p:sp>
@@ -4811,6 +4860,7 @@
           <a:lstStyle/>
           <a:p>
             <a:pPr algn="ctr"/>
+            <a:endParaRPr/>
           </a:p>
         </p:txBody>
       </p:sp>
@@ -4855,6 +4905,7 @@
           <a:lstStyle/>
           <a:p>
             <a:pPr algn="ctr"/>
+            <a:endParaRPr/>
           </a:p>
         </p:txBody>
       </p:sp>
@@ -4875,14 +4926,14 @@
           <a:noFill/>
         </p:spPr>
         <p:txBody>
-          <a:bodyPr wrap="none" lIns="0" rIns="0" tIns="0" bIns="0" anchor="t">
+          <a:bodyPr wrap="none" lIns="0" tIns="0" rIns="0" bIns="0" anchor="t">
             <a:spAutoFit/>
           </a:bodyPr>
           <a:lstStyle/>
           <a:p>
             <a:pPr algn="l"/>
             <a:r>
-              <a:rPr b="1" sz="1050" i="0" u="none">
+              <a:rPr sz="1050" b="1" i="0" u="none">
                 <a:solidFill>
                   <a:srgbClr val="E11D48"/>
                 </a:solidFill>
@@ -4910,7 +4961,7 @@
           <a:noFill/>
         </p:spPr>
         <p:txBody>
-          <a:bodyPr wrap="none" lIns="0" rIns="0" tIns="0" bIns="0" anchor="t">
+          <a:bodyPr wrap="none" lIns="0" tIns="0" rIns="0" bIns="0" anchor="t">
             <a:spAutoFit/>
           </a:bodyPr>
           <a:lstStyle/>
@@ -4921,7 +4972,7 @@
               </a:lnSpc>
             </a:pPr>
             <a:r>
-              <a:rPr b="1" sz="2550" i="0" u="none">
+              <a:rPr sz="2550" b="1" i="0" u="none">
                 <a:solidFill>
                   <a:srgbClr val="0F172A"/>
                 </a:solidFill>
@@ -4949,7 +5000,7 @@
           <a:noFill/>
         </p:spPr>
         <p:txBody>
-          <a:bodyPr wrap="none" lIns="0" rIns="0" tIns="0" bIns="0" anchor="t">
+          <a:bodyPr wrap="none" lIns="0" tIns="0" rIns="0" bIns="0" anchor="t">
             <a:spAutoFit/>
           </a:bodyPr>
           <a:lstStyle/>
@@ -4960,7 +5011,7 @@
               </a:lnSpc>
             </a:pPr>
             <a:r>
-              <a:rPr b="1" sz="3600" i="0" u="none">
+              <a:rPr sz="3600" b="1" i="0" u="none">
                 <a:solidFill>
                   <a:srgbClr val="E11D48"/>
                 </a:solidFill>
@@ -4988,14 +5039,14 @@
           <a:noFill/>
         </p:spPr>
         <p:txBody>
-          <a:bodyPr wrap="none" lIns="0" rIns="0" tIns="0" bIns="0" anchor="t">
+          <a:bodyPr wrap="none" lIns="0" tIns="0" rIns="0" bIns="0" anchor="t">
             <a:spAutoFit/>
           </a:bodyPr>
           <a:lstStyle/>
           <a:p>
             <a:pPr algn="ctr"/>
             <a:r>
-              <a:rPr b="1" sz="1200" i="0" u="none">
+              <a:rPr sz="1200" b="1" i="0" u="none">
                 <a:solidFill>
                   <a:srgbClr val="475569"/>
                 </a:solidFill>
@@ -5023,7 +5074,7 @@
           <a:noFill/>
         </p:spPr>
         <p:txBody>
-          <a:bodyPr wrap="none" lIns="0" rIns="0" tIns="0" bIns="0" anchor="t">
+          <a:bodyPr wrap="none" lIns="0" tIns="0" rIns="0" bIns="0" anchor="t">
             <a:spAutoFit/>
           </a:bodyPr>
           <a:lstStyle/>
@@ -5034,7 +5085,7 @@
               </a:lnSpc>
             </a:pPr>
             <a:r>
-              <a:rPr b="1" sz="3600" i="0" u="none">
+              <a:rPr sz="3600" b="1" i="0" u="none">
                 <a:solidFill>
                   <a:srgbClr val="0284C7"/>
                 </a:solidFill>
@@ -5062,14 +5113,14 @@
           <a:noFill/>
         </p:spPr>
         <p:txBody>
-          <a:bodyPr wrap="none" lIns="0" rIns="0" tIns="0" bIns="0" anchor="t">
+          <a:bodyPr wrap="none" lIns="0" tIns="0" rIns="0" bIns="0" anchor="t">
             <a:spAutoFit/>
           </a:bodyPr>
           <a:lstStyle/>
           <a:p>
             <a:pPr algn="ctr"/>
             <a:r>
-              <a:rPr b="1" sz="1200" i="0" u="none">
+              <a:rPr sz="1200" b="1" i="0" u="none">
                 <a:solidFill>
                   <a:srgbClr val="475569"/>
                 </a:solidFill>
@@ -5097,7 +5148,7 @@
           <a:noFill/>
         </p:spPr>
         <p:txBody>
-          <a:bodyPr wrap="none" lIns="0" rIns="0" tIns="0" bIns="0" anchor="t">
+          <a:bodyPr wrap="none" lIns="0" tIns="0" rIns="0" bIns="0" anchor="t">
             <a:spAutoFit/>
           </a:bodyPr>
           <a:lstStyle/>
@@ -5108,7 +5159,7 @@
               </a:lnSpc>
             </a:pPr>
             <a:r>
-              <a:rPr b="1" sz="3600" i="0" u="none">
+              <a:rPr sz="3600" b="1" i="0" u="none">
                 <a:solidFill>
                   <a:srgbClr val="16A34A"/>
                 </a:solidFill>
@@ -5136,14 +5187,14 @@
           <a:noFill/>
         </p:spPr>
         <p:txBody>
-          <a:bodyPr wrap="none" lIns="0" rIns="0" tIns="0" bIns="0" anchor="t">
+          <a:bodyPr wrap="none" lIns="0" tIns="0" rIns="0" bIns="0" anchor="t">
             <a:spAutoFit/>
           </a:bodyPr>
           <a:lstStyle/>
           <a:p>
             <a:pPr algn="ctr"/>
             <a:r>
-              <a:rPr b="1" sz="1200" i="0" u="none">
+              <a:rPr sz="1200" b="1" i="0" u="none">
                 <a:solidFill>
                   <a:srgbClr val="475569"/>
                 </a:solidFill>
@@ -5171,14 +5222,14 @@
           <a:noFill/>
         </p:spPr>
         <p:txBody>
-          <a:bodyPr wrap="none" lIns="0" rIns="0" tIns="0" bIns="0" anchor="t">
+          <a:bodyPr wrap="none" lIns="0" tIns="0" rIns="0" bIns="0" anchor="t">
             <a:spAutoFit/>
           </a:bodyPr>
           <a:lstStyle/>
           <a:p>
             <a:pPr algn="l"/>
             <a:r>
-              <a:rPr b="1" sz="1350" i="0" u="none">
+              <a:rPr sz="1350" b="1" i="0" u="none">
                 <a:solidFill>
                   <a:srgbClr val="0F172A"/>
                 </a:solidFill>
@@ -5206,14 +5257,14 @@
           <a:noFill/>
         </p:spPr>
         <p:txBody>
-          <a:bodyPr wrap="square" lIns="0" rIns="0" tIns="0" bIns="0" anchor="t">
+          <a:bodyPr wrap="square" lIns="0" tIns="0" rIns="0" bIns="0" anchor="t">
             <a:spAutoFit/>
           </a:bodyPr>
           <a:lstStyle/>
           <a:p>
             <a:pPr algn="l"/>
             <a:r>
-              <a:rPr b="0" sz="1350" i="0" u="none">
+              <a:rPr sz="1350" b="0" i="0" u="none">
                 <a:solidFill>
                   <a:srgbClr val="64748B"/>
                 </a:solidFill>
@@ -5241,14 +5292,14 @@
           <a:noFill/>
         </p:spPr>
         <p:txBody>
-          <a:bodyPr wrap="none" lIns="0" rIns="0" tIns="0" bIns="0" anchor="t">
+          <a:bodyPr wrap="none" lIns="0" tIns="0" rIns="0" bIns="0" anchor="t">
             <a:spAutoFit/>
           </a:bodyPr>
           <a:lstStyle/>
           <a:p>
             <a:pPr algn="l"/>
             <a:r>
-              <a:rPr b="1" sz="1350" i="0" u="none">
+              <a:rPr sz="1350" b="1" i="0" u="none">
                 <a:solidFill>
                   <a:srgbClr val="0F172A"/>
                 </a:solidFill>
@@ -5276,14 +5327,14 @@
           <a:noFill/>
         </p:spPr>
         <p:txBody>
-          <a:bodyPr wrap="square" lIns="0" rIns="0" tIns="0" bIns="0" anchor="t">
+          <a:bodyPr wrap="square" lIns="0" tIns="0" rIns="0" bIns="0" anchor="t">
             <a:spAutoFit/>
           </a:bodyPr>
           <a:lstStyle/>
           <a:p>
             <a:pPr algn="l"/>
             <a:r>
-              <a:rPr b="0" sz="1350" i="0" u="none">
+              <a:rPr sz="1350" b="0" i="0" u="none">
                 <a:solidFill>
                   <a:srgbClr val="64748B"/>
                 </a:solidFill>
@@ -5296,7 +5347,7 @@
       </p:sp>
       <p:sp>
         <p:nvSpPr>
-          <p:cNvPr id="5" name="Rectangle 4"/>
+          <p:cNvPr id="21" name="Rectangle 4"/>
           <p:cNvSpPr/>
           <p:nvPr/>
         </p:nvSpPr>
@@ -5335,12 +5386,13 @@
           <a:lstStyle/>
           <a:p>
             <a:pPr algn="ctr"/>
-          </a:p>
-        </p:txBody>
-      </p:sp>
-      <p:sp>
-        <p:nvSpPr>
-          <p:cNvPr id="7" name="Rectangle 6"/>
+            <a:endParaRPr/>
+          </a:p>
+        </p:txBody>
+      </p:sp>
+      <p:sp>
+        <p:nvSpPr>
+          <p:cNvPr id="22" name="Rectangle 6"/>
           <p:cNvSpPr/>
           <p:nvPr/>
         </p:nvSpPr>
@@ -5379,12 +5431,13 @@
           <a:lstStyle/>
           <a:p>
             <a:pPr algn="ctr"/>
-          </a:p>
-        </p:txBody>
-      </p:sp>
-      <p:sp>
-        <p:nvSpPr>
-          <p:cNvPr id="17" name="TextBox 16"/>
+            <a:endParaRPr/>
+          </a:p>
+        </p:txBody>
+      </p:sp>
+      <p:sp>
+        <p:nvSpPr>
+          <p:cNvPr id="23" name="TextBox 16"/>
           <p:cNvSpPr txBox="1"/>
           <p:nvPr/>
         </p:nvSpPr>
@@ -5399,14 +5452,14 @@
           <a:noFill/>
         </p:spPr>
         <p:txBody>
-          <a:bodyPr wrap="none" lIns="0" rIns="0" tIns="0" bIns="0" anchor="t">
+          <a:bodyPr wrap="none" lIns="0" tIns="0" rIns="0" bIns="0" anchor="t">
             <a:spAutoFit/>
           </a:bodyPr>
           <a:lstStyle/>
           <a:p>
             <a:pPr algn="l"/>
             <a:r>
-              <a:rPr b="1" sz="1350" i="0" u="none">
+              <a:rPr sz="1350" b="1" i="0" u="none">
                 <a:solidFill>
                   <a:srgbClr val="0F172A"/>
                 </a:solidFill>
@@ -5419,7 +5472,7 @@
       </p:sp>
       <p:sp>
         <p:nvSpPr>
-          <p:cNvPr id="18" name="TextBox 17"/>
+          <p:cNvPr id="24" name="TextBox 17"/>
           <p:cNvSpPr txBox="1"/>
           <p:nvPr/>
         </p:nvSpPr>
@@ -5434,14 +5487,14 @@
           <a:noFill/>
         </p:spPr>
         <p:txBody>
-          <a:bodyPr wrap="square" lIns="0" rIns="0" tIns="0" bIns="0" anchor="t">
+          <a:bodyPr wrap="square" lIns="0" tIns="0" rIns="0" bIns="0" anchor="t">
             <a:spAutoFit/>
           </a:bodyPr>
           <a:lstStyle/>
           <a:p>
             <a:pPr algn="l"/>
             <a:r>
-              <a:rPr b="0" sz="1350" i="0" u="none">
+              <a:rPr sz="1350" b="0" i="0" u="none">
                 <a:solidFill>
                   <a:srgbClr val="64748B"/>
                 </a:solidFill>
@@ -5461,7 +5514,7 @@
 </file>
 
 <file path=ppt/slides/slide13.xml><?xml version="1.0" encoding="utf-8"?>
-<p:sld xmlns:a="http://schemas.openxmlformats.org/drawingml/2006/main" xmlns:p="http://schemas.openxmlformats.org/presentationml/2006/main" xmlns:r="http://schemas.openxmlformats.org/officeDocument/2006/relationships">
+<p:sld xmlns:a="http://schemas.openxmlformats.org/drawingml/2006/main" xmlns:r="http://schemas.openxmlformats.org/officeDocument/2006/relationships" xmlns:p="http://schemas.openxmlformats.org/presentationml/2006/main">
   <p:cSld>
     <p:bg>
       <p:bgPr>
@@ -5477,7 +5530,14 @@
         <p:cNvGrpSpPr/>
         <p:nvPr/>
       </p:nvGrpSpPr>
-      <p:grpSpPr/>
+      <p:grpSpPr>
+        <a:xfrm>
+          <a:off x="0" y="0"/>
+          <a:ext cx="0" cy="0"/>
+          <a:chOff x="0" y="0"/>
+          <a:chExt cx="0" cy="0"/>
+        </a:xfrm>
+      </p:grpSpPr>
       <p:sp>
         <p:nvSpPr>
           <p:cNvPr id="2" name="Rounded Rectangle 1"/>
@@ -5521,6 +5581,7 @@
           <a:lstStyle/>
           <a:p>
             <a:pPr algn="ctr"/>
+            <a:endParaRPr/>
           </a:p>
         </p:txBody>
       </p:sp>
@@ -5541,14 +5602,14 @@
           <a:noFill/>
         </p:spPr>
         <p:txBody>
-          <a:bodyPr wrap="none" lIns="0" rIns="0" tIns="0" bIns="0" anchor="t">
+          <a:bodyPr wrap="none" lIns="0" tIns="0" rIns="0" bIns="0" anchor="t">
             <a:spAutoFit/>
           </a:bodyPr>
           <a:lstStyle/>
           <a:p>
             <a:pPr algn="ctr"/>
             <a:r>
-              <a:rPr b="1" sz="1050" i="0" u="none">
+              <a:rPr sz="1050" b="1" i="0" u="none">
                 <a:solidFill>
                   <a:srgbClr val="FB7185"/>
                 </a:solidFill>
@@ -5576,7 +5637,7 @@
           <a:noFill/>
         </p:spPr>
         <p:txBody>
-          <a:bodyPr wrap="none" lIns="0" rIns="0" tIns="0" bIns="0" anchor="t">
+          <a:bodyPr wrap="none" lIns="0" tIns="0" rIns="0" bIns="0" anchor="t">
             <a:spAutoFit/>
           </a:bodyPr>
           <a:lstStyle/>
@@ -5587,7 +5648,7 @@
               </a:lnSpc>
             </a:pPr>
             <a:r>
-              <a:rPr b="1" sz="4800" i="0" u="none">
+              <a:rPr sz="4800" b="1" i="0" u="none">
                 <a:solidFill>
                   <a:srgbClr val="FFFFFF"/>
                 </a:solidFill>
@@ -5615,7 +5676,7 @@
           <a:noFill/>
         </p:spPr>
         <p:txBody>
-          <a:bodyPr wrap="square" lIns="0" rIns="0" tIns="0" bIns="0" anchor="t">
+          <a:bodyPr wrap="square" lIns="0" tIns="0" rIns="0" bIns="0" anchor="t">
             <a:spAutoFit/>
           </a:bodyPr>
           <a:lstStyle/>
@@ -5626,7 +5687,7 @@
               </a:lnSpc>
             </a:pPr>
             <a:r>
-              <a:rPr b="0" sz="1650" i="0" u="none">
+              <a:rPr sz="1650" b="0" i="0" u="none">
                 <a:solidFill>
                   <a:srgbClr val="94A3B8"/>
                 </a:solidFill>
@@ -5654,14 +5715,14 @@
           <a:noFill/>
         </p:spPr>
         <p:txBody>
-          <a:bodyPr wrap="none" lIns="0" rIns="0" tIns="0" bIns="0" anchor="t">
+          <a:bodyPr wrap="none" lIns="0" tIns="0" rIns="0" bIns="0" anchor="t">
             <a:spAutoFit/>
           </a:bodyPr>
           <a:lstStyle/>
           <a:p>
             <a:pPr algn="ctr"/>
             <a:r>
-              <a:rPr b="0" sz="1050" i="0" u="none">
+              <a:rPr sz="1050" b="0" i="0" u="none">
                 <a:solidFill>
                   <a:srgbClr val="64748B"/>
                 </a:solidFill>
@@ -5689,14 +5750,14 @@
           <a:noFill/>
         </p:spPr>
         <p:txBody>
-          <a:bodyPr wrap="none" lIns="0" rIns="0" tIns="0" bIns="0" anchor="t">
+          <a:bodyPr wrap="none" lIns="0" tIns="0" rIns="0" bIns="0" anchor="t">
             <a:spAutoFit/>
           </a:bodyPr>
           <a:lstStyle/>
           <a:p>
             <a:pPr algn="ctr"/>
             <a:r>
-              <a:rPr b="1" sz="1350" i="0" u="none">
+              <a:rPr sz="1350" b="1" i="0" u="none">
                 <a:solidFill>
                   <a:srgbClr val="E2E8F0"/>
                 </a:solidFill>
@@ -5724,14 +5785,14 @@
           <a:noFill/>
         </p:spPr>
         <p:txBody>
-          <a:bodyPr wrap="none" lIns="0" rIns="0" tIns="0" bIns="0" anchor="t">
+          <a:bodyPr wrap="none" lIns="0" tIns="0" rIns="0" bIns="0" anchor="t">
             <a:spAutoFit/>
           </a:bodyPr>
           <a:lstStyle/>
           <a:p>
             <a:pPr algn="ctr"/>
             <a:r>
-              <a:rPr b="1" sz="1350" i="0" u="none">
+              <a:rPr sz="1350" b="1" i="0" u="none">
                 <a:solidFill>
                   <a:srgbClr val="E2E8F0"/>
                 </a:solidFill>
@@ -5759,14 +5820,14 @@
           <a:noFill/>
         </p:spPr>
         <p:txBody>
-          <a:bodyPr wrap="none" lIns="0" rIns="0" tIns="0" bIns="0" anchor="t">
+          <a:bodyPr wrap="none" lIns="0" tIns="0" rIns="0" bIns="0" anchor="t">
             <a:spAutoFit/>
           </a:bodyPr>
           <a:lstStyle/>
           <a:p>
             <a:pPr algn="ctr"/>
             <a:r>
-              <a:rPr b="1" sz="1350" i="0" u="none">
+              <a:rPr sz="1350" b="1" i="0" u="none">
                 <a:solidFill>
                   <a:srgbClr val="E2E8F0"/>
                 </a:solidFill>
@@ -5786,7 +5847,7 @@
 </file>
 
 <file path=ppt/slides/slide14.xml><?xml version="1.0" encoding="utf-8"?>
-<p:sld xmlns:a="http://schemas.openxmlformats.org/drawingml/2006/main" xmlns:p="http://schemas.openxmlformats.org/presentationml/2006/main" xmlns:r="http://schemas.openxmlformats.org/officeDocument/2006/relationships">
+<p:sld xmlns:a="http://schemas.openxmlformats.org/drawingml/2006/main" xmlns:r="http://schemas.openxmlformats.org/officeDocument/2006/relationships" xmlns:p="http://schemas.openxmlformats.org/presentationml/2006/main">
   <p:cSld>
     <p:bg>
       <p:bgPr>
@@ -5802,7 +5863,14 @@
         <p:cNvGrpSpPr/>
         <p:nvPr/>
       </p:nvGrpSpPr>
-      <p:grpSpPr/>
+      <p:grpSpPr>
+        <a:xfrm>
+          <a:off x="0" y="0"/>
+          <a:ext cx="0" cy="0"/>
+          <a:chOff x="0" y="0"/>
+          <a:chExt cx="0" cy="0"/>
+        </a:xfrm>
+      </p:grpSpPr>
       <p:sp>
         <p:nvSpPr>
           <p:cNvPr id="2" name="Rectangle 1"/>
@@ -5842,6 +5910,7 @@
           <a:lstStyle/>
           <a:p>
             <a:pPr algn="ctr"/>
+            <a:endParaRPr/>
           </a:p>
         </p:txBody>
       </p:sp>
@@ -5886,6 +5955,7 @@
           <a:lstStyle/>
           <a:p>
             <a:pPr algn="ctr"/>
+            <a:endParaRPr/>
           </a:p>
         </p:txBody>
       </p:sp>
@@ -5930,6 +6000,7 @@
           <a:lstStyle/>
           <a:p>
             <a:pPr algn="ctr"/>
+            <a:endParaRPr/>
           </a:p>
         </p:txBody>
       </p:sp>
@@ -5998,14 +6069,14 @@
           <a:noFill/>
         </p:spPr>
         <p:txBody>
-          <a:bodyPr wrap="none" lIns="0" rIns="0" tIns="0" bIns="0" anchor="t">
+          <a:bodyPr wrap="none" lIns="0" tIns="0" rIns="0" bIns="0" anchor="t">
             <a:spAutoFit/>
           </a:bodyPr>
           <a:lstStyle/>
           <a:p>
             <a:pPr algn="l"/>
             <a:r>
-              <a:rPr b="1" sz="1800" i="0" u="none">
+              <a:rPr sz="1800" b="1" i="0" u="none">
                 <a:solidFill>
                   <a:srgbClr val="F8FAFC"/>
                 </a:solidFill>
@@ -6033,14 +6104,14 @@
           <a:noFill/>
         </p:spPr>
         <p:txBody>
-          <a:bodyPr wrap="none" lIns="0" rIns="0" tIns="0" bIns="0" anchor="t">
+          <a:bodyPr wrap="none" lIns="0" tIns="0" rIns="0" bIns="0" anchor="t">
             <a:spAutoFit/>
           </a:bodyPr>
           <a:lstStyle/>
           <a:p>
             <a:pPr algn="l"/>
             <a:r>
-              <a:rPr b="0" sz="975" i="0" u="none">
+              <a:rPr sz="975" b="0" i="0" u="none">
                 <a:solidFill>
                   <a:srgbClr val="F8FAFC"/>
                 </a:solidFill>
@@ -6068,14 +6139,14 @@
           <a:noFill/>
         </p:spPr>
         <p:txBody>
-          <a:bodyPr wrap="none" lIns="0" rIns="0" tIns="0" bIns="0" anchor="t">
+          <a:bodyPr wrap="none" lIns="0" tIns="0" rIns="0" bIns="0" anchor="t">
             <a:spAutoFit/>
           </a:bodyPr>
           <a:lstStyle/>
           <a:p>
             <a:pPr algn="l"/>
             <a:r>
-              <a:rPr b="0" sz="1200" i="0" u="none">
+              <a:rPr sz="1200" b="0" i="0" u="none">
                 <a:solidFill>
                   <a:srgbClr val="F8FAFC"/>
                 </a:solidFill>
@@ -6084,7 +6155,7 @@
               <a:t>Source: </a:t>
             </a:r>
             <a:r>
-              <a:rPr b="0" sz="1200" i="0" u="none">
+              <a:rPr sz="1200" b="0" i="0" u="none">
                 <a:solidFill>
                   <a:srgbClr val="4F46E5"/>
                 </a:solidFill>
@@ -6112,14 +6183,14 @@
           <a:noFill/>
         </p:spPr>
         <p:txBody>
-          <a:bodyPr wrap="none" lIns="0" rIns="0" tIns="0" bIns="0" anchor="t">
+          <a:bodyPr wrap="none" lIns="0" tIns="0" rIns="0" bIns="0" anchor="t">
             <a:spAutoFit/>
           </a:bodyPr>
           <a:lstStyle/>
           <a:p>
             <a:pPr algn="l"/>
             <a:r>
-              <a:rPr b="0" sz="975" i="0" u="none">
+              <a:rPr sz="975" b="0" i="0" u="none">
                 <a:solidFill>
                   <a:srgbClr val="F8FAFC"/>
                 </a:solidFill>
@@ -6147,14 +6218,14 @@
           <a:noFill/>
         </p:spPr>
         <p:txBody>
-          <a:bodyPr wrap="none" lIns="0" rIns="0" tIns="0" bIns="0" anchor="t">
+          <a:bodyPr wrap="none" lIns="0" tIns="0" rIns="0" bIns="0" anchor="t">
             <a:spAutoFit/>
           </a:bodyPr>
           <a:lstStyle/>
           <a:p>
             <a:pPr algn="l"/>
             <a:r>
-              <a:rPr b="0" sz="1200" i="0" u="none">
+              <a:rPr sz="1200" b="0" i="0" u="none">
                 <a:solidFill>
                   <a:srgbClr val="F8FAFC"/>
                 </a:solidFill>
@@ -6163,7 +6234,7 @@
               <a:t>Source: </a:t>
             </a:r>
             <a:r>
-              <a:rPr b="0" sz="1200" i="0" u="none">
+              <a:rPr sz="1200" b="0" i="0" u="none">
                 <a:solidFill>
                   <a:srgbClr val="4F46E5"/>
                 </a:solidFill>
@@ -6183,7 +6254,7 @@
 </file>
 
 <file path=ppt/slides/slide2.xml><?xml version="1.0" encoding="utf-8"?>
-<p:sld xmlns:a="http://schemas.openxmlformats.org/drawingml/2006/main" xmlns:p="http://schemas.openxmlformats.org/presentationml/2006/main" xmlns:r="http://schemas.openxmlformats.org/officeDocument/2006/relationships">
+<p:sld xmlns:a="http://schemas.openxmlformats.org/drawingml/2006/main" xmlns:r="http://schemas.openxmlformats.org/officeDocument/2006/relationships" xmlns:p="http://schemas.openxmlformats.org/presentationml/2006/main">
   <p:cSld>
     <p:bg>
       <p:bgPr>
@@ -6199,7 +6270,14 @@
         <p:cNvGrpSpPr/>
         <p:nvPr/>
       </p:nvGrpSpPr>
-      <p:grpSpPr/>
+      <p:grpSpPr>
+        <a:xfrm>
+          <a:off x="0" y="0"/>
+          <a:ext cx="0" cy="0"/>
+          <a:chOff x="0" y="0"/>
+          <a:chExt cx="0" cy="0"/>
+        </a:xfrm>
+      </p:grpSpPr>
       <p:sp>
         <p:nvSpPr>
           <p:cNvPr id="2" name="Rounded Rectangle 1"/>
@@ -6243,6 +6321,7 @@
           <a:lstStyle/>
           <a:p>
             <a:pPr algn="ctr"/>
+            <a:endParaRPr/>
           </a:p>
         </p:txBody>
       </p:sp>
@@ -6289,6 +6368,7 @@
           <a:lstStyle/>
           <a:p>
             <a:pPr algn="ctr"/>
+            <a:endParaRPr/>
           </a:p>
         </p:txBody>
       </p:sp>
@@ -6335,6 +6415,7 @@
           <a:lstStyle/>
           <a:p>
             <a:pPr algn="ctr"/>
+            <a:endParaRPr/>
           </a:p>
         </p:txBody>
       </p:sp>
@@ -6475,14 +6556,14 @@
           <a:noFill/>
         </p:spPr>
         <p:txBody>
-          <a:bodyPr wrap="none" lIns="0" rIns="0" tIns="0" bIns="0" anchor="t">
+          <a:bodyPr wrap="none" lIns="0" tIns="0" rIns="0" bIns="0" anchor="t">
             <a:spAutoFit/>
           </a:bodyPr>
           <a:lstStyle/>
           <a:p>
             <a:pPr algn="l"/>
             <a:r>
-              <a:rPr b="1" sz="1050" i="0" u="none">
+              <a:rPr sz="1050" b="1" i="0" u="none">
                 <a:solidFill>
                   <a:srgbClr val="E11D48"/>
                 </a:solidFill>
@@ -6510,7 +6591,7 @@
           <a:noFill/>
         </p:spPr>
         <p:txBody>
-          <a:bodyPr wrap="none" lIns="0" rIns="0" tIns="0" bIns="0" anchor="t">
+          <a:bodyPr wrap="none" lIns="0" tIns="0" rIns="0" bIns="0" anchor="t">
             <a:spAutoFit/>
           </a:bodyPr>
           <a:lstStyle/>
@@ -6521,7 +6602,7 @@
               </a:lnSpc>
             </a:pPr>
             <a:r>
-              <a:rPr b="1" sz="2550" i="0" u="none">
+              <a:rPr sz="2550" b="1" i="0" u="none">
                 <a:solidFill>
                   <a:srgbClr val="0F172A"/>
                 </a:solidFill>
@@ -6549,14 +6630,14 @@
           <a:noFill/>
         </p:spPr>
         <p:txBody>
-          <a:bodyPr wrap="none" lIns="247650" rIns="0" tIns="0" bIns="0" anchor="t">
+          <a:bodyPr wrap="none" lIns="247650" tIns="0" rIns="0" bIns="0" anchor="t">
             <a:spAutoFit/>
           </a:bodyPr>
           <a:lstStyle/>
           <a:p>
             <a:pPr algn="l"/>
             <a:r>
-              <a:rPr b="1" sz="1350" i="0" u="none">
+              <a:rPr sz="1350" b="1" i="0" u="none">
                 <a:solidFill>
                   <a:srgbClr val="BE123C"/>
                 </a:solidFill>
@@ -6584,14 +6665,14 @@
           <a:noFill/>
         </p:spPr>
         <p:txBody>
-          <a:bodyPr wrap="none" lIns="0" rIns="0" tIns="0" bIns="0" anchor="t">
+          <a:bodyPr wrap="none" lIns="0" tIns="0" rIns="0" bIns="0" anchor="t">
             <a:spAutoFit/>
           </a:bodyPr>
           <a:lstStyle/>
           <a:p>
             <a:pPr algn="l"/>
             <a:r>
-              <a:rPr b="0" sz="1350" i="0" u="none">
+              <a:rPr sz="1350" b="0" i="0" u="none">
                 <a:solidFill>
                   <a:srgbClr val="475569"/>
                 </a:solidFill>
@@ -6619,14 +6700,14 @@
           <a:noFill/>
         </p:spPr>
         <p:txBody>
-          <a:bodyPr wrap="none" lIns="228600" rIns="0" tIns="0" bIns="0" anchor="t">
+          <a:bodyPr wrap="none" lIns="228600" tIns="0" rIns="0" bIns="0" anchor="t">
             <a:spAutoFit/>
           </a:bodyPr>
           <a:lstStyle/>
           <a:p>
             <a:pPr algn="l"/>
             <a:r>
-              <a:rPr b="1" sz="1350" i="0" u="none">
+              <a:rPr sz="1350" b="1" i="0" u="none">
                 <a:solidFill>
                   <a:srgbClr val="BE123C"/>
                 </a:solidFill>
@@ -6654,14 +6735,14 @@
           <a:noFill/>
         </p:spPr>
         <p:txBody>
-          <a:bodyPr wrap="none" lIns="0" rIns="0" tIns="0" bIns="0" anchor="t">
+          <a:bodyPr wrap="none" lIns="0" tIns="0" rIns="0" bIns="0" anchor="t">
             <a:spAutoFit/>
           </a:bodyPr>
           <a:lstStyle/>
           <a:p>
             <a:pPr algn="l"/>
             <a:r>
-              <a:rPr b="0" sz="1350" i="0" u="none">
+              <a:rPr sz="1350" b="0" i="0" u="none">
                 <a:solidFill>
                   <a:srgbClr val="475569"/>
                 </a:solidFill>
@@ -6689,14 +6770,14 @@
           <a:noFill/>
         </p:spPr>
         <p:txBody>
-          <a:bodyPr wrap="none" lIns="247650" rIns="0" tIns="0" bIns="0" anchor="t">
+          <a:bodyPr wrap="none" lIns="247650" tIns="0" rIns="0" bIns="0" anchor="t">
             <a:spAutoFit/>
           </a:bodyPr>
           <a:lstStyle/>
           <a:p>
             <a:pPr algn="l"/>
             <a:r>
-              <a:rPr b="1" sz="1350" i="0" u="none">
+              <a:rPr sz="1350" b="1" i="0" u="none">
                 <a:solidFill>
                   <a:srgbClr val="BE123C"/>
                 </a:solidFill>
@@ -6724,14 +6805,14 @@
           <a:noFill/>
         </p:spPr>
         <p:txBody>
-          <a:bodyPr wrap="none" lIns="0" rIns="0" tIns="0" bIns="0" anchor="t">
+          <a:bodyPr wrap="none" lIns="0" tIns="0" rIns="0" bIns="0" anchor="t">
             <a:spAutoFit/>
           </a:bodyPr>
           <a:lstStyle/>
           <a:p>
             <a:pPr algn="l"/>
             <a:r>
-              <a:rPr b="0" sz="1350" i="0" u="none">
+              <a:rPr sz="1350" b="0" i="0" u="none">
                 <a:solidFill>
                   <a:srgbClr val="475569"/>
                 </a:solidFill>
@@ -6751,7 +6832,7 @@
 </file>
 
 <file path=ppt/slides/slide3.xml><?xml version="1.0" encoding="utf-8"?>
-<p:sld xmlns:a="http://schemas.openxmlformats.org/drawingml/2006/main" xmlns:p="http://schemas.openxmlformats.org/presentationml/2006/main" xmlns:r="http://schemas.openxmlformats.org/officeDocument/2006/relationships">
+<p:sld xmlns:a="http://schemas.openxmlformats.org/drawingml/2006/main" xmlns:r="http://schemas.openxmlformats.org/officeDocument/2006/relationships" xmlns:p="http://schemas.openxmlformats.org/presentationml/2006/main">
   <p:cSld>
     <p:bg>
       <p:bgPr>
@@ -6767,7 +6848,14 @@
         <p:cNvGrpSpPr/>
         <p:nvPr/>
       </p:nvGrpSpPr>
-      <p:grpSpPr/>
+      <p:grpSpPr>
+        <a:xfrm>
+          <a:off x="0" y="0"/>
+          <a:ext cx="0" cy="0"/>
+          <a:chOff x="0" y="0"/>
+          <a:chExt cx="0" cy="0"/>
+        </a:xfrm>
+      </p:grpSpPr>
       <p:sp>
         <p:nvSpPr>
           <p:cNvPr id="2" name="Rounded Rectangle 1"/>
@@ -6811,6 +6899,7 @@
           <a:lstStyle/>
           <a:p>
             <a:pPr algn="ctr"/>
+            <a:endParaRPr/>
           </a:p>
         </p:txBody>
       </p:sp>
@@ -6857,6 +6946,7 @@
           <a:lstStyle/>
           <a:p>
             <a:pPr algn="ctr"/>
+            <a:endParaRPr/>
           </a:p>
         </p:txBody>
       </p:sp>
@@ -6903,6 +6993,7 @@
           <a:lstStyle/>
           <a:p>
             <a:pPr algn="ctr"/>
+            <a:endParaRPr/>
           </a:p>
         </p:txBody>
       </p:sp>
@@ -7043,14 +7134,14 @@
           <a:noFill/>
         </p:spPr>
         <p:txBody>
-          <a:bodyPr wrap="none" lIns="0" rIns="0" tIns="0" bIns="0" anchor="t">
+          <a:bodyPr wrap="none" lIns="0" tIns="0" rIns="0" bIns="0" anchor="t">
             <a:spAutoFit/>
           </a:bodyPr>
           <a:lstStyle/>
           <a:p>
             <a:pPr algn="l"/>
             <a:r>
-              <a:rPr b="1" sz="1050" i="0" u="none">
+              <a:rPr sz="1050" b="1" i="0" u="none">
                 <a:solidFill>
                   <a:srgbClr val="0284C7"/>
                 </a:solidFill>
@@ -7078,7 +7169,7 @@
           <a:noFill/>
         </p:spPr>
         <p:txBody>
-          <a:bodyPr wrap="none" lIns="0" rIns="0" tIns="0" bIns="0" anchor="t">
+          <a:bodyPr wrap="none" lIns="0" tIns="0" rIns="0" bIns="0" anchor="t">
             <a:spAutoFit/>
           </a:bodyPr>
           <a:lstStyle/>
@@ -7089,7 +7180,7 @@
               </a:lnSpc>
             </a:pPr>
             <a:r>
-              <a:rPr b="1" sz="2550" i="0" u="none">
+              <a:rPr sz="2550" b="1" i="0" u="none">
                 <a:solidFill>
                   <a:srgbClr val="0F172A"/>
                 </a:solidFill>
@@ -7117,14 +7208,14 @@
           <a:noFill/>
         </p:spPr>
         <p:txBody>
-          <a:bodyPr wrap="none" lIns="247650" rIns="0" tIns="0" bIns="0" anchor="t">
+          <a:bodyPr wrap="none" lIns="247650" tIns="0" rIns="0" bIns="0" anchor="t">
             <a:spAutoFit/>
           </a:bodyPr>
           <a:lstStyle/>
           <a:p>
             <a:pPr algn="l"/>
             <a:r>
-              <a:rPr b="1" sz="1350" i="0" u="none">
+              <a:rPr sz="1350" b="1" i="0" u="none">
                 <a:solidFill>
                   <a:srgbClr val="0369A1"/>
                 </a:solidFill>
@@ -7152,14 +7243,14 @@
           <a:noFill/>
         </p:spPr>
         <p:txBody>
-          <a:bodyPr wrap="square" lIns="0" rIns="0" tIns="0" bIns="0" anchor="t">
+          <a:bodyPr wrap="square" lIns="0" tIns="0" rIns="0" bIns="0" anchor="t">
             <a:spAutoFit/>
           </a:bodyPr>
           <a:lstStyle/>
           <a:p>
             <a:pPr algn="l"/>
             <a:r>
-              <a:rPr b="0" sz="1350" i="0" u="none">
+              <a:rPr sz="1350" b="0" i="0" u="none">
                 <a:solidFill>
                   <a:srgbClr val="475569"/>
                 </a:solidFill>
@@ -7187,14 +7278,14 @@
           <a:noFill/>
         </p:spPr>
         <p:txBody>
-          <a:bodyPr wrap="none" lIns="295275" rIns="0" tIns="0" bIns="0" anchor="t">
+          <a:bodyPr wrap="none" lIns="295275" tIns="0" rIns="0" bIns="0" anchor="t">
             <a:spAutoFit/>
           </a:bodyPr>
           <a:lstStyle/>
           <a:p>
             <a:pPr algn="l"/>
             <a:r>
-              <a:rPr b="1" sz="1350" i="0" u="none">
+              <a:rPr sz="1350" b="1" i="0" u="none">
                 <a:solidFill>
                   <a:srgbClr val="0369A1"/>
                 </a:solidFill>
@@ -7222,14 +7313,14 @@
           <a:noFill/>
         </p:spPr>
         <p:txBody>
-          <a:bodyPr wrap="none" lIns="0" rIns="0" tIns="0" bIns="0" anchor="t">
+          <a:bodyPr wrap="none" lIns="0" tIns="0" rIns="0" bIns="0" anchor="t">
             <a:spAutoFit/>
           </a:bodyPr>
           <a:lstStyle/>
           <a:p>
             <a:pPr algn="l"/>
             <a:r>
-              <a:rPr b="0" sz="1350" i="0" u="none">
+              <a:rPr sz="1350" b="0" i="0" u="none">
                 <a:solidFill>
                   <a:srgbClr val="475569"/>
                 </a:solidFill>
@@ -7257,14 +7348,14 @@
           <a:noFill/>
         </p:spPr>
         <p:txBody>
-          <a:bodyPr wrap="none" lIns="209550" rIns="0" tIns="0" bIns="0" anchor="t">
+          <a:bodyPr wrap="none" lIns="209550" tIns="0" rIns="0" bIns="0" anchor="t">
             <a:spAutoFit/>
           </a:bodyPr>
           <a:lstStyle/>
           <a:p>
             <a:pPr algn="l"/>
             <a:r>
-              <a:rPr b="1" sz="1350" i="0" u="none">
+              <a:rPr sz="1350" b="1" i="0" u="none">
                 <a:solidFill>
                   <a:srgbClr val="0369A1"/>
                 </a:solidFill>
@@ -7292,14 +7383,14 @@
           <a:noFill/>
         </p:spPr>
         <p:txBody>
-          <a:bodyPr wrap="none" lIns="0" rIns="0" tIns="0" bIns="0" anchor="t">
+          <a:bodyPr wrap="none" lIns="0" tIns="0" rIns="0" bIns="0" anchor="t">
             <a:spAutoFit/>
           </a:bodyPr>
           <a:lstStyle/>
           <a:p>
             <a:pPr algn="l"/>
             <a:r>
-              <a:rPr b="0" sz="1350" i="0" u="none">
+              <a:rPr sz="1350" b="0" i="0" u="none">
                 <a:solidFill>
                   <a:srgbClr val="475569"/>
                 </a:solidFill>
@@ -7319,7 +7410,7 @@
 </file>
 
 <file path=ppt/slides/slide4.xml><?xml version="1.0" encoding="utf-8"?>
-<p:sld xmlns:a="http://schemas.openxmlformats.org/drawingml/2006/main" xmlns:p="http://schemas.openxmlformats.org/presentationml/2006/main" xmlns:r="http://schemas.openxmlformats.org/officeDocument/2006/relationships">
+<p:sld xmlns:a="http://schemas.openxmlformats.org/drawingml/2006/main" xmlns:r="http://schemas.openxmlformats.org/officeDocument/2006/relationships" xmlns:p="http://schemas.openxmlformats.org/presentationml/2006/main">
   <p:cSld>
     <p:bg>
       <p:bgPr>
@@ -7335,7 +7426,14 @@
         <p:cNvGrpSpPr/>
         <p:nvPr/>
       </p:nvGrpSpPr>
-      <p:grpSpPr/>
+      <p:grpSpPr>
+        <a:xfrm>
+          <a:off x="0" y="0"/>
+          <a:ext cx="0" cy="0"/>
+          <a:chOff x="0" y="0"/>
+          <a:chExt cx="0" cy="0"/>
+        </a:xfrm>
+      </p:grpSpPr>
       <p:pic>
         <p:nvPicPr>
           <p:cNvPr id="2" name="Picture 1" descr="image.png"/>
@@ -7377,14 +7475,14 @@
           <a:noFill/>
         </p:spPr>
         <p:txBody>
-          <a:bodyPr wrap="none" lIns="0" rIns="0" tIns="0" bIns="0" anchor="t">
+          <a:bodyPr wrap="none" lIns="0" tIns="0" rIns="0" bIns="0" anchor="t">
             <a:spAutoFit/>
           </a:bodyPr>
           <a:lstStyle/>
           <a:p>
             <a:pPr algn="l"/>
             <a:r>
-              <a:rPr b="1" sz="1200" i="0" u="none">
+              <a:rPr sz="1200" b="1" i="0" u="none">
                 <a:solidFill>
                   <a:srgbClr val="475569"/>
                 </a:solidFill>
@@ -7393,7 +7491,7 @@
               <a:t>Fuente: </a:t>
             </a:r>
             <a:r>
-              <a:rPr b="1" sz="1200" i="0" u="none">
+              <a:rPr sz="1200" b="1" i="0" u="none">
                 <a:solidFill>
                   <a:srgbClr val="0F172A"/>
                 </a:solidFill>
@@ -7421,14 +7519,14 @@
           <a:noFill/>
         </p:spPr>
         <p:txBody>
-          <a:bodyPr wrap="none" lIns="0" rIns="0" tIns="0" bIns="0" anchor="t">
+          <a:bodyPr wrap="none" lIns="0" tIns="0" rIns="0" bIns="0" anchor="t">
             <a:spAutoFit/>
           </a:bodyPr>
           <a:lstStyle/>
           <a:p>
             <a:pPr algn="l"/>
             <a:r>
-              <a:rPr b="1" sz="1200" i="0" u="none">
+              <a:rPr sz="1200" b="1" i="0" u="none">
                 <a:solidFill>
                   <a:srgbClr val="475569"/>
                 </a:solidFill>
@@ -7437,7 +7535,7 @@
               <a:t>Acumulado 26/01-14/12/2023: </a:t>
             </a:r>
             <a:r>
-              <a:rPr b="1" sz="1200" i="0" u="none">
+              <a:rPr sz="1200" b="1" i="0" u="none">
                 <a:solidFill>
                   <a:srgbClr val="E11D48"/>
                 </a:solidFill>
@@ -7465,14 +7563,14 @@
           <a:noFill/>
         </p:spPr>
         <p:txBody>
-          <a:bodyPr wrap="none" lIns="0" rIns="0" tIns="0" bIns="0" anchor="t">
+          <a:bodyPr wrap="none" lIns="0" tIns="0" rIns="0" bIns="0" anchor="t">
             <a:spAutoFit/>
           </a:bodyPr>
           <a:lstStyle/>
           <a:p>
             <a:pPr algn="l"/>
             <a:r>
-              <a:rPr b="1" sz="1050" i="0" u="none">
+              <a:rPr sz="1050" b="1" i="0" u="none">
                 <a:solidFill>
                   <a:srgbClr val="E11D48"/>
                 </a:solidFill>
@@ -7500,7 +7598,7 @@
           <a:noFill/>
         </p:spPr>
         <p:txBody>
-          <a:bodyPr wrap="none" lIns="0" rIns="0" tIns="0" bIns="0" anchor="t">
+          <a:bodyPr wrap="none" lIns="0" tIns="0" rIns="0" bIns="0" anchor="t">
             <a:spAutoFit/>
           </a:bodyPr>
           <a:lstStyle/>
@@ -7511,7 +7609,7 @@
               </a:lnSpc>
             </a:pPr>
             <a:r>
-              <a:rPr b="1" sz="2550" i="0" u="none">
+              <a:rPr sz="2550" b="1" i="0" u="none">
                 <a:solidFill>
                   <a:srgbClr val="0F172A"/>
                 </a:solidFill>
@@ -7531,7 +7629,7 @@
           <p:nvPr/>
         </p:nvPicPr>
         <p:blipFill>
-          <a:blip r:embed="rId4"/>
+          <a:blip r:embed="rId3"/>
           <a:stretch>
             <a:fillRect/>
           </a:stretch>
@@ -7555,7 +7653,7 @@
 </file>
 
 <file path=ppt/slides/slide5.xml><?xml version="1.0" encoding="utf-8"?>
-<p:sld xmlns:a="http://schemas.openxmlformats.org/drawingml/2006/main" xmlns:p="http://schemas.openxmlformats.org/presentationml/2006/main" xmlns:r="http://schemas.openxmlformats.org/officeDocument/2006/relationships">
+<p:sld xmlns:a="http://schemas.openxmlformats.org/drawingml/2006/main" xmlns:r="http://schemas.openxmlformats.org/officeDocument/2006/relationships" xmlns:p="http://schemas.openxmlformats.org/presentationml/2006/main">
   <p:cSld>
     <p:bg>
       <p:bgPr>
@@ -7571,7 +7669,14 @@
         <p:cNvGrpSpPr/>
         <p:nvPr/>
       </p:nvGrpSpPr>
-      <p:grpSpPr/>
+      <p:grpSpPr>
+        <a:xfrm>
+          <a:off x="0" y="0"/>
+          <a:ext cx="0" cy="0"/>
+          <a:chOff x="0" y="0"/>
+          <a:chExt cx="0" cy="0"/>
+        </a:xfrm>
+      </p:grpSpPr>
       <p:sp>
         <p:nvSpPr>
           <p:cNvPr id="2" name="Rounded Rectangle 1"/>
@@ -7615,6 +7720,7 @@
           <a:lstStyle/>
           <a:p>
             <a:pPr algn="ctr"/>
+            <a:endParaRPr/>
           </a:p>
         </p:txBody>
       </p:sp>
@@ -7661,6 +7767,7 @@
           <a:lstStyle/>
           <a:p>
             <a:pPr algn="ctr"/>
+            <a:endParaRPr/>
           </a:p>
         </p:txBody>
       </p:sp>
@@ -7707,6 +7814,7 @@
           <a:lstStyle/>
           <a:p>
             <a:pPr algn="ctr"/>
+            <a:endParaRPr/>
           </a:p>
         </p:txBody>
       </p:sp>
@@ -7753,6 +7861,7 @@
           <a:lstStyle/>
           <a:p>
             <a:pPr algn="ctr"/>
+            <a:endParaRPr/>
           </a:p>
         </p:txBody>
       </p:sp>
@@ -7773,14 +7882,14 @@
           <a:noFill/>
         </p:spPr>
         <p:txBody>
-          <a:bodyPr wrap="none" lIns="0" rIns="0" tIns="0" bIns="0" anchor="t">
+          <a:bodyPr wrap="none" lIns="0" tIns="0" rIns="0" bIns="0" anchor="t">
             <a:spAutoFit/>
           </a:bodyPr>
           <a:lstStyle/>
           <a:p>
             <a:pPr algn="l"/>
             <a:r>
-              <a:rPr b="1" sz="1050" i="0" u="none">
+              <a:rPr sz="1050" b="1" i="0" u="none">
                 <a:solidFill>
                   <a:srgbClr val="E11D48"/>
                 </a:solidFill>
@@ -7808,7 +7917,7 @@
           <a:noFill/>
         </p:spPr>
         <p:txBody>
-          <a:bodyPr wrap="none" lIns="0" rIns="0" tIns="0" bIns="0" anchor="t">
+          <a:bodyPr wrap="none" lIns="0" tIns="0" rIns="0" bIns="0" anchor="t">
             <a:spAutoFit/>
           </a:bodyPr>
           <a:lstStyle/>
@@ -7819,7 +7928,7 @@
               </a:lnSpc>
             </a:pPr>
             <a:r>
-              <a:rPr b="1" sz="2550" i="0" u="none">
+              <a:rPr sz="2550" b="1" i="0" u="none">
                 <a:solidFill>
                   <a:srgbClr val="0F172A"/>
                 </a:solidFill>
@@ -7847,14 +7956,14 @@
           <a:noFill/>
         </p:spPr>
         <p:txBody>
-          <a:bodyPr wrap="none" lIns="0" rIns="0" tIns="0" bIns="0" anchor="t">
+          <a:bodyPr wrap="none" lIns="0" tIns="0" rIns="0" bIns="0" anchor="t">
             <a:spAutoFit/>
           </a:bodyPr>
           <a:lstStyle/>
           <a:p>
             <a:pPr algn="l"/>
             <a:r>
-              <a:rPr b="1" sz="1600" i="0" u="none">
+              <a:rPr sz="1600" b="1" i="0" u="none">
                 <a:solidFill>
                   <a:srgbClr val="0F172A"/>
                 </a:solidFill>
@@ -7882,14 +7991,14 @@
           <a:noFill/>
         </p:spPr>
         <p:txBody>
-          <a:bodyPr wrap="square" lIns="0" rIns="0" tIns="0" bIns="0" anchor="t">
+          <a:bodyPr wrap="square" lIns="0" tIns="0" rIns="0" bIns="0" anchor="t">
             <a:spAutoFit/>
           </a:bodyPr>
           <a:lstStyle/>
           <a:p>
             <a:pPr algn="l"/>
             <a:r>
-              <a:rPr b="0" sz="1500" i="0" u="none">
+              <a:rPr sz="1500" b="0" i="0" u="none">
                 <a:solidFill>
                   <a:srgbClr val="475569"/>
                 </a:solidFill>
@@ -7917,14 +8026,14 @@
           <a:noFill/>
         </p:spPr>
         <p:txBody>
-          <a:bodyPr wrap="none" lIns="0" rIns="0" tIns="0" bIns="0" anchor="t">
+          <a:bodyPr wrap="none" lIns="0" tIns="0" rIns="0" bIns="0" anchor="t">
             <a:spAutoFit/>
           </a:bodyPr>
           <a:lstStyle/>
           <a:p>
             <a:pPr algn="l"/>
             <a:r>
-              <a:rPr b="1" sz="1600" i="0" u="none">
+              <a:rPr sz="1600" b="1" i="0" u="none">
                 <a:solidFill>
                   <a:srgbClr val="0F172A"/>
                 </a:solidFill>
@@ -7952,14 +8061,14 @@
           <a:noFill/>
         </p:spPr>
         <p:txBody>
-          <a:bodyPr wrap="square" lIns="0" rIns="0" tIns="0" bIns="0" anchor="t">
+          <a:bodyPr wrap="square" lIns="0" tIns="0" rIns="0" bIns="0" anchor="t">
             <a:spAutoFit/>
           </a:bodyPr>
           <a:lstStyle/>
           <a:p>
             <a:pPr algn="l"/>
             <a:r>
-              <a:rPr b="0" sz="1500" i="0" u="none">
+              <a:rPr sz="1500" b="0" i="0" u="none">
                 <a:solidFill>
                   <a:srgbClr val="475569"/>
                 </a:solidFill>
@@ -7987,14 +8096,14 @@
           <a:noFill/>
         </p:spPr>
         <p:txBody>
-          <a:bodyPr wrap="none" lIns="0" rIns="0" tIns="0" bIns="0" anchor="t">
+          <a:bodyPr wrap="none" lIns="0" tIns="0" rIns="0" bIns="0" anchor="t">
             <a:spAutoFit/>
           </a:bodyPr>
           <a:lstStyle/>
           <a:p>
             <a:pPr algn="l"/>
             <a:r>
-              <a:rPr b="1" sz="1600" i="0" u="none">
+              <a:rPr sz="1600" b="1" i="0" u="none">
                 <a:solidFill>
                   <a:srgbClr val="0F172A"/>
                 </a:solidFill>
@@ -8022,14 +8131,14 @@
           <a:noFill/>
         </p:spPr>
         <p:txBody>
-          <a:bodyPr wrap="square" lIns="0" rIns="0" tIns="0" bIns="0" anchor="t">
+          <a:bodyPr wrap="square" lIns="0" tIns="0" rIns="0" bIns="0" anchor="t">
             <a:spAutoFit/>
           </a:bodyPr>
           <a:lstStyle/>
           <a:p>
             <a:pPr algn="l"/>
             <a:r>
-              <a:rPr b="0" sz="1500" i="0" u="none">
+              <a:rPr sz="1500" b="0" i="0" u="none">
                 <a:solidFill>
                   <a:srgbClr val="475569"/>
                 </a:solidFill>
@@ -8057,14 +8166,14 @@
           <a:noFill/>
         </p:spPr>
         <p:txBody>
-          <a:bodyPr wrap="none" lIns="0" rIns="0" tIns="0" bIns="0" anchor="t">
+          <a:bodyPr wrap="none" lIns="0" tIns="0" rIns="0" bIns="0" anchor="t">
             <a:spAutoFit/>
           </a:bodyPr>
           <a:lstStyle/>
           <a:p>
             <a:pPr algn="l"/>
             <a:r>
-              <a:rPr b="1" sz="1600" i="0" u="none">
+              <a:rPr sz="1600" b="1" i="0" u="none">
                 <a:solidFill>
                   <a:srgbClr val="0F172A"/>
                 </a:solidFill>
@@ -8092,14 +8201,14 @@
           <a:noFill/>
         </p:spPr>
         <p:txBody>
-          <a:bodyPr wrap="square" lIns="0" rIns="0" tIns="0" bIns="0" anchor="t">
+          <a:bodyPr wrap="square" lIns="0" tIns="0" rIns="0" bIns="0" anchor="t">
             <a:spAutoFit/>
           </a:bodyPr>
           <a:lstStyle/>
           <a:p>
             <a:pPr algn="l"/>
             <a:r>
-              <a:rPr b="0" sz="1500" i="0" u="none">
+              <a:rPr sz="1500" b="0" i="0" u="none">
                 <a:solidFill>
                   <a:srgbClr val="475569"/>
                 </a:solidFill>
@@ -8127,14 +8236,14 @@
           <a:noFill/>
         </p:spPr>
         <p:txBody>
-          <a:bodyPr wrap="square" lIns="0" rIns="0" tIns="0" bIns="0" anchor="t">
+          <a:bodyPr wrap="square" lIns="0" tIns="0" rIns="0" bIns="0" anchor="t">
             <a:spAutoFit/>
           </a:bodyPr>
           <a:lstStyle/>
           <a:p>
             <a:pPr algn="l"/>
             <a:r>
-              <a:rPr b="0" sz="1600" i="0" u="none">
+              <a:rPr sz="1600" b="0" i="0" u="none">
                 <a:solidFill>
                   <a:srgbClr val="475569"/>
                 </a:solidFill>
@@ -8162,14 +8271,14 @@
           <a:noFill/>
         </p:spPr>
         <p:txBody>
-          <a:bodyPr wrap="square" lIns="0" rIns="0" tIns="0" bIns="0" anchor="t">
+          <a:bodyPr wrap="square" lIns="0" tIns="0" rIns="0" bIns="0" anchor="t">
             <a:spAutoFit/>
           </a:bodyPr>
           <a:lstStyle/>
           <a:p>
             <a:pPr algn="l"/>
             <a:r>
-              <a:rPr b="0" sz="1600" i="0" u="none">
+              <a:rPr sz="1600" b="0" i="0" u="none">
                 <a:solidFill>
                   <a:srgbClr val="475569"/>
                 </a:solidFill>
@@ -8178,7 +8287,7 @@
               <a:t>Raíces: Bisección (cerrado, segura) vs. Newton-Raphson (abierto, rápido).</a:t>
             </a:r>
             <a:br>
-              <a:rPr b="0" sz="1600" i="0" u="none">
+              <a:rPr sz="1600" b="0" i="0" u="none">
                 <a:solidFill>
                   <a:srgbClr val="475569"/>
                 </a:solidFill>
@@ -8186,7 +8295,7 @@
               </a:rPr>
             </a:br>
             <a:r>
-              <a:rPr b="0" sz="1600" i="0" u="none">
+              <a:rPr sz="1600" b="0" i="0" u="none">
                 <a:solidFill>
                   <a:srgbClr val="475569"/>
                 </a:solidFill>
@@ -8206,7 +8315,7 @@
 </file>
 
 <file path=ppt/slides/slide6.xml><?xml version="1.0" encoding="utf-8"?>
-<p:sld xmlns:a="http://schemas.openxmlformats.org/drawingml/2006/main" xmlns:p="http://schemas.openxmlformats.org/presentationml/2006/main" xmlns:r="http://schemas.openxmlformats.org/officeDocument/2006/relationships">
+<p:sld xmlns:a="http://schemas.openxmlformats.org/drawingml/2006/main" xmlns:r="http://schemas.openxmlformats.org/officeDocument/2006/relationships" xmlns:p="http://schemas.openxmlformats.org/presentationml/2006/main">
   <p:cSld>
     <p:bg>
       <p:bgPr>
@@ -8222,7 +8331,14 @@
         <p:cNvGrpSpPr/>
         <p:nvPr/>
       </p:nvGrpSpPr>
-      <p:grpSpPr/>
+      <p:grpSpPr>
+        <a:xfrm>
+          <a:off x="0" y="0"/>
+          <a:ext cx="0" cy="0"/>
+          <a:chOff x="0" y="0"/>
+          <a:chExt cx="0" cy="0"/>
+        </a:xfrm>
+      </p:grpSpPr>
       <p:sp>
         <p:nvSpPr>
           <p:cNvPr id="2" name="Rounded Rectangle 1"/>
@@ -8266,6 +8382,7 @@
           <a:lstStyle/>
           <a:p>
             <a:pPr algn="ctr"/>
+            <a:endParaRPr/>
           </a:p>
         </p:txBody>
       </p:sp>
@@ -8312,6 +8429,7 @@
           <a:lstStyle/>
           <a:p>
             <a:pPr algn="ctr"/>
+            <a:endParaRPr/>
           </a:p>
         </p:txBody>
       </p:sp>
@@ -8358,6 +8476,7 @@
           <a:lstStyle/>
           <a:p>
             <a:pPr algn="ctr"/>
+            <a:endParaRPr/>
           </a:p>
         </p:txBody>
       </p:sp>
@@ -8404,6 +8523,7 @@
           <a:lstStyle/>
           <a:p>
             <a:pPr algn="ctr"/>
+            <a:endParaRPr/>
           </a:p>
         </p:txBody>
       </p:sp>
@@ -8424,14 +8544,14 @@
           <a:noFill/>
         </p:spPr>
         <p:txBody>
-          <a:bodyPr wrap="none" lIns="0" rIns="0" tIns="0" bIns="0" anchor="t">
+          <a:bodyPr wrap="none" lIns="0" tIns="0" rIns="0" bIns="0" anchor="t">
             <a:spAutoFit/>
           </a:bodyPr>
           <a:lstStyle/>
           <a:p>
             <a:pPr algn="l"/>
             <a:r>
-              <a:rPr b="1" sz="1050" i="0" u="none">
+              <a:rPr sz="1050" b="1" i="0" u="none">
                 <a:solidFill>
                   <a:srgbClr val="E11D48"/>
                 </a:solidFill>
@@ -8459,7 +8579,7 @@
           <a:noFill/>
         </p:spPr>
         <p:txBody>
-          <a:bodyPr wrap="none" lIns="0" rIns="0" tIns="0" bIns="0" anchor="t">
+          <a:bodyPr wrap="none" lIns="0" tIns="0" rIns="0" bIns="0" anchor="t">
             <a:spAutoFit/>
           </a:bodyPr>
           <a:lstStyle/>
@@ -8470,7 +8590,7 @@
               </a:lnSpc>
             </a:pPr>
             <a:r>
-              <a:rPr b="1" sz="2800" i="0" u="none">
+              <a:rPr sz="2800" b="1" i="0" u="none">
                 <a:solidFill>
                   <a:srgbClr val="0F172A"/>
                 </a:solidFill>
@@ -8498,14 +8618,14 @@
           <a:noFill/>
         </p:spPr>
         <p:txBody>
-          <a:bodyPr wrap="none" lIns="0" rIns="0" tIns="0" bIns="0" anchor="t">
+          <a:bodyPr wrap="none" lIns="0" tIns="0" rIns="0" bIns="0" anchor="t">
             <a:spAutoFit/>
           </a:bodyPr>
           <a:lstStyle/>
           <a:p>
             <a:pPr algn="l"/>
             <a:r>
-              <a:rPr b="1" sz="1050" i="0" u="none">
+              <a:rPr sz="1050" b="1" i="0" u="none">
                 <a:solidFill>
                   <a:srgbClr val="FB7185"/>
                 </a:solidFill>
@@ -8533,14 +8653,14 @@
           <a:noFill/>
         </p:spPr>
         <p:txBody>
-          <a:bodyPr wrap="none" lIns="0" rIns="0" tIns="0" bIns="0" anchor="t">
+          <a:bodyPr wrap="none" lIns="0" tIns="0" rIns="0" bIns="0" anchor="t">
             <a:spAutoFit/>
           </a:bodyPr>
           <a:lstStyle/>
           <a:p>
             <a:pPr algn="l"/>
             <a:r>
-              <a:rPr b="1" sz="1900" i="0" u="none">
+              <a:rPr sz="1900" b="1" i="0" u="none">
                 <a:solidFill>
                   <a:srgbClr val="F8FAFC"/>
                 </a:solidFill>
@@ -8569,14 +8689,14 @@
           <a:noFill/>
         </p:spPr>
         <p:txBody>
-          <a:bodyPr wrap="none" lIns="0" rIns="0" tIns="0" bIns="0" anchor="t">
+          <a:bodyPr wrap="none" lIns="0" tIns="0" rIns="0" bIns="0" anchor="t">
             <a:spAutoFit/>
           </a:bodyPr>
           <a:lstStyle/>
           <a:p>
             <a:pPr algn="l"/>
             <a:r>
-              <a:rPr b="0" sz="1400" i="0" u="none">
+              <a:rPr sz="1400" b="0" i="0" u="none">
                 <a:solidFill>
                   <a:srgbClr val="94A3B8"/>
                 </a:solidFill>
@@ -8604,14 +8724,14 @@
           <a:noFill/>
         </p:spPr>
         <p:txBody>
-          <a:bodyPr wrap="none" lIns="0" rIns="0" tIns="0" bIns="0" anchor="t">
+          <a:bodyPr wrap="none" lIns="0" tIns="0" rIns="0" bIns="0" anchor="t">
             <a:spAutoFit/>
           </a:bodyPr>
           <a:lstStyle/>
           <a:p>
             <a:pPr algn="l"/>
             <a:r>
-              <a:rPr b="1" sz="1050" i="0" u="none">
+              <a:rPr sz="1050" b="1" i="0" u="none">
                 <a:solidFill>
                   <a:srgbClr val="64748B"/>
                 </a:solidFill>
@@ -8639,7 +8759,7 @@
           <a:noFill/>
         </p:spPr>
         <p:txBody>
-          <a:bodyPr wrap="none" lIns="0" rIns="0" tIns="0" bIns="0" anchor="t">
+          <a:bodyPr wrap="none" lIns="0" tIns="0" rIns="0" bIns="0" anchor="t">
             <a:spAutoFit/>
           </a:bodyPr>
           <a:lstStyle/>
@@ -8650,7 +8770,7 @@
               </a:lnSpc>
             </a:pPr>
             <a:r>
-              <a:rPr b="1" sz="3000" i="0" u="none">
+              <a:rPr sz="3000" b="1" i="0" u="none">
                 <a:solidFill>
                   <a:srgbClr val="E11D48"/>
                 </a:solidFill>
@@ -8678,14 +8798,14 @@
           <a:noFill/>
         </p:spPr>
         <p:txBody>
-          <a:bodyPr wrap="none" lIns="0" rIns="0" tIns="0" bIns="0" anchor="t">
+          <a:bodyPr wrap="none" lIns="0" tIns="0" rIns="0" bIns="0" anchor="t">
             <a:spAutoFit/>
           </a:bodyPr>
           <a:lstStyle/>
           <a:p>
             <a:pPr algn="l"/>
             <a:r>
-              <a:rPr b="1" sz="1200" i="0" u="none">
+              <a:rPr sz="1200" b="1" i="0" u="none">
                 <a:solidFill>
                   <a:srgbClr val="334155"/>
                 </a:solidFill>
@@ -8713,14 +8833,14 @@
           <a:noFill/>
         </p:spPr>
         <p:txBody>
-          <a:bodyPr wrap="none" lIns="0" rIns="0" tIns="0" bIns="0" anchor="t">
+          <a:bodyPr wrap="none" lIns="0" tIns="0" rIns="0" bIns="0" anchor="t">
             <a:spAutoFit/>
           </a:bodyPr>
           <a:lstStyle/>
           <a:p>
             <a:pPr algn="l"/>
             <a:r>
-              <a:rPr b="1" sz="1050" i="0" u="none">
+              <a:rPr sz="1050" b="1" i="0" u="none">
                 <a:solidFill>
                   <a:srgbClr val="64748B"/>
                 </a:solidFill>
@@ -8748,7 +8868,7 @@
           <a:noFill/>
         </p:spPr>
         <p:txBody>
-          <a:bodyPr wrap="none" lIns="0" rIns="0" tIns="0" bIns="0" anchor="t">
+          <a:bodyPr wrap="none" lIns="0" tIns="0" rIns="0" bIns="0" anchor="t">
             <a:spAutoFit/>
           </a:bodyPr>
           <a:lstStyle/>
@@ -8759,7 +8879,7 @@
               </a:lnSpc>
             </a:pPr>
             <a:r>
-              <a:rPr b="1" sz="3000" i="0" u="none">
+              <a:rPr sz="3000" b="1" i="0" u="none">
                 <a:solidFill>
                   <a:srgbClr val="0F172A"/>
                 </a:solidFill>
@@ -8787,14 +8907,14 @@
           <a:noFill/>
         </p:spPr>
         <p:txBody>
-          <a:bodyPr wrap="none" lIns="0" rIns="0" tIns="0" bIns="0" anchor="t">
+          <a:bodyPr wrap="none" lIns="0" tIns="0" rIns="0" bIns="0" anchor="t">
             <a:spAutoFit/>
           </a:bodyPr>
           <a:lstStyle/>
           <a:p>
             <a:pPr algn="l"/>
             <a:r>
-              <a:rPr b="1" sz="1200" i="0" u="none">
+              <a:rPr sz="1200" b="1" i="0" u="none">
                 <a:solidFill>
                   <a:srgbClr val="334155"/>
                 </a:solidFill>
@@ -8822,14 +8942,14 @@
           <a:noFill/>
         </p:spPr>
         <p:txBody>
-          <a:bodyPr wrap="none" lIns="0" rIns="0" tIns="0" bIns="0" anchor="t">
+          <a:bodyPr wrap="none" lIns="0" tIns="0" rIns="0" bIns="0" anchor="t">
             <a:spAutoFit/>
           </a:bodyPr>
           <a:lstStyle/>
           <a:p>
             <a:pPr algn="l"/>
             <a:r>
-              <a:rPr b="1" sz="1050" i="0" u="none">
+              <a:rPr sz="1050" b="1" i="0" u="none">
                 <a:solidFill>
                   <a:srgbClr val="64748B"/>
                 </a:solidFill>
@@ -8857,7 +8977,7 @@
           <a:noFill/>
         </p:spPr>
         <p:txBody>
-          <a:bodyPr wrap="none" lIns="0" rIns="0" tIns="0" bIns="0" anchor="t">
+          <a:bodyPr wrap="none" lIns="0" tIns="0" rIns="0" bIns="0" anchor="t">
             <a:spAutoFit/>
           </a:bodyPr>
           <a:lstStyle/>
@@ -8868,7 +8988,7 @@
               </a:lnSpc>
             </a:pPr>
             <a:r>
-              <a:rPr b="1" sz="3000" i="0" u="none">
+              <a:rPr sz="3000" b="1" i="0" u="none">
                 <a:solidFill>
                   <a:srgbClr val="0284C7"/>
                 </a:solidFill>
@@ -8896,14 +9016,14 @@
           <a:noFill/>
         </p:spPr>
         <p:txBody>
-          <a:bodyPr wrap="none" lIns="0" rIns="0" tIns="0" bIns="0" anchor="t">
+          <a:bodyPr wrap="none" lIns="0" tIns="0" rIns="0" bIns="0" anchor="t">
             <a:spAutoFit/>
           </a:bodyPr>
           <a:lstStyle/>
           <a:p>
             <a:pPr algn="l"/>
             <a:r>
-              <a:rPr b="1" sz="1200" i="0" u="none">
+              <a:rPr sz="1200" b="1" i="0" u="none">
                 <a:solidFill>
                   <a:srgbClr val="334155"/>
                 </a:solidFill>
@@ -8924,7 +9044,7 @@
         </p:nvGraphicFramePr>
         <p:xfrm>
           <a:off x="822960" y="3072384"/>
-          <a:ext cx="10533888" cy="1280160"/>
+          <a:ext cx="10533888" cy="1472184"/>
         </p:xfrm>
         <a:graphic>
           <a:graphicData uri="http://schemas.openxmlformats.org/drawingml/2006/table">
@@ -8933,11 +9053,41 @@
                 <a:tableStyleId>{5C22544A-7EE6-4342-B048-85BDC9FD1C3A}</a:tableStyleId>
               </a:tblPr>
               <a:tblGrid>
-                <a:gridCol w="914400"/>
-                <a:gridCol w="2103120"/>
-                <a:gridCol w="2505456"/>
-                <a:gridCol w="2505456"/>
-                <a:gridCol w="2505456"/>
+                <a:gridCol w="914400">
+                  <a:extLst>
+                    <a:ext uri="{9D8B030D-6E8A-4147-A177-3AD203B41FA5}">
+                      <a16:colId xmlns:a16="http://schemas.microsoft.com/office/drawing/2014/main" val="20000"/>
+                    </a:ext>
+                  </a:extLst>
+                </a:gridCol>
+                <a:gridCol w="2103120">
+                  <a:extLst>
+                    <a:ext uri="{9D8B030D-6E8A-4147-A177-3AD203B41FA5}">
+                      <a16:colId xmlns:a16="http://schemas.microsoft.com/office/drawing/2014/main" val="20001"/>
+                    </a:ext>
+                  </a:extLst>
+                </a:gridCol>
+                <a:gridCol w="2505456">
+                  <a:extLst>
+                    <a:ext uri="{9D8B030D-6E8A-4147-A177-3AD203B41FA5}">
+                      <a16:colId xmlns:a16="http://schemas.microsoft.com/office/drawing/2014/main" val="20002"/>
+                    </a:ext>
+                  </a:extLst>
+                </a:gridCol>
+                <a:gridCol w="2505456">
+                  <a:extLst>
+                    <a:ext uri="{9D8B030D-6E8A-4147-A177-3AD203B41FA5}">
+                      <a16:colId xmlns:a16="http://schemas.microsoft.com/office/drawing/2014/main" val="20003"/>
+                    </a:ext>
+                  </a:extLst>
+                </a:gridCol>
+                <a:gridCol w="2505456">
+                  <a:extLst>
+                    <a:ext uri="{9D8B030D-6E8A-4147-A177-3AD203B41FA5}">
+                      <a16:colId xmlns:a16="http://schemas.microsoft.com/office/drawing/2014/main" val="20004"/>
+                    </a:ext>
+                  </a:extLst>
+                </a:gridCol>
               </a:tblGrid>
               <a:tr h="256032">
                 <a:tc>
@@ -9055,6 +9205,11 @@
                     </a:solidFill>
                   </a:tcPr>
                 </a:tc>
+                <a:extLst>
+                  <a:ext uri="{0D108BD9-81ED-4DB2-BD59-A6C34878D82A}">
+                    <a16:rowId xmlns:a16="http://schemas.microsoft.com/office/drawing/2014/main" val="10000"/>
+                  </a:ext>
+                </a:extLst>
               </a:tr>
               <a:tr h="256032">
                 <a:tc>
@@ -9172,6 +9327,11 @@
                     </a:solidFill>
                   </a:tcPr>
                 </a:tc>
+                <a:extLst>
+                  <a:ext uri="{0D108BD9-81ED-4DB2-BD59-A6C34878D82A}">
+                    <a16:rowId xmlns:a16="http://schemas.microsoft.com/office/drawing/2014/main" val="10001"/>
+                  </a:ext>
+                </a:extLst>
               </a:tr>
               <a:tr h="256032">
                 <a:tc>
@@ -9272,6 +9432,7 @@
                     <a:lstStyle/>
                     <a:p>
                       <a:pPr algn="ctr"/>
+                      <a:endParaRPr/>
                     </a:p>
                   </a:txBody>
                   <a:tcPr marT="22860" marB="22860">
@@ -9280,6 +9441,11 @@
                     </a:solidFill>
                   </a:tcPr>
                 </a:tc>
+                <a:extLst>
+                  <a:ext uri="{0D108BD9-81ED-4DB2-BD59-A6C34878D82A}">
+                    <a16:rowId xmlns:a16="http://schemas.microsoft.com/office/drawing/2014/main" val="10002"/>
+                  </a:ext>
+                </a:extLst>
               </a:tr>
               <a:tr h="256032">
                 <a:tc>
@@ -9357,6 +9523,7 @@
                     <a:lstStyle/>
                     <a:p>
                       <a:pPr algn="ctr"/>
+                      <a:endParaRPr/>
                     </a:p>
                   </a:txBody>
                   <a:tcPr marT="22860" marB="22860">
@@ -9371,6 +9538,7 @@
                     <a:lstStyle/>
                     <a:p>
                       <a:pPr algn="ctr"/>
+                      <a:endParaRPr/>
                     </a:p>
                   </a:txBody>
                   <a:tcPr marT="22860" marB="22860">
@@ -9379,6 +9547,11 @@
                     </a:solidFill>
                   </a:tcPr>
                 </a:tc>
+                <a:extLst>
+                  <a:ext uri="{0D108BD9-81ED-4DB2-BD59-A6C34878D82A}">
+                    <a16:rowId xmlns:a16="http://schemas.microsoft.com/office/drawing/2014/main" val="10003"/>
+                  </a:ext>
+                </a:extLst>
               </a:tr>
               <a:tr h="256032">
                 <a:tc>
@@ -9433,6 +9606,7 @@
                     <a:lstStyle/>
                     <a:p>
                       <a:pPr algn="ctr"/>
+                      <a:endParaRPr/>
                     </a:p>
                   </a:txBody>
                   <a:tcPr marT="22860" marB="22860">
@@ -9447,6 +9621,7 @@
                     <a:lstStyle/>
                     <a:p>
                       <a:pPr algn="ctr"/>
+                      <a:endParaRPr/>
                     </a:p>
                   </a:txBody>
                   <a:tcPr marT="22860" marB="22860">
@@ -9461,6 +9636,7 @@
                     <a:lstStyle/>
                     <a:p>
                       <a:pPr algn="ctr"/>
+                      <a:endParaRPr/>
                     </a:p>
                   </a:txBody>
                   <a:tcPr marT="22860" marB="22860">
@@ -9469,6 +9645,11 @@
                     </a:solidFill>
                   </a:tcPr>
                 </a:tc>
+                <a:extLst>
+                  <a:ext uri="{0D108BD9-81ED-4DB2-BD59-A6C34878D82A}">
+                    <a16:rowId xmlns:a16="http://schemas.microsoft.com/office/drawing/2014/main" val="10004"/>
+                  </a:ext>
+                </a:extLst>
               </a:tr>
             </a:tbl>
           </a:graphicData>
@@ -9483,7 +9664,7 @@
 </file>
 
 <file path=ppt/slides/slide7.xml><?xml version="1.0" encoding="utf-8"?>
-<p:sld xmlns:a="http://schemas.openxmlformats.org/drawingml/2006/main" xmlns:p="http://schemas.openxmlformats.org/presentationml/2006/main" xmlns:r="http://schemas.openxmlformats.org/officeDocument/2006/relationships">
+<p:sld xmlns:a="http://schemas.openxmlformats.org/drawingml/2006/main" xmlns:r="http://schemas.openxmlformats.org/officeDocument/2006/relationships" xmlns:p="http://schemas.openxmlformats.org/presentationml/2006/main">
   <p:cSld>
     <p:bg>
       <p:bgPr>
@@ -9499,7 +9680,14 @@
         <p:cNvGrpSpPr/>
         <p:nvPr/>
       </p:nvGrpSpPr>
-      <p:grpSpPr/>
+      <p:grpSpPr>
+        <a:xfrm>
+          <a:off x="0" y="0"/>
+          <a:ext cx="0" cy="0"/>
+          <a:chOff x="0" y="0"/>
+          <a:chExt cx="0" cy="0"/>
+        </a:xfrm>
+      </p:grpSpPr>
       <p:sp>
         <p:nvSpPr>
           <p:cNvPr id="2" name="Rounded Rectangle 1"/>
@@ -9543,6 +9731,7 @@
           <a:lstStyle/>
           <a:p>
             <a:pPr algn="ctr"/>
+            <a:endParaRPr/>
           </a:p>
         </p:txBody>
       </p:sp>
@@ -9589,6 +9778,7 @@
           <a:lstStyle/>
           <a:p>
             <a:pPr algn="ctr"/>
+            <a:endParaRPr/>
           </a:p>
         </p:txBody>
       </p:sp>
@@ -9631,6 +9821,7 @@
           <a:lstStyle/>
           <a:p>
             <a:pPr algn="ctr"/>
+            <a:endParaRPr/>
           </a:p>
         </p:txBody>
       </p:sp>
@@ -9673,6 +9864,7 @@
           <a:lstStyle/>
           <a:p>
             <a:pPr algn="ctr"/>
+            <a:endParaRPr/>
           </a:p>
         </p:txBody>
       </p:sp>
@@ -9719,6 +9911,7 @@
           <a:lstStyle/>
           <a:p>
             <a:pPr algn="ctr"/>
+            <a:endParaRPr/>
           </a:p>
         </p:txBody>
       </p:sp>
@@ -9763,6 +9956,7 @@
           <a:lstStyle/>
           <a:p>
             <a:pPr algn="ctr"/>
+            <a:endParaRPr/>
           </a:p>
         </p:txBody>
       </p:sp>
@@ -9809,6 +10003,7 @@
           <a:lstStyle/>
           <a:p>
             <a:pPr algn="ctr"/>
+            <a:endParaRPr/>
           </a:p>
         </p:txBody>
       </p:sp>
@@ -9853,6 +10048,7 @@
           <a:lstStyle/>
           <a:p>
             <a:pPr algn="ctr"/>
+            <a:endParaRPr/>
           </a:p>
         </p:txBody>
       </p:sp>
@@ -9873,14 +10069,14 @@
           <a:noFill/>
         </p:spPr>
         <p:txBody>
-          <a:bodyPr wrap="none" lIns="0" rIns="0" tIns="0" bIns="0" anchor="t">
+          <a:bodyPr wrap="none" lIns="0" tIns="0" rIns="0" bIns="0" anchor="t">
             <a:spAutoFit/>
           </a:bodyPr>
           <a:lstStyle/>
           <a:p>
             <a:pPr algn="l"/>
             <a:r>
-              <a:rPr b="1" sz="1050" i="0" u="none">
+              <a:rPr sz="1050" b="1" i="0" u="none">
                 <a:solidFill>
                   <a:srgbClr val="E11D48"/>
                 </a:solidFill>
@@ -9908,7 +10104,7 @@
           <a:noFill/>
         </p:spPr>
         <p:txBody>
-          <a:bodyPr wrap="none" lIns="0" rIns="0" tIns="0" bIns="0" anchor="t">
+          <a:bodyPr wrap="none" lIns="0" tIns="0" rIns="0" bIns="0" anchor="t">
             <a:spAutoFit/>
           </a:bodyPr>
           <a:lstStyle/>
@@ -9919,7 +10115,7 @@
               </a:lnSpc>
             </a:pPr>
             <a:r>
-              <a:rPr b="1" sz="2550" i="0" u="none">
+              <a:rPr sz="2550" b="1" i="0" u="none">
                 <a:solidFill>
                   <a:srgbClr val="0F172A"/>
                 </a:solidFill>
@@ -9947,14 +10143,14 @@
           <a:noFill/>
         </p:spPr>
         <p:txBody>
-          <a:bodyPr wrap="none" lIns="0" rIns="0" tIns="0" bIns="0" anchor="t">
+          <a:bodyPr wrap="none" lIns="0" tIns="0" rIns="0" bIns="0" anchor="t">
             <a:spAutoFit/>
           </a:bodyPr>
           <a:lstStyle/>
           <a:p>
             <a:pPr algn="l"/>
             <a:r>
-              <a:rPr b="0" sz="1500" i="0" u="none">
+              <a:rPr sz="1500" b="0" i="0" u="none">
                 <a:solidFill>
                   <a:srgbClr val="64748B"/>
                 </a:solidFill>
@@ -9963,7 +10159,7 @@
               <a:t>f(t) = P(t) − 100 = 0 · |Ea| &lt; 10⁻⁴ % (error relativo porcentual aproximado)</a:t>
             </a:r>
             <a:br>
-              <a:rPr b="0" sz="1500" i="0" u="none">
+              <a:rPr sz="1500" b="0" i="0" u="none">
                 <a:solidFill>
                   <a:srgbClr val="64748B"/>
                 </a:solidFill>
@@ -9971,7 +10167,7 @@
               </a:rPr>
             </a:br>
             <a:r>
-              <a:rPr b="0" sz="1500" i="0" u="none">
+              <a:rPr sz="1500" b="0" i="0" u="none">
                 <a:solidFill>
                   <a:srgbClr val="64748B"/>
                 </a:solidFill>
@@ -9980,7 +10176,7 @@
               <a:t>f(35) = −0,3978 &lt; 0 &lt; f(36) = 2,7381</a:t>
             </a:r>
             <a:br>
-              <a:rPr b="0" sz="1500" i="0" u="none">
+              <a:rPr sz="1500" b="0" i="0" u="none">
                 <a:solidFill>
                   <a:srgbClr val="64748B"/>
                 </a:solidFill>
@@ -9988,7 +10184,7 @@
               </a:rPr>
             </a:br>
             <a:r>
-              <a:rPr b="0" sz="1500" i="0" u="none">
+              <a:rPr sz="1500" b="0" i="0" u="none">
                 <a:solidFill>
                   <a:srgbClr val="64748B"/>
                 </a:solidFill>
@@ -10016,29 +10212,20 @@
           <a:noFill/>
         </p:spPr>
         <p:txBody>
-          <a:bodyPr wrap="none" lIns="0" rIns="0" tIns="0" bIns="0" anchor="t">
+          <a:bodyPr wrap="none" lIns="0" tIns="0" rIns="0" bIns="0" anchor="t">
             <a:spAutoFit/>
           </a:bodyPr>
           <a:lstStyle/>
           <a:p>
             <a:pPr algn="l"/>
             <a:r>
-              <a:rPr b="0" sz="1350" i="0" u="none">
+              <a:rPr sz="1350" b="0" i="0" u="none">
                 <a:solidFill>
                   <a:srgbClr val="334155"/>
                 </a:solidFill>
                 <a:latin typeface="Plus Jakarta Sans"/>
               </a:rPr>
               <a:t>Intervalo inicial: [35; 36]</a:t>
-            </a:r>
-            <a:r>
-              <a:rPr b="1" sz="1350" i="0" u="none">
-                <a:solidFill>
-                  <a:srgbClr val="334155"/>
-                </a:solidFill>
-                <a:latin typeface="Plus Jakarta Sans"/>
-              </a:rPr>
-              <a:t/>
             </a:r>
           </a:p>
         </p:txBody>
@@ -10060,14 +10247,14 @@
           <a:noFill/>
         </p:spPr>
         <p:txBody>
-          <a:bodyPr wrap="none" lIns="0" rIns="0" tIns="0" bIns="0" anchor="t">
+          <a:bodyPr wrap="none" lIns="0" tIns="0" rIns="0" bIns="0" anchor="t">
             <a:spAutoFit/>
           </a:bodyPr>
           <a:lstStyle/>
           <a:p>
             <a:pPr algn="l"/>
             <a:r>
-              <a:rPr b="0" sz="1400" i="0" u="none">
+              <a:rPr sz="1400" b="0" i="0" u="none">
                 <a:solidFill>
                   <a:srgbClr val="475569"/>
                 </a:solidFill>
@@ -10095,29 +10282,20 @@
           <a:noFill/>
         </p:spPr>
         <p:txBody>
-          <a:bodyPr wrap="none" lIns="0" rIns="0" tIns="0" bIns="0" anchor="t">
+          <a:bodyPr wrap="none" lIns="0" tIns="0" rIns="0" bIns="0" anchor="t">
             <a:spAutoFit/>
           </a:bodyPr>
           <a:lstStyle/>
           <a:p>
             <a:pPr algn="l"/>
             <a:r>
-              <a:rPr b="0" sz="1350" i="0" u="none">
+              <a:rPr sz="1350" b="0" i="0" u="none">
                 <a:solidFill>
                   <a:srgbClr val="334155"/>
                 </a:solidFill>
                 <a:latin typeface="Plus Jakarta Sans"/>
               </a:rPr>
               <a:t>Semilla inicial: t₀ = 35 semanas</a:t>
-            </a:r>
-            <a:r>
-              <a:rPr b="1" sz="1350" i="0" u="none">
-                <a:solidFill>
-                  <a:srgbClr val="334155"/>
-                </a:solidFill>
-                <a:latin typeface="Plus Jakarta Sans"/>
-              </a:rPr>
-              <a:t/>
             </a:r>
           </a:p>
         </p:txBody>
@@ -10139,14 +10317,14 @@
           <a:noFill/>
         </p:spPr>
         <p:txBody>
-          <a:bodyPr wrap="none" lIns="0" rIns="0" tIns="0" bIns="0" anchor="t">
+          <a:bodyPr wrap="none" lIns="0" tIns="0" rIns="0" bIns="0" anchor="t">
             <a:spAutoFit/>
           </a:bodyPr>
           <a:lstStyle/>
           <a:p>
             <a:pPr algn="l"/>
             <a:r>
-              <a:rPr b="0" sz="1400" i="0" u="none">
+              <a:rPr sz="1400" b="0" i="0" u="none">
                 <a:solidFill>
                   <a:srgbClr val="475569"/>
                 </a:solidFill>
@@ -10174,14 +10352,14 @@
           <a:noFill/>
         </p:spPr>
         <p:txBody>
-          <a:bodyPr wrap="none" lIns="0" rIns="0" tIns="0" bIns="0" anchor="t">
+          <a:bodyPr wrap="none" lIns="0" tIns="0" rIns="0" bIns="0" anchor="t">
             <a:spAutoFit/>
           </a:bodyPr>
           <a:lstStyle/>
           <a:p>
             <a:pPr algn="l"/>
             <a:r>
-              <a:rPr b="1" sz="1800" i="0" u="none">
+              <a:rPr sz="1800" b="1" i="0" u="none">
                 <a:solidFill>
                   <a:srgbClr val="0F172A"/>
                 </a:solidFill>
@@ -10209,14 +10387,14 @@
           <a:noFill/>
         </p:spPr>
         <p:txBody>
-          <a:bodyPr wrap="square" lIns="0" rIns="0" tIns="0" bIns="0" anchor="t">
+          <a:bodyPr wrap="square" lIns="0" tIns="0" rIns="0" bIns="0" anchor="t">
             <a:spAutoFit/>
           </a:bodyPr>
           <a:lstStyle/>
           <a:p>
             <a:pPr algn="l"/>
             <a:r>
-              <a:rPr b="1" sz="1050" i="0" u="none">
+              <a:rPr sz="1050" b="1" i="0" u="none">
                 <a:solidFill>
                   <a:srgbClr val="475569"/>
                 </a:solidFill>
@@ -10244,14 +10422,14 @@
           <a:noFill/>
         </p:spPr>
         <p:txBody>
-          <a:bodyPr wrap="none" lIns="0" rIns="0" tIns="0" bIns="0" anchor="t">
+          <a:bodyPr wrap="none" lIns="0" tIns="0" rIns="0" bIns="0" anchor="t">
             <a:spAutoFit/>
           </a:bodyPr>
           <a:lstStyle/>
           <a:p>
             <a:pPr algn="l"/>
             <a:r>
-              <a:rPr b="1" sz="3600" i="0" u="none">
+              <a:rPr sz="3600" b="1" i="0" u="none">
                 <a:solidFill>
                   <a:srgbClr val="0284C7"/>
                 </a:solidFill>
@@ -10279,14 +10457,14 @@
           <a:noFill/>
         </p:spPr>
         <p:txBody>
-          <a:bodyPr wrap="none" lIns="0" rIns="0" tIns="0" bIns="0" anchor="t">
+          <a:bodyPr wrap="none" lIns="0" tIns="0" rIns="0" bIns="0" anchor="t">
             <a:spAutoFit/>
           </a:bodyPr>
           <a:lstStyle/>
           <a:p>
             <a:pPr algn="l"/>
             <a:r>
-              <a:rPr b="1" sz="1350" i="0" u="none">
+              <a:rPr sz="1350" b="1" i="0" u="none">
                 <a:solidFill>
                   <a:srgbClr val="64748B"/>
                 </a:solidFill>
@@ -10314,14 +10492,14 @@
           <a:noFill/>
         </p:spPr>
         <p:txBody>
-          <a:bodyPr wrap="none" lIns="0" rIns="0" tIns="0" bIns="0" anchor="t">
+          <a:bodyPr wrap="none" lIns="0" tIns="0" rIns="0" bIns="0" anchor="t">
             <a:spAutoFit/>
           </a:bodyPr>
           <a:lstStyle/>
           <a:p>
             <a:pPr algn="l"/>
             <a:r>
-              <a:rPr b="1" sz="1350" i="0" u="none">
+              <a:rPr sz="1350" b="1" i="0" u="none">
                 <a:solidFill>
                   <a:srgbClr val="0F172A"/>
                 </a:solidFill>
@@ -10349,14 +10527,14 @@
           <a:noFill/>
         </p:spPr>
         <p:txBody>
-          <a:bodyPr wrap="none" lIns="0" rIns="0" tIns="0" bIns="0" anchor="t">
+          <a:bodyPr wrap="none" lIns="0" tIns="0" rIns="0" bIns="0" anchor="t">
             <a:spAutoFit/>
           </a:bodyPr>
           <a:lstStyle/>
           <a:p>
             <a:pPr algn="l"/>
             <a:r>
-              <a:rPr b="1" sz="1800" i="0" u="none">
+              <a:rPr sz="1800" b="1" i="0" u="none">
                 <a:solidFill>
                   <a:srgbClr val="BE123C"/>
                 </a:solidFill>
@@ -10384,14 +10562,14 @@
           <a:noFill/>
         </p:spPr>
         <p:txBody>
-          <a:bodyPr wrap="square" lIns="0" rIns="0" tIns="0" bIns="0" anchor="t">
+          <a:bodyPr wrap="square" lIns="0" tIns="0" rIns="0" bIns="0" anchor="t">
             <a:spAutoFit/>
           </a:bodyPr>
           <a:lstStyle/>
           <a:p>
             <a:pPr algn="l"/>
             <a:r>
-              <a:rPr b="1" sz="1050" i="0" u="none">
+              <a:rPr sz="1050" b="1" i="0" u="none">
                 <a:solidFill>
                   <a:srgbClr val="9F1239"/>
                 </a:solidFill>
@@ -10419,14 +10597,14 @@
           <a:noFill/>
         </p:spPr>
         <p:txBody>
-          <a:bodyPr wrap="none" lIns="0" rIns="0" tIns="0" bIns="0" anchor="t">
+          <a:bodyPr wrap="none" lIns="0" tIns="0" rIns="0" bIns="0" anchor="t">
             <a:spAutoFit/>
           </a:bodyPr>
           <a:lstStyle/>
           <a:p>
             <a:pPr algn="l"/>
             <a:r>
-              <a:rPr b="1" sz="3600" i="0" u="none">
+              <a:rPr sz="3600" b="1" i="0" u="none">
                 <a:solidFill>
                   <a:srgbClr val="E11D48"/>
                 </a:solidFill>
@@ -10454,14 +10632,14 @@
           <a:noFill/>
         </p:spPr>
         <p:txBody>
-          <a:bodyPr wrap="none" lIns="0" rIns="0" tIns="0" bIns="0" anchor="t">
+          <a:bodyPr wrap="none" lIns="0" tIns="0" rIns="0" bIns="0" anchor="t">
             <a:spAutoFit/>
           </a:bodyPr>
           <a:lstStyle/>
           <a:p>
             <a:pPr algn="l"/>
             <a:r>
-              <a:rPr b="1" sz="1350" i="0" u="none">
+              <a:rPr sz="1350" b="1" i="0" u="none">
                 <a:solidFill>
                   <a:srgbClr val="BE123C"/>
                 </a:solidFill>
@@ -10489,14 +10667,14 @@
           <a:noFill/>
         </p:spPr>
         <p:txBody>
-          <a:bodyPr wrap="none" lIns="0" rIns="0" tIns="0" bIns="0" anchor="t">
+          <a:bodyPr wrap="none" lIns="0" tIns="0" rIns="0" bIns="0" anchor="t">
             <a:spAutoFit/>
           </a:bodyPr>
           <a:lstStyle/>
           <a:p>
             <a:pPr algn="l"/>
             <a:r>
-              <a:rPr b="1" sz="1350" i="0" u="none">
+              <a:rPr sz="1350" b="1" i="0" u="none">
                 <a:solidFill>
                   <a:srgbClr val="9F1239"/>
                 </a:solidFill>
@@ -10509,7 +10687,7 @@
       </p:sp>
       <p:sp>
         <p:nvSpPr>
-          <p:cNvPr id="12" name="TextBox 11"/>
+          <p:cNvPr id="27" name="TextBox 11"/>
           <p:cNvSpPr txBox="1"/>
           <p:nvPr/>
         </p:nvSpPr>
@@ -10524,14 +10702,14 @@
           <a:noFill/>
         </p:spPr>
         <p:txBody>
-          <a:bodyPr wrap="none" lIns="0" rIns="0" tIns="0" bIns="0" anchor="t">
+          <a:bodyPr wrap="none" lIns="0" tIns="0" rIns="0" bIns="0" anchor="t">
             <a:spAutoFit/>
           </a:bodyPr>
           <a:lstStyle/>
           <a:p>
             <a:pPr algn="l"/>
             <a:r>
-              <a:rPr b="0" sz="2300" i="0" u="none">
+              <a:rPr sz="2300" b="0" i="0" u="none">
                 <a:solidFill>
                   <a:srgbClr val="64748B"/>
                 </a:solidFill>
@@ -10551,7 +10729,7 @@
 </file>
 
 <file path=ppt/slides/slide8.xml><?xml version="1.0" encoding="utf-8"?>
-<p:sld xmlns:a="http://schemas.openxmlformats.org/drawingml/2006/main" xmlns:p="http://schemas.openxmlformats.org/presentationml/2006/main" xmlns:r="http://schemas.openxmlformats.org/officeDocument/2006/relationships">
+<p:sld xmlns:a="http://schemas.openxmlformats.org/drawingml/2006/main" xmlns:r="http://schemas.openxmlformats.org/officeDocument/2006/relationships" xmlns:p="http://schemas.openxmlformats.org/presentationml/2006/main">
   <p:cSld>
     <p:bg>
       <p:bgPr>
@@ -10567,7 +10745,14 @@
         <p:cNvGrpSpPr/>
         <p:nvPr/>
       </p:nvGrpSpPr>
-      <p:grpSpPr/>
+      <p:grpSpPr>
+        <a:xfrm>
+          <a:off x="0" y="0"/>
+          <a:ext cx="0" cy="0"/>
+          <a:chOff x="0" y="0"/>
+          <a:chExt cx="0" cy="0"/>
+        </a:xfrm>
+      </p:grpSpPr>
       <p:sp>
         <p:nvSpPr>
           <p:cNvPr id="3" name="TextBox 2"/>
@@ -10585,14 +10770,14 @@
           <a:noFill/>
         </p:spPr>
         <p:txBody>
-          <a:bodyPr wrap="none" lIns="0" rIns="0" tIns="0" bIns="0" anchor="t">
+          <a:bodyPr wrap="none" lIns="0" tIns="0" rIns="0" bIns="0" anchor="t">
             <a:spAutoFit/>
           </a:bodyPr>
           <a:lstStyle/>
           <a:p>
             <a:pPr algn="l"/>
             <a:r>
-              <a:rPr b="1" sz="1200" i="0" u="none">
+              <a:rPr sz="1200" b="1" i="0" u="none">
                 <a:solidFill>
                   <a:srgbClr val="0284C7"/>
                 </a:solidFill>
@@ -10620,14 +10805,14 @@
           <a:noFill/>
         </p:spPr>
         <p:txBody>
-          <a:bodyPr wrap="none" lIns="0" rIns="0" tIns="0" bIns="0" anchor="t">
+          <a:bodyPr wrap="none" lIns="0" tIns="0" rIns="0" bIns="0" anchor="t">
             <a:spAutoFit/>
           </a:bodyPr>
           <a:lstStyle/>
           <a:p>
             <a:pPr algn="l"/>
             <a:r>
-              <a:rPr b="1" sz="1200" i="0" u="none">
+              <a:rPr sz="1200" b="1" i="0" u="none">
                 <a:solidFill>
                   <a:srgbClr val="E11D48"/>
                 </a:solidFill>
@@ -10655,14 +10840,14 @@
           <a:noFill/>
         </p:spPr>
         <p:txBody>
-          <a:bodyPr wrap="none" lIns="0" rIns="0" tIns="0" bIns="0" anchor="t">
+          <a:bodyPr wrap="none" lIns="0" tIns="0" rIns="0" bIns="0" anchor="t">
             <a:spAutoFit/>
           </a:bodyPr>
           <a:lstStyle/>
           <a:p>
             <a:pPr algn="l"/>
             <a:r>
-              <a:rPr b="1" sz="1050" i="0" u="none">
+              <a:rPr sz="1050" b="1" i="0" u="none">
                 <a:solidFill>
                   <a:srgbClr val="E11D48"/>
                 </a:solidFill>
@@ -10690,7 +10875,7 @@
           <a:noFill/>
         </p:spPr>
         <p:txBody>
-          <a:bodyPr wrap="none" lIns="0" rIns="0" tIns="0" bIns="0" anchor="t">
+          <a:bodyPr wrap="none" lIns="0" tIns="0" rIns="0" bIns="0" anchor="t">
             <a:spAutoFit/>
           </a:bodyPr>
           <a:lstStyle/>
@@ -10701,7 +10886,7 @@
               </a:lnSpc>
             </a:pPr>
             <a:r>
-              <a:rPr b="1" sz="2550" i="0" u="none">
+              <a:rPr sz="2550" b="1" i="0" u="none">
                 <a:solidFill>
                   <a:srgbClr val="0F172A"/>
                 </a:solidFill>
@@ -10721,7 +10906,7 @@
           <p:nvPr/>
         </p:nvPicPr>
         <p:blipFill>
-          <a:blip r:embed="rId3"/>
+          <a:blip r:embed="rId2"/>
           <a:stretch>
             <a:fillRect/>
           </a:stretch>
@@ -10745,7 +10930,7 @@
 </file>
 
 <file path=ppt/slides/slide9.xml><?xml version="1.0" encoding="utf-8"?>
-<p:sld xmlns:a="http://schemas.openxmlformats.org/drawingml/2006/main" xmlns:p="http://schemas.openxmlformats.org/presentationml/2006/main" xmlns:r="http://schemas.openxmlformats.org/officeDocument/2006/relationships">
+<p:sld xmlns:a="http://schemas.openxmlformats.org/drawingml/2006/main" xmlns:r="http://schemas.openxmlformats.org/officeDocument/2006/relationships" xmlns:p="http://schemas.openxmlformats.org/presentationml/2006/main">
   <p:cSld>
     <p:bg>
       <p:bgPr>
@@ -10761,7 +10946,14 @@
         <p:cNvGrpSpPr/>
         <p:nvPr/>
       </p:nvGrpSpPr>
-      <p:grpSpPr/>
+      <p:grpSpPr>
+        <a:xfrm>
+          <a:off x="0" y="0"/>
+          <a:ext cx="0" cy="0"/>
+          <a:chOff x="0" y="0"/>
+          <a:chExt cx="0" cy="0"/>
+        </a:xfrm>
+      </p:grpSpPr>
       <p:sp>
         <p:nvSpPr>
           <p:cNvPr id="2" name="Rounded Rectangle 1"/>
@@ -10805,6 +10997,7 @@
           <a:lstStyle/>
           <a:p>
             <a:pPr algn="ctr"/>
+            <a:endParaRPr/>
           </a:p>
         </p:txBody>
       </p:sp>
@@ -10851,6 +11044,7 @@
           <a:lstStyle/>
           <a:p>
             <a:pPr algn="ctr"/>
+            <a:endParaRPr/>
           </a:p>
         </p:txBody>
       </p:sp>
@@ -10871,14 +11065,14 @@
           <a:noFill/>
         </p:spPr>
         <p:txBody>
-          <a:bodyPr wrap="none" lIns="0" rIns="0" tIns="0" bIns="0" anchor="t">
+          <a:bodyPr wrap="none" lIns="0" tIns="0" rIns="0" bIns="0" anchor="t">
             <a:spAutoFit/>
           </a:bodyPr>
           <a:lstStyle/>
           <a:p>
             <a:pPr algn="l"/>
             <a:r>
-              <a:rPr b="1" sz="1050" i="0" u="none">
+              <a:rPr sz="1050" b="1" i="0" u="none">
                 <a:solidFill>
                   <a:srgbClr val="7C3AED"/>
                 </a:solidFill>
@@ -10906,7 +11100,7 @@
           <a:noFill/>
         </p:spPr>
         <p:txBody>
-          <a:bodyPr wrap="none" lIns="0" rIns="0" tIns="0" bIns="0" anchor="t">
+          <a:bodyPr wrap="none" lIns="0" tIns="0" rIns="0" bIns="0" anchor="t">
             <a:spAutoFit/>
           </a:bodyPr>
           <a:lstStyle/>
@@ -10917,7 +11111,7 @@
               </a:lnSpc>
             </a:pPr>
             <a:r>
-              <a:rPr b="1" sz="2800" i="0" u="none">
+              <a:rPr sz="2800" b="1" i="0" u="none">
                 <a:solidFill>
                   <a:srgbClr val="0F172A"/>
                 </a:solidFill>
@@ -10945,14 +11139,14 @@
           <a:noFill/>
         </p:spPr>
         <p:txBody>
-          <a:bodyPr wrap="none" lIns="0" rIns="0" tIns="0" bIns="0" anchor="t">
+          <a:bodyPr wrap="none" lIns="0" tIns="0" rIns="0" bIns="0" anchor="t">
             <a:spAutoFit/>
           </a:bodyPr>
           <a:lstStyle/>
           <a:p>
             <a:pPr algn="l"/>
             <a:r>
-              <a:rPr b="1" sz="2100" i="0" u="none">
+              <a:rPr sz="2100" b="1" i="0" u="none">
                 <a:solidFill>
                   <a:srgbClr val="6B21A8"/>
                 </a:solidFill>
@@ -10961,7 +11155,7 @@
               <a:t>≈ 372 TB</a:t>
             </a:r>
             <a:br>
-              <a:rPr b="1" sz="2100" i="0" u="none">
+              <a:rPr sz="2100" b="1" i="0" u="none">
                 <a:solidFill>
                   <a:srgbClr val="6B21A8"/>
                 </a:solidFill>
@@ -10969,7 +11163,7 @@
               </a:rPr>
             </a:br>
             <a:r>
-              <a:rPr b="1" sz="2100" i="0" u="none">
+              <a:rPr sz="2100" b="1" i="0" u="none">
                 <a:solidFill>
                   <a:srgbClr val="6B21A8"/>
                 </a:solidFill>
@@ -10997,14 +11191,14 @@
           <a:noFill/>
         </p:spPr>
         <p:txBody>
-          <a:bodyPr wrap="none" lIns="0" rIns="0" tIns="0" bIns="0" anchor="t">
+          <a:bodyPr wrap="none" lIns="0" tIns="0" rIns="0" bIns="0" anchor="t">
             <a:spAutoFit/>
           </a:bodyPr>
           <a:lstStyle/>
           <a:p>
             <a:pPr algn="l"/>
             <a:r>
-              <a:rPr b="1" sz="2300" i="0" u="none">
+              <a:rPr sz="2300" b="1" i="0" u="none">
                 <a:solidFill>
                   <a:srgbClr val="991B1B"/>
                 </a:solidFill>
@@ -11013,7 +11207,7 @@
               <a:t>≈ 205 Mbps</a:t>
             </a:r>
             <a:br>
-              <a:rPr b="1" sz="2300" i="0" u="none">
+              <a:rPr sz="2300" b="1" i="0" u="none">
                 <a:solidFill>
                   <a:srgbClr val="991B1B"/>
                 </a:solidFill>
@@ -11021,7 +11215,7 @@
               </a:rPr>
             </a:br>
             <a:r>
-              <a:rPr b="1" sz="2300" i="0" u="none">
+              <a:rPr sz="2300" b="1" i="0" u="none">
                 <a:solidFill>
                   <a:srgbClr val="991B1B"/>
                 </a:solidFill>
@@ -11049,14 +11243,14 @@
           <a:noFill/>
         </p:spPr>
         <p:txBody>
-          <a:bodyPr wrap="none" lIns="0" rIns="0" tIns="0" bIns="0" anchor="t">
+          <a:bodyPr wrap="none" lIns="0" tIns="0" rIns="0" bIns="0" anchor="t">
             <a:spAutoFit/>
           </a:bodyPr>
           <a:lstStyle/>
           <a:p>
             <a:pPr algn="l"/>
             <a:r>
-              <a:rPr b="1" sz="1700" i="0" u="none">
+              <a:rPr sz="1700" b="1" i="0" u="none">
                 <a:solidFill>
                   <a:srgbClr val="8B5CF6"/>
                 </a:solidFill>
@@ -11065,7 +11259,7 @@
               <a:t>Volumen = reproducciones × 160 kbps × 186 s ÷ 8 → 3,72 MB por reproducción</a:t>
             </a:r>
             <a:br>
-              <a:rPr b="1" sz="1700" i="0" u="none">
+              <a:rPr sz="1700" b="1" i="0" u="none">
                 <a:solidFill>
                   <a:srgbClr val="8B5CF6"/>
                 </a:solidFill>
@@ -11073,7 +11267,7 @@
               </a:rPr>
             </a:br>
             <a:r>
-              <a:rPr b="1" sz="1700" i="0" u="none">
+              <a:rPr sz="1700" b="1" i="0" u="none">
                 <a:solidFill>
                   <a:srgbClr val="8B5CF6"/>
                 </a:solidFill>
@@ -11101,14 +11295,14 @@
           <a:noFill/>
         </p:spPr>
         <p:txBody>
-          <a:bodyPr wrap="none" lIns="0" rIns="0" tIns="0" bIns="0" anchor="t">
+          <a:bodyPr wrap="none" lIns="0" tIns="0" rIns="0" bIns="0" anchor="t">
             <a:spAutoFit/>
           </a:bodyPr>
           <a:lstStyle/>
           <a:p>
             <a:pPr algn="l"/>
             <a:r>
-              <a:rPr b="1" sz="1800" i="0" u="none">
+              <a:rPr sz="1800" b="1" i="0" u="none">
                 <a:solidFill>
                   <a:srgbClr val="6D28D9"/>
                 </a:solidFill>
@@ -11117,7 +11311,7 @@
               <a:t>Al superar los 100 M (28/09/2023) se habían servido unos 372 TB;</a:t>
             </a:r>
             <a:br>
-              <a:rPr b="1" sz="1800" i="0" u="none">
+              <a:rPr sz="1800" b="1" i="0" u="none">
                 <a:solidFill>
                   <a:srgbClr val="6D28D9"/>
                 </a:solidFill>
@@ -11125,7 +11319,7 @@
               </a:rPr>
             </a:br>
             <a:r>
-              <a:rPr b="1" sz="1800" i="0" u="none">
+              <a:rPr sz="1800" b="1" i="0" u="none">
                 <a:solidFill>
                   <a:srgbClr val="6D28D9"/>
                 </a:solidFill>
@@ -11153,12 +11347,12 @@
           <a:noFill/>
         </p:spPr>
         <p:txBody>
-          <a:bodyPr wrap="square" lIns="0" rIns="0" tIns="0" bIns="0" anchor="t"/>
+          <a:bodyPr wrap="square" lIns="0" tIns="0" rIns="0" bIns="0" anchor="t"/>
           <a:lstStyle/>
           <a:p>
             <a:pPr algn="l"/>
             <a:r>
-              <a:rPr b="0" sz="1700" i="0" u="none">
+              <a:rPr sz="1700" b="0" i="0" u="none">
                 <a:solidFill>
                   <a:srgbClr val="475569"/>
                 </a:solidFill>

--- a/ENTREGABLES/Presentacion_Rosa_Pastel_Metodos_Numericos.pptx
+++ b/ENTREGABLES/Presentacion_Rosa_Pastel_Metodos_Numericos.pptx
@@ -3402,7 +3402,7 @@
                 </a:solidFill>
                 <a:latin typeface="Plus Jakarta Sans"/>
               </a:rPr>
-              <a:t>Comisión 46324</a:t>
+              <a:t>Comisión G</a:t>
             </a:r>
           </a:p>
         </p:txBody>
